--- a/docs/test/stress/e2e-outputs/trading_case09_sinsa_value_add_basic.pptx
+++ b/docs/test/stress/e2e-outputs/trading_case09_sinsa_value_add_basic.pptx
@@ -3998,7 +3998,119 @@
       </p:sp>
       <p:sp>
         <p:nvSpPr>
-          <p:cNvPr id="19" name="Text 17"/>
+          <p:cNvPr id="19" name="Shape 17"/>
+          <p:cNvSpPr/>
+          <p:nvPr/>
+        </p:nvSpPr>
+        <p:spPr>
+          <a:xfrm>
+            <a:off x="566928" y="3611880"/>
+            <a:ext cx="5437480" cy="1097280"/>
+          </a:xfrm>
+          <a:prstGeom prst="roundRect">
+            <a:avLst>
+              <a:gd name="adj" fmla="val 5000"/>
+            </a:avLst>
+          </a:prstGeom>
+          <a:solidFill>
+            <a:srgbClr val="DBEAFE"/>
+          </a:solidFill>
+          <a:ln/>
+        </p:spPr>
+      </p:sp>
+      <p:sp>
+        <p:nvSpPr>
+          <p:cNvPr id="20" name="Shape 18"/>
+          <p:cNvSpPr/>
+          <p:nvPr/>
+        </p:nvSpPr>
+        <p:spPr>
+          <a:xfrm>
+            <a:off x="566928" y="3666744"/>
+            <a:ext cx="36576" cy="987552"/>
+          </a:xfrm>
+          <a:prstGeom prst="rect">
+            <a:avLst/>
+          </a:prstGeom>
+          <a:solidFill>
+            <a:srgbClr val="1D4ED8"/>
+          </a:solidFill>
+          <a:ln/>
+        </p:spPr>
+      </p:sp>
+      <p:sp>
+        <p:nvSpPr>
+          <p:cNvPr id="21" name="Text 19"/>
+          <p:cNvSpPr/>
+          <p:nvPr/>
+        </p:nvSpPr>
+        <p:spPr>
+          <a:xfrm>
+            <a:off x="749808" y="3721608"/>
+            <a:ext cx="5108296" cy="201168"/>
+          </a:xfrm>
+          <a:prstGeom prst="rect">
+            <a:avLst/>
+          </a:prstGeom>
+          <a:noFill/>
+          <a:ln/>
+        </p:spPr>
+        <p:txBody>
+          <a:bodyPr wrap="square" lIns="0" tIns="0" rIns="0" bIns="0" rtlCol="0" anchor="ctr"/>
+          <a:lstStyle/>
+          <a:p>
+            <a:pPr indent="0" marL="0">
+              <a:buNone/>
+            </a:pPr>
+            <a:endParaRPr lang="en-US" sz="1050" dirty="0"/>
+          </a:p>
+        </p:txBody>
+      </p:sp>
+      <p:sp>
+        <p:nvSpPr>
+          <p:cNvPr id="22" name="Text 20"/>
+          <p:cNvSpPr/>
+          <p:nvPr/>
+        </p:nvSpPr>
+        <p:spPr>
+          <a:xfrm>
+            <a:off x="749808" y="3941064"/>
+            <a:ext cx="5108296" cy="694944"/>
+          </a:xfrm>
+          <a:prstGeom prst="rect">
+            <a:avLst/>
+          </a:prstGeom>
+          <a:noFill/>
+          <a:ln/>
+        </p:spPr>
+        <p:txBody>
+          <a:bodyPr wrap="square" lIns="0" tIns="0" rIns="0" bIns="0" rtlCol="0" anchor="t"/>
+          <a:lstStyle/>
+          <a:p>
+            <a:pPr indent="0" marL="0">
+              <a:lnSpc>
+                <a:spcPct val="120000"/>
+              </a:lnSpc>
+              <a:buNone/>
+            </a:pPr>
+            <a:r>
+              <a:rPr lang="en-US" sz="930" dirty="0">
+                <a:solidFill>
+                  <a:srgbClr val="0F172A"/>
+                </a:solidFill>
+                <a:latin typeface="Pretendard" pitchFamily="34" charset="0"/>
+                <a:ea typeface="Pretendard" pitchFamily="34" charset="-122"/>
+                <a:cs typeface="Pretendard" pitchFamily="34" charset="-120"/>
+              </a:rPr>
+              <a:t>본 매물은 강남권역 대로변 입지의 우량 메디컬 테넌트 만실 운영 자산입니다.</a:t>
+            </a:r>
+            <a:endParaRPr lang="en-US" sz="930" dirty="0"/>
+          </a:p>
+        </p:txBody>
+      </p:sp>
+      <p:sp>
+        <p:nvSpPr>
+          <p:cNvPr id="23" name="Text 21"/>
           <p:cNvSpPr/>
           <p:nvPr/>
         </p:nvSpPr>
@@ -4037,7 +4149,7 @@
       </p:sp>
       <p:sp>
         <p:nvSpPr>
-          <p:cNvPr id="20" name="Shape 18"/>
+          <p:cNvPr id="24" name="Shape 22"/>
           <p:cNvSpPr/>
           <p:nvPr/>
         </p:nvSpPr>
@@ -4221,6 +4333,45 @@
         <p:spPr>
           <a:xfrm>
             <a:off x="6053328" y="1481328"/>
+            <a:ext cx="5571439" cy="237744"/>
+          </a:xfrm>
+          <a:prstGeom prst="rect">
+            <a:avLst/>
+          </a:prstGeom>
+          <a:noFill/>
+          <a:ln/>
+        </p:spPr>
+        <p:txBody>
+          <a:bodyPr wrap="square" lIns="0" tIns="0" rIns="0" bIns="0" rtlCol="0" anchor="ctr"/>
+          <a:lstStyle/>
+          <a:p>
+            <a:pPr indent="0" marL="0">
+              <a:buNone/>
+            </a:pPr>
+            <a:r>
+              <a:rPr lang="en-US" sz="1100" b="1" dirty="0">
+                <a:solidFill>
+                  <a:srgbClr val="0F172A"/>
+                </a:solidFill>
+                <a:latin typeface="Pretendard" pitchFamily="34" charset="0"/>
+                <a:ea typeface="Pretendard" pitchFamily="34" charset="-122"/>
+                <a:cs typeface="Pretendard" pitchFamily="34" charset="-120"/>
+              </a:rPr>
+              <a:t>교통 및 도로 접근성</a:t>
+            </a:r>
+            <a:endParaRPr lang="en-US" sz="1100" dirty="0"/>
+          </a:p>
+        </p:txBody>
+      </p:sp>
+      <p:sp>
+        <p:nvSpPr>
+          <p:cNvPr id="7" name="Text 4"/>
+          <p:cNvSpPr/>
+          <p:nvPr/>
+        </p:nvSpPr>
+        <p:spPr>
+          <a:xfrm>
+            <a:off x="6053328" y="1801368"/>
             <a:ext cx="2117147" cy="438912"/>
           </a:xfrm>
           <a:prstGeom prst="rect">
@@ -4248,7 +4399,7 @@
                 <a:ea typeface="Pretendard" pitchFamily="34" charset="-122"/>
                 <a:cs typeface="Pretendard" pitchFamily="34" charset="-120"/>
               </a:rPr>
-              <a:t>교통 접근성</a:t>
+              <a:t>지하철 접근성</a:t>
             </a:r>
             <a:endParaRPr lang="en-US" sz="1400" dirty="0"/>
           </a:p>
@@ -4256,13 +4407,13 @@
       </p:sp>
       <p:sp>
         <p:nvSpPr>
-          <p:cNvPr id="7" name="Text 4"/>
-          <p:cNvSpPr/>
-          <p:nvPr/>
-        </p:nvSpPr>
-        <p:spPr>
-          <a:xfrm>
-            <a:off x="8170475" y="1481328"/>
+          <p:cNvPr id="8" name="Text 5"/>
+          <p:cNvSpPr/>
+          <p:nvPr/>
+        </p:nvSpPr>
+        <p:spPr>
+          <a:xfrm>
+            <a:off x="8170475" y="1801368"/>
             <a:ext cx="3454292" cy="438912"/>
           </a:xfrm>
           <a:prstGeom prst="rect">
@@ -4290,7 +4441,7 @@
                 <a:ea typeface="Pretendard" pitchFamily="34" charset="-122"/>
                 <a:cs typeface="Pretendard" pitchFamily="34" charset="-120"/>
               </a:rPr>
-              <a:t>{"ok":true,"mocked":true,"extractedFields":{"area_signal":"역…</a:t>
+              <a:t>강남역(2호선·신분당선) 및 양재역(3호선) 더블역세권 도보 4분</a:t>
             </a:r>
             <a:endParaRPr lang="en-US" sz="1400" dirty="0"/>
           </a:p>
@@ -4298,7 +4449,542 @@
       </p:sp>
       <p:sp>
         <p:nvSpPr>
-          <p:cNvPr id="8" name="Text 5"/>
+          <p:cNvPr id="9" name="Shape 6"/>
+          <p:cNvSpPr/>
+          <p:nvPr/>
+        </p:nvSpPr>
+        <p:spPr>
+          <a:xfrm>
+            <a:off x="6053328" y="2240280"/>
+            <a:ext cx="5571439" cy="0"/>
+          </a:xfrm>
+          <a:prstGeom prst="line">
+            <a:avLst/>
+          </a:prstGeom>
+          <a:noFill/>
+          <a:ln w="3810">
+            <a:solidFill>
+              <a:srgbClr val="CBD5E1"/>
+            </a:solidFill>
+            <a:prstDash val="solid"/>
+          </a:ln>
+        </p:spPr>
+      </p:sp>
+      <p:sp>
+        <p:nvSpPr>
+          <p:cNvPr id="10" name="Text 7"/>
+          <p:cNvSpPr/>
+          <p:nvPr/>
+        </p:nvSpPr>
+        <p:spPr>
+          <a:xfrm>
+            <a:off x="6053328" y="2240280"/>
+            <a:ext cx="2117147" cy="438912"/>
+          </a:xfrm>
+          <a:prstGeom prst="rect">
+            <a:avLst/>
+          </a:prstGeom>
+          <a:noFill/>
+          <a:ln/>
+        </p:spPr>
+        <p:txBody>
+          <a:bodyPr wrap="square" lIns="0" tIns="0" rIns="0" bIns="0" rtlCol="0" anchor="ctr"/>
+          <a:lstStyle/>
+          <a:p>
+            <a:pPr indent="0" marL="0">
+              <a:lnSpc>
+                <a:spcPct val="120000"/>
+              </a:lnSpc>
+              <a:buNone/>
+            </a:pPr>
+            <a:r>
+              <a:rPr lang="en-US" sz="1400" dirty="0">
+                <a:solidFill>
+                  <a:srgbClr val="64748B"/>
+                </a:solidFill>
+                <a:latin typeface="Pretendard" pitchFamily="34" charset="0"/>
+                <a:ea typeface="Pretendard" pitchFamily="34" charset="-122"/>
+                <a:cs typeface="Pretendard" pitchFamily="34" charset="-120"/>
+              </a:rPr>
+              <a:t>도로 접면 조건</a:t>
+            </a:r>
+            <a:endParaRPr lang="en-US" sz="1400" dirty="0"/>
+          </a:p>
+        </p:txBody>
+      </p:sp>
+      <p:sp>
+        <p:nvSpPr>
+          <p:cNvPr id="11" name="Text 8"/>
+          <p:cNvSpPr/>
+          <p:nvPr/>
+        </p:nvSpPr>
+        <p:spPr>
+          <a:xfrm>
+            <a:off x="8170475" y="2240280"/>
+            <a:ext cx="3454292" cy="438912"/>
+          </a:xfrm>
+          <a:prstGeom prst="rect">
+            <a:avLst/>
+          </a:prstGeom>
+          <a:noFill/>
+          <a:ln/>
+        </p:spPr>
+        <p:txBody>
+          <a:bodyPr wrap="square" lIns="0" tIns="0" rIns="0" bIns="0" rtlCol="0" anchor="ctr"/>
+          <a:lstStyle/>
+          <a:p>
+            <a:pPr indent="0" marL="0">
+              <a:lnSpc>
+                <a:spcPct val="120000"/>
+              </a:lnSpc>
+              <a:buNone/>
+            </a:pPr>
+            <a:r>
+              <a:rPr lang="en-US" sz="1400" b="1" dirty="0">
+                <a:solidFill>
+                  <a:srgbClr val="0F172A"/>
+                </a:solidFill>
+                <a:latin typeface="Pretendard" pitchFamily="34" charset="0"/>
+                <a:ea typeface="Pretendard" pitchFamily="34" charset="-122"/>
+                <a:cs typeface="Pretendard" pitchFamily="34" charset="-120"/>
+              </a:rPr>
+              <a:t>서초대로 25m 메인 대로변 접면</a:t>
+            </a:r>
+            <a:endParaRPr lang="en-US" sz="1400" dirty="0"/>
+          </a:p>
+        </p:txBody>
+      </p:sp>
+      <p:sp>
+        <p:nvSpPr>
+          <p:cNvPr id="12" name="Shape 9"/>
+          <p:cNvSpPr/>
+          <p:nvPr/>
+        </p:nvSpPr>
+        <p:spPr>
+          <a:xfrm>
+            <a:off x="6053328" y="2679192"/>
+            <a:ext cx="5571439" cy="0"/>
+          </a:xfrm>
+          <a:prstGeom prst="line">
+            <a:avLst/>
+          </a:prstGeom>
+          <a:noFill/>
+          <a:ln w="3810">
+            <a:solidFill>
+              <a:srgbClr val="CBD5E1"/>
+            </a:solidFill>
+            <a:prstDash val="solid"/>
+          </a:ln>
+        </p:spPr>
+      </p:sp>
+      <p:sp>
+        <p:nvSpPr>
+          <p:cNvPr id="13" name="Text 10"/>
+          <p:cNvSpPr/>
+          <p:nvPr/>
+        </p:nvSpPr>
+        <p:spPr>
+          <a:xfrm>
+            <a:off x="6053328" y="2679192"/>
+            <a:ext cx="2117147" cy="438912"/>
+          </a:xfrm>
+          <a:prstGeom prst="rect">
+            <a:avLst/>
+          </a:prstGeom>
+          <a:noFill/>
+          <a:ln/>
+        </p:spPr>
+        <p:txBody>
+          <a:bodyPr wrap="square" lIns="0" tIns="0" rIns="0" bIns="0" rtlCol="0" anchor="ctr"/>
+          <a:lstStyle/>
+          <a:p>
+            <a:pPr indent="0" marL="0">
+              <a:lnSpc>
+                <a:spcPct val="120000"/>
+              </a:lnSpc>
+              <a:buNone/>
+            </a:pPr>
+            <a:r>
+              <a:rPr lang="en-US" sz="1400" dirty="0">
+                <a:solidFill>
+                  <a:srgbClr val="64748B"/>
+                </a:solidFill>
+                <a:latin typeface="Pretendard" pitchFamily="34" charset="0"/>
+                <a:ea typeface="Pretendard" pitchFamily="34" charset="-122"/>
+                <a:cs typeface="Pretendard" pitchFamily="34" charset="-120"/>
+              </a:rPr>
+              <a:t>차량 진출입</a:t>
+            </a:r>
+            <a:endParaRPr lang="en-US" sz="1400" dirty="0"/>
+          </a:p>
+        </p:txBody>
+      </p:sp>
+      <p:sp>
+        <p:nvSpPr>
+          <p:cNvPr id="14" name="Text 11"/>
+          <p:cNvSpPr/>
+          <p:nvPr/>
+        </p:nvSpPr>
+        <p:spPr>
+          <a:xfrm>
+            <a:off x="8170475" y="2679192"/>
+            <a:ext cx="3454292" cy="438912"/>
+          </a:xfrm>
+          <a:prstGeom prst="rect">
+            <a:avLst/>
+          </a:prstGeom>
+          <a:noFill/>
+          <a:ln/>
+        </p:spPr>
+        <p:txBody>
+          <a:bodyPr wrap="square" lIns="0" tIns="0" rIns="0" bIns="0" rtlCol="0" anchor="ctr"/>
+          <a:lstStyle/>
+          <a:p>
+            <a:pPr indent="0" marL="0">
+              <a:lnSpc>
+                <a:spcPct val="120000"/>
+              </a:lnSpc>
+              <a:buNone/>
+            </a:pPr>
+            <a:r>
+              <a:rPr lang="en-US" sz="1400" b="1" dirty="0">
+                <a:solidFill>
+                  <a:srgbClr val="0F172A"/>
+                </a:solidFill>
+                <a:latin typeface="Pretendard" pitchFamily="34" charset="0"/>
+                <a:ea typeface="Pretendard" pitchFamily="34" charset="-122"/>
+                <a:cs typeface="Pretendard" pitchFamily="34" charset="-120"/>
+              </a:rPr>
+              <a:t>경부고속도로 서초IC 및 테헤란로 3분 내 진입 가능</a:t>
+            </a:r>
+            <a:endParaRPr lang="en-US" sz="1400" dirty="0"/>
+          </a:p>
+        </p:txBody>
+      </p:sp>
+      <p:sp>
+        <p:nvSpPr>
+          <p:cNvPr id="15" name="Shape 12"/>
+          <p:cNvSpPr/>
+          <p:nvPr/>
+        </p:nvSpPr>
+        <p:spPr>
+          <a:xfrm>
+            <a:off x="6053328" y="3118104"/>
+            <a:ext cx="5571439" cy="0"/>
+          </a:xfrm>
+          <a:prstGeom prst="line">
+            <a:avLst/>
+          </a:prstGeom>
+          <a:noFill/>
+          <a:ln w="3810">
+            <a:solidFill>
+              <a:srgbClr val="CBD5E1"/>
+            </a:solidFill>
+            <a:prstDash val="solid"/>
+          </a:ln>
+        </p:spPr>
+      </p:sp>
+      <p:sp>
+        <p:nvSpPr>
+          <p:cNvPr id="16" name="Text 13"/>
+          <p:cNvSpPr/>
+          <p:nvPr/>
+        </p:nvSpPr>
+        <p:spPr>
+          <a:xfrm>
+            <a:off x="6053328" y="3118104"/>
+            <a:ext cx="2117147" cy="438912"/>
+          </a:xfrm>
+          <a:prstGeom prst="rect">
+            <a:avLst/>
+          </a:prstGeom>
+          <a:noFill/>
+          <a:ln/>
+        </p:spPr>
+        <p:txBody>
+          <a:bodyPr wrap="square" lIns="0" tIns="0" rIns="0" bIns="0" rtlCol="0" anchor="ctr"/>
+          <a:lstStyle/>
+          <a:p>
+            <a:pPr indent="0" marL="0">
+              <a:lnSpc>
+                <a:spcPct val="120000"/>
+              </a:lnSpc>
+              <a:buNone/>
+            </a:pPr>
+            <a:r>
+              <a:rPr lang="en-US" sz="1400" dirty="0">
+                <a:solidFill>
+                  <a:srgbClr val="64748B"/>
+                </a:solidFill>
+                <a:latin typeface="Pretendard" pitchFamily="34" charset="0"/>
+                <a:ea typeface="Pretendard" pitchFamily="34" charset="-122"/>
+                <a:cs typeface="Pretendard" pitchFamily="34" charset="-120"/>
+              </a:rPr>
+              <a:t>배후 수요</a:t>
+            </a:r>
+            <a:endParaRPr lang="en-US" sz="1400" dirty="0"/>
+          </a:p>
+        </p:txBody>
+      </p:sp>
+      <p:sp>
+        <p:nvSpPr>
+          <p:cNvPr id="17" name="Text 14"/>
+          <p:cNvSpPr/>
+          <p:nvPr/>
+        </p:nvSpPr>
+        <p:spPr>
+          <a:xfrm>
+            <a:off x="8170475" y="3118104"/>
+            <a:ext cx="3454292" cy="438912"/>
+          </a:xfrm>
+          <a:prstGeom prst="rect">
+            <a:avLst/>
+          </a:prstGeom>
+          <a:noFill/>
+          <a:ln/>
+        </p:spPr>
+        <p:txBody>
+          <a:bodyPr wrap="square" lIns="0" tIns="0" rIns="0" bIns="0" rtlCol="0" anchor="ctr"/>
+          <a:lstStyle/>
+          <a:p>
+            <a:pPr indent="0" marL="0">
+              <a:lnSpc>
+                <a:spcPct val="120000"/>
+              </a:lnSpc>
+              <a:buNone/>
+            </a:pPr>
+            <a:r>
+              <a:rPr lang="en-US" sz="1400" b="1" dirty="0">
+                <a:solidFill>
+                  <a:srgbClr val="0F172A"/>
+                </a:solidFill>
+                <a:latin typeface="Pretendard" pitchFamily="34" charset="0"/>
+                <a:ea typeface="Pretendard" pitchFamily="34" charset="-122"/>
+                <a:cs typeface="Pretendard" pitchFamily="34" charset="-120"/>
+              </a:rPr>
+              <a:t>강남 테헤란로 IT밸리 및 서초 법조타운 오피스 상주인구 30만 배후</a:t>
+            </a:r>
+            <a:endParaRPr lang="en-US" sz="1400" dirty="0"/>
+          </a:p>
+        </p:txBody>
+      </p:sp>
+      <p:sp>
+        <p:nvSpPr>
+          <p:cNvPr id="18" name="Shape 15"/>
+          <p:cNvSpPr/>
+          <p:nvPr/>
+        </p:nvSpPr>
+        <p:spPr>
+          <a:xfrm>
+            <a:off x="6053328" y="3557016"/>
+            <a:ext cx="5571439" cy="0"/>
+          </a:xfrm>
+          <a:prstGeom prst="line">
+            <a:avLst/>
+          </a:prstGeom>
+          <a:noFill/>
+          <a:ln w="3810">
+            <a:solidFill>
+              <a:srgbClr val="CBD5E1"/>
+            </a:solidFill>
+            <a:prstDash val="solid"/>
+          </a:ln>
+        </p:spPr>
+      </p:sp>
+      <p:sp>
+        <p:nvSpPr>
+          <p:cNvPr id="19" name="Text 16"/>
+          <p:cNvSpPr/>
+          <p:nvPr/>
+        </p:nvSpPr>
+        <p:spPr>
+          <a:xfrm>
+            <a:off x="6053328" y="3557016"/>
+            <a:ext cx="2117147" cy="438912"/>
+          </a:xfrm>
+          <a:prstGeom prst="rect">
+            <a:avLst/>
+          </a:prstGeom>
+          <a:noFill/>
+          <a:ln/>
+        </p:spPr>
+        <p:txBody>
+          <a:bodyPr wrap="square" lIns="0" tIns="0" rIns="0" bIns="0" rtlCol="0" anchor="ctr"/>
+          <a:lstStyle/>
+          <a:p>
+            <a:pPr indent="0" marL="0">
+              <a:lnSpc>
+                <a:spcPct val="120000"/>
+              </a:lnSpc>
+              <a:buNone/>
+            </a:pPr>
+            <a:r>
+              <a:rPr lang="en-US" sz="1400" dirty="0">
+                <a:solidFill>
+                  <a:srgbClr val="64748B"/>
+                </a:solidFill>
+                <a:latin typeface="Pretendard" pitchFamily="34" charset="0"/>
+                <a:ea typeface="Pretendard" pitchFamily="34" charset="-122"/>
+                <a:cs typeface="Pretendard" pitchFamily="34" charset="-120"/>
+              </a:rPr>
+              <a:t>의료 상권</a:t>
+            </a:r>
+            <a:endParaRPr lang="en-US" sz="1400" dirty="0"/>
+          </a:p>
+        </p:txBody>
+      </p:sp>
+      <p:sp>
+        <p:nvSpPr>
+          <p:cNvPr id="20" name="Text 17"/>
+          <p:cNvSpPr/>
+          <p:nvPr/>
+        </p:nvSpPr>
+        <p:spPr>
+          <a:xfrm>
+            <a:off x="8170475" y="3557016"/>
+            <a:ext cx="3454292" cy="438912"/>
+          </a:xfrm>
+          <a:prstGeom prst="rect">
+            <a:avLst/>
+          </a:prstGeom>
+          <a:noFill/>
+          <a:ln/>
+        </p:spPr>
+        <p:txBody>
+          <a:bodyPr wrap="square" lIns="0" tIns="0" rIns="0" bIns="0" rtlCol="0" anchor="ctr"/>
+          <a:lstStyle/>
+          <a:p>
+            <a:pPr indent="0" marL="0">
+              <a:lnSpc>
+                <a:spcPct val="120000"/>
+              </a:lnSpc>
+              <a:buNone/>
+            </a:pPr>
+            <a:r>
+              <a:rPr lang="en-US" sz="1400" b="1" dirty="0">
+                <a:solidFill>
+                  <a:srgbClr val="0F172A"/>
+                </a:solidFill>
+                <a:latin typeface="Pretendard" pitchFamily="34" charset="0"/>
+                <a:ea typeface="Pretendard" pitchFamily="34" charset="-122"/>
+                <a:cs typeface="Pretendard" pitchFamily="34" charset="-120"/>
+              </a:rPr>
+              <a:t>1층 약국 및 상층부 안과·피부과 전문의원 집적 의료 특화 상권</a:t>
+            </a:r>
+            <a:endParaRPr lang="en-US" sz="1400" dirty="0"/>
+          </a:p>
+        </p:txBody>
+      </p:sp>
+      <p:sp>
+        <p:nvSpPr>
+          <p:cNvPr id="21" name="Shape 18"/>
+          <p:cNvSpPr/>
+          <p:nvPr/>
+        </p:nvSpPr>
+        <p:spPr>
+          <a:xfrm>
+            <a:off x="6053328" y="3995928"/>
+            <a:ext cx="5571439" cy="0"/>
+          </a:xfrm>
+          <a:prstGeom prst="line">
+            <a:avLst/>
+          </a:prstGeom>
+          <a:noFill/>
+          <a:ln w="3810">
+            <a:solidFill>
+              <a:srgbClr val="CBD5E1"/>
+            </a:solidFill>
+            <a:prstDash val="solid"/>
+          </a:ln>
+        </p:spPr>
+      </p:sp>
+      <p:sp>
+        <p:nvSpPr>
+          <p:cNvPr id="22" name="Text 19"/>
+          <p:cNvSpPr/>
+          <p:nvPr/>
+        </p:nvSpPr>
+        <p:spPr>
+          <a:xfrm>
+            <a:off x="6053328" y="3995928"/>
+            <a:ext cx="2117147" cy="438912"/>
+          </a:xfrm>
+          <a:prstGeom prst="rect">
+            <a:avLst/>
+          </a:prstGeom>
+          <a:noFill/>
+          <a:ln/>
+        </p:spPr>
+        <p:txBody>
+          <a:bodyPr wrap="square" lIns="0" tIns="0" rIns="0" bIns="0" rtlCol="0" anchor="ctr"/>
+          <a:lstStyle/>
+          <a:p>
+            <a:pPr indent="0" marL="0">
+              <a:lnSpc>
+                <a:spcPct val="120000"/>
+              </a:lnSpc>
+              <a:buNone/>
+            </a:pPr>
+            <a:r>
+              <a:rPr lang="en-US" sz="1400" dirty="0">
+                <a:solidFill>
+                  <a:srgbClr val="64748B"/>
+                </a:solidFill>
+                <a:latin typeface="Pretendard" pitchFamily="34" charset="0"/>
+                <a:ea typeface="Pretendard" pitchFamily="34" charset="-122"/>
+                <a:cs typeface="Pretendard" pitchFamily="34" charset="-120"/>
+              </a:rPr>
+              <a:t>편의 인프라</a:t>
+            </a:r>
+            <a:endParaRPr lang="en-US" sz="1400" dirty="0"/>
+          </a:p>
+        </p:txBody>
+      </p:sp>
+      <p:sp>
+        <p:nvSpPr>
+          <p:cNvPr id="23" name="Text 20"/>
+          <p:cNvSpPr/>
+          <p:nvPr/>
+        </p:nvSpPr>
+        <p:spPr>
+          <a:xfrm>
+            <a:off x="8170475" y="3995928"/>
+            <a:ext cx="3454292" cy="438912"/>
+          </a:xfrm>
+          <a:prstGeom prst="rect">
+            <a:avLst/>
+          </a:prstGeom>
+          <a:noFill/>
+          <a:ln/>
+        </p:spPr>
+        <p:txBody>
+          <a:bodyPr wrap="square" lIns="0" tIns="0" rIns="0" bIns="0" rtlCol="0" anchor="ctr"/>
+          <a:lstStyle/>
+          <a:p>
+            <a:pPr indent="0" marL="0">
+              <a:lnSpc>
+                <a:spcPct val="120000"/>
+              </a:lnSpc>
+              <a:buNone/>
+            </a:pPr>
+            <a:r>
+              <a:rPr lang="en-US" sz="1400" b="1" dirty="0">
+                <a:solidFill>
+                  <a:srgbClr val="0F172A"/>
+                </a:solidFill>
+                <a:latin typeface="Pretendard" pitchFamily="34" charset="0"/>
+                <a:ea typeface="Pretendard" pitchFamily="34" charset="-122"/>
+                <a:cs typeface="Pretendard" pitchFamily="34" charset="-120"/>
+              </a:rPr>
+              <a:t>반경 300m 내 주요 임차 업종, 은행, 대형 베이커리 밀집</a:t>
+            </a:r>
+            <a:endParaRPr lang="en-US" sz="1400" dirty="0"/>
+          </a:p>
+        </p:txBody>
+      </p:sp>
+      <p:sp>
+        <p:nvSpPr>
+          <p:cNvPr id="24" name="Text 21"/>
           <p:cNvSpPr/>
           <p:nvPr/>
         </p:nvSpPr>
@@ -4337,7 +5023,7 @@
       </p:sp>
       <p:sp>
         <p:nvSpPr>
-          <p:cNvPr id="9" name="Shape 6"/>
+          <p:cNvPr id="25" name="Shape 22"/>
           <p:cNvSpPr/>
           <p:nvPr/>
         </p:nvSpPr>
@@ -4357,45 +5043,6 @@
             <a:prstDash val="solid"/>
           </a:ln>
         </p:spPr>
-      </p:sp>
-      <p:sp>
-        <p:nvSpPr>
-          <p:cNvPr id="10" name="Text 7"/>
-          <p:cNvSpPr/>
-          <p:nvPr/>
-        </p:nvSpPr>
-        <p:spPr>
-          <a:xfrm>
-            <a:off x="566928" y="1481328"/>
-            <a:ext cx="11057839" cy="9692640"/>
-          </a:xfrm>
-          <a:prstGeom prst="rect">
-            <a:avLst/>
-          </a:prstGeom>
-          <a:noFill/>
-          <a:ln/>
-        </p:spPr>
-        <p:txBody>
-          <a:bodyPr wrap="square" lIns="0" tIns="0" rIns="0" bIns="0" rtlCol="0" anchor="t"/>
-          <a:lstStyle/>
-          <a:p>
-            <a:pPr indent="0" marL="0">
-              <a:buNone/>
-            </a:pPr>
-            <a:r>
-              <a:rPr lang="en-US" sz="1000" dirty="0">
-                <a:solidFill>
-                  <a:srgbClr val="0F172A"/>
-                </a:solidFill>
-                <a:latin typeface="Pretendard" pitchFamily="34" charset="0"/>
-                <a:ea typeface="Pretendard" pitchFamily="34" charset="-122"/>
-                <a:cs typeface="Pretendard" pitchFamily="34" charset="-120"/>
-              </a:rPr>
-              <a:t>{"ok":true,"mocked":true,"extractedFields":{"area_signal":"역삼","asset_type":"오피스빌딩","price_band":"300억","size_signal":"3000평(약 9917.4㎡)"},"extractedFacts":{"region":"역삼","exactAddressCandidate":"역삼동 742-1","assetType":"오피스빌딩","priceText":"300억","sizeText":"3000평(약 9917.4㎡)","currentUse":"오피스","currentUseSignal":"근린생활시설","leaseSignal":"임대중","vacancySignal":"공실없음","tenantNames":["쿠팡","네이버"],"unitRentTexts":["301호: 1500만"],"sellerMotivationText":"자산 효율화","brokerNotes":["초역세권 매물"]},"detectedSensitiveFields":["exact_address","tenant_name"],"ambiguousFields":[],"warnings":[],"areaSignal":"역삼","assetType":"오피스빌딩","priceBand":"300억","sizeSignal":"3000평(약 9917.4㎡)","dealType":"매각","buildingName":"역삼 센트럴타워","exactAddress":"역삼동 742-1","totalFloorArea":9917.3,"buildYear":2015,"currentUseSignal":"근린생활시설","vacancySignal":"공실 없음","fitSummary":"초역세권 근생 빌딩으로 시행/사옥 매입에 최적화","cautionSummary":"주요 임차 업종 만기 조율 필요","hiddenFields":["exact_address","seller_motivation"],"confidence":{"areaSignal":"confirmed","assetType":"confirmed","priceBand":"ai_hypothesis","fitSummary":"ai_hypothesis"},"missingData":["sizeSignal"],"boundaryNote":"본 자료는 실거래 통계 기반 참고치입니다.","buyerType":"법인 사옥형","budgetRange":{"min":50,"max":80,"display":"50억~80억"},"preferredRegions":["강남","성수"],"assetTypes":["꼬마빌딩","사옥용"],"purchasePurpose":"사옥용 매입","mustHave":["초역세권","주차"],"niceToHave":["테라스","루프탑"],"riskTolerance":"medium","financingNote":"자본금 50% 준비","missingQuestions":["구체적인 입주 시기가 언제인가요?","선호하는 수익률이 있나요?"],"privacyNotes":["연락처 비공개"],"fitReasons":["매수자 예산(50-80억)에 부합하는 매물입니다.","요청하신 성수/강남 권역에 해당합니다."],"cautionReasons":["요청한 용도와 달리 명도 협의가 다소 필요합니다."],"recommendedNextAction":"현장 답사 제안","kakaoMessage":"안녕하세요! 요청하신 조건에 부합하는 추천 매물이 있어 안내해 드립니다. 확인해보시고 피드백 부탁드립니다.","title":"강남 역삼역 초역세권 오피스 사옥용 빌딩 매각","shortSummary":"역삼역 도보 5분 거리의 준신축급 대형 오피스빌딩입니다.","dealPoints":["초역세권","사옥 최적"],"cautionPoints":["명도 조율 필요"],"hiddenInfoNotice":["보증금 및 지번은 인가 후 확인 가능"],"gateMessage":"G1 등급 등록이 필요합니다.","kakaoText":"강남 역삼역 오피스 빌딩 매각 안내입니다.","exactUnitCandidate":"101호","floor":"1층","areaSqmText":"150㎡","spaceType":"office","depositText":"5000만","monthlyRentText":"400만","maintenanceFeeText":"50만","availableFromText":"즉시입주","leaseTermMonthsText":"24","incentivesText":"렌트프리 2개월","restrictions":[],"landlordIdentity":"김성수","currentTenant":"스타트업","vacancyReason":"이전 확장","rentNegotiation":"협의 가능","region":"성수동","areaSqm":150,"deposit":5000,"monthlyRent":400,"maintenanceFee":50,"availableFrom":"즉시입주","leaseTermMonths":24,"incentives":{"rentFreeMonths":2,"interiorSupport":"일부 인테리어 지원","freeRentDetail":"렌트프리 2개월 지원"},"shortSummaryLease":"성수역 도보 5분 거리 1층 리테일 상가 매물입니다."}</a:t>
-            </a:r>
-            <a:endParaRPr lang="en-US" sz="1000" dirty="0"/>
-          </a:p>
-        </p:txBody>
       </p:sp>
     </p:spTree>
   </p:cSld>
@@ -4602,7 +5249,7 @@
                 <a:ea typeface="Pretendard" pitchFamily="34" charset="-122"/>
                 <a:cs typeface="Pretendard" pitchFamily="34" charset="-120"/>
               </a:rPr>
-              <a:t>{"ok"</a:t>
+              <a:t>소재지</a:t>
             </a:r>
             <a:endParaRPr lang="en-US" sz="1400" dirty="0"/>
           </a:p>
@@ -4644,7 +5291,7 @@
                 <a:ea typeface="Pretendard" pitchFamily="34" charset="-122"/>
                 <a:cs typeface="Pretendard" pitchFamily="34" charset="-120"/>
               </a:rPr>
-              <a:t>true,"mocked":true,"extractedFields":{"area_signal":"역삼","asset_type":"오피스빌딩","price_band":"300억","size_signal":"3000평(약 9917.4㎡)"},"extractedFacts":{"region":"역삼","exactAddressCandidate":"역삼동 742-1","assetType":"오피스빌딩","priceText":"300억","sizeText":"3000평(약 9917.4㎡)","currentUse":"오피스","currentUseSignal":"근린생활시설","leaseSignal":"임대중","vacancySignal":"공실없음","tenantNames":"쿠팡","네이버","unitRentTexts":"301호: 1500만","sellerMotivationText":"자산 효율화","brokerNotes":"초역세권 매물"},"detectedSensitiveFields":"exact_address","tenant_name","ambiguousFields":,"warnings":,"areaSignal":"역삼","assetType":"오피스빌딩","priceBand":"300억","sizeSignal":"3000평(약 9917.4㎡)","dealType":"매각","buildingName":"역삼 센트럴타워","exactAddress":"역삼동 742-1","totalFloorArea":9917.3,"buildYear":2015,"currentUseSignal":"근린생활시설","vacancySignal":"공실 없음","fitSummary":"초역세권 근생 빌딩으로 시행/사옥 매입에 최적화","cautionSummary":"주요 임차 업종 만기 조율 필요","hiddenFields":"exact_address","seller_motivation","confidence":{"areaSignal":"confirmed","assetType":"confirmed","priceBand":"ai_hypothesis","fitSummary":"ai_hypothesis"},"missingData":"sizeSignal","boundaryNote":"본 자료는 실거래 통계 기반 참고치입니다.","buyerType":"법인 사옥형","budgetRange":{"min":50,"max":80,"display":"50억~80억"},"preferredRegions":"강남","성수","assetTypes":"꼬마빌딩","사옥용","purchasePurpose":"사옥용 매입","mustHave":"초역세권","주차","niceToHave":"테라스","루프탑","riskTolerance":"medium","financingNote":"자본금 50% 준비","missingQuestions":"구체적인 입주 시기가 언제인가요?","선호하는 수익률이 있나요?","privacyNotes":"연락처 비공개","fitReasons":"매수자 예산(50-80억)에 부합하는 매물입니다.","요청하신 성수/강남 권역에 해당합니다.","cautionReasons":"요청한 용도와 달리 명도 협의가 다소 필요합니다.","recommendedNextAction":"현장 답사 제안","kakaoMessage":"안녕하세요! 요청하신 조건에 부합하는 추천 매물이 있어 안내해 드립니다. 확인해보시고 피드백 부탁드립니다.","title":"강남 역삼역 초역세권 오피스 사옥용 빌딩 매각","shortSummary":"역삼역 도보 5분 거리의 준신축급 대형 오피스빌딩입니다.","dealPoints":"초역세권","사옥 최적","cautionPoints":"명도 조율 필요","hiddenInfoNotice":"보증금 및 지번은 인가 후 확인 가능","gateMessage":"G1 등급 등록이 필요합니다.","kakaoText":"강남 역삼역 오피스 빌딩 매각 안내입니다.","exactUnitCandidate":"101호","floor":"1층","areaSqmText":"150㎡","spaceType":"office","depositText":"5000만","monthlyRentText":"400만","maintenanceFeeText":"50만","availableFromText":"즉시입주","leaseTermMonthsText":"24","incentivesText":"렌트프리 2개월","restrictions":,"landlordIdentity":"김성수","currentTenant":"스타트업","vacancyReason":"이전 확장","rentNegotiation":"협의 가능","region":"성수동","areaSqm":150,"deposit":5000,"monthlyRent":400,"maintenanceFee":50,"availableFrom":"즉시입주","leaseTermMonths":24,"incentives":{"rentFreeMonths":2,"interiorSupport":"일부 인테리어 지원","freeRentDetail":"렌트프리 2개월 지원"},"shortSummaryLease":"성수역 도보 5분 거리 1층 리테일 상가 매물입니다."}</a:t>
+              <a:t>강남권역</a:t>
             </a:r>
             <a:endParaRPr lang="en-US" sz="1400" dirty="0"/>
           </a:p>
@@ -4653,6 +5300,862 @@
       <p:sp>
         <p:nvSpPr>
           <p:cNvPr id="8" name="Shape 6"/>
+          <p:cNvSpPr/>
+          <p:nvPr/>
+        </p:nvSpPr>
+        <p:spPr>
+          <a:xfrm>
+            <a:off x="566928" y="2048256"/>
+            <a:ext cx="6858000" cy="0"/>
+          </a:xfrm>
+          <a:prstGeom prst="line">
+            <a:avLst/>
+          </a:prstGeom>
+          <a:noFill/>
+          <a:ln w="3810">
+            <a:solidFill>
+              <a:srgbClr val="CBD5E1"/>
+            </a:solidFill>
+            <a:prstDash val="solid"/>
+          </a:ln>
+        </p:spPr>
+      </p:sp>
+      <p:sp>
+        <p:nvSpPr>
+          <p:cNvPr id="9" name="Text 7"/>
+          <p:cNvSpPr/>
+          <p:nvPr/>
+        </p:nvSpPr>
+        <p:spPr>
+          <a:xfrm>
+            <a:off x="566928" y="2048256"/>
+            <a:ext cx="2606040" cy="402336"/>
+          </a:xfrm>
+          <a:prstGeom prst="rect">
+            <a:avLst/>
+          </a:prstGeom>
+          <a:noFill/>
+          <a:ln/>
+        </p:spPr>
+        <p:txBody>
+          <a:bodyPr wrap="square" lIns="0" tIns="0" rIns="0" bIns="0" rtlCol="0" anchor="ctr"/>
+          <a:lstStyle/>
+          <a:p>
+            <a:pPr indent="0" marL="0">
+              <a:lnSpc>
+                <a:spcPct val="120000"/>
+              </a:lnSpc>
+              <a:buNone/>
+            </a:pPr>
+            <a:r>
+              <a:rPr lang="en-US" sz="1400" dirty="0">
+                <a:solidFill>
+                  <a:srgbClr val="64748B"/>
+                </a:solidFill>
+                <a:latin typeface="Pretendard" pitchFamily="34" charset="0"/>
+                <a:ea typeface="Pretendard" pitchFamily="34" charset="-122"/>
+                <a:cs typeface="Pretendard" pitchFamily="34" charset="-120"/>
+              </a:rPr>
+              <a:t>주요 용도</a:t>
+            </a:r>
+            <a:endParaRPr lang="en-US" sz="1400" dirty="0"/>
+          </a:p>
+        </p:txBody>
+      </p:sp>
+      <p:sp>
+        <p:nvSpPr>
+          <p:cNvPr id="10" name="Text 8"/>
+          <p:cNvSpPr/>
+          <p:nvPr/>
+        </p:nvSpPr>
+        <p:spPr>
+          <a:xfrm>
+            <a:off x="3172968" y="2048256"/>
+            <a:ext cx="4251960" cy="402336"/>
+          </a:xfrm>
+          <a:prstGeom prst="rect">
+            <a:avLst/>
+          </a:prstGeom>
+          <a:noFill/>
+          <a:ln/>
+        </p:spPr>
+        <p:txBody>
+          <a:bodyPr wrap="square" lIns="0" tIns="0" rIns="0" bIns="0" rtlCol="0" anchor="ctr"/>
+          <a:lstStyle/>
+          <a:p>
+            <a:pPr indent="0" marL="0">
+              <a:lnSpc>
+                <a:spcPct val="120000"/>
+              </a:lnSpc>
+              <a:buNone/>
+            </a:pPr>
+            <a:r>
+              <a:rPr lang="en-US" sz="1400" b="1" dirty="0">
+                <a:solidFill>
+                  <a:srgbClr val="0F172A"/>
+                </a:solidFill>
+                <a:latin typeface="Pretendard" pitchFamily="34" charset="0"/>
+                <a:ea typeface="Pretendard" pitchFamily="34" charset="-122"/>
+                <a:cs typeface="Pretendard" pitchFamily="34" charset="-120"/>
+              </a:rPr>
+              <a:t>근린생활시설 / 메디컬</a:t>
+            </a:r>
+            <a:endParaRPr lang="en-US" sz="1400" dirty="0"/>
+          </a:p>
+        </p:txBody>
+      </p:sp>
+      <p:sp>
+        <p:nvSpPr>
+          <p:cNvPr id="11" name="Shape 9"/>
+          <p:cNvSpPr/>
+          <p:nvPr/>
+        </p:nvSpPr>
+        <p:spPr>
+          <a:xfrm>
+            <a:off x="566928" y="2450592"/>
+            <a:ext cx="6858000" cy="0"/>
+          </a:xfrm>
+          <a:prstGeom prst="line">
+            <a:avLst/>
+          </a:prstGeom>
+          <a:noFill/>
+          <a:ln w="3810">
+            <a:solidFill>
+              <a:srgbClr val="CBD5E1"/>
+            </a:solidFill>
+            <a:prstDash val="solid"/>
+          </a:ln>
+        </p:spPr>
+      </p:sp>
+      <p:sp>
+        <p:nvSpPr>
+          <p:cNvPr id="12" name="Text 10"/>
+          <p:cNvSpPr/>
+          <p:nvPr/>
+        </p:nvSpPr>
+        <p:spPr>
+          <a:xfrm>
+            <a:off x="566928" y="2450592"/>
+            <a:ext cx="2606040" cy="402336"/>
+          </a:xfrm>
+          <a:prstGeom prst="rect">
+            <a:avLst/>
+          </a:prstGeom>
+          <a:noFill/>
+          <a:ln/>
+        </p:spPr>
+        <p:txBody>
+          <a:bodyPr wrap="square" lIns="0" tIns="0" rIns="0" bIns="0" rtlCol="0" anchor="ctr"/>
+          <a:lstStyle/>
+          <a:p>
+            <a:pPr indent="0" marL="0">
+              <a:lnSpc>
+                <a:spcPct val="120000"/>
+              </a:lnSpc>
+              <a:buNone/>
+            </a:pPr>
+            <a:r>
+              <a:rPr lang="en-US" sz="1400" dirty="0">
+                <a:solidFill>
+                  <a:srgbClr val="64748B"/>
+                </a:solidFill>
+                <a:latin typeface="Pretendard" pitchFamily="34" charset="0"/>
+                <a:ea typeface="Pretendard" pitchFamily="34" charset="-122"/>
+                <a:cs typeface="Pretendard" pitchFamily="34" charset="-120"/>
+              </a:rPr>
+              <a:t>연면적</a:t>
+            </a:r>
+            <a:endParaRPr lang="en-US" sz="1400" dirty="0"/>
+          </a:p>
+        </p:txBody>
+      </p:sp>
+      <p:sp>
+        <p:nvSpPr>
+          <p:cNvPr id="13" name="Text 11"/>
+          <p:cNvSpPr/>
+          <p:nvPr/>
+        </p:nvSpPr>
+        <p:spPr>
+          <a:xfrm>
+            <a:off x="3172968" y="2450592"/>
+            <a:ext cx="4251960" cy="402336"/>
+          </a:xfrm>
+          <a:prstGeom prst="rect">
+            <a:avLst/>
+          </a:prstGeom>
+          <a:noFill/>
+          <a:ln/>
+        </p:spPr>
+        <p:txBody>
+          <a:bodyPr wrap="square" lIns="0" tIns="0" rIns="0" bIns="0" rtlCol="0" anchor="ctr"/>
+          <a:lstStyle/>
+          <a:p>
+            <a:pPr indent="0" marL="0">
+              <a:lnSpc>
+                <a:spcPct val="120000"/>
+              </a:lnSpc>
+              <a:buNone/>
+            </a:pPr>
+            <a:r>
+              <a:rPr lang="en-US" sz="1400" b="1" dirty="0">
+                <a:solidFill>
+                  <a:srgbClr val="0F172A"/>
+                </a:solidFill>
+                <a:latin typeface="Pretendard" pitchFamily="34" charset="0"/>
+                <a:ea typeface="Pretendard" pitchFamily="34" charset="-122"/>
+                <a:cs typeface="Pretendard" pitchFamily="34" charset="-120"/>
+              </a:rPr>
+              <a:t>5,000㎡ (약 1513평(약 5001.7㎡))</a:t>
+            </a:r>
+            <a:endParaRPr lang="en-US" sz="1400" dirty="0"/>
+          </a:p>
+        </p:txBody>
+      </p:sp>
+      <p:sp>
+        <p:nvSpPr>
+          <p:cNvPr id="14" name="Shape 12"/>
+          <p:cNvSpPr/>
+          <p:nvPr/>
+        </p:nvSpPr>
+        <p:spPr>
+          <a:xfrm>
+            <a:off x="566928" y="2852928"/>
+            <a:ext cx="6858000" cy="0"/>
+          </a:xfrm>
+          <a:prstGeom prst="line">
+            <a:avLst/>
+          </a:prstGeom>
+          <a:noFill/>
+          <a:ln w="3810">
+            <a:solidFill>
+              <a:srgbClr val="CBD5E1"/>
+            </a:solidFill>
+            <a:prstDash val="solid"/>
+          </a:ln>
+        </p:spPr>
+      </p:sp>
+      <p:sp>
+        <p:nvSpPr>
+          <p:cNvPr id="15" name="Text 13"/>
+          <p:cNvSpPr/>
+          <p:nvPr/>
+        </p:nvSpPr>
+        <p:spPr>
+          <a:xfrm>
+            <a:off x="566928" y="2852928"/>
+            <a:ext cx="2606040" cy="402336"/>
+          </a:xfrm>
+          <a:prstGeom prst="rect">
+            <a:avLst/>
+          </a:prstGeom>
+          <a:noFill/>
+          <a:ln/>
+        </p:spPr>
+        <p:txBody>
+          <a:bodyPr wrap="square" lIns="0" tIns="0" rIns="0" bIns="0" rtlCol="0" anchor="ctr"/>
+          <a:lstStyle/>
+          <a:p>
+            <a:pPr indent="0" marL="0">
+              <a:lnSpc>
+                <a:spcPct val="120000"/>
+              </a:lnSpc>
+              <a:buNone/>
+            </a:pPr>
+            <a:r>
+              <a:rPr lang="en-US" sz="1400" dirty="0">
+                <a:solidFill>
+                  <a:srgbClr val="64748B"/>
+                </a:solidFill>
+                <a:latin typeface="Pretendard" pitchFamily="34" charset="0"/>
+                <a:ea typeface="Pretendard" pitchFamily="34" charset="-122"/>
+                <a:cs typeface="Pretendard" pitchFamily="34" charset="-120"/>
+              </a:rPr>
+              <a:t>대지면적</a:t>
+            </a:r>
+            <a:endParaRPr lang="en-US" sz="1400" dirty="0"/>
+          </a:p>
+        </p:txBody>
+      </p:sp>
+      <p:sp>
+        <p:nvSpPr>
+          <p:cNvPr id="16" name="Text 14"/>
+          <p:cNvSpPr/>
+          <p:nvPr/>
+        </p:nvSpPr>
+        <p:spPr>
+          <a:xfrm>
+            <a:off x="3172968" y="2852928"/>
+            <a:ext cx="4251960" cy="402336"/>
+          </a:xfrm>
+          <a:prstGeom prst="rect">
+            <a:avLst/>
+          </a:prstGeom>
+          <a:noFill/>
+          <a:ln/>
+        </p:spPr>
+        <p:txBody>
+          <a:bodyPr wrap="square" lIns="0" tIns="0" rIns="0" bIns="0" rtlCol="0" anchor="ctr"/>
+          <a:lstStyle/>
+          <a:p>
+            <a:pPr indent="0" marL="0">
+              <a:lnSpc>
+                <a:spcPct val="120000"/>
+              </a:lnSpc>
+              <a:buNone/>
+            </a:pPr>
+            <a:r>
+              <a:rPr lang="en-US" sz="1400" b="1" dirty="0">
+                <a:solidFill>
+                  <a:srgbClr val="0F172A"/>
+                </a:solidFill>
+                <a:latin typeface="Pretendard" pitchFamily="34" charset="0"/>
+                <a:ea typeface="Pretendard" pitchFamily="34" charset="-122"/>
+                <a:cs typeface="Pretendard" pitchFamily="34" charset="-120"/>
+              </a:rPr>
+              <a:t>1,000㎡ (약 303평(약 1001.7㎡))</a:t>
+            </a:r>
+            <a:endParaRPr lang="en-US" sz="1400" dirty="0"/>
+          </a:p>
+        </p:txBody>
+      </p:sp>
+      <p:sp>
+        <p:nvSpPr>
+          <p:cNvPr id="17" name="Shape 15"/>
+          <p:cNvSpPr/>
+          <p:nvPr/>
+        </p:nvSpPr>
+        <p:spPr>
+          <a:xfrm>
+            <a:off x="566928" y="3255264"/>
+            <a:ext cx="6858000" cy="0"/>
+          </a:xfrm>
+          <a:prstGeom prst="line">
+            <a:avLst/>
+          </a:prstGeom>
+          <a:noFill/>
+          <a:ln w="3810">
+            <a:solidFill>
+              <a:srgbClr val="CBD5E1"/>
+            </a:solidFill>
+            <a:prstDash val="solid"/>
+          </a:ln>
+        </p:spPr>
+      </p:sp>
+      <p:sp>
+        <p:nvSpPr>
+          <p:cNvPr id="18" name="Text 16"/>
+          <p:cNvSpPr/>
+          <p:nvPr/>
+        </p:nvSpPr>
+        <p:spPr>
+          <a:xfrm>
+            <a:off x="566928" y="3255264"/>
+            <a:ext cx="2606040" cy="402336"/>
+          </a:xfrm>
+          <a:prstGeom prst="rect">
+            <a:avLst/>
+          </a:prstGeom>
+          <a:noFill/>
+          <a:ln/>
+        </p:spPr>
+        <p:txBody>
+          <a:bodyPr wrap="square" lIns="0" tIns="0" rIns="0" bIns="0" rtlCol="0" anchor="ctr"/>
+          <a:lstStyle/>
+          <a:p>
+            <a:pPr indent="0" marL="0">
+              <a:lnSpc>
+                <a:spcPct val="120000"/>
+              </a:lnSpc>
+              <a:buNone/>
+            </a:pPr>
+            <a:r>
+              <a:rPr lang="en-US" sz="1400" dirty="0">
+                <a:solidFill>
+                  <a:srgbClr val="64748B"/>
+                </a:solidFill>
+                <a:latin typeface="Pretendard" pitchFamily="34" charset="0"/>
+                <a:ea typeface="Pretendard" pitchFamily="34" charset="-122"/>
+                <a:cs typeface="Pretendard" pitchFamily="34" charset="-120"/>
+              </a:rPr>
+              <a:t>용도지역</a:t>
+            </a:r>
+            <a:endParaRPr lang="en-US" sz="1400" dirty="0"/>
+          </a:p>
+        </p:txBody>
+      </p:sp>
+      <p:sp>
+        <p:nvSpPr>
+          <p:cNvPr id="19" name="Text 17"/>
+          <p:cNvSpPr/>
+          <p:nvPr/>
+        </p:nvSpPr>
+        <p:spPr>
+          <a:xfrm>
+            <a:off x="3172968" y="3255264"/>
+            <a:ext cx="4251960" cy="402336"/>
+          </a:xfrm>
+          <a:prstGeom prst="rect">
+            <a:avLst/>
+          </a:prstGeom>
+          <a:noFill/>
+          <a:ln/>
+        </p:spPr>
+        <p:txBody>
+          <a:bodyPr wrap="square" lIns="0" tIns="0" rIns="0" bIns="0" rtlCol="0" anchor="ctr"/>
+          <a:lstStyle/>
+          <a:p>
+            <a:pPr indent="0" marL="0">
+              <a:lnSpc>
+                <a:spcPct val="120000"/>
+              </a:lnSpc>
+              <a:buNone/>
+            </a:pPr>
+            <a:r>
+              <a:rPr lang="en-US" sz="1400" b="1" dirty="0">
+                <a:solidFill>
+                  <a:srgbClr val="0F172A"/>
+                </a:solidFill>
+                <a:latin typeface="Pretendard" pitchFamily="34" charset="0"/>
+                <a:ea typeface="Pretendard" pitchFamily="34" charset="-122"/>
+                <a:cs typeface="Pretendard" pitchFamily="34" charset="-120"/>
+              </a:rPr>
+              <a:t>일반상업지역</a:t>
+            </a:r>
+            <a:endParaRPr lang="en-US" sz="1400" dirty="0"/>
+          </a:p>
+        </p:txBody>
+      </p:sp>
+      <p:sp>
+        <p:nvSpPr>
+          <p:cNvPr id="20" name="Shape 18"/>
+          <p:cNvSpPr/>
+          <p:nvPr/>
+        </p:nvSpPr>
+        <p:spPr>
+          <a:xfrm>
+            <a:off x="566928" y="3657600"/>
+            <a:ext cx="6858000" cy="0"/>
+          </a:xfrm>
+          <a:prstGeom prst="line">
+            <a:avLst/>
+          </a:prstGeom>
+          <a:noFill/>
+          <a:ln w="3810">
+            <a:solidFill>
+              <a:srgbClr val="CBD5E1"/>
+            </a:solidFill>
+            <a:prstDash val="solid"/>
+          </a:ln>
+        </p:spPr>
+      </p:sp>
+      <p:sp>
+        <p:nvSpPr>
+          <p:cNvPr id="21" name="Text 19"/>
+          <p:cNvSpPr/>
+          <p:nvPr/>
+        </p:nvSpPr>
+        <p:spPr>
+          <a:xfrm>
+            <a:off x="566928" y="3657600"/>
+            <a:ext cx="2606040" cy="402336"/>
+          </a:xfrm>
+          <a:prstGeom prst="rect">
+            <a:avLst/>
+          </a:prstGeom>
+          <a:noFill/>
+          <a:ln/>
+        </p:spPr>
+        <p:txBody>
+          <a:bodyPr wrap="square" lIns="0" tIns="0" rIns="0" bIns="0" rtlCol="0" anchor="ctr"/>
+          <a:lstStyle/>
+          <a:p>
+            <a:pPr indent="0" marL="0">
+              <a:lnSpc>
+                <a:spcPct val="120000"/>
+              </a:lnSpc>
+              <a:buNone/>
+            </a:pPr>
+            <a:r>
+              <a:rPr lang="en-US" sz="1400" dirty="0">
+                <a:solidFill>
+                  <a:srgbClr val="64748B"/>
+                </a:solidFill>
+                <a:latin typeface="Pretendard" pitchFamily="34" charset="0"/>
+                <a:ea typeface="Pretendard" pitchFamily="34" charset="-122"/>
+                <a:cs typeface="Pretendard" pitchFamily="34" charset="-120"/>
+              </a:rPr>
+              <a:t>승강기</a:t>
+            </a:r>
+            <a:endParaRPr lang="en-US" sz="1400" dirty="0"/>
+          </a:p>
+        </p:txBody>
+      </p:sp>
+      <p:sp>
+        <p:nvSpPr>
+          <p:cNvPr id="22" name="Text 20"/>
+          <p:cNvSpPr/>
+          <p:nvPr/>
+        </p:nvSpPr>
+        <p:spPr>
+          <a:xfrm>
+            <a:off x="3172968" y="3657600"/>
+            <a:ext cx="4251960" cy="402336"/>
+          </a:xfrm>
+          <a:prstGeom prst="rect">
+            <a:avLst/>
+          </a:prstGeom>
+          <a:noFill/>
+          <a:ln/>
+        </p:spPr>
+        <p:txBody>
+          <a:bodyPr wrap="square" lIns="0" tIns="0" rIns="0" bIns="0" rtlCol="0" anchor="ctr"/>
+          <a:lstStyle/>
+          <a:p>
+            <a:pPr indent="0" marL="0">
+              <a:lnSpc>
+                <a:spcPct val="120000"/>
+              </a:lnSpc>
+              <a:buNone/>
+            </a:pPr>
+            <a:r>
+              <a:rPr lang="en-US" sz="1400" b="1" dirty="0">
+                <a:solidFill>
+                  <a:srgbClr val="0F172A"/>
+                </a:solidFill>
+                <a:latin typeface="Pretendard" pitchFamily="34" charset="0"/>
+                <a:ea typeface="Pretendard" pitchFamily="34" charset="-122"/>
+                <a:cs typeface="Pretendard" pitchFamily="34" charset="-120"/>
+              </a:rPr>
+              <a:t>1대 (15인승 침대용)</a:t>
+            </a:r>
+            <a:endParaRPr lang="en-US" sz="1400" dirty="0"/>
+          </a:p>
+        </p:txBody>
+      </p:sp>
+      <p:sp>
+        <p:nvSpPr>
+          <p:cNvPr id="23" name="Shape 21"/>
+          <p:cNvSpPr/>
+          <p:nvPr/>
+        </p:nvSpPr>
+        <p:spPr>
+          <a:xfrm>
+            <a:off x="566928" y="4059936"/>
+            <a:ext cx="6858000" cy="0"/>
+          </a:xfrm>
+          <a:prstGeom prst="line">
+            <a:avLst/>
+          </a:prstGeom>
+          <a:noFill/>
+          <a:ln w="3810">
+            <a:solidFill>
+              <a:srgbClr val="CBD5E1"/>
+            </a:solidFill>
+            <a:prstDash val="solid"/>
+          </a:ln>
+        </p:spPr>
+      </p:sp>
+      <p:sp>
+        <p:nvSpPr>
+          <p:cNvPr id="24" name="Text 22"/>
+          <p:cNvSpPr/>
+          <p:nvPr/>
+        </p:nvSpPr>
+        <p:spPr>
+          <a:xfrm>
+            <a:off x="566928" y="4059936"/>
+            <a:ext cx="2606040" cy="402336"/>
+          </a:xfrm>
+          <a:prstGeom prst="rect">
+            <a:avLst/>
+          </a:prstGeom>
+          <a:noFill/>
+          <a:ln/>
+        </p:spPr>
+        <p:txBody>
+          <a:bodyPr wrap="square" lIns="0" tIns="0" rIns="0" bIns="0" rtlCol="0" anchor="ctr"/>
+          <a:lstStyle/>
+          <a:p>
+            <a:pPr indent="0" marL="0">
+              <a:lnSpc>
+                <a:spcPct val="120000"/>
+              </a:lnSpc>
+              <a:buNone/>
+            </a:pPr>
+            <a:r>
+              <a:rPr lang="en-US" sz="1400" dirty="0">
+                <a:solidFill>
+                  <a:srgbClr val="64748B"/>
+                </a:solidFill>
+                <a:latin typeface="Pretendard" pitchFamily="34" charset="0"/>
+                <a:ea typeface="Pretendard" pitchFamily="34" charset="-122"/>
+                <a:cs typeface="Pretendard" pitchFamily="34" charset="-120"/>
+              </a:rPr>
+              <a:t>주차 대수</a:t>
+            </a:r>
+            <a:endParaRPr lang="en-US" sz="1400" dirty="0"/>
+          </a:p>
+        </p:txBody>
+      </p:sp>
+      <p:sp>
+        <p:nvSpPr>
+          <p:cNvPr id="25" name="Text 23"/>
+          <p:cNvSpPr/>
+          <p:nvPr/>
+        </p:nvSpPr>
+        <p:spPr>
+          <a:xfrm>
+            <a:off x="3172968" y="4059936"/>
+            <a:ext cx="4251960" cy="402336"/>
+          </a:xfrm>
+          <a:prstGeom prst="rect">
+            <a:avLst/>
+          </a:prstGeom>
+          <a:noFill/>
+          <a:ln/>
+        </p:spPr>
+        <p:txBody>
+          <a:bodyPr wrap="square" lIns="0" tIns="0" rIns="0" bIns="0" rtlCol="0" anchor="ctr"/>
+          <a:lstStyle/>
+          <a:p>
+            <a:pPr indent="0" marL="0">
+              <a:lnSpc>
+                <a:spcPct val="120000"/>
+              </a:lnSpc>
+              <a:buNone/>
+            </a:pPr>
+            <a:r>
+              <a:rPr lang="en-US" sz="1400" b="1" dirty="0">
+                <a:solidFill>
+                  <a:srgbClr val="0F172A"/>
+                </a:solidFill>
+                <a:latin typeface="Pretendard" pitchFamily="34" charset="0"/>
+                <a:ea typeface="Pretendard" pitchFamily="34" charset="-122"/>
+                <a:cs typeface="Pretendard" pitchFamily="34" charset="-120"/>
+              </a:rPr>
+              <a:t>18대 (자주식 완비)</a:t>
+            </a:r>
+            <a:endParaRPr lang="en-US" sz="1400" dirty="0"/>
+          </a:p>
+        </p:txBody>
+      </p:sp>
+      <p:sp>
+        <p:nvSpPr>
+          <p:cNvPr id="26" name="Shape 24"/>
+          <p:cNvSpPr/>
+          <p:nvPr/>
+        </p:nvSpPr>
+        <p:spPr>
+          <a:xfrm>
+            <a:off x="566928" y="4462272"/>
+            <a:ext cx="6858000" cy="0"/>
+          </a:xfrm>
+          <a:prstGeom prst="line">
+            <a:avLst/>
+          </a:prstGeom>
+          <a:noFill/>
+          <a:ln w="3810">
+            <a:solidFill>
+              <a:srgbClr val="CBD5E1"/>
+            </a:solidFill>
+            <a:prstDash val="solid"/>
+          </a:ln>
+        </p:spPr>
+      </p:sp>
+      <p:sp>
+        <p:nvSpPr>
+          <p:cNvPr id="27" name="Text 25"/>
+          <p:cNvSpPr/>
+          <p:nvPr/>
+        </p:nvSpPr>
+        <p:spPr>
+          <a:xfrm>
+            <a:off x="566928" y="4462272"/>
+            <a:ext cx="2606040" cy="402336"/>
+          </a:xfrm>
+          <a:prstGeom prst="rect">
+            <a:avLst/>
+          </a:prstGeom>
+          <a:noFill/>
+          <a:ln/>
+        </p:spPr>
+        <p:txBody>
+          <a:bodyPr wrap="square" lIns="0" tIns="0" rIns="0" bIns="0" rtlCol="0" anchor="ctr"/>
+          <a:lstStyle/>
+          <a:p>
+            <a:pPr indent="0" marL="0">
+              <a:lnSpc>
+                <a:spcPct val="120000"/>
+              </a:lnSpc>
+              <a:buNone/>
+            </a:pPr>
+            <a:r>
+              <a:rPr lang="en-US" sz="1400" dirty="0">
+                <a:solidFill>
+                  <a:srgbClr val="64748B"/>
+                </a:solidFill>
+                <a:latin typeface="Pretendard" pitchFamily="34" charset="0"/>
+                <a:ea typeface="Pretendard" pitchFamily="34" charset="-122"/>
+                <a:cs typeface="Pretendard" pitchFamily="34" charset="-120"/>
+              </a:rPr>
+              <a:t>주구조</a:t>
+            </a:r>
+            <a:endParaRPr lang="en-US" sz="1400" dirty="0"/>
+          </a:p>
+        </p:txBody>
+      </p:sp>
+      <p:sp>
+        <p:nvSpPr>
+          <p:cNvPr id="28" name="Text 26"/>
+          <p:cNvSpPr/>
+          <p:nvPr/>
+        </p:nvSpPr>
+        <p:spPr>
+          <a:xfrm>
+            <a:off x="3172968" y="4462272"/>
+            <a:ext cx="4251960" cy="402336"/>
+          </a:xfrm>
+          <a:prstGeom prst="rect">
+            <a:avLst/>
+          </a:prstGeom>
+          <a:noFill/>
+          <a:ln/>
+        </p:spPr>
+        <p:txBody>
+          <a:bodyPr wrap="square" lIns="0" tIns="0" rIns="0" bIns="0" rtlCol="0" anchor="ctr"/>
+          <a:lstStyle/>
+          <a:p>
+            <a:pPr indent="0" marL="0">
+              <a:lnSpc>
+                <a:spcPct val="120000"/>
+              </a:lnSpc>
+              <a:buNone/>
+            </a:pPr>
+            <a:r>
+              <a:rPr lang="en-US" sz="1400" b="1" dirty="0">
+                <a:solidFill>
+                  <a:srgbClr val="0F172A"/>
+                </a:solidFill>
+                <a:latin typeface="Pretendard" pitchFamily="34" charset="0"/>
+                <a:ea typeface="Pretendard" pitchFamily="34" charset="-122"/>
+                <a:cs typeface="Pretendard" pitchFamily="34" charset="-120"/>
+              </a:rPr>
+              <a:t>철근콘크리트구조</a:t>
+            </a:r>
+            <a:endParaRPr lang="en-US" sz="1400" dirty="0"/>
+          </a:p>
+        </p:txBody>
+      </p:sp>
+      <p:sp>
+        <p:nvSpPr>
+          <p:cNvPr id="29" name="Shape 27"/>
+          <p:cNvSpPr/>
+          <p:nvPr/>
+        </p:nvSpPr>
+        <p:spPr>
+          <a:xfrm>
+            <a:off x="566928" y="4864608"/>
+            <a:ext cx="6858000" cy="0"/>
+          </a:xfrm>
+          <a:prstGeom prst="line">
+            <a:avLst/>
+          </a:prstGeom>
+          <a:noFill/>
+          <a:ln w="3810">
+            <a:solidFill>
+              <a:srgbClr val="CBD5E1"/>
+            </a:solidFill>
+            <a:prstDash val="solid"/>
+          </a:ln>
+        </p:spPr>
+      </p:sp>
+      <p:sp>
+        <p:nvSpPr>
+          <p:cNvPr id="30" name="Text 28"/>
+          <p:cNvSpPr/>
+          <p:nvPr/>
+        </p:nvSpPr>
+        <p:spPr>
+          <a:xfrm>
+            <a:off x="566928" y="4864608"/>
+            <a:ext cx="2606040" cy="402336"/>
+          </a:xfrm>
+          <a:prstGeom prst="rect">
+            <a:avLst/>
+          </a:prstGeom>
+          <a:noFill/>
+          <a:ln/>
+        </p:spPr>
+        <p:txBody>
+          <a:bodyPr wrap="square" lIns="0" tIns="0" rIns="0" bIns="0" rtlCol="0" anchor="ctr"/>
+          <a:lstStyle/>
+          <a:p>
+            <a:pPr indent="0" marL="0">
+              <a:lnSpc>
+                <a:spcPct val="120000"/>
+              </a:lnSpc>
+              <a:buNone/>
+            </a:pPr>
+            <a:r>
+              <a:rPr lang="en-US" sz="1400" dirty="0">
+                <a:solidFill>
+                  <a:srgbClr val="64748B"/>
+                </a:solidFill>
+                <a:latin typeface="Pretendard" pitchFamily="34" charset="0"/>
+                <a:ea typeface="Pretendard" pitchFamily="34" charset="-122"/>
+                <a:cs typeface="Pretendard" pitchFamily="34" charset="-120"/>
+              </a:rPr>
+              <a:t>매매 희망가</a:t>
+            </a:r>
+            <a:endParaRPr lang="en-US" sz="1400" dirty="0"/>
+          </a:p>
+        </p:txBody>
+      </p:sp>
+      <p:sp>
+        <p:nvSpPr>
+          <p:cNvPr id="31" name="Text 29"/>
+          <p:cNvSpPr/>
+          <p:nvPr/>
+        </p:nvSpPr>
+        <p:spPr>
+          <a:xfrm>
+            <a:off x="3172968" y="4864608"/>
+            <a:ext cx="4251960" cy="402336"/>
+          </a:xfrm>
+          <a:prstGeom prst="rect">
+            <a:avLst/>
+          </a:prstGeom>
+          <a:noFill/>
+          <a:ln/>
+        </p:spPr>
+        <p:txBody>
+          <a:bodyPr wrap="square" lIns="0" tIns="0" rIns="0" bIns="0" rtlCol="0" anchor="ctr"/>
+          <a:lstStyle/>
+          <a:p>
+            <a:pPr indent="0" marL="0">
+              <a:lnSpc>
+                <a:spcPct val="120000"/>
+              </a:lnSpc>
+              <a:buNone/>
+            </a:pPr>
+            <a:r>
+              <a:rPr lang="en-US" sz="1400" b="1" dirty="0">
+                <a:solidFill>
+                  <a:srgbClr val="0F172A"/>
+                </a:solidFill>
+                <a:latin typeface="Pretendard" pitchFamily="34" charset="0"/>
+                <a:ea typeface="Pretendard" pitchFamily="34" charset="-122"/>
+                <a:cs typeface="Pretendard" pitchFamily="34" charset="-120"/>
+              </a:rPr>
+              <a:t>98억</a:t>
+            </a:r>
+            <a:endParaRPr lang="en-US" sz="1400" dirty="0"/>
+          </a:p>
+        </p:txBody>
+      </p:sp>
+      <p:sp>
+        <p:nvSpPr>
+          <p:cNvPr id="32" name="Shape 30"/>
           <p:cNvSpPr/>
           <p:nvPr/>
         </p:nvSpPr>
@@ -4675,18 +6178,18 @@
       </p:sp>
       <p:sp>
         <p:nvSpPr>
-          <p:cNvPr id="9" name="Shape 7"/>
+          <p:cNvPr id="33" name="Shape 31"/>
           <p:cNvSpPr/>
           <p:nvPr/>
         </p:nvSpPr>
         <p:spPr>
           <a:xfrm>
             <a:off x="7784287" y="1645920"/>
-            <a:ext cx="3840480" cy="2103120"/>
+            <a:ext cx="3840480" cy="1645920"/>
           </a:xfrm>
           <a:prstGeom prst="roundRect">
             <a:avLst>
-              <a:gd name="adj" fmla="val 2609"/>
+              <a:gd name="adj" fmla="val 3333"/>
             </a:avLst>
           </a:prstGeom>
           <a:solidFill>
@@ -4697,14 +6200,14 @@
       </p:sp>
       <p:sp>
         <p:nvSpPr>
-          <p:cNvPr id="10" name="Shape 8"/>
+          <p:cNvPr id="34" name="Shape 32"/>
           <p:cNvSpPr/>
           <p:nvPr/>
         </p:nvSpPr>
         <p:spPr>
           <a:xfrm>
             <a:off x="7784287" y="1700784"/>
-            <a:ext cx="36576" cy="1993392"/>
+            <a:ext cx="36576" cy="1536192"/>
           </a:xfrm>
           <a:prstGeom prst="rect">
             <a:avLst/>
@@ -4717,7 +6220,7 @@
       </p:sp>
       <p:sp>
         <p:nvSpPr>
-          <p:cNvPr id="11" name="Text 9"/>
+          <p:cNvPr id="35" name="Text 33"/>
           <p:cNvSpPr/>
           <p:nvPr/>
         </p:nvSpPr>
@@ -4739,31 +6242,20 @@
             <a:pPr indent="0" marL="0">
               <a:buNone/>
             </a:pPr>
-            <a:r>
-              <a:rPr lang="en-US" sz="1050" b="1" dirty="0">
-                <a:solidFill>
-                  <a:srgbClr val="1D4ED8"/>
-                </a:solidFill>
-                <a:latin typeface="Pretendard" pitchFamily="34" charset="0"/>
-                <a:ea typeface="Pretendard" pitchFamily="34" charset="-122"/>
-                <a:cs typeface="Pretendard" pitchFamily="34" charset="-120"/>
-              </a:rPr>
-              <a:t>토지 및 건물 분석 포인트</a:t>
-            </a:r>
             <a:endParaRPr lang="en-US" sz="1050" dirty="0"/>
           </a:p>
         </p:txBody>
       </p:sp>
       <p:sp>
         <p:nvSpPr>
-          <p:cNvPr id="12" name="Text 10"/>
+          <p:cNvPr id="36" name="Text 34"/>
           <p:cNvSpPr/>
           <p:nvPr/>
         </p:nvSpPr>
         <p:spPr>
           <a:xfrm>
             <a:off x="7967167" y="1975104"/>
-            <a:ext cx="3511296" cy="1700784"/>
+            <a:ext cx="3511296" cy="1243584"/>
           </a:xfrm>
           <a:prstGeom prst="rect">
             <a:avLst/>
@@ -4775,12 +6267,11 @@
           <a:bodyPr wrap="square" lIns="0" tIns="0" rIns="0" bIns="0" rtlCol="0" anchor="t"/>
           <a:lstStyle/>
           <a:p>
-            <a:pPr marL="342900" indent="-342900">
+            <a:pPr indent="0" marL="0">
               <a:lnSpc>
                 <a:spcPct val="120000"/>
               </a:lnSpc>
-              <a:buSzPct val="100000"/>
-              <a:buChar char="•"/>
+              <a:buNone/>
             </a:pPr>
             <a:r>
               <a:rPr lang="en-US" sz="930" dirty="0">
@@ -4791,223 +6282,15 @@
                 <a:ea typeface="Pretendard" pitchFamily="34" charset="-122"/>
                 <a:cs typeface="Pretendard" pitchFamily="34" charset="-120"/>
               </a:rPr>
-              <a:t>서초대로 25m 메인 도로변 우수한 가시성 확보</a:t>
+              <a:t>본 매물은 강남권역 대로변 입지의 우량 메디컬 테넌트 만실 운영 자산입니다.</a:t>
             </a:r>
             <a:endParaRPr lang="en-US" sz="930" dirty="0"/>
           </a:p>
-          <a:p>
-            <a:pPr marL="342900" indent="-342900">
-              <a:lnSpc>
-                <a:spcPct val="120000"/>
-              </a:lnSpc>
-              <a:buSzPct val="100000"/>
-              <a:buChar char="•"/>
-            </a:pPr>
-            <a:r>
-              <a:rPr lang="en-US" sz="930" dirty="0">
-                <a:solidFill>
-                  <a:srgbClr val="0F172A"/>
-                </a:solidFill>
-                <a:latin typeface="Pretendard" pitchFamily="34" charset="0"/>
-                <a:ea typeface="Pretendard" pitchFamily="34" charset="-122"/>
-                <a:cs typeface="Pretendard" pitchFamily="34" charset="-120"/>
-              </a:rPr>
-              <a:t>제3종일반주거지역 법정 용적률 완비 자산</a:t>
-            </a:r>
-            <a:endParaRPr lang="en-US" sz="930" dirty="0"/>
-          </a:p>
-          <a:p>
-            <a:pPr marL="342900" indent="-342900">
-              <a:lnSpc>
-                <a:spcPct val="120000"/>
-              </a:lnSpc>
-              <a:buSzPct val="100000"/>
-              <a:buChar char="•"/>
-            </a:pPr>
-            <a:r>
-              <a:rPr lang="en-US" sz="930" dirty="0">
-                <a:solidFill>
-                  <a:srgbClr val="0F172A"/>
-                </a:solidFill>
-                <a:latin typeface="Pretendard" pitchFamily="34" charset="0"/>
-                <a:ea typeface="Pretendard" pitchFamily="34" charset="-122"/>
-                <a:cs typeface="Pretendard" pitchFamily="34" charset="-120"/>
-              </a:rPr>
-              <a:t>침대용 승강기 완비로 병의원 입점 최적화 구조</a:t>
-            </a:r>
-            <a:endParaRPr lang="en-US" sz="930" dirty="0"/>
-          </a:p>
-        </p:txBody>
-      </p:sp>
-      <p:sp>
-        <p:nvSpPr>
-          <p:cNvPr id="13" name="Shape 11"/>
-          <p:cNvSpPr/>
-          <p:nvPr/>
-        </p:nvSpPr>
-        <p:spPr>
-          <a:xfrm>
-            <a:off x="7784287" y="3977640"/>
-            <a:ext cx="3840480" cy="2148840"/>
-          </a:xfrm>
-          <a:prstGeom prst="roundRect">
-            <a:avLst>
-              <a:gd name="adj" fmla="val 2553"/>
-            </a:avLst>
-          </a:prstGeom>
-          <a:solidFill>
-            <a:srgbClr val="DBEAFE"/>
-          </a:solidFill>
-          <a:ln/>
-        </p:spPr>
-      </p:sp>
-      <p:sp>
-        <p:nvSpPr>
-          <p:cNvPr id="14" name="Shape 12"/>
-          <p:cNvSpPr/>
-          <p:nvPr/>
-        </p:nvSpPr>
-        <p:spPr>
-          <a:xfrm>
-            <a:off x="7784287" y="4032504"/>
-            <a:ext cx="36576" cy="2039112"/>
-          </a:xfrm>
-          <a:prstGeom prst="rect">
-            <a:avLst/>
-          </a:prstGeom>
-          <a:solidFill>
-            <a:srgbClr val="1D4ED8"/>
-          </a:solidFill>
-          <a:ln/>
-        </p:spPr>
-      </p:sp>
-      <p:sp>
-        <p:nvSpPr>
-          <p:cNvPr id="15" name="Text 13"/>
-          <p:cNvSpPr/>
-          <p:nvPr/>
-        </p:nvSpPr>
-        <p:spPr>
-          <a:xfrm>
-            <a:off x="7967167" y="4087368"/>
-            <a:ext cx="3511296" cy="201168"/>
-          </a:xfrm>
-          <a:prstGeom prst="rect">
-            <a:avLst/>
-          </a:prstGeom>
-          <a:noFill/>
-          <a:ln/>
-        </p:spPr>
-        <p:txBody>
-          <a:bodyPr wrap="square" lIns="0" tIns="0" rIns="0" bIns="0" rtlCol="0" anchor="ctr"/>
-          <a:lstStyle/>
-          <a:p>
-            <a:pPr indent="0" marL="0">
-              <a:buNone/>
-            </a:pPr>
-            <a:r>
-              <a:rPr lang="en-US" sz="1050" b="1" dirty="0">
-                <a:solidFill>
-                  <a:srgbClr val="1D4ED8"/>
-                </a:solidFill>
-                <a:latin typeface="Pretendard" pitchFamily="34" charset="0"/>
-                <a:ea typeface="Pretendard" pitchFamily="34" charset="-122"/>
-                <a:cs typeface="Pretendard" pitchFamily="34" charset="-120"/>
-              </a:rPr>
-              <a:t>물건 실사 및 관리 상태</a:t>
-            </a:r>
-            <a:endParaRPr lang="en-US" sz="1050" dirty="0"/>
-          </a:p>
-        </p:txBody>
-      </p:sp>
-      <p:sp>
-        <p:nvSpPr>
-          <p:cNvPr id="16" name="Text 14"/>
-          <p:cNvSpPr/>
-          <p:nvPr/>
-        </p:nvSpPr>
-        <p:spPr>
-          <a:xfrm>
-            <a:off x="7967167" y="4306824"/>
-            <a:ext cx="3511296" cy="1746504"/>
-          </a:xfrm>
-          <a:prstGeom prst="rect">
-            <a:avLst/>
-          </a:prstGeom>
-          <a:noFill/>
-          <a:ln/>
-        </p:spPr>
-        <p:txBody>
-          <a:bodyPr wrap="square" lIns="0" tIns="0" rIns="0" bIns="0" rtlCol="0" anchor="t"/>
-          <a:lstStyle/>
-          <a:p>
-            <a:pPr marL="342900" indent="-342900">
-              <a:lnSpc>
-                <a:spcPct val="120000"/>
-              </a:lnSpc>
-              <a:buSzPct val="100000"/>
-              <a:buChar char="•"/>
-            </a:pPr>
-            <a:r>
-              <a:rPr lang="en-US" sz="930" dirty="0">
-                <a:solidFill>
-                  <a:srgbClr val="0F172A"/>
-                </a:solidFill>
-                <a:latin typeface="Pretendard" pitchFamily="34" charset="0"/>
-                <a:ea typeface="Pretendard" pitchFamily="34" charset="-122"/>
-                <a:cs typeface="Pretendard" pitchFamily="34" charset="-120"/>
-              </a:rPr>
-              <a:t>2017년 준공 신축급 상태로 누수·균열 0건</a:t>
-            </a:r>
-            <a:endParaRPr lang="en-US" sz="930" dirty="0"/>
-          </a:p>
-          <a:p>
-            <a:pPr marL="342900" indent="-342900">
-              <a:lnSpc>
-                <a:spcPct val="120000"/>
-              </a:lnSpc>
-              <a:buSzPct val="100000"/>
-              <a:buChar char="•"/>
-            </a:pPr>
-            <a:r>
-              <a:rPr lang="en-US" sz="930" dirty="0">
-                <a:solidFill>
-                  <a:srgbClr val="0F172A"/>
-                </a:solidFill>
-                <a:latin typeface="Pretendard" pitchFamily="34" charset="0"/>
-                <a:ea typeface="Pretendard" pitchFamily="34" charset="-122"/>
-                <a:cs typeface="Pretendard" pitchFamily="34" charset="-120"/>
-              </a:rPr>
-              <a:t>단독 법인 소유로 권리관계 투명</a:t>
-            </a:r>
-            <a:endParaRPr lang="en-US" sz="930" dirty="0"/>
-          </a:p>
-          <a:p>
-            <a:pPr marL="342900" indent="-342900">
-              <a:lnSpc>
-                <a:spcPct val="120000"/>
-              </a:lnSpc>
-              <a:buSzPct val="100000"/>
-              <a:buChar char="•"/>
-            </a:pPr>
-            <a:r>
-              <a:rPr lang="en-US" sz="930" dirty="0">
-                <a:solidFill>
-                  <a:srgbClr val="0F172A"/>
-                </a:solidFill>
-                <a:latin typeface="Pretendard" pitchFamily="34" charset="0"/>
-                <a:ea typeface="Pretendard" pitchFamily="34" charset="-122"/>
-                <a:cs typeface="Pretendard" pitchFamily="34" charset="-120"/>
-              </a:rPr>
-              <a:t>1금융권 담보대출 85억 원 승계 적격</a:t>
-            </a:r>
-            <a:endParaRPr lang="en-US" sz="930" dirty="0"/>
-          </a:p>
-        </p:txBody>
-      </p:sp>
-      <p:sp>
-        <p:nvSpPr>
-          <p:cNvPr id="17" name="Text 15"/>
+        </p:txBody>
+      </p:sp>
+      <p:sp>
+        <p:nvSpPr>
+          <p:cNvPr id="37" name="Text 35"/>
           <p:cNvSpPr/>
           <p:nvPr/>
         </p:nvSpPr>
@@ -5046,7 +6329,7 @@
       </p:sp>
       <p:sp>
         <p:nvSpPr>
-          <p:cNvPr id="18" name="Shape 16"/>
+          <p:cNvPr id="38" name="Shape 36"/>
           <p:cNvSpPr/>
           <p:nvPr/>
         </p:nvSpPr>
@@ -6551,7 +7834,7 @@
                 <a:ea typeface="Pretendard" pitchFamily="34" charset="-122"/>
                 <a:cs typeface="Pretendard" pitchFamily="34" charset="-120"/>
               </a:rPr>
-              <a:t>밸류업 시나리오 (AI 추정)</a:t>
+              <a:t>3대 핵심 투자 포인트 (Investment Highlights)</a:t>
             </a:r>
             <a:endParaRPr lang="en-US" sz="1050" dirty="0"/>
           </a:p>
@@ -6560,6 +7843,642 @@
       <p:sp>
         <p:nvSpPr>
           <p:cNvPr id="6" name="Shape 4"/>
+          <p:cNvSpPr/>
+          <p:nvPr/>
+        </p:nvSpPr>
+        <p:spPr>
+          <a:xfrm>
+            <a:off x="566928" y="1481328"/>
+            <a:ext cx="3472586" cy="3474720"/>
+          </a:xfrm>
+          <a:prstGeom prst="roundRect">
+            <a:avLst>
+              <a:gd name="adj" fmla="val 2107"/>
+            </a:avLst>
+          </a:prstGeom>
+          <a:solidFill>
+            <a:srgbClr val="F8FAFC"/>
+          </a:solidFill>
+          <a:ln w="10160">
+            <a:solidFill>
+              <a:srgbClr val="CBD5E1"/>
+            </a:solidFill>
+            <a:prstDash val="solid"/>
+          </a:ln>
+        </p:spPr>
+      </p:sp>
+      <p:sp>
+        <p:nvSpPr>
+          <p:cNvPr id="7" name="Shape 5"/>
+          <p:cNvSpPr/>
+          <p:nvPr/>
+        </p:nvSpPr>
+        <p:spPr>
+          <a:xfrm>
+            <a:off x="566928" y="1481328"/>
+            <a:ext cx="3472586" cy="54864"/>
+          </a:xfrm>
+          <a:prstGeom prst="rect">
+            <a:avLst/>
+          </a:prstGeom>
+          <a:solidFill>
+            <a:srgbClr val="6B8E00"/>
+          </a:solidFill>
+          <a:ln/>
+        </p:spPr>
+      </p:sp>
+      <p:sp>
+        <p:nvSpPr>
+          <p:cNvPr id="8" name="Shape 6"/>
+          <p:cNvSpPr/>
+          <p:nvPr/>
+        </p:nvSpPr>
+        <p:spPr>
+          <a:xfrm>
+            <a:off x="795528" y="1755648"/>
+            <a:ext cx="475488" cy="292608"/>
+          </a:xfrm>
+          <a:prstGeom prst="roundRect">
+            <a:avLst>
+              <a:gd name="adj" fmla="val 12500"/>
+            </a:avLst>
+          </a:prstGeom>
+          <a:solidFill>
+            <a:srgbClr val="A3D900"/>
+          </a:solidFill>
+          <a:ln/>
+        </p:spPr>
+      </p:sp>
+      <p:sp>
+        <p:nvSpPr>
+          <p:cNvPr id="9" name="Text 7"/>
+          <p:cNvSpPr/>
+          <p:nvPr/>
+        </p:nvSpPr>
+        <p:spPr>
+          <a:xfrm>
+            <a:off x="795528" y="1755648"/>
+            <a:ext cx="475488" cy="292608"/>
+          </a:xfrm>
+          <a:prstGeom prst="rect">
+            <a:avLst/>
+          </a:prstGeom>
+          <a:noFill/>
+          <a:ln/>
+        </p:spPr>
+        <p:txBody>
+          <a:bodyPr wrap="square" lIns="0" tIns="0" rIns="0" bIns="0" rtlCol="0" anchor="ctr"/>
+          <a:lstStyle/>
+          <a:p>
+            <a:pPr algn="ctr" indent="0" marL="0">
+              <a:buNone/>
+            </a:pPr>
+            <a:r>
+              <a:rPr lang="en-US" sz="1100" b="1" dirty="0">
+                <a:solidFill>
+                  <a:srgbClr val="4F6A00"/>
+                </a:solidFill>
+                <a:latin typeface="Arial" pitchFamily="34" charset="0"/>
+                <a:ea typeface="Arial" pitchFamily="34" charset="-122"/>
+                <a:cs typeface="Arial" pitchFamily="34" charset="-120"/>
+              </a:rPr>
+              <a:t>01</a:t>
+            </a:r>
+            <a:endParaRPr lang="en-US" sz="1100" dirty="0"/>
+          </a:p>
+        </p:txBody>
+      </p:sp>
+      <p:sp>
+        <p:nvSpPr>
+          <p:cNvPr id="10" name="Text 8"/>
+          <p:cNvSpPr/>
+          <p:nvPr/>
+        </p:nvSpPr>
+        <p:spPr>
+          <a:xfrm>
+            <a:off x="795528" y="2194560"/>
+            <a:ext cx="3015386" cy="365760"/>
+          </a:xfrm>
+          <a:prstGeom prst="rect">
+            <a:avLst/>
+          </a:prstGeom>
+          <a:noFill/>
+          <a:ln/>
+        </p:spPr>
+        <p:txBody>
+          <a:bodyPr wrap="square" lIns="0" tIns="0" rIns="0" bIns="0" rtlCol="0" anchor="t"/>
+          <a:lstStyle/>
+          <a:p>
+            <a:pPr indent="0" marL="0">
+              <a:buNone/>
+            </a:pPr>
+            <a:r>
+              <a:rPr lang="en-US" sz="1500" b="1" dirty="0">
+                <a:solidFill>
+                  <a:srgbClr val="0F172A"/>
+                </a:solidFill>
+                <a:latin typeface="Pretendard" pitchFamily="34" charset="0"/>
+                <a:ea typeface="Pretendard" pitchFamily="34" charset="-122"/>
+                <a:cs typeface="Pretendard" pitchFamily="34" charset="-120"/>
+              </a:rPr>
+              <a:t>원금 안전판 확보</a:t>
+            </a:r>
+            <a:endParaRPr lang="en-US" sz="1500" dirty="0"/>
+          </a:p>
+        </p:txBody>
+      </p:sp>
+      <p:sp>
+        <p:nvSpPr>
+          <p:cNvPr id="11" name="Shape 9"/>
+          <p:cNvSpPr/>
+          <p:nvPr/>
+        </p:nvSpPr>
+        <p:spPr>
+          <a:xfrm>
+            <a:off x="795528" y="2624328"/>
+            <a:ext cx="3015386" cy="0"/>
+          </a:xfrm>
+          <a:prstGeom prst="line">
+            <a:avLst/>
+          </a:prstGeom>
+          <a:noFill/>
+          <a:ln w="6350">
+            <a:solidFill>
+              <a:srgbClr val="CBD5E1"/>
+            </a:solidFill>
+            <a:prstDash val="solid"/>
+          </a:ln>
+        </p:spPr>
+      </p:sp>
+      <p:sp>
+        <p:nvSpPr>
+          <p:cNvPr id="12" name="Text 10"/>
+          <p:cNvSpPr/>
+          <p:nvPr/>
+        </p:nvSpPr>
+        <p:spPr>
+          <a:xfrm>
+            <a:off x="795528" y="2779776"/>
+            <a:ext cx="3015386" cy="1965960"/>
+          </a:xfrm>
+          <a:prstGeom prst="rect">
+            <a:avLst/>
+          </a:prstGeom>
+          <a:noFill/>
+          <a:ln/>
+        </p:spPr>
+        <p:txBody>
+          <a:bodyPr wrap="square" lIns="0" tIns="0" rIns="0" bIns="0" rtlCol="0" anchor="t"/>
+          <a:lstStyle/>
+          <a:p>
+            <a:pPr indent="0" marL="0">
+              <a:lnSpc>
+                <a:spcPct val="130000"/>
+              </a:lnSpc>
+              <a:buNone/>
+            </a:pPr>
+            <a:r>
+              <a:rPr lang="en-US" sz="1200" dirty="0">
+                <a:solidFill>
+                  <a:srgbClr val="0F172A"/>
+                </a:solidFill>
+                <a:latin typeface="Pretendard" pitchFamily="34" charset="0"/>
+                <a:ea typeface="Pretendard" pitchFamily="34" charset="-122"/>
+                <a:cs typeface="Pretendard" pitchFamily="34" charset="-120"/>
+              </a:rPr>
+              <a:t>강남권역의 핵심 입지로, 우량한 대지 지분 가치가 하방 경직성을 강력히 지지합니다.</a:t>
+            </a:r>
+            <a:endParaRPr lang="en-US" sz="1200" dirty="0"/>
+          </a:p>
+        </p:txBody>
+      </p:sp>
+      <p:sp>
+        <p:nvSpPr>
+          <p:cNvPr id="13" name="Shape 11"/>
+          <p:cNvSpPr/>
+          <p:nvPr/>
+        </p:nvSpPr>
+        <p:spPr>
+          <a:xfrm>
+            <a:off x="4359554" y="1481328"/>
+            <a:ext cx="3472586" cy="3474720"/>
+          </a:xfrm>
+          <a:prstGeom prst="roundRect">
+            <a:avLst>
+              <a:gd name="adj" fmla="val 2107"/>
+            </a:avLst>
+          </a:prstGeom>
+          <a:solidFill>
+            <a:srgbClr val="F8FAFC"/>
+          </a:solidFill>
+          <a:ln w="10160">
+            <a:solidFill>
+              <a:srgbClr val="CBD5E1"/>
+            </a:solidFill>
+            <a:prstDash val="solid"/>
+          </a:ln>
+        </p:spPr>
+      </p:sp>
+      <p:sp>
+        <p:nvSpPr>
+          <p:cNvPr id="14" name="Shape 12"/>
+          <p:cNvSpPr/>
+          <p:nvPr/>
+        </p:nvSpPr>
+        <p:spPr>
+          <a:xfrm>
+            <a:off x="4359554" y="1481328"/>
+            <a:ext cx="3472586" cy="54864"/>
+          </a:xfrm>
+          <a:prstGeom prst="rect">
+            <a:avLst/>
+          </a:prstGeom>
+          <a:solidFill>
+            <a:srgbClr val="6B8E00"/>
+          </a:solidFill>
+          <a:ln/>
+        </p:spPr>
+      </p:sp>
+      <p:sp>
+        <p:nvSpPr>
+          <p:cNvPr id="15" name="Shape 13"/>
+          <p:cNvSpPr/>
+          <p:nvPr/>
+        </p:nvSpPr>
+        <p:spPr>
+          <a:xfrm>
+            <a:off x="4588154" y="1755648"/>
+            <a:ext cx="475488" cy="292608"/>
+          </a:xfrm>
+          <a:prstGeom prst="roundRect">
+            <a:avLst>
+              <a:gd name="adj" fmla="val 12500"/>
+            </a:avLst>
+          </a:prstGeom>
+          <a:solidFill>
+            <a:srgbClr val="A3D900"/>
+          </a:solidFill>
+          <a:ln/>
+        </p:spPr>
+      </p:sp>
+      <p:sp>
+        <p:nvSpPr>
+          <p:cNvPr id="16" name="Text 14"/>
+          <p:cNvSpPr/>
+          <p:nvPr/>
+        </p:nvSpPr>
+        <p:spPr>
+          <a:xfrm>
+            <a:off x="4588154" y="1755648"/>
+            <a:ext cx="475488" cy="292608"/>
+          </a:xfrm>
+          <a:prstGeom prst="rect">
+            <a:avLst/>
+          </a:prstGeom>
+          <a:noFill/>
+          <a:ln/>
+        </p:spPr>
+        <p:txBody>
+          <a:bodyPr wrap="square" lIns="0" tIns="0" rIns="0" bIns="0" rtlCol="0" anchor="ctr"/>
+          <a:lstStyle/>
+          <a:p>
+            <a:pPr algn="ctr" indent="0" marL="0">
+              <a:buNone/>
+            </a:pPr>
+            <a:r>
+              <a:rPr lang="en-US" sz="1100" b="1" dirty="0">
+                <a:solidFill>
+                  <a:srgbClr val="4F6A00"/>
+                </a:solidFill>
+                <a:latin typeface="Arial" pitchFamily="34" charset="0"/>
+                <a:ea typeface="Arial" pitchFamily="34" charset="-122"/>
+                <a:cs typeface="Arial" pitchFamily="34" charset="-120"/>
+              </a:rPr>
+              <a:t>02</a:t>
+            </a:r>
+            <a:endParaRPr lang="en-US" sz="1100" dirty="0"/>
+          </a:p>
+        </p:txBody>
+      </p:sp>
+      <p:sp>
+        <p:nvSpPr>
+          <p:cNvPr id="17" name="Text 15"/>
+          <p:cNvSpPr/>
+          <p:nvPr/>
+        </p:nvSpPr>
+        <p:spPr>
+          <a:xfrm>
+            <a:off x="4588154" y="2194560"/>
+            <a:ext cx="3015386" cy="365760"/>
+          </a:xfrm>
+          <a:prstGeom prst="rect">
+            <a:avLst/>
+          </a:prstGeom>
+          <a:noFill/>
+          <a:ln/>
+        </p:spPr>
+        <p:txBody>
+          <a:bodyPr wrap="square" lIns="0" tIns="0" rIns="0" bIns="0" rtlCol="0" anchor="t"/>
+          <a:lstStyle/>
+          <a:p>
+            <a:pPr indent="0" marL="0">
+              <a:buNone/>
+            </a:pPr>
+            <a:r>
+              <a:rPr lang="en-US" sz="1500" b="1" dirty="0">
+                <a:solidFill>
+                  <a:srgbClr val="0F172A"/>
+                </a:solidFill>
+                <a:latin typeface="Pretendard" pitchFamily="34" charset="0"/>
+                <a:ea typeface="Pretendard" pitchFamily="34" charset="-122"/>
+                <a:cs typeface="Pretendard" pitchFamily="34" charset="-120"/>
+              </a:rPr>
+              <a:t>확실한 월 현금흐름</a:t>
+            </a:r>
+            <a:endParaRPr lang="en-US" sz="1500" dirty="0"/>
+          </a:p>
+        </p:txBody>
+      </p:sp>
+      <p:sp>
+        <p:nvSpPr>
+          <p:cNvPr id="18" name="Shape 16"/>
+          <p:cNvSpPr/>
+          <p:nvPr/>
+        </p:nvSpPr>
+        <p:spPr>
+          <a:xfrm>
+            <a:off x="4588154" y="2624328"/>
+            <a:ext cx="3015386" cy="0"/>
+          </a:xfrm>
+          <a:prstGeom prst="line">
+            <a:avLst/>
+          </a:prstGeom>
+          <a:noFill/>
+          <a:ln w="6350">
+            <a:solidFill>
+              <a:srgbClr val="CBD5E1"/>
+            </a:solidFill>
+            <a:prstDash val="solid"/>
+          </a:ln>
+        </p:spPr>
+      </p:sp>
+      <p:sp>
+        <p:nvSpPr>
+          <p:cNvPr id="19" name="Text 17"/>
+          <p:cNvSpPr/>
+          <p:nvPr/>
+        </p:nvSpPr>
+        <p:spPr>
+          <a:xfrm>
+            <a:off x="4588154" y="2779776"/>
+            <a:ext cx="3015386" cy="1965960"/>
+          </a:xfrm>
+          <a:prstGeom prst="rect">
+            <a:avLst/>
+          </a:prstGeom>
+          <a:noFill/>
+          <a:ln/>
+        </p:spPr>
+        <p:txBody>
+          <a:bodyPr wrap="square" lIns="0" tIns="0" rIns="0" bIns="0" rtlCol="0" anchor="t"/>
+          <a:lstStyle/>
+          <a:p>
+            <a:pPr indent="0" marL="0">
+              <a:lnSpc>
+                <a:spcPct val="130000"/>
+              </a:lnSpc>
+              <a:buNone/>
+            </a:pPr>
+            <a:r>
+              <a:rPr lang="en-US" sz="1200" dirty="0">
+                <a:solidFill>
+                  <a:srgbClr val="0F172A"/>
+                </a:solidFill>
+                <a:latin typeface="Pretendard" pitchFamily="34" charset="0"/>
+                <a:ea typeface="Pretendard" pitchFamily="34" charset="-122"/>
+                <a:cs typeface="Pretendard" pitchFamily="34" charset="-120"/>
+              </a:rPr>
+              <a:t>우량 테넌트 만실 운영 및 장기 계약 구조를 통해 매월 안정적인 순수익 창출이 검토 여지가 있으나, 관련 법규·인허가·시설 요건의 현장 확인이 필요합니다..</a:t>
+            </a:r>
+            <a:endParaRPr lang="en-US" sz="1200" dirty="0"/>
+          </a:p>
+        </p:txBody>
+      </p:sp>
+      <p:sp>
+        <p:nvSpPr>
+          <p:cNvPr id="20" name="Shape 18"/>
+          <p:cNvSpPr/>
+          <p:nvPr/>
+        </p:nvSpPr>
+        <p:spPr>
+          <a:xfrm>
+            <a:off x="8152181" y="1481328"/>
+            <a:ext cx="3472586" cy="3474720"/>
+          </a:xfrm>
+          <a:prstGeom prst="roundRect">
+            <a:avLst>
+              <a:gd name="adj" fmla="val 2107"/>
+            </a:avLst>
+          </a:prstGeom>
+          <a:solidFill>
+            <a:srgbClr val="F8FAFC"/>
+          </a:solidFill>
+          <a:ln w="10160">
+            <a:solidFill>
+              <a:srgbClr val="CBD5E1"/>
+            </a:solidFill>
+            <a:prstDash val="solid"/>
+          </a:ln>
+        </p:spPr>
+      </p:sp>
+      <p:sp>
+        <p:nvSpPr>
+          <p:cNvPr id="21" name="Shape 19"/>
+          <p:cNvSpPr/>
+          <p:nvPr/>
+        </p:nvSpPr>
+        <p:spPr>
+          <a:xfrm>
+            <a:off x="8152181" y="1481328"/>
+            <a:ext cx="3472586" cy="54864"/>
+          </a:xfrm>
+          <a:prstGeom prst="rect">
+            <a:avLst/>
+          </a:prstGeom>
+          <a:solidFill>
+            <a:srgbClr val="6B8E00"/>
+          </a:solidFill>
+          <a:ln/>
+        </p:spPr>
+      </p:sp>
+      <p:sp>
+        <p:nvSpPr>
+          <p:cNvPr id="22" name="Shape 20"/>
+          <p:cNvSpPr/>
+          <p:nvPr/>
+        </p:nvSpPr>
+        <p:spPr>
+          <a:xfrm>
+            <a:off x="8380781" y="1755648"/>
+            <a:ext cx="475488" cy="292608"/>
+          </a:xfrm>
+          <a:prstGeom prst="roundRect">
+            <a:avLst>
+              <a:gd name="adj" fmla="val 12500"/>
+            </a:avLst>
+          </a:prstGeom>
+          <a:solidFill>
+            <a:srgbClr val="A3D900"/>
+          </a:solidFill>
+          <a:ln/>
+        </p:spPr>
+      </p:sp>
+      <p:sp>
+        <p:nvSpPr>
+          <p:cNvPr id="23" name="Text 21"/>
+          <p:cNvSpPr/>
+          <p:nvPr/>
+        </p:nvSpPr>
+        <p:spPr>
+          <a:xfrm>
+            <a:off x="8380781" y="1755648"/>
+            <a:ext cx="475488" cy="292608"/>
+          </a:xfrm>
+          <a:prstGeom prst="rect">
+            <a:avLst/>
+          </a:prstGeom>
+          <a:noFill/>
+          <a:ln/>
+        </p:spPr>
+        <p:txBody>
+          <a:bodyPr wrap="square" lIns="0" tIns="0" rIns="0" bIns="0" rtlCol="0" anchor="ctr"/>
+          <a:lstStyle/>
+          <a:p>
+            <a:pPr algn="ctr" indent="0" marL="0">
+              <a:buNone/>
+            </a:pPr>
+            <a:r>
+              <a:rPr lang="en-US" sz="1100" b="1" dirty="0">
+                <a:solidFill>
+                  <a:srgbClr val="4F6A00"/>
+                </a:solidFill>
+                <a:latin typeface="Arial" pitchFamily="34" charset="0"/>
+                <a:ea typeface="Arial" pitchFamily="34" charset="-122"/>
+                <a:cs typeface="Arial" pitchFamily="34" charset="-120"/>
+              </a:rPr>
+              <a:t>03</a:t>
+            </a:r>
+            <a:endParaRPr lang="en-US" sz="1100" dirty="0"/>
+          </a:p>
+        </p:txBody>
+      </p:sp>
+      <p:sp>
+        <p:nvSpPr>
+          <p:cNvPr id="24" name="Text 22"/>
+          <p:cNvSpPr/>
+          <p:nvPr/>
+        </p:nvSpPr>
+        <p:spPr>
+          <a:xfrm>
+            <a:off x="8380781" y="2194560"/>
+            <a:ext cx="3015386" cy="365760"/>
+          </a:xfrm>
+          <a:prstGeom prst="rect">
+            <a:avLst/>
+          </a:prstGeom>
+          <a:noFill/>
+          <a:ln/>
+        </p:spPr>
+        <p:txBody>
+          <a:bodyPr wrap="square" lIns="0" tIns="0" rIns="0" bIns="0" rtlCol="0" anchor="t"/>
+          <a:lstStyle/>
+          <a:p>
+            <a:pPr indent="0" marL="0">
+              <a:buNone/>
+            </a:pPr>
+            <a:r>
+              <a:rPr lang="en-US" sz="1500" b="1" dirty="0">
+                <a:solidFill>
+                  <a:srgbClr val="0F172A"/>
+                </a:solidFill>
+                <a:latin typeface="Pretendard" pitchFamily="34" charset="0"/>
+                <a:ea typeface="Pretendard" pitchFamily="34" charset="-122"/>
+                <a:cs typeface="Pretendard" pitchFamily="34" charset="-120"/>
+              </a:rPr>
+              <a:t>가치 상승 및 출구 전략</a:t>
+            </a:r>
+            <a:endParaRPr lang="en-US" sz="1500" dirty="0"/>
+          </a:p>
+        </p:txBody>
+      </p:sp>
+      <p:sp>
+        <p:nvSpPr>
+          <p:cNvPr id="25" name="Shape 23"/>
+          <p:cNvSpPr/>
+          <p:nvPr/>
+        </p:nvSpPr>
+        <p:spPr>
+          <a:xfrm>
+            <a:off x="8380781" y="2624328"/>
+            <a:ext cx="3015386" cy="0"/>
+          </a:xfrm>
+          <a:prstGeom prst="line">
+            <a:avLst/>
+          </a:prstGeom>
+          <a:noFill/>
+          <a:ln w="6350">
+            <a:solidFill>
+              <a:srgbClr val="CBD5E1"/>
+            </a:solidFill>
+            <a:prstDash val="solid"/>
+          </a:ln>
+        </p:spPr>
+      </p:sp>
+      <p:sp>
+        <p:nvSpPr>
+          <p:cNvPr id="26" name="Text 24"/>
+          <p:cNvSpPr/>
+          <p:nvPr/>
+        </p:nvSpPr>
+        <p:spPr>
+          <a:xfrm>
+            <a:off x="8380781" y="2779776"/>
+            <a:ext cx="3015386" cy="1965960"/>
+          </a:xfrm>
+          <a:prstGeom prst="rect">
+            <a:avLst/>
+          </a:prstGeom>
+          <a:noFill/>
+          <a:ln/>
+        </p:spPr>
+        <p:txBody>
+          <a:bodyPr wrap="square" lIns="0" tIns="0" rIns="0" bIns="0" rtlCol="0" anchor="t"/>
+          <a:lstStyle/>
+          <a:p>
+            <a:pPr indent="0" marL="0">
+              <a:lnSpc>
+                <a:spcPct val="130000"/>
+              </a:lnSpc>
+              <a:buNone/>
+            </a:pPr>
+            <a:r>
+              <a:rPr lang="en-US" sz="1200" dirty="0">
+                <a:solidFill>
+                  <a:srgbClr val="0F172A"/>
+                </a:solidFill>
+                <a:latin typeface="Pretendard" pitchFamily="34" charset="0"/>
+                <a:ea typeface="Pretendard" pitchFamily="34" charset="-122"/>
+                <a:cs typeface="Pretendard" pitchFamily="34" charset="-120"/>
+              </a:rPr>
+              <a:t>현행 공법 여력을 활용한 밸류업 기회와 더불어 향후 권역 지가 상승에 따른 시세차익 실현이 유력합니다.</a:t>
+            </a:r>
+            <a:endParaRPr lang="en-US" sz="1200" dirty="0"/>
+          </a:p>
+        </p:txBody>
+      </p:sp>
+      <p:sp>
+        <p:nvSpPr>
+          <p:cNvPr id="27" name="Shape 25"/>
           <p:cNvSpPr/>
           <p:nvPr/>
         </p:nvSpPr>
@@ -6586,7 +8505,7 @@
       </p:sp>
       <p:sp>
         <p:nvSpPr>
-          <p:cNvPr id="7" name="Text 5"/>
+          <p:cNvPr id="28" name="Text 26"/>
           <p:cNvSpPr/>
           <p:nvPr/>
         </p:nvSpPr>
@@ -6625,7 +8544,7 @@
       </p:sp>
       <p:sp>
         <p:nvSpPr>
-          <p:cNvPr id="8" name="Text 6"/>
+          <p:cNvPr id="29" name="Text 27"/>
           <p:cNvSpPr/>
           <p:nvPr/>
         </p:nvSpPr>
@@ -6659,7 +8578,7 @@
                 <a:ea typeface="Pretendard" pitchFamily="34" charset="-122"/>
                 <a:cs typeface="Pretendard" pitchFamily="34" charset="-120"/>
               </a:rPr>
-              <a:t>{"ok":true,"mocked":true,"extractedFields":{"area_signal":"역삼","asset_type":"오피스빌딩","price_band":"300억","size_signal":"3000평(약 9917.4㎡)"},"extractedFacts":{"region":"역삼","exactAddressCandidate":"역삼동 742-1","assetType":"오피스빌딩","priceText":"300억","sizeText":"3000평(약 9917.4㎡)","currentUse":"오피스","currentUseSignal":"근린생활시설","leaseSignal":"임대중","vacancySignal":"공실없음","tenantNames":["쿠팡","네이버"],"unitRentTexts":["301호: 1500만"],"sellerMotivationText":"자산 효율화","brokerNotes":["초역세권 매물"]},"detectedSensitiveFields":["exact_address","tenant_name"],"ambiguousFields":[],"warnings":[],"areaSignal":"역삼","assetType":"오피스빌딩","priceBand":"300억","sizeSignal":"3000평(약 9917.4㎡)","dealType":"매각","buildingName":"역삼 센트럴타워","exactAddress":"역삼동 742-1","totalFloorArea":9917.3,"buildYear":2015,"currentUseSignal":"근린생활시설","vacancySignal":"공실 없음","fitSummary":"초역세권 근생 빌딩으로 시행/사옥 매입에 최적화","cautionSummary":"주요 임차 업종 만기 조율 필요","hiddenFields":["exact_address","seller_motivation"],"confidence":{"areaSignal":"confirmed","assetType":"confirmed","priceBand":"ai_hypothesis","fitSummary":"ai_hypothesis"},"missingData":["sizeSignal"],"boundaryNote":"본 자료는 실거래 통계 기반 참고치입니다.","buyerType":"법인 사옥형","budgetRange":{"min":50,"max":80,"display":"50억~80억"},"preferredRegions":["강남","성수"],"assetTypes":["꼬마빌딩","사옥용"],"purchasePurpose":"사옥용 매입","mustHave":["초역세권","주차"],"niceToHave":["테라스","루프탑"],"riskTolerance":"medium","financingNote":"자본금 50% 준비","missingQuestions":["구체적인 입주 시기가 언제인가요?","선호하는 수익률이 있나요?"],"privacyNotes":["연락처 비공개"],"fitReasons":["매수자 예산(50-80억)에 부합하는 매물입니다.","요청하신 성수/강남 권역에 해당합니다."],"cautionReasons":["요청한 용도와 달리 명도 협의가 다소 필요합니다."],"recommendedNextAction":"현장 답사 제안","kakaoMessage":"안녕하세요! 요청하신 조건에 부합하는 추천 매물이 있어 안내해 드립니다. 확인해보시고 피드백 부탁드립니다.","title":"강남 역삼역 초역세권 오피스 사옥용 빌딩 매각","shortSummary":"역삼역 도보 5분 거리의 준신축급 대형 오피스빌딩입니다.","dealPoints":["초역세권","사옥 최적"],"cautionPoints":["명도 조율 필요"],"hiddenInfoNotice":["보증금 및 지번은 인가 후 확인 가능"],"gateMessage":"G1 등급 등록이 필요합니다.","kakaoText":"강남 역삼역 오피스 빌딩 매각 안내입니다.","exactUnitCandidate":"101호","floor":"1층","areaSqmText":"150㎡","spaceType":"office","depositText":"5000만","monthlyRentText":"400만","maintenanceFeeText":"50만","availableFromText":"즉시입주","leaseTermMonthsText":"24","incentivesText":"렌트프리 2개월","restrictions":[],"landlordIdentity":"김성수","currentTenant":"스타트업","vacancyReason":"이전 확장","rentNegotiation":"협의 가능","region":"성수동","areaSqm":150,"deposit":5000,"monthlyRent":400,"maintenanceFee":50,"availableFrom":"즉시입주","leaseTermMonths":24,"incentives":{"rentFreeMonths":2,"interiorSupport":"일부 인테리어 지원","freeRentDetail":"렌트프리 2개월 지원"},"shortSummaryLease":"성수역 도보 5분 거리 1층 리테일 상가 매물입니다."} &gt; 밸류업 시나리오는 AI 추정이며 실제 시장 조건에 따라 다를 수 있습니다.</a:t>
+              <a:t>본 자산의 3대 핵심 투자 포인트와 예상 매수자 유형 분석입니다. &gt; 밸류업 시나리오는 AI 추정이며 실제 시장 조건에 따라 다를 수 있습니다.</a:t>
             </a:r>
             <a:endParaRPr lang="en-US" sz="1000" dirty="0"/>
           </a:p>
@@ -6667,7 +8586,7 @@
       </p:sp>
       <p:sp>
         <p:nvSpPr>
-          <p:cNvPr id="9" name="Text 7"/>
+          <p:cNvPr id="30" name="Text 28"/>
           <p:cNvSpPr/>
           <p:nvPr/>
         </p:nvSpPr>
@@ -6706,7 +8625,7 @@
       </p:sp>
       <p:sp>
         <p:nvSpPr>
-          <p:cNvPr id="10" name="Shape 8"/>
+          <p:cNvPr id="31" name="Shape 29"/>
           <p:cNvSpPr/>
           <p:nvPr/>
         </p:nvSpPr>

--- a/docs/test/stress/e2e-outputs/trading_case09_sinsa_value_add_basic.pptx
+++ b/docs/test/stress/e2e-outputs/trading_case09_sinsa_value_add_basic.pptx
@@ -1658,7 +1658,7 @@
     <p:bg>
       <p:bgPr>
         <a:solidFill>
-          <a:srgbClr val="0F172A"/>
+          <a:srgbClr val="10161F"/>
         </a:solidFill>
       </p:bgPr>
     </p:bg>
@@ -1753,7 +1753,7 @@
           <a:noFill/>
           <a:ln w="10160">
             <a:solidFill>
-              <a:srgbClr val="6B8E00"/>
+              <a:srgbClr val="B98A2E"/>
             </a:solidFill>
             <a:prstDash val="solid"/>
           </a:ln>
@@ -1767,14 +1767,14 @@
         </p:nvSpPr>
         <p:spPr>
           <a:xfrm>
-            <a:off x="7772400" y="0"/>
-            <a:ext cx="4419295" cy="6858000"/>
+            <a:off x="8275320" y="0"/>
+            <a:ext cx="1417320" cy="4041648"/>
           </a:xfrm>
           <a:prstGeom prst="rect">
             <a:avLst/>
           </a:prstGeom>
           <a:solidFill>
-            <a:srgbClr val="6B8E00"/>
+            <a:srgbClr val="1A2030"/>
           </a:solidFill>
           <a:ln/>
         </p:spPr>
@@ -1786,24 +1786,42 @@
           <p:nvPr/>
         </p:nvSpPr>
         <p:spPr>
-          <a:xfrm rot="120000">
-            <a:off x="8412480" y="548640"/>
-            <a:ext cx="3291840" cy="5760720"/>
+          <a:xfrm>
+            <a:off x="9784080" y="868680"/>
+            <a:ext cx="1143000" cy="3172968"/>
           </a:xfrm>
           <a:prstGeom prst="rect">
             <a:avLst/>
           </a:prstGeom>
           <a:solidFill>
-            <a:srgbClr val="0F172A">
-              <a:alpha val="12000"/>
-            </a:srgbClr>
+            <a:srgbClr val="161D2B"/>
           </a:solidFill>
           <a:ln/>
         </p:spPr>
       </p:sp>
       <p:sp>
         <p:nvSpPr>
-          <p:cNvPr id="8" name="Text 6"/>
+          <p:cNvPr id="8" name="Shape 6"/>
+          <p:cNvSpPr/>
+          <p:nvPr/>
+        </p:nvSpPr>
+        <p:spPr>
+          <a:xfrm>
+            <a:off x="11018520" y="1691640"/>
+            <a:ext cx="1170432" cy="2350008"/>
+          </a:xfrm>
+          <a:prstGeom prst="rect">
+            <a:avLst/>
+          </a:prstGeom>
+          <a:solidFill>
+            <a:srgbClr val="2E2718"/>
+          </a:solidFill>
+          <a:ln/>
+        </p:spPr>
+      </p:sp>
+      <p:sp>
+        <p:nvSpPr>
+          <p:cNvPr id="9" name="Text 7"/>
           <p:cNvSpPr/>
           <p:nvPr/>
         </p:nvSpPr>
@@ -1842,7 +1860,7 @@
             <a:r>
               <a:rPr lang="en-US" sz="1500" b="1" dirty="0">
                 <a:solidFill>
-                  <a:srgbClr val="6B8E00"/>
+                  <a:srgbClr val="B98A2E"/>
                 </a:solidFill>
                 <a:latin typeface="Arial" pitchFamily="34" charset="0"/>
                 <a:ea typeface="Arial" pitchFamily="34" charset="-122"/>
@@ -1856,115 +1874,76 @@
       </p:sp>
       <p:sp>
         <p:nvSpPr>
-          <p:cNvPr id="9" name="Text 7"/>
-          <p:cNvSpPr/>
-          <p:nvPr/>
-        </p:nvSpPr>
-        <p:spPr>
-          <a:xfrm>
-            <a:off x="8229600" y="5303520"/>
-            <a:ext cx="3474720" cy="365760"/>
-          </a:xfrm>
-          <a:prstGeom prst="rect">
-            <a:avLst/>
-          </a:prstGeom>
-          <a:noFill/>
-          <a:ln/>
-        </p:spPr>
-        <p:txBody>
-          <a:bodyPr wrap="square" lIns="0" tIns="0" rIns="0" bIns="0" rtlCol="0" anchor="ctr"/>
-          <a:lstStyle/>
-          <a:p>
-            <a:pPr algn="ctr" indent="0" marL="0">
-              <a:buNone/>
-            </a:pPr>
-            <a:r>
-              <a:rPr lang="en-US" sz="1000" dirty="0">
-                <a:solidFill>
-                  <a:srgbClr val="0F172A"/>
+          <p:cNvPr id="10" name="Text 8"/>
+          <p:cNvSpPr/>
+          <p:nvPr/>
+        </p:nvSpPr>
+        <p:spPr>
+          <a:xfrm>
+            <a:off x="566928" y="2029968"/>
+            <a:ext cx="7315200" cy="274320"/>
+          </a:xfrm>
+          <a:prstGeom prst="rect">
+            <a:avLst/>
+          </a:prstGeom>
+          <a:noFill/>
+          <a:ln/>
+        </p:spPr>
+        <p:txBody>
+          <a:bodyPr wrap="square" lIns="0" tIns="0" rIns="0" bIns="0" rtlCol="0" anchor="ctr"/>
+          <a:lstStyle/>
+          <a:p>
+            <a:pPr algn="l" indent="0" marL="0">
+              <a:buNone/>
+            </a:pPr>
+            <a:r>
+              <a:rPr lang="en-US" sz="1000" b="1" spc="250" kern="0" dirty="0">
+                <a:solidFill>
+                  <a:srgbClr val="B98A2E"/>
+                </a:solidFill>
+                <a:latin typeface="Arial" pitchFamily="34" charset="0"/>
+                <a:ea typeface="Arial" pitchFamily="34" charset="-122"/>
+                <a:cs typeface="Arial" pitchFamily="34" charset="-120"/>
+              </a:rPr>
+              <a:t>BASIC IM</a:t>
+            </a:r>
+            <a:endParaRPr lang="en-US" sz="1000" dirty="0"/>
+          </a:p>
+        </p:txBody>
+      </p:sp>
+      <p:sp>
+        <p:nvSpPr>
+          <p:cNvPr id="11" name="Text 9"/>
+          <p:cNvSpPr/>
+          <p:nvPr/>
+        </p:nvSpPr>
+        <p:spPr>
+          <a:xfrm>
+            <a:off x="566928" y="2304288"/>
+            <a:ext cx="7315200" cy="731520"/>
+          </a:xfrm>
+          <a:prstGeom prst="rect">
+            <a:avLst/>
+          </a:prstGeom>
+          <a:noFill/>
+          <a:ln/>
+        </p:spPr>
+        <p:txBody>
+          <a:bodyPr wrap="square" lIns="0" tIns="0" rIns="0" bIns="0" rtlCol="0" anchor="ctr"/>
+          <a:lstStyle/>
+          <a:p>
+            <a:pPr algn="l" indent="0" marL="0">
+              <a:buNone/>
+            </a:pPr>
+            <a:r>
+              <a:rPr lang="en-US" sz="4000" b="1" dirty="0">
+                <a:solidFill>
+                  <a:srgbClr val="FFFFFF"/>
                 </a:solidFill>
                 <a:latin typeface="Pretendard" pitchFamily="34" charset="0"/>
                 <a:ea typeface="Pretendard" pitchFamily="34" charset="-122"/>
                 <a:cs typeface="Pretendard" pitchFamily="34" charset="-120"/>
               </a:rPr>
-              <a:t>상업용 부동산 투자 플랫폼</a:t>
-            </a:r>
-            <a:endParaRPr lang="en-US" sz="1000" dirty="0"/>
-          </a:p>
-        </p:txBody>
-      </p:sp>
-      <p:sp>
-        <p:nvSpPr>
-          <p:cNvPr id="10" name="Text 8"/>
-          <p:cNvSpPr/>
-          <p:nvPr/>
-        </p:nvSpPr>
-        <p:spPr>
-          <a:xfrm>
-            <a:off x="566928" y="2029968"/>
-            <a:ext cx="7315200" cy="274320"/>
-          </a:xfrm>
-          <a:prstGeom prst="rect">
-            <a:avLst/>
-          </a:prstGeom>
-          <a:noFill/>
-          <a:ln/>
-        </p:spPr>
-        <p:txBody>
-          <a:bodyPr wrap="square" lIns="0" tIns="0" rIns="0" bIns="0" rtlCol="0" anchor="ctr"/>
-          <a:lstStyle/>
-          <a:p>
-            <a:pPr algn="l" indent="0" marL="0">
-              <a:buNone/>
-            </a:pPr>
-            <a:r>
-              <a:rPr lang="en-US" sz="1000" b="1" spc="250" kern="0" dirty="0">
-                <a:solidFill>
-                  <a:srgbClr val="6B8E00"/>
-                </a:solidFill>
-                <a:latin typeface="Arial" pitchFamily="34" charset="0"/>
-                <a:ea typeface="Arial" pitchFamily="34" charset="-122"/>
-                <a:cs typeface="Arial" pitchFamily="34" charset="-120"/>
-              </a:rPr>
-              <a:t>BASIC IM</a:t>
-            </a:r>
-            <a:endParaRPr lang="en-US" sz="1000" dirty="0"/>
-          </a:p>
-        </p:txBody>
-      </p:sp>
-      <p:sp>
-        <p:nvSpPr>
-          <p:cNvPr id="11" name="Text 9"/>
-          <p:cNvSpPr/>
-          <p:nvPr/>
-        </p:nvSpPr>
-        <p:spPr>
-          <a:xfrm>
-            <a:off x="566928" y="2304288"/>
-            <a:ext cx="7315200" cy="731520"/>
-          </a:xfrm>
-          <a:prstGeom prst="rect">
-            <a:avLst/>
-          </a:prstGeom>
-          <a:noFill/>
-          <a:ln/>
-        </p:spPr>
-        <p:txBody>
-          <a:bodyPr wrap="square" lIns="0" tIns="0" rIns="0" bIns="0" rtlCol="0" anchor="ctr"/>
-          <a:lstStyle/>
-          <a:p>
-            <a:pPr algn="l" indent="0" marL="0">
-              <a:buNone/>
-            </a:pPr>
-            <a:r>
-              <a:rPr lang="en-US" sz="4000" b="1" dirty="0">
-                <a:solidFill>
-                  <a:srgbClr val="FFFFFF"/>
-                </a:solidFill>
-                <a:latin typeface="Pretendard" pitchFamily="34" charset="0"/>
-                <a:ea typeface="Pretendard" pitchFamily="34" charset="-122"/>
-                <a:cs typeface="Pretendard" pitchFamily="34" charset="-120"/>
-              </a:rPr>
               <a:t>trading IM</a:t>
             </a:r>
             <a:endParaRPr lang="en-US" sz="4000" dirty="0"/>
@@ -1998,7 +1977,7 @@
             <a:r>
               <a:rPr lang="en-US" sz="1400" dirty="0">
                 <a:solidFill>
-                  <a:srgbClr val="F1F5F9"/>
+                  <a:srgbClr val="E2E8F0"/>
                 </a:solidFill>
                 <a:latin typeface="Pretendard" pitchFamily="34" charset="0"/>
                 <a:ea typeface="Pretendard" pitchFamily="34" charset="-122"/>
@@ -2027,7 +2006,7 @@
             </a:avLst>
           </a:prstGeom>
           <a:solidFill>
-            <a:srgbClr val="334155"/>
+            <a:srgbClr val="2D3748"/>
           </a:solidFill>
           <a:ln/>
         </p:spPr>
@@ -2088,7 +2067,7 @@
             </a:avLst>
           </a:prstGeom>
           <a:solidFill>
-            <a:srgbClr val="334155"/>
+            <a:srgbClr val="2D3748"/>
           </a:solidFill>
           <a:ln/>
         </p:spPr>
@@ -2149,11 +2128,11 @@
             </a:avLst>
           </a:prstGeom>
           <a:solidFill>
-            <a:srgbClr val="4F6A00"/>
+            <a:srgbClr val="977024"/>
           </a:solidFill>
           <a:ln w="12700">
             <a:solidFill>
-              <a:srgbClr val="6B8E00"/>
+              <a:srgbClr val="B98A2E"/>
             </a:solidFill>
             <a:prstDash val="solid"/>
           </a:ln>
@@ -2186,7 +2165,7 @@
             <a:r>
               <a:rPr lang="en-US" sz="2200" b="1" dirty="0">
                 <a:solidFill>
-                  <a:srgbClr val="E8F5CC"/>
+                  <a:srgbClr val="F3EBDA"/>
                 </a:solidFill>
                 <a:latin typeface="Pretendard" pitchFamily="34" charset="0"/>
                 <a:ea typeface="Pretendard" pitchFamily="34" charset="-122"/>
@@ -2234,59 +2213,75 @@
         </p:nvSpPr>
         <p:spPr>
           <a:xfrm>
-            <a:off x="566928" y="6419088"/>
-            <a:ext cx="11057839" cy="201168"/>
-          </a:xfrm>
-          <a:prstGeom prst="rect">
-            <a:avLst/>
-          </a:prstGeom>
-          <a:noFill/>
-          <a:ln/>
-        </p:spPr>
-        <p:txBody>
-          <a:bodyPr wrap="square" lIns="0" tIns="0" rIns="0" bIns="0" rtlCol="0" anchor="ctr"/>
-          <a:lstStyle/>
-          <a:p>
-            <a:pPr algn="ctr" indent="0" marL="0">
-              <a:buNone/>
-            </a:pPr>
-            <a:r>
-              <a:rPr lang="en-US" sz="750" dirty="0">
-                <a:solidFill>
-                  <a:srgbClr val="64748B"/>
+            <a:off x="566928" y="6382512"/>
+            <a:ext cx="7315200" cy="219456"/>
+          </a:xfrm>
+          <a:prstGeom prst="rect">
+            <a:avLst/>
+          </a:prstGeom>
+          <a:noFill/>
+          <a:ln/>
+        </p:spPr>
+        <p:txBody>
+          <a:bodyPr wrap="square" lIns="0" tIns="0" rIns="0" bIns="0" rtlCol="0" anchor="ctr"/>
+          <a:lstStyle/>
+          <a:p>
+            <a:pPr indent="0" marL="0">
+              <a:buNone/>
+            </a:pPr>
+            <a:r>
+              <a:rPr lang="en-US" sz="800" dirty="0">
+                <a:solidFill>
+                  <a:srgbClr val="718096"/>
                 </a:solidFill>
                 <a:latin typeface="Pretendard" pitchFamily="34" charset="0"/>
                 <a:ea typeface="Pretendard" pitchFamily="34" charset="-122"/>
                 <a:cs typeface="Pretendard" pitchFamily="34" charset="-120"/>
               </a:rPr>
-              <a:t>크리딜  ·    ·  1</a:t>
-            </a:r>
-            <a:endParaRPr lang="en-US" sz="750" dirty="0"/>
-          </a:p>
-        </p:txBody>
-      </p:sp>
-      <p:sp>
-        <p:nvSpPr>
-          <p:cNvPr id="21" name="Shape 19"/>
-          <p:cNvSpPr/>
-          <p:nvPr/>
-        </p:nvSpPr>
-        <p:spPr>
-          <a:xfrm>
-            <a:off x="4437172" y="6382512"/>
-            <a:ext cx="3317352" cy="0"/>
-          </a:xfrm>
-          <a:prstGeom prst="line">
-            <a:avLst/>
-          </a:prstGeom>
-          <a:noFill/>
-          <a:ln w="6350">
-            <a:solidFill>
-              <a:srgbClr val="6B8E00"/>
-            </a:solidFill>
-            <a:prstDash val="solid"/>
-          </a:ln>
-        </p:spPr>
+              <a:t>크리딜   |   </a:t>
+            </a:r>
+            <a:endParaRPr lang="en-US" sz="800" dirty="0"/>
+          </a:p>
+        </p:txBody>
+      </p:sp>
+      <p:sp>
+        <p:nvSpPr>
+          <p:cNvPr id="21" name="Text 19"/>
+          <p:cNvSpPr/>
+          <p:nvPr/>
+        </p:nvSpPr>
+        <p:spPr>
+          <a:xfrm>
+            <a:off x="10710367" y="6382512"/>
+            <a:ext cx="914400" cy="219456"/>
+          </a:xfrm>
+          <a:prstGeom prst="rect">
+            <a:avLst/>
+          </a:prstGeom>
+          <a:noFill/>
+          <a:ln/>
+        </p:spPr>
+        <p:txBody>
+          <a:bodyPr wrap="square" lIns="0" tIns="0" rIns="0" bIns="0" rtlCol="0" anchor="ctr"/>
+          <a:lstStyle/>
+          <a:p>
+            <a:pPr algn="r" indent="0" marL="0">
+              <a:buNone/>
+            </a:pPr>
+            <a:r>
+              <a:rPr lang="en-US" sz="900" b="1" dirty="0">
+                <a:solidFill>
+                  <a:srgbClr val="B98A2E"/>
+                </a:solidFill>
+                <a:latin typeface="Arial" pitchFamily="34" charset="0"/>
+                <a:ea typeface="Arial" pitchFamily="34" charset="-122"/>
+                <a:cs typeface="Arial" pitchFamily="34" charset="-120"/>
+              </a:rPr>
+              <a:t>1</a:t>
+            </a:r>
+            <a:endParaRPr lang="en-US" sz="900" dirty="0"/>
+          </a:p>
+        </p:txBody>
       </p:sp>
     </p:spTree>
   </p:cSld>
@@ -2302,7 +2297,7 @@
     <p:bg>
       <p:bgPr>
         <a:solidFill>
-          <a:srgbClr val="0F172A"/>
+          <a:srgbClr val="10161F"/>
         </a:solidFill>
       </p:bgPr>
     </p:bg>
@@ -2328,14 +2323,14 @@
         </p:nvSpPr>
         <p:spPr>
           <a:xfrm>
-            <a:off x="566928" y="384048"/>
-            <a:ext cx="45720" cy="566928"/>
-          </a:xfrm>
-          <a:prstGeom prst="rect">
+            <a:off x="566928" y="457200"/>
+            <a:ext cx="384048" cy="384048"/>
+          </a:xfrm>
+          <a:prstGeom prst="ellipse">
             <a:avLst/>
           </a:prstGeom>
           <a:solidFill>
-            <a:srgbClr val="6B8E00"/>
+            <a:srgbClr val="B98A2E"/>
           </a:solidFill>
           <a:ln/>
         </p:spPr>
@@ -2348,32 +2343,71 @@
         </p:nvSpPr>
         <p:spPr>
           <a:xfrm>
-            <a:off x="749808" y="384048"/>
-            <a:ext cx="10874959" cy="182880"/>
-          </a:xfrm>
-          <a:prstGeom prst="rect">
-            <a:avLst/>
-          </a:prstGeom>
-          <a:noFill/>
-          <a:ln/>
-        </p:spPr>
-        <p:txBody>
-          <a:bodyPr wrap="square" lIns="0" tIns="0" rIns="0" bIns="0" rtlCol="0" anchor="ctr"/>
-          <a:lstStyle/>
-          <a:p>
-            <a:pPr indent="0" marL="0">
-              <a:buNone/>
-            </a:pPr>
-            <a:r>
-              <a:rPr lang="en-US" sz="950" b="1" spc="200" kern="0" dirty="0">
-                <a:solidFill>
-                  <a:srgbClr val="6B8E00"/>
+            <a:off x="566928" y="457200"/>
+            <a:ext cx="384048" cy="384048"/>
+          </a:xfrm>
+          <a:prstGeom prst="rect">
+            <a:avLst/>
+          </a:prstGeom>
+          <a:noFill/>
+          <a:ln/>
+        </p:spPr>
+        <p:txBody>
+          <a:bodyPr wrap="square" lIns="0" tIns="0" rIns="0" bIns="0" rtlCol="0" anchor="ctr"/>
+          <a:lstStyle/>
+          <a:p>
+            <a:pPr algn="ctr" indent="0" marL="0">
+              <a:buNone/>
+            </a:pPr>
+            <a:r>
+              <a:rPr lang="en-US" sz="1300" b="1" dirty="0">
+                <a:solidFill>
+                  <a:srgbClr val="FFFFFF"/>
                 </a:solidFill>
                 <a:latin typeface="Arial" pitchFamily="34" charset="0"/>
                 <a:ea typeface="Arial" pitchFamily="34" charset="-122"/>
                 <a:cs typeface="Arial" pitchFamily="34" charset="-120"/>
               </a:rPr>
-              <a:t>10  Disclaimer</a:t>
+              <a:t>10</a:t>
+            </a:r>
+            <a:endParaRPr lang="en-US" sz="1300" dirty="0"/>
+          </a:p>
+        </p:txBody>
+      </p:sp>
+      <p:sp>
+        <p:nvSpPr>
+          <p:cNvPr id="4" name="Text 2"/>
+          <p:cNvSpPr/>
+          <p:nvPr/>
+        </p:nvSpPr>
+        <p:spPr>
+          <a:xfrm>
+            <a:off x="1133856" y="457200"/>
+            <a:ext cx="10490911" cy="182880"/>
+          </a:xfrm>
+          <a:prstGeom prst="rect">
+            <a:avLst/>
+          </a:prstGeom>
+          <a:noFill/>
+          <a:ln/>
+        </p:spPr>
+        <p:txBody>
+          <a:bodyPr wrap="square" lIns="0" tIns="0" rIns="0" bIns="0" rtlCol="0" anchor="ctr"/>
+          <a:lstStyle/>
+          <a:p>
+            <a:pPr indent="0" marL="0">
+              <a:buNone/>
+            </a:pPr>
+            <a:r>
+              <a:rPr lang="en-US" sz="950" b="1" spc="200" kern="0" dirty="0">
+                <a:solidFill>
+                  <a:srgbClr val="B98A2E"/>
+                </a:solidFill>
+                <a:latin typeface="Arial" pitchFamily="34" charset="0"/>
+                <a:ea typeface="Arial" pitchFamily="34" charset="-122"/>
+                <a:cs typeface="Arial" pitchFamily="34" charset="-120"/>
+              </a:rPr>
+              <a:t>Disclaimer</a:t>
             </a:r>
             <a:endParaRPr lang="en-US" sz="950" dirty="0"/>
           </a:p>
@@ -2381,14 +2415,14 @@
       </p:sp>
       <p:sp>
         <p:nvSpPr>
-          <p:cNvPr id="4" name="Text 2"/>
-          <p:cNvSpPr/>
-          <p:nvPr/>
-        </p:nvSpPr>
-        <p:spPr>
-          <a:xfrm>
-            <a:off x="749808" y="566928"/>
-            <a:ext cx="10874959" cy="384048"/>
+          <p:cNvPr id="5" name="Text 3"/>
+          <p:cNvSpPr/>
+          <p:nvPr/>
+        </p:nvSpPr>
+        <p:spPr>
+          <a:xfrm>
+            <a:off x="1133856" y="658368"/>
+            <a:ext cx="10490911" cy="420624"/>
           </a:xfrm>
           <a:prstGeom prst="rect">
             <a:avLst/>
@@ -2404,7 +2438,7 @@
               <a:buNone/>
             </a:pPr>
             <a:r>
-              <a:rPr lang="en-US" sz="2200" b="1" dirty="0">
+              <a:rPr lang="en-US" sz="2400" b="1" dirty="0">
                 <a:solidFill>
                   <a:srgbClr val="FFFFFF"/>
                 </a:solidFill>
@@ -2414,20 +2448,101 @@
               </a:rPr>
               <a:t>표기 기준 및 면책</a:t>
             </a:r>
-            <a:endParaRPr lang="en-US" sz="2200" dirty="0"/>
-          </a:p>
-        </p:txBody>
-      </p:sp>
-      <p:sp>
-        <p:nvSpPr>
-          <p:cNvPr id="5" name="Text 3"/>
-          <p:cNvSpPr/>
-          <p:nvPr/>
-        </p:nvSpPr>
-        <p:spPr>
-          <a:xfrm>
-            <a:off x="566928" y="1517904"/>
-            <a:ext cx="5486400" cy="237744"/>
+            <a:endParaRPr lang="en-US" sz="2400" dirty="0"/>
+          </a:p>
+        </p:txBody>
+      </p:sp>
+      <p:sp>
+        <p:nvSpPr>
+          <p:cNvPr id="6" name="Shape 4"/>
+          <p:cNvSpPr/>
+          <p:nvPr/>
+        </p:nvSpPr>
+        <p:spPr>
+          <a:xfrm>
+            <a:off x="566928" y="1463040"/>
+            <a:ext cx="3588410" cy="658368"/>
+          </a:xfrm>
+          <a:prstGeom prst="roundRect">
+            <a:avLst>
+              <a:gd name="adj" fmla="val 5556"/>
+            </a:avLst>
+          </a:prstGeom>
+          <a:solidFill>
+            <a:srgbClr val="2D3748"/>
+          </a:solidFill>
+          <a:ln/>
+        </p:spPr>
+      </p:sp>
+      <p:sp>
+        <p:nvSpPr>
+          <p:cNvPr id="7" name="Shape 5"/>
+          <p:cNvSpPr/>
+          <p:nvPr/>
+        </p:nvSpPr>
+        <p:spPr>
+          <a:xfrm>
+            <a:off x="676656" y="1572768"/>
+            <a:ext cx="438912" cy="438912"/>
+          </a:xfrm>
+          <a:prstGeom prst="ellipse">
+            <a:avLst/>
+          </a:prstGeom>
+          <a:solidFill>
+            <a:srgbClr val="B98A2E"/>
+          </a:solidFill>
+          <a:ln/>
+        </p:spPr>
+      </p:sp>
+      <p:sp>
+        <p:nvSpPr>
+          <p:cNvPr id="8" name="Text 6"/>
+          <p:cNvSpPr/>
+          <p:nvPr/>
+        </p:nvSpPr>
+        <p:spPr>
+          <a:xfrm>
+            <a:off x="676656" y="1572768"/>
+            <a:ext cx="438912" cy="438912"/>
+          </a:xfrm>
+          <a:prstGeom prst="rect">
+            <a:avLst/>
+          </a:prstGeom>
+          <a:noFill/>
+          <a:ln/>
+        </p:spPr>
+        <p:txBody>
+          <a:bodyPr wrap="square" lIns="0" tIns="0" rIns="0" bIns="0" rtlCol="0" anchor="ctr"/>
+          <a:lstStyle/>
+          <a:p>
+            <a:pPr algn="ctr" indent="0" marL="0">
+              <a:buNone/>
+            </a:pPr>
+            <a:r>
+              <a:rPr lang="en-US" sz="1400" b="1" dirty="0">
+                <a:solidFill>
+                  <a:srgbClr val="FFFFFF"/>
+                </a:solidFill>
+                <a:latin typeface="Arial" pitchFamily="34" charset="0"/>
+                <a:ea typeface="Arial" pitchFamily="34" charset="-122"/>
+                <a:cs typeface="Arial" pitchFamily="34" charset="-120"/>
+              </a:rPr>
+              <a:t>01</a:t>
+            </a:r>
+            <a:endParaRPr lang="en-US" sz="1400" dirty="0"/>
+          </a:p>
+        </p:txBody>
+      </p:sp>
+      <p:sp>
+        <p:nvSpPr>
+          <p:cNvPr id="9" name="Text 7"/>
+          <p:cNvSpPr/>
+          <p:nvPr/>
+        </p:nvSpPr>
+        <p:spPr>
+          <a:xfrm>
+            <a:off x="1225296" y="1554480"/>
+            <a:ext cx="2820314" cy="237744"/>
           </a:xfrm>
           <a:prstGeom prst="rect">
             <a:avLst/>
@@ -2451,7 +2566,7 @@
                 <a:ea typeface="Pretendard" pitchFamily="34" charset="-122"/>
                 <a:cs typeface="Pretendard" pitchFamily="34" charset="-120"/>
               </a:rPr>
-              <a:t>데이터 출처 표기</a:t>
+              <a:t>관심 표명</a:t>
             </a:r>
             <a:endParaRPr lang="en-US" sz="1100" dirty="0"/>
           </a:p>
@@ -2459,130 +2574,150 @@
       </p:sp>
       <p:sp>
         <p:nvSpPr>
-          <p:cNvPr id="6" name="Shape 4"/>
-          <p:cNvSpPr/>
-          <p:nvPr/>
-        </p:nvSpPr>
-        <p:spPr>
-          <a:xfrm>
-            <a:off x="566928" y="1847088"/>
-            <a:ext cx="1417320" cy="347472"/>
-          </a:xfrm>
-          <a:prstGeom prst="roundRect">
-            <a:avLst>
-              <a:gd name="adj" fmla="val 10526"/>
-            </a:avLst>
-          </a:prstGeom>
-          <a:solidFill>
-            <a:srgbClr val="334155"/>
-          </a:solidFill>
-          <a:ln/>
-        </p:spPr>
-      </p:sp>
-      <p:sp>
-        <p:nvSpPr>
-          <p:cNvPr id="7" name="Text 5"/>
-          <p:cNvSpPr/>
-          <p:nvPr/>
-        </p:nvSpPr>
-        <p:spPr>
-          <a:xfrm>
-            <a:off x="566928" y="1847088"/>
-            <a:ext cx="1417320" cy="347472"/>
-          </a:xfrm>
-          <a:prstGeom prst="rect">
-            <a:avLst/>
-          </a:prstGeom>
-          <a:noFill/>
-          <a:ln/>
-        </p:spPr>
-        <p:txBody>
-          <a:bodyPr wrap="square" lIns="0" tIns="0" rIns="0" bIns="0" rtlCol="0" anchor="ctr"/>
-          <a:lstStyle/>
-          <a:p>
-            <a:pPr algn="ctr" indent="0" marL="0">
-              <a:buNone/>
-            </a:pPr>
-            <a:r>
-              <a:rPr lang="en-US" sz="950" b="1" dirty="0">
-                <a:solidFill>
-                  <a:srgbClr val="FFFFFF"/>
+          <p:cNvPr id="10" name="Text 8"/>
+          <p:cNvSpPr/>
+          <p:nvPr/>
+        </p:nvSpPr>
+        <p:spPr>
+          <a:xfrm>
+            <a:off x="1225296" y="1792224"/>
+            <a:ext cx="2820314" cy="256032"/>
+          </a:xfrm>
+          <a:prstGeom prst="rect">
+            <a:avLst/>
+          </a:prstGeom>
+          <a:noFill/>
+          <a:ln/>
+        </p:spPr>
+        <p:txBody>
+          <a:bodyPr wrap="square" lIns="0" tIns="0" rIns="0" bIns="0" rtlCol="0" anchor="t"/>
+          <a:lstStyle/>
+          <a:p>
+            <a:pPr indent="0" marL="0">
+              <a:buNone/>
+            </a:pPr>
+            <a:r>
+              <a:rPr lang="en-US" sz="850" dirty="0">
+                <a:solidFill>
+                  <a:srgbClr val="A0AEC0"/>
                 </a:solidFill>
                 <a:latin typeface="Pretendard" pitchFamily="34" charset="0"/>
                 <a:ea typeface="Pretendard" pitchFamily="34" charset="-122"/>
                 <a:cs typeface="Pretendard" pitchFamily="34" charset="-120"/>
               </a:rPr>
-              <a:t>✓ 공부확인</a:t>
-            </a:r>
-            <a:endParaRPr lang="en-US" sz="950" dirty="0"/>
-          </a:p>
-        </p:txBody>
-      </p:sp>
-      <p:sp>
-        <p:nvSpPr>
-          <p:cNvPr id="8" name="Text 6"/>
-          <p:cNvSpPr/>
-          <p:nvPr/>
-        </p:nvSpPr>
-        <p:spPr>
-          <a:xfrm>
-            <a:off x="2139696" y="1828800"/>
-            <a:ext cx="3566160" cy="420624"/>
-          </a:xfrm>
-          <a:prstGeom prst="rect">
-            <a:avLst/>
-          </a:prstGeom>
-          <a:noFill/>
-          <a:ln/>
-        </p:spPr>
-        <p:txBody>
-          <a:bodyPr wrap="square" lIns="0" tIns="0" rIns="0" bIns="0" rtlCol="0" anchor="ctr"/>
-          <a:lstStyle/>
-          <a:p>
-            <a:pPr indent="0" marL="0">
-              <a:buNone/>
-            </a:pPr>
-            <a:r>
-              <a:rPr lang="en-US" sz="1000" dirty="0">
-                <a:solidFill>
-                  <a:srgbClr val="F1F5F9"/>
+              <a:t>담당 중개사에게 초기 관심 표명 및 상담 요청</a:t>
+            </a:r>
+            <a:endParaRPr lang="en-US" sz="850" dirty="0"/>
+          </a:p>
+        </p:txBody>
+      </p:sp>
+      <p:sp>
+        <p:nvSpPr>
+          <p:cNvPr id="11" name="Text 9"/>
+          <p:cNvSpPr/>
+          <p:nvPr/>
+        </p:nvSpPr>
+        <p:spPr>
+          <a:xfrm>
+            <a:off x="4155338" y="1600200"/>
+            <a:ext cx="146304" cy="384048"/>
+          </a:xfrm>
+          <a:prstGeom prst="rect">
+            <a:avLst/>
+          </a:prstGeom>
+          <a:noFill/>
+          <a:ln/>
+        </p:spPr>
+        <p:txBody>
+          <a:bodyPr wrap="square" lIns="0" tIns="0" rIns="0" bIns="0" rtlCol="0" anchor="ctr"/>
+          <a:lstStyle/>
+          <a:p>
+            <a:pPr algn="ctr" indent="0" marL="0">
+              <a:buNone/>
+            </a:pPr>
+            <a:r>
+              <a:rPr lang="en-US" sz="1600" dirty="0">
+                <a:solidFill>
+                  <a:srgbClr val="B98A2E"/>
                 </a:solidFill>
                 <a:latin typeface="Pretendard" pitchFamily="34" charset="0"/>
                 <a:ea typeface="Pretendard" pitchFamily="34" charset="-122"/>
                 <a:cs typeface="Pretendard" pitchFamily="34" charset="-120"/>
               </a:rPr>
-              <a:t>등기부·대장 등 공적 장부 직접 확인</a:t>
-            </a:r>
-            <a:endParaRPr lang="en-US" sz="1000" dirty="0"/>
-          </a:p>
-        </p:txBody>
-      </p:sp>
-      <p:sp>
-        <p:nvSpPr>
-          <p:cNvPr id="9" name="Text 7"/>
-          <p:cNvSpPr/>
-          <p:nvPr/>
-        </p:nvSpPr>
-        <p:spPr>
-          <a:xfrm>
-            <a:off x="5504688" y="1847088"/>
-            <a:ext cx="731520" cy="292608"/>
-          </a:xfrm>
-          <a:prstGeom prst="rect">
-            <a:avLst/>
-          </a:prstGeom>
-          <a:noFill/>
-          <a:ln/>
-        </p:spPr>
-        <p:txBody>
-          <a:bodyPr wrap="square" lIns="0" tIns="0" rIns="0" bIns="0" rtlCol="0" anchor="ctr"/>
-          <a:lstStyle/>
-          <a:p>
-            <a:pPr algn="r" indent="0" marL="0">
-              <a:buNone/>
-            </a:pPr>
-            <a:r>
-              <a:rPr lang="en-US" sz="1200" b="1" dirty="0">
+              <a:t>→</a:t>
+            </a:r>
+            <a:endParaRPr lang="en-US" sz="1600" dirty="0"/>
+          </a:p>
+        </p:txBody>
+      </p:sp>
+      <p:sp>
+        <p:nvSpPr>
+          <p:cNvPr id="12" name="Shape 10"/>
+          <p:cNvSpPr/>
+          <p:nvPr/>
+        </p:nvSpPr>
+        <p:spPr>
+          <a:xfrm>
+            <a:off x="4301642" y="1463040"/>
+            <a:ext cx="3588410" cy="658368"/>
+          </a:xfrm>
+          <a:prstGeom prst="roundRect">
+            <a:avLst>
+              <a:gd name="adj" fmla="val 5556"/>
+            </a:avLst>
+          </a:prstGeom>
+          <a:solidFill>
+            <a:srgbClr val="2D3748"/>
+          </a:solidFill>
+          <a:ln/>
+        </p:spPr>
+      </p:sp>
+      <p:sp>
+        <p:nvSpPr>
+          <p:cNvPr id="13" name="Shape 11"/>
+          <p:cNvSpPr/>
+          <p:nvPr/>
+        </p:nvSpPr>
+        <p:spPr>
+          <a:xfrm>
+            <a:off x="4411370" y="1572768"/>
+            <a:ext cx="438912" cy="438912"/>
+          </a:xfrm>
+          <a:prstGeom prst="ellipse">
+            <a:avLst/>
+          </a:prstGeom>
+          <a:solidFill>
+            <a:srgbClr val="B98A2E"/>
+          </a:solidFill>
+          <a:ln/>
+        </p:spPr>
+      </p:sp>
+      <p:sp>
+        <p:nvSpPr>
+          <p:cNvPr id="14" name="Text 12"/>
+          <p:cNvSpPr/>
+          <p:nvPr/>
+        </p:nvSpPr>
+        <p:spPr>
+          <a:xfrm>
+            <a:off x="4411370" y="1572768"/>
+            <a:ext cx="438912" cy="438912"/>
+          </a:xfrm>
+          <a:prstGeom prst="rect">
+            <a:avLst/>
+          </a:prstGeom>
+          <a:noFill/>
+          <a:ln/>
+        </p:spPr>
+        <p:txBody>
+          <a:bodyPr wrap="square" lIns="0" tIns="0" rIns="0" bIns="0" rtlCol="0" anchor="ctr"/>
+          <a:lstStyle/>
+          <a:p>
+            <a:pPr algn="ctr" indent="0" marL="0">
+              <a:buNone/>
+            </a:pPr>
+            <a:r>
+              <a:rPr lang="en-US" sz="1400" b="1" dirty="0">
                 <a:solidFill>
                   <a:srgbClr val="FFFFFF"/>
                 </a:solidFill>
@@ -2590,60 +2725,38 @@
                 <a:ea typeface="Arial" pitchFamily="34" charset="-122"/>
                 <a:cs typeface="Arial" pitchFamily="34" charset="-120"/>
               </a:rPr>
-              <a:t>1.00</a:t>
-            </a:r>
-            <a:endParaRPr lang="en-US" sz="1200" dirty="0"/>
-          </a:p>
-        </p:txBody>
-      </p:sp>
-      <p:sp>
-        <p:nvSpPr>
-          <p:cNvPr id="10" name="Shape 8"/>
-          <p:cNvSpPr/>
-          <p:nvPr/>
-        </p:nvSpPr>
-        <p:spPr>
-          <a:xfrm>
-            <a:off x="566928" y="2505456"/>
-            <a:ext cx="1417320" cy="347472"/>
-          </a:xfrm>
-          <a:prstGeom prst="roundRect">
-            <a:avLst>
-              <a:gd name="adj" fmla="val 10526"/>
-            </a:avLst>
-          </a:prstGeom>
-          <a:solidFill>
-            <a:srgbClr val="334155"/>
-          </a:solidFill>
-          <a:ln/>
-        </p:spPr>
-      </p:sp>
-      <p:sp>
-        <p:nvSpPr>
-          <p:cNvPr id="11" name="Text 9"/>
-          <p:cNvSpPr/>
-          <p:nvPr/>
-        </p:nvSpPr>
-        <p:spPr>
-          <a:xfrm>
-            <a:off x="566928" y="2505456"/>
-            <a:ext cx="1417320" cy="347472"/>
-          </a:xfrm>
-          <a:prstGeom prst="rect">
-            <a:avLst/>
-          </a:prstGeom>
-          <a:noFill/>
-          <a:ln/>
-        </p:spPr>
-        <p:txBody>
-          <a:bodyPr wrap="square" lIns="0" tIns="0" rIns="0" bIns="0" rtlCol="0" anchor="ctr"/>
-          <a:lstStyle/>
-          <a:p>
-            <a:pPr algn="ctr" indent="0" marL="0">
-              <a:buNone/>
-            </a:pPr>
-            <a:r>
-              <a:rPr lang="en-US" sz="950" b="1" dirty="0">
+              <a:t>02</a:t>
+            </a:r>
+            <a:endParaRPr lang="en-US" sz="1400" dirty="0"/>
+          </a:p>
+        </p:txBody>
+      </p:sp>
+      <p:sp>
+        <p:nvSpPr>
+          <p:cNvPr id="15" name="Text 13"/>
+          <p:cNvSpPr/>
+          <p:nvPr/>
+        </p:nvSpPr>
+        <p:spPr>
+          <a:xfrm>
+            <a:off x="4960010" y="1554480"/>
+            <a:ext cx="2820314" cy="237744"/>
+          </a:xfrm>
+          <a:prstGeom prst="rect">
+            <a:avLst/>
+          </a:prstGeom>
+          <a:noFill/>
+          <a:ln/>
+        </p:spPr>
+        <p:txBody>
+          <a:bodyPr wrap="square" lIns="0" tIns="0" rIns="0" bIns="0" rtlCol="0" anchor="ctr"/>
+          <a:lstStyle/>
+          <a:p>
+            <a:pPr indent="0" marL="0">
+              <a:buNone/>
+            </a:pPr>
+            <a:r>
+              <a:rPr lang="en-US" sz="1100" b="1" dirty="0">
                 <a:solidFill>
                   <a:srgbClr val="FFFFFF"/>
                 </a:solidFill>
@@ -2651,77 +2764,158 @@
                 <a:ea typeface="Pretendard" pitchFamily="34" charset="-122"/>
                 <a:cs typeface="Pretendard" pitchFamily="34" charset="-120"/>
               </a:rPr>
-              <a:t>★ 전문가검증</a:t>
-            </a:r>
-            <a:endParaRPr lang="en-US" sz="950" dirty="0"/>
-          </a:p>
-        </p:txBody>
-      </p:sp>
-      <p:sp>
-        <p:nvSpPr>
-          <p:cNvPr id="12" name="Text 10"/>
-          <p:cNvSpPr/>
-          <p:nvPr/>
-        </p:nvSpPr>
-        <p:spPr>
-          <a:xfrm>
-            <a:off x="2139696" y="2487168"/>
-            <a:ext cx="3566160" cy="420624"/>
-          </a:xfrm>
-          <a:prstGeom prst="rect">
-            <a:avLst/>
-          </a:prstGeom>
-          <a:noFill/>
-          <a:ln/>
-        </p:spPr>
-        <p:txBody>
-          <a:bodyPr wrap="square" lIns="0" tIns="0" rIns="0" bIns="0" rtlCol="0" anchor="ctr"/>
+              <a:t>NDA 체결</a:t>
+            </a:r>
+            <a:endParaRPr lang="en-US" sz="1100" dirty="0"/>
+          </a:p>
+        </p:txBody>
+      </p:sp>
+      <p:sp>
+        <p:nvSpPr>
+          <p:cNvPr id="16" name="Text 14"/>
+          <p:cNvSpPr/>
+          <p:nvPr/>
+        </p:nvSpPr>
+        <p:spPr>
+          <a:xfrm>
+            <a:off x="4960010" y="1792224"/>
+            <a:ext cx="2820314" cy="256032"/>
+          </a:xfrm>
+          <a:prstGeom prst="rect">
+            <a:avLst/>
+          </a:prstGeom>
+          <a:noFill/>
+          <a:ln/>
+        </p:spPr>
+        <p:txBody>
+          <a:bodyPr wrap="square" lIns="0" tIns="0" rIns="0" bIns="0" rtlCol="0" anchor="t"/>
           <a:lstStyle/>
           <a:p>
             <a:pPr indent="0" marL="0">
               <a:buNone/>
             </a:pPr>
             <a:r>
-              <a:rPr lang="en-US" sz="1000" dirty="0">
-                <a:solidFill>
-                  <a:srgbClr val="F1F5F9"/>
+              <a:rPr lang="en-US" sz="850" dirty="0">
+                <a:solidFill>
+                  <a:srgbClr val="A0AEC0"/>
                 </a:solidFill>
                 <a:latin typeface="Pretendard" pitchFamily="34" charset="0"/>
                 <a:ea typeface="Pretendard" pitchFamily="34" charset="-122"/>
                 <a:cs typeface="Pretendard" pitchFamily="34" charset="-120"/>
               </a:rPr>
-              <a:t>세무사·감정평가사 등 전문가 확인</a:t>
-            </a:r>
-            <a:endParaRPr lang="en-US" sz="1000" dirty="0"/>
-          </a:p>
-        </p:txBody>
-      </p:sp>
-      <p:sp>
-        <p:nvSpPr>
-          <p:cNvPr id="13" name="Text 11"/>
-          <p:cNvSpPr/>
-          <p:nvPr/>
-        </p:nvSpPr>
-        <p:spPr>
-          <a:xfrm>
-            <a:off x="5504688" y="2505456"/>
-            <a:ext cx="731520" cy="292608"/>
-          </a:xfrm>
-          <a:prstGeom prst="rect">
-            <a:avLst/>
-          </a:prstGeom>
-          <a:noFill/>
-          <a:ln/>
-        </p:spPr>
-        <p:txBody>
-          <a:bodyPr wrap="square" lIns="0" tIns="0" rIns="0" bIns="0" rtlCol="0" anchor="ctr"/>
-          <a:lstStyle/>
-          <a:p>
-            <a:pPr algn="r" indent="0" marL="0">
-              <a:buNone/>
-            </a:pPr>
-            <a:r>
-              <a:rPr lang="en-US" sz="1200" b="1" dirty="0">
+              <a:t>비밀유지계약 후 상세 임대차·재무 자료 제공</a:t>
+            </a:r>
+            <a:endParaRPr lang="en-US" sz="850" dirty="0"/>
+          </a:p>
+        </p:txBody>
+      </p:sp>
+      <p:sp>
+        <p:nvSpPr>
+          <p:cNvPr id="17" name="Text 15"/>
+          <p:cNvSpPr/>
+          <p:nvPr/>
+        </p:nvSpPr>
+        <p:spPr>
+          <a:xfrm>
+            <a:off x="7890053" y="1600200"/>
+            <a:ext cx="146304" cy="384048"/>
+          </a:xfrm>
+          <a:prstGeom prst="rect">
+            <a:avLst/>
+          </a:prstGeom>
+          <a:noFill/>
+          <a:ln/>
+        </p:spPr>
+        <p:txBody>
+          <a:bodyPr wrap="square" lIns="0" tIns="0" rIns="0" bIns="0" rtlCol="0" anchor="ctr"/>
+          <a:lstStyle/>
+          <a:p>
+            <a:pPr algn="ctr" indent="0" marL="0">
+              <a:buNone/>
+            </a:pPr>
+            <a:r>
+              <a:rPr lang="en-US" sz="1600" dirty="0">
+                <a:solidFill>
+                  <a:srgbClr val="B98A2E"/>
+                </a:solidFill>
+                <a:latin typeface="Pretendard" pitchFamily="34" charset="0"/>
+                <a:ea typeface="Pretendard" pitchFamily="34" charset="-122"/>
+                <a:cs typeface="Pretendard" pitchFamily="34" charset="-120"/>
+              </a:rPr>
+              <a:t>→</a:t>
+            </a:r>
+            <a:endParaRPr lang="en-US" sz="1600" dirty="0"/>
+          </a:p>
+        </p:txBody>
+      </p:sp>
+      <p:sp>
+        <p:nvSpPr>
+          <p:cNvPr id="18" name="Shape 16"/>
+          <p:cNvSpPr/>
+          <p:nvPr/>
+        </p:nvSpPr>
+        <p:spPr>
+          <a:xfrm>
+            <a:off x="8036357" y="1463040"/>
+            <a:ext cx="3588410" cy="658368"/>
+          </a:xfrm>
+          <a:prstGeom prst="roundRect">
+            <a:avLst>
+              <a:gd name="adj" fmla="val 5556"/>
+            </a:avLst>
+          </a:prstGeom>
+          <a:solidFill>
+            <a:srgbClr val="2D3748"/>
+          </a:solidFill>
+          <a:ln/>
+        </p:spPr>
+      </p:sp>
+      <p:sp>
+        <p:nvSpPr>
+          <p:cNvPr id="19" name="Shape 17"/>
+          <p:cNvSpPr/>
+          <p:nvPr/>
+        </p:nvSpPr>
+        <p:spPr>
+          <a:xfrm>
+            <a:off x="8146085" y="1572768"/>
+            <a:ext cx="438912" cy="438912"/>
+          </a:xfrm>
+          <a:prstGeom prst="ellipse">
+            <a:avLst/>
+          </a:prstGeom>
+          <a:solidFill>
+            <a:srgbClr val="B98A2E"/>
+          </a:solidFill>
+          <a:ln/>
+        </p:spPr>
+      </p:sp>
+      <p:sp>
+        <p:nvSpPr>
+          <p:cNvPr id="20" name="Text 18"/>
+          <p:cNvSpPr/>
+          <p:nvPr/>
+        </p:nvSpPr>
+        <p:spPr>
+          <a:xfrm>
+            <a:off x="8146085" y="1572768"/>
+            <a:ext cx="438912" cy="438912"/>
+          </a:xfrm>
+          <a:prstGeom prst="rect">
+            <a:avLst/>
+          </a:prstGeom>
+          <a:noFill/>
+          <a:ln/>
+        </p:spPr>
+        <p:txBody>
+          <a:bodyPr wrap="square" lIns="0" tIns="0" rIns="0" bIns="0" rtlCol="0" anchor="ctr"/>
+          <a:lstStyle/>
+          <a:p>
+            <a:pPr algn="ctr" indent="0" marL="0">
+              <a:buNone/>
+            </a:pPr>
+            <a:r>
+              <a:rPr lang="en-US" sz="1400" b="1" dirty="0">
                 <a:solidFill>
                   <a:srgbClr val="FFFFFF"/>
                 </a:solidFill>
@@ -2729,60 +2923,38 @@
                 <a:ea typeface="Arial" pitchFamily="34" charset="-122"/>
                 <a:cs typeface="Arial" pitchFamily="34" charset="-120"/>
               </a:rPr>
-              <a:t>0.95</a:t>
-            </a:r>
-            <a:endParaRPr lang="en-US" sz="1200" dirty="0"/>
-          </a:p>
-        </p:txBody>
-      </p:sp>
-      <p:sp>
-        <p:nvSpPr>
-          <p:cNvPr id="14" name="Shape 12"/>
-          <p:cNvSpPr/>
-          <p:nvPr/>
-        </p:nvSpPr>
-        <p:spPr>
-          <a:xfrm>
-            <a:off x="566928" y="3163824"/>
-            <a:ext cx="1417320" cy="347472"/>
-          </a:xfrm>
-          <a:prstGeom prst="roundRect">
-            <a:avLst>
-              <a:gd name="adj" fmla="val 10526"/>
-            </a:avLst>
-          </a:prstGeom>
-          <a:solidFill>
-            <a:srgbClr val="334155"/>
-          </a:solidFill>
-          <a:ln/>
-        </p:spPr>
-      </p:sp>
-      <p:sp>
-        <p:nvSpPr>
-          <p:cNvPr id="15" name="Text 13"/>
-          <p:cNvSpPr/>
-          <p:nvPr/>
-        </p:nvSpPr>
-        <p:spPr>
-          <a:xfrm>
-            <a:off x="566928" y="3163824"/>
-            <a:ext cx="1417320" cy="347472"/>
-          </a:xfrm>
-          <a:prstGeom prst="rect">
-            <a:avLst/>
-          </a:prstGeom>
-          <a:noFill/>
-          <a:ln/>
-        </p:spPr>
-        <p:txBody>
-          <a:bodyPr wrap="square" lIns="0" tIns="0" rIns="0" bIns="0" rtlCol="0" anchor="ctr"/>
-          <a:lstStyle/>
-          <a:p>
-            <a:pPr algn="ctr" indent="0" marL="0">
-              <a:buNone/>
-            </a:pPr>
-            <a:r>
-              <a:rPr lang="en-US" sz="950" b="1" dirty="0">
+              <a:t>03</a:t>
+            </a:r>
+            <a:endParaRPr lang="en-US" sz="1400" dirty="0"/>
+          </a:p>
+        </p:txBody>
+      </p:sp>
+      <p:sp>
+        <p:nvSpPr>
+          <p:cNvPr id="21" name="Text 19"/>
+          <p:cNvSpPr/>
+          <p:nvPr/>
+        </p:nvSpPr>
+        <p:spPr>
+          <a:xfrm>
+            <a:off x="8694725" y="1554480"/>
+            <a:ext cx="2820314" cy="237744"/>
+          </a:xfrm>
+          <a:prstGeom prst="rect">
+            <a:avLst/>
+          </a:prstGeom>
+          <a:noFill/>
+          <a:ln/>
+        </p:spPr>
+        <p:txBody>
+          <a:bodyPr wrap="square" lIns="0" tIns="0" rIns="0" bIns="0" rtlCol="0" anchor="ctr"/>
+          <a:lstStyle/>
+          <a:p>
+            <a:pPr indent="0" marL="0">
+              <a:buNone/>
+            </a:pPr>
+            <a:r>
+              <a:rPr lang="en-US" sz="1100" b="1" dirty="0">
                 <a:solidFill>
                   <a:srgbClr val="FFFFFF"/>
                 </a:solidFill>
@@ -2790,138 +2962,77 @@
                 <a:ea typeface="Pretendard" pitchFamily="34" charset="-122"/>
                 <a:cs typeface="Pretendard" pitchFamily="34" charset="-120"/>
               </a:rPr>
-              <a:t>▲ 매도인고지</a:t>
-            </a:r>
-            <a:endParaRPr lang="en-US" sz="950" dirty="0"/>
-          </a:p>
-        </p:txBody>
-      </p:sp>
-      <p:sp>
-        <p:nvSpPr>
-          <p:cNvPr id="16" name="Text 14"/>
-          <p:cNvSpPr/>
-          <p:nvPr/>
-        </p:nvSpPr>
-        <p:spPr>
-          <a:xfrm>
-            <a:off x="2139696" y="3145536"/>
-            <a:ext cx="3566160" cy="420624"/>
-          </a:xfrm>
-          <a:prstGeom prst="rect">
-            <a:avLst/>
-          </a:prstGeom>
-          <a:noFill/>
-          <a:ln/>
-        </p:spPr>
-        <p:txBody>
-          <a:bodyPr wrap="square" lIns="0" tIns="0" rIns="0" bIns="0" rtlCol="0" anchor="ctr"/>
+              <a:t>현장 실사</a:t>
+            </a:r>
+            <a:endParaRPr lang="en-US" sz="1100" dirty="0"/>
+          </a:p>
+        </p:txBody>
+      </p:sp>
+      <p:sp>
+        <p:nvSpPr>
+          <p:cNvPr id="22" name="Text 20"/>
+          <p:cNvSpPr/>
+          <p:nvPr/>
+        </p:nvSpPr>
+        <p:spPr>
+          <a:xfrm>
+            <a:off x="8694725" y="1792224"/>
+            <a:ext cx="2820314" cy="256032"/>
+          </a:xfrm>
+          <a:prstGeom prst="rect">
+            <a:avLst/>
+          </a:prstGeom>
+          <a:noFill/>
+          <a:ln/>
+        </p:spPr>
+        <p:txBody>
+          <a:bodyPr wrap="square" lIns="0" tIns="0" rIns="0" bIns="0" rtlCol="0" anchor="t"/>
           <a:lstStyle/>
           <a:p>
             <a:pPr indent="0" marL="0">
               <a:buNone/>
             </a:pPr>
             <a:r>
-              <a:rPr lang="en-US" sz="1000" dirty="0">
-                <a:solidFill>
-                  <a:srgbClr val="F1F5F9"/>
+              <a:rPr lang="en-US" sz="850" dirty="0">
+                <a:solidFill>
+                  <a:srgbClr val="A0AEC0"/>
                 </a:solidFill>
                 <a:latin typeface="Pretendard" pitchFamily="34" charset="0"/>
                 <a:ea typeface="Pretendard" pitchFamily="34" charset="-122"/>
                 <a:cs typeface="Pretendard" pitchFamily="34" charset="-120"/>
               </a:rPr>
-              <a:t>매도인이 구두 또는 서면으로 고지</a:t>
-            </a:r>
-            <a:endParaRPr lang="en-US" sz="1000" dirty="0"/>
-          </a:p>
-        </p:txBody>
-      </p:sp>
-      <p:sp>
-        <p:nvSpPr>
-          <p:cNvPr id="17" name="Text 15"/>
-          <p:cNvSpPr/>
-          <p:nvPr/>
-        </p:nvSpPr>
-        <p:spPr>
-          <a:xfrm>
-            <a:off x="5504688" y="3163824"/>
-            <a:ext cx="731520" cy="292608"/>
-          </a:xfrm>
-          <a:prstGeom prst="rect">
-            <a:avLst/>
-          </a:prstGeom>
-          <a:noFill/>
-          <a:ln/>
-        </p:spPr>
-        <p:txBody>
-          <a:bodyPr wrap="square" lIns="0" tIns="0" rIns="0" bIns="0" rtlCol="0" anchor="ctr"/>
-          <a:lstStyle/>
-          <a:p>
-            <a:pPr algn="r" indent="0" marL="0">
-              <a:buNone/>
-            </a:pPr>
-            <a:r>
-              <a:rPr lang="en-US" sz="1200" b="1" dirty="0">
-                <a:solidFill>
-                  <a:srgbClr val="FFFFFF"/>
-                </a:solidFill>
-                <a:latin typeface="Arial" pitchFamily="34" charset="0"/>
-                <a:ea typeface="Arial" pitchFamily="34" charset="-122"/>
-                <a:cs typeface="Arial" pitchFamily="34" charset="-120"/>
-              </a:rPr>
-              <a:t>0.65</a:t>
-            </a:r>
-            <a:endParaRPr lang="en-US" sz="1200" dirty="0"/>
-          </a:p>
-        </p:txBody>
-      </p:sp>
-      <p:sp>
-        <p:nvSpPr>
-          <p:cNvPr id="18" name="Shape 16"/>
-          <p:cNvSpPr/>
-          <p:nvPr/>
-        </p:nvSpPr>
-        <p:spPr>
-          <a:xfrm>
-            <a:off x="566928" y="3822192"/>
-            <a:ext cx="1417320" cy="347472"/>
-          </a:xfrm>
-          <a:prstGeom prst="roundRect">
-            <a:avLst>
-              <a:gd name="adj" fmla="val 10526"/>
-            </a:avLst>
-          </a:prstGeom>
-          <a:solidFill>
-            <a:srgbClr val="334155"/>
-          </a:solidFill>
-          <a:ln/>
-        </p:spPr>
-      </p:sp>
-      <p:sp>
-        <p:nvSpPr>
-          <p:cNvPr id="19" name="Text 17"/>
-          <p:cNvSpPr/>
-          <p:nvPr/>
-        </p:nvSpPr>
-        <p:spPr>
-          <a:xfrm>
-            <a:off x="566928" y="3822192"/>
-            <a:ext cx="1417320" cy="347472"/>
-          </a:xfrm>
-          <a:prstGeom prst="rect">
-            <a:avLst/>
-          </a:prstGeom>
-          <a:noFill/>
-          <a:ln/>
-        </p:spPr>
-        <p:txBody>
-          <a:bodyPr wrap="square" lIns="0" tIns="0" rIns="0" bIns="0" rtlCol="0" anchor="ctr"/>
-          <a:lstStyle/>
-          <a:p>
-            <a:pPr algn="ctr" indent="0" marL="0">
-              <a:buNone/>
-            </a:pPr>
-            <a:r>
-              <a:rPr lang="en-US" sz="950" b="1" dirty="0">
+              <a:t>건물 컨디션 및 설비 직접 확인 후 의향서(LOI) 제출</a:t>
+            </a:r>
+            <a:endParaRPr lang="en-US" sz="850" dirty="0"/>
+          </a:p>
+        </p:txBody>
+      </p:sp>
+      <p:sp>
+        <p:nvSpPr>
+          <p:cNvPr id="23" name="Text 21"/>
+          <p:cNvSpPr/>
+          <p:nvPr/>
+        </p:nvSpPr>
+        <p:spPr>
+          <a:xfrm>
+            <a:off x="566928" y="2395728"/>
+            <a:ext cx="5486400" cy="237744"/>
+          </a:xfrm>
+          <a:prstGeom prst="rect">
+            <a:avLst/>
+          </a:prstGeom>
+          <a:noFill/>
+          <a:ln/>
+        </p:spPr>
+        <p:txBody>
+          <a:bodyPr wrap="square" lIns="0" tIns="0" rIns="0" bIns="0" rtlCol="0" anchor="ctr"/>
+          <a:lstStyle/>
+          <a:p>
+            <a:pPr indent="0" marL="0">
+              <a:buNone/>
+            </a:pPr>
+            <a:r>
+              <a:rPr lang="en-US" sz="1100" b="1" dirty="0">
                 <a:solidFill>
                   <a:srgbClr val="FFFFFF"/>
                 </a:solidFill>
@@ -2929,239 +3040,183 @@
                 <a:ea typeface="Pretendard" pitchFamily="34" charset="-122"/>
                 <a:cs typeface="Pretendard" pitchFamily="34" charset="-120"/>
               </a:rPr>
-              <a:t>● 중개인입력</a:t>
-            </a:r>
-            <a:endParaRPr lang="en-US" sz="950" dirty="0"/>
-          </a:p>
-        </p:txBody>
-      </p:sp>
-      <p:sp>
-        <p:nvSpPr>
-          <p:cNvPr id="20" name="Text 18"/>
-          <p:cNvSpPr/>
-          <p:nvPr/>
-        </p:nvSpPr>
-        <p:spPr>
-          <a:xfrm>
-            <a:off x="2139696" y="3803904"/>
-            <a:ext cx="3566160" cy="420624"/>
-          </a:xfrm>
-          <a:prstGeom prst="rect">
-            <a:avLst/>
-          </a:prstGeom>
-          <a:noFill/>
-          <a:ln/>
-        </p:spPr>
-        <p:txBody>
-          <a:bodyPr wrap="square" lIns="0" tIns="0" rIns="0" bIns="0" rtlCol="0" anchor="ctr"/>
-          <a:lstStyle/>
-          <a:p>
-            <a:pPr indent="0" marL="0">
-              <a:buNone/>
-            </a:pPr>
-            <a:r>
-              <a:rPr lang="en-US" sz="1000" dirty="0">
-                <a:solidFill>
-                  <a:srgbClr val="F1F5F9"/>
+              <a:t>데이터 출처 표기</a:t>
+            </a:r>
+            <a:endParaRPr lang="en-US" sz="1100" dirty="0"/>
+          </a:p>
+        </p:txBody>
+      </p:sp>
+      <p:sp>
+        <p:nvSpPr>
+          <p:cNvPr id="24" name="Shape 22"/>
+          <p:cNvSpPr/>
+          <p:nvPr/>
+        </p:nvSpPr>
+        <p:spPr>
+          <a:xfrm>
+            <a:off x="566928" y="2724912"/>
+            <a:ext cx="1280160" cy="292608"/>
+          </a:xfrm>
+          <a:prstGeom prst="roundRect">
+            <a:avLst>
+              <a:gd name="adj" fmla="val 12500"/>
+            </a:avLst>
+          </a:prstGeom>
+          <a:solidFill>
+            <a:srgbClr val="2D3748"/>
+          </a:solidFill>
+          <a:ln/>
+        </p:spPr>
+      </p:sp>
+      <p:sp>
+        <p:nvSpPr>
+          <p:cNvPr id="25" name="Text 23"/>
+          <p:cNvSpPr/>
+          <p:nvPr/>
+        </p:nvSpPr>
+        <p:spPr>
+          <a:xfrm>
+            <a:off x="566928" y="2724912"/>
+            <a:ext cx="1280160" cy="292608"/>
+          </a:xfrm>
+          <a:prstGeom prst="rect">
+            <a:avLst/>
+          </a:prstGeom>
+          <a:noFill/>
+          <a:ln/>
+        </p:spPr>
+        <p:txBody>
+          <a:bodyPr wrap="square" lIns="0" tIns="0" rIns="0" bIns="0" rtlCol="0" anchor="ctr"/>
+          <a:lstStyle/>
+          <a:p>
+            <a:pPr algn="ctr" indent="0" marL="0">
+              <a:buNone/>
+            </a:pPr>
+            <a:r>
+              <a:rPr lang="en-US" sz="850" b="1" dirty="0">
+                <a:solidFill>
+                  <a:srgbClr val="FFFFFF"/>
                 </a:solidFill>
                 <a:latin typeface="Pretendard" pitchFamily="34" charset="0"/>
                 <a:ea typeface="Pretendard" pitchFamily="34" charset="-122"/>
                 <a:cs typeface="Pretendard" pitchFamily="34" charset="-120"/>
               </a:rPr>
-              <a:t>중개인 현장 조사 및 경험 기반 입력</a:t>
-            </a:r>
-            <a:endParaRPr lang="en-US" sz="1000" dirty="0"/>
-          </a:p>
-        </p:txBody>
-      </p:sp>
-      <p:sp>
-        <p:nvSpPr>
-          <p:cNvPr id="21" name="Text 19"/>
-          <p:cNvSpPr/>
-          <p:nvPr/>
-        </p:nvSpPr>
-        <p:spPr>
-          <a:xfrm>
-            <a:off x="5504688" y="3822192"/>
-            <a:ext cx="731520" cy="292608"/>
-          </a:xfrm>
-          <a:prstGeom prst="rect">
-            <a:avLst/>
-          </a:prstGeom>
-          <a:noFill/>
-          <a:ln/>
-        </p:spPr>
-        <p:txBody>
-          <a:bodyPr wrap="square" lIns="0" tIns="0" rIns="0" bIns="0" rtlCol="0" anchor="ctr"/>
-          <a:lstStyle/>
-          <a:p>
-            <a:pPr algn="r" indent="0" marL="0">
-              <a:buNone/>
-            </a:pPr>
-            <a:r>
-              <a:rPr lang="en-US" sz="1200" b="1" dirty="0">
-                <a:solidFill>
-                  <a:srgbClr val="FFFFFF"/>
-                </a:solidFill>
-                <a:latin typeface="Arial" pitchFamily="34" charset="0"/>
-                <a:ea typeface="Arial" pitchFamily="34" charset="-122"/>
-                <a:cs typeface="Arial" pitchFamily="34" charset="-120"/>
-              </a:rPr>
-              <a:t>0.60</a:t>
-            </a:r>
-            <a:endParaRPr lang="en-US" sz="1200" dirty="0"/>
-          </a:p>
-        </p:txBody>
-      </p:sp>
-      <p:sp>
-        <p:nvSpPr>
-          <p:cNvPr id="22" name="Shape 20"/>
-          <p:cNvSpPr/>
-          <p:nvPr/>
-        </p:nvSpPr>
-        <p:spPr>
-          <a:xfrm>
-            <a:off x="566928" y="4480560"/>
-            <a:ext cx="1417320" cy="347472"/>
-          </a:xfrm>
-          <a:prstGeom prst="roundRect">
-            <a:avLst>
-              <a:gd name="adj" fmla="val 10526"/>
-            </a:avLst>
-          </a:prstGeom>
-          <a:solidFill>
-            <a:srgbClr val="334155"/>
-          </a:solidFill>
-          <a:ln/>
-        </p:spPr>
-      </p:sp>
-      <p:sp>
-        <p:nvSpPr>
-          <p:cNvPr id="23" name="Text 21"/>
-          <p:cNvSpPr/>
-          <p:nvPr/>
-        </p:nvSpPr>
-        <p:spPr>
-          <a:xfrm>
-            <a:off x="566928" y="4480560"/>
-            <a:ext cx="1417320" cy="347472"/>
-          </a:xfrm>
-          <a:prstGeom prst="rect">
-            <a:avLst/>
-          </a:prstGeom>
-          <a:noFill/>
-          <a:ln/>
-        </p:spPr>
-        <p:txBody>
-          <a:bodyPr wrap="square" lIns="0" tIns="0" rIns="0" bIns="0" rtlCol="0" anchor="ctr"/>
-          <a:lstStyle/>
-          <a:p>
-            <a:pPr algn="ctr" indent="0" marL="0">
-              <a:buNone/>
-            </a:pPr>
-            <a:r>
-              <a:rPr lang="en-US" sz="950" b="1" dirty="0">
-                <a:solidFill>
-                  <a:srgbClr val="FFFFFF"/>
+              <a:t>✓ 공부확인</a:t>
+            </a:r>
+            <a:endParaRPr lang="en-US" sz="850" dirty="0"/>
+          </a:p>
+        </p:txBody>
+      </p:sp>
+      <p:sp>
+        <p:nvSpPr>
+          <p:cNvPr id="26" name="Text 24"/>
+          <p:cNvSpPr/>
+          <p:nvPr/>
+        </p:nvSpPr>
+        <p:spPr>
+          <a:xfrm>
+            <a:off x="1993392" y="2706624"/>
+            <a:ext cx="3840480" cy="329184"/>
+          </a:xfrm>
+          <a:prstGeom prst="rect">
+            <a:avLst/>
+          </a:prstGeom>
+          <a:noFill/>
+          <a:ln/>
+        </p:spPr>
+        <p:txBody>
+          <a:bodyPr wrap="square" lIns="0" tIns="0" rIns="0" bIns="0" rtlCol="0" anchor="ctr"/>
+          <a:lstStyle/>
+          <a:p>
+            <a:pPr indent="0" marL="0">
+              <a:buNone/>
+            </a:pPr>
+            <a:r>
+              <a:rPr lang="en-US" sz="900" dirty="0">
+                <a:solidFill>
+                  <a:srgbClr val="E2E8F0"/>
                 </a:solidFill>
                 <a:latin typeface="Pretendard" pitchFamily="34" charset="0"/>
                 <a:ea typeface="Pretendard" pitchFamily="34" charset="-122"/>
                 <a:cs typeface="Pretendard" pitchFamily="34" charset="-120"/>
               </a:rPr>
-              <a:t>◇ AI추정·가정</a:t>
-            </a:r>
-            <a:endParaRPr lang="en-US" sz="950" dirty="0"/>
-          </a:p>
-        </p:txBody>
-      </p:sp>
-      <p:sp>
-        <p:nvSpPr>
-          <p:cNvPr id="24" name="Text 22"/>
-          <p:cNvSpPr/>
-          <p:nvPr/>
-        </p:nvSpPr>
-        <p:spPr>
-          <a:xfrm>
-            <a:off x="2139696" y="4462272"/>
-            <a:ext cx="3566160" cy="420624"/>
-          </a:xfrm>
-          <a:prstGeom prst="rect">
-            <a:avLst/>
-          </a:prstGeom>
-          <a:noFill/>
-          <a:ln/>
-        </p:spPr>
-        <p:txBody>
-          <a:bodyPr wrap="square" lIns="0" tIns="0" rIns="0" bIns="0" rtlCol="0" anchor="ctr"/>
-          <a:lstStyle/>
-          <a:p>
-            <a:pPr indent="0" marL="0">
-              <a:buNone/>
-            </a:pPr>
-            <a:r>
-              <a:rPr lang="en-US" sz="1000" dirty="0">
-                <a:solidFill>
-                  <a:srgbClr val="F1F5F9"/>
+              <a:t>등기부·대장 등 공적 장부 직접 확인</a:t>
+            </a:r>
+            <a:endParaRPr lang="en-US" sz="900" dirty="0"/>
+          </a:p>
+        </p:txBody>
+      </p:sp>
+      <p:sp>
+        <p:nvSpPr>
+          <p:cNvPr id="27" name="Shape 25"/>
+          <p:cNvSpPr/>
+          <p:nvPr/>
+        </p:nvSpPr>
+        <p:spPr>
+          <a:xfrm>
+            <a:off x="566928" y="3200400"/>
+            <a:ext cx="1280160" cy="292608"/>
+          </a:xfrm>
+          <a:prstGeom prst="roundRect">
+            <a:avLst>
+              <a:gd name="adj" fmla="val 12500"/>
+            </a:avLst>
+          </a:prstGeom>
+          <a:solidFill>
+            <a:srgbClr val="2D3748"/>
+          </a:solidFill>
+          <a:ln/>
+        </p:spPr>
+      </p:sp>
+      <p:sp>
+        <p:nvSpPr>
+          <p:cNvPr id="28" name="Text 26"/>
+          <p:cNvSpPr/>
+          <p:nvPr/>
+        </p:nvSpPr>
+        <p:spPr>
+          <a:xfrm>
+            <a:off x="566928" y="3200400"/>
+            <a:ext cx="1280160" cy="292608"/>
+          </a:xfrm>
+          <a:prstGeom prst="rect">
+            <a:avLst/>
+          </a:prstGeom>
+          <a:noFill/>
+          <a:ln/>
+        </p:spPr>
+        <p:txBody>
+          <a:bodyPr wrap="square" lIns="0" tIns="0" rIns="0" bIns="0" rtlCol="0" anchor="ctr"/>
+          <a:lstStyle/>
+          <a:p>
+            <a:pPr algn="ctr" indent="0" marL="0">
+              <a:buNone/>
+            </a:pPr>
+            <a:r>
+              <a:rPr lang="en-US" sz="850" b="1" dirty="0">
+                <a:solidFill>
+                  <a:srgbClr val="FFFFFF"/>
                 </a:solidFill>
                 <a:latin typeface="Pretendard" pitchFamily="34" charset="0"/>
                 <a:ea typeface="Pretendard" pitchFamily="34" charset="-122"/>
                 <a:cs typeface="Pretendard" pitchFamily="34" charset="-120"/>
               </a:rPr>
-              <a:t>시나리오 분석 및 AI 모델 추정</a:t>
-            </a:r>
-            <a:endParaRPr lang="en-US" sz="1000" dirty="0"/>
-          </a:p>
-        </p:txBody>
-      </p:sp>
-      <p:sp>
-        <p:nvSpPr>
-          <p:cNvPr id="25" name="Text 23"/>
-          <p:cNvSpPr/>
-          <p:nvPr/>
-        </p:nvSpPr>
-        <p:spPr>
-          <a:xfrm>
-            <a:off x="5504688" y="4480560"/>
-            <a:ext cx="731520" cy="292608"/>
-          </a:xfrm>
-          <a:prstGeom prst="rect">
-            <a:avLst/>
-          </a:prstGeom>
-          <a:noFill/>
-          <a:ln/>
-        </p:spPr>
-        <p:txBody>
-          <a:bodyPr wrap="square" lIns="0" tIns="0" rIns="0" bIns="0" rtlCol="0" anchor="ctr"/>
-          <a:lstStyle/>
-          <a:p>
-            <a:pPr algn="r" indent="0" marL="0">
-              <a:buNone/>
-            </a:pPr>
-            <a:r>
-              <a:rPr lang="en-US" sz="1200" b="1" dirty="0">
-                <a:solidFill>
-                  <a:srgbClr val="FFFFFF"/>
-                </a:solidFill>
-                <a:latin typeface="Arial" pitchFamily="34" charset="0"/>
-                <a:ea typeface="Arial" pitchFamily="34" charset="-122"/>
-                <a:cs typeface="Arial" pitchFamily="34" charset="-120"/>
-              </a:rPr>
-              <a:t>0.30</a:t>
-            </a:r>
-            <a:endParaRPr lang="en-US" sz="1200" dirty="0"/>
-          </a:p>
-        </p:txBody>
-      </p:sp>
-      <p:sp>
-        <p:nvSpPr>
-          <p:cNvPr id="26" name="Text 24"/>
-          <p:cNvSpPr/>
-          <p:nvPr/>
-        </p:nvSpPr>
-        <p:spPr>
-          <a:xfrm>
-            <a:off x="6492240" y="1517904"/>
-            <a:ext cx="5129784" cy="237744"/>
+              <a:t>★ 전문가검증</a:t>
+            </a:r>
+            <a:endParaRPr lang="en-US" sz="850" dirty="0"/>
+          </a:p>
+        </p:txBody>
+      </p:sp>
+      <p:sp>
+        <p:nvSpPr>
+          <p:cNvPr id="29" name="Text 27"/>
+          <p:cNvSpPr/>
+          <p:nvPr/>
+        </p:nvSpPr>
+        <p:spPr>
+          <a:xfrm>
+            <a:off x="1993392" y="3182112"/>
+            <a:ext cx="3840480" cy="329184"/>
           </a:xfrm>
           <a:prstGeom prst="rect">
             <a:avLst/>
@@ -3177,52 +3232,391 @@
               <a:buNone/>
             </a:pPr>
             <a:r>
-              <a:rPr lang="en-US" sz="1100" b="1" dirty="0">
-                <a:solidFill>
-                  <a:srgbClr val="FFFFFF"/>
+              <a:rPr lang="en-US" sz="900" dirty="0">
+                <a:solidFill>
+                  <a:srgbClr val="E2E8F0"/>
                 </a:solidFill>
                 <a:latin typeface="Pretendard" pitchFamily="34" charset="0"/>
                 <a:ea typeface="Pretendard" pitchFamily="34" charset="-122"/>
                 <a:cs typeface="Pretendard" pitchFamily="34" charset="-120"/>
               </a:rPr>
-              <a:t>면책 조항</a:t>
-            </a:r>
-            <a:endParaRPr lang="en-US" sz="1100" dirty="0"/>
-          </a:p>
-        </p:txBody>
-      </p:sp>
-      <p:sp>
-        <p:nvSpPr>
-          <p:cNvPr id="27" name="Shape 25"/>
-          <p:cNvSpPr/>
-          <p:nvPr/>
-        </p:nvSpPr>
-        <p:spPr>
-          <a:xfrm>
-            <a:off x="6492240" y="1847088"/>
-            <a:ext cx="5129784" cy="2615184"/>
+              <a:t>세무사·감정평가사 등 전문가 확인</a:t>
+            </a:r>
+            <a:endParaRPr lang="en-US" sz="900" dirty="0"/>
+          </a:p>
+        </p:txBody>
+      </p:sp>
+      <p:sp>
+        <p:nvSpPr>
+          <p:cNvPr id="30" name="Shape 28"/>
+          <p:cNvSpPr/>
+          <p:nvPr/>
+        </p:nvSpPr>
+        <p:spPr>
+          <a:xfrm>
+            <a:off x="566928" y="3675888"/>
+            <a:ext cx="1280160" cy="292608"/>
           </a:xfrm>
           <a:prstGeom prst="roundRect">
             <a:avLst>
-              <a:gd name="adj" fmla="val 1399"/>
+              <a:gd name="adj" fmla="val 12500"/>
             </a:avLst>
           </a:prstGeom>
           <a:solidFill>
-            <a:srgbClr val="1E293B"/>
+            <a:srgbClr val="2D3748"/>
           </a:solidFill>
           <a:ln/>
         </p:spPr>
       </p:sp>
       <p:sp>
         <p:nvSpPr>
-          <p:cNvPr id="28" name="Text 26"/>
-          <p:cNvSpPr/>
-          <p:nvPr/>
-        </p:nvSpPr>
-        <p:spPr>
-          <a:xfrm>
-            <a:off x="6711696" y="2011680"/>
-            <a:ext cx="4690872" cy="2286000"/>
+          <p:cNvPr id="31" name="Text 29"/>
+          <p:cNvSpPr/>
+          <p:nvPr/>
+        </p:nvSpPr>
+        <p:spPr>
+          <a:xfrm>
+            <a:off x="566928" y="3675888"/>
+            <a:ext cx="1280160" cy="292608"/>
+          </a:xfrm>
+          <a:prstGeom prst="rect">
+            <a:avLst/>
+          </a:prstGeom>
+          <a:noFill/>
+          <a:ln/>
+        </p:spPr>
+        <p:txBody>
+          <a:bodyPr wrap="square" lIns="0" tIns="0" rIns="0" bIns="0" rtlCol="0" anchor="ctr"/>
+          <a:lstStyle/>
+          <a:p>
+            <a:pPr algn="ctr" indent="0" marL="0">
+              <a:buNone/>
+            </a:pPr>
+            <a:r>
+              <a:rPr lang="en-US" sz="850" b="1" dirty="0">
+                <a:solidFill>
+                  <a:srgbClr val="FFFFFF"/>
+                </a:solidFill>
+                <a:latin typeface="Pretendard" pitchFamily="34" charset="0"/>
+                <a:ea typeface="Pretendard" pitchFamily="34" charset="-122"/>
+                <a:cs typeface="Pretendard" pitchFamily="34" charset="-120"/>
+              </a:rPr>
+              <a:t>▲ 매도인고지</a:t>
+            </a:r>
+            <a:endParaRPr lang="en-US" sz="850" dirty="0"/>
+          </a:p>
+        </p:txBody>
+      </p:sp>
+      <p:sp>
+        <p:nvSpPr>
+          <p:cNvPr id="32" name="Text 30"/>
+          <p:cNvSpPr/>
+          <p:nvPr/>
+        </p:nvSpPr>
+        <p:spPr>
+          <a:xfrm>
+            <a:off x="1993392" y="3657600"/>
+            <a:ext cx="3840480" cy="329184"/>
+          </a:xfrm>
+          <a:prstGeom prst="rect">
+            <a:avLst/>
+          </a:prstGeom>
+          <a:noFill/>
+          <a:ln/>
+        </p:spPr>
+        <p:txBody>
+          <a:bodyPr wrap="square" lIns="0" tIns="0" rIns="0" bIns="0" rtlCol="0" anchor="ctr"/>
+          <a:lstStyle/>
+          <a:p>
+            <a:pPr indent="0" marL="0">
+              <a:buNone/>
+            </a:pPr>
+            <a:r>
+              <a:rPr lang="en-US" sz="900" dirty="0">
+                <a:solidFill>
+                  <a:srgbClr val="E2E8F0"/>
+                </a:solidFill>
+                <a:latin typeface="Pretendard" pitchFamily="34" charset="0"/>
+                <a:ea typeface="Pretendard" pitchFamily="34" charset="-122"/>
+                <a:cs typeface="Pretendard" pitchFamily="34" charset="-120"/>
+              </a:rPr>
+              <a:t>매도인이 구두 또는 서면으로 고지</a:t>
+            </a:r>
+            <a:endParaRPr lang="en-US" sz="900" dirty="0"/>
+          </a:p>
+        </p:txBody>
+      </p:sp>
+      <p:sp>
+        <p:nvSpPr>
+          <p:cNvPr id="33" name="Shape 31"/>
+          <p:cNvSpPr/>
+          <p:nvPr/>
+        </p:nvSpPr>
+        <p:spPr>
+          <a:xfrm>
+            <a:off x="566928" y="4151376"/>
+            <a:ext cx="1280160" cy="292608"/>
+          </a:xfrm>
+          <a:prstGeom prst="roundRect">
+            <a:avLst>
+              <a:gd name="adj" fmla="val 12500"/>
+            </a:avLst>
+          </a:prstGeom>
+          <a:solidFill>
+            <a:srgbClr val="2D3748"/>
+          </a:solidFill>
+          <a:ln/>
+        </p:spPr>
+      </p:sp>
+      <p:sp>
+        <p:nvSpPr>
+          <p:cNvPr id="34" name="Text 32"/>
+          <p:cNvSpPr/>
+          <p:nvPr/>
+        </p:nvSpPr>
+        <p:spPr>
+          <a:xfrm>
+            <a:off x="566928" y="4151376"/>
+            <a:ext cx="1280160" cy="292608"/>
+          </a:xfrm>
+          <a:prstGeom prst="rect">
+            <a:avLst/>
+          </a:prstGeom>
+          <a:noFill/>
+          <a:ln/>
+        </p:spPr>
+        <p:txBody>
+          <a:bodyPr wrap="square" lIns="0" tIns="0" rIns="0" bIns="0" rtlCol="0" anchor="ctr"/>
+          <a:lstStyle/>
+          <a:p>
+            <a:pPr algn="ctr" indent="0" marL="0">
+              <a:buNone/>
+            </a:pPr>
+            <a:r>
+              <a:rPr lang="en-US" sz="850" b="1" dirty="0">
+                <a:solidFill>
+                  <a:srgbClr val="FFFFFF"/>
+                </a:solidFill>
+                <a:latin typeface="Pretendard" pitchFamily="34" charset="0"/>
+                <a:ea typeface="Pretendard" pitchFamily="34" charset="-122"/>
+                <a:cs typeface="Pretendard" pitchFamily="34" charset="-120"/>
+              </a:rPr>
+              <a:t>● 중개인입력</a:t>
+            </a:r>
+            <a:endParaRPr lang="en-US" sz="850" dirty="0"/>
+          </a:p>
+        </p:txBody>
+      </p:sp>
+      <p:sp>
+        <p:nvSpPr>
+          <p:cNvPr id="35" name="Text 33"/>
+          <p:cNvSpPr/>
+          <p:nvPr/>
+        </p:nvSpPr>
+        <p:spPr>
+          <a:xfrm>
+            <a:off x="1993392" y="4133088"/>
+            <a:ext cx="3840480" cy="329184"/>
+          </a:xfrm>
+          <a:prstGeom prst="rect">
+            <a:avLst/>
+          </a:prstGeom>
+          <a:noFill/>
+          <a:ln/>
+        </p:spPr>
+        <p:txBody>
+          <a:bodyPr wrap="square" lIns="0" tIns="0" rIns="0" bIns="0" rtlCol="0" anchor="ctr"/>
+          <a:lstStyle/>
+          <a:p>
+            <a:pPr indent="0" marL="0">
+              <a:buNone/>
+            </a:pPr>
+            <a:r>
+              <a:rPr lang="en-US" sz="900" dirty="0">
+                <a:solidFill>
+                  <a:srgbClr val="E2E8F0"/>
+                </a:solidFill>
+                <a:latin typeface="Pretendard" pitchFamily="34" charset="0"/>
+                <a:ea typeface="Pretendard" pitchFamily="34" charset="-122"/>
+                <a:cs typeface="Pretendard" pitchFamily="34" charset="-120"/>
+              </a:rPr>
+              <a:t>중개인 현장 조사 및 경험 기반 입력</a:t>
+            </a:r>
+            <a:endParaRPr lang="en-US" sz="900" dirty="0"/>
+          </a:p>
+        </p:txBody>
+      </p:sp>
+      <p:sp>
+        <p:nvSpPr>
+          <p:cNvPr id="36" name="Shape 34"/>
+          <p:cNvSpPr/>
+          <p:nvPr/>
+        </p:nvSpPr>
+        <p:spPr>
+          <a:xfrm>
+            <a:off x="566928" y="4626864"/>
+            <a:ext cx="1280160" cy="292608"/>
+          </a:xfrm>
+          <a:prstGeom prst="roundRect">
+            <a:avLst>
+              <a:gd name="adj" fmla="val 12500"/>
+            </a:avLst>
+          </a:prstGeom>
+          <a:solidFill>
+            <a:srgbClr val="2D3748"/>
+          </a:solidFill>
+          <a:ln/>
+        </p:spPr>
+      </p:sp>
+      <p:sp>
+        <p:nvSpPr>
+          <p:cNvPr id="37" name="Text 35"/>
+          <p:cNvSpPr/>
+          <p:nvPr/>
+        </p:nvSpPr>
+        <p:spPr>
+          <a:xfrm>
+            <a:off x="566928" y="4626864"/>
+            <a:ext cx="1280160" cy="292608"/>
+          </a:xfrm>
+          <a:prstGeom prst="rect">
+            <a:avLst/>
+          </a:prstGeom>
+          <a:noFill/>
+          <a:ln/>
+        </p:spPr>
+        <p:txBody>
+          <a:bodyPr wrap="square" lIns="0" tIns="0" rIns="0" bIns="0" rtlCol="0" anchor="ctr"/>
+          <a:lstStyle/>
+          <a:p>
+            <a:pPr algn="ctr" indent="0" marL="0">
+              <a:buNone/>
+            </a:pPr>
+            <a:r>
+              <a:rPr lang="en-US" sz="850" b="1" dirty="0">
+                <a:solidFill>
+                  <a:srgbClr val="FFFFFF"/>
+                </a:solidFill>
+                <a:latin typeface="Pretendard" pitchFamily="34" charset="0"/>
+                <a:ea typeface="Pretendard" pitchFamily="34" charset="-122"/>
+                <a:cs typeface="Pretendard" pitchFamily="34" charset="-120"/>
+              </a:rPr>
+              <a:t>◇ AI추정·가정</a:t>
+            </a:r>
+            <a:endParaRPr lang="en-US" sz="850" dirty="0"/>
+          </a:p>
+        </p:txBody>
+      </p:sp>
+      <p:sp>
+        <p:nvSpPr>
+          <p:cNvPr id="38" name="Text 36"/>
+          <p:cNvSpPr/>
+          <p:nvPr/>
+        </p:nvSpPr>
+        <p:spPr>
+          <a:xfrm>
+            <a:off x="1993392" y="4608576"/>
+            <a:ext cx="3840480" cy="329184"/>
+          </a:xfrm>
+          <a:prstGeom prst="rect">
+            <a:avLst/>
+          </a:prstGeom>
+          <a:noFill/>
+          <a:ln/>
+        </p:spPr>
+        <p:txBody>
+          <a:bodyPr wrap="square" lIns="0" tIns="0" rIns="0" bIns="0" rtlCol="0" anchor="ctr"/>
+          <a:lstStyle/>
+          <a:p>
+            <a:pPr indent="0" marL="0">
+              <a:buNone/>
+            </a:pPr>
+            <a:r>
+              <a:rPr lang="en-US" sz="900" dirty="0">
+                <a:solidFill>
+                  <a:srgbClr val="E2E8F0"/>
+                </a:solidFill>
+                <a:latin typeface="Pretendard" pitchFamily="34" charset="0"/>
+                <a:ea typeface="Pretendard" pitchFamily="34" charset="-122"/>
+                <a:cs typeface="Pretendard" pitchFamily="34" charset="-120"/>
+              </a:rPr>
+              <a:t>시나리오 분석 및 AI 모델 추정</a:t>
+            </a:r>
+            <a:endParaRPr lang="en-US" sz="900" dirty="0"/>
+          </a:p>
+        </p:txBody>
+      </p:sp>
+      <p:sp>
+        <p:nvSpPr>
+          <p:cNvPr id="39" name="Text 37"/>
+          <p:cNvSpPr/>
+          <p:nvPr/>
+        </p:nvSpPr>
+        <p:spPr>
+          <a:xfrm>
+            <a:off x="6492240" y="2395728"/>
+            <a:ext cx="5129784" cy="237744"/>
+          </a:xfrm>
+          <a:prstGeom prst="rect">
+            <a:avLst/>
+          </a:prstGeom>
+          <a:noFill/>
+          <a:ln/>
+        </p:spPr>
+        <p:txBody>
+          <a:bodyPr wrap="square" lIns="0" tIns="0" rIns="0" bIns="0" rtlCol="0" anchor="ctr"/>
+          <a:lstStyle/>
+          <a:p>
+            <a:pPr indent="0" marL="0">
+              <a:buNone/>
+            </a:pPr>
+            <a:r>
+              <a:rPr lang="en-US" sz="1100" b="1" dirty="0">
+                <a:solidFill>
+                  <a:srgbClr val="FFFFFF"/>
+                </a:solidFill>
+                <a:latin typeface="Pretendard" pitchFamily="34" charset="0"/>
+                <a:ea typeface="Pretendard" pitchFamily="34" charset="-122"/>
+                <a:cs typeface="Pretendard" pitchFamily="34" charset="-120"/>
+              </a:rPr>
+              <a:t>면책 조항</a:t>
+            </a:r>
+            <a:endParaRPr lang="en-US" sz="1100" dirty="0"/>
+          </a:p>
+        </p:txBody>
+      </p:sp>
+      <p:sp>
+        <p:nvSpPr>
+          <p:cNvPr id="40" name="Shape 38"/>
+          <p:cNvSpPr/>
+          <p:nvPr/>
+        </p:nvSpPr>
+        <p:spPr>
+          <a:xfrm>
+            <a:off x="6492240" y="2724912"/>
+            <a:ext cx="5129784" cy="1645920"/>
+          </a:xfrm>
+          <a:prstGeom prst="roundRect">
+            <a:avLst>
+              <a:gd name="adj" fmla="val 2222"/>
+            </a:avLst>
+          </a:prstGeom>
+          <a:solidFill>
+            <a:srgbClr val="1C2433"/>
+          </a:solidFill>
+          <a:ln/>
+        </p:spPr>
+      </p:sp>
+      <p:sp>
+        <p:nvSpPr>
+          <p:cNvPr id="41" name="Text 39"/>
+          <p:cNvSpPr/>
+          <p:nvPr/>
+        </p:nvSpPr>
+        <p:spPr>
+          <a:xfrm>
+            <a:off x="6675120" y="2834640"/>
+            <a:ext cx="4764024" cy="1426464"/>
           </a:xfrm>
           <a:prstGeom prst="rect">
             <a:avLst/>
@@ -3241,9 +3635,9 @@
               <a:buNone/>
             </a:pPr>
             <a:r>
-              <a:rPr lang="en-US" sz="930" dirty="0">
-                <a:solidFill>
-                  <a:srgbClr val="94A3B8"/>
+              <a:rPr lang="en-US" sz="850" dirty="0">
+                <a:solidFill>
+                  <a:srgbClr val="A0AEC0"/>
                 </a:solidFill>
                 <a:latin typeface="Pretendard" pitchFamily="34" charset="0"/>
                 <a:ea typeface="Pretendard" pitchFamily="34" charset="-122"/>
@@ -3251,40 +3645,40 @@
               </a:rPr>
               <a:t>본 자료는 투자 권유가 아니며, 기재된 정보의 정확성을 보증하지 않습니다.</a:t>
             </a:r>
-            <a:endParaRPr lang="en-US" sz="930" dirty="0"/>
-          </a:p>
-        </p:txBody>
-      </p:sp>
-      <p:sp>
-        <p:nvSpPr>
-          <p:cNvPr id="29" name="Shape 27"/>
-          <p:cNvSpPr/>
-          <p:nvPr/>
-        </p:nvSpPr>
-        <p:spPr>
-          <a:xfrm>
-            <a:off x="566928" y="5230368"/>
-            <a:ext cx="11057839" cy="640080"/>
+            <a:endParaRPr lang="en-US" sz="850" dirty="0"/>
+          </a:p>
+        </p:txBody>
+      </p:sp>
+      <p:sp>
+        <p:nvSpPr>
+          <p:cNvPr id="42" name="Shape 40"/>
+          <p:cNvSpPr/>
+          <p:nvPr/>
+        </p:nvSpPr>
+        <p:spPr>
+          <a:xfrm>
+            <a:off x="566928" y="5760720"/>
+            <a:ext cx="11057839" cy="457200"/>
           </a:xfrm>
           <a:prstGeom prst="rect">
             <a:avLst/>
           </a:prstGeom>
           <a:solidFill>
-            <a:srgbClr val="4F6A00"/>
+            <a:srgbClr val="977024"/>
           </a:solidFill>
           <a:ln/>
         </p:spPr>
       </p:sp>
       <p:sp>
         <p:nvSpPr>
-          <p:cNvPr id="30" name="Text 28"/>
-          <p:cNvSpPr/>
-          <p:nvPr/>
-        </p:nvSpPr>
-        <p:spPr>
-          <a:xfrm>
-            <a:off x="786384" y="5321808"/>
-            <a:ext cx="10618927" cy="457200"/>
+          <p:cNvPr id="43" name="Text 41"/>
+          <p:cNvSpPr/>
+          <p:nvPr/>
+        </p:nvSpPr>
+        <p:spPr>
+          <a:xfrm>
+            <a:off x="749808" y="5806440"/>
+            <a:ext cx="10692079" cy="365760"/>
           </a:xfrm>
           <a:prstGeom prst="rect">
             <a:avLst/>
@@ -3300,81 +3694,97 @@
               <a:buNone/>
             </a:pPr>
             <a:r>
-              <a:rPr lang="en-US" sz="1000" dirty="0">
-                <a:solidFill>
-                  <a:srgbClr val="E8F5CC"/>
+              <a:rPr lang="en-US" sz="900" dirty="0">
+                <a:solidFill>
+                  <a:srgbClr val="F3EBDA"/>
                 </a:solidFill>
                 <a:latin typeface="Pretendard" pitchFamily="34" charset="0"/>
                 <a:ea typeface="Pretendard" pitchFamily="34" charset="-122"/>
                 <a:cs typeface="Pretendard" pitchFamily="34" charset="-120"/>
               </a:rPr>
-              <a:t>본 자료의 모든 수치는 예비 검토용이며, 상세 실사 자료(등기·임대차계약서) 및 1:1 비밀 상담은 담당 전문 중개사를 통해 제공됩니다.</a:t>
-            </a:r>
-            <a:endParaRPr lang="en-US" sz="1000" dirty="0"/>
-          </a:p>
-        </p:txBody>
-      </p:sp>
-      <p:sp>
-        <p:nvSpPr>
-          <p:cNvPr id="31" name="Text 29"/>
-          <p:cNvSpPr/>
-          <p:nvPr/>
-        </p:nvSpPr>
-        <p:spPr>
-          <a:xfrm>
-            <a:off x="566928" y="6419088"/>
-            <a:ext cx="11057839" cy="201168"/>
-          </a:xfrm>
-          <a:prstGeom prst="rect">
-            <a:avLst/>
-          </a:prstGeom>
-          <a:noFill/>
-          <a:ln/>
-        </p:spPr>
-        <p:txBody>
-          <a:bodyPr wrap="square" lIns="0" tIns="0" rIns="0" bIns="0" rtlCol="0" anchor="ctr"/>
-          <a:lstStyle/>
-          <a:p>
-            <a:pPr algn="ctr" indent="0" marL="0">
-              <a:buNone/>
-            </a:pPr>
-            <a:r>
-              <a:rPr lang="en-US" sz="750" dirty="0">
-                <a:solidFill>
-                  <a:srgbClr val="64748B"/>
+              <a:t>본 자료의 모든 수치는 예비 검토용이며, 상세 실사 자료 및 비밀 상담은 담당 전문 중개사를 통해 제공됩니다.</a:t>
+            </a:r>
+            <a:endParaRPr lang="en-US" sz="900" dirty="0"/>
+          </a:p>
+        </p:txBody>
+      </p:sp>
+      <p:sp>
+        <p:nvSpPr>
+          <p:cNvPr id="44" name="Text 42"/>
+          <p:cNvSpPr/>
+          <p:nvPr/>
+        </p:nvSpPr>
+        <p:spPr>
+          <a:xfrm>
+            <a:off x="566928" y="6382512"/>
+            <a:ext cx="7315200" cy="219456"/>
+          </a:xfrm>
+          <a:prstGeom prst="rect">
+            <a:avLst/>
+          </a:prstGeom>
+          <a:noFill/>
+          <a:ln/>
+        </p:spPr>
+        <p:txBody>
+          <a:bodyPr wrap="square" lIns="0" tIns="0" rIns="0" bIns="0" rtlCol="0" anchor="ctr"/>
+          <a:lstStyle/>
+          <a:p>
+            <a:pPr indent="0" marL="0">
+              <a:buNone/>
+            </a:pPr>
+            <a:r>
+              <a:rPr lang="en-US" sz="800" dirty="0">
+                <a:solidFill>
+                  <a:srgbClr val="718096"/>
                 </a:solidFill>
                 <a:latin typeface="Pretendard" pitchFamily="34" charset="0"/>
                 <a:ea typeface="Pretendard" pitchFamily="34" charset="-122"/>
                 <a:cs typeface="Pretendard" pitchFamily="34" charset="-120"/>
               </a:rPr>
-              <a:t>크리딜  ·    ·  10</a:t>
-            </a:r>
-            <a:endParaRPr lang="en-US" sz="750" dirty="0"/>
-          </a:p>
-        </p:txBody>
-      </p:sp>
-      <p:sp>
-        <p:nvSpPr>
-          <p:cNvPr id="32" name="Shape 30"/>
-          <p:cNvSpPr/>
-          <p:nvPr/>
-        </p:nvSpPr>
-        <p:spPr>
-          <a:xfrm>
-            <a:off x="4437172" y="6382512"/>
-            <a:ext cx="3317352" cy="0"/>
-          </a:xfrm>
-          <a:prstGeom prst="line">
-            <a:avLst/>
-          </a:prstGeom>
-          <a:noFill/>
-          <a:ln w="6350">
-            <a:solidFill>
-              <a:srgbClr val="6B8E00"/>
-            </a:solidFill>
-            <a:prstDash val="solid"/>
-          </a:ln>
-        </p:spPr>
+              <a:t>크리딜   |   </a:t>
+            </a:r>
+            <a:endParaRPr lang="en-US" sz="800" dirty="0"/>
+          </a:p>
+        </p:txBody>
+      </p:sp>
+      <p:sp>
+        <p:nvSpPr>
+          <p:cNvPr id="45" name="Text 43"/>
+          <p:cNvSpPr/>
+          <p:nvPr/>
+        </p:nvSpPr>
+        <p:spPr>
+          <a:xfrm>
+            <a:off x="10710367" y="6382512"/>
+            <a:ext cx="914400" cy="219456"/>
+          </a:xfrm>
+          <a:prstGeom prst="rect">
+            <a:avLst/>
+          </a:prstGeom>
+          <a:noFill/>
+          <a:ln/>
+        </p:spPr>
+        <p:txBody>
+          <a:bodyPr wrap="square" lIns="0" tIns="0" rIns="0" bIns="0" rtlCol="0" anchor="ctr"/>
+          <a:lstStyle/>
+          <a:p>
+            <a:pPr algn="r" indent="0" marL="0">
+              <a:buNone/>
+            </a:pPr>
+            <a:r>
+              <a:rPr lang="en-US" sz="900" b="1" dirty="0">
+                <a:solidFill>
+                  <a:srgbClr val="B98A2E"/>
+                </a:solidFill>
+                <a:latin typeface="Arial" pitchFamily="34" charset="0"/>
+                <a:ea typeface="Arial" pitchFamily="34" charset="-122"/>
+                <a:cs typeface="Arial" pitchFamily="34" charset="-120"/>
+              </a:rPr>
+              <a:t>10</a:t>
+            </a:r>
+            <a:endParaRPr lang="en-US" sz="900" dirty="0"/>
+          </a:p>
+        </p:txBody>
       </p:sp>
     </p:spTree>
   </p:cSld>
@@ -3416,14 +3826,14 @@
         </p:nvSpPr>
         <p:spPr>
           <a:xfrm>
-            <a:off x="566928" y="384048"/>
-            <a:ext cx="45720" cy="566928"/>
-          </a:xfrm>
-          <a:prstGeom prst="rect">
+            <a:off x="566928" y="457200"/>
+            <a:ext cx="384048" cy="384048"/>
+          </a:xfrm>
+          <a:prstGeom prst="ellipse">
             <a:avLst/>
           </a:prstGeom>
           <a:solidFill>
-            <a:srgbClr val="6B8E00"/>
+            <a:srgbClr val="B98A2E"/>
           </a:solidFill>
           <a:ln/>
         </p:spPr>
@@ -3436,32 +3846,71 @@
         </p:nvSpPr>
         <p:spPr>
           <a:xfrm>
-            <a:off x="749808" y="384048"/>
-            <a:ext cx="10874959" cy="182880"/>
-          </a:xfrm>
-          <a:prstGeom prst="rect">
-            <a:avLst/>
-          </a:prstGeom>
-          <a:noFill/>
-          <a:ln/>
-        </p:spPr>
-        <p:txBody>
-          <a:bodyPr wrap="square" lIns="0" tIns="0" rIns="0" bIns="0" rtlCol="0" anchor="ctr"/>
-          <a:lstStyle/>
-          <a:p>
-            <a:pPr indent="0" marL="0">
-              <a:buNone/>
-            </a:pPr>
-            <a:r>
-              <a:rPr lang="en-US" sz="950" b="1" spc="200" kern="0" dirty="0">
-                <a:solidFill>
-                  <a:srgbClr val="6B8E00"/>
+            <a:off x="566928" y="457200"/>
+            <a:ext cx="384048" cy="384048"/>
+          </a:xfrm>
+          <a:prstGeom prst="rect">
+            <a:avLst/>
+          </a:prstGeom>
+          <a:noFill/>
+          <a:ln/>
+        </p:spPr>
+        <p:txBody>
+          <a:bodyPr wrap="square" lIns="0" tIns="0" rIns="0" bIns="0" rtlCol="0" anchor="ctr"/>
+          <a:lstStyle/>
+          <a:p>
+            <a:pPr algn="ctr" indent="0" marL="0">
+              <a:buNone/>
+            </a:pPr>
+            <a:r>
+              <a:rPr lang="en-US" sz="1300" b="1" dirty="0">
+                <a:solidFill>
+                  <a:srgbClr val="FFFFFF"/>
                 </a:solidFill>
                 <a:latin typeface="Arial" pitchFamily="34" charset="0"/>
                 <a:ea typeface="Arial" pitchFamily="34" charset="-122"/>
                 <a:cs typeface="Arial" pitchFamily="34" charset="-120"/>
               </a:rPr>
-              <a:t>02  Summary</a:t>
+              <a:t>02</a:t>
+            </a:r>
+            <a:endParaRPr lang="en-US" sz="1300" dirty="0"/>
+          </a:p>
+        </p:txBody>
+      </p:sp>
+      <p:sp>
+        <p:nvSpPr>
+          <p:cNvPr id="4" name="Text 2"/>
+          <p:cNvSpPr/>
+          <p:nvPr/>
+        </p:nvSpPr>
+        <p:spPr>
+          <a:xfrm>
+            <a:off x="1133856" y="457200"/>
+            <a:ext cx="10490911" cy="182880"/>
+          </a:xfrm>
+          <a:prstGeom prst="rect">
+            <a:avLst/>
+          </a:prstGeom>
+          <a:noFill/>
+          <a:ln/>
+        </p:spPr>
+        <p:txBody>
+          <a:bodyPr wrap="square" lIns="0" tIns="0" rIns="0" bIns="0" rtlCol="0" anchor="ctr"/>
+          <a:lstStyle/>
+          <a:p>
+            <a:pPr indent="0" marL="0">
+              <a:buNone/>
+            </a:pPr>
+            <a:r>
+              <a:rPr lang="en-US" sz="950" b="1" spc="200" kern="0" dirty="0">
+                <a:solidFill>
+                  <a:srgbClr val="B98A2E"/>
+                </a:solidFill>
+                <a:latin typeface="Arial" pitchFamily="34" charset="0"/>
+                <a:ea typeface="Arial" pitchFamily="34" charset="-122"/>
+                <a:cs typeface="Arial" pitchFamily="34" charset="-120"/>
+              </a:rPr>
+              <a:t>Summary</a:t>
             </a:r>
             <a:endParaRPr lang="en-US" sz="950" dirty="0"/>
           </a:p>
@@ -3469,14 +3918,14 @@
       </p:sp>
       <p:sp>
         <p:nvSpPr>
-          <p:cNvPr id="4" name="Text 2"/>
-          <p:cNvSpPr/>
-          <p:nvPr/>
-        </p:nvSpPr>
-        <p:spPr>
-          <a:xfrm>
-            <a:off x="749808" y="566928"/>
-            <a:ext cx="10874959" cy="384048"/>
+          <p:cNvPr id="5" name="Text 3"/>
+          <p:cNvSpPr/>
+          <p:nvPr/>
+        </p:nvSpPr>
+        <p:spPr>
+          <a:xfrm>
+            <a:off x="1133856" y="640080"/>
+            <a:ext cx="10490911" cy="365760"/>
           </a:xfrm>
           <a:prstGeom prst="rect">
             <a:avLst/>
@@ -3492,9 +3941,9 @@
               <a:buNone/>
             </a:pPr>
             <a:r>
-              <a:rPr lang="en-US" sz="2200" b="1" dirty="0">
-                <a:solidFill>
-                  <a:srgbClr val="0F172A"/>
+              <a:rPr lang="en-US" sz="2300" b="1" dirty="0">
+                <a:solidFill>
+                  <a:srgbClr val="10161F"/>
                 </a:solidFill>
                 <a:latin typeface="Pretendard" pitchFamily="34" charset="0"/>
                 <a:ea typeface="Pretendard" pitchFamily="34" charset="-122"/>
@@ -3502,13 +3951,13 @@
               </a:rPr>
               <a:t>핵심요약</a:t>
             </a:r>
-            <a:endParaRPr lang="en-US" sz="2200" dirty="0"/>
-          </a:p>
-        </p:txBody>
-      </p:sp>
-      <p:sp>
-        <p:nvSpPr>
-          <p:cNvPr id="5" name="Text 3"/>
+            <a:endParaRPr lang="en-US" sz="2300" dirty="0"/>
+          </a:p>
+        </p:txBody>
+      </p:sp>
+      <p:sp>
+        <p:nvSpPr>
+          <p:cNvPr id="6" name="Text 4"/>
           <p:cNvSpPr/>
           <p:nvPr/>
         </p:nvSpPr>
@@ -3533,7 +3982,7 @@
             <a:r>
               <a:rPr lang="en-US" sz="1500" b="1" dirty="0">
                 <a:solidFill>
-                  <a:srgbClr val="0F172A"/>
+                  <a:srgbClr val="10161F"/>
                 </a:solidFill>
                 <a:latin typeface="Pretendard" pitchFamily="34" charset="0"/>
                 <a:ea typeface="Pretendard" pitchFamily="34" charset="-122"/>
@@ -3547,7 +3996,7 @@
       </p:sp>
       <p:sp>
         <p:nvSpPr>
-          <p:cNvPr id="6" name="Shape 4"/>
+          <p:cNvPr id="7" name="Shape 5"/>
           <p:cNvSpPr/>
           <p:nvPr/>
         </p:nvSpPr>
@@ -3562,7 +4011,7 @@
           <a:noFill/>
           <a:ln w="19050">
             <a:solidFill>
-              <a:srgbClr val="6B8E00"/>
+              <a:srgbClr val="B98A2E"/>
             </a:solidFill>
             <a:prstDash val="solid"/>
           </a:ln>
@@ -3570,7 +4019,7 @@
       </p:sp>
       <p:sp>
         <p:nvSpPr>
-          <p:cNvPr id="7" name="Shape 5"/>
+          <p:cNvPr id="8" name="Shape 6"/>
           <p:cNvSpPr/>
           <p:nvPr/>
         </p:nvSpPr>
@@ -3585,11 +4034,11 @@
             </a:avLst>
           </a:prstGeom>
           <a:solidFill>
-            <a:srgbClr val="F8FAFC"/>
+            <a:srgbClr val="F7FAFC"/>
           </a:solidFill>
           <a:ln w="6350">
             <a:solidFill>
-              <a:srgbClr val="CBD5E1"/>
+              <a:srgbClr val="CBD5E0"/>
             </a:solidFill>
             <a:prstDash val="solid"/>
           </a:ln>
@@ -3597,7 +4046,7 @@
       </p:sp>
       <p:sp>
         <p:nvSpPr>
-          <p:cNvPr id="8" name="Text 6"/>
+          <p:cNvPr id="9" name="Text 7"/>
           <p:cNvSpPr/>
           <p:nvPr/>
         </p:nvSpPr>
@@ -3622,7 +4071,7 @@
             <a:r>
               <a:rPr lang="en-US" sz="950" dirty="0">
                 <a:solidFill>
-                  <a:srgbClr val="64748B"/>
+                  <a:srgbClr val="718096"/>
                 </a:solidFill>
                 <a:latin typeface="Pretendard" pitchFamily="34" charset="0"/>
                 <a:ea typeface="Pretendard" pitchFamily="34" charset="-122"/>
@@ -3636,7 +4085,7 @@
       </p:sp>
       <p:sp>
         <p:nvSpPr>
-          <p:cNvPr id="9" name="Text 7"/>
+          <p:cNvPr id="10" name="Text 8"/>
           <p:cNvSpPr/>
           <p:nvPr/>
         </p:nvSpPr>
@@ -3663,7 +4112,7 @@
             <a:r>
               <a:rPr lang="en-US" sz="2000" b="1" dirty="0">
                 <a:solidFill>
-                  <a:srgbClr val="0F172A"/>
+                  <a:srgbClr val="10161F"/>
                 </a:solidFill>
                 <a:latin typeface="Pretendard" pitchFamily="34" charset="0"/>
                 <a:ea typeface="Pretendard" pitchFamily="34" charset="-122"/>
@@ -3677,7 +4126,7 @@
       </p:sp>
       <p:sp>
         <p:nvSpPr>
-          <p:cNvPr id="10" name="Shape 8"/>
+          <p:cNvPr id="11" name="Shape 9"/>
           <p:cNvSpPr/>
           <p:nvPr/>
         </p:nvSpPr>
@@ -3692,11 +4141,11 @@
             </a:avLst>
           </a:prstGeom>
           <a:solidFill>
-            <a:srgbClr val="F8FAFC"/>
+            <a:srgbClr val="F7FAFC"/>
           </a:solidFill>
           <a:ln w="6350">
             <a:solidFill>
-              <a:srgbClr val="CBD5E1"/>
+              <a:srgbClr val="CBD5E0"/>
             </a:solidFill>
             <a:prstDash val="solid"/>
           </a:ln>
@@ -3704,7 +4153,7 @@
       </p:sp>
       <p:sp>
         <p:nvSpPr>
-          <p:cNvPr id="11" name="Text 9"/>
+          <p:cNvPr id="12" name="Text 10"/>
           <p:cNvSpPr/>
           <p:nvPr/>
         </p:nvSpPr>
@@ -3729,7 +4178,7 @@
             <a:r>
               <a:rPr lang="en-US" sz="950" dirty="0">
                 <a:solidFill>
-                  <a:srgbClr val="64748B"/>
+                  <a:srgbClr val="718096"/>
                 </a:solidFill>
                 <a:latin typeface="Pretendard" pitchFamily="34" charset="0"/>
                 <a:ea typeface="Pretendard" pitchFamily="34" charset="-122"/>
@@ -3743,7 +4192,7 @@
       </p:sp>
       <p:sp>
         <p:nvSpPr>
-          <p:cNvPr id="12" name="Text 10"/>
+          <p:cNvPr id="13" name="Text 11"/>
           <p:cNvSpPr/>
           <p:nvPr/>
         </p:nvSpPr>
@@ -3770,7 +4219,7 @@
             <a:r>
               <a:rPr lang="en-US" sz="2000" b="1" dirty="0">
                 <a:solidFill>
-                  <a:srgbClr val="0F172A"/>
+                  <a:srgbClr val="10161F"/>
                 </a:solidFill>
                 <a:latin typeface="Pretendard" pitchFamily="34" charset="0"/>
                 <a:ea typeface="Pretendard" pitchFamily="34" charset="-122"/>
@@ -3784,7 +4233,7 @@
       </p:sp>
       <p:sp>
         <p:nvSpPr>
-          <p:cNvPr id="13" name="Shape 11"/>
+          <p:cNvPr id="14" name="Shape 12"/>
           <p:cNvSpPr/>
           <p:nvPr/>
         </p:nvSpPr>
@@ -3799,11 +4248,11 @@
             </a:avLst>
           </a:prstGeom>
           <a:solidFill>
-            <a:srgbClr val="F8FAFC"/>
+            <a:srgbClr val="F7FAFC"/>
           </a:solidFill>
           <a:ln w="6350">
             <a:solidFill>
-              <a:srgbClr val="CBD5E1"/>
+              <a:srgbClr val="CBD5E0"/>
             </a:solidFill>
             <a:prstDash val="solid"/>
           </a:ln>
@@ -3811,7 +4260,7 @@
       </p:sp>
       <p:sp>
         <p:nvSpPr>
-          <p:cNvPr id="14" name="Text 12"/>
+          <p:cNvPr id="15" name="Text 13"/>
           <p:cNvSpPr/>
           <p:nvPr/>
         </p:nvSpPr>
@@ -3836,7 +4285,7 @@
             <a:r>
               <a:rPr lang="en-US" sz="950" dirty="0">
                 <a:solidFill>
-                  <a:srgbClr val="64748B"/>
+                  <a:srgbClr val="718096"/>
                 </a:solidFill>
                 <a:latin typeface="Pretendard" pitchFamily="34" charset="0"/>
                 <a:ea typeface="Pretendard" pitchFamily="34" charset="-122"/>
@@ -3850,7 +4299,7 @@
       </p:sp>
       <p:sp>
         <p:nvSpPr>
-          <p:cNvPr id="15" name="Text 13"/>
+          <p:cNvPr id="16" name="Text 14"/>
           <p:cNvSpPr/>
           <p:nvPr/>
         </p:nvSpPr>
@@ -3877,7 +4326,7 @@
             <a:r>
               <a:rPr lang="en-US" sz="2000" b="1" dirty="0">
                 <a:solidFill>
-                  <a:srgbClr val="0F172A"/>
+                  <a:srgbClr val="10161F"/>
                 </a:solidFill>
                 <a:latin typeface="Pretendard" pitchFamily="34" charset="0"/>
                 <a:ea typeface="Pretendard" pitchFamily="34" charset="-122"/>
@@ -3891,7 +4340,7 @@
       </p:sp>
       <p:sp>
         <p:nvSpPr>
-          <p:cNvPr id="16" name="Shape 14"/>
+          <p:cNvPr id="17" name="Shape 15"/>
           <p:cNvSpPr/>
           <p:nvPr/>
         </p:nvSpPr>
@@ -3906,11 +4355,11 @@
             </a:avLst>
           </a:prstGeom>
           <a:solidFill>
-            <a:srgbClr val="F8FAFC"/>
+            <a:srgbClr val="F7FAFC"/>
           </a:solidFill>
           <a:ln w="6350">
             <a:solidFill>
-              <a:srgbClr val="CBD5E1"/>
+              <a:srgbClr val="CBD5E0"/>
             </a:solidFill>
             <a:prstDash val="solid"/>
           </a:ln>
@@ -3918,7 +4367,7 @@
       </p:sp>
       <p:sp>
         <p:nvSpPr>
-          <p:cNvPr id="17" name="Text 15"/>
+          <p:cNvPr id="18" name="Text 16"/>
           <p:cNvSpPr/>
           <p:nvPr/>
         </p:nvSpPr>
@@ -3943,7 +4392,7 @@
             <a:r>
               <a:rPr lang="en-US" sz="950" dirty="0">
                 <a:solidFill>
-                  <a:srgbClr val="64748B"/>
+                  <a:srgbClr val="718096"/>
                 </a:solidFill>
                 <a:latin typeface="Pretendard" pitchFamily="34" charset="0"/>
                 <a:ea typeface="Pretendard" pitchFamily="34" charset="-122"/>
@@ -3957,7 +4406,7 @@
       </p:sp>
       <p:sp>
         <p:nvSpPr>
-          <p:cNvPr id="18" name="Text 16"/>
+          <p:cNvPr id="19" name="Text 17"/>
           <p:cNvSpPr/>
           <p:nvPr/>
         </p:nvSpPr>
@@ -3984,7 +4433,7 @@
             <a:r>
               <a:rPr lang="en-US" sz="2000" b="1" dirty="0">
                 <a:solidFill>
-                  <a:srgbClr val="0F172A"/>
+                  <a:srgbClr val="10161F"/>
                 </a:solidFill>
                 <a:latin typeface="Arial" pitchFamily="34" charset="0"/>
                 <a:ea typeface="Arial" pitchFamily="34" charset="-122"/>
@@ -3998,56 +4447,14 @@
       </p:sp>
       <p:sp>
         <p:nvSpPr>
-          <p:cNvPr id="19" name="Shape 17"/>
-          <p:cNvSpPr/>
-          <p:nvPr/>
-        </p:nvSpPr>
-        <p:spPr>
-          <a:xfrm>
-            <a:off x="566928" y="3611880"/>
-            <a:ext cx="5437480" cy="1097280"/>
-          </a:xfrm>
-          <a:prstGeom prst="roundRect">
-            <a:avLst>
-              <a:gd name="adj" fmla="val 5000"/>
-            </a:avLst>
-          </a:prstGeom>
-          <a:solidFill>
-            <a:srgbClr val="DBEAFE"/>
-          </a:solidFill>
-          <a:ln/>
-        </p:spPr>
-      </p:sp>
-      <p:sp>
-        <p:nvSpPr>
-          <p:cNvPr id="20" name="Shape 18"/>
-          <p:cNvSpPr/>
-          <p:nvPr/>
-        </p:nvSpPr>
-        <p:spPr>
-          <a:xfrm>
-            <a:off x="566928" y="3666744"/>
-            <a:ext cx="36576" cy="987552"/>
-          </a:xfrm>
-          <a:prstGeom prst="rect">
-            <a:avLst/>
-          </a:prstGeom>
-          <a:solidFill>
-            <a:srgbClr val="1D4ED8"/>
-          </a:solidFill>
-          <a:ln/>
-        </p:spPr>
-      </p:sp>
-      <p:sp>
-        <p:nvSpPr>
-          <p:cNvPr id="21" name="Text 19"/>
-          <p:cNvSpPr/>
-          <p:nvPr/>
-        </p:nvSpPr>
-        <p:spPr>
-          <a:xfrm>
-            <a:off x="749808" y="3721608"/>
-            <a:ext cx="5108296" cy="201168"/>
+          <p:cNvPr id="20" name="Text 18"/>
+          <p:cNvSpPr/>
+          <p:nvPr/>
+        </p:nvSpPr>
+        <p:spPr>
+          <a:xfrm>
+            <a:off x="566928" y="3502152"/>
+            <a:ext cx="11057839" cy="274320"/>
           </a:xfrm>
           <a:prstGeom prst="rect">
             <a:avLst/>
@@ -4062,51 +4469,74 @@
             <a:pPr indent="0" marL="0">
               <a:buNone/>
             </a:pPr>
-            <a:endParaRPr lang="en-US" sz="1050" dirty="0"/>
-          </a:p>
-        </p:txBody>
-      </p:sp>
-      <p:sp>
-        <p:nvSpPr>
-          <p:cNvPr id="22" name="Text 20"/>
-          <p:cNvSpPr/>
-          <p:nvPr/>
-        </p:nvSpPr>
-        <p:spPr>
-          <a:xfrm>
-            <a:off x="749808" y="3941064"/>
-            <a:ext cx="5108296" cy="694944"/>
-          </a:xfrm>
-          <a:prstGeom prst="rect">
-            <a:avLst/>
-          </a:prstGeom>
-          <a:noFill/>
-          <a:ln/>
-        </p:spPr>
-        <p:txBody>
-          <a:bodyPr wrap="square" lIns="0" tIns="0" rIns="0" bIns="0" rtlCol="0" anchor="t"/>
-          <a:lstStyle/>
-          <a:p>
-            <a:pPr indent="0" marL="0">
-              <a:lnSpc>
-                <a:spcPct val="120000"/>
-              </a:lnSpc>
-              <a:buNone/>
-            </a:pPr>
-            <a:r>
-              <a:rPr lang="en-US" sz="930" dirty="0">
-                <a:solidFill>
-                  <a:srgbClr val="0F172A"/>
+            <a:r>
+              <a:rPr lang="en-US" sz="1250" b="1" dirty="0">
+                <a:solidFill>
+                  <a:srgbClr val="977024"/>
                 </a:solidFill>
                 <a:latin typeface="Pretendard" pitchFamily="34" charset="0"/>
                 <a:ea typeface="Pretendard" pitchFamily="34" charset="-122"/>
                 <a:cs typeface="Pretendard" pitchFamily="34" charset="-120"/>
               </a:rPr>
-              <a:t>본 매물은 강남권역 대로변 입지의 우량 메디컬 테넌트 만실 운영 자산입니다.</a:t>
-            </a:r>
-            <a:endParaRPr lang="en-US" sz="930" dirty="0"/>
-          </a:p>
-        </p:txBody>
+              <a:t>3대 핵심 투자 포인트 (Investment Highlights)</a:t>
+            </a:r>
+            <a:endParaRPr lang="en-US" sz="1250" dirty="0"/>
+          </a:p>
+        </p:txBody>
+      </p:sp>
+      <p:sp>
+        <p:nvSpPr>
+          <p:cNvPr id="21" name="Shape 19"/>
+          <p:cNvSpPr/>
+          <p:nvPr/>
+        </p:nvSpPr>
+        <p:spPr>
+          <a:xfrm>
+            <a:off x="566928" y="3831336"/>
+            <a:ext cx="11057839" cy="585216"/>
+          </a:xfrm>
+          <a:prstGeom prst="roundRect">
+            <a:avLst>
+              <a:gd name="adj" fmla="val 7813"/>
+            </a:avLst>
+          </a:prstGeom>
+          <a:solidFill>
+            <a:srgbClr val="F8F9FA"/>
+          </a:solidFill>
+          <a:ln w="7620">
+            <a:solidFill>
+              <a:srgbClr val="E2E8F0"/>
+            </a:solidFill>
+            <a:prstDash val="solid"/>
+          </a:ln>
+        </p:spPr>
+      </p:sp>
+      <p:sp>
+        <p:nvSpPr>
+          <p:cNvPr id="22" name="Shape 20"/>
+          <p:cNvSpPr/>
+          <p:nvPr/>
+        </p:nvSpPr>
+        <p:spPr>
+          <a:xfrm>
+            <a:off x="676656" y="3941064"/>
+            <a:ext cx="411480" cy="365760"/>
+          </a:xfrm>
+          <a:prstGeom prst="roundRect">
+            <a:avLst>
+              <a:gd name="adj" fmla="val 10000"/>
+            </a:avLst>
+          </a:prstGeom>
+          <a:solidFill>
+            <a:srgbClr val="F3EBDA"/>
+          </a:solidFill>
+          <a:ln w="6350">
+            <a:solidFill>
+              <a:srgbClr val="D9B668"/>
+            </a:solidFill>
+            <a:prstDash val="solid"/>
+          </a:ln>
+        </p:spPr>
       </p:sp>
       <p:sp>
         <p:nvSpPr>
@@ -4116,8 +4546,8 @@
         </p:nvSpPr>
         <p:spPr>
           <a:xfrm>
-            <a:off x="566928" y="6419088"/>
-            <a:ext cx="11057839" cy="201168"/>
+            <a:off x="676656" y="3941064"/>
+            <a:ext cx="411480" cy="365760"/>
           </a:xfrm>
           <a:prstGeom prst="rect">
             <a:avLst/>
@@ -4133,42 +4563,400 @@
               <a:buNone/>
             </a:pPr>
             <a:r>
-              <a:rPr lang="en-US" sz="750" dirty="0">
-                <a:solidFill>
-                  <a:srgbClr val="64748B"/>
+              <a:rPr lang="en-US" sz="1000" b="1" dirty="0">
+                <a:solidFill>
+                  <a:srgbClr val="977024"/>
+                </a:solidFill>
+                <a:latin typeface="Arial" pitchFamily="34" charset="0"/>
+                <a:ea typeface="Arial" pitchFamily="34" charset="-122"/>
+                <a:cs typeface="Arial" pitchFamily="34" charset="-120"/>
+              </a:rPr>
+              <a:t>01</a:t>
+            </a:r>
+            <a:endParaRPr lang="en-US" sz="1000" dirty="0"/>
+          </a:p>
+        </p:txBody>
+      </p:sp>
+      <p:sp>
+        <p:nvSpPr>
+          <p:cNvPr id="24" name="Text 22"/>
+          <p:cNvSpPr/>
+          <p:nvPr/>
+        </p:nvSpPr>
+        <p:spPr>
+          <a:xfrm>
+            <a:off x="1207008" y="3904488"/>
+            <a:ext cx="10280599" cy="438912"/>
+          </a:xfrm>
+          <a:prstGeom prst="rect">
+            <a:avLst/>
+          </a:prstGeom>
+          <a:noFill/>
+          <a:ln/>
+        </p:spPr>
+        <p:txBody>
+          <a:bodyPr wrap="square" lIns="0" tIns="0" rIns="0" bIns="0" rtlCol="0" anchor="ctr"/>
+          <a:lstStyle/>
+          <a:p>
+            <a:pPr indent="0" marL="0">
+              <a:buNone/>
+            </a:pPr>
+            <a:r>
+              <a:rPr lang="en-US" sz="1150" dirty="0">
+                <a:solidFill>
+                  <a:srgbClr val="10161F"/>
                 </a:solidFill>
                 <a:latin typeface="Pretendard" pitchFamily="34" charset="0"/>
                 <a:ea typeface="Pretendard" pitchFamily="34" charset="-122"/>
                 <a:cs typeface="Pretendard" pitchFamily="34" charset="-120"/>
               </a:rPr>
-              <a:t>크리딜  ·    ·  2</a:t>
-            </a:r>
-            <a:endParaRPr lang="en-US" sz="750" dirty="0"/>
-          </a:p>
-        </p:txBody>
-      </p:sp>
-      <p:sp>
-        <p:nvSpPr>
-          <p:cNvPr id="24" name="Shape 22"/>
-          <p:cNvSpPr/>
-          <p:nvPr/>
-        </p:nvSpPr>
-        <p:spPr>
-          <a:xfrm>
-            <a:off x="4437172" y="6382512"/>
-            <a:ext cx="3317352" cy="0"/>
-          </a:xfrm>
-          <a:prstGeom prst="line">
-            <a:avLst/>
-          </a:prstGeom>
-          <a:noFill/>
-          <a:ln w="6350">
+              <a:t>원금 안전판: 강남권역 핵심 입지 및 우량 대지 지분 가치로 하방 경직성 확보</a:t>
+            </a:r>
+            <a:endParaRPr lang="en-US" sz="1150" dirty="0"/>
+          </a:p>
+        </p:txBody>
+      </p:sp>
+      <p:sp>
+        <p:nvSpPr>
+          <p:cNvPr id="25" name="Shape 23"/>
+          <p:cNvSpPr/>
+          <p:nvPr/>
+        </p:nvSpPr>
+        <p:spPr>
+          <a:xfrm>
+            <a:off x="566928" y="4526280"/>
+            <a:ext cx="11057839" cy="585216"/>
+          </a:xfrm>
+          <a:prstGeom prst="roundRect">
+            <a:avLst>
+              <a:gd name="adj" fmla="val 7813"/>
+            </a:avLst>
+          </a:prstGeom>
+          <a:solidFill>
+            <a:srgbClr val="F8F9FA"/>
+          </a:solidFill>
+          <a:ln w="7620">
             <a:solidFill>
-              <a:srgbClr val="6B8E00"/>
+              <a:srgbClr val="E2E8F0"/>
             </a:solidFill>
             <a:prstDash val="solid"/>
           </a:ln>
         </p:spPr>
+      </p:sp>
+      <p:sp>
+        <p:nvSpPr>
+          <p:cNvPr id="26" name="Shape 24"/>
+          <p:cNvSpPr/>
+          <p:nvPr/>
+        </p:nvSpPr>
+        <p:spPr>
+          <a:xfrm>
+            <a:off x="676656" y="4636008"/>
+            <a:ext cx="411480" cy="365760"/>
+          </a:xfrm>
+          <a:prstGeom prst="roundRect">
+            <a:avLst>
+              <a:gd name="adj" fmla="val 10000"/>
+            </a:avLst>
+          </a:prstGeom>
+          <a:solidFill>
+            <a:srgbClr val="F3EBDA"/>
+          </a:solidFill>
+          <a:ln w="6350">
+            <a:solidFill>
+              <a:srgbClr val="D9B668"/>
+            </a:solidFill>
+            <a:prstDash val="solid"/>
+          </a:ln>
+        </p:spPr>
+      </p:sp>
+      <p:sp>
+        <p:nvSpPr>
+          <p:cNvPr id="27" name="Text 25"/>
+          <p:cNvSpPr/>
+          <p:nvPr/>
+        </p:nvSpPr>
+        <p:spPr>
+          <a:xfrm>
+            <a:off x="676656" y="4636008"/>
+            <a:ext cx="411480" cy="365760"/>
+          </a:xfrm>
+          <a:prstGeom prst="rect">
+            <a:avLst/>
+          </a:prstGeom>
+          <a:noFill/>
+          <a:ln/>
+        </p:spPr>
+        <p:txBody>
+          <a:bodyPr wrap="square" lIns="0" tIns="0" rIns="0" bIns="0" rtlCol="0" anchor="ctr"/>
+          <a:lstStyle/>
+          <a:p>
+            <a:pPr algn="ctr" indent="0" marL="0">
+              <a:buNone/>
+            </a:pPr>
+            <a:r>
+              <a:rPr lang="en-US" sz="1000" b="1" dirty="0">
+                <a:solidFill>
+                  <a:srgbClr val="977024"/>
+                </a:solidFill>
+                <a:latin typeface="Arial" pitchFamily="34" charset="0"/>
+                <a:ea typeface="Arial" pitchFamily="34" charset="-122"/>
+                <a:cs typeface="Arial" pitchFamily="34" charset="-120"/>
+              </a:rPr>
+              <a:t>02</a:t>
+            </a:r>
+            <a:endParaRPr lang="en-US" sz="1000" dirty="0"/>
+          </a:p>
+        </p:txBody>
+      </p:sp>
+      <p:sp>
+        <p:nvSpPr>
+          <p:cNvPr id="28" name="Text 26"/>
+          <p:cNvSpPr/>
+          <p:nvPr/>
+        </p:nvSpPr>
+        <p:spPr>
+          <a:xfrm>
+            <a:off x="1207008" y="4599432"/>
+            <a:ext cx="10280599" cy="438912"/>
+          </a:xfrm>
+          <a:prstGeom prst="rect">
+            <a:avLst/>
+          </a:prstGeom>
+          <a:noFill/>
+          <a:ln/>
+        </p:spPr>
+        <p:txBody>
+          <a:bodyPr wrap="square" lIns="0" tIns="0" rIns="0" bIns="0" rtlCol="0" anchor="ctr"/>
+          <a:lstStyle/>
+          <a:p>
+            <a:pPr indent="0" marL="0">
+              <a:buNone/>
+            </a:pPr>
+            <a:r>
+              <a:rPr lang="en-US" sz="1150" dirty="0">
+                <a:solidFill>
+                  <a:srgbClr val="10161F"/>
+                </a:solidFill>
+                <a:latin typeface="Pretendard" pitchFamily="34" charset="0"/>
+                <a:ea typeface="Pretendard" pitchFamily="34" charset="-122"/>
+                <a:cs typeface="Pretendard" pitchFamily="34" charset="-120"/>
+              </a:rPr>
+              <a:t>수익 안정성: 매각 희망가 98억 대비 안정적인 월 임대수익 창출 구조</a:t>
+            </a:r>
+            <a:endParaRPr lang="en-US" sz="1150" dirty="0"/>
+          </a:p>
+        </p:txBody>
+      </p:sp>
+      <p:sp>
+        <p:nvSpPr>
+          <p:cNvPr id="29" name="Shape 27"/>
+          <p:cNvSpPr/>
+          <p:nvPr/>
+        </p:nvSpPr>
+        <p:spPr>
+          <a:xfrm>
+            <a:off x="566928" y="5221224"/>
+            <a:ext cx="11057839" cy="585216"/>
+          </a:xfrm>
+          <a:prstGeom prst="roundRect">
+            <a:avLst>
+              <a:gd name="adj" fmla="val 7813"/>
+            </a:avLst>
+          </a:prstGeom>
+          <a:solidFill>
+            <a:srgbClr val="F8F9FA"/>
+          </a:solidFill>
+          <a:ln w="7620">
+            <a:solidFill>
+              <a:srgbClr val="E2E8F0"/>
+            </a:solidFill>
+            <a:prstDash val="solid"/>
+          </a:ln>
+        </p:spPr>
+      </p:sp>
+      <p:sp>
+        <p:nvSpPr>
+          <p:cNvPr id="30" name="Shape 28"/>
+          <p:cNvSpPr/>
+          <p:nvPr/>
+        </p:nvSpPr>
+        <p:spPr>
+          <a:xfrm>
+            <a:off x="676656" y="5330952"/>
+            <a:ext cx="411480" cy="365760"/>
+          </a:xfrm>
+          <a:prstGeom prst="roundRect">
+            <a:avLst>
+              <a:gd name="adj" fmla="val 10000"/>
+            </a:avLst>
+          </a:prstGeom>
+          <a:solidFill>
+            <a:srgbClr val="F3EBDA"/>
+          </a:solidFill>
+          <a:ln w="6350">
+            <a:solidFill>
+              <a:srgbClr val="D9B668"/>
+            </a:solidFill>
+            <a:prstDash val="solid"/>
+          </a:ln>
+        </p:spPr>
+      </p:sp>
+      <p:sp>
+        <p:nvSpPr>
+          <p:cNvPr id="31" name="Text 29"/>
+          <p:cNvSpPr/>
+          <p:nvPr/>
+        </p:nvSpPr>
+        <p:spPr>
+          <a:xfrm>
+            <a:off x="676656" y="5330952"/>
+            <a:ext cx="411480" cy="365760"/>
+          </a:xfrm>
+          <a:prstGeom prst="rect">
+            <a:avLst/>
+          </a:prstGeom>
+          <a:noFill/>
+          <a:ln/>
+        </p:spPr>
+        <p:txBody>
+          <a:bodyPr wrap="square" lIns="0" tIns="0" rIns="0" bIns="0" rtlCol="0" anchor="ctr"/>
+          <a:lstStyle/>
+          <a:p>
+            <a:pPr algn="ctr" indent="0" marL="0">
+              <a:buNone/>
+            </a:pPr>
+            <a:r>
+              <a:rPr lang="en-US" sz="1000" b="1" dirty="0">
+                <a:solidFill>
+                  <a:srgbClr val="977024"/>
+                </a:solidFill>
+                <a:latin typeface="Arial" pitchFamily="34" charset="0"/>
+                <a:ea typeface="Arial" pitchFamily="34" charset="-122"/>
+                <a:cs typeface="Arial" pitchFamily="34" charset="-120"/>
+              </a:rPr>
+              <a:t>03</a:t>
+            </a:r>
+            <a:endParaRPr lang="en-US" sz="1000" dirty="0"/>
+          </a:p>
+        </p:txBody>
+      </p:sp>
+      <p:sp>
+        <p:nvSpPr>
+          <p:cNvPr id="32" name="Text 30"/>
+          <p:cNvSpPr/>
+          <p:nvPr/>
+        </p:nvSpPr>
+        <p:spPr>
+          <a:xfrm>
+            <a:off x="1207008" y="5294376"/>
+            <a:ext cx="10280599" cy="438912"/>
+          </a:xfrm>
+          <a:prstGeom prst="rect">
+            <a:avLst/>
+          </a:prstGeom>
+          <a:noFill/>
+          <a:ln/>
+        </p:spPr>
+        <p:txBody>
+          <a:bodyPr wrap="square" lIns="0" tIns="0" rIns="0" bIns="0" rtlCol="0" anchor="ctr"/>
+          <a:lstStyle/>
+          <a:p>
+            <a:pPr indent="0" marL="0">
+              <a:buNone/>
+            </a:pPr>
+            <a:r>
+              <a:rPr lang="en-US" sz="1150" dirty="0">
+                <a:solidFill>
+                  <a:srgbClr val="10161F"/>
+                </a:solidFill>
+                <a:latin typeface="Pretendard" pitchFamily="34" charset="0"/>
+                <a:ea typeface="Pretendard" pitchFamily="34" charset="-122"/>
+                <a:cs typeface="Pretendard" pitchFamily="34" charset="-120"/>
+              </a:rPr>
+              <a:t>미래 가치: 향후 권역 지가 상승 및 공법상 잔여 용적률 활용 밸류업 기회</a:t>
+            </a:r>
+            <a:endParaRPr lang="en-US" sz="1150" dirty="0"/>
+          </a:p>
+        </p:txBody>
+      </p:sp>
+      <p:sp>
+        <p:nvSpPr>
+          <p:cNvPr id="33" name="Text 31"/>
+          <p:cNvSpPr/>
+          <p:nvPr/>
+        </p:nvSpPr>
+        <p:spPr>
+          <a:xfrm>
+            <a:off x="566928" y="6382512"/>
+            <a:ext cx="7315200" cy="219456"/>
+          </a:xfrm>
+          <a:prstGeom prst="rect">
+            <a:avLst/>
+          </a:prstGeom>
+          <a:noFill/>
+          <a:ln/>
+        </p:spPr>
+        <p:txBody>
+          <a:bodyPr wrap="square" lIns="0" tIns="0" rIns="0" bIns="0" rtlCol="0" anchor="ctr"/>
+          <a:lstStyle/>
+          <a:p>
+            <a:pPr indent="0" marL="0">
+              <a:buNone/>
+            </a:pPr>
+            <a:r>
+              <a:rPr lang="en-US" sz="800" dirty="0">
+                <a:solidFill>
+                  <a:srgbClr val="718096"/>
+                </a:solidFill>
+                <a:latin typeface="Pretendard" pitchFamily="34" charset="0"/>
+                <a:ea typeface="Pretendard" pitchFamily="34" charset="-122"/>
+                <a:cs typeface="Pretendard" pitchFamily="34" charset="-120"/>
+              </a:rPr>
+              <a:t>크리딜   |   </a:t>
+            </a:r>
+            <a:endParaRPr lang="en-US" sz="800" dirty="0"/>
+          </a:p>
+        </p:txBody>
+      </p:sp>
+      <p:sp>
+        <p:nvSpPr>
+          <p:cNvPr id="34" name="Text 32"/>
+          <p:cNvSpPr/>
+          <p:nvPr/>
+        </p:nvSpPr>
+        <p:spPr>
+          <a:xfrm>
+            <a:off x="10710367" y="6382512"/>
+            <a:ext cx="914400" cy="219456"/>
+          </a:xfrm>
+          <a:prstGeom prst="rect">
+            <a:avLst/>
+          </a:prstGeom>
+          <a:noFill/>
+          <a:ln/>
+        </p:spPr>
+        <p:txBody>
+          <a:bodyPr wrap="square" lIns="0" tIns="0" rIns="0" bIns="0" rtlCol="0" anchor="ctr"/>
+          <a:lstStyle/>
+          <a:p>
+            <a:pPr algn="r" indent="0" marL="0">
+              <a:buNone/>
+            </a:pPr>
+            <a:r>
+              <a:rPr lang="en-US" sz="900" b="1" dirty="0">
+                <a:solidFill>
+                  <a:srgbClr val="B98A2E"/>
+                </a:solidFill>
+                <a:latin typeface="Arial" pitchFamily="34" charset="0"/>
+                <a:ea typeface="Arial" pitchFamily="34" charset="-122"/>
+                <a:cs typeface="Arial" pitchFamily="34" charset="-120"/>
+              </a:rPr>
+              <a:t>2</a:t>
+            </a:r>
+            <a:endParaRPr lang="en-US" sz="900" dirty="0"/>
+          </a:p>
+        </p:txBody>
       </p:sp>
     </p:spTree>
   </p:cSld>
@@ -4210,14 +4998,14 @@
         </p:nvSpPr>
         <p:spPr>
           <a:xfrm>
-            <a:off x="566928" y="384048"/>
-            <a:ext cx="45720" cy="566928"/>
-          </a:xfrm>
-          <a:prstGeom prst="rect">
+            <a:off x="566928" y="457200"/>
+            <a:ext cx="384048" cy="384048"/>
+          </a:xfrm>
+          <a:prstGeom prst="ellipse">
             <a:avLst/>
           </a:prstGeom>
           <a:solidFill>
-            <a:srgbClr val="6B8E00"/>
+            <a:srgbClr val="B98A2E"/>
           </a:solidFill>
           <a:ln/>
         </p:spPr>
@@ -4230,32 +5018,71 @@
         </p:nvSpPr>
         <p:spPr>
           <a:xfrm>
-            <a:off x="749808" y="384048"/>
-            <a:ext cx="10874959" cy="182880"/>
-          </a:xfrm>
-          <a:prstGeom prst="rect">
-            <a:avLst/>
-          </a:prstGeom>
-          <a:noFill/>
-          <a:ln/>
-        </p:spPr>
-        <p:txBody>
-          <a:bodyPr wrap="square" lIns="0" tIns="0" rIns="0" bIns="0" rtlCol="0" anchor="ctr"/>
-          <a:lstStyle/>
-          <a:p>
-            <a:pPr indent="0" marL="0">
-              <a:buNone/>
-            </a:pPr>
-            <a:r>
-              <a:rPr lang="en-US" sz="950" b="1" spc="200" kern="0" dirty="0">
-                <a:solidFill>
-                  <a:srgbClr val="6B8E00"/>
+            <a:off x="566928" y="457200"/>
+            <a:ext cx="384048" cy="384048"/>
+          </a:xfrm>
+          <a:prstGeom prst="rect">
+            <a:avLst/>
+          </a:prstGeom>
+          <a:noFill/>
+          <a:ln/>
+        </p:spPr>
+        <p:txBody>
+          <a:bodyPr wrap="square" lIns="0" tIns="0" rIns="0" bIns="0" rtlCol="0" anchor="ctr"/>
+          <a:lstStyle/>
+          <a:p>
+            <a:pPr algn="ctr" indent="0" marL="0">
+              <a:buNone/>
+            </a:pPr>
+            <a:r>
+              <a:rPr lang="en-US" sz="1300" b="1" dirty="0">
+                <a:solidFill>
+                  <a:srgbClr val="FFFFFF"/>
                 </a:solidFill>
                 <a:latin typeface="Arial" pitchFamily="34" charset="0"/>
                 <a:ea typeface="Arial" pitchFamily="34" charset="-122"/>
                 <a:cs typeface="Arial" pitchFamily="34" charset="-120"/>
               </a:rPr>
-              <a:t>03  Location</a:t>
+              <a:t>03</a:t>
+            </a:r>
+            <a:endParaRPr lang="en-US" sz="1300" dirty="0"/>
+          </a:p>
+        </p:txBody>
+      </p:sp>
+      <p:sp>
+        <p:nvSpPr>
+          <p:cNvPr id="4" name="Text 2"/>
+          <p:cNvSpPr/>
+          <p:nvPr/>
+        </p:nvSpPr>
+        <p:spPr>
+          <a:xfrm>
+            <a:off x="1133856" y="457200"/>
+            <a:ext cx="10490911" cy="182880"/>
+          </a:xfrm>
+          <a:prstGeom prst="rect">
+            <a:avLst/>
+          </a:prstGeom>
+          <a:noFill/>
+          <a:ln/>
+        </p:spPr>
+        <p:txBody>
+          <a:bodyPr wrap="square" lIns="0" tIns="0" rIns="0" bIns="0" rtlCol="0" anchor="ctr"/>
+          <a:lstStyle/>
+          <a:p>
+            <a:pPr indent="0" marL="0">
+              <a:buNone/>
+            </a:pPr>
+            <a:r>
+              <a:rPr lang="en-US" sz="950" b="1" spc="200" kern="0" dirty="0">
+                <a:solidFill>
+                  <a:srgbClr val="B98A2E"/>
+                </a:solidFill>
+                <a:latin typeface="Arial" pitchFamily="34" charset="0"/>
+                <a:ea typeface="Arial" pitchFamily="34" charset="-122"/>
+                <a:cs typeface="Arial" pitchFamily="34" charset="-120"/>
+              </a:rPr>
+              <a:t>Location</a:t>
             </a:r>
             <a:endParaRPr lang="en-US" sz="950" dirty="0"/>
           </a:p>
@@ -4263,14 +5090,14 @@
       </p:sp>
       <p:sp>
         <p:nvSpPr>
-          <p:cNvPr id="4" name="Text 2"/>
-          <p:cNvSpPr/>
-          <p:nvPr/>
-        </p:nvSpPr>
-        <p:spPr>
-          <a:xfrm>
-            <a:off x="749808" y="566928"/>
-            <a:ext cx="10874959" cy="384048"/>
+          <p:cNvPr id="5" name="Text 3"/>
+          <p:cNvSpPr/>
+          <p:nvPr/>
+        </p:nvSpPr>
+        <p:spPr>
+          <a:xfrm>
+            <a:off x="1133856" y="640080"/>
+            <a:ext cx="10490911" cy="365760"/>
           </a:xfrm>
           <a:prstGeom prst="rect">
             <a:avLst/>
@@ -4286,9 +5113,9 @@
               <a:buNone/>
             </a:pPr>
             <a:r>
-              <a:rPr lang="en-US" sz="2200" b="1" dirty="0">
-                <a:solidFill>
-                  <a:srgbClr val="0F172A"/>
+              <a:rPr lang="en-US" sz="2300" b="1" dirty="0">
+                <a:solidFill>
+                  <a:srgbClr val="10161F"/>
                 </a:solidFill>
                 <a:latin typeface="Pretendard" pitchFamily="34" charset="0"/>
                 <a:ea typeface="Pretendard" pitchFamily="34" charset="-122"/>
@@ -4296,13 +5123,13 @@
               </a:rPr>
               <a:t>이 입지, 투자할 만한 곳인가</a:t>
             </a:r>
-            <a:endParaRPr lang="en-US" sz="2200" dirty="0"/>
+            <a:endParaRPr lang="en-US" sz="2300" dirty="0"/>
           </a:p>
         </p:txBody>
       </p:sp>
       <p:pic>
         <p:nvPicPr>
-          <p:cNvPr id="5" name="Image 0" descr="preencoded.png">    </p:cNvPr>
+          <p:cNvPr id="6" name="Image 0" descr="preencoded.png">    </p:cNvPr>
           <p:cNvPicPr>
             <a:picLocks noChangeAspect="1"/>
           </p:cNvPicPr>
@@ -4326,53 +5153,14 @@
       </p:pic>
       <p:sp>
         <p:nvSpPr>
-          <p:cNvPr id="6" name="Text 3"/>
+          <p:cNvPr id="7" name="Text 4"/>
           <p:cNvSpPr/>
           <p:nvPr/>
         </p:nvSpPr>
         <p:spPr>
           <a:xfrm>
             <a:off x="6053328" y="1481328"/>
-            <a:ext cx="5571439" cy="237744"/>
-          </a:xfrm>
-          <a:prstGeom prst="rect">
-            <a:avLst/>
-          </a:prstGeom>
-          <a:noFill/>
-          <a:ln/>
-        </p:spPr>
-        <p:txBody>
-          <a:bodyPr wrap="square" lIns="0" tIns="0" rIns="0" bIns="0" rtlCol="0" anchor="ctr"/>
-          <a:lstStyle/>
-          <a:p>
-            <a:pPr indent="0" marL="0">
-              <a:buNone/>
-            </a:pPr>
-            <a:r>
-              <a:rPr lang="en-US" sz="1100" b="1" dirty="0">
-                <a:solidFill>
-                  <a:srgbClr val="0F172A"/>
-                </a:solidFill>
-                <a:latin typeface="Pretendard" pitchFamily="34" charset="0"/>
-                <a:ea typeface="Pretendard" pitchFamily="34" charset="-122"/>
-                <a:cs typeface="Pretendard" pitchFamily="34" charset="-120"/>
-              </a:rPr>
-              <a:t>교통 및 도로 접근성</a:t>
-            </a:r>
-            <a:endParaRPr lang="en-US" sz="1100" dirty="0"/>
-          </a:p>
-        </p:txBody>
-      </p:sp>
-      <p:sp>
-        <p:nvSpPr>
-          <p:cNvPr id="7" name="Text 4"/>
-          <p:cNvSpPr/>
-          <p:nvPr/>
-        </p:nvSpPr>
-        <p:spPr>
-          <a:xfrm>
-            <a:off x="6053328" y="1801368"/>
-            <a:ext cx="2117147" cy="438912"/>
+            <a:ext cx="2117147" cy="493776"/>
           </a:xfrm>
           <a:prstGeom prst="rect">
             <a:avLst/>
@@ -4391,17 +5179,17 @@
               <a:buNone/>
             </a:pPr>
             <a:r>
-              <a:rPr lang="en-US" sz="1400" dirty="0">
-                <a:solidFill>
-                  <a:srgbClr val="64748B"/>
+              <a:rPr lang="en-US" sz="1300" dirty="0">
+                <a:solidFill>
+                  <a:srgbClr val="718096"/>
                 </a:solidFill>
                 <a:latin typeface="Pretendard" pitchFamily="34" charset="0"/>
                 <a:ea typeface="Pretendard" pitchFamily="34" charset="-122"/>
                 <a:cs typeface="Pretendard" pitchFamily="34" charset="-120"/>
               </a:rPr>
-              <a:t>지하철 접근성</a:t>
-            </a:r>
-            <a:endParaRPr lang="en-US" sz="1400" dirty="0"/>
+              <a:t>교통 접근성</a:t>
+            </a:r>
+            <a:endParaRPr lang="en-US" sz="1300" dirty="0"/>
           </a:p>
         </p:txBody>
       </p:sp>
@@ -4413,8 +5201,8 @@
         </p:nvSpPr>
         <p:spPr>
           <a:xfrm>
-            <a:off x="8170475" y="1801368"/>
-            <a:ext cx="3454292" cy="438912"/>
+            <a:off x="8170475" y="1481328"/>
+            <a:ext cx="3454292" cy="493776"/>
           </a:xfrm>
           <a:prstGeom prst="rect">
             <a:avLst/>
@@ -4433,53 +5221,30 @@
               <a:buNone/>
             </a:pPr>
             <a:r>
-              <a:rPr lang="en-US" sz="1400" b="1" dirty="0">
-                <a:solidFill>
-                  <a:srgbClr val="0F172A"/>
+              <a:rPr lang="en-US" sz="1300" b="1" dirty="0">
+                <a:solidFill>
+                  <a:srgbClr val="10161F"/>
                 </a:solidFill>
                 <a:latin typeface="Pretendard" pitchFamily="34" charset="0"/>
                 <a:ea typeface="Pretendard" pitchFamily="34" charset="-122"/>
                 <a:cs typeface="Pretendard" pitchFamily="34" charset="-120"/>
               </a:rPr>
-              <a:t>강남역(2호선·신분당선) 및 양재역(3호선) 더블역세권 도보 4분</a:t>
-            </a:r>
-            <a:endParaRPr lang="en-US" sz="1400" dirty="0"/>
-          </a:p>
-        </p:txBody>
-      </p:sp>
-      <p:sp>
-        <p:nvSpPr>
-          <p:cNvPr id="9" name="Shape 6"/>
-          <p:cNvSpPr/>
-          <p:nvPr/>
-        </p:nvSpPr>
-        <p:spPr>
-          <a:xfrm>
-            <a:off x="6053328" y="2240280"/>
-            <a:ext cx="5571439" cy="0"/>
-          </a:xfrm>
-          <a:prstGeom prst="line">
-            <a:avLst/>
-          </a:prstGeom>
-          <a:noFill/>
-          <a:ln w="3810">
-            <a:solidFill>
-              <a:srgbClr val="CBD5E1"/>
-            </a:solidFill>
-            <a:prstDash val="solid"/>
-          </a:ln>
-        </p:spPr>
-      </p:sp>
-      <p:sp>
-        <p:nvSpPr>
-          <p:cNvPr id="10" name="Text 7"/>
-          <p:cNvSpPr/>
-          <p:nvPr/>
-        </p:nvSpPr>
-        <p:spPr>
-          <a:xfrm>
-            <a:off x="6053328" y="2240280"/>
-            <a:ext cx="2117147" cy="438912"/>
+              <a:t>{"ok":true,"mocked":true,"extractedFields":{"area_signal":"역삼","asset_type":"오피스빌딩","price_band":"300억","size_signal":"3000평(약 9917.</a:t>
+            </a:r>
+            <a:endParaRPr lang="en-US" sz="1300" dirty="0"/>
+          </a:p>
+        </p:txBody>
+      </p:sp>
+      <p:sp>
+        <p:nvSpPr>
+          <p:cNvPr id="9" name="Text 6"/>
+          <p:cNvSpPr/>
+          <p:nvPr/>
+        </p:nvSpPr>
+        <p:spPr>
+          <a:xfrm>
+            <a:off x="566928" y="6382512"/>
+            <a:ext cx="7315200" cy="219456"/>
           </a:xfrm>
           <a:prstGeom prst="rect">
             <a:avLst/>
@@ -4492,23 +5257,59 @@
           <a:lstStyle/>
           <a:p>
             <a:pPr indent="0" marL="0">
-              <a:lnSpc>
-                <a:spcPct val="120000"/>
-              </a:lnSpc>
-              <a:buNone/>
-            </a:pPr>
-            <a:r>
-              <a:rPr lang="en-US" sz="1400" dirty="0">
-                <a:solidFill>
-                  <a:srgbClr val="64748B"/>
+              <a:buNone/>
+            </a:pPr>
+            <a:r>
+              <a:rPr lang="en-US" sz="800" dirty="0">
+                <a:solidFill>
+                  <a:srgbClr val="718096"/>
                 </a:solidFill>
                 <a:latin typeface="Pretendard" pitchFamily="34" charset="0"/>
                 <a:ea typeface="Pretendard" pitchFamily="34" charset="-122"/>
                 <a:cs typeface="Pretendard" pitchFamily="34" charset="-120"/>
               </a:rPr>
-              <a:t>도로 접면 조건</a:t>
-            </a:r>
-            <a:endParaRPr lang="en-US" sz="1400" dirty="0"/>
+              <a:t>크리딜   |   </a:t>
+            </a:r>
+            <a:endParaRPr lang="en-US" sz="800" dirty="0"/>
+          </a:p>
+        </p:txBody>
+      </p:sp>
+      <p:sp>
+        <p:nvSpPr>
+          <p:cNvPr id="10" name="Text 7"/>
+          <p:cNvSpPr/>
+          <p:nvPr/>
+        </p:nvSpPr>
+        <p:spPr>
+          <a:xfrm>
+            <a:off x="10710367" y="6382512"/>
+            <a:ext cx="914400" cy="219456"/>
+          </a:xfrm>
+          <a:prstGeom prst="rect">
+            <a:avLst/>
+          </a:prstGeom>
+          <a:noFill/>
+          <a:ln/>
+        </p:spPr>
+        <p:txBody>
+          <a:bodyPr wrap="square" lIns="0" tIns="0" rIns="0" bIns="0" rtlCol="0" anchor="ctr"/>
+          <a:lstStyle/>
+          <a:p>
+            <a:pPr algn="r" indent="0" marL="0">
+              <a:buNone/>
+            </a:pPr>
+            <a:r>
+              <a:rPr lang="en-US" sz="900" b="1" dirty="0">
+                <a:solidFill>
+                  <a:srgbClr val="B98A2E"/>
+                </a:solidFill>
+                <a:latin typeface="Arial" pitchFamily="34" charset="0"/>
+                <a:ea typeface="Arial" pitchFamily="34" charset="-122"/>
+                <a:cs typeface="Arial" pitchFamily="34" charset="-120"/>
+              </a:rPr>
+              <a:t>3</a:t>
+            </a:r>
+            <a:endParaRPr lang="en-US" sz="900" dirty="0"/>
           </a:p>
         </p:txBody>
       </p:sp>
@@ -4520,529 +5321,36 @@
         </p:nvSpPr>
         <p:spPr>
           <a:xfrm>
-            <a:off x="8170475" y="2240280"/>
-            <a:ext cx="3454292" cy="438912"/>
-          </a:xfrm>
-          <a:prstGeom prst="rect">
-            <a:avLst/>
-          </a:prstGeom>
-          <a:noFill/>
-          <a:ln/>
-        </p:spPr>
-        <p:txBody>
-          <a:bodyPr wrap="square" lIns="0" tIns="0" rIns="0" bIns="0" rtlCol="0" anchor="ctr"/>
+            <a:off x="566928" y="1481328"/>
+            <a:ext cx="11057839" cy="9692640"/>
+          </a:xfrm>
+          <a:prstGeom prst="rect">
+            <a:avLst/>
+          </a:prstGeom>
+          <a:noFill/>
+          <a:ln/>
+        </p:spPr>
+        <p:txBody>
+          <a:bodyPr wrap="square" lIns="0" tIns="0" rIns="0" bIns="0" rtlCol="0" anchor="t"/>
           <a:lstStyle/>
           <a:p>
             <a:pPr indent="0" marL="0">
-              <a:lnSpc>
-                <a:spcPct val="120000"/>
-              </a:lnSpc>
-              <a:buNone/>
-            </a:pPr>
-            <a:r>
-              <a:rPr lang="en-US" sz="1400" b="1" dirty="0">
-                <a:solidFill>
-                  <a:srgbClr val="0F172A"/>
+              <a:buNone/>
+            </a:pPr>
+            <a:r>
+              <a:rPr lang="en-US" sz="1000" dirty="0">
+                <a:solidFill>
+                  <a:srgbClr val="10161F"/>
                 </a:solidFill>
                 <a:latin typeface="Pretendard" pitchFamily="34" charset="0"/>
                 <a:ea typeface="Pretendard" pitchFamily="34" charset="-122"/>
                 <a:cs typeface="Pretendard" pitchFamily="34" charset="-120"/>
               </a:rPr>
-              <a:t>서초대로 25m 메인 대로변 접면</a:t>
-            </a:r>
-            <a:endParaRPr lang="en-US" sz="1400" dirty="0"/>
-          </a:p>
-        </p:txBody>
-      </p:sp>
-      <p:sp>
-        <p:nvSpPr>
-          <p:cNvPr id="12" name="Shape 9"/>
-          <p:cNvSpPr/>
-          <p:nvPr/>
-        </p:nvSpPr>
-        <p:spPr>
-          <a:xfrm>
-            <a:off x="6053328" y="2679192"/>
-            <a:ext cx="5571439" cy="0"/>
-          </a:xfrm>
-          <a:prstGeom prst="line">
-            <a:avLst/>
-          </a:prstGeom>
-          <a:noFill/>
-          <a:ln w="3810">
-            <a:solidFill>
-              <a:srgbClr val="CBD5E1"/>
-            </a:solidFill>
-            <a:prstDash val="solid"/>
-          </a:ln>
-        </p:spPr>
-      </p:sp>
-      <p:sp>
-        <p:nvSpPr>
-          <p:cNvPr id="13" name="Text 10"/>
-          <p:cNvSpPr/>
-          <p:nvPr/>
-        </p:nvSpPr>
-        <p:spPr>
-          <a:xfrm>
-            <a:off x="6053328" y="2679192"/>
-            <a:ext cx="2117147" cy="438912"/>
-          </a:xfrm>
-          <a:prstGeom prst="rect">
-            <a:avLst/>
-          </a:prstGeom>
-          <a:noFill/>
-          <a:ln/>
-        </p:spPr>
-        <p:txBody>
-          <a:bodyPr wrap="square" lIns="0" tIns="0" rIns="0" bIns="0" rtlCol="0" anchor="ctr"/>
-          <a:lstStyle/>
-          <a:p>
-            <a:pPr indent="0" marL="0">
-              <a:lnSpc>
-                <a:spcPct val="120000"/>
-              </a:lnSpc>
-              <a:buNone/>
-            </a:pPr>
-            <a:r>
-              <a:rPr lang="en-US" sz="1400" dirty="0">
-                <a:solidFill>
-                  <a:srgbClr val="64748B"/>
-                </a:solidFill>
-                <a:latin typeface="Pretendard" pitchFamily="34" charset="0"/>
-                <a:ea typeface="Pretendard" pitchFamily="34" charset="-122"/>
-                <a:cs typeface="Pretendard" pitchFamily="34" charset="-120"/>
-              </a:rPr>
-              <a:t>차량 진출입</a:t>
-            </a:r>
-            <a:endParaRPr lang="en-US" sz="1400" dirty="0"/>
-          </a:p>
-        </p:txBody>
-      </p:sp>
-      <p:sp>
-        <p:nvSpPr>
-          <p:cNvPr id="14" name="Text 11"/>
-          <p:cNvSpPr/>
-          <p:nvPr/>
-        </p:nvSpPr>
-        <p:spPr>
-          <a:xfrm>
-            <a:off x="8170475" y="2679192"/>
-            <a:ext cx="3454292" cy="438912"/>
-          </a:xfrm>
-          <a:prstGeom prst="rect">
-            <a:avLst/>
-          </a:prstGeom>
-          <a:noFill/>
-          <a:ln/>
-        </p:spPr>
-        <p:txBody>
-          <a:bodyPr wrap="square" lIns="0" tIns="0" rIns="0" bIns="0" rtlCol="0" anchor="ctr"/>
-          <a:lstStyle/>
-          <a:p>
-            <a:pPr indent="0" marL="0">
-              <a:lnSpc>
-                <a:spcPct val="120000"/>
-              </a:lnSpc>
-              <a:buNone/>
-            </a:pPr>
-            <a:r>
-              <a:rPr lang="en-US" sz="1400" b="1" dirty="0">
-                <a:solidFill>
-                  <a:srgbClr val="0F172A"/>
-                </a:solidFill>
-                <a:latin typeface="Pretendard" pitchFamily="34" charset="0"/>
-                <a:ea typeface="Pretendard" pitchFamily="34" charset="-122"/>
-                <a:cs typeface="Pretendard" pitchFamily="34" charset="-120"/>
-              </a:rPr>
-              <a:t>경부고속도로 서초IC 및 테헤란로 3분 내 진입 가능</a:t>
-            </a:r>
-            <a:endParaRPr lang="en-US" sz="1400" dirty="0"/>
-          </a:p>
-        </p:txBody>
-      </p:sp>
-      <p:sp>
-        <p:nvSpPr>
-          <p:cNvPr id="15" name="Shape 12"/>
-          <p:cNvSpPr/>
-          <p:nvPr/>
-        </p:nvSpPr>
-        <p:spPr>
-          <a:xfrm>
-            <a:off x="6053328" y="3118104"/>
-            <a:ext cx="5571439" cy="0"/>
-          </a:xfrm>
-          <a:prstGeom prst="line">
-            <a:avLst/>
-          </a:prstGeom>
-          <a:noFill/>
-          <a:ln w="3810">
-            <a:solidFill>
-              <a:srgbClr val="CBD5E1"/>
-            </a:solidFill>
-            <a:prstDash val="solid"/>
-          </a:ln>
-        </p:spPr>
-      </p:sp>
-      <p:sp>
-        <p:nvSpPr>
-          <p:cNvPr id="16" name="Text 13"/>
-          <p:cNvSpPr/>
-          <p:nvPr/>
-        </p:nvSpPr>
-        <p:spPr>
-          <a:xfrm>
-            <a:off x="6053328" y="3118104"/>
-            <a:ext cx="2117147" cy="438912"/>
-          </a:xfrm>
-          <a:prstGeom prst="rect">
-            <a:avLst/>
-          </a:prstGeom>
-          <a:noFill/>
-          <a:ln/>
-        </p:spPr>
-        <p:txBody>
-          <a:bodyPr wrap="square" lIns="0" tIns="0" rIns="0" bIns="0" rtlCol="0" anchor="ctr"/>
-          <a:lstStyle/>
-          <a:p>
-            <a:pPr indent="0" marL="0">
-              <a:lnSpc>
-                <a:spcPct val="120000"/>
-              </a:lnSpc>
-              <a:buNone/>
-            </a:pPr>
-            <a:r>
-              <a:rPr lang="en-US" sz="1400" dirty="0">
-                <a:solidFill>
-                  <a:srgbClr val="64748B"/>
-                </a:solidFill>
-                <a:latin typeface="Pretendard" pitchFamily="34" charset="0"/>
-                <a:ea typeface="Pretendard" pitchFamily="34" charset="-122"/>
-                <a:cs typeface="Pretendard" pitchFamily="34" charset="-120"/>
-              </a:rPr>
-              <a:t>배후 수요</a:t>
-            </a:r>
-            <a:endParaRPr lang="en-US" sz="1400" dirty="0"/>
-          </a:p>
-        </p:txBody>
-      </p:sp>
-      <p:sp>
-        <p:nvSpPr>
-          <p:cNvPr id="17" name="Text 14"/>
-          <p:cNvSpPr/>
-          <p:nvPr/>
-        </p:nvSpPr>
-        <p:spPr>
-          <a:xfrm>
-            <a:off x="8170475" y="3118104"/>
-            <a:ext cx="3454292" cy="438912"/>
-          </a:xfrm>
-          <a:prstGeom prst="rect">
-            <a:avLst/>
-          </a:prstGeom>
-          <a:noFill/>
-          <a:ln/>
-        </p:spPr>
-        <p:txBody>
-          <a:bodyPr wrap="square" lIns="0" tIns="0" rIns="0" bIns="0" rtlCol="0" anchor="ctr"/>
-          <a:lstStyle/>
-          <a:p>
-            <a:pPr indent="0" marL="0">
-              <a:lnSpc>
-                <a:spcPct val="120000"/>
-              </a:lnSpc>
-              <a:buNone/>
-            </a:pPr>
-            <a:r>
-              <a:rPr lang="en-US" sz="1400" b="1" dirty="0">
-                <a:solidFill>
-                  <a:srgbClr val="0F172A"/>
-                </a:solidFill>
-                <a:latin typeface="Pretendard" pitchFamily="34" charset="0"/>
-                <a:ea typeface="Pretendard" pitchFamily="34" charset="-122"/>
-                <a:cs typeface="Pretendard" pitchFamily="34" charset="-120"/>
-              </a:rPr>
-              <a:t>강남 테헤란로 IT밸리 및 서초 법조타운 오피스 상주인구 30만 배후</a:t>
-            </a:r>
-            <a:endParaRPr lang="en-US" sz="1400" dirty="0"/>
-          </a:p>
-        </p:txBody>
-      </p:sp>
-      <p:sp>
-        <p:nvSpPr>
-          <p:cNvPr id="18" name="Shape 15"/>
-          <p:cNvSpPr/>
-          <p:nvPr/>
-        </p:nvSpPr>
-        <p:spPr>
-          <a:xfrm>
-            <a:off x="6053328" y="3557016"/>
-            <a:ext cx="5571439" cy="0"/>
-          </a:xfrm>
-          <a:prstGeom prst="line">
-            <a:avLst/>
-          </a:prstGeom>
-          <a:noFill/>
-          <a:ln w="3810">
-            <a:solidFill>
-              <a:srgbClr val="CBD5E1"/>
-            </a:solidFill>
-            <a:prstDash val="solid"/>
-          </a:ln>
-        </p:spPr>
-      </p:sp>
-      <p:sp>
-        <p:nvSpPr>
-          <p:cNvPr id="19" name="Text 16"/>
-          <p:cNvSpPr/>
-          <p:nvPr/>
-        </p:nvSpPr>
-        <p:spPr>
-          <a:xfrm>
-            <a:off x="6053328" y="3557016"/>
-            <a:ext cx="2117147" cy="438912"/>
-          </a:xfrm>
-          <a:prstGeom prst="rect">
-            <a:avLst/>
-          </a:prstGeom>
-          <a:noFill/>
-          <a:ln/>
-        </p:spPr>
-        <p:txBody>
-          <a:bodyPr wrap="square" lIns="0" tIns="0" rIns="0" bIns="0" rtlCol="0" anchor="ctr"/>
-          <a:lstStyle/>
-          <a:p>
-            <a:pPr indent="0" marL="0">
-              <a:lnSpc>
-                <a:spcPct val="120000"/>
-              </a:lnSpc>
-              <a:buNone/>
-            </a:pPr>
-            <a:r>
-              <a:rPr lang="en-US" sz="1400" dirty="0">
-                <a:solidFill>
-                  <a:srgbClr val="64748B"/>
-                </a:solidFill>
-                <a:latin typeface="Pretendard" pitchFamily="34" charset="0"/>
-                <a:ea typeface="Pretendard" pitchFamily="34" charset="-122"/>
-                <a:cs typeface="Pretendard" pitchFamily="34" charset="-120"/>
-              </a:rPr>
-              <a:t>의료 상권</a:t>
-            </a:r>
-            <a:endParaRPr lang="en-US" sz="1400" dirty="0"/>
-          </a:p>
-        </p:txBody>
-      </p:sp>
-      <p:sp>
-        <p:nvSpPr>
-          <p:cNvPr id="20" name="Text 17"/>
-          <p:cNvSpPr/>
-          <p:nvPr/>
-        </p:nvSpPr>
-        <p:spPr>
-          <a:xfrm>
-            <a:off x="8170475" y="3557016"/>
-            <a:ext cx="3454292" cy="438912"/>
-          </a:xfrm>
-          <a:prstGeom prst="rect">
-            <a:avLst/>
-          </a:prstGeom>
-          <a:noFill/>
-          <a:ln/>
-        </p:spPr>
-        <p:txBody>
-          <a:bodyPr wrap="square" lIns="0" tIns="0" rIns="0" bIns="0" rtlCol="0" anchor="ctr"/>
-          <a:lstStyle/>
-          <a:p>
-            <a:pPr indent="0" marL="0">
-              <a:lnSpc>
-                <a:spcPct val="120000"/>
-              </a:lnSpc>
-              <a:buNone/>
-            </a:pPr>
-            <a:r>
-              <a:rPr lang="en-US" sz="1400" b="1" dirty="0">
-                <a:solidFill>
-                  <a:srgbClr val="0F172A"/>
-                </a:solidFill>
-                <a:latin typeface="Pretendard" pitchFamily="34" charset="0"/>
-                <a:ea typeface="Pretendard" pitchFamily="34" charset="-122"/>
-                <a:cs typeface="Pretendard" pitchFamily="34" charset="-120"/>
-              </a:rPr>
-              <a:t>1층 약국 및 상층부 안과·피부과 전문의원 집적 의료 특화 상권</a:t>
-            </a:r>
-            <a:endParaRPr lang="en-US" sz="1400" dirty="0"/>
-          </a:p>
-        </p:txBody>
-      </p:sp>
-      <p:sp>
-        <p:nvSpPr>
-          <p:cNvPr id="21" name="Shape 18"/>
-          <p:cNvSpPr/>
-          <p:nvPr/>
-        </p:nvSpPr>
-        <p:spPr>
-          <a:xfrm>
-            <a:off x="6053328" y="3995928"/>
-            <a:ext cx="5571439" cy="0"/>
-          </a:xfrm>
-          <a:prstGeom prst="line">
-            <a:avLst/>
-          </a:prstGeom>
-          <a:noFill/>
-          <a:ln w="3810">
-            <a:solidFill>
-              <a:srgbClr val="CBD5E1"/>
-            </a:solidFill>
-            <a:prstDash val="solid"/>
-          </a:ln>
-        </p:spPr>
-      </p:sp>
-      <p:sp>
-        <p:nvSpPr>
-          <p:cNvPr id="22" name="Text 19"/>
-          <p:cNvSpPr/>
-          <p:nvPr/>
-        </p:nvSpPr>
-        <p:spPr>
-          <a:xfrm>
-            <a:off x="6053328" y="3995928"/>
-            <a:ext cx="2117147" cy="438912"/>
-          </a:xfrm>
-          <a:prstGeom prst="rect">
-            <a:avLst/>
-          </a:prstGeom>
-          <a:noFill/>
-          <a:ln/>
-        </p:spPr>
-        <p:txBody>
-          <a:bodyPr wrap="square" lIns="0" tIns="0" rIns="0" bIns="0" rtlCol="0" anchor="ctr"/>
-          <a:lstStyle/>
-          <a:p>
-            <a:pPr indent="0" marL="0">
-              <a:lnSpc>
-                <a:spcPct val="120000"/>
-              </a:lnSpc>
-              <a:buNone/>
-            </a:pPr>
-            <a:r>
-              <a:rPr lang="en-US" sz="1400" dirty="0">
-                <a:solidFill>
-                  <a:srgbClr val="64748B"/>
-                </a:solidFill>
-                <a:latin typeface="Pretendard" pitchFamily="34" charset="0"/>
-                <a:ea typeface="Pretendard" pitchFamily="34" charset="-122"/>
-                <a:cs typeface="Pretendard" pitchFamily="34" charset="-120"/>
-              </a:rPr>
-              <a:t>편의 인프라</a:t>
-            </a:r>
-            <a:endParaRPr lang="en-US" sz="1400" dirty="0"/>
-          </a:p>
-        </p:txBody>
-      </p:sp>
-      <p:sp>
-        <p:nvSpPr>
-          <p:cNvPr id="23" name="Text 20"/>
-          <p:cNvSpPr/>
-          <p:nvPr/>
-        </p:nvSpPr>
-        <p:spPr>
-          <a:xfrm>
-            <a:off x="8170475" y="3995928"/>
-            <a:ext cx="3454292" cy="438912"/>
-          </a:xfrm>
-          <a:prstGeom prst="rect">
-            <a:avLst/>
-          </a:prstGeom>
-          <a:noFill/>
-          <a:ln/>
-        </p:spPr>
-        <p:txBody>
-          <a:bodyPr wrap="square" lIns="0" tIns="0" rIns="0" bIns="0" rtlCol="0" anchor="ctr"/>
-          <a:lstStyle/>
-          <a:p>
-            <a:pPr indent="0" marL="0">
-              <a:lnSpc>
-                <a:spcPct val="120000"/>
-              </a:lnSpc>
-              <a:buNone/>
-            </a:pPr>
-            <a:r>
-              <a:rPr lang="en-US" sz="1400" b="1" dirty="0">
-                <a:solidFill>
-                  <a:srgbClr val="0F172A"/>
-                </a:solidFill>
-                <a:latin typeface="Pretendard" pitchFamily="34" charset="0"/>
-                <a:ea typeface="Pretendard" pitchFamily="34" charset="-122"/>
-                <a:cs typeface="Pretendard" pitchFamily="34" charset="-120"/>
-              </a:rPr>
-              <a:t>반경 300m 내 주요 임차 업종, 은행, 대형 베이커리 밀집</a:t>
-            </a:r>
-            <a:endParaRPr lang="en-US" sz="1400" dirty="0"/>
-          </a:p>
-        </p:txBody>
-      </p:sp>
-      <p:sp>
-        <p:nvSpPr>
-          <p:cNvPr id="24" name="Text 21"/>
-          <p:cNvSpPr/>
-          <p:nvPr/>
-        </p:nvSpPr>
-        <p:spPr>
-          <a:xfrm>
-            <a:off x="566928" y="6419088"/>
-            <a:ext cx="11057839" cy="201168"/>
-          </a:xfrm>
-          <a:prstGeom prst="rect">
-            <a:avLst/>
-          </a:prstGeom>
-          <a:noFill/>
-          <a:ln/>
-        </p:spPr>
-        <p:txBody>
-          <a:bodyPr wrap="square" lIns="0" tIns="0" rIns="0" bIns="0" rtlCol="0" anchor="ctr"/>
-          <a:lstStyle/>
-          <a:p>
-            <a:pPr algn="ctr" indent="0" marL="0">
-              <a:buNone/>
-            </a:pPr>
-            <a:r>
-              <a:rPr lang="en-US" sz="750" dirty="0">
-                <a:solidFill>
-                  <a:srgbClr val="64748B"/>
-                </a:solidFill>
-                <a:latin typeface="Pretendard" pitchFamily="34" charset="0"/>
-                <a:ea typeface="Pretendard" pitchFamily="34" charset="-122"/>
-                <a:cs typeface="Pretendard" pitchFamily="34" charset="-120"/>
-              </a:rPr>
-              <a:t>크리딜  ·    ·  3</a:t>
-            </a:r>
-            <a:endParaRPr lang="en-US" sz="750" dirty="0"/>
-          </a:p>
-        </p:txBody>
-      </p:sp>
-      <p:sp>
-        <p:nvSpPr>
-          <p:cNvPr id="25" name="Shape 22"/>
-          <p:cNvSpPr/>
-          <p:nvPr/>
-        </p:nvSpPr>
-        <p:spPr>
-          <a:xfrm>
-            <a:off x="4437172" y="6382512"/>
-            <a:ext cx="3317352" cy="0"/>
-          </a:xfrm>
-          <a:prstGeom prst="line">
-            <a:avLst/>
-          </a:prstGeom>
-          <a:noFill/>
-          <a:ln w="6350">
-            <a:solidFill>
-              <a:srgbClr val="6B8E00"/>
-            </a:solidFill>
-            <a:prstDash val="solid"/>
-          </a:ln>
-        </p:spPr>
+              <a:t>{"ok":true,"mocked":true,"extractedFields":{"area_signal":"역삼","asset_type":"오피스빌딩","price_band":"300억","size_signal":"3000평(약 9917.4㎡)"},"extractedFacts":{"region":"역삼","exactAddressCandidate":"역삼동 742-1","assetType":"오피스빌딩","priceText":"300억","sizeText":"3000평(약 9917.4㎡)","currentUse":"오피스","currentUseSignal":"근린생활시설","leaseSignal":"임대중","vacancySignal":"공실없음","tenantNames":["쿠팡","네이버"],"unitRentTexts":["301호: 1500만"],"sellerMotivationText":"자산 효율화","brokerNotes":["초역세권 매물"]},"detectedSensitiveFields":["exact_address","tenant_name"],"ambiguousFields":[],"warnings":[],"areaSignal":"역삼","assetType":"오피스빌딩","priceBand":"300억","sizeSignal":"3000평(약 9917.4㎡)","dealType":"매각","buildingName":"역삼 센트럴타워","exactAddress":"역삼동 742-1","totalFloorArea":9917.3,"buildYear":2015,"currentUseSignal":"근린생활시설","vacancySignal":"공실 없음","fitSummary":"초역세권 근생 빌딩으로 시행/사옥 매입에 최적화","cautionSummary":"주요 임차 업종 만기 조율 필요","hiddenFields":["exact_address","seller_motivation"],"confidence":{"areaSignal":"confirmed","assetType":"confirmed","priceBand":"ai_hypothesis","fitSummary":"ai_hypothesis"},"missingData":["sizeSignal"],"boundaryNote":"본 자료는 실거래 통계 기반 참고치입니다.","buyerType":"법인 사옥형","budgetRange":{"min":50,"max":80,"display":"50억~80억"},"preferredRegions":["강남","성수"],"assetTypes":["꼬마빌딩","사옥용"],"purchasePurpose":"사옥용 매입","mustHave":["초역세권","주차"],"niceToHave":["테라스","루프탑"],"riskTolerance":"medium","financingNote":"자본금 50% 준비","missingQuestions":["구체적인 입주 시기가 언제인가요?","선호하는 수익률이 있나요?"],"privacyNotes":["연락처 비공개"],"fitReasons":["매수자 예산(50-80억)에 부합하는 매물입니다.","요청하신 성수/강남 권역에 해당합니다."],"cautionReasons":["요청한 용도와 달리 명도 협의가 다소 필요합니다."],"recommendedNextAction":"현장 답사 제안","kakaoMessage":"안녕하세요! 요청하신 조건에 부합하는 추천 매물이 있어 안내해 드립니다. 확인해보시고 피드백 부탁드립니다.","title":"강남 역삼역 초역세권 오피스 사옥용 빌딩 매각","shortSummary":"역삼역 도보 5분 거리의 준신축급 대형 오피스빌딩입니다.","dealPoints":["초역세권","사옥 최적"],"cautionPoints":["명도 조율 필요"],"hiddenInfoNotice":["보증금 및 지번은 인가 후 확인 가능"],"gateMessage":"G1 등급 등록이 필요합니다.","kakaoText":"강남 역삼역 오피스 빌딩 매각 안내입니다.","exactUnitCandidate":"101호","floor":"1층","areaSqmText":"150㎡","spaceType":"office","depositText":"5000만","monthlyRentText":"400만","maintenanceFeeText":"50만","availableFromText":"즉시입주","leaseTermMonthsText":"24","incentivesText":"렌트프리 2개월","restrictions":[],"landlordIdentity":"김성수","currentTenant":"스타트업","vacancyReason":"이전 확장","rentNegotiation":"협의 가능","region":"성수동","areaSqm":150,"deposit":5000,"monthlyRent":400,"maintenanceFee":50,"availableFrom":"즉시입주","leaseTermMonths":24,"incentives":{"rentFreeMonths":2,"interiorSupport":"일부 인테리어 지원","freeRentDetail":"렌트프리 2개월 지원"},"shortSummaryLease":"성수역 도보 5분 거리 1층 리테일 상가 매물입니다."}</a:t>
+            </a:r>
+            <a:endParaRPr lang="en-US" sz="1000" dirty="0"/>
+          </a:p>
+        </p:txBody>
       </p:sp>
     </p:spTree>
   </p:cSld>
@@ -5084,14 +5392,14 @@
         </p:nvSpPr>
         <p:spPr>
           <a:xfrm>
-            <a:off x="566928" y="384048"/>
-            <a:ext cx="45720" cy="566928"/>
-          </a:xfrm>
-          <a:prstGeom prst="rect">
+            <a:off x="566928" y="457200"/>
+            <a:ext cx="384048" cy="384048"/>
+          </a:xfrm>
+          <a:prstGeom prst="ellipse">
             <a:avLst/>
           </a:prstGeom>
           <a:solidFill>
-            <a:srgbClr val="6B8E00"/>
+            <a:srgbClr val="B98A2E"/>
           </a:solidFill>
           <a:ln/>
         </p:spPr>
@@ -5104,32 +5412,71 @@
         </p:nvSpPr>
         <p:spPr>
           <a:xfrm>
-            <a:off x="749808" y="384048"/>
-            <a:ext cx="10874959" cy="182880"/>
-          </a:xfrm>
-          <a:prstGeom prst="rect">
-            <a:avLst/>
-          </a:prstGeom>
-          <a:noFill/>
-          <a:ln/>
-        </p:spPr>
-        <p:txBody>
-          <a:bodyPr wrap="square" lIns="0" tIns="0" rIns="0" bIns="0" rtlCol="0" anchor="ctr"/>
-          <a:lstStyle/>
-          <a:p>
-            <a:pPr indent="0" marL="0">
-              <a:buNone/>
-            </a:pPr>
-            <a:r>
-              <a:rPr lang="en-US" sz="950" b="1" spc="200" kern="0" dirty="0">
-                <a:solidFill>
-                  <a:srgbClr val="6B8E00"/>
+            <a:off x="566928" y="457200"/>
+            <a:ext cx="384048" cy="384048"/>
+          </a:xfrm>
+          <a:prstGeom prst="rect">
+            <a:avLst/>
+          </a:prstGeom>
+          <a:noFill/>
+          <a:ln/>
+        </p:spPr>
+        <p:txBody>
+          <a:bodyPr wrap="square" lIns="0" tIns="0" rIns="0" bIns="0" rtlCol="0" anchor="ctr"/>
+          <a:lstStyle/>
+          <a:p>
+            <a:pPr algn="ctr" indent="0" marL="0">
+              <a:buNone/>
+            </a:pPr>
+            <a:r>
+              <a:rPr lang="en-US" sz="1300" b="1" dirty="0">
+                <a:solidFill>
+                  <a:srgbClr val="FFFFFF"/>
                 </a:solidFill>
                 <a:latin typeface="Arial" pitchFamily="34" charset="0"/>
                 <a:ea typeface="Arial" pitchFamily="34" charset="-122"/>
                 <a:cs typeface="Arial" pitchFamily="34" charset="-120"/>
               </a:rPr>
-              <a:t>04  Building</a:t>
+              <a:t>04</a:t>
+            </a:r>
+            <a:endParaRPr lang="en-US" sz="1300" dirty="0"/>
+          </a:p>
+        </p:txBody>
+      </p:sp>
+      <p:sp>
+        <p:nvSpPr>
+          <p:cNvPr id="4" name="Text 2"/>
+          <p:cNvSpPr/>
+          <p:nvPr/>
+        </p:nvSpPr>
+        <p:spPr>
+          <a:xfrm>
+            <a:off x="1133856" y="457200"/>
+            <a:ext cx="10490911" cy="182880"/>
+          </a:xfrm>
+          <a:prstGeom prst="rect">
+            <a:avLst/>
+          </a:prstGeom>
+          <a:noFill/>
+          <a:ln/>
+        </p:spPr>
+        <p:txBody>
+          <a:bodyPr wrap="square" lIns="0" tIns="0" rIns="0" bIns="0" rtlCol="0" anchor="ctr"/>
+          <a:lstStyle/>
+          <a:p>
+            <a:pPr indent="0" marL="0">
+              <a:buNone/>
+            </a:pPr>
+            <a:r>
+              <a:rPr lang="en-US" sz="950" b="1" spc="200" kern="0" dirty="0">
+                <a:solidFill>
+                  <a:srgbClr val="B98A2E"/>
+                </a:solidFill>
+                <a:latin typeface="Arial" pitchFamily="34" charset="0"/>
+                <a:ea typeface="Arial" pitchFamily="34" charset="-122"/>
+                <a:cs typeface="Arial" pitchFamily="34" charset="-120"/>
+              </a:rPr>
+              <a:t>Building</a:t>
             </a:r>
             <a:endParaRPr lang="en-US" sz="950" dirty="0"/>
           </a:p>
@@ -5137,14 +5484,14 @@
       </p:sp>
       <p:sp>
         <p:nvSpPr>
-          <p:cNvPr id="4" name="Text 2"/>
-          <p:cNvSpPr/>
-          <p:nvPr/>
-        </p:nvSpPr>
-        <p:spPr>
-          <a:xfrm>
-            <a:off x="749808" y="566928"/>
-            <a:ext cx="10874959" cy="384048"/>
+          <p:cNvPr id="5" name="Text 3"/>
+          <p:cNvSpPr/>
+          <p:nvPr/>
+        </p:nvSpPr>
+        <p:spPr>
+          <a:xfrm>
+            <a:off x="1133856" y="640080"/>
+            <a:ext cx="10490911" cy="365760"/>
           </a:xfrm>
           <a:prstGeom prst="rect">
             <a:avLst/>
@@ -5160,9 +5507,9 @@
               <a:buNone/>
             </a:pPr>
             <a:r>
-              <a:rPr lang="en-US" sz="2200" b="1" dirty="0">
-                <a:solidFill>
-                  <a:srgbClr val="0F172A"/>
+              <a:rPr lang="en-US" sz="2300" b="1" dirty="0">
+                <a:solidFill>
+                  <a:srgbClr val="10161F"/>
                 </a:solidFill>
                 <a:latin typeface="Pretendard" pitchFamily="34" charset="0"/>
                 <a:ea typeface="Pretendard" pitchFamily="34" charset="-122"/>
@@ -5170,13 +5517,13 @@
               </a:rPr>
               <a:t>이 빌딩, 어떤 자산인가</a:t>
             </a:r>
-            <a:endParaRPr lang="en-US" sz="2200" dirty="0"/>
-          </a:p>
-        </p:txBody>
-      </p:sp>
-      <p:sp>
-        <p:nvSpPr>
-          <p:cNvPr id="5" name="Text 3"/>
+            <a:endParaRPr lang="en-US" sz="2300" dirty="0"/>
+          </a:p>
+        </p:txBody>
+      </p:sp>
+      <p:sp>
+        <p:nvSpPr>
+          <p:cNvPr id="6" name="Text 4"/>
           <p:cNvSpPr/>
           <p:nvPr/>
         </p:nvSpPr>
@@ -5201,7 +5548,7 @@
             <a:r>
               <a:rPr lang="en-US" sz="1100" b="1" dirty="0">
                 <a:solidFill>
-                  <a:srgbClr val="0F172A"/>
+                  <a:srgbClr val="10161F"/>
                 </a:solidFill>
                 <a:latin typeface="Pretendard" pitchFamily="34" charset="0"/>
                 <a:ea typeface="Pretendard" pitchFamily="34" charset="-122"/>
@@ -5215,7 +5562,7 @@
       </p:sp>
       <p:sp>
         <p:nvSpPr>
-          <p:cNvPr id="6" name="Text 4"/>
+          <p:cNvPr id="7" name="Text 5"/>
           <p:cNvSpPr/>
           <p:nvPr/>
         </p:nvSpPr>
@@ -5243,7 +5590,7 @@
             <a:r>
               <a:rPr lang="en-US" sz="1400" dirty="0">
                 <a:solidFill>
-                  <a:srgbClr val="64748B"/>
+                  <a:srgbClr val="718096"/>
                 </a:solidFill>
                 <a:latin typeface="Pretendard" pitchFamily="34" charset="0"/>
                 <a:ea typeface="Pretendard" pitchFamily="34" charset="-122"/>
@@ -5257,7 +5604,7 @@
       </p:sp>
       <p:sp>
         <p:nvSpPr>
-          <p:cNvPr id="7" name="Text 5"/>
+          <p:cNvPr id="8" name="Text 6"/>
           <p:cNvSpPr/>
           <p:nvPr/>
         </p:nvSpPr>
@@ -5285,7 +5632,7 @@
             <a:r>
               <a:rPr lang="en-US" sz="1400" b="1" dirty="0">
                 <a:solidFill>
-                  <a:srgbClr val="0F172A"/>
+                  <a:srgbClr val="10161F"/>
                 </a:solidFill>
                 <a:latin typeface="Pretendard" pitchFamily="34" charset="0"/>
                 <a:ea typeface="Pretendard" pitchFamily="34" charset="-122"/>
@@ -5299,7 +5646,7 @@
       </p:sp>
       <p:sp>
         <p:nvSpPr>
-          <p:cNvPr id="8" name="Shape 6"/>
+          <p:cNvPr id="9" name="Shape 7"/>
           <p:cNvSpPr/>
           <p:nvPr/>
         </p:nvSpPr>
@@ -5314,7 +5661,7 @@
           <a:noFill/>
           <a:ln w="3810">
             <a:solidFill>
-              <a:srgbClr val="CBD5E1"/>
+              <a:srgbClr val="CBD5E0"/>
             </a:solidFill>
             <a:prstDash val="solid"/>
           </a:ln>
@@ -5322,7 +5669,7 @@
       </p:sp>
       <p:sp>
         <p:nvSpPr>
-          <p:cNvPr id="9" name="Text 7"/>
+          <p:cNvPr id="10" name="Text 8"/>
           <p:cNvSpPr/>
           <p:nvPr/>
         </p:nvSpPr>
@@ -5350,7 +5697,7 @@
             <a:r>
               <a:rPr lang="en-US" sz="1400" dirty="0">
                 <a:solidFill>
-                  <a:srgbClr val="64748B"/>
+                  <a:srgbClr val="718096"/>
                 </a:solidFill>
                 <a:latin typeface="Pretendard" pitchFamily="34" charset="0"/>
                 <a:ea typeface="Pretendard" pitchFamily="34" charset="-122"/>
@@ -5364,7 +5711,7 @@
       </p:sp>
       <p:sp>
         <p:nvSpPr>
-          <p:cNvPr id="10" name="Text 8"/>
+          <p:cNvPr id="11" name="Text 9"/>
           <p:cNvSpPr/>
           <p:nvPr/>
         </p:nvSpPr>
@@ -5392,13 +5739,13 @@
             <a:r>
               <a:rPr lang="en-US" sz="1400" b="1" dirty="0">
                 <a:solidFill>
-                  <a:srgbClr val="0F172A"/>
+                  <a:srgbClr val="10161F"/>
                 </a:solidFill>
                 <a:latin typeface="Pretendard" pitchFamily="34" charset="0"/>
                 <a:ea typeface="Pretendard" pitchFamily="34" charset="-122"/>
                 <a:cs typeface="Pretendard" pitchFamily="34" charset="-120"/>
               </a:rPr>
-              <a:t>근린생활시설 / 메디컬</a:t>
+              <a:t>근린생활시설</a:t>
             </a:r>
             <a:endParaRPr lang="en-US" sz="1400" dirty="0"/>
           </a:p>
@@ -5406,7 +5753,7 @@
       </p:sp>
       <p:sp>
         <p:nvSpPr>
-          <p:cNvPr id="11" name="Shape 9"/>
+          <p:cNvPr id="12" name="Shape 10"/>
           <p:cNvSpPr/>
           <p:nvPr/>
         </p:nvSpPr>
@@ -5421,7 +5768,7 @@
           <a:noFill/>
           <a:ln w="3810">
             <a:solidFill>
-              <a:srgbClr val="CBD5E1"/>
+              <a:srgbClr val="CBD5E0"/>
             </a:solidFill>
             <a:prstDash val="solid"/>
           </a:ln>
@@ -5429,7 +5776,7 @@
       </p:sp>
       <p:sp>
         <p:nvSpPr>
-          <p:cNvPr id="12" name="Text 10"/>
+          <p:cNvPr id="13" name="Text 11"/>
           <p:cNvSpPr/>
           <p:nvPr/>
         </p:nvSpPr>
@@ -5457,7 +5804,7 @@
             <a:r>
               <a:rPr lang="en-US" sz="1400" dirty="0">
                 <a:solidFill>
-                  <a:srgbClr val="64748B"/>
+                  <a:srgbClr val="718096"/>
                 </a:solidFill>
                 <a:latin typeface="Pretendard" pitchFamily="34" charset="0"/>
                 <a:ea typeface="Pretendard" pitchFamily="34" charset="-122"/>
@@ -5471,7 +5818,7 @@
       </p:sp>
       <p:sp>
         <p:nvSpPr>
-          <p:cNvPr id="13" name="Text 11"/>
+          <p:cNvPr id="14" name="Text 12"/>
           <p:cNvSpPr/>
           <p:nvPr/>
         </p:nvSpPr>
@@ -5499,7 +5846,7 @@
             <a:r>
               <a:rPr lang="en-US" sz="1400" b="1" dirty="0">
                 <a:solidFill>
-                  <a:srgbClr val="0F172A"/>
+                  <a:srgbClr val="10161F"/>
                 </a:solidFill>
                 <a:latin typeface="Pretendard" pitchFamily="34" charset="0"/>
                 <a:ea typeface="Pretendard" pitchFamily="34" charset="-122"/>
@@ -5513,7 +5860,7 @@
       </p:sp>
       <p:sp>
         <p:nvSpPr>
-          <p:cNvPr id="14" name="Shape 12"/>
+          <p:cNvPr id="15" name="Shape 13"/>
           <p:cNvSpPr/>
           <p:nvPr/>
         </p:nvSpPr>
@@ -5528,7 +5875,7 @@
           <a:noFill/>
           <a:ln w="3810">
             <a:solidFill>
-              <a:srgbClr val="CBD5E1"/>
+              <a:srgbClr val="CBD5E0"/>
             </a:solidFill>
             <a:prstDash val="solid"/>
           </a:ln>
@@ -5536,7 +5883,7 @@
       </p:sp>
       <p:sp>
         <p:nvSpPr>
-          <p:cNvPr id="15" name="Text 13"/>
+          <p:cNvPr id="16" name="Text 14"/>
           <p:cNvSpPr/>
           <p:nvPr/>
         </p:nvSpPr>
@@ -5564,7 +5911,7 @@
             <a:r>
               <a:rPr lang="en-US" sz="1400" dirty="0">
                 <a:solidFill>
-                  <a:srgbClr val="64748B"/>
+                  <a:srgbClr val="718096"/>
                 </a:solidFill>
                 <a:latin typeface="Pretendard" pitchFamily="34" charset="0"/>
                 <a:ea typeface="Pretendard" pitchFamily="34" charset="-122"/>
@@ -5578,7 +5925,7 @@
       </p:sp>
       <p:sp>
         <p:nvSpPr>
-          <p:cNvPr id="16" name="Text 14"/>
+          <p:cNvPr id="17" name="Text 15"/>
           <p:cNvSpPr/>
           <p:nvPr/>
         </p:nvSpPr>
@@ -5606,7 +5953,7 @@
             <a:r>
               <a:rPr lang="en-US" sz="1400" b="1" dirty="0">
                 <a:solidFill>
-                  <a:srgbClr val="0F172A"/>
+                  <a:srgbClr val="10161F"/>
                 </a:solidFill>
                 <a:latin typeface="Pretendard" pitchFamily="34" charset="0"/>
                 <a:ea typeface="Pretendard" pitchFamily="34" charset="-122"/>
@@ -5620,7 +5967,7 @@
       </p:sp>
       <p:sp>
         <p:nvSpPr>
-          <p:cNvPr id="17" name="Shape 15"/>
+          <p:cNvPr id="18" name="Shape 16"/>
           <p:cNvSpPr/>
           <p:nvPr/>
         </p:nvSpPr>
@@ -5635,7 +5982,7 @@
           <a:noFill/>
           <a:ln w="3810">
             <a:solidFill>
-              <a:srgbClr val="CBD5E1"/>
+              <a:srgbClr val="CBD5E0"/>
             </a:solidFill>
             <a:prstDash val="solid"/>
           </a:ln>
@@ -5643,7 +5990,7 @@
       </p:sp>
       <p:sp>
         <p:nvSpPr>
-          <p:cNvPr id="18" name="Text 16"/>
+          <p:cNvPr id="19" name="Text 17"/>
           <p:cNvSpPr/>
           <p:nvPr/>
         </p:nvSpPr>
@@ -5671,7 +6018,7 @@
             <a:r>
               <a:rPr lang="en-US" sz="1400" dirty="0">
                 <a:solidFill>
-                  <a:srgbClr val="64748B"/>
+                  <a:srgbClr val="718096"/>
                 </a:solidFill>
                 <a:latin typeface="Pretendard" pitchFamily="34" charset="0"/>
                 <a:ea typeface="Pretendard" pitchFamily="34" charset="-122"/>
@@ -5685,7 +6032,7 @@
       </p:sp>
       <p:sp>
         <p:nvSpPr>
-          <p:cNvPr id="19" name="Text 17"/>
+          <p:cNvPr id="20" name="Text 18"/>
           <p:cNvSpPr/>
           <p:nvPr/>
         </p:nvSpPr>
@@ -5713,7 +6060,7 @@
             <a:r>
               <a:rPr lang="en-US" sz="1400" b="1" dirty="0">
                 <a:solidFill>
-                  <a:srgbClr val="0F172A"/>
+                  <a:srgbClr val="10161F"/>
                 </a:solidFill>
                 <a:latin typeface="Pretendard" pitchFamily="34" charset="0"/>
                 <a:ea typeface="Pretendard" pitchFamily="34" charset="-122"/>
@@ -5727,7 +6074,7 @@
       </p:sp>
       <p:sp>
         <p:nvSpPr>
-          <p:cNvPr id="20" name="Shape 18"/>
+          <p:cNvPr id="21" name="Shape 19"/>
           <p:cNvSpPr/>
           <p:nvPr/>
         </p:nvSpPr>
@@ -5742,7 +6089,7 @@
           <a:noFill/>
           <a:ln w="3810">
             <a:solidFill>
-              <a:srgbClr val="CBD5E1"/>
+              <a:srgbClr val="CBD5E0"/>
             </a:solidFill>
             <a:prstDash val="solid"/>
           </a:ln>
@@ -5750,7 +6097,7 @@
       </p:sp>
       <p:sp>
         <p:nvSpPr>
-          <p:cNvPr id="21" name="Text 19"/>
+          <p:cNvPr id="22" name="Text 20"/>
           <p:cNvSpPr/>
           <p:nvPr/>
         </p:nvSpPr>
@@ -5778,7 +6125,7 @@
             <a:r>
               <a:rPr lang="en-US" sz="1400" dirty="0">
                 <a:solidFill>
-                  <a:srgbClr val="64748B"/>
+                  <a:srgbClr val="718096"/>
                 </a:solidFill>
                 <a:latin typeface="Pretendard" pitchFamily="34" charset="0"/>
                 <a:ea typeface="Pretendard" pitchFamily="34" charset="-122"/>
@@ -5792,7 +6139,7 @@
       </p:sp>
       <p:sp>
         <p:nvSpPr>
-          <p:cNvPr id="22" name="Text 20"/>
+          <p:cNvPr id="23" name="Text 21"/>
           <p:cNvSpPr/>
           <p:nvPr/>
         </p:nvSpPr>
@@ -5820,7 +6167,7 @@
             <a:r>
               <a:rPr lang="en-US" sz="1400" b="1" dirty="0">
                 <a:solidFill>
-                  <a:srgbClr val="0F172A"/>
+                  <a:srgbClr val="10161F"/>
                 </a:solidFill>
                 <a:latin typeface="Pretendard" pitchFamily="34" charset="0"/>
                 <a:ea typeface="Pretendard" pitchFamily="34" charset="-122"/>
@@ -5834,7 +6181,7 @@
       </p:sp>
       <p:sp>
         <p:nvSpPr>
-          <p:cNvPr id="23" name="Shape 21"/>
+          <p:cNvPr id="24" name="Shape 22"/>
           <p:cNvSpPr/>
           <p:nvPr/>
         </p:nvSpPr>
@@ -5849,7 +6196,7 @@
           <a:noFill/>
           <a:ln w="3810">
             <a:solidFill>
-              <a:srgbClr val="CBD5E1"/>
+              <a:srgbClr val="CBD5E0"/>
             </a:solidFill>
             <a:prstDash val="solid"/>
           </a:ln>
@@ -5857,7 +6204,7 @@
       </p:sp>
       <p:sp>
         <p:nvSpPr>
-          <p:cNvPr id="24" name="Text 22"/>
+          <p:cNvPr id="25" name="Text 23"/>
           <p:cNvSpPr/>
           <p:nvPr/>
         </p:nvSpPr>
@@ -5885,7 +6232,7 @@
             <a:r>
               <a:rPr lang="en-US" sz="1400" dirty="0">
                 <a:solidFill>
-                  <a:srgbClr val="64748B"/>
+                  <a:srgbClr val="718096"/>
                 </a:solidFill>
                 <a:latin typeface="Pretendard" pitchFamily="34" charset="0"/>
                 <a:ea typeface="Pretendard" pitchFamily="34" charset="-122"/>
@@ -5899,7 +6246,7 @@
       </p:sp>
       <p:sp>
         <p:nvSpPr>
-          <p:cNvPr id="25" name="Text 23"/>
+          <p:cNvPr id="26" name="Text 24"/>
           <p:cNvSpPr/>
           <p:nvPr/>
         </p:nvSpPr>
@@ -5927,7 +6274,7 @@
             <a:r>
               <a:rPr lang="en-US" sz="1400" b="1" dirty="0">
                 <a:solidFill>
-                  <a:srgbClr val="0F172A"/>
+                  <a:srgbClr val="10161F"/>
                 </a:solidFill>
                 <a:latin typeface="Pretendard" pitchFamily="34" charset="0"/>
                 <a:ea typeface="Pretendard" pitchFamily="34" charset="-122"/>
@@ -5941,7 +6288,7 @@
       </p:sp>
       <p:sp>
         <p:nvSpPr>
-          <p:cNvPr id="26" name="Shape 24"/>
+          <p:cNvPr id="27" name="Shape 25"/>
           <p:cNvSpPr/>
           <p:nvPr/>
         </p:nvSpPr>
@@ -5956,7 +6303,7 @@
           <a:noFill/>
           <a:ln w="3810">
             <a:solidFill>
-              <a:srgbClr val="CBD5E1"/>
+              <a:srgbClr val="CBD5E0"/>
             </a:solidFill>
             <a:prstDash val="solid"/>
           </a:ln>
@@ -5964,7 +6311,7 @@
       </p:sp>
       <p:sp>
         <p:nvSpPr>
-          <p:cNvPr id="27" name="Text 25"/>
+          <p:cNvPr id="28" name="Text 26"/>
           <p:cNvSpPr/>
           <p:nvPr/>
         </p:nvSpPr>
@@ -5992,7 +6339,7 @@
             <a:r>
               <a:rPr lang="en-US" sz="1400" dirty="0">
                 <a:solidFill>
-                  <a:srgbClr val="64748B"/>
+                  <a:srgbClr val="718096"/>
                 </a:solidFill>
                 <a:latin typeface="Pretendard" pitchFamily="34" charset="0"/>
                 <a:ea typeface="Pretendard" pitchFamily="34" charset="-122"/>
@@ -6006,7 +6353,7 @@
       </p:sp>
       <p:sp>
         <p:nvSpPr>
-          <p:cNvPr id="28" name="Text 26"/>
+          <p:cNvPr id="29" name="Text 27"/>
           <p:cNvSpPr/>
           <p:nvPr/>
         </p:nvSpPr>
@@ -6034,7 +6381,7 @@
             <a:r>
               <a:rPr lang="en-US" sz="1400" b="1" dirty="0">
                 <a:solidFill>
-                  <a:srgbClr val="0F172A"/>
+                  <a:srgbClr val="10161F"/>
                 </a:solidFill>
                 <a:latin typeface="Pretendard" pitchFamily="34" charset="0"/>
                 <a:ea typeface="Pretendard" pitchFamily="34" charset="-122"/>
@@ -6048,7 +6395,7 @@
       </p:sp>
       <p:sp>
         <p:nvSpPr>
-          <p:cNvPr id="29" name="Shape 27"/>
+          <p:cNvPr id="30" name="Shape 28"/>
           <p:cNvSpPr/>
           <p:nvPr/>
         </p:nvSpPr>
@@ -6063,7 +6410,7 @@
           <a:noFill/>
           <a:ln w="3810">
             <a:solidFill>
-              <a:srgbClr val="CBD5E1"/>
+              <a:srgbClr val="CBD5E0"/>
             </a:solidFill>
             <a:prstDash val="solid"/>
           </a:ln>
@@ -6071,7 +6418,7 @@
       </p:sp>
       <p:sp>
         <p:nvSpPr>
-          <p:cNvPr id="30" name="Text 28"/>
+          <p:cNvPr id="31" name="Text 29"/>
           <p:cNvSpPr/>
           <p:nvPr/>
         </p:nvSpPr>
@@ -6099,7 +6446,7 @@
             <a:r>
               <a:rPr lang="en-US" sz="1400" dirty="0">
                 <a:solidFill>
-                  <a:srgbClr val="64748B"/>
+                  <a:srgbClr val="718096"/>
                 </a:solidFill>
                 <a:latin typeface="Pretendard" pitchFamily="34" charset="0"/>
                 <a:ea typeface="Pretendard" pitchFamily="34" charset="-122"/>
@@ -6113,7 +6460,7 @@
       </p:sp>
       <p:sp>
         <p:nvSpPr>
-          <p:cNvPr id="31" name="Text 29"/>
+          <p:cNvPr id="32" name="Text 30"/>
           <p:cNvSpPr/>
           <p:nvPr/>
         </p:nvSpPr>
@@ -6141,7 +6488,7 @@
             <a:r>
               <a:rPr lang="en-US" sz="1400" b="1" dirty="0">
                 <a:solidFill>
-                  <a:srgbClr val="0F172A"/>
+                  <a:srgbClr val="10161F"/>
                 </a:solidFill>
                 <a:latin typeface="Pretendard" pitchFamily="34" charset="0"/>
                 <a:ea typeface="Pretendard" pitchFamily="34" charset="-122"/>
@@ -6155,7 +6502,7 @@
       </p:sp>
       <p:sp>
         <p:nvSpPr>
-          <p:cNvPr id="32" name="Shape 30"/>
+          <p:cNvPr id="33" name="Shape 31"/>
           <p:cNvSpPr/>
           <p:nvPr/>
         </p:nvSpPr>
@@ -6170,7 +6517,7 @@
           <a:noFill/>
           <a:ln w="8890">
             <a:solidFill>
-              <a:srgbClr val="6B8E00"/>
+              <a:srgbClr val="B98A2E"/>
             </a:solidFill>
             <a:prstDash val="solid"/>
           </a:ln>
@@ -6178,7 +6525,7 @@
       </p:sp>
       <p:sp>
         <p:nvSpPr>
-          <p:cNvPr id="33" name="Shape 31"/>
+          <p:cNvPr id="34" name="Shape 32"/>
           <p:cNvSpPr/>
           <p:nvPr/>
         </p:nvSpPr>
@@ -6193,14 +6540,14 @@
             </a:avLst>
           </a:prstGeom>
           <a:solidFill>
-            <a:srgbClr val="DBEAFE"/>
+            <a:srgbClr val="BEE3F8"/>
           </a:solidFill>
           <a:ln/>
         </p:spPr>
       </p:sp>
       <p:sp>
         <p:nvSpPr>
-          <p:cNvPr id="34" name="Shape 32"/>
+          <p:cNvPr id="35" name="Shape 33"/>
           <p:cNvSpPr/>
           <p:nvPr/>
         </p:nvSpPr>
@@ -6213,14 +6560,14 @@
             <a:avLst/>
           </a:prstGeom>
           <a:solidFill>
-            <a:srgbClr val="1D4ED8"/>
+            <a:srgbClr val="2B6CB0"/>
           </a:solidFill>
           <a:ln/>
         </p:spPr>
       </p:sp>
       <p:sp>
         <p:nvSpPr>
-          <p:cNvPr id="35" name="Text 33"/>
+          <p:cNvPr id="36" name="Text 34"/>
           <p:cNvSpPr/>
           <p:nvPr/>
         </p:nvSpPr>
@@ -6248,7 +6595,7 @@
       </p:sp>
       <p:sp>
         <p:nvSpPr>
-          <p:cNvPr id="36" name="Text 34"/>
+          <p:cNvPr id="37" name="Text 35"/>
           <p:cNvSpPr/>
           <p:nvPr/>
         </p:nvSpPr>
@@ -6276,13 +6623,13 @@
             <a:r>
               <a:rPr lang="en-US" sz="930" dirty="0">
                 <a:solidFill>
-                  <a:srgbClr val="0F172A"/>
+                  <a:srgbClr val="10161F"/>
                 </a:solidFill>
                 <a:latin typeface="Pretendard" pitchFamily="34" charset="0"/>
                 <a:ea typeface="Pretendard" pitchFamily="34" charset="-122"/>
                 <a:cs typeface="Pretendard" pitchFamily="34" charset="-120"/>
               </a:rPr>
-              <a:t>본 매물은 강남권역 대로변 입지의 우량 메디컬 테넌트 만실 운영 자산입니다.</a:t>
+              <a:t>본 매물은 강남권역 입지의 안정적 운영 자산입니다.</a:t>
             </a:r>
             <a:endParaRPr lang="en-US" sz="930" dirty="0"/>
           </a:p>
@@ -6290,65 +6637,81 @@
       </p:sp>
       <p:sp>
         <p:nvSpPr>
-          <p:cNvPr id="37" name="Text 35"/>
-          <p:cNvSpPr/>
-          <p:nvPr/>
-        </p:nvSpPr>
-        <p:spPr>
-          <a:xfrm>
-            <a:off x="566928" y="6419088"/>
-            <a:ext cx="11057839" cy="201168"/>
-          </a:xfrm>
-          <a:prstGeom prst="rect">
-            <a:avLst/>
-          </a:prstGeom>
-          <a:noFill/>
-          <a:ln/>
-        </p:spPr>
-        <p:txBody>
-          <a:bodyPr wrap="square" lIns="0" tIns="0" rIns="0" bIns="0" rtlCol="0" anchor="ctr"/>
-          <a:lstStyle/>
-          <a:p>
-            <a:pPr algn="ctr" indent="0" marL="0">
-              <a:buNone/>
-            </a:pPr>
-            <a:r>
-              <a:rPr lang="en-US" sz="750" dirty="0">
-                <a:solidFill>
-                  <a:srgbClr val="64748B"/>
+          <p:cNvPr id="38" name="Text 36"/>
+          <p:cNvSpPr/>
+          <p:nvPr/>
+        </p:nvSpPr>
+        <p:spPr>
+          <a:xfrm>
+            <a:off x="566928" y="6382512"/>
+            <a:ext cx="7315200" cy="219456"/>
+          </a:xfrm>
+          <a:prstGeom prst="rect">
+            <a:avLst/>
+          </a:prstGeom>
+          <a:noFill/>
+          <a:ln/>
+        </p:spPr>
+        <p:txBody>
+          <a:bodyPr wrap="square" lIns="0" tIns="0" rIns="0" bIns="0" rtlCol="0" anchor="ctr"/>
+          <a:lstStyle/>
+          <a:p>
+            <a:pPr indent="0" marL="0">
+              <a:buNone/>
+            </a:pPr>
+            <a:r>
+              <a:rPr lang="en-US" sz="800" dirty="0">
+                <a:solidFill>
+                  <a:srgbClr val="718096"/>
                 </a:solidFill>
                 <a:latin typeface="Pretendard" pitchFamily="34" charset="0"/>
                 <a:ea typeface="Pretendard" pitchFamily="34" charset="-122"/>
                 <a:cs typeface="Pretendard" pitchFamily="34" charset="-120"/>
               </a:rPr>
-              <a:t>크리딜  ·    ·  4</a:t>
-            </a:r>
-            <a:endParaRPr lang="en-US" sz="750" dirty="0"/>
-          </a:p>
-        </p:txBody>
-      </p:sp>
-      <p:sp>
-        <p:nvSpPr>
-          <p:cNvPr id="38" name="Shape 36"/>
-          <p:cNvSpPr/>
-          <p:nvPr/>
-        </p:nvSpPr>
-        <p:spPr>
-          <a:xfrm>
-            <a:off x="4437172" y="6382512"/>
-            <a:ext cx="3317352" cy="0"/>
-          </a:xfrm>
-          <a:prstGeom prst="line">
-            <a:avLst/>
-          </a:prstGeom>
-          <a:noFill/>
-          <a:ln w="6350">
-            <a:solidFill>
-              <a:srgbClr val="6B8E00"/>
-            </a:solidFill>
-            <a:prstDash val="solid"/>
-          </a:ln>
-        </p:spPr>
+              <a:t>크리딜   |   </a:t>
+            </a:r>
+            <a:endParaRPr lang="en-US" sz="800" dirty="0"/>
+          </a:p>
+        </p:txBody>
+      </p:sp>
+      <p:sp>
+        <p:nvSpPr>
+          <p:cNvPr id="39" name="Text 37"/>
+          <p:cNvSpPr/>
+          <p:nvPr/>
+        </p:nvSpPr>
+        <p:spPr>
+          <a:xfrm>
+            <a:off x="10710367" y="6382512"/>
+            <a:ext cx="914400" cy="219456"/>
+          </a:xfrm>
+          <a:prstGeom prst="rect">
+            <a:avLst/>
+          </a:prstGeom>
+          <a:noFill/>
+          <a:ln/>
+        </p:spPr>
+        <p:txBody>
+          <a:bodyPr wrap="square" lIns="0" tIns="0" rIns="0" bIns="0" rtlCol="0" anchor="ctr"/>
+          <a:lstStyle/>
+          <a:p>
+            <a:pPr algn="r" indent="0" marL="0">
+              <a:buNone/>
+            </a:pPr>
+            <a:r>
+              <a:rPr lang="en-US" sz="900" b="1" dirty="0">
+                <a:solidFill>
+                  <a:srgbClr val="B98A2E"/>
+                </a:solidFill>
+                <a:latin typeface="Arial" pitchFamily="34" charset="0"/>
+                <a:ea typeface="Arial" pitchFamily="34" charset="-122"/>
+                <a:cs typeface="Arial" pitchFamily="34" charset="-120"/>
+              </a:rPr>
+              <a:t>4</a:t>
+            </a:r>
+            <a:endParaRPr lang="en-US" sz="900" dirty="0"/>
+          </a:p>
+        </p:txBody>
       </p:sp>
     </p:spTree>
   </p:cSld>
@@ -6390,14 +6753,14 @@
         </p:nvSpPr>
         <p:spPr>
           <a:xfrm>
-            <a:off x="566928" y="384048"/>
-            <a:ext cx="45720" cy="566928"/>
-          </a:xfrm>
-          <a:prstGeom prst="rect">
+            <a:off x="566928" y="457200"/>
+            <a:ext cx="384048" cy="384048"/>
+          </a:xfrm>
+          <a:prstGeom prst="ellipse">
             <a:avLst/>
           </a:prstGeom>
           <a:solidFill>
-            <a:srgbClr val="6B8E00"/>
+            <a:srgbClr val="B98A2E"/>
           </a:solidFill>
           <a:ln/>
         </p:spPr>
@@ -6410,32 +6773,71 @@
         </p:nvSpPr>
         <p:spPr>
           <a:xfrm>
-            <a:off x="749808" y="384048"/>
-            <a:ext cx="10874959" cy="182880"/>
-          </a:xfrm>
-          <a:prstGeom prst="rect">
-            <a:avLst/>
-          </a:prstGeom>
-          <a:noFill/>
-          <a:ln/>
-        </p:spPr>
-        <p:txBody>
-          <a:bodyPr wrap="square" lIns="0" tIns="0" rIns="0" bIns="0" rtlCol="0" anchor="ctr"/>
-          <a:lstStyle/>
-          <a:p>
-            <a:pPr indent="0" marL="0">
-              <a:buNone/>
-            </a:pPr>
-            <a:r>
-              <a:rPr lang="en-US" sz="950" b="1" spc="200" kern="0" dirty="0">
-                <a:solidFill>
-                  <a:srgbClr val="6B8E00"/>
+            <a:off x="566928" y="457200"/>
+            <a:ext cx="384048" cy="384048"/>
+          </a:xfrm>
+          <a:prstGeom prst="rect">
+            <a:avLst/>
+          </a:prstGeom>
+          <a:noFill/>
+          <a:ln/>
+        </p:spPr>
+        <p:txBody>
+          <a:bodyPr wrap="square" lIns="0" tIns="0" rIns="0" bIns="0" rtlCol="0" anchor="ctr"/>
+          <a:lstStyle/>
+          <a:p>
+            <a:pPr algn="ctr" indent="0" marL="0">
+              <a:buNone/>
+            </a:pPr>
+            <a:r>
+              <a:rPr lang="en-US" sz="1300" b="1" dirty="0">
+                <a:solidFill>
+                  <a:srgbClr val="FFFFFF"/>
                 </a:solidFill>
                 <a:latin typeface="Arial" pitchFamily="34" charset="0"/>
                 <a:ea typeface="Arial" pitchFamily="34" charset="-122"/>
                 <a:cs typeface="Arial" pitchFamily="34" charset="-120"/>
               </a:rPr>
-              <a:t>05  Market Position</a:t>
+              <a:t>05</a:t>
+            </a:r>
+            <a:endParaRPr lang="en-US" sz="1300" dirty="0"/>
+          </a:p>
+        </p:txBody>
+      </p:sp>
+      <p:sp>
+        <p:nvSpPr>
+          <p:cNvPr id="4" name="Text 2"/>
+          <p:cNvSpPr/>
+          <p:nvPr/>
+        </p:nvSpPr>
+        <p:spPr>
+          <a:xfrm>
+            <a:off x="1133856" y="457200"/>
+            <a:ext cx="10490911" cy="182880"/>
+          </a:xfrm>
+          <a:prstGeom prst="rect">
+            <a:avLst/>
+          </a:prstGeom>
+          <a:noFill/>
+          <a:ln/>
+        </p:spPr>
+        <p:txBody>
+          <a:bodyPr wrap="square" lIns="0" tIns="0" rIns="0" bIns="0" rtlCol="0" anchor="ctr"/>
+          <a:lstStyle/>
+          <a:p>
+            <a:pPr indent="0" marL="0">
+              <a:buNone/>
+            </a:pPr>
+            <a:r>
+              <a:rPr lang="en-US" sz="950" b="1" spc="200" kern="0" dirty="0">
+                <a:solidFill>
+                  <a:srgbClr val="B98A2E"/>
+                </a:solidFill>
+                <a:latin typeface="Arial" pitchFamily="34" charset="0"/>
+                <a:ea typeface="Arial" pitchFamily="34" charset="-122"/>
+                <a:cs typeface="Arial" pitchFamily="34" charset="-120"/>
+              </a:rPr>
+              <a:t>Market Position</a:t>
             </a:r>
             <a:endParaRPr lang="en-US" sz="950" dirty="0"/>
           </a:p>
@@ -6443,14 +6845,14 @@
       </p:sp>
       <p:sp>
         <p:nvSpPr>
-          <p:cNvPr id="4" name="Text 2"/>
-          <p:cNvSpPr/>
-          <p:nvPr/>
-        </p:nvSpPr>
-        <p:spPr>
-          <a:xfrm>
-            <a:off x="749808" y="566928"/>
-            <a:ext cx="10874959" cy="384048"/>
+          <p:cNvPr id="5" name="Text 3"/>
+          <p:cNvSpPr/>
+          <p:nvPr/>
+        </p:nvSpPr>
+        <p:spPr>
+          <a:xfrm>
+            <a:off x="1133856" y="640080"/>
+            <a:ext cx="10490911" cy="365760"/>
           </a:xfrm>
           <a:prstGeom prst="rect">
             <a:avLst/>
@@ -6466,9 +6868,9 @@
               <a:buNone/>
             </a:pPr>
             <a:r>
-              <a:rPr lang="en-US" sz="2200" b="1" dirty="0">
-                <a:solidFill>
-                  <a:srgbClr val="0F172A"/>
+              <a:rPr lang="en-US" sz="2300" b="1" dirty="0">
+                <a:solidFill>
+                  <a:srgbClr val="10161F"/>
                 </a:solidFill>
                 <a:latin typeface="Pretendard" pitchFamily="34" charset="0"/>
                 <a:ea typeface="Pretendard" pitchFamily="34" charset="-122"/>
@@ -6476,13 +6878,13 @@
               </a:rPr>
               <a:t>시장 내 자산 위치와 가격 경쟁력</a:t>
             </a:r>
-            <a:endParaRPr lang="en-US" sz="2200" dirty="0"/>
-          </a:p>
-        </p:txBody>
-      </p:sp>
-      <p:sp>
-        <p:nvSpPr>
-          <p:cNvPr id="5" name="Text 3"/>
+            <a:endParaRPr lang="en-US" sz="2300" dirty="0"/>
+          </a:p>
+        </p:txBody>
+      </p:sp>
+      <p:sp>
+        <p:nvSpPr>
+          <p:cNvPr id="6" name="Text 4"/>
           <p:cNvSpPr/>
           <p:nvPr/>
         </p:nvSpPr>
@@ -6507,7 +6909,7 @@
             <a:r>
               <a:rPr lang="en-US" sz="1100" b="1" dirty="0">
                 <a:solidFill>
-                  <a:srgbClr val="0F172A"/>
+                  <a:srgbClr val="10161F"/>
                 </a:solidFill>
                 <a:latin typeface="Pretendard" pitchFamily="34" charset="0"/>
                 <a:ea typeface="Pretendard" pitchFamily="34" charset="-122"/>
@@ -6521,7 +6923,7 @@
       </p:sp>
       <p:sp>
         <p:nvSpPr>
-          <p:cNvPr id="6" name="Text 4"/>
+          <p:cNvPr id="7" name="Text 5"/>
           <p:cNvSpPr/>
           <p:nvPr/>
         </p:nvSpPr>
@@ -6549,7 +6951,7 @@
             <a:r>
               <a:rPr lang="en-US" sz="1400" dirty="0">
                 <a:solidFill>
-                  <a:srgbClr val="64748B"/>
+                  <a:srgbClr val="718096"/>
                 </a:solidFill>
                 <a:latin typeface="Pretendard" pitchFamily="34" charset="0"/>
                 <a:ea typeface="Pretendard" pitchFamily="34" charset="-122"/>
@@ -6563,7 +6965,7 @@
       </p:sp>
       <p:sp>
         <p:nvSpPr>
-          <p:cNvPr id="7" name="Text 5"/>
+          <p:cNvPr id="8" name="Text 6"/>
           <p:cNvSpPr/>
           <p:nvPr/>
         </p:nvSpPr>
@@ -6591,7 +6993,7 @@
             <a:r>
               <a:rPr lang="en-US" sz="1400" b="1" dirty="0">
                 <a:solidFill>
-                  <a:srgbClr val="0F172A"/>
+                  <a:srgbClr val="10161F"/>
                 </a:solidFill>
                 <a:latin typeface="Pretendard" pitchFamily="34" charset="0"/>
                 <a:ea typeface="Pretendard" pitchFamily="34" charset="-122"/>
@@ -6605,7 +7007,7 @@
       </p:sp>
       <p:sp>
         <p:nvSpPr>
-          <p:cNvPr id="8" name="Shape 6"/>
+          <p:cNvPr id="9" name="Shape 7"/>
           <p:cNvSpPr/>
           <p:nvPr/>
         </p:nvSpPr>
@@ -6620,7 +7022,7 @@
           <a:noFill/>
           <a:ln w="8890">
             <a:solidFill>
-              <a:srgbClr val="6B8E00"/>
+              <a:srgbClr val="B98A2E"/>
             </a:solidFill>
             <a:prstDash val="solid"/>
           </a:ln>
@@ -6628,7 +7030,7 @@
       </p:sp>
       <p:sp>
         <p:nvSpPr>
-          <p:cNvPr id="9" name="Shape 7"/>
+          <p:cNvPr id="10" name="Shape 8"/>
           <p:cNvSpPr/>
           <p:nvPr/>
         </p:nvSpPr>
@@ -6643,14 +7045,14 @@
             </a:avLst>
           </a:prstGeom>
           <a:solidFill>
-            <a:srgbClr val="DBEAFE"/>
+            <a:srgbClr val="F3EBDA"/>
           </a:solidFill>
           <a:ln/>
         </p:spPr>
       </p:sp>
       <p:sp>
         <p:nvSpPr>
-          <p:cNvPr id="10" name="Shape 8"/>
+          <p:cNvPr id="11" name="Shape 9"/>
           <p:cNvSpPr/>
           <p:nvPr/>
         </p:nvSpPr>
@@ -6663,14 +7065,14 @@
             <a:avLst/>
           </a:prstGeom>
           <a:solidFill>
-            <a:srgbClr val="1D4ED8"/>
+            <a:srgbClr val="977024"/>
           </a:solidFill>
           <a:ln/>
         </p:spPr>
       </p:sp>
       <p:sp>
         <p:nvSpPr>
-          <p:cNvPr id="11" name="Text 9"/>
+          <p:cNvPr id="12" name="Text 10"/>
           <p:cNvSpPr/>
           <p:nvPr/>
         </p:nvSpPr>
@@ -6692,147 +7094,90 @@
             <a:pPr indent="0" marL="0">
               <a:buNone/>
             </a:pPr>
-            <a:r>
-              <a:rPr lang="en-US" sz="1050" b="1" dirty="0">
-                <a:solidFill>
-                  <a:srgbClr val="1D4ED8"/>
+            <a:endParaRPr lang="en-US" sz="1050" dirty="0"/>
+          </a:p>
+        </p:txBody>
+      </p:sp>
+      <p:sp>
+        <p:nvSpPr>
+          <p:cNvPr id="13" name="Text 11"/>
+          <p:cNvSpPr/>
+          <p:nvPr/>
+        </p:nvSpPr>
+        <p:spPr>
+          <a:xfrm>
+            <a:off x="7967167" y="1975104"/>
+            <a:ext cx="3511296" cy="1700784"/>
+          </a:xfrm>
+          <a:prstGeom prst="rect">
+            <a:avLst/>
+          </a:prstGeom>
+          <a:noFill/>
+          <a:ln/>
+        </p:spPr>
+        <p:txBody>
+          <a:bodyPr wrap="square" lIns="0" tIns="0" rIns="0" bIns="0" rtlCol="0" anchor="t"/>
+          <a:lstStyle/>
+          <a:p>
+            <a:pPr indent="0" marL="0">
+              <a:lnSpc>
+                <a:spcPct val="120000"/>
+              </a:lnSpc>
+              <a:buNone/>
+            </a:pPr>
+            <a:r>
+              <a:rPr lang="en-US" sz="930" dirty="0">
+                <a:solidFill>
+                  <a:srgbClr val="10161F"/>
                 </a:solidFill>
                 <a:latin typeface="Pretendard" pitchFamily="34" charset="0"/>
                 <a:ea typeface="Pretendard" pitchFamily="34" charset="-122"/>
                 <a:cs typeface="Pretendard" pitchFamily="34" charset="-120"/>
               </a:rPr>
-              <a:t>토지 및 건물 분석 포인트</a:t>
-            </a:r>
-            <a:endParaRPr lang="en-US" sz="1050" dirty="0"/>
-          </a:p>
-        </p:txBody>
-      </p:sp>
-      <p:sp>
-        <p:nvSpPr>
-          <p:cNvPr id="12" name="Text 10"/>
-          <p:cNvSpPr/>
-          <p:nvPr/>
-        </p:nvSpPr>
-        <p:spPr>
-          <a:xfrm>
-            <a:off x="7967167" y="1975104"/>
-            <a:ext cx="3511296" cy="1700784"/>
-          </a:xfrm>
-          <a:prstGeom prst="rect">
-            <a:avLst/>
-          </a:prstGeom>
-          <a:noFill/>
-          <a:ln/>
-        </p:spPr>
-        <p:txBody>
-          <a:bodyPr wrap="square" lIns="0" tIns="0" rIns="0" bIns="0" rtlCol="0" anchor="t"/>
-          <a:lstStyle/>
-          <a:p>
-            <a:pPr marL="342900" indent="-342900">
-              <a:lnSpc>
-                <a:spcPct val="120000"/>
-              </a:lnSpc>
-              <a:buSzPct val="100000"/>
-              <a:buChar char="•"/>
-            </a:pPr>
-            <a:r>
-              <a:rPr lang="en-US" sz="930" dirty="0">
-                <a:solidFill>
-                  <a:srgbClr val="0F172A"/>
+              <a:t>{"ok":true,"mocked":true,"extractedFields":{"area_signal":"역삼","asset_type":"오피스빌딩","price_band":"300억","size_signal":"3</a:t>
+            </a:r>
+            <a:endParaRPr lang="en-US" sz="930" dirty="0"/>
+          </a:p>
+        </p:txBody>
+      </p:sp>
+      <p:sp>
+        <p:nvSpPr>
+          <p:cNvPr id="14" name="Text 12"/>
+          <p:cNvSpPr/>
+          <p:nvPr/>
+        </p:nvSpPr>
+        <p:spPr>
+          <a:xfrm>
+            <a:off x="566928" y="6382512"/>
+            <a:ext cx="7315200" cy="219456"/>
+          </a:xfrm>
+          <a:prstGeom prst="rect">
+            <a:avLst/>
+          </a:prstGeom>
+          <a:noFill/>
+          <a:ln/>
+        </p:spPr>
+        <p:txBody>
+          <a:bodyPr wrap="square" lIns="0" tIns="0" rIns="0" bIns="0" rtlCol="0" anchor="ctr"/>
+          <a:lstStyle/>
+          <a:p>
+            <a:pPr indent="0" marL="0">
+              <a:buNone/>
+            </a:pPr>
+            <a:r>
+              <a:rPr lang="en-US" sz="800" dirty="0">
+                <a:solidFill>
+                  <a:srgbClr val="718096"/>
                 </a:solidFill>
                 <a:latin typeface="Pretendard" pitchFamily="34" charset="0"/>
                 <a:ea typeface="Pretendard" pitchFamily="34" charset="-122"/>
                 <a:cs typeface="Pretendard" pitchFamily="34" charset="-120"/>
               </a:rPr>
-              <a:t>서초대로 25m 메인 도로변 우수한 가시성 확보</a:t>
-            </a:r>
-            <a:endParaRPr lang="en-US" sz="930" dirty="0"/>
-          </a:p>
-          <a:p>
-            <a:pPr marL="342900" indent="-342900">
-              <a:lnSpc>
-                <a:spcPct val="120000"/>
-              </a:lnSpc>
-              <a:buSzPct val="100000"/>
-              <a:buChar char="•"/>
-            </a:pPr>
-            <a:r>
-              <a:rPr lang="en-US" sz="930" dirty="0">
-                <a:solidFill>
-                  <a:srgbClr val="0F172A"/>
-                </a:solidFill>
-                <a:latin typeface="Pretendard" pitchFamily="34" charset="0"/>
-                <a:ea typeface="Pretendard" pitchFamily="34" charset="-122"/>
-                <a:cs typeface="Pretendard" pitchFamily="34" charset="-120"/>
-              </a:rPr>
-              <a:t>제3종일반주거지역 법정 용적률 완비 자산</a:t>
-            </a:r>
-            <a:endParaRPr lang="en-US" sz="930" dirty="0"/>
-          </a:p>
-          <a:p>
-            <a:pPr marL="342900" indent="-342900">
-              <a:lnSpc>
-                <a:spcPct val="120000"/>
-              </a:lnSpc>
-              <a:buSzPct val="100000"/>
-              <a:buChar char="•"/>
-            </a:pPr>
-            <a:r>
-              <a:rPr lang="en-US" sz="930" dirty="0">
-                <a:solidFill>
-                  <a:srgbClr val="0F172A"/>
-                </a:solidFill>
-                <a:latin typeface="Pretendard" pitchFamily="34" charset="0"/>
-                <a:ea typeface="Pretendard" pitchFamily="34" charset="-122"/>
-                <a:cs typeface="Pretendard" pitchFamily="34" charset="-120"/>
-              </a:rPr>
-              <a:t>침대용 승강기 완비로 병의원 입점 최적화 구조</a:t>
-            </a:r>
-            <a:endParaRPr lang="en-US" sz="930" dirty="0"/>
-          </a:p>
-        </p:txBody>
-      </p:sp>
-      <p:sp>
-        <p:nvSpPr>
-          <p:cNvPr id="13" name="Shape 11"/>
-          <p:cNvSpPr/>
-          <p:nvPr/>
-        </p:nvSpPr>
-        <p:spPr>
-          <a:xfrm>
-            <a:off x="7784287" y="3977640"/>
-            <a:ext cx="3840480" cy="2148840"/>
-          </a:xfrm>
-          <a:prstGeom prst="roundRect">
-            <a:avLst>
-              <a:gd name="adj" fmla="val 2553"/>
-            </a:avLst>
-          </a:prstGeom>
-          <a:solidFill>
-            <a:srgbClr val="DBEAFE"/>
-          </a:solidFill>
-          <a:ln/>
-        </p:spPr>
-      </p:sp>
-      <p:sp>
-        <p:nvSpPr>
-          <p:cNvPr id="14" name="Shape 12"/>
-          <p:cNvSpPr/>
-          <p:nvPr/>
-        </p:nvSpPr>
-        <p:spPr>
-          <a:xfrm>
-            <a:off x="7784287" y="4032504"/>
-            <a:ext cx="36576" cy="2039112"/>
-          </a:xfrm>
-          <a:prstGeom prst="rect">
-            <a:avLst/>
-          </a:prstGeom>
-          <a:solidFill>
-            <a:srgbClr val="1D4ED8"/>
-          </a:solidFill>
-          <a:ln/>
-        </p:spPr>
+              <a:t>크리딜   |   </a:t>
+            </a:r>
+            <a:endParaRPr lang="en-US" sz="800" dirty="0"/>
+          </a:p>
+        </p:txBody>
       </p:sp>
       <p:sp>
         <p:nvSpPr>
@@ -6842,183 +7187,36 @@
         </p:nvSpPr>
         <p:spPr>
           <a:xfrm>
-            <a:off x="7967167" y="4087368"/>
-            <a:ext cx="3511296" cy="201168"/>
-          </a:xfrm>
-          <a:prstGeom prst="rect">
-            <a:avLst/>
-          </a:prstGeom>
-          <a:noFill/>
-          <a:ln/>
-        </p:spPr>
-        <p:txBody>
-          <a:bodyPr wrap="square" lIns="0" tIns="0" rIns="0" bIns="0" rtlCol="0" anchor="ctr"/>
-          <a:lstStyle/>
-          <a:p>
-            <a:pPr indent="0" marL="0">
-              <a:buNone/>
-            </a:pPr>
-            <a:r>
-              <a:rPr lang="en-US" sz="1050" b="1" dirty="0">
-                <a:solidFill>
-                  <a:srgbClr val="1D4ED8"/>
-                </a:solidFill>
-                <a:latin typeface="Pretendard" pitchFamily="34" charset="0"/>
-                <a:ea typeface="Pretendard" pitchFamily="34" charset="-122"/>
-                <a:cs typeface="Pretendard" pitchFamily="34" charset="-120"/>
-              </a:rPr>
-              <a:t>물건 실사 및 관리 상태</a:t>
-            </a:r>
-            <a:endParaRPr lang="en-US" sz="1050" dirty="0"/>
-          </a:p>
-        </p:txBody>
-      </p:sp>
-      <p:sp>
-        <p:nvSpPr>
-          <p:cNvPr id="16" name="Text 14"/>
-          <p:cNvSpPr/>
-          <p:nvPr/>
-        </p:nvSpPr>
-        <p:spPr>
-          <a:xfrm>
-            <a:off x="7967167" y="4306824"/>
-            <a:ext cx="3511296" cy="1746504"/>
-          </a:xfrm>
-          <a:prstGeom prst="rect">
-            <a:avLst/>
-          </a:prstGeom>
-          <a:noFill/>
-          <a:ln/>
-        </p:spPr>
-        <p:txBody>
-          <a:bodyPr wrap="square" lIns="0" tIns="0" rIns="0" bIns="0" rtlCol="0" anchor="t"/>
-          <a:lstStyle/>
-          <a:p>
-            <a:pPr marL="342900" indent="-342900">
-              <a:lnSpc>
-                <a:spcPct val="120000"/>
-              </a:lnSpc>
-              <a:buSzPct val="100000"/>
-              <a:buChar char="•"/>
-            </a:pPr>
-            <a:r>
-              <a:rPr lang="en-US" sz="930" dirty="0">
-                <a:solidFill>
-                  <a:srgbClr val="0F172A"/>
-                </a:solidFill>
-                <a:latin typeface="Pretendard" pitchFamily="34" charset="0"/>
-                <a:ea typeface="Pretendard" pitchFamily="34" charset="-122"/>
-                <a:cs typeface="Pretendard" pitchFamily="34" charset="-120"/>
-              </a:rPr>
-              <a:t>2017년 준공 신축급 상태로 누수·균열 0건</a:t>
-            </a:r>
-            <a:endParaRPr lang="en-US" sz="930" dirty="0"/>
-          </a:p>
-          <a:p>
-            <a:pPr marL="342900" indent="-342900">
-              <a:lnSpc>
-                <a:spcPct val="120000"/>
-              </a:lnSpc>
-              <a:buSzPct val="100000"/>
-              <a:buChar char="•"/>
-            </a:pPr>
-            <a:r>
-              <a:rPr lang="en-US" sz="930" dirty="0">
-                <a:solidFill>
-                  <a:srgbClr val="0F172A"/>
-                </a:solidFill>
-                <a:latin typeface="Pretendard" pitchFamily="34" charset="0"/>
-                <a:ea typeface="Pretendard" pitchFamily="34" charset="-122"/>
-                <a:cs typeface="Pretendard" pitchFamily="34" charset="-120"/>
-              </a:rPr>
-              <a:t>단독 법인 소유로 권리관계 투명</a:t>
-            </a:r>
-            <a:endParaRPr lang="en-US" sz="930" dirty="0"/>
-          </a:p>
-          <a:p>
-            <a:pPr marL="342900" indent="-342900">
-              <a:lnSpc>
-                <a:spcPct val="120000"/>
-              </a:lnSpc>
-              <a:buSzPct val="100000"/>
-              <a:buChar char="•"/>
-            </a:pPr>
-            <a:r>
-              <a:rPr lang="en-US" sz="930" dirty="0">
-                <a:solidFill>
-                  <a:srgbClr val="0F172A"/>
-                </a:solidFill>
-                <a:latin typeface="Pretendard" pitchFamily="34" charset="0"/>
-                <a:ea typeface="Pretendard" pitchFamily="34" charset="-122"/>
-                <a:cs typeface="Pretendard" pitchFamily="34" charset="-120"/>
-              </a:rPr>
-              <a:t>1금융권 담보대출 85억 원 승계 적격</a:t>
-            </a:r>
-            <a:endParaRPr lang="en-US" sz="930" dirty="0"/>
-          </a:p>
-        </p:txBody>
-      </p:sp>
-      <p:sp>
-        <p:nvSpPr>
-          <p:cNvPr id="17" name="Text 15"/>
-          <p:cNvSpPr/>
-          <p:nvPr/>
-        </p:nvSpPr>
-        <p:spPr>
-          <a:xfrm>
-            <a:off x="566928" y="6419088"/>
-            <a:ext cx="11057839" cy="201168"/>
-          </a:xfrm>
-          <a:prstGeom prst="rect">
-            <a:avLst/>
-          </a:prstGeom>
-          <a:noFill/>
-          <a:ln/>
-        </p:spPr>
-        <p:txBody>
-          <a:bodyPr wrap="square" lIns="0" tIns="0" rIns="0" bIns="0" rtlCol="0" anchor="ctr"/>
-          <a:lstStyle/>
-          <a:p>
-            <a:pPr algn="ctr" indent="0" marL="0">
-              <a:buNone/>
-            </a:pPr>
-            <a:r>
-              <a:rPr lang="en-US" sz="750" dirty="0">
-                <a:solidFill>
-                  <a:srgbClr val="64748B"/>
-                </a:solidFill>
-                <a:latin typeface="Pretendard" pitchFamily="34" charset="0"/>
-                <a:ea typeface="Pretendard" pitchFamily="34" charset="-122"/>
-                <a:cs typeface="Pretendard" pitchFamily="34" charset="-120"/>
-              </a:rPr>
-              <a:t>크리딜  ·    ·  5</a:t>
-            </a:r>
-            <a:endParaRPr lang="en-US" sz="750" dirty="0"/>
-          </a:p>
-        </p:txBody>
-      </p:sp>
-      <p:sp>
-        <p:nvSpPr>
-          <p:cNvPr id="18" name="Shape 16"/>
-          <p:cNvSpPr/>
-          <p:nvPr/>
-        </p:nvSpPr>
-        <p:spPr>
-          <a:xfrm>
-            <a:off x="4437172" y="6382512"/>
-            <a:ext cx="3317352" cy="0"/>
-          </a:xfrm>
-          <a:prstGeom prst="line">
-            <a:avLst/>
-          </a:prstGeom>
-          <a:noFill/>
-          <a:ln w="6350">
-            <a:solidFill>
-              <a:srgbClr val="6B8E00"/>
-            </a:solidFill>
-            <a:prstDash val="solid"/>
-          </a:ln>
-        </p:spPr>
+            <a:off x="10710367" y="6382512"/>
+            <a:ext cx="914400" cy="219456"/>
+          </a:xfrm>
+          <a:prstGeom prst="rect">
+            <a:avLst/>
+          </a:prstGeom>
+          <a:noFill/>
+          <a:ln/>
+        </p:spPr>
+        <p:txBody>
+          <a:bodyPr wrap="square" lIns="0" tIns="0" rIns="0" bIns="0" rtlCol="0" anchor="ctr"/>
+          <a:lstStyle/>
+          <a:p>
+            <a:pPr algn="r" indent="0" marL="0">
+              <a:buNone/>
+            </a:pPr>
+            <a:r>
+              <a:rPr lang="en-US" sz="900" b="1" dirty="0">
+                <a:solidFill>
+                  <a:srgbClr val="B98A2E"/>
+                </a:solidFill>
+                <a:latin typeface="Arial" pitchFamily="34" charset="0"/>
+                <a:ea typeface="Arial" pitchFamily="34" charset="-122"/>
+                <a:cs typeface="Arial" pitchFamily="34" charset="-120"/>
+              </a:rPr>
+              <a:t>5</a:t>
+            </a:r>
+            <a:endParaRPr lang="en-US" sz="900" dirty="0"/>
+          </a:p>
+        </p:txBody>
       </p:sp>
     </p:spTree>
   </p:cSld>
@@ -7060,14 +7258,14 @@
         </p:nvSpPr>
         <p:spPr>
           <a:xfrm>
-            <a:off x="566928" y="384048"/>
-            <a:ext cx="45720" cy="566928"/>
-          </a:xfrm>
-          <a:prstGeom prst="rect">
+            <a:off x="566928" y="457200"/>
+            <a:ext cx="384048" cy="384048"/>
+          </a:xfrm>
+          <a:prstGeom prst="ellipse">
             <a:avLst/>
           </a:prstGeom>
           <a:solidFill>
-            <a:srgbClr val="6B8E00"/>
+            <a:srgbClr val="B98A2E"/>
           </a:solidFill>
           <a:ln/>
         </p:spPr>
@@ -7080,32 +7278,71 @@
         </p:nvSpPr>
         <p:spPr>
           <a:xfrm>
-            <a:off x="749808" y="384048"/>
-            <a:ext cx="10874959" cy="182880"/>
-          </a:xfrm>
-          <a:prstGeom prst="rect">
-            <a:avLst/>
-          </a:prstGeom>
-          <a:noFill/>
-          <a:ln/>
-        </p:spPr>
-        <p:txBody>
-          <a:bodyPr wrap="square" lIns="0" tIns="0" rIns="0" bIns="0" rtlCol="0" anchor="ctr"/>
-          <a:lstStyle/>
-          <a:p>
-            <a:pPr indent="0" marL="0">
-              <a:buNone/>
-            </a:pPr>
-            <a:r>
-              <a:rPr lang="en-US" sz="950" b="1" spc="200" kern="0" dirty="0">
-                <a:solidFill>
-                  <a:srgbClr val="6B8E00"/>
+            <a:off x="566928" y="457200"/>
+            <a:ext cx="384048" cy="384048"/>
+          </a:xfrm>
+          <a:prstGeom prst="rect">
+            <a:avLst/>
+          </a:prstGeom>
+          <a:noFill/>
+          <a:ln/>
+        </p:spPr>
+        <p:txBody>
+          <a:bodyPr wrap="square" lIns="0" tIns="0" rIns="0" bIns="0" rtlCol="0" anchor="ctr"/>
+          <a:lstStyle/>
+          <a:p>
+            <a:pPr algn="ctr" indent="0" marL="0">
+              <a:buNone/>
+            </a:pPr>
+            <a:r>
+              <a:rPr lang="en-US" sz="1300" b="1" dirty="0">
+                <a:solidFill>
+                  <a:srgbClr val="FFFFFF"/>
                 </a:solidFill>
                 <a:latin typeface="Arial" pitchFamily="34" charset="0"/>
                 <a:ea typeface="Arial" pitchFamily="34" charset="-122"/>
                 <a:cs typeface="Arial" pitchFamily="34" charset="-120"/>
               </a:rPr>
-              <a:t>06  Comps</a:t>
+              <a:t>06</a:t>
+            </a:r>
+            <a:endParaRPr lang="en-US" sz="1300" dirty="0"/>
+          </a:p>
+        </p:txBody>
+      </p:sp>
+      <p:sp>
+        <p:nvSpPr>
+          <p:cNvPr id="4" name="Text 2"/>
+          <p:cNvSpPr/>
+          <p:nvPr/>
+        </p:nvSpPr>
+        <p:spPr>
+          <a:xfrm>
+            <a:off x="1133856" y="457200"/>
+            <a:ext cx="10490911" cy="182880"/>
+          </a:xfrm>
+          <a:prstGeom prst="rect">
+            <a:avLst/>
+          </a:prstGeom>
+          <a:noFill/>
+          <a:ln/>
+        </p:spPr>
+        <p:txBody>
+          <a:bodyPr wrap="square" lIns="0" tIns="0" rIns="0" bIns="0" rtlCol="0" anchor="ctr"/>
+          <a:lstStyle/>
+          <a:p>
+            <a:pPr indent="0" marL="0">
+              <a:buNone/>
+            </a:pPr>
+            <a:r>
+              <a:rPr lang="en-US" sz="950" b="1" spc="200" kern="0" dirty="0">
+                <a:solidFill>
+                  <a:srgbClr val="B98A2E"/>
+                </a:solidFill>
+                <a:latin typeface="Arial" pitchFamily="34" charset="0"/>
+                <a:ea typeface="Arial" pitchFamily="34" charset="-122"/>
+                <a:cs typeface="Arial" pitchFamily="34" charset="-120"/>
+              </a:rPr>
+              <a:t>Comps</a:t>
             </a:r>
             <a:endParaRPr lang="en-US" sz="950" dirty="0"/>
           </a:p>
@@ -7113,14 +7350,14 @@
       </p:sp>
       <p:sp>
         <p:nvSpPr>
-          <p:cNvPr id="4" name="Text 2"/>
-          <p:cNvSpPr/>
-          <p:nvPr/>
-        </p:nvSpPr>
-        <p:spPr>
-          <a:xfrm>
-            <a:off x="749808" y="566928"/>
-            <a:ext cx="10874959" cy="384048"/>
+          <p:cNvPr id="5" name="Text 3"/>
+          <p:cNvSpPr/>
+          <p:nvPr/>
+        </p:nvSpPr>
+        <p:spPr>
+          <a:xfrm>
+            <a:off x="1133856" y="640080"/>
+            <a:ext cx="10490911" cy="365760"/>
           </a:xfrm>
           <a:prstGeom prst="rect">
             <a:avLst/>
@@ -7136,9 +7373,9 @@
               <a:buNone/>
             </a:pPr>
             <a:r>
-              <a:rPr lang="en-US" sz="2200" b="1" dirty="0">
-                <a:solidFill>
-                  <a:srgbClr val="0F172A"/>
+              <a:rPr lang="en-US" sz="2300" b="1" dirty="0">
+                <a:solidFill>
+                  <a:srgbClr val="10161F"/>
                 </a:solidFill>
                 <a:latin typeface="Pretendard" pitchFamily="34" charset="0"/>
                 <a:ea typeface="Pretendard" pitchFamily="34" charset="-122"/>
@@ -7146,13 +7383,13 @@
               </a:rPr>
               <a:t>유사 거래 사례 및 비교 분석</a:t>
             </a:r>
-            <a:endParaRPr lang="en-US" sz="2200" dirty="0"/>
-          </a:p>
-        </p:txBody>
-      </p:sp>
-      <p:sp>
-        <p:nvSpPr>
-          <p:cNvPr id="5" name="Text 3"/>
+            <a:endParaRPr lang="en-US" sz="2300" dirty="0"/>
+          </a:p>
+        </p:txBody>
+      </p:sp>
+      <p:sp>
+        <p:nvSpPr>
+          <p:cNvPr id="6" name="Text 4"/>
           <p:cNvSpPr/>
           <p:nvPr/>
         </p:nvSpPr>
@@ -7180,7 +7417,7 @@
             <a:r>
               <a:rPr lang="en-US" sz="1400" dirty="0">
                 <a:solidFill>
-                  <a:srgbClr val="64748B"/>
+                  <a:srgbClr val="718096"/>
                 </a:solidFill>
                 <a:latin typeface="Pretendard" pitchFamily="34" charset="0"/>
                 <a:ea typeface="Pretendard" pitchFamily="34" charset="-122"/>
@@ -7194,7 +7431,7 @@
       </p:sp>
       <p:sp>
         <p:nvSpPr>
-          <p:cNvPr id="6" name="Text 4"/>
+          <p:cNvPr id="7" name="Text 5"/>
           <p:cNvSpPr/>
           <p:nvPr/>
         </p:nvSpPr>
@@ -7222,7 +7459,7 @@
             <a:r>
               <a:rPr lang="en-US" sz="1400" b="1" dirty="0">
                 <a:solidFill>
-                  <a:srgbClr val="0F172A"/>
+                  <a:srgbClr val="10161F"/>
                 </a:solidFill>
                 <a:latin typeface="Pretendard" pitchFamily="34" charset="0"/>
                 <a:ea typeface="Pretendard" pitchFamily="34" charset="-122"/>
@@ -7236,65 +7473,81 @@
       </p:sp>
       <p:sp>
         <p:nvSpPr>
-          <p:cNvPr id="7" name="Text 5"/>
-          <p:cNvSpPr/>
-          <p:nvPr/>
-        </p:nvSpPr>
-        <p:spPr>
-          <a:xfrm>
-            <a:off x="566928" y="6419088"/>
-            <a:ext cx="11057839" cy="201168"/>
-          </a:xfrm>
-          <a:prstGeom prst="rect">
-            <a:avLst/>
-          </a:prstGeom>
-          <a:noFill/>
-          <a:ln/>
-        </p:spPr>
-        <p:txBody>
-          <a:bodyPr wrap="square" lIns="0" tIns="0" rIns="0" bIns="0" rtlCol="0" anchor="ctr"/>
-          <a:lstStyle/>
-          <a:p>
-            <a:pPr algn="ctr" indent="0" marL="0">
-              <a:buNone/>
-            </a:pPr>
-            <a:r>
-              <a:rPr lang="en-US" sz="750" dirty="0">
-                <a:solidFill>
-                  <a:srgbClr val="64748B"/>
+          <p:cNvPr id="8" name="Text 6"/>
+          <p:cNvSpPr/>
+          <p:nvPr/>
+        </p:nvSpPr>
+        <p:spPr>
+          <a:xfrm>
+            <a:off x="566928" y="6382512"/>
+            <a:ext cx="7315200" cy="219456"/>
+          </a:xfrm>
+          <a:prstGeom prst="rect">
+            <a:avLst/>
+          </a:prstGeom>
+          <a:noFill/>
+          <a:ln/>
+        </p:spPr>
+        <p:txBody>
+          <a:bodyPr wrap="square" lIns="0" tIns="0" rIns="0" bIns="0" rtlCol="0" anchor="ctr"/>
+          <a:lstStyle/>
+          <a:p>
+            <a:pPr indent="0" marL="0">
+              <a:buNone/>
+            </a:pPr>
+            <a:r>
+              <a:rPr lang="en-US" sz="800" dirty="0">
+                <a:solidFill>
+                  <a:srgbClr val="718096"/>
                 </a:solidFill>
                 <a:latin typeface="Pretendard" pitchFamily="34" charset="0"/>
                 <a:ea typeface="Pretendard" pitchFamily="34" charset="-122"/>
                 <a:cs typeface="Pretendard" pitchFamily="34" charset="-120"/>
               </a:rPr>
-              <a:t>크리딜  ·    ·  6</a:t>
-            </a:r>
-            <a:endParaRPr lang="en-US" sz="750" dirty="0"/>
-          </a:p>
-        </p:txBody>
-      </p:sp>
-      <p:sp>
-        <p:nvSpPr>
-          <p:cNvPr id="8" name="Shape 6"/>
-          <p:cNvSpPr/>
-          <p:nvPr/>
-        </p:nvSpPr>
-        <p:spPr>
-          <a:xfrm>
-            <a:off x="4437172" y="6382512"/>
-            <a:ext cx="3317352" cy="0"/>
-          </a:xfrm>
-          <a:prstGeom prst="line">
-            <a:avLst/>
-          </a:prstGeom>
-          <a:noFill/>
-          <a:ln w="6350">
-            <a:solidFill>
-              <a:srgbClr val="6B8E00"/>
-            </a:solidFill>
-            <a:prstDash val="solid"/>
-          </a:ln>
-        </p:spPr>
+              <a:t>크리딜   |   </a:t>
+            </a:r>
+            <a:endParaRPr lang="en-US" sz="800" dirty="0"/>
+          </a:p>
+        </p:txBody>
+      </p:sp>
+      <p:sp>
+        <p:nvSpPr>
+          <p:cNvPr id="9" name="Text 7"/>
+          <p:cNvSpPr/>
+          <p:nvPr/>
+        </p:nvSpPr>
+        <p:spPr>
+          <a:xfrm>
+            <a:off x="10710367" y="6382512"/>
+            <a:ext cx="914400" cy="219456"/>
+          </a:xfrm>
+          <a:prstGeom prst="rect">
+            <a:avLst/>
+          </a:prstGeom>
+          <a:noFill/>
+          <a:ln/>
+        </p:spPr>
+        <p:txBody>
+          <a:bodyPr wrap="square" lIns="0" tIns="0" rIns="0" bIns="0" rtlCol="0" anchor="ctr"/>
+          <a:lstStyle/>
+          <a:p>
+            <a:pPr algn="r" indent="0" marL="0">
+              <a:buNone/>
+            </a:pPr>
+            <a:r>
+              <a:rPr lang="en-US" sz="900" b="1" dirty="0">
+                <a:solidFill>
+                  <a:srgbClr val="B98A2E"/>
+                </a:solidFill>
+                <a:latin typeface="Arial" pitchFamily="34" charset="0"/>
+                <a:ea typeface="Arial" pitchFamily="34" charset="-122"/>
+                <a:cs typeface="Arial" pitchFamily="34" charset="-120"/>
+              </a:rPr>
+              <a:t>6</a:t>
+            </a:r>
+            <a:endParaRPr lang="en-US" sz="900" dirty="0"/>
+          </a:p>
+        </p:txBody>
       </p:sp>
     </p:spTree>
   </p:cSld>
@@ -7336,14 +7589,14 @@
         </p:nvSpPr>
         <p:spPr>
           <a:xfrm>
-            <a:off x="566928" y="384048"/>
-            <a:ext cx="45720" cy="566928"/>
-          </a:xfrm>
-          <a:prstGeom prst="rect">
+            <a:off x="566928" y="457200"/>
+            <a:ext cx="384048" cy="384048"/>
+          </a:xfrm>
+          <a:prstGeom prst="ellipse">
             <a:avLst/>
           </a:prstGeom>
           <a:solidFill>
-            <a:srgbClr val="6B8E00"/>
+            <a:srgbClr val="B98A2E"/>
           </a:solidFill>
           <a:ln/>
         </p:spPr>
@@ -7356,32 +7609,71 @@
         </p:nvSpPr>
         <p:spPr>
           <a:xfrm>
-            <a:off x="749808" y="384048"/>
-            <a:ext cx="10874959" cy="182880"/>
-          </a:xfrm>
-          <a:prstGeom prst="rect">
-            <a:avLst/>
-          </a:prstGeom>
-          <a:noFill/>
-          <a:ln/>
-        </p:spPr>
-        <p:txBody>
-          <a:bodyPr wrap="square" lIns="0" tIns="0" rIns="0" bIns="0" rtlCol="0" anchor="ctr"/>
-          <a:lstStyle/>
-          <a:p>
-            <a:pPr indent="0" marL="0">
-              <a:buNone/>
-            </a:pPr>
-            <a:r>
-              <a:rPr lang="en-US" sz="950" b="1" spc="200" kern="0" dirty="0">
-                <a:solidFill>
-                  <a:srgbClr val="6B8E00"/>
+            <a:off x="566928" y="457200"/>
+            <a:ext cx="384048" cy="384048"/>
+          </a:xfrm>
+          <a:prstGeom prst="rect">
+            <a:avLst/>
+          </a:prstGeom>
+          <a:noFill/>
+          <a:ln/>
+        </p:spPr>
+        <p:txBody>
+          <a:bodyPr wrap="square" lIns="0" tIns="0" rIns="0" bIns="0" rtlCol="0" anchor="ctr"/>
+          <a:lstStyle/>
+          <a:p>
+            <a:pPr algn="ctr" indent="0" marL="0">
+              <a:buNone/>
+            </a:pPr>
+            <a:r>
+              <a:rPr lang="en-US" sz="1300" b="1" dirty="0">
+                <a:solidFill>
+                  <a:srgbClr val="FFFFFF"/>
                 </a:solidFill>
                 <a:latin typeface="Arial" pitchFamily="34" charset="0"/>
                 <a:ea typeface="Arial" pitchFamily="34" charset="-122"/>
                 <a:cs typeface="Arial" pitchFamily="34" charset="-120"/>
               </a:rPr>
-              <a:t>07  Risk</a:t>
+              <a:t>07</a:t>
+            </a:r>
+            <a:endParaRPr lang="en-US" sz="1300" dirty="0"/>
+          </a:p>
+        </p:txBody>
+      </p:sp>
+      <p:sp>
+        <p:nvSpPr>
+          <p:cNvPr id="4" name="Text 2"/>
+          <p:cNvSpPr/>
+          <p:nvPr/>
+        </p:nvSpPr>
+        <p:spPr>
+          <a:xfrm>
+            <a:off x="1133856" y="457200"/>
+            <a:ext cx="10490911" cy="182880"/>
+          </a:xfrm>
+          <a:prstGeom prst="rect">
+            <a:avLst/>
+          </a:prstGeom>
+          <a:noFill/>
+          <a:ln/>
+        </p:spPr>
+        <p:txBody>
+          <a:bodyPr wrap="square" lIns="0" tIns="0" rIns="0" bIns="0" rtlCol="0" anchor="ctr"/>
+          <a:lstStyle/>
+          <a:p>
+            <a:pPr indent="0" marL="0">
+              <a:buNone/>
+            </a:pPr>
+            <a:r>
+              <a:rPr lang="en-US" sz="950" b="1" spc="200" kern="0" dirty="0">
+                <a:solidFill>
+                  <a:srgbClr val="B98A2E"/>
+                </a:solidFill>
+                <a:latin typeface="Arial" pitchFamily="34" charset="0"/>
+                <a:ea typeface="Arial" pitchFamily="34" charset="-122"/>
+                <a:cs typeface="Arial" pitchFamily="34" charset="-120"/>
+              </a:rPr>
+              <a:t>Risk</a:t>
             </a:r>
             <a:endParaRPr lang="en-US" sz="950" dirty="0"/>
           </a:p>
@@ -7389,14 +7681,14 @@
       </p:sp>
       <p:sp>
         <p:nvSpPr>
-          <p:cNvPr id="4" name="Text 2"/>
-          <p:cNvSpPr/>
-          <p:nvPr/>
-        </p:nvSpPr>
-        <p:spPr>
-          <a:xfrm>
-            <a:off x="749808" y="566928"/>
-            <a:ext cx="10874959" cy="384048"/>
+          <p:cNvPr id="5" name="Text 3"/>
+          <p:cNvSpPr/>
+          <p:nvPr/>
+        </p:nvSpPr>
+        <p:spPr>
+          <a:xfrm>
+            <a:off x="1133856" y="640080"/>
+            <a:ext cx="10490911" cy="365760"/>
           </a:xfrm>
           <a:prstGeom prst="rect">
             <a:avLst/>
@@ -7412,9 +7704,9 @@
               <a:buNone/>
             </a:pPr>
             <a:r>
-              <a:rPr lang="en-US" sz="2200" b="1" dirty="0">
-                <a:solidFill>
-                  <a:srgbClr val="0F172A"/>
+              <a:rPr lang="en-US" sz="2300" b="1" dirty="0">
+                <a:solidFill>
+                  <a:srgbClr val="10161F"/>
                 </a:solidFill>
                 <a:latin typeface="Pretendard" pitchFamily="34" charset="0"/>
                 <a:ea typeface="Pretendard" pitchFamily="34" charset="-122"/>
@@ -7422,30 +7714,32 @@
               </a:rPr>
               <a:t>리스크는 무엇이고 대응책은 있는가</a:t>
             </a:r>
-            <a:endParaRPr lang="en-US" sz="2200" dirty="0"/>
-          </a:p>
-        </p:txBody>
-      </p:sp>
-      <p:sp>
-        <p:nvSpPr>
-          <p:cNvPr id="5" name="Shape 3"/>
+            <a:endParaRPr lang="en-US" sz="2300" dirty="0"/>
+          </a:p>
+        </p:txBody>
+      </p:sp>
+      <p:sp>
+        <p:nvSpPr>
+          <p:cNvPr id="6" name="Shape 4"/>
           <p:cNvSpPr/>
           <p:nvPr/>
         </p:nvSpPr>
         <p:spPr>
           <a:xfrm>
             <a:off x="566928" y="1417320"/>
-            <a:ext cx="3503066" cy="3611880"/>
-          </a:xfrm>
-          <a:prstGeom prst="rect">
-            <a:avLst/>
+            <a:ext cx="11057839" cy="3611880"/>
+          </a:xfrm>
+          <a:prstGeom prst="roundRect">
+            <a:avLst>
+              <a:gd name="adj" fmla="val 1519"/>
+            </a:avLst>
           </a:prstGeom>
           <a:solidFill>
-            <a:srgbClr val="F8FAFC"/>
+            <a:srgbClr val="F7FAFC"/>
           </a:solidFill>
-          <a:ln w="3810">
+          <a:ln w="6350">
             <a:solidFill>
-              <a:srgbClr val="CBD5E1"/>
+              <a:srgbClr val="CBD5E0"/>
             </a:solidFill>
             <a:prstDash val="solid"/>
           </a:ln>
@@ -7453,46 +7747,26 @@
       </p:sp>
       <p:sp>
         <p:nvSpPr>
-          <p:cNvPr id="6" name="Shape 4"/>
+          <p:cNvPr id="7" name="Shape 5"/>
           <p:cNvSpPr/>
           <p:nvPr/>
         </p:nvSpPr>
         <p:spPr>
           <a:xfrm>
             <a:off x="566928" y="1417320"/>
-            <a:ext cx="3503066" cy="36576"/>
+            <a:ext cx="11057839" cy="45720"/>
           </a:xfrm>
           <a:prstGeom prst="rect">
             <a:avLst/>
           </a:prstGeom>
           <a:solidFill>
-            <a:srgbClr val="6B8E00"/>
+            <a:srgbClr val="B98A2E"/>
           </a:solidFill>
           <a:ln/>
         </p:spPr>
       </p:sp>
       <p:sp>
         <p:nvSpPr>
-          <p:cNvPr id="7" name="Shape 5"/>
-          <p:cNvSpPr/>
-          <p:nvPr/>
-        </p:nvSpPr>
-        <p:spPr>
-          <a:xfrm>
-            <a:off x="566928" y="1417320"/>
-            <a:ext cx="3503066" cy="45720"/>
-          </a:xfrm>
-          <a:prstGeom prst="rect">
-            <a:avLst/>
-          </a:prstGeom>
-          <a:solidFill>
-            <a:srgbClr val="6B8E00"/>
-          </a:solidFill>
-          <a:ln/>
-        </p:spPr>
-      </p:sp>
-      <p:sp>
-        <p:nvSpPr>
           <p:cNvPr id="8" name="Text 6"/>
           <p:cNvSpPr/>
           <p:nvPr/>
@@ -7500,7 +7774,7 @@
         <p:spPr>
           <a:xfrm>
             <a:off x="795528" y="1618488"/>
-            <a:ext cx="3045866" cy="292608"/>
+            <a:ext cx="10600639" cy="292608"/>
           </a:xfrm>
           <a:prstGeom prst="rect">
             <a:avLst/>
@@ -7518,7 +7792,7 @@
             <a:r>
               <a:rPr lang="en-US" sz="1350" b="1" dirty="0">
                 <a:solidFill>
-                  <a:srgbClr val="4F6A00"/>
+                  <a:srgbClr val="977024"/>
                 </a:solidFill>
                 <a:latin typeface="Pretendard" pitchFamily="34" charset="0"/>
                 <a:ea typeface="Pretendard" pitchFamily="34" charset="-122"/>
@@ -7538,26 +7812,28 @@
         </p:nvSpPr>
         <p:spPr>
           <a:xfrm>
-            <a:off x="795528" y="1929384"/>
-            <a:ext cx="3045866" cy="347472"/>
-          </a:xfrm>
-          <a:prstGeom prst="rect">
-            <a:avLst/>
-          </a:prstGeom>
-          <a:noFill/>
-          <a:ln/>
-        </p:spPr>
-        <p:txBody>
-          <a:bodyPr wrap="square" lIns="0" tIns="0" rIns="0" bIns="0" rtlCol="0" anchor="ctr"/>
+            <a:off x="795528" y="1911096"/>
+            <a:ext cx="10600639" cy="402336"/>
+          </a:xfrm>
+          <a:prstGeom prst="rect">
+            <a:avLst/>
+          </a:prstGeom>
+          <a:noFill/>
+          <a:ln/>
+        </p:spPr>
+        <p:txBody>
+          <a:bodyPr wrap="square" lIns="0" tIns="0" rIns="0" bIns="0" rtlCol="0" anchor="ctr">
+            <a:normAutofit/>
+          </a:bodyPr>
           <a:lstStyle/>
           <a:p>
             <a:pPr indent="0" marL="0">
               <a:buNone/>
             </a:pPr>
             <a:r>
-              <a:rPr lang="en-US" sz="1500" b="1" dirty="0">
-                <a:solidFill>
-                  <a:srgbClr val="0F172A"/>
+              <a:rPr lang="en-US" sz="1350" b="1" dirty="0">
+                <a:solidFill>
+                  <a:srgbClr val="10161F"/>
                 </a:solidFill>
                 <a:latin typeface="Pretendard" pitchFamily="34" charset="0"/>
                 <a:ea typeface="Pretendard" pitchFamily="34" charset="-122"/>
@@ -7565,7 +7841,7 @@
               </a:rPr>
               <a:t>—</a:t>
             </a:r>
-            <a:endParaRPr lang="en-US" sz="1500" dirty="0"/>
+            <a:endParaRPr lang="en-US" sz="1350" dirty="0"/>
           </a:p>
         </p:txBody>
       </p:sp>
@@ -7577,27 +7853,32 @@
         </p:nvSpPr>
         <p:spPr>
           <a:xfrm>
-            <a:off x="795528" y="2313432"/>
-            <a:ext cx="3045866" cy="2606040"/>
-          </a:xfrm>
-          <a:prstGeom prst="rect">
-            <a:avLst/>
-          </a:prstGeom>
-          <a:noFill/>
-          <a:ln/>
-        </p:spPr>
-        <p:txBody>
-          <a:bodyPr wrap="square" lIns="0" tIns="0" rIns="0" bIns="0" rtlCol="0" anchor="t"/>
+            <a:off x="795528" y="2377440"/>
+            <a:ext cx="10600639" cy="2560320"/>
+          </a:xfrm>
+          <a:prstGeom prst="rect">
+            <a:avLst/>
+          </a:prstGeom>
+          <a:noFill/>
+          <a:ln/>
+        </p:spPr>
+        <p:txBody>
+          <a:bodyPr wrap="square" lIns="0" tIns="0" rIns="0" bIns="0" rtlCol="0" anchor="t">
+            <a:normAutofit/>
+          </a:bodyPr>
           <a:lstStyle/>
           <a:p>
             <a:pPr marL="342900" indent="-342900">
+              <a:lnSpc>
+                <a:spcPct val="125000"/>
+              </a:lnSpc>
               <a:buSzPct val="100000"/>
               <a:buChar char="•"/>
             </a:pPr>
             <a:r>
-              <a:rPr lang="en-US" sz="1250" dirty="0">
-                <a:solidFill>
-                  <a:srgbClr val="0F172A"/>
+              <a:rPr lang="en-US" sz="1200" dirty="0">
+                <a:solidFill>
+                  <a:srgbClr val="10161F"/>
                 </a:solidFill>
                 <a:latin typeface="Pretendard" pitchFamily="34" charset="0"/>
                 <a:ea typeface="Pretendard" pitchFamily="34" charset="-122"/>
@@ -7605,7 +7886,7 @@
               </a:rPr>
               <a:t>{"ok":true,"mocked":true,"extractedFields":{"area_signal":"역삼","asset_type":"오피스빌딩","price_band":"300억","size_signal":"3000평(약 9917.4㎡)"},"extractedFacts":{"region":"역삼","exactAddressCandidate":"역삼동 7</a:t>
             </a:r>
-            <a:endParaRPr lang="en-US" sz="1250" dirty="0"/>
+            <a:endParaRPr lang="en-US" sz="1200" dirty="0"/>
           </a:p>
         </p:txBody>
       </p:sp>
@@ -7617,59 +7898,75 @@
         </p:nvSpPr>
         <p:spPr>
           <a:xfrm>
-            <a:off x="566928" y="6419088"/>
-            <a:ext cx="11057839" cy="201168"/>
-          </a:xfrm>
-          <a:prstGeom prst="rect">
-            <a:avLst/>
-          </a:prstGeom>
-          <a:noFill/>
-          <a:ln/>
-        </p:spPr>
-        <p:txBody>
-          <a:bodyPr wrap="square" lIns="0" tIns="0" rIns="0" bIns="0" rtlCol="0" anchor="ctr"/>
-          <a:lstStyle/>
-          <a:p>
-            <a:pPr algn="ctr" indent="0" marL="0">
-              <a:buNone/>
-            </a:pPr>
-            <a:r>
-              <a:rPr lang="en-US" sz="750" dirty="0">
-                <a:solidFill>
-                  <a:srgbClr val="64748B"/>
+            <a:off x="566928" y="6382512"/>
+            <a:ext cx="7315200" cy="219456"/>
+          </a:xfrm>
+          <a:prstGeom prst="rect">
+            <a:avLst/>
+          </a:prstGeom>
+          <a:noFill/>
+          <a:ln/>
+        </p:spPr>
+        <p:txBody>
+          <a:bodyPr wrap="square" lIns="0" tIns="0" rIns="0" bIns="0" rtlCol="0" anchor="ctr"/>
+          <a:lstStyle/>
+          <a:p>
+            <a:pPr indent="0" marL="0">
+              <a:buNone/>
+            </a:pPr>
+            <a:r>
+              <a:rPr lang="en-US" sz="800" dirty="0">
+                <a:solidFill>
+                  <a:srgbClr val="718096"/>
                 </a:solidFill>
                 <a:latin typeface="Pretendard" pitchFamily="34" charset="0"/>
                 <a:ea typeface="Pretendard" pitchFamily="34" charset="-122"/>
                 <a:cs typeface="Pretendard" pitchFamily="34" charset="-120"/>
               </a:rPr>
-              <a:t>크리딜  ·    ·  7</a:t>
-            </a:r>
-            <a:endParaRPr lang="en-US" sz="750" dirty="0"/>
-          </a:p>
-        </p:txBody>
-      </p:sp>
-      <p:sp>
-        <p:nvSpPr>
-          <p:cNvPr id="12" name="Shape 10"/>
-          <p:cNvSpPr/>
-          <p:nvPr/>
-        </p:nvSpPr>
-        <p:spPr>
-          <a:xfrm>
-            <a:off x="4437172" y="6382512"/>
-            <a:ext cx="3317352" cy="0"/>
-          </a:xfrm>
-          <a:prstGeom prst="line">
-            <a:avLst/>
-          </a:prstGeom>
-          <a:noFill/>
-          <a:ln w="6350">
-            <a:solidFill>
-              <a:srgbClr val="6B8E00"/>
-            </a:solidFill>
-            <a:prstDash val="solid"/>
-          </a:ln>
-        </p:spPr>
+              <a:t>크리딜   |   </a:t>
+            </a:r>
+            <a:endParaRPr lang="en-US" sz="800" dirty="0"/>
+          </a:p>
+        </p:txBody>
+      </p:sp>
+      <p:sp>
+        <p:nvSpPr>
+          <p:cNvPr id="12" name="Text 10"/>
+          <p:cNvSpPr/>
+          <p:nvPr/>
+        </p:nvSpPr>
+        <p:spPr>
+          <a:xfrm>
+            <a:off x="10710367" y="6382512"/>
+            <a:ext cx="914400" cy="219456"/>
+          </a:xfrm>
+          <a:prstGeom prst="rect">
+            <a:avLst/>
+          </a:prstGeom>
+          <a:noFill/>
+          <a:ln/>
+        </p:spPr>
+        <p:txBody>
+          <a:bodyPr wrap="square" lIns="0" tIns="0" rIns="0" bIns="0" rtlCol="0" anchor="ctr"/>
+          <a:lstStyle/>
+          <a:p>
+            <a:pPr algn="r" indent="0" marL="0">
+              <a:buNone/>
+            </a:pPr>
+            <a:r>
+              <a:rPr lang="en-US" sz="900" b="1" dirty="0">
+                <a:solidFill>
+                  <a:srgbClr val="B98A2E"/>
+                </a:solidFill>
+                <a:latin typeface="Arial" pitchFamily="34" charset="0"/>
+                <a:ea typeface="Arial" pitchFamily="34" charset="-122"/>
+                <a:cs typeface="Arial" pitchFamily="34" charset="-120"/>
+              </a:rPr>
+              <a:t>7</a:t>
+            </a:r>
+            <a:endParaRPr lang="en-US" sz="900" dirty="0"/>
+          </a:p>
+        </p:txBody>
       </p:sp>
     </p:spTree>
   </p:cSld>
@@ -7711,14 +8008,14 @@
         </p:nvSpPr>
         <p:spPr>
           <a:xfrm>
-            <a:off x="566928" y="384048"/>
-            <a:ext cx="45720" cy="786384"/>
-          </a:xfrm>
-          <a:prstGeom prst="rect">
+            <a:off x="566928" y="457200"/>
+            <a:ext cx="384048" cy="384048"/>
+          </a:xfrm>
+          <a:prstGeom prst="ellipse">
             <a:avLst/>
           </a:prstGeom>
           <a:solidFill>
-            <a:srgbClr val="6B8E00"/>
+            <a:srgbClr val="B98A2E"/>
           </a:solidFill>
           <a:ln/>
         </p:spPr>
@@ -7731,32 +8028,71 @@
         </p:nvSpPr>
         <p:spPr>
           <a:xfrm>
-            <a:off x="749808" y="384048"/>
-            <a:ext cx="10874959" cy="182880"/>
-          </a:xfrm>
-          <a:prstGeom prst="rect">
-            <a:avLst/>
-          </a:prstGeom>
-          <a:noFill/>
-          <a:ln/>
-        </p:spPr>
-        <p:txBody>
-          <a:bodyPr wrap="square" lIns="0" tIns="0" rIns="0" bIns="0" rtlCol="0" anchor="ctr"/>
-          <a:lstStyle/>
-          <a:p>
-            <a:pPr indent="0" marL="0">
-              <a:buNone/>
-            </a:pPr>
-            <a:r>
-              <a:rPr lang="en-US" sz="950" b="1" spc="200" kern="0" dirty="0">
-                <a:solidFill>
-                  <a:srgbClr val="6B8E00"/>
+            <a:off x="566928" y="457200"/>
+            <a:ext cx="384048" cy="384048"/>
+          </a:xfrm>
+          <a:prstGeom prst="rect">
+            <a:avLst/>
+          </a:prstGeom>
+          <a:noFill/>
+          <a:ln/>
+        </p:spPr>
+        <p:txBody>
+          <a:bodyPr wrap="square" lIns="0" tIns="0" rIns="0" bIns="0" rtlCol="0" anchor="ctr"/>
+          <a:lstStyle/>
+          <a:p>
+            <a:pPr algn="ctr" indent="0" marL="0">
+              <a:buNone/>
+            </a:pPr>
+            <a:r>
+              <a:rPr lang="en-US" sz="1300" b="1" dirty="0">
+                <a:solidFill>
+                  <a:srgbClr val="FFFFFF"/>
                 </a:solidFill>
                 <a:latin typeface="Arial" pitchFamily="34" charset="0"/>
                 <a:ea typeface="Arial" pitchFamily="34" charset="-122"/>
                 <a:cs typeface="Arial" pitchFamily="34" charset="-120"/>
               </a:rPr>
-              <a:t>08  Thesis</a:t>
+              <a:t>08</a:t>
+            </a:r>
+            <a:endParaRPr lang="en-US" sz="1300" dirty="0"/>
+          </a:p>
+        </p:txBody>
+      </p:sp>
+      <p:sp>
+        <p:nvSpPr>
+          <p:cNvPr id="4" name="Text 2"/>
+          <p:cNvSpPr/>
+          <p:nvPr/>
+        </p:nvSpPr>
+        <p:spPr>
+          <a:xfrm>
+            <a:off x="1133856" y="457200"/>
+            <a:ext cx="10490911" cy="182880"/>
+          </a:xfrm>
+          <a:prstGeom prst="rect">
+            <a:avLst/>
+          </a:prstGeom>
+          <a:noFill/>
+          <a:ln/>
+        </p:spPr>
+        <p:txBody>
+          <a:bodyPr wrap="square" lIns="0" tIns="0" rIns="0" bIns="0" rtlCol="0" anchor="ctr"/>
+          <a:lstStyle/>
+          <a:p>
+            <a:pPr indent="0" marL="0">
+              <a:buNone/>
+            </a:pPr>
+            <a:r>
+              <a:rPr lang="en-US" sz="950" b="1" spc="200" kern="0" dirty="0">
+                <a:solidFill>
+                  <a:srgbClr val="B98A2E"/>
+                </a:solidFill>
+                <a:latin typeface="Arial" pitchFamily="34" charset="0"/>
+                <a:ea typeface="Arial" pitchFamily="34" charset="-122"/>
+                <a:cs typeface="Arial" pitchFamily="34" charset="-120"/>
+              </a:rPr>
+              <a:t>Thesis</a:t>
             </a:r>
             <a:endParaRPr lang="en-US" sz="950" dirty="0"/>
           </a:p>
@@ -7764,14 +8100,14 @@
       </p:sp>
       <p:sp>
         <p:nvSpPr>
-          <p:cNvPr id="4" name="Text 2"/>
-          <p:cNvSpPr/>
-          <p:nvPr/>
-        </p:nvSpPr>
-        <p:spPr>
-          <a:xfrm>
-            <a:off x="749808" y="566928"/>
-            <a:ext cx="10874959" cy="384048"/>
+          <p:cNvPr id="5" name="Text 3"/>
+          <p:cNvSpPr/>
+          <p:nvPr/>
+        </p:nvSpPr>
+        <p:spPr>
+          <a:xfrm>
+            <a:off x="1133856" y="640080"/>
+            <a:ext cx="10490911" cy="365760"/>
           </a:xfrm>
           <a:prstGeom prst="rect">
             <a:avLst/>
@@ -7787,9 +8123,9 @@
               <a:buNone/>
             </a:pPr>
             <a:r>
-              <a:rPr lang="en-US" sz="2200" b="1" dirty="0">
-                <a:solidFill>
-                  <a:srgbClr val="0F172A"/>
+              <a:rPr lang="en-US" sz="2300" b="1" dirty="0">
+                <a:solidFill>
+                  <a:srgbClr val="10161F"/>
                 </a:solidFill>
                 <a:latin typeface="Pretendard" pitchFamily="34" charset="0"/>
                 <a:ea typeface="Pretendard" pitchFamily="34" charset="-122"/>
@@ -7797,20 +8133,20 @@
               </a:rPr>
               <a:t>왜 지금 이 빌딩을 사야 하는가</a:t>
             </a:r>
-            <a:endParaRPr lang="en-US" sz="2200" dirty="0"/>
-          </a:p>
-        </p:txBody>
-      </p:sp>
-      <p:sp>
-        <p:nvSpPr>
-          <p:cNvPr id="5" name="Text 3"/>
-          <p:cNvSpPr/>
-          <p:nvPr/>
-        </p:nvSpPr>
-        <p:spPr>
-          <a:xfrm>
-            <a:off x="749808" y="950976"/>
-            <a:ext cx="10874959" cy="219456"/>
+            <a:endParaRPr lang="en-US" sz="2300" dirty="0"/>
+          </a:p>
+        </p:txBody>
+      </p:sp>
+      <p:sp>
+        <p:nvSpPr>
+          <p:cNvPr id="6" name="Text 4"/>
+          <p:cNvSpPr/>
+          <p:nvPr/>
+        </p:nvSpPr>
+        <p:spPr>
+          <a:xfrm>
+            <a:off x="1133856" y="1005840"/>
+            <a:ext cx="10490911" cy="237744"/>
           </a:xfrm>
           <a:prstGeom prst="rect">
             <a:avLst/>
@@ -7826,665 +8162,1149 @@
               <a:buNone/>
             </a:pPr>
             <a:r>
-              <a:rPr lang="en-US" sz="1050" dirty="0">
-                <a:solidFill>
-                  <a:srgbClr val="64748B"/>
+              <a:rPr lang="en-US" sz="1100" dirty="0">
+                <a:solidFill>
+                  <a:srgbClr val="718096"/>
                 </a:solidFill>
                 <a:latin typeface="Pretendard" pitchFamily="34" charset="0"/>
                 <a:ea typeface="Pretendard" pitchFamily="34" charset="-122"/>
                 <a:cs typeface="Pretendard" pitchFamily="34" charset="-120"/>
               </a:rPr>
-              <a:t>3대 핵심 투자 포인트 (Investment Highlights)</a:t>
-            </a:r>
-            <a:endParaRPr lang="en-US" sz="1050" dirty="0"/>
-          </a:p>
-        </p:txBody>
-      </p:sp>
-      <p:sp>
-        <p:nvSpPr>
-          <p:cNvPr id="6" name="Shape 4"/>
-          <p:cNvSpPr/>
-          <p:nvPr/>
-        </p:nvSpPr>
-        <p:spPr>
-          <a:xfrm>
-            <a:off x="566928" y="1481328"/>
-            <a:ext cx="3472586" cy="3474720"/>
-          </a:xfrm>
-          <a:prstGeom prst="roundRect">
-            <a:avLst>
-              <a:gd name="adj" fmla="val 2107"/>
-            </a:avLst>
-          </a:prstGeom>
-          <a:solidFill>
-            <a:srgbClr val="F8FAFC"/>
-          </a:solidFill>
-          <a:ln w="10160">
-            <a:solidFill>
-              <a:srgbClr val="CBD5E1"/>
-            </a:solidFill>
-            <a:prstDash val="solid"/>
-          </a:ln>
-        </p:spPr>
-      </p:sp>
-      <p:sp>
-        <p:nvSpPr>
-          <p:cNvPr id="7" name="Shape 5"/>
-          <p:cNvSpPr/>
-          <p:nvPr/>
-        </p:nvSpPr>
-        <p:spPr>
-          <a:xfrm>
-            <a:off x="566928" y="1481328"/>
-            <a:ext cx="3472586" cy="54864"/>
-          </a:xfrm>
-          <a:prstGeom prst="rect">
-            <a:avLst/>
-          </a:prstGeom>
-          <a:solidFill>
-            <a:srgbClr val="6B8E00"/>
-          </a:solidFill>
-          <a:ln/>
-        </p:spPr>
-      </p:sp>
-      <p:sp>
-        <p:nvSpPr>
-          <p:cNvPr id="8" name="Shape 6"/>
-          <p:cNvSpPr/>
-          <p:nvPr/>
-        </p:nvSpPr>
-        <p:spPr>
-          <a:xfrm>
-            <a:off x="795528" y="1755648"/>
-            <a:ext cx="475488" cy="292608"/>
-          </a:xfrm>
-          <a:prstGeom prst="roundRect">
-            <a:avLst>
-              <a:gd name="adj" fmla="val 12500"/>
-            </a:avLst>
-          </a:prstGeom>
-          <a:solidFill>
-            <a:srgbClr val="A3D900"/>
-          </a:solidFill>
-          <a:ln/>
-        </p:spPr>
-      </p:sp>
-      <p:sp>
-        <p:nvSpPr>
-          <p:cNvPr id="9" name="Text 7"/>
-          <p:cNvSpPr/>
-          <p:nvPr/>
-        </p:nvSpPr>
-        <p:spPr>
-          <a:xfrm>
-            <a:off x="795528" y="1755648"/>
-            <a:ext cx="475488" cy="292608"/>
-          </a:xfrm>
-          <a:prstGeom prst="rect">
-            <a:avLst/>
-          </a:prstGeom>
-          <a:noFill/>
-          <a:ln/>
-        </p:spPr>
-        <p:txBody>
-          <a:bodyPr wrap="square" lIns="0" tIns="0" rIns="0" bIns="0" rtlCol="0" anchor="ctr"/>
-          <a:lstStyle/>
-          <a:p>
-            <a:pPr algn="ctr" indent="0" marL="0">
-              <a:buNone/>
-            </a:pPr>
-            <a:r>
-              <a:rPr lang="en-US" sz="1100" b="1" dirty="0">
-                <a:solidFill>
-                  <a:srgbClr val="4F6A00"/>
-                </a:solidFill>
-                <a:latin typeface="Arial" pitchFamily="34" charset="0"/>
-                <a:ea typeface="Arial" pitchFamily="34" charset="-122"/>
-                <a:cs typeface="Arial" pitchFamily="34" charset="-120"/>
-              </a:rPr>
-              <a:t>01</a:t>
+              <a:t>밸류업 시나리오 (AI 추정)</a:t>
             </a:r>
             <a:endParaRPr lang="en-US" sz="1100" dirty="0"/>
           </a:p>
         </p:txBody>
       </p:sp>
-      <p:sp>
-        <p:nvSpPr>
-          <p:cNvPr id="10" name="Text 8"/>
-          <p:cNvSpPr/>
-          <p:nvPr/>
-        </p:nvSpPr>
-        <p:spPr>
-          <a:xfrm>
-            <a:off x="795528" y="2194560"/>
-            <a:ext cx="3015386" cy="365760"/>
-          </a:xfrm>
-          <a:prstGeom prst="rect">
-            <a:avLst/>
-          </a:prstGeom>
-          <a:noFill/>
-          <a:ln/>
-        </p:spPr>
-        <p:txBody>
-          <a:bodyPr wrap="square" lIns="0" tIns="0" rIns="0" bIns="0" rtlCol="0" anchor="t"/>
-          <a:lstStyle/>
-          <a:p>
-            <a:pPr indent="0" marL="0">
-              <a:buNone/>
-            </a:pPr>
-            <a:r>
-              <a:rPr lang="en-US" sz="1500" b="1" dirty="0">
-                <a:solidFill>
-                  <a:srgbClr val="0F172A"/>
-                </a:solidFill>
-                <a:latin typeface="Pretendard" pitchFamily="34" charset="0"/>
-                <a:ea typeface="Pretendard" pitchFamily="34" charset="-122"/>
-                <a:cs typeface="Pretendard" pitchFamily="34" charset="-120"/>
-              </a:rPr>
-              <a:t>원금 안전판 확보</a:t>
-            </a:r>
-            <a:endParaRPr lang="en-US" sz="1500" dirty="0"/>
-          </a:p>
-        </p:txBody>
-      </p:sp>
-      <p:sp>
-        <p:nvSpPr>
-          <p:cNvPr id="11" name="Shape 9"/>
-          <p:cNvSpPr/>
-          <p:nvPr/>
-        </p:nvSpPr>
-        <p:spPr>
-          <a:xfrm>
-            <a:off x="795528" y="2624328"/>
-            <a:ext cx="3015386" cy="0"/>
-          </a:xfrm>
-          <a:prstGeom prst="line">
-            <a:avLst/>
-          </a:prstGeom>
-          <a:noFill/>
-          <a:ln w="6350">
-            <a:solidFill>
-              <a:srgbClr val="CBD5E1"/>
-            </a:solidFill>
-            <a:prstDash val="solid"/>
-          </a:ln>
-        </p:spPr>
-      </p:sp>
-      <p:sp>
-        <p:nvSpPr>
-          <p:cNvPr id="12" name="Text 10"/>
-          <p:cNvSpPr/>
-          <p:nvPr/>
-        </p:nvSpPr>
-        <p:spPr>
-          <a:xfrm>
-            <a:off x="795528" y="2779776"/>
-            <a:ext cx="3015386" cy="1965960"/>
-          </a:xfrm>
-          <a:prstGeom prst="rect">
-            <a:avLst/>
-          </a:prstGeom>
-          <a:noFill/>
-          <a:ln/>
-        </p:spPr>
-        <p:txBody>
-          <a:bodyPr wrap="square" lIns="0" tIns="0" rIns="0" bIns="0" rtlCol="0" anchor="t"/>
-          <a:lstStyle/>
-          <a:p>
-            <a:pPr indent="0" marL="0">
-              <a:lnSpc>
-                <a:spcPct val="130000"/>
-              </a:lnSpc>
-              <a:buNone/>
-            </a:pPr>
-            <a:r>
-              <a:rPr lang="en-US" sz="1200" dirty="0">
-                <a:solidFill>
-                  <a:srgbClr val="0F172A"/>
-                </a:solidFill>
-                <a:latin typeface="Pretendard" pitchFamily="34" charset="0"/>
-                <a:ea typeface="Pretendard" pitchFamily="34" charset="-122"/>
-                <a:cs typeface="Pretendard" pitchFamily="34" charset="-120"/>
-              </a:rPr>
-              <a:t>강남권역의 핵심 입지로, 우량한 대지 지분 가치가 하방 경직성을 강력히 지지합니다.</a:t>
-            </a:r>
-            <a:endParaRPr lang="en-US" sz="1200" dirty="0"/>
-          </a:p>
-        </p:txBody>
-      </p:sp>
-      <p:sp>
-        <p:nvSpPr>
-          <p:cNvPr id="13" name="Shape 11"/>
-          <p:cNvSpPr/>
-          <p:nvPr/>
-        </p:nvSpPr>
-        <p:spPr>
-          <a:xfrm>
-            <a:off x="4359554" y="1481328"/>
-            <a:ext cx="3472586" cy="3474720"/>
-          </a:xfrm>
-          <a:prstGeom prst="roundRect">
-            <a:avLst>
-              <a:gd name="adj" fmla="val 2107"/>
-            </a:avLst>
-          </a:prstGeom>
-          <a:solidFill>
-            <a:srgbClr val="F8FAFC"/>
-          </a:solidFill>
-          <a:ln w="10160">
-            <a:solidFill>
-              <a:srgbClr val="CBD5E1"/>
-            </a:solidFill>
-            <a:prstDash val="solid"/>
-          </a:ln>
-        </p:spPr>
-      </p:sp>
-      <p:sp>
-        <p:nvSpPr>
-          <p:cNvPr id="14" name="Shape 12"/>
-          <p:cNvSpPr/>
-          <p:nvPr/>
-        </p:nvSpPr>
-        <p:spPr>
-          <a:xfrm>
-            <a:off x="4359554" y="1481328"/>
-            <a:ext cx="3472586" cy="54864"/>
-          </a:xfrm>
-          <a:prstGeom prst="rect">
-            <a:avLst/>
-          </a:prstGeom>
-          <a:solidFill>
-            <a:srgbClr val="6B8E00"/>
-          </a:solidFill>
-          <a:ln/>
-        </p:spPr>
-      </p:sp>
-      <p:sp>
-        <p:nvSpPr>
-          <p:cNvPr id="15" name="Shape 13"/>
-          <p:cNvSpPr/>
-          <p:nvPr/>
-        </p:nvSpPr>
-        <p:spPr>
-          <a:xfrm>
-            <a:off x="4588154" y="1755648"/>
-            <a:ext cx="475488" cy="292608"/>
-          </a:xfrm>
-          <a:prstGeom prst="roundRect">
-            <a:avLst>
-              <a:gd name="adj" fmla="val 12500"/>
-            </a:avLst>
-          </a:prstGeom>
-          <a:solidFill>
-            <a:srgbClr val="A3D900"/>
-          </a:solidFill>
-          <a:ln/>
-        </p:spPr>
-      </p:sp>
-      <p:sp>
-        <p:nvSpPr>
-          <p:cNvPr id="16" name="Text 14"/>
-          <p:cNvSpPr/>
-          <p:nvPr/>
-        </p:nvSpPr>
-        <p:spPr>
-          <a:xfrm>
-            <a:off x="4588154" y="1755648"/>
-            <a:ext cx="475488" cy="292608"/>
-          </a:xfrm>
-          <a:prstGeom prst="rect">
-            <a:avLst/>
-          </a:prstGeom>
-          <a:noFill/>
-          <a:ln/>
-        </p:spPr>
-        <p:txBody>
-          <a:bodyPr wrap="square" lIns="0" tIns="0" rIns="0" bIns="0" rtlCol="0" anchor="ctr"/>
-          <a:lstStyle/>
-          <a:p>
-            <a:pPr algn="ctr" indent="0" marL="0">
-              <a:buNone/>
-            </a:pPr>
-            <a:r>
-              <a:rPr lang="en-US" sz="1100" b="1" dirty="0">
-                <a:solidFill>
-                  <a:srgbClr val="4F6A00"/>
-                </a:solidFill>
-                <a:latin typeface="Arial" pitchFamily="34" charset="0"/>
-                <a:ea typeface="Arial" pitchFamily="34" charset="-122"/>
-                <a:cs typeface="Arial" pitchFamily="34" charset="-120"/>
-              </a:rPr>
-              <a:t>02</a:t>
-            </a:r>
-            <a:endParaRPr lang="en-US" sz="1100" dirty="0"/>
-          </a:p>
-        </p:txBody>
-      </p:sp>
-      <p:sp>
-        <p:nvSpPr>
-          <p:cNvPr id="17" name="Text 15"/>
-          <p:cNvSpPr/>
-          <p:nvPr/>
-        </p:nvSpPr>
-        <p:spPr>
-          <a:xfrm>
-            <a:off x="4588154" y="2194560"/>
-            <a:ext cx="3015386" cy="365760"/>
-          </a:xfrm>
-          <a:prstGeom prst="rect">
-            <a:avLst/>
-          </a:prstGeom>
-          <a:noFill/>
-          <a:ln/>
-        </p:spPr>
-        <p:txBody>
-          <a:bodyPr wrap="square" lIns="0" tIns="0" rIns="0" bIns="0" rtlCol="0" anchor="t"/>
-          <a:lstStyle/>
-          <a:p>
-            <a:pPr indent="0" marL="0">
-              <a:buNone/>
-            </a:pPr>
-            <a:r>
-              <a:rPr lang="en-US" sz="1500" b="1" dirty="0">
-                <a:solidFill>
-                  <a:srgbClr val="0F172A"/>
-                </a:solidFill>
-                <a:latin typeface="Pretendard" pitchFamily="34" charset="0"/>
-                <a:ea typeface="Pretendard" pitchFamily="34" charset="-122"/>
-                <a:cs typeface="Pretendard" pitchFamily="34" charset="-120"/>
-              </a:rPr>
-              <a:t>확실한 월 현금흐름</a:t>
-            </a:r>
-            <a:endParaRPr lang="en-US" sz="1500" dirty="0"/>
-          </a:p>
-        </p:txBody>
-      </p:sp>
-      <p:sp>
-        <p:nvSpPr>
-          <p:cNvPr id="18" name="Shape 16"/>
-          <p:cNvSpPr/>
-          <p:nvPr/>
-        </p:nvSpPr>
-        <p:spPr>
-          <a:xfrm>
-            <a:off x="4588154" y="2624328"/>
-            <a:ext cx="3015386" cy="0"/>
-          </a:xfrm>
-          <a:prstGeom prst="line">
-            <a:avLst/>
-          </a:prstGeom>
-          <a:noFill/>
-          <a:ln w="6350">
-            <a:solidFill>
-              <a:srgbClr val="CBD5E1"/>
-            </a:solidFill>
-            <a:prstDash val="solid"/>
-          </a:ln>
-        </p:spPr>
-      </p:sp>
-      <p:sp>
-        <p:nvSpPr>
-          <p:cNvPr id="19" name="Text 17"/>
-          <p:cNvSpPr/>
-          <p:nvPr/>
-        </p:nvSpPr>
-        <p:spPr>
-          <a:xfrm>
-            <a:off x="4588154" y="2779776"/>
-            <a:ext cx="3015386" cy="1965960"/>
-          </a:xfrm>
-          <a:prstGeom prst="rect">
-            <a:avLst/>
-          </a:prstGeom>
-          <a:noFill/>
-          <a:ln/>
-        </p:spPr>
-        <p:txBody>
-          <a:bodyPr wrap="square" lIns="0" tIns="0" rIns="0" bIns="0" rtlCol="0" anchor="t"/>
-          <a:lstStyle/>
-          <a:p>
-            <a:pPr indent="0" marL="0">
-              <a:lnSpc>
-                <a:spcPct val="130000"/>
-              </a:lnSpc>
-              <a:buNone/>
-            </a:pPr>
-            <a:r>
-              <a:rPr lang="en-US" sz="1200" dirty="0">
-                <a:solidFill>
-                  <a:srgbClr val="0F172A"/>
-                </a:solidFill>
-                <a:latin typeface="Pretendard" pitchFamily="34" charset="0"/>
-                <a:ea typeface="Pretendard" pitchFamily="34" charset="-122"/>
-                <a:cs typeface="Pretendard" pitchFamily="34" charset="-120"/>
-              </a:rPr>
-              <a:t>우량 테넌트 만실 운영 및 장기 계약 구조를 통해 매월 안정적인 순수익 창출이 검토 여지가 있으나, 관련 법규·인허가·시설 요건의 현장 확인이 필요합니다..</a:t>
-            </a:r>
-            <a:endParaRPr lang="en-US" sz="1200" dirty="0"/>
-          </a:p>
-        </p:txBody>
-      </p:sp>
-      <p:sp>
-        <p:nvSpPr>
-          <p:cNvPr id="20" name="Shape 18"/>
-          <p:cNvSpPr/>
-          <p:nvPr/>
-        </p:nvSpPr>
-        <p:spPr>
-          <a:xfrm>
-            <a:off x="8152181" y="1481328"/>
-            <a:ext cx="3472586" cy="3474720"/>
-          </a:xfrm>
-          <a:prstGeom prst="roundRect">
-            <a:avLst>
-              <a:gd name="adj" fmla="val 2107"/>
-            </a:avLst>
-          </a:prstGeom>
-          <a:solidFill>
-            <a:srgbClr val="F8FAFC"/>
-          </a:solidFill>
-          <a:ln w="10160">
-            <a:solidFill>
-              <a:srgbClr val="CBD5E1"/>
-            </a:solidFill>
-            <a:prstDash val="solid"/>
-          </a:ln>
-        </p:spPr>
-      </p:sp>
-      <p:sp>
-        <p:nvSpPr>
-          <p:cNvPr id="21" name="Shape 19"/>
-          <p:cNvSpPr/>
-          <p:nvPr/>
-        </p:nvSpPr>
-        <p:spPr>
-          <a:xfrm>
-            <a:off x="8152181" y="1481328"/>
-            <a:ext cx="3472586" cy="54864"/>
-          </a:xfrm>
-          <a:prstGeom prst="rect">
-            <a:avLst/>
-          </a:prstGeom>
-          <a:solidFill>
-            <a:srgbClr val="6B8E00"/>
-          </a:solidFill>
-          <a:ln/>
-        </p:spPr>
-      </p:sp>
-      <p:sp>
-        <p:nvSpPr>
-          <p:cNvPr id="22" name="Shape 20"/>
-          <p:cNvSpPr/>
-          <p:nvPr/>
-        </p:nvSpPr>
-        <p:spPr>
-          <a:xfrm>
-            <a:off x="8380781" y="1755648"/>
-            <a:ext cx="475488" cy="292608"/>
-          </a:xfrm>
-          <a:prstGeom prst="roundRect">
-            <a:avLst>
-              <a:gd name="adj" fmla="val 12500"/>
-            </a:avLst>
-          </a:prstGeom>
-          <a:solidFill>
-            <a:srgbClr val="A3D900"/>
-          </a:solidFill>
-          <a:ln/>
-        </p:spPr>
-      </p:sp>
-      <p:sp>
-        <p:nvSpPr>
-          <p:cNvPr id="23" name="Text 21"/>
-          <p:cNvSpPr/>
-          <p:nvPr/>
-        </p:nvSpPr>
-        <p:spPr>
-          <a:xfrm>
-            <a:off x="8380781" y="1755648"/>
-            <a:ext cx="475488" cy="292608"/>
-          </a:xfrm>
-          <a:prstGeom prst="rect">
-            <a:avLst/>
-          </a:prstGeom>
-          <a:noFill/>
-          <a:ln/>
-        </p:spPr>
-        <p:txBody>
-          <a:bodyPr wrap="square" lIns="0" tIns="0" rIns="0" bIns="0" rtlCol="0" anchor="ctr"/>
-          <a:lstStyle/>
-          <a:p>
-            <a:pPr algn="ctr" indent="0" marL="0">
-              <a:buNone/>
-            </a:pPr>
-            <a:r>
-              <a:rPr lang="en-US" sz="1100" b="1" dirty="0">
-                <a:solidFill>
-                  <a:srgbClr val="4F6A00"/>
-                </a:solidFill>
-                <a:latin typeface="Arial" pitchFamily="34" charset="0"/>
-                <a:ea typeface="Arial" pitchFamily="34" charset="-122"/>
-                <a:cs typeface="Arial" pitchFamily="34" charset="-120"/>
-              </a:rPr>
-              <a:t>03</a:t>
-            </a:r>
-            <a:endParaRPr lang="en-US" sz="1100" dirty="0"/>
-          </a:p>
-        </p:txBody>
-      </p:sp>
-      <p:sp>
-        <p:nvSpPr>
-          <p:cNvPr id="24" name="Text 22"/>
-          <p:cNvSpPr/>
-          <p:nvPr/>
-        </p:nvSpPr>
-        <p:spPr>
-          <a:xfrm>
-            <a:off x="8380781" y="2194560"/>
-            <a:ext cx="3015386" cy="365760"/>
-          </a:xfrm>
-          <a:prstGeom prst="rect">
-            <a:avLst/>
-          </a:prstGeom>
-          <a:noFill/>
-          <a:ln/>
-        </p:spPr>
-        <p:txBody>
-          <a:bodyPr wrap="square" lIns="0" tIns="0" rIns="0" bIns="0" rtlCol="0" anchor="t"/>
-          <a:lstStyle/>
-          <a:p>
-            <a:pPr indent="0" marL="0">
-              <a:buNone/>
-            </a:pPr>
-            <a:r>
-              <a:rPr lang="en-US" sz="1500" b="1" dirty="0">
-                <a:solidFill>
-                  <a:srgbClr val="0F172A"/>
-                </a:solidFill>
-                <a:latin typeface="Pretendard" pitchFamily="34" charset="0"/>
-                <a:ea typeface="Pretendard" pitchFamily="34" charset="-122"/>
-                <a:cs typeface="Pretendard" pitchFamily="34" charset="-120"/>
-              </a:rPr>
-              <a:t>가치 상승 및 출구 전략</a:t>
-            </a:r>
-            <a:endParaRPr lang="en-US" sz="1500" dirty="0"/>
-          </a:p>
-        </p:txBody>
-      </p:sp>
-      <p:sp>
-        <p:nvSpPr>
-          <p:cNvPr id="25" name="Shape 23"/>
-          <p:cNvSpPr/>
-          <p:nvPr/>
-        </p:nvSpPr>
-        <p:spPr>
-          <a:xfrm>
-            <a:off x="8380781" y="2624328"/>
-            <a:ext cx="3015386" cy="0"/>
-          </a:xfrm>
-          <a:prstGeom prst="line">
-            <a:avLst/>
-          </a:prstGeom>
-          <a:noFill/>
-          <a:ln w="6350">
-            <a:solidFill>
-              <a:srgbClr val="CBD5E1"/>
-            </a:solidFill>
-            <a:prstDash val="solid"/>
-          </a:ln>
-        </p:spPr>
-      </p:sp>
-      <p:sp>
-        <p:nvSpPr>
-          <p:cNvPr id="26" name="Text 24"/>
-          <p:cNvSpPr/>
-          <p:nvPr/>
-        </p:nvSpPr>
-        <p:spPr>
-          <a:xfrm>
-            <a:off x="8380781" y="2779776"/>
-            <a:ext cx="3015386" cy="1965960"/>
-          </a:xfrm>
-          <a:prstGeom prst="rect">
-            <a:avLst/>
-          </a:prstGeom>
-          <a:noFill/>
-          <a:ln/>
-        </p:spPr>
-        <p:txBody>
-          <a:bodyPr wrap="square" lIns="0" tIns="0" rIns="0" bIns="0" rtlCol="0" anchor="t"/>
-          <a:lstStyle/>
-          <a:p>
-            <a:pPr indent="0" marL="0">
-              <a:lnSpc>
-                <a:spcPct val="130000"/>
-              </a:lnSpc>
-              <a:buNone/>
-            </a:pPr>
-            <a:r>
-              <a:rPr lang="en-US" sz="1200" dirty="0">
-                <a:solidFill>
-                  <a:srgbClr val="0F172A"/>
-                </a:solidFill>
-                <a:latin typeface="Pretendard" pitchFamily="34" charset="0"/>
-                <a:ea typeface="Pretendard" pitchFamily="34" charset="-122"/>
-                <a:cs typeface="Pretendard" pitchFamily="34" charset="-120"/>
-              </a:rPr>
-              <a:t>현행 공법 여력을 활용한 밸류업 기회와 더불어 향후 권역 지가 상승에 따른 시세차익 실현이 유력합니다.</a:t>
-            </a:r>
-            <a:endParaRPr lang="en-US" sz="1200" dirty="0"/>
-          </a:p>
-        </p:txBody>
-      </p:sp>
-      <p:sp>
-        <p:nvSpPr>
-          <p:cNvPr id="27" name="Shape 25"/>
-          <p:cNvSpPr/>
-          <p:nvPr/>
-        </p:nvSpPr>
-        <p:spPr>
-          <a:xfrm>
-            <a:off x="566928" y="5138928"/>
+      <p:graphicFrame>
+        <p:nvGraphicFramePr>
+          <p:cNvPr id="9" name="Table 0"/>
+          <p:cNvGraphicFramePr>
+            <a:graphicFrameLocks noGrp="1"/>
+          </p:cNvGraphicFramePr>
+          <p:nvPr>
+            <p:extLst>
+              <p:ext uri="{D42A27DB-BD31-4B8C-83A1-F6EECF244321}">
+                <p14:modId xmlns:p14="http://schemas.microsoft.com/office/powerpoint/2010/main" val="1579011935"/>
+              </p:ext>
+            </p:extLst>
+          </p:nvPr>
+        </p:nvGraphicFramePr>
+        <p:xfrm>
+          <a:off x="566928" y="4178808"/>
+          <a:ext cx="11057839" cy="914400"/>
+        </p:xfrm>
+        <a:graphic>
+          <a:graphicData uri="http://schemas.openxmlformats.org/drawingml/2006/table">
+            <a:tbl>
+              <a:tblPr/>
+              <a:tblGrid>
+                <a:gridCol w="2764460"/>
+                <a:gridCol w="2764460"/>
+                <a:gridCol w="2764460"/>
+                <a:gridCol w="2764460"/>
+              </a:tblGrid>
+              <a:tr h="329184">
+                <a:tc>
+                  <a:txBody>
+                    <a:bodyPr/>
+                    <a:lstStyle/>
+                    <a:p>
+                      <a:pPr indent="0" marL="0">
+                        <a:buNone/>
+                      </a:pPr>
+                      <a:r>
+                        <a:rPr lang="en-US" sz="1050" b="1" dirty="0">
+                          <a:solidFill>
+                            <a:srgbClr val="718096"/>
+                          </a:solidFill>
+                          <a:latin typeface="Pretendard" pitchFamily="34" charset="0"/>
+                          <a:ea typeface="Pretendard" pitchFamily="34" charset="-122"/>
+                          <a:cs typeface="Pretendard" pitchFamily="34" charset="-120"/>
+                        </a:rPr>
+                        <a:t>시나리오</a:t>
+                      </a:r>
+                      <a:endParaRPr lang="en-US" sz="1050" dirty="0">
+                        <a:latin typeface="Pretendard" charset="0"/>
+                        <a:ea typeface="Pretendard" charset="0"/>
+                        <a:cs typeface="Pretendard" charset="0"/>
+                      </a:endParaRPr>
+                    </a:p>
+                  </a:txBody>
+                  <a:tcPr marL="50800" marR="50800" marT="25400" marB="25400" anchor="ctr">
+                    <a:lnL w="3810" cap="flat" cmpd="sng" algn="ctr">
+                      <a:solidFill>
+                        <a:srgbClr val="CBD5E0"/>
+                      </a:solidFill>
+                      <a:prstDash val="solid"/>
+                      <a:round/>
+                      <a:headEnd type="none" w="med" len="med"/>
+                      <a:tailEnd type="none" w="med" len="med"/>
+                    </a:lnL>
+                    <a:lnR w="3810" cap="flat" cmpd="sng" algn="ctr">
+                      <a:solidFill>
+                        <a:srgbClr val="CBD5E0"/>
+                      </a:solidFill>
+                      <a:prstDash val="solid"/>
+                      <a:round/>
+                      <a:headEnd type="none" w="med" len="med"/>
+                      <a:tailEnd type="none" w="med" len="med"/>
+                    </a:lnR>
+                    <a:lnT w="3810" cap="flat" cmpd="sng" algn="ctr">
+                      <a:solidFill>
+                        <a:srgbClr val="CBD5E0"/>
+                      </a:solidFill>
+                      <a:prstDash val="solid"/>
+                      <a:round/>
+                      <a:headEnd type="none" w="med" len="med"/>
+                      <a:tailEnd type="none" w="med" len="med"/>
+                    </a:lnT>
+                    <a:lnB w="3810" cap="flat" cmpd="sng" algn="ctr">
+                      <a:solidFill>
+                        <a:srgbClr val="CBD5E0"/>
+                      </a:solidFill>
+                      <a:prstDash val="solid"/>
+                      <a:round/>
+                      <a:headEnd type="none" w="med" len="med"/>
+                      <a:tailEnd type="none" w="med" len="med"/>
+                    </a:lnB>
+                    <a:solidFill>
+                      <a:srgbClr val="F7FAFC"/>
+                    </a:solidFill>
+                  </a:tcPr>
+                </a:tc>
+                <a:tc>
+                  <a:txBody>
+                    <a:bodyPr/>
+                    <a:lstStyle/>
+                    <a:p>
+                      <a:pPr indent="0" marL="0">
+                        <a:buNone/>
+                      </a:pPr>
+                      <a:r>
+                        <a:rPr lang="en-US" sz="1050" b="1" dirty="0">
+                          <a:solidFill>
+                            <a:srgbClr val="718096"/>
+                          </a:solidFill>
+                          <a:latin typeface="Pretendard" pitchFamily="34" charset="0"/>
+                          <a:ea typeface="Pretendard" pitchFamily="34" charset="-122"/>
+                          <a:cs typeface="Pretendard" pitchFamily="34" charset="-120"/>
+                        </a:rPr>
+                        <a:t>NOI </a:t>
+                      </a:r>
+                      <a:pPr indent="0" marL="0">
+                        <a:buNone/>
+                      </a:pPr>
+                      <a:r>
+                        <a:rPr lang="en-US" sz="1050" b="1" dirty="0">
+                          <a:solidFill>
+                            <a:srgbClr val="718096"/>
+                          </a:solidFill>
+                          <a:latin typeface="Pretendard" pitchFamily="34" charset="0"/>
+                          <a:ea typeface="Pretendard" pitchFamily="34" charset="-122"/>
+                          <a:cs typeface="Pretendard" pitchFamily="34" charset="-120"/>
+                        </a:rPr>
+                        <a:t>개선</a:t>
+                      </a:r>
+                      <a:endParaRPr lang="en-US" sz="1050" dirty="0">
+                        <a:latin typeface="Pretendard" charset="0"/>
+                        <a:ea typeface="Pretendard" charset="0"/>
+                        <a:cs typeface="Pretendard" charset="0"/>
+                      </a:endParaRPr>
+                    </a:p>
+                  </a:txBody>
+                  <a:tcPr marL="50800" marR="50800" marT="25400" marB="25400" anchor="ctr">
+                    <a:lnL w="3810" cap="flat" cmpd="sng" algn="ctr">
+                      <a:solidFill>
+                        <a:srgbClr val="CBD5E0"/>
+                      </a:solidFill>
+                      <a:prstDash val="solid"/>
+                      <a:round/>
+                      <a:headEnd type="none" w="med" len="med"/>
+                      <a:tailEnd type="none" w="med" len="med"/>
+                    </a:lnL>
+                    <a:lnR w="3810" cap="flat" cmpd="sng" algn="ctr">
+                      <a:solidFill>
+                        <a:srgbClr val="CBD5E0"/>
+                      </a:solidFill>
+                      <a:prstDash val="solid"/>
+                      <a:round/>
+                      <a:headEnd type="none" w="med" len="med"/>
+                      <a:tailEnd type="none" w="med" len="med"/>
+                    </a:lnR>
+                    <a:lnT w="3810" cap="flat" cmpd="sng" algn="ctr">
+                      <a:solidFill>
+                        <a:srgbClr val="CBD5E0"/>
+                      </a:solidFill>
+                      <a:prstDash val="solid"/>
+                      <a:round/>
+                      <a:headEnd type="none" w="med" len="med"/>
+                      <a:tailEnd type="none" w="med" len="med"/>
+                    </a:lnT>
+                    <a:lnB w="3810" cap="flat" cmpd="sng" algn="ctr">
+                      <a:solidFill>
+                        <a:srgbClr val="CBD5E0"/>
+                      </a:solidFill>
+                      <a:prstDash val="solid"/>
+                      <a:round/>
+                      <a:headEnd type="none" w="med" len="med"/>
+                      <a:tailEnd type="none" w="med" len="med"/>
+                    </a:lnB>
+                    <a:solidFill>
+                      <a:srgbClr val="F7FAFC"/>
+                    </a:solidFill>
+                  </a:tcPr>
+                </a:tc>
+                <a:tc>
+                  <a:txBody>
+                    <a:bodyPr/>
+                    <a:lstStyle/>
+                    <a:p>
+                      <a:pPr indent="0" marL="0">
+                        <a:buNone/>
+                      </a:pPr>
+                      <a:r>
+                        <a:rPr lang="en-US" sz="1050" b="1" dirty="0">
+                          <a:solidFill>
+                            <a:srgbClr val="718096"/>
+                          </a:solidFill>
+                          <a:latin typeface="Pretendard" pitchFamily="34" charset="0"/>
+                          <a:ea typeface="Pretendard" pitchFamily="34" charset="-122"/>
+                          <a:cs typeface="Pretendard" pitchFamily="34" charset="-120"/>
+                        </a:rPr>
+                        <a:t>개선 </a:t>
+                      </a:r>
+                      <a:pPr indent="0" marL="0">
+                        <a:buNone/>
+                      </a:pPr>
+                      <a:r>
+                        <a:rPr lang="en-US" sz="1050" b="1" dirty="0">
+                          <a:solidFill>
+                            <a:srgbClr val="718096"/>
+                          </a:solidFill>
+                          <a:latin typeface="Pretendard" pitchFamily="34" charset="0"/>
+                          <a:ea typeface="Pretendard" pitchFamily="34" charset="-122"/>
+                          <a:cs typeface="Pretendard" pitchFamily="34" charset="-120"/>
+                        </a:rPr>
+                        <a:t>Cap </a:t>
+                      </a:r>
+                      <a:pPr indent="0" marL="0">
+                        <a:buNone/>
+                      </a:pPr>
+                      <a:r>
+                        <a:rPr lang="en-US" sz="1050" b="1" dirty="0">
+                          <a:solidFill>
+                            <a:srgbClr val="718096"/>
+                          </a:solidFill>
+                          <a:latin typeface="Pretendard" pitchFamily="34" charset="0"/>
+                          <a:ea typeface="Pretendard" pitchFamily="34" charset="-122"/>
+                          <a:cs typeface="Pretendard" pitchFamily="34" charset="-120"/>
+                        </a:rPr>
+                        <a:t>Rate</a:t>
+                      </a:r>
+                      <a:endParaRPr lang="en-US" sz="1050" dirty="0">
+                        <a:latin typeface="Pretendard" charset="0"/>
+                        <a:ea typeface="Pretendard" charset="0"/>
+                        <a:cs typeface="Pretendard" charset="0"/>
+                      </a:endParaRPr>
+                    </a:p>
+                  </a:txBody>
+                  <a:tcPr marL="50800" marR="50800" marT="25400" marB="25400" anchor="ctr">
+                    <a:lnL w="3810" cap="flat" cmpd="sng" algn="ctr">
+                      <a:solidFill>
+                        <a:srgbClr val="CBD5E0"/>
+                      </a:solidFill>
+                      <a:prstDash val="solid"/>
+                      <a:round/>
+                      <a:headEnd type="none" w="med" len="med"/>
+                      <a:tailEnd type="none" w="med" len="med"/>
+                    </a:lnL>
+                    <a:lnR w="3810" cap="flat" cmpd="sng" algn="ctr">
+                      <a:solidFill>
+                        <a:srgbClr val="CBD5E0"/>
+                      </a:solidFill>
+                      <a:prstDash val="solid"/>
+                      <a:round/>
+                      <a:headEnd type="none" w="med" len="med"/>
+                      <a:tailEnd type="none" w="med" len="med"/>
+                    </a:lnR>
+                    <a:lnT w="3810" cap="flat" cmpd="sng" algn="ctr">
+                      <a:solidFill>
+                        <a:srgbClr val="CBD5E0"/>
+                      </a:solidFill>
+                      <a:prstDash val="solid"/>
+                      <a:round/>
+                      <a:headEnd type="none" w="med" len="med"/>
+                      <a:tailEnd type="none" w="med" len="med"/>
+                    </a:lnT>
+                    <a:lnB w="3810" cap="flat" cmpd="sng" algn="ctr">
+                      <a:solidFill>
+                        <a:srgbClr val="CBD5E0"/>
+                      </a:solidFill>
+                      <a:prstDash val="solid"/>
+                      <a:round/>
+                      <a:headEnd type="none" w="med" len="med"/>
+                      <a:tailEnd type="none" w="med" len="med"/>
+                    </a:lnB>
+                    <a:solidFill>
+                      <a:srgbClr val="F7FAFC"/>
+                    </a:solidFill>
+                  </a:tcPr>
+                </a:tc>
+                <a:tc>
+                  <a:txBody>
+                    <a:bodyPr/>
+                    <a:lstStyle/>
+                    <a:p>
+                      <a:pPr indent="0" marL="0">
+                        <a:buNone/>
+                      </a:pPr>
+                      <a:r>
+                        <a:rPr lang="en-US" sz="1050" b="1" dirty="0">
+                          <a:solidFill>
+                            <a:srgbClr val="718096"/>
+                          </a:solidFill>
+                          <a:latin typeface="Pretendard" pitchFamily="34" charset="0"/>
+                          <a:ea typeface="Pretendard" pitchFamily="34" charset="-122"/>
+                          <a:cs typeface="Pretendard" pitchFamily="34" charset="-120"/>
+                        </a:rPr>
+                        <a:t>투자 </a:t>
+                      </a:r>
+                      <a:pPr indent="0" marL="0">
+                        <a:buNone/>
+                      </a:pPr>
+                      <a:r>
+                        <a:rPr lang="en-US" sz="1050" b="1" dirty="0">
+                          <a:solidFill>
+                            <a:srgbClr val="718096"/>
+                          </a:solidFill>
+                          <a:latin typeface="Pretendard" pitchFamily="34" charset="0"/>
+                          <a:ea typeface="Pretendard" pitchFamily="34" charset="-122"/>
+                          <a:cs typeface="Pretendard" pitchFamily="34" charset="-120"/>
+                        </a:rPr>
+                        <a:t>비용</a:t>
+                      </a:r>
+                      <a:endParaRPr lang="en-US" sz="1050" dirty="0">
+                        <a:latin typeface="Pretendard" charset="0"/>
+                        <a:ea typeface="Pretendard" charset="0"/>
+                        <a:cs typeface="Pretendard" charset="0"/>
+                      </a:endParaRPr>
+                    </a:p>
+                  </a:txBody>
+                  <a:tcPr marL="50800" marR="50800" marT="25400" marB="25400" anchor="ctr">
+                    <a:lnL w="3810" cap="flat" cmpd="sng" algn="ctr">
+                      <a:solidFill>
+                        <a:srgbClr val="CBD5E0"/>
+                      </a:solidFill>
+                      <a:prstDash val="solid"/>
+                      <a:round/>
+                      <a:headEnd type="none" w="med" len="med"/>
+                      <a:tailEnd type="none" w="med" len="med"/>
+                    </a:lnL>
+                    <a:lnR w="3810" cap="flat" cmpd="sng" algn="ctr">
+                      <a:solidFill>
+                        <a:srgbClr val="CBD5E0"/>
+                      </a:solidFill>
+                      <a:prstDash val="solid"/>
+                      <a:round/>
+                      <a:headEnd type="none" w="med" len="med"/>
+                      <a:tailEnd type="none" w="med" len="med"/>
+                    </a:lnR>
+                    <a:lnT w="3810" cap="flat" cmpd="sng" algn="ctr">
+                      <a:solidFill>
+                        <a:srgbClr val="CBD5E0"/>
+                      </a:solidFill>
+                      <a:prstDash val="solid"/>
+                      <a:round/>
+                      <a:headEnd type="none" w="med" len="med"/>
+                      <a:tailEnd type="none" w="med" len="med"/>
+                    </a:lnT>
+                    <a:lnB w="3810" cap="flat" cmpd="sng" algn="ctr">
+                      <a:solidFill>
+                        <a:srgbClr val="CBD5E0"/>
+                      </a:solidFill>
+                      <a:prstDash val="solid"/>
+                      <a:round/>
+                      <a:headEnd type="none" w="med" len="med"/>
+                      <a:tailEnd type="none" w="med" len="med"/>
+                    </a:lnB>
+                    <a:solidFill>
+                      <a:srgbClr val="F7FAFC"/>
+                    </a:solidFill>
+                  </a:tcPr>
+                </a:tc>
+              </a:tr>
+              <a:tr h="329184">
+                <a:tc>
+                  <a:txBody>
+                    <a:bodyPr/>
+                    <a:lstStyle/>
+                    <a:p>
+                      <a:pPr indent="0" marL="0">
+                        <a:buNone/>
+                      </a:pPr>
+                      <a:r>
+                        <a:rPr lang="en-US" sz="1050" b="1" dirty="0">
+                          <a:solidFill>
+                            <a:srgbClr val="10161F"/>
+                          </a:solidFill>
+                          <a:latin typeface="Pretendard" pitchFamily="34" charset="0"/>
+                          <a:ea typeface="Pretendard" pitchFamily="34" charset="-122"/>
+                          <a:cs typeface="Pretendard" pitchFamily="34" charset="-120"/>
+                        </a:rPr>
+                        <a:t>② </a:t>
+                      </a:r>
+                      <a:pPr indent="0" marL="0">
+                        <a:buNone/>
+                      </a:pPr>
+                      <a:r>
+                        <a:rPr lang="en-US" sz="1050" b="1" dirty="0">
+                          <a:solidFill>
+                            <a:srgbClr val="10161F"/>
+                          </a:solidFill>
+                          <a:latin typeface="Pretendard" pitchFamily="34" charset="0"/>
+                          <a:ea typeface="Pretendard" pitchFamily="34" charset="-122"/>
+                          <a:cs typeface="Pretendard" pitchFamily="34" charset="-120"/>
+                        </a:rPr>
+                        <a:t>임대료 </a:t>
+                      </a:r>
+                      <a:pPr indent="0" marL="0">
+                        <a:buNone/>
+                      </a:pPr>
+                      <a:r>
+                        <a:rPr lang="en-US" sz="1050" b="1" dirty="0">
+                          <a:solidFill>
+                            <a:srgbClr val="10161F"/>
+                          </a:solidFill>
+                          <a:latin typeface="Pretendard" pitchFamily="34" charset="0"/>
+                          <a:ea typeface="Pretendard" pitchFamily="34" charset="-122"/>
+                          <a:cs typeface="Pretendard" pitchFamily="34" charset="-120"/>
+                        </a:rPr>
+                        <a:t>현실화 </a:t>
+                      </a:r>
+                      <a:pPr indent="0" marL="0">
+                        <a:buNone/>
+                      </a:pPr>
+                      <a:r>
+                        <a:rPr lang="en-US" sz="1050" b="1" dirty="0">
+                          <a:solidFill>
+                            <a:srgbClr val="10161F"/>
+                          </a:solidFill>
+                          <a:latin typeface="Pretendard" pitchFamily="34" charset="0"/>
+                          <a:ea typeface="Pretendard" pitchFamily="34" charset="-122"/>
+                          <a:cs typeface="Pretendard" pitchFamily="34" charset="-120"/>
+                        </a:rPr>
+                        <a:t>(+5%)</a:t>
+                      </a:r>
+                      <a:endParaRPr lang="en-US" sz="1050" dirty="0">
+                        <a:latin typeface="Pretendard" charset="0"/>
+                        <a:ea typeface="Pretendard" charset="0"/>
+                        <a:cs typeface="Pretendard" charset="0"/>
+                      </a:endParaRPr>
+                    </a:p>
+                  </a:txBody>
+                  <a:tcPr marL="50800" marR="50800" marT="25400" marB="25400" anchor="ctr">
+                    <a:lnL w="3810" cap="flat" cmpd="sng" algn="ctr">
+                      <a:solidFill>
+                        <a:srgbClr val="CBD5E0"/>
+                      </a:solidFill>
+                      <a:prstDash val="solid"/>
+                      <a:round/>
+                      <a:headEnd type="none" w="med" len="med"/>
+                      <a:tailEnd type="none" w="med" len="med"/>
+                    </a:lnL>
+                    <a:lnR w="3810" cap="flat" cmpd="sng" algn="ctr">
+                      <a:solidFill>
+                        <a:srgbClr val="CBD5E0"/>
+                      </a:solidFill>
+                      <a:prstDash val="solid"/>
+                      <a:round/>
+                      <a:headEnd type="none" w="med" len="med"/>
+                      <a:tailEnd type="none" w="med" len="med"/>
+                    </a:lnR>
+                    <a:lnT w="3810" cap="flat" cmpd="sng" algn="ctr">
+                      <a:solidFill>
+                        <a:srgbClr val="CBD5E0"/>
+                      </a:solidFill>
+                      <a:prstDash val="solid"/>
+                      <a:round/>
+                      <a:headEnd type="none" w="med" len="med"/>
+                      <a:tailEnd type="none" w="med" len="med"/>
+                    </a:lnT>
+                    <a:lnB w="3810" cap="flat" cmpd="sng" algn="ctr">
+                      <a:solidFill>
+                        <a:srgbClr val="CBD5E0"/>
+                      </a:solidFill>
+                      <a:prstDash val="solid"/>
+                      <a:round/>
+                      <a:headEnd type="none" w="med" len="med"/>
+                      <a:tailEnd type="none" w="med" len="med"/>
+                    </a:lnB>
+                    <a:solidFill>
+                      <a:srgbClr val="FFFFFF"/>
+                    </a:solidFill>
+                  </a:tcPr>
+                </a:tc>
+                <a:tc>
+                  <a:txBody>
+                    <a:bodyPr/>
+                    <a:lstStyle/>
+                    <a:p>
+                      <a:pPr indent="0" marL="0">
+                        <a:buNone/>
+                      </a:pPr>
+                      <a:r>
+                        <a:rPr lang="en-US" sz="1050" dirty="0">
+                          <a:solidFill>
+                            <a:srgbClr val="10161F"/>
+                          </a:solidFill>
+                          <a:latin typeface="Pretendard" pitchFamily="34" charset="0"/>
+                          <a:ea typeface="Pretendard" pitchFamily="34" charset="-122"/>
+                          <a:cs typeface="Pretendard" pitchFamily="34" charset="-120"/>
+                        </a:rPr>
+                        <a:t>+약 </a:t>
+                      </a:r>
+                      <a:pPr indent="0" marL="0">
+                        <a:buNone/>
+                      </a:pPr>
+                      <a:r>
+                        <a:rPr lang="en-US" sz="1050" dirty="0">
+                          <a:solidFill>
+                            <a:srgbClr val="10161F"/>
+                          </a:solidFill>
+                          <a:latin typeface="Pretendard" pitchFamily="34" charset="0"/>
+                          <a:ea typeface="Pretendard" pitchFamily="34" charset="-122"/>
+                          <a:cs typeface="Pretendard" pitchFamily="34" charset="-120"/>
+                        </a:rPr>
+                        <a:t>0.06억 </a:t>
+                      </a:r>
+                      <a:pPr indent="0" marL="0">
+                        <a:buNone/>
+                      </a:pPr>
+                      <a:r>
+                        <a:rPr lang="en-US" sz="1050" dirty="0">
+                          <a:solidFill>
+                            <a:srgbClr val="10161F"/>
+                          </a:solidFill>
+                          <a:latin typeface="Pretendard" pitchFamily="34" charset="0"/>
+                          <a:ea typeface="Pretendard" pitchFamily="34" charset="-122"/>
+                          <a:cs typeface="Pretendard" pitchFamily="34" charset="-120"/>
+                        </a:rPr>
+                        <a:t>원 </a:t>
+                      </a:r>
+                      <a:pPr indent="0" marL="0">
+                        <a:buNone/>
+                      </a:pPr>
+                      <a:r>
+                        <a:rPr lang="en-US" sz="1050" dirty="0">
+                          <a:solidFill>
+                            <a:srgbClr val="10161F"/>
+                          </a:solidFill>
+                          <a:latin typeface="Pretendard" pitchFamily="34" charset="0"/>
+                          <a:ea typeface="Pretendard" pitchFamily="34" charset="-122"/>
+                          <a:cs typeface="Pretendard" pitchFamily="34" charset="-120"/>
+                        </a:rPr>
+                        <a:t>(+5%)</a:t>
+                      </a:r>
+                      <a:endParaRPr lang="en-US" sz="1050" dirty="0">
+                        <a:latin typeface="Pretendard" charset="0"/>
+                        <a:ea typeface="Pretendard" charset="0"/>
+                        <a:cs typeface="Pretendard" charset="0"/>
+                      </a:endParaRPr>
+                    </a:p>
+                  </a:txBody>
+                  <a:tcPr marL="50800" marR="50800" marT="25400" marB="25400" anchor="ctr">
+                    <a:lnL w="3810" cap="flat" cmpd="sng" algn="ctr">
+                      <a:solidFill>
+                        <a:srgbClr val="CBD5E0"/>
+                      </a:solidFill>
+                      <a:prstDash val="solid"/>
+                      <a:round/>
+                      <a:headEnd type="none" w="med" len="med"/>
+                      <a:tailEnd type="none" w="med" len="med"/>
+                    </a:lnL>
+                    <a:lnR w="3810" cap="flat" cmpd="sng" algn="ctr">
+                      <a:solidFill>
+                        <a:srgbClr val="CBD5E0"/>
+                      </a:solidFill>
+                      <a:prstDash val="solid"/>
+                      <a:round/>
+                      <a:headEnd type="none" w="med" len="med"/>
+                      <a:tailEnd type="none" w="med" len="med"/>
+                    </a:lnR>
+                    <a:lnT w="3810" cap="flat" cmpd="sng" algn="ctr">
+                      <a:solidFill>
+                        <a:srgbClr val="CBD5E0"/>
+                      </a:solidFill>
+                      <a:prstDash val="solid"/>
+                      <a:round/>
+                      <a:headEnd type="none" w="med" len="med"/>
+                      <a:tailEnd type="none" w="med" len="med"/>
+                    </a:lnT>
+                    <a:lnB w="3810" cap="flat" cmpd="sng" algn="ctr">
+                      <a:solidFill>
+                        <a:srgbClr val="CBD5E0"/>
+                      </a:solidFill>
+                      <a:prstDash val="solid"/>
+                      <a:round/>
+                      <a:headEnd type="none" w="med" len="med"/>
+                      <a:tailEnd type="none" w="med" len="med"/>
+                    </a:lnB>
+                    <a:solidFill>
+                      <a:srgbClr val="FFFFFF"/>
+                    </a:solidFill>
+                  </a:tcPr>
+                </a:tc>
+                <a:tc>
+                  <a:txBody>
+                    <a:bodyPr/>
+                    <a:lstStyle/>
+                    <a:p>
+                      <a:pPr indent="0" marL="0">
+                        <a:buNone/>
+                      </a:pPr>
+                      <a:r>
+                        <a:rPr lang="en-US" sz="1050" dirty="0">
+                          <a:solidFill>
+                            <a:srgbClr val="10161F"/>
+                          </a:solidFill>
+                          <a:latin typeface="Pretendard" pitchFamily="34" charset="0"/>
+                          <a:ea typeface="Pretendard" pitchFamily="34" charset="-122"/>
+                          <a:cs typeface="Pretendard" pitchFamily="34" charset="-120"/>
+                        </a:rPr>
+                        <a:t>1.2%</a:t>
+                      </a:r>
+                      <a:endParaRPr lang="en-US" sz="1050" dirty="0">
+                        <a:latin typeface="Pretendard" charset="0"/>
+                        <a:ea typeface="Pretendard" charset="0"/>
+                        <a:cs typeface="Pretendard" charset="0"/>
+                      </a:endParaRPr>
+                    </a:p>
+                  </a:txBody>
+                  <a:tcPr marL="50800" marR="50800" marT="25400" marB="25400" anchor="ctr">
+                    <a:lnL w="3810" cap="flat" cmpd="sng" algn="ctr">
+                      <a:solidFill>
+                        <a:srgbClr val="CBD5E0"/>
+                      </a:solidFill>
+                      <a:prstDash val="solid"/>
+                      <a:round/>
+                      <a:headEnd type="none" w="med" len="med"/>
+                      <a:tailEnd type="none" w="med" len="med"/>
+                    </a:lnL>
+                    <a:lnR w="3810" cap="flat" cmpd="sng" algn="ctr">
+                      <a:solidFill>
+                        <a:srgbClr val="CBD5E0"/>
+                      </a:solidFill>
+                      <a:prstDash val="solid"/>
+                      <a:round/>
+                      <a:headEnd type="none" w="med" len="med"/>
+                      <a:tailEnd type="none" w="med" len="med"/>
+                    </a:lnR>
+                    <a:lnT w="3810" cap="flat" cmpd="sng" algn="ctr">
+                      <a:solidFill>
+                        <a:srgbClr val="CBD5E0"/>
+                      </a:solidFill>
+                      <a:prstDash val="solid"/>
+                      <a:round/>
+                      <a:headEnd type="none" w="med" len="med"/>
+                      <a:tailEnd type="none" w="med" len="med"/>
+                    </a:lnT>
+                    <a:lnB w="3810" cap="flat" cmpd="sng" algn="ctr">
+                      <a:solidFill>
+                        <a:srgbClr val="CBD5E0"/>
+                      </a:solidFill>
+                      <a:prstDash val="solid"/>
+                      <a:round/>
+                      <a:headEnd type="none" w="med" len="med"/>
+                      <a:tailEnd type="none" w="med" len="med"/>
+                    </a:lnB>
+                    <a:solidFill>
+                      <a:srgbClr val="FFFFFF"/>
+                    </a:solidFill>
+                  </a:tcPr>
+                </a:tc>
+                <a:tc>
+                  <a:txBody>
+                    <a:bodyPr/>
+                    <a:lstStyle/>
+                    <a:p>
+                      <a:pPr indent="0" marL="0">
+                        <a:buNone/>
+                      </a:pPr>
+                      <a:r>
+                        <a:rPr lang="en-US" sz="1050" dirty="0">
+                          <a:solidFill>
+                            <a:srgbClr val="10161F"/>
+                          </a:solidFill>
+                          <a:latin typeface="Pretendard" pitchFamily="34" charset="0"/>
+                          <a:ea typeface="Pretendard" pitchFamily="34" charset="-122"/>
+                          <a:cs typeface="Pretendard" pitchFamily="34" charset="-120"/>
+                        </a:rPr>
+                        <a:t>불필요</a:t>
+                      </a:r>
+                      <a:endParaRPr lang="en-US" sz="1050" dirty="0">
+                        <a:latin typeface="Pretendard" charset="0"/>
+                        <a:ea typeface="Pretendard" charset="0"/>
+                        <a:cs typeface="Pretendard" charset="0"/>
+                      </a:endParaRPr>
+                    </a:p>
+                  </a:txBody>
+                  <a:tcPr marL="50800" marR="50800" marT="25400" marB="25400" anchor="ctr">
+                    <a:lnL w="3810" cap="flat" cmpd="sng" algn="ctr">
+                      <a:solidFill>
+                        <a:srgbClr val="CBD5E0"/>
+                      </a:solidFill>
+                      <a:prstDash val="solid"/>
+                      <a:round/>
+                      <a:headEnd type="none" w="med" len="med"/>
+                      <a:tailEnd type="none" w="med" len="med"/>
+                    </a:lnL>
+                    <a:lnR w="3810" cap="flat" cmpd="sng" algn="ctr">
+                      <a:solidFill>
+                        <a:srgbClr val="CBD5E0"/>
+                      </a:solidFill>
+                      <a:prstDash val="solid"/>
+                      <a:round/>
+                      <a:headEnd type="none" w="med" len="med"/>
+                      <a:tailEnd type="none" w="med" len="med"/>
+                    </a:lnR>
+                    <a:lnT w="3810" cap="flat" cmpd="sng" algn="ctr">
+                      <a:solidFill>
+                        <a:srgbClr val="CBD5E0"/>
+                      </a:solidFill>
+                      <a:prstDash val="solid"/>
+                      <a:round/>
+                      <a:headEnd type="none" w="med" len="med"/>
+                      <a:tailEnd type="none" w="med" len="med"/>
+                    </a:lnT>
+                    <a:lnB w="3810" cap="flat" cmpd="sng" algn="ctr">
+                      <a:solidFill>
+                        <a:srgbClr val="CBD5E0"/>
+                      </a:solidFill>
+                      <a:prstDash val="solid"/>
+                      <a:round/>
+                      <a:headEnd type="none" w="med" len="med"/>
+                      <a:tailEnd type="none" w="med" len="med"/>
+                    </a:lnB>
+                    <a:solidFill>
+                      <a:srgbClr val="FFFFFF"/>
+                    </a:solidFill>
+                  </a:tcPr>
+                </a:tc>
+              </a:tr>
+              <a:tr h="329184">
+                <a:tc>
+                  <a:txBody>
+                    <a:bodyPr/>
+                    <a:lstStyle/>
+                    <a:p>
+                      <a:pPr indent="0" marL="0">
+                        <a:buNone/>
+                      </a:pPr>
+                      <a:r>
+                        <a:rPr lang="en-US" sz="1050" b="1" dirty="0">
+                          <a:solidFill>
+                            <a:srgbClr val="10161F"/>
+                          </a:solidFill>
+                          <a:latin typeface="Pretendard" pitchFamily="34" charset="0"/>
+                          <a:ea typeface="Pretendard" pitchFamily="34" charset="-122"/>
+                          <a:cs typeface="Pretendard" pitchFamily="34" charset="-120"/>
+                        </a:rPr>
+                        <a:t>③ </a:t>
+                      </a:r>
+                      <a:pPr indent="0" marL="0">
+                        <a:buNone/>
+                      </a:pPr>
+                      <a:r>
+                        <a:rPr lang="en-US" sz="1050" b="1" dirty="0">
+                          <a:solidFill>
+                            <a:srgbClr val="10161F"/>
+                          </a:solidFill>
+                          <a:latin typeface="Pretendard" pitchFamily="34" charset="0"/>
+                          <a:ea typeface="Pretendard" pitchFamily="34" charset="-122"/>
+                          <a:cs typeface="Pretendard" pitchFamily="34" charset="-120"/>
+                        </a:rPr>
+                        <a:t>리모델링 </a:t>
+                      </a:r>
+                      <a:pPr indent="0" marL="0">
+                        <a:buNone/>
+                      </a:pPr>
+                      <a:r>
+                        <a:rPr lang="en-US" sz="1050" b="1" dirty="0">
+                          <a:solidFill>
+                            <a:srgbClr val="10161F"/>
+                          </a:solidFill>
+                          <a:latin typeface="Pretendard" pitchFamily="34" charset="0"/>
+                          <a:ea typeface="Pretendard" pitchFamily="34" charset="-122"/>
+                          <a:cs typeface="Pretendard" pitchFamily="34" charset="-120"/>
+                        </a:rPr>
+                        <a:t>후 </a:t>
+                      </a:r>
+                      <a:pPr indent="0" marL="0">
+                        <a:buNone/>
+                      </a:pPr>
+                      <a:r>
+                        <a:rPr lang="en-US" sz="1050" b="1" dirty="0">
+                          <a:solidFill>
+                            <a:srgbClr val="10161F"/>
+                          </a:solidFill>
+                          <a:latin typeface="Pretendard" pitchFamily="34" charset="0"/>
+                          <a:ea typeface="Pretendard" pitchFamily="34" charset="-122"/>
+                          <a:cs typeface="Pretendard" pitchFamily="34" charset="-120"/>
+                        </a:rPr>
+                        <a:t>임대료 </a:t>
+                      </a:r>
+                      <a:pPr indent="0" marL="0">
+                        <a:buNone/>
+                      </a:pPr>
+                      <a:r>
+                        <a:rPr lang="en-US" sz="1050" b="1" dirty="0">
+                          <a:solidFill>
+                            <a:srgbClr val="10161F"/>
+                          </a:solidFill>
+                          <a:latin typeface="Pretendard" pitchFamily="34" charset="0"/>
+                          <a:ea typeface="Pretendard" pitchFamily="34" charset="-122"/>
+                          <a:cs typeface="Pretendard" pitchFamily="34" charset="-120"/>
+                        </a:rPr>
+                        <a:t>상승</a:t>
+                      </a:r>
+                      <a:endParaRPr lang="en-US" sz="1050" dirty="0">
+                        <a:latin typeface="Pretendard" charset="0"/>
+                        <a:ea typeface="Pretendard" charset="0"/>
+                        <a:cs typeface="Pretendard" charset="0"/>
+                      </a:endParaRPr>
+                    </a:p>
+                  </a:txBody>
+                  <a:tcPr marL="50800" marR="50800" marT="25400" marB="25400" anchor="ctr">
+                    <a:lnL w="3810" cap="flat" cmpd="sng" algn="ctr">
+                      <a:solidFill>
+                        <a:srgbClr val="CBD5E0"/>
+                      </a:solidFill>
+                      <a:prstDash val="solid"/>
+                      <a:round/>
+                      <a:headEnd type="none" w="med" len="med"/>
+                      <a:tailEnd type="none" w="med" len="med"/>
+                    </a:lnL>
+                    <a:lnR w="3810" cap="flat" cmpd="sng" algn="ctr">
+                      <a:solidFill>
+                        <a:srgbClr val="CBD5E0"/>
+                      </a:solidFill>
+                      <a:prstDash val="solid"/>
+                      <a:round/>
+                      <a:headEnd type="none" w="med" len="med"/>
+                      <a:tailEnd type="none" w="med" len="med"/>
+                    </a:lnR>
+                    <a:lnT w="3810" cap="flat" cmpd="sng" algn="ctr">
+                      <a:solidFill>
+                        <a:srgbClr val="CBD5E0"/>
+                      </a:solidFill>
+                      <a:prstDash val="solid"/>
+                      <a:round/>
+                      <a:headEnd type="none" w="med" len="med"/>
+                      <a:tailEnd type="none" w="med" len="med"/>
+                    </a:lnT>
+                    <a:lnB w="3810" cap="flat" cmpd="sng" algn="ctr">
+                      <a:solidFill>
+                        <a:srgbClr val="CBD5E0"/>
+                      </a:solidFill>
+                      <a:prstDash val="solid"/>
+                      <a:round/>
+                      <a:headEnd type="none" w="med" len="med"/>
+                      <a:tailEnd type="none" w="med" len="med"/>
+                    </a:lnB>
+                    <a:solidFill>
+                      <a:srgbClr val="F7FAFC"/>
+                    </a:solidFill>
+                  </a:tcPr>
+                </a:tc>
+                <a:tc>
+                  <a:txBody>
+                    <a:bodyPr/>
+                    <a:lstStyle/>
+                    <a:p>
+                      <a:pPr indent="0" marL="0">
+                        <a:buNone/>
+                      </a:pPr>
+                      <a:r>
+                        <a:rPr lang="en-US" sz="1050" dirty="0">
+                          <a:solidFill>
+                            <a:srgbClr val="10161F"/>
+                          </a:solidFill>
+                          <a:latin typeface="Pretendard" pitchFamily="34" charset="0"/>
+                          <a:ea typeface="Pretendard" pitchFamily="34" charset="-122"/>
+                          <a:cs typeface="Pretendard" pitchFamily="34" charset="-120"/>
+                        </a:rPr>
+                        <a:t>+약 </a:t>
+                      </a:r>
+                      <a:pPr indent="0" marL="0">
+                        <a:buNone/>
+                      </a:pPr>
+                      <a:r>
+                        <a:rPr lang="en-US" sz="1050" dirty="0">
+                          <a:solidFill>
+                            <a:srgbClr val="10161F"/>
+                          </a:solidFill>
+                          <a:latin typeface="Pretendard" pitchFamily="34" charset="0"/>
+                          <a:ea typeface="Pretendard" pitchFamily="34" charset="-122"/>
+                          <a:cs typeface="Pretendard" pitchFamily="34" charset="-120"/>
+                        </a:rPr>
+                        <a:t>0.09억 </a:t>
+                      </a:r>
+                      <a:pPr indent="0" marL="0">
+                        <a:buNone/>
+                      </a:pPr>
+                      <a:r>
+                        <a:rPr lang="en-US" sz="1050" dirty="0">
+                          <a:solidFill>
+                            <a:srgbClr val="10161F"/>
+                          </a:solidFill>
+                          <a:latin typeface="Pretendard" pitchFamily="34" charset="0"/>
+                          <a:ea typeface="Pretendard" pitchFamily="34" charset="-122"/>
+                          <a:cs typeface="Pretendard" pitchFamily="34" charset="-120"/>
+                        </a:rPr>
+                        <a:t>원 </a:t>
+                      </a:r>
+                      <a:pPr indent="0" marL="0">
+                        <a:buNone/>
+                      </a:pPr>
+                      <a:r>
+                        <a:rPr lang="en-US" sz="1050" dirty="0">
+                          <a:solidFill>
+                            <a:srgbClr val="10161F"/>
+                          </a:solidFill>
+                          <a:latin typeface="Pretendard" pitchFamily="34" charset="0"/>
+                          <a:ea typeface="Pretendard" pitchFamily="34" charset="-122"/>
+                          <a:cs typeface="Pretendard" pitchFamily="34" charset="-120"/>
+                        </a:rPr>
+                        <a:t>(+8%)</a:t>
+                      </a:r>
+                      <a:endParaRPr lang="en-US" sz="1050" dirty="0">
+                        <a:latin typeface="Pretendard" charset="0"/>
+                        <a:ea typeface="Pretendard" charset="0"/>
+                        <a:cs typeface="Pretendard" charset="0"/>
+                      </a:endParaRPr>
+                    </a:p>
+                  </a:txBody>
+                  <a:tcPr marL="50800" marR="50800" marT="25400" marB="25400" anchor="ctr">
+                    <a:lnL w="3810" cap="flat" cmpd="sng" algn="ctr">
+                      <a:solidFill>
+                        <a:srgbClr val="CBD5E0"/>
+                      </a:solidFill>
+                      <a:prstDash val="solid"/>
+                      <a:round/>
+                      <a:headEnd type="none" w="med" len="med"/>
+                      <a:tailEnd type="none" w="med" len="med"/>
+                    </a:lnL>
+                    <a:lnR w="3810" cap="flat" cmpd="sng" algn="ctr">
+                      <a:solidFill>
+                        <a:srgbClr val="CBD5E0"/>
+                      </a:solidFill>
+                      <a:prstDash val="solid"/>
+                      <a:round/>
+                      <a:headEnd type="none" w="med" len="med"/>
+                      <a:tailEnd type="none" w="med" len="med"/>
+                    </a:lnR>
+                    <a:lnT w="3810" cap="flat" cmpd="sng" algn="ctr">
+                      <a:solidFill>
+                        <a:srgbClr val="CBD5E0"/>
+                      </a:solidFill>
+                      <a:prstDash val="solid"/>
+                      <a:round/>
+                      <a:headEnd type="none" w="med" len="med"/>
+                      <a:tailEnd type="none" w="med" len="med"/>
+                    </a:lnT>
+                    <a:lnB w="3810" cap="flat" cmpd="sng" algn="ctr">
+                      <a:solidFill>
+                        <a:srgbClr val="CBD5E0"/>
+                      </a:solidFill>
+                      <a:prstDash val="solid"/>
+                      <a:round/>
+                      <a:headEnd type="none" w="med" len="med"/>
+                      <a:tailEnd type="none" w="med" len="med"/>
+                    </a:lnB>
+                    <a:solidFill>
+                      <a:srgbClr val="F7FAFC"/>
+                    </a:solidFill>
+                  </a:tcPr>
+                </a:tc>
+                <a:tc>
+                  <a:txBody>
+                    <a:bodyPr/>
+                    <a:lstStyle/>
+                    <a:p>
+                      <a:pPr indent="0" marL="0">
+                        <a:buNone/>
+                      </a:pPr>
+                      <a:r>
+                        <a:rPr lang="en-US" sz="1050" dirty="0">
+                          <a:solidFill>
+                            <a:srgbClr val="10161F"/>
+                          </a:solidFill>
+                          <a:latin typeface="Pretendard" pitchFamily="34" charset="0"/>
+                          <a:ea typeface="Pretendard" pitchFamily="34" charset="-122"/>
+                          <a:cs typeface="Pretendard" pitchFamily="34" charset="-120"/>
+                        </a:rPr>
+                        <a:t>1.24%</a:t>
+                      </a:r>
+                      <a:endParaRPr lang="en-US" sz="1050" dirty="0">
+                        <a:latin typeface="Pretendard" charset="0"/>
+                        <a:ea typeface="Pretendard" charset="0"/>
+                        <a:cs typeface="Pretendard" charset="0"/>
+                      </a:endParaRPr>
+                    </a:p>
+                  </a:txBody>
+                  <a:tcPr marL="50800" marR="50800" marT="25400" marB="25400" anchor="ctr">
+                    <a:lnL w="3810" cap="flat" cmpd="sng" algn="ctr">
+                      <a:solidFill>
+                        <a:srgbClr val="CBD5E0"/>
+                      </a:solidFill>
+                      <a:prstDash val="solid"/>
+                      <a:round/>
+                      <a:headEnd type="none" w="med" len="med"/>
+                      <a:tailEnd type="none" w="med" len="med"/>
+                    </a:lnL>
+                    <a:lnR w="3810" cap="flat" cmpd="sng" algn="ctr">
+                      <a:solidFill>
+                        <a:srgbClr val="CBD5E0"/>
+                      </a:solidFill>
+                      <a:prstDash val="solid"/>
+                      <a:round/>
+                      <a:headEnd type="none" w="med" len="med"/>
+                      <a:tailEnd type="none" w="med" len="med"/>
+                    </a:lnR>
+                    <a:lnT w="3810" cap="flat" cmpd="sng" algn="ctr">
+                      <a:solidFill>
+                        <a:srgbClr val="CBD5E0"/>
+                      </a:solidFill>
+                      <a:prstDash val="solid"/>
+                      <a:round/>
+                      <a:headEnd type="none" w="med" len="med"/>
+                      <a:tailEnd type="none" w="med" len="med"/>
+                    </a:lnT>
+                    <a:lnB w="3810" cap="flat" cmpd="sng" algn="ctr">
+                      <a:solidFill>
+                        <a:srgbClr val="CBD5E0"/>
+                      </a:solidFill>
+                      <a:prstDash val="solid"/>
+                      <a:round/>
+                      <a:headEnd type="none" w="med" len="med"/>
+                      <a:tailEnd type="none" w="med" len="med"/>
+                    </a:lnB>
+                    <a:solidFill>
+                      <a:srgbClr val="F7FAFC"/>
+                    </a:solidFill>
+                  </a:tcPr>
+                </a:tc>
+                <a:tc>
+                  <a:txBody>
+                    <a:bodyPr/>
+                    <a:lstStyle/>
+                    <a:p>
+                      <a:pPr indent="0" marL="0">
+                        <a:buNone/>
+                      </a:pPr>
+                      <a:r>
+                        <a:rPr lang="en-US" sz="1050" dirty="0">
+                          <a:solidFill>
+                            <a:srgbClr val="10161F"/>
+                          </a:solidFill>
+                          <a:latin typeface="Pretendard" pitchFamily="34" charset="0"/>
+                          <a:ea typeface="Pretendard" pitchFamily="34" charset="-122"/>
+                          <a:cs typeface="Pretendard" pitchFamily="34" charset="-120"/>
+                        </a:rPr>
+                        <a:t>약 </a:t>
+                      </a:r>
+                      <a:pPr indent="0" marL="0">
+                        <a:buNone/>
+                      </a:pPr>
+                      <a:r>
+                        <a:rPr lang="en-US" sz="1050" dirty="0">
+                          <a:solidFill>
+                            <a:srgbClr val="10161F"/>
+                          </a:solidFill>
+                          <a:latin typeface="Pretendard" pitchFamily="34" charset="0"/>
+                          <a:ea typeface="Pretendard" pitchFamily="34" charset="-122"/>
+                          <a:cs typeface="Pretendard" pitchFamily="34" charset="-120"/>
+                        </a:rPr>
+                        <a:t>15.00억 </a:t>
+                      </a:r>
+                      <a:pPr indent="0" marL="0">
+                        <a:buNone/>
+                      </a:pPr>
+                      <a:r>
+                        <a:rPr lang="en-US" sz="1050" dirty="0">
+                          <a:solidFill>
+                            <a:srgbClr val="10161F"/>
+                          </a:solidFill>
+                          <a:latin typeface="Pretendard" pitchFamily="34" charset="0"/>
+                          <a:ea typeface="Pretendard" pitchFamily="34" charset="-122"/>
+                          <a:cs typeface="Pretendard" pitchFamily="34" charset="-120"/>
+                        </a:rPr>
+                        <a:t>원</a:t>
+                      </a:r>
+                      <a:endParaRPr lang="en-US" sz="1050" dirty="0">
+                        <a:latin typeface="Pretendard" charset="0"/>
+                        <a:ea typeface="Pretendard" charset="0"/>
+                        <a:cs typeface="Pretendard" charset="0"/>
+                      </a:endParaRPr>
+                    </a:p>
+                  </a:txBody>
+                  <a:tcPr marL="50800" marR="50800" marT="25400" marB="25400" anchor="ctr">
+                    <a:lnL w="3810" cap="flat" cmpd="sng" algn="ctr">
+                      <a:solidFill>
+                        <a:srgbClr val="CBD5E0"/>
+                      </a:solidFill>
+                      <a:prstDash val="solid"/>
+                      <a:round/>
+                      <a:headEnd type="none" w="med" len="med"/>
+                      <a:tailEnd type="none" w="med" len="med"/>
+                    </a:lnL>
+                    <a:lnR w="3810" cap="flat" cmpd="sng" algn="ctr">
+                      <a:solidFill>
+                        <a:srgbClr val="CBD5E0"/>
+                      </a:solidFill>
+                      <a:prstDash val="solid"/>
+                      <a:round/>
+                      <a:headEnd type="none" w="med" len="med"/>
+                      <a:tailEnd type="none" w="med" len="med"/>
+                    </a:lnR>
+                    <a:lnT w="3810" cap="flat" cmpd="sng" algn="ctr">
+                      <a:solidFill>
+                        <a:srgbClr val="CBD5E0"/>
+                      </a:solidFill>
+                      <a:prstDash val="solid"/>
+                      <a:round/>
+                      <a:headEnd type="none" w="med" len="med"/>
+                      <a:tailEnd type="none" w="med" len="med"/>
+                    </a:lnT>
+                    <a:lnB w="3810" cap="flat" cmpd="sng" algn="ctr">
+                      <a:solidFill>
+                        <a:srgbClr val="CBD5E0"/>
+                      </a:solidFill>
+                      <a:prstDash val="solid"/>
+                      <a:round/>
+                      <a:headEnd type="none" w="med" len="med"/>
+                      <a:tailEnd type="none" w="med" len="med"/>
+                    </a:lnB>
+                    <a:solidFill>
+                      <a:srgbClr val="F7FAFC"/>
+                    </a:solidFill>
+                  </a:tcPr>
+                </a:tc>
+              </a:tr>
+            </a:tbl>
+          </a:graphicData>
+        </a:graphic>
+      </p:graphicFrame>
+      <p:sp>
+        <p:nvSpPr>
+          <p:cNvPr id="8" name="Shape 5"/>
+          <p:cNvSpPr/>
+          <p:nvPr/>
+        </p:nvSpPr>
+        <p:spPr>
+          <a:xfrm>
+            <a:off x="566928" y="5349240"/>
             <a:ext cx="11057839" cy="804672"/>
           </a:xfrm>
           <a:prstGeom prst="roundRect">
@@ -8493,11 +9313,11 @@
             </a:avLst>
           </a:prstGeom>
           <a:solidFill>
-            <a:srgbClr val="E8F5CC"/>
+            <a:srgbClr val="F3EBDA"/>
           </a:solidFill>
           <a:ln w="10160">
             <a:solidFill>
-              <a:srgbClr val="A3D900"/>
+              <a:srgbClr val="D9B668"/>
             </a:solidFill>
             <a:prstDash val="solid"/>
           </a:ln>
@@ -8505,14 +9325,14 @@
       </p:sp>
       <p:sp>
         <p:nvSpPr>
-          <p:cNvPr id="28" name="Text 26"/>
-          <p:cNvSpPr/>
-          <p:nvPr/>
-        </p:nvSpPr>
-        <p:spPr>
-          <a:xfrm>
-            <a:off x="749808" y="5248656"/>
-            <a:ext cx="1645920" cy="219456"/>
+          <p:cNvPr id="9" name="Text 6"/>
+          <p:cNvSpPr/>
+          <p:nvPr/>
+        </p:nvSpPr>
+        <p:spPr>
+          <a:xfrm>
+            <a:off x="749808" y="5458968"/>
+            <a:ext cx="1691640" cy="256032"/>
           </a:xfrm>
           <a:prstGeom prst="rect">
             <a:avLst/>
@@ -8528,30 +9348,30 @@
               <a:buNone/>
             </a:pPr>
             <a:r>
-              <a:rPr lang="en-US" sz="950" b="1" dirty="0">
-                <a:solidFill>
-                  <a:srgbClr val="4F6A00"/>
+              <a:rPr lang="en-US" sz="1050" b="1" dirty="0">
+                <a:solidFill>
+                  <a:srgbClr val="977024"/>
                 </a:solidFill>
                 <a:latin typeface="Pretendard" pitchFamily="34" charset="0"/>
                 <a:ea typeface="Pretendard" pitchFamily="34" charset="-122"/>
                 <a:cs typeface="Pretendard" pitchFamily="34" charset="-120"/>
               </a:rPr>
-              <a:t>💡 종합 가치 제안</a:t>
-            </a:r>
-            <a:endParaRPr lang="en-US" sz="950" dirty="0"/>
-          </a:p>
-        </p:txBody>
-      </p:sp>
-      <p:sp>
-        <p:nvSpPr>
-          <p:cNvPr id="29" name="Text 27"/>
-          <p:cNvSpPr/>
-          <p:nvPr/>
-        </p:nvSpPr>
-        <p:spPr>
-          <a:xfrm>
-            <a:off x="2441448" y="5230368"/>
-            <a:ext cx="9000439" cy="621792"/>
+              <a:t>종합 가치 제안</a:t>
+            </a:r>
+            <a:endParaRPr lang="en-US" sz="1050" dirty="0"/>
+          </a:p>
+        </p:txBody>
+      </p:sp>
+      <p:sp>
+        <p:nvSpPr>
+          <p:cNvPr id="10" name="Text 7"/>
+          <p:cNvSpPr/>
+          <p:nvPr/>
+        </p:nvSpPr>
+        <p:spPr>
+          <a:xfrm>
+            <a:off x="2487168" y="5422392"/>
+            <a:ext cx="8954719" cy="658368"/>
           </a:xfrm>
           <a:prstGeom prst="rect">
             <a:avLst/>
@@ -8565,86 +9385,102 @@
           <a:p>
             <a:pPr indent="0" marL="0">
               <a:lnSpc>
-                <a:spcPct val="120000"/>
+                <a:spcPct val="125000"/>
               </a:lnSpc>
               <a:buNone/>
             </a:pPr>
             <a:r>
-              <a:rPr lang="en-US" sz="1000" dirty="0">
-                <a:solidFill>
-                  <a:srgbClr val="334155"/>
+              <a:rPr lang="en-US" sz="1100" dirty="0">
+                <a:solidFill>
+                  <a:srgbClr val="10161F"/>
                 </a:solidFill>
                 <a:latin typeface="Pretendard" pitchFamily="34" charset="0"/>
                 <a:ea typeface="Pretendard" pitchFamily="34" charset="-122"/>
                 <a:cs typeface="Pretendard" pitchFamily="34" charset="-120"/>
               </a:rPr>
-              <a:t>본 자산의 3대 핵심 투자 포인트와 예상 매수자 유형 분석입니다. &gt; 밸류업 시나리오는 AI 추정이며 실제 시장 조건에 따라 다를 수 있습니다.</a:t>
-            </a:r>
-            <a:endParaRPr lang="en-US" sz="1000" dirty="0"/>
-          </a:p>
-        </p:txBody>
-      </p:sp>
-      <p:sp>
-        <p:nvSpPr>
-          <p:cNvPr id="30" name="Text 28"/>
-          <p:cNvSpPr/>
-          <p:nvPr/>
-        </p:nvSpPr>
-        <p:spPr>
-          <a:xfrm>
-            <a:off x="566928" y="6419088"/>
-            <a:ext cx="11057839" cy="201168"/>
-          </a:xfrm>
-          <a:prstGeom prst="rect">
-            <a:avLst/>
-          </a:prstGeom>
-          <a:noFill/>
-          <a:ln/>
-        </p:spPr>
-        <p:txBody>
-          <a:bodyPr wrap="square" lIns="0" tIns="0" rIns="0" bIns="0" rtlCol="0" anchor="ctr"/>
-          <a:lstStyle/>
-          <a:p>
-            <a:pPr algn="ctr" indent="0" marL="0">
-              <a:buNone/>
-            </a:pPr>
-            <a:r>
-              <a:rPr lang="en-US" sz="750" dirty="0">
-                <a:solidFill>
-                  <a:srgbClr val="64748B"/>
+              <a:t>{"ok":true,"mocked":true,"extractedFields":{"area_signal":"역삼","asset_type":"오피스빌딩","price_band":"300억","size_signal":"3000평(약 9917.4㎡)"},"extractedFacts":{"region":"역삼","exactAddressCandidate":"역삼동 742-1","assetType":"오피스빌딩","priceText":"300억","sizeText":"3000평(약 9917.4㎡)","currentUse":"오피스","currentUseSignal":"근린생활시설","leaseSignal":"임대중","vacancySignal":"공실없음","tenantNames":["쿠팡","네이버"],"unitRentTexts":["301호: 1500만"],"sellerMotivationText":"자산 효율화","brokerNotes":["초역세권 매물"]},"detectedSensitiveFields":["exact_address","tenant_name"],"ambiguousFields":[],"warnings":[],"areaSignal":"역삼","assetType":"오피스빌딩","priceBand":"300억","sizeSignal":"3000평(약 9917.4㎡)","dealType":"매각","buildingName":"역삼 센트럴타워","exactAddress":"역삼동 742-1","totalFloorArea":9917.3,"buildYear":2015,"currentUseSignal":"근린생활시설","vacancySignal":"공실 없음","fitSummary":"초역세권 근생 빌딩으로 시행/사옥 매입에 최적화","cautionSummary":"주요 임차 업종 만기 조율 필요","hiddenFields":["exact_address","seller_motivation"],"confidence":{"areaSignal":"confirmed","assetType":"confirmed","priceBand":"ai_hypothesis","fitSummary":"ai_hypothesis"},"missingData":["sizeSignal"],"boundaryNote":"본 자료는 실거래 통계 기반 참고치입니다.","buyerType":"법인 사옥형","budgetRange":{"min":50,"max":80,"display":"50억~80억"},"preferredRegions":["강남","성수"],"assetTypes":["꼬마빌딩","사옥용"],"purchasePurpose":"사옥용 매입","mustHave":["초역세권","주차"],"niceToHave":["테라스","루프탑"],"riskTolerance":"medium","financingNote":"자본금 50% 준비","missingQuestions":["구체적인 입주 시기가 언제인가요?","선호하는 수익률이 있나요?"],"privacyNotes":["연락처 비공개"],"fitReasons":["매수자 예산(50-80억)에 부합하는 매물입니다.","요청하신 성수/강남 권역에 해당합니다."],"cautionReasons":["요청한 용도와 달리 명도 협의가 다소 필요합니다."],"recommendedNextAction":"현장 답사 제안","kakaoMessage":"안녕하세요! 요청하신 조건에 부합하는 추천 매물이 있어 안내해 드립니다. 확인해보시고 피드백 부탁드립니다.","title":"강남 역삼역 초역세권 오피스 사옥용 빌딩 매각","shortSummary":"역삼역 도보 5분 거리의 준신축급 대형 오피스빌딩입니다.","dealPoints":["초역세권","사옥 최적"],"cautionPoints":["명도 조율 필요"],"hiddenInfoNotice":["보증금 및 지번은 인가 후 확인 가능"],"gateMessage":"G1 등급 등록이 필요합니다.","kakaoText":"강남 역삼역 오피스 빌딩 매각 안내입니다.","exactUnitCandidate":"101호","floor":"1층","areaSqmText":"150㎡","spaceType":"office","depositText":"5000만","monthlyRentText":"400만","maintenanceFeeText":"50만","availableFromText":"즉시입주","leaseTermMonthsText":"24","incentivesText":"렌트프리 2개월","restrictions":[],"landlordIdentity":"김성수","currentTenant":"스타트업","vacancyReason":"이전 확장","rentNegotiation":"협의 가능","region":"성수동","areaSqm":150,"deposit":5000,"monthlyRent":400,"maintenanceFee":50,"availableFrom":"즉시입주","leaseTermMonths":24,"incentives":{"rentFreeMonths":2,"interiorSupport":"일부 인테리어 지원","freeRentDetail":"렌트프리 2개월 지원"},"shortSummaryLease":"성수역 도보 5분 거리 1층 리테일 상가 매물입니다."}</a:t>
+            </a:r>
+            <a:endParaRPr lang="en-US" sz="1100" dirty="0"/>
+          </a:p>
+        </p:txBody>
+      </p:sp>
+      <p:sp>
+        <p:nvSpPr>
+          <p:cNvPr id="11" name="Text 8"/>
+          <p:cNvSpPr/>
+          <p:nvPr/>
+        </p:nvSpPr>
+        <p:spPr>
+          <a:xfrm>
+            <a:off x="566928" y="6382512"/>
+            <a:ext cx="7315200" cy="219456"/>
+          </a:xfrm>
+          <a:prstGeom prst="rect">
+            <a:avLst/>
+          </a:prstGeom>
+          <a:noFill/>
+          <a:ln/>
+        </p:spPr>
+        <p:txBody>
+          <a:bodyPr wrap="square" lIns="0" tIns="0" rIns="0" bIns="0" rtlCol="0" anchor="ctr"/>
+          <a:lstStyle/>
+          <a:p>
+            <a:pPr indent="0" marL="0">
+              <a:buNone/>
+            </a:pPr>
+            <a:r>
+              <a:rPr lang="en-US" sz="800" dirty="0">
+                <a:solidFill>
+                  <a:srgbClr val="718096"/>
                 </a:solidFill>
                 <a:latin typeface="Pretendard" pitchFamily="34" charset="0"/>
                 <a:ea typeface="Pretendard" pitchFamily="34" charset="-122"/>
                 <a:cs typeface="Pretendard" pitchFamily="34" charset="-120"/>
               </a:rPr>
-              <a:t>크리딜  ·    ·  8</a:t>
-            </a:r>
-            <a:endParaRPr lang="en-US" sz="750" dirty="0"/>
-          </a:p>
-        </p:txBody>
-      </p:sp>
-      <p:sp>
-        <p:nvSpPr>
-          <p:cNvPr id="31" name="Shape 29"/>
-          <p:cNvSpPr/>
-          <p:nvPr/>
-        </p:nvSpPr>
-        <p:spPr>
-          <a:xfrm>
-            <a:off x="4437172" y="6382512"/>
-            <a:ext cx="3317352" cy="0"/>
-          </a:xfrm>
-          <a:prstGeom prst="line">
-            <a:avLst/>
-          </a:prstGeom>
-          <a:noFill/>
-          <a:ln w="6350">
-            <a:solidFill>
-              <a:srgbClr val="6B8E00"/>
-            </a:solidFill>
-            <a:prstDash val="solid"/>
-          </a:ln>
-        </p:spPr>
+              <a:t>크리딜   |   </a:t>
+            </a:r>
+            <a:endParaRPr lang="en-US" sz="800" dirty="0"/>
+          </a:p>
+        </p:txBody>
+      </p:sp>
+      <p:sp>
+        <p:nvSpPr>
+          <p:cNvPr id="12" name="Text 9"/>
+          <p:cNvSpPr/>
+          <p:nvPr/>
+        </p:nvSpPr>
+        <p:spPr>
+          <a:xfrm>
+            <a:off x="10710367" y="6382512"/>
+            <a:ext cx="914400" cy="219456"/>
+          </a:xfrm>
+          <a:prstGeom prst="rect">
+            <a:avLst/>
+          </a:prstGeom>
+          <a:noFill/>
+          <a:ln/>
+        </p:spPr>
+        <p:txBody>
+          <a:bodyPr wrap="square" lIns="0" tIns="0" rIns="0" bIns="0" rtlCol="0" anchor="ctr"/>
+          <a:lstStyle/>
+          <a:p>
+            <a:pPr algn="r" indent="0" marL="0">
+              <a:buNone/>
+            </a:pPr>
+            <a:r>
+              <a:rPr lang="en-US" sz="900" b="1" dirty="0">
+                <a:solidFill>
+                  <a:srgbClr val="B98A2E"/>
+                </a:solidFill>
+                <a:latin typeface="Arial" pitchFamily="34" charset="0"/>
+                <a:ea typeface="Arial" pitchFamily="34" charset="-122"/>
+                <a:cs typeface="Arial" pitchFamily="34" charset="-120"/>
+              </a:rPr>
+              <a:t>8</a:t>
+            </a:r>
+            <a:endParaRPr lang="en-US" sz="900" dirty="0"/>
+          </a:p>
+        </p:txBody>
       </p:sp>
     </p:spTree>
   </p:cSld>
@@ -8686,14 +9522,14 @@
         </p:nvSpPr>
         <p:spPr>
           <a:xfrm>
-            <a:off x="566928" y="384048"/>
-            <a:ext cx="45720" cy="566928"/>
-          </a:xfrm>
-          <a:prstGeom prst="rect">
+            <a:off x="566928" y="457200"/>
+            <a:ext cx="384048" cy="384048"/>
+          </a:xfrm>
+          <a:prstGeom prst="ellipse">
             <a:avLst/>
           </a:prstGeom>
           <a:solidFill>
-            <a:srgbClr val="6B8E00"/>
+            <a:srgbClr val="B98A2E"/>
           </a:solidFill>
           <a:ln/>
         </p:spPr>
@@ -8706,32 +9542,71 @@
         </p:nvSpPr>
         <p:spPr>
           <a:xfrm>
-            <a:off x="749808" y="384048"/>
-            <a:ext cx="10874959" cy="182880"/>
-          </a:xfrm>
-          <a:prstGeom prst="rect">
-            <a:avLst/>
-          </a:prstGeom>
-          <a:noFill/>
-          <a:ln/>
-        </p:spPr>
-        <p:txBody>
-          <a:bodyPr wrap="square" lIns="0" tIns="0" rIns="0" bIns="0" rtlCol="0" anchor="ctr"/>
-          <a:lstStyle/>
-          <a:p>
-            <a:pPr indent="0" marL="0">
-              <a:buNone/>
-            </a:pPr>
-            <a:r>
-              <a:rPr lang="en-US" sz="950" b="1" spc="200" kern="0" dirty="0">
-                <a:solidFill>
-                  <a:srgbClr val="6B8E00"/>
+            <a:off x="566928" y="457200"/>
+            <a:ext cx="384048" cy="384048"/>
+          </a:xfrm>
+          <a:prstGeom prst="rect">
+            <a:avLst/>
+          </a:prstGeom>
+          <a:noFill/>
+          <a:ln/>
+        </p:spPr>
+        <p:txBody>
+          <a:bodyPr wrap="square" lIns="0" tIns="0" rIns="0" bIns="0" rtlCol="0" anchor="ctr"/>
+          <a:lstStyle/>
+          <a:p>
+            <a:pPr algn="ctr" indent="0" marL="0">
+              <a:buNone/>
+            </a:pPr>
+            <a:r>
+              <a:rPr lang="en-US" sz="1300" b="1" dirty="0">
+                <a:solidFill>
+                  <a:srgbClr val="FFFFFF"/>
                 </a:solidFill>
                 <a:latin typeface="Arial" pitchFamily="34" charset="0"/>
                 <a:ea typeface="Arial" pitchFamily="34" charset="-122"/>
                 <a:cs typeface="Arial" pitchFamily="34" charset="-120"/>
               </a:rPr>
-              <a:t>09  Process</a:t>
+              <a:t>09</a:t>
+            </a:r>
+            <a:endParaRPr lang="en-US" sz="1300" dirty="0"/>
+          </a:p>
+        </p:txBody>
+      </p:sp>
+      <p:sp>
+        <p:nvSpPr>
+          <p:cNvPr id="4" name="Text 2"/>
+          <p:cNvSpPr/>
+          <p:nvPr/>
+        </p:nvSpPr>
+        <p:spPr>
+          <a:xfrm>
+            <a:off x="1133856" y="457200"/>
+            <a:ext cx="10490911" cy="182880"/>
+          </a:xfrm>
+          <a:prstGeom prst="rect">
+            <a:avLst/>
+          </a:prstGeom>
+          <a:noFill/>
+          <a:ln/>
+        </p:spPr>
+        <p:txBody>
+          <a:bodyPr wrap="square" lIns="0" tIns="0" rIns="0" bIns="0" rtlCol="0" anchor="ctr"/>
+          <a:lstStyle/>
+          <a:p>
+            <a:pPr indent="0" marL="0">
+              <a:buNone/>
+            </a:pPr>
+            <a:r>
+              <a:rPr lang="en-US" sz="950" b="1" spc="200" kern="0" dirty="0">
+                <a:solidFill>
+                  <a:srgbClr val="B98A2E"/>
+                </a:solidFill>
+                <a:latin typeface="Arial" pitchFamily="34" charset="0"/>
+                <a:ea typeface="Arial" pitchFamily="34" charset="-122"/>
+                <a:cs typeface="Arial" pitchFamily="34" charset="-120"/>
+              </a:rPr>
+              <a:t>Process</a:t>
             </a:r>
             <a:endParaRPr lang="en-US" sz="950" dirty="0"/>
           </a:p>
@@ -8739,14 +9614,14 @@
       </p:sp>
       <p:sp>
         <p:nvSpPr>
-          <p:cNvPr id="4" name="Text 2"/>
-          <p:cNvSpPr/>
-          <p:nvPr/>
-        </p:nvSpPr>
-        <p:spPr>
-          <a:xfrm>
-            <a:off x="749808" y="566928"/>
-            <a:ext cx="10874959" cy="384048"/>
+          <p:cNvPr id="5" name="Text 3"/>
+          <p:cNvSpPr/>
+          <p:nvPr/>
+        </p:nvSpPr>
+        <p:spPr>
+          <a:xfrm>
+            <a:off x="1133856" y="640080"/>
+            <a:ext cx="10490911" cy="365760"/>
           </a:xfrm>
           <a:prstGeom prst="rect">
             <a:avLst/>
@@ -8762,9 +9637,9 @@
               <a:buNone/>
             </a:pPr>
             <a:r>
-              <a:rPr lang="en-US" sz="2200" b="1" dirty="0">
-                <a:solidFill>
-                  <a:srgbClr val="0F172A"/>
+              <a:rPr lang="en-US" sz="2300" b="1" dirty="0">
+                <a:solidFill>
+                  <a:srgbClr val="10161F"/>
                 </a:solidFill>
                 <a:latin typeface="Pretendard" pitchFamily="34" charset="0"/>
                 <a:ea typeface="Pretendard" pitchFamily="34" charset="-122"/>
@@ -8772,13 +9647,13 @@
               </a:rPr>
               <a:t>검토 후 다음 단계는 무엇인가</a:t>
             </a:r>
-            <a:endParaRPr lang="en-US" sz="2200" dirty="0"/>
-          </a:p>
-        </p:txBody>
-      </p:sp>
-      <p:sp>
-        <p:nvSpPr>
-          <p:cNvPr id="5" name="Shape 3"/>
+            <a:endParaRPr lang="en-US" sz="2300" dirty="0"/>
+          </a:p>
+        </p:txBody>
+      </p:sp>
+      <p:sp>
+        <p:nvSpPr>
+          <p:cNvPr id="6" name="Shape 4"/>
           <p:cNvSpPr/>
           <p:nvPr/>
         </p:nvSpPr>
@@ -8787,15 +9662,17 @@
             <a:off x="566928" y="1572768"/>
             <a:ext cx="11057839" cy="3200400"/>
           </a:xfrm>
-          <a:prstGeom prst="rect">
-            <a:avLst/>
+          <a:prstGeom prst="roundRect">
+            <a:avLst>
+              <a:gd name="adj" fmla="val 1714"/>
+            </a:avLst>
           </a:prstGeom>
           <a:solidFill>
-            <a:srgbClr val="F8FAFC"/>
+            <a:srgbClr val="F7FAFC"/>
           </a:solidFill>
-          <a:ln w="3810">
+          <a:ln w="6350">
             <a:solidFill>
-              <a:srgbClr val="CBD5E1"/>
+              <a:srgbClr val="CBD5E0"/>
             </a:solidFill>
             <a:prstDash val="solid"/>
           </a:ln>
@@ -8803,26 +9680,6 @@
       </p:sp>
       <p:sp>
         <p:nvSpPr>
-          <p:cNvPr id="6" name="Shape 4"/>
-          <p:cNvSpPr/>
-          <p:nvPr/>
-        </p:nvSpPr>
-        <p:spPr>
-          <a:xfrm>
-            <a:off x="566928" y="1572768"/>
-            <a:ext cx="11057839" cy="36576"/>
-          </a:xfrm>
-          <a:prstGeom prst="rect">
-            <a:avLst/>
-          </a:prstGeom>
-          <a:solidFill>
-            <a:srgbClr val="6B8E00"/>
-          </a:solidFill>
-          <a:ln/>
-        </p:spPr>
-      </p:sp>
-      <p:sp>
-        <p:nvSpPr>
           <p:cNvPr id="7" name="Shape 5"/>
           <p:cNvSpPr/>
           <p:nvPr/>
@@ -8836,7 +9693,7 @@
             <a:avLst/>
           </a:prstGeom>
           <a:solidFill>
-            <a:srgbClr val="6B8E00"/>
+            <a:srgbClr val="B98A2E"/>
           </a:solidFill>
           <a:ln/>
         </p:spPr>
@@ -8907,7 +9764,7 @@
             <a:r>
               <a:rPr lang="en-US" sz="1600" b="1" dirty="0">
                 <a:solidFill>
-                  <a:srgbClr val="0F172A"/>
+                  <a:srgbClr val="10161F"/>
                 </a:solidFill>
                 <a:latin typeface="Pretendard" pitchFamily="34" charset="0"/>
                 <a:ea typeface="Pretendard" pitchFamily="34" charset="-122"/>
@@ -8946,7 +9803,7 @@
             <a:r>
               <a:rPr lang="en-US" sz="1100" dirty="0">
                 <a:solidFill>
-                  <a:srgbClr val="0F172A"/>
+                  <a:srgbClr val="10161F"/>
                 </a:solidFill>
                 <a:latin typeface="Pretendard" pitchFamily="34" charset="0"/>
                 <a:ea typeface="Pretendard" pitchFamily="34" charset="-122"/>
@@ -8966,59 +9823,75 @@
         </p:nvSpPr>
         <p:spPr>
           <a:xfrm>
-            <a:off x="566928" y="6419088"/>
-            <a:ext cx="11057839" cy="201168"/>
-          </a:xfrm>
-          <a:prstGeom prst="rect">
-            <a:avLst/>
-          </a:prstGeom>
-          <a:noFill/>
-          <a:ln/>
-        </p:spPr>
-        <p:txBody>
-          <a:bodyPr wrap="square" lIns="0" tIns="0" rIns="0" bIns="0" rtlCol="0" anchor="ctr"/>
-          <a:lstStyle/>
-          <a:p>
-            <a:pPr algn="ctr" indent="0" marL="0">
-              <a:buNone/>
-            </a:pPr>
-            <a:r>
-              <a:rPr lang="en-US" sz="750" dirty="0">
-                <a:solidFill>
-                  <a:srgbClr val="64748B"/>
+            <a:off x="566928" y="6382512"/>
+            <a:ext cx="7315200" cy="219456"/>
+          </a:xfrm>
+          <a:prstGeom prst="rect">
+            <a:avLst/>
+          </a:prstGeom>
+          <a:noFill/>
+          <a:ln/>
+        </p:spPr>
+        <p:txBody>
+          <a:bodyPr wrap="square" lIns="0" tIns="0" rIns="0" bIns="0" rtlCol="0" anchor="ctr"/>
+          <a:lstStyle/>
+          <a:p>
+            <a:pPr indent="0" marL="0">
+              <a:buNone/>
+            </a:pPr>
+            <a:r>
+              <a:rPr lang="en-US" sz="800" dirty="0">
+                <a:solidFill>
+                  <a:srgbClr val="718096"/>
                 </a:solidFill>
                 <a:latin typeface="Pretendard" pitchFamily="34" charset="0"/>
                 <a:ea typeface="Pretendard" pitchFamily="34" charset="-122"/>
                 <a:cs typeface="Pretendard" pitchFamily="34" charset="-120"/>
               </a:rPr>
-              <a:t>크리딜  ·    ·  9</a:t>
-            </a:r>
-            <a:endParaRPr lang="en-US" sz="750" dirty="0"/>
-          </a:p>
-        </p:txBody>
-      </p:sp>
-      <p:sp>
-        <p:nvSpPr>
-          <p:cNvPr id="12" name="Shape 10"/>
-          <p:cNvSpPr/>
-          <p:nvPr/>
-        </p:nvSpPr>
-        <p:spPr>
-          <a:xfrm>
-            <a:off x="4437172" y="6382512"/>
-            <a:ext cx="3317352" cy="0"/>
-          </a:xfrm>
-          <a:prstGeom prst="line">
-            <a:avLst/>
-          </a:prstGeom>
-          <a:noFill/>
-          <a:ln w="6350">
-            <a:solidFill>
-              <a:srgbClr val="6B8E00"/>
-            </a:solidFill>
-            <a:prstDash val="solid"/>
-          </a:ln>
-        </p:spPr>
+              <a:t>크리딜   |   </a:t>
+            </a:r>
+            <a:endParaRPr lang="en-US" sz="800" dirty="0"/>
+          </a:p>
+        </p:txBody>
+      </p:sp>
+      <p:sp>
+        <p:nvSpPr>
+          <p:cNvPr id="12" name="Text 10"/>
+          <p:cNvSpPr/>
+          <p:nvPr/>
+        </p:nvSpPr>
+        <p:spPr>
+          <a:xfrm>
+            <a:off x="10710367" y="6382512"/>
+            <a:ext cx="914400" cy="219456"/>
+          </a:xfrm>
+          <a:prstGeom prst="rect">
+            <a:avLst/>
+          </a:prstGeom>
+          <a:noFill/>
+          <a:ln/>
+        </p:spPr>
+        <p:txBody>
+          <a:bodyPr wrap="square" lIns="0" tIns="0" rIns="0" bIns="0" rtlCol="0" anchor="ctr"/>
+          <a:lstStyle/>
+          <a:p>
+            <a:pPr algn="r" indent="0" marL="0">
+              <a:buNone/>
+            </a:pPr>
+            <a:r>
+              <a:rPr lang="en-US" sz="900" b="1" dirty="0">
+                <a:solidFill>
+                  <a:srgbClr val="B98A2E"/>
+                </a:solidFill>
+                <a:latin typeface="Arial" pitchFamily="34" charset="0"/>
+                <a:ea typeface="Arial" pitchFamily="34" charset="-122"/>
+                <a:cs typeface="Arial" pitchFamily="34" charset="-120"/>
+              </a:rPr>
+              <a:t>9</a:t>
+            </a:r>
+            <a:endParaRPr lang="en-US" sz="900" dirty="0"/>
+          </a:p>
+        </p:txBody>
       </p:sp>
     </p:spTree>
   </p:cSld>

--- a/docs/test/stress/e2e-outputs/trading_case09_sinsa_value_add_basic.pptx
+++ b/docs/test/stress/e2e-outputs/trading_case09_sinsa_value_add_basic.pptx
@@ -5160,6 +5160,45 @@
         <p:spPr>
           <a:xfrm>
             <a:off x="6053328" y="1481328"/>
+            <a:ext cx="5571439" cy="237744"/>
+          </a:xfrm>
+          <a:prstGeom prst="rect">
+            <a:avLst/>
+          </a:prstGeom>
+          <a:noFill/>
+          <a:ln/>
+        </p:spPr>
+        <p:txBody>
+          <a:bodyPr wrap="square" lIns="0" tIns="0" rIns="0" bIns="0" rtlCol="0" anchor="ctr"/>
+          <a:lstStyle/>
+          <a:p>
+            <a:pPr indent="0" marL="0">
+              <a:buNone/>
+            </a:pPr>
+            <a:r>
+              <a:rPr lang="en-US" sz="1100" b="1" dirty="0">
+                <a:solidFill>
+                  <a:srgbClr val="10161F"/>
+                </a:solidFill>
+                <a:latin typeface="Pretendard" pitchFamily="34" charset="0"/>
+                <a:ea typeface="Pretendard" pitchFamily="34" charset="-122"/>
+                <a:cs typeface="Pretendard" pitchFamily="34" charset="-120"/>
+              </a:rPr>
+              <a:t>[교통] 교통 및 도로 접근성</a:t>
+            </a:r>
+            <a:endParaRPr lang="en-US" sz="1100" dirty="0"/>
+          </a:p>
+        </p:txBody>
+      </p:sp>
+      <p:sp>
+        <p:nvSpPr>
+          <p:cNvPr id="8" name="Text 5"/>
+          <p:cNvSpPr/>
+          <p:nvPr/>
+        </p:nvSpPr>
+        <p:spPr>
+          <a:xfrm>
+            <a:off x="6053328" y="1801368"/>
             <a:ext cx="2117147" cy="493776"/>
           </a:xfrm>
           <a:prstGeom prst="rect">
@@ -5187,7 +5226,7 @@
                 <a:ea typeface="Pretendard" pitchFamily="34" charset="-122"/>
                 <a:cs typeface="Pretendard" pitchFamily="34" charset="-120"/>
               </a:rPr>
-              <a:t>교통 접근성</a:t>
+              <a:t>교통 접근성 상세 정보는 담당 브로커를 통해 확인하</a:t>
             </a:r>
             <a:endParaRPr lang="en-US" sz="1300" dirty="0"/>
           </a:p>
@@ -5195,13 +5234,13 @@
       </p:sp>
       <p:sp>
         <p:nvSpPr>
-          <p:cNvPr id="8" name="Text 5"/>
-          <p:cNvSpPr/>
-          <p:nvPr/>
-        </p:nvSpPr>
-        <p:spPr>
-          <a:xfrm>
-            <a:off x="8170475" y="1481328"/>
+          <p:cNvPr id="9" name="Text 6"/>
+          <p:cNvSpPr/>
+          <p:nvPr/>
+        </p:nvSpPr>
+        <p:spPr>
+          <a:xfrm>
+            <a:off x="8170475" y="1801368"/>
             <a:ext cx="3454292" cy="493776"/>
           </a:xfrm>
           <a:prstGeom prst="rect">
@@ -5220,16 +5259,70 @@
               </a:lnSpc>
               <a:buNone/>
             </a:pPr>
-            <a:r>
-              <a:rPr lang="en-US" sz="1300" b="1" dirty="0">
-                <a:solidFill>
-                  <a:srgbClr val="10161F"/>
+            <a:endParaRPr lang="en-US" sz="1300" dirty="0"/>
+          </a:p>
+        </p:txBody>
+      </p:sp>
+      <p:sp>
+        <p:nvSpPr>
+          <p:cNvPr id="10" name="Shape 7"/>
+          <p:cNvSpPr/>
+          <p:nvPr/>
+        </p:nvSpPr>
+        <p:spPr>
+          <a:xfrm>
+            <a:off x="6053328" y="2295144"/>
+            <a:ext cx="5571439" cy="0"/>
+          </a:xfrm>
+          <a:prstGeom prst="line">
+            <a:avLst/>
+          </a:prstGeom>
+          <a:noFill/>
+          <a:ln w="3810">
+            <a:solidFill>
+              <a:srgbClr val="CBD5E0"/>
+            </a:solidFill>
+            <a:prstDash val="solid"/>
+          </a:ln>
+        </p:spPr>
+      </p:sp>
+      <p:sp>
+        <p:nvSpPr>
+          <p:cNvPr id="11" name="Text 8"/>
+          <p:cNvSpPr/>
+          <p:nvPr/>
+        </p:nvSpPr>
+        <p:spPr>
+          <a:xfrm>
+            <a:off x="6053328" y="2295144"/>
+            <a:ext cx="2117147" cy="493776"/>
+          </a:xfrm>
+          <a:prstGeom prst="rect">
+            <a:avLst/>
+          </a:prstGeom>
+          <a:noFill/>
+          <a:ln/>
+        </p:spPr>
+        <p:txBody>
+          <a:bodyPr wrap="square" lIns="0" tIns="0" rIns="0" bIns="0" rtlCol="0" anchor="ctr"/>
+          <a:lstStyle/>
+          <a:p>
+            <a:pPr indent="0" marL="0">
+              <a:lnSpc>
+                <a:spcPct val="120000"/>
+              </a:lnSpc>
+              <a:buNone/>
+            </a:pPr>
+            <a:r>
+              <a:rPr lang="en-US" sz="1300" dirty="0">
+                <a:solidFill>
+                  <a:srgbClr val="718096"/>
                 </a:solidFill>
                 <a:latin typeface="Pretendard" pitchFamily="34" charset="0"/>
                 <a:ea typeface="Pretendard" pitchFamily="34" charset="-122"/>
                 <a:cs typeface="Pretendard" pitchFamily="34" charset="-120"/>
               </a:rPr>
-              <a:t>{"ok":true,"mocked":true,"extractedFields":{"area_signal":"역삼","asset_type":"오피스빌딩","price_band":"300억","size_signal":"3000평(약 9917.</a:t>
+              <a:t>[건물] 주변 상권</a:t>
             </a:r>
             <a:endParaRPr lang="en-US" sz="1300" dirty="0"/>
           </a:p>
@@ -5237,14 +5330,14 @@
       </p:sp>
       <p:sp>
         <p:nvSpPr>
-          <p:cNvPr id="9" name="Text 6"/>
-          <p:cNvSpPr/>
-          <p:nvPr/>
-        </p:nvSpPr>
-        <p:spPr>
-          <a:xfrm>
-            <a:off x="566928" y="6382512"/>
-            <a:ext cx="7315200" cy="219456"/>
+          <p:cNvPr id="12" name="Text 9"/>
+          <p:cNvSpPr/>
+          <p:nvPr/>
+        </p:nvSpPr>
+        <p:spPr>
+          <a:xfrm>
+            <a:off x="8170475" y="2295144"/>
+            <a:ext cx="3454292" cy="493776"/>
           </a:xfrm>
           <a:prstGeom prst="rect">
             <a:avLst/>
@@ -5257,17 +5350,155 @@
           <a:lstStyle/>
           <a:p>
             <a:pPr indent="0" marL="0">
-              <a:buNone/>
-            </a:pPr>
-            <a:r>
-              <a:rPr lang="en-US" sz="800" dirty="0">
-                <a:solidFill>
-                  <a:srgbClr val="718096"/>
+              <a:lnSpc>
+                <a:spcPct val="120000"/>
+              </a:lnSpc>
+              <a:buNone/>
+            </a:pPr>
+            <a:r>
+              <a:rPr lang="en-US" sz="1300" b="1" dirty="0">
+                <a:solidFill>
+                  <a:srgbClr val="10161F"/>
                 </a:solidFill>
                 <a:latin typeface="Pretendard" pitchFamily="34" charset="0"/>
                 <a:ea typeface="Pretendard" pitchFamily="34" charset="-122"/>
                 <a:cs typeface="Pretendard" pitchFamily="34" charset="-120"/>
               </a:rPr>
+              <a:t>강남권역 내 주요 비즈니스 및 유동인구 풍부한 상권 입지</a:t>
+            </a:r>
+            <a:endParaRPr lang="en-US" sz="1300" dirty="0"/>
+          </a:p>
+        </p:txBody>
+      </p:sp>
+      <p:sp>
+        <p:nvSpPr>
+          <p:cNvPr id="13" name="Shape 10"/>
+          <p:cNvSpPr/>
+          <p:nvPr/>
+        </p:nvSpPr>
+        <p:spPr>
+          <a:xfrm>
+            <a:off x="6053328" y="2788920"/>
+            <a:ext cx="5571439" cy="0"/>
+          </a:xfrm>
+          <a:prstGeom prst="line">
+            <a:avLst/>
+          </a:prstGeom>
+          <a:noFill/>
+          <a:ln w="3810">
+            <a:solidFill>
+              <a:srgbClr val="CBD5E0"/>
+            </a:solidFill>
+            <a:prstDash val="solid"/>
+          </a:ln>
+        </p:spPr>
+      </p:sp>
+      <p:sp>
+        <p:nvSpPr>
+          <p:cNvPr id="14" name="Text 11"/>
+          <p:cNvSpPr/>
+          <p:nvPr/>
+        </p:nvSpPr>
+        <p:spPr>
+          <a:xfrm>
+            <a:off x="6053328" y="2788920"/>
+            <a:ext cx="2117147" cy="493776"/>
+          </a:xfrm>
+          <a:prstGeom prst="rect">
+            <a:avLst/>
+          </a:prstGeom>
+          <a:noFill/>
+          <a:ln/>
+        </p:spPr>
+        <p:txBody>
+          <a:bodyPr wrap="square" lIns="0" tIns="0" rIns="0" bIns="0" rtlCol="0" anchor="ctr"/>
+          <a:lstStyle/>
+          <a:p>
+            <a:pPr indent="0" marL="0">
+              <a:lnSpc>
+                <a:spcPct val="120000"/>
+              </a:lnSpc>
+              <a:buNone/>
+            </a:pPr>
+            <a:r>
+              <a:rPr lang="en-US" sz="1300" dirty="0">
+                <a:solidFill>
+                  <a:srgbClr val="718096"/>
+                </a:solidFill>
+                <a:latin typeface="Pretendard" pitchFamily="34" charset="0"/>
+                <a:ea typeface="Pretendard" pitchFamily="34" charset="-122"/>
+                <a:cs typeface="Pretendard" pitchFamily="34" charset="-120"/>
+              </a:rPr>
+              <a:t>강남권역 내 우수한 접근성과 높은 가시성을 갖춘 핵</a:t>
+            </a:r>
+            <a:endParaRPr lang="en-US" sz="1300" dirty="0"/>
+          </a:p>
+        </p:txBody>
+      </p:sp>
+      <p:sp>
+        <p:nvSpPr>
+          <p:cNvPr id="15" name="Text 12"/>
+          <p:cNvSpPr/>
+          <p:nvPr/>
+        </p:nvSpPr>
+        <p:spPr>
+          <a:xfrm>
+            <a:off x="8170475" y="2788920"/>
+            <a:ext cx="3454292" cy="493776"/>
+          </a:xfrm>
+          <a:prstGeom prst="rect">
+            <a:avLst/>
+          </a:prstGeom>
+          <a:noFill/>
+          <a:ln/>
+        </p:spPr>
+        <p:txBody>
+          <a:bodyPr wrap="square" lIns="0" tIns="0" rIns="0" bIns="0" rtlCol="0" anchor="ctr"/>
+          <a:lstStyle/>
+          <a:p>
+            <a:pPr indent="0" marL="0">
+              <a:lnSpc>
+                <a:spcPct val="120000"/>
+              </a:lnSpc>
+              <a:buNone/>
+            </a:pPr>
+            <a:endParaRPr lang="en-US" sz="1300" dirty="0"/>
+          </a:p>
+        </p:txBody>
+      </p:sp>
+      <p:sp>
+        <p:nvSpPr>
+          <p:cNvPr id="16" name="Text 13"/>
+          <p:cNvSpPr/>
+          <p:nvPr/>
+        </p:nvSpPr>
+        <p:spPr>
+          <a:xfrm>
+            <a:off x="566928" y="6382512"/>
+            <a:ext cx="7315200" cy="219456"/>
+          </a:xfrm>
+          <a:prstGeom prst="rect">
+            <a:avLst/>
+          </a:prstGeom>
+          <a:noFill/>
+          <a:ln/>
+        </p:spPr>
+        <p:txBody>
+          <a:bodyPr wrap="square" lIns="0" tIns="0" rIns="0" bIns="0" rtlCol="0" anchor="ctr"/>
+          <a:lstStyle/>
+          <a:p>
+            <a:pPr indent="0" marL="0">
+              <a:buNone/>
+            </a:pPr>
+            <a:r>
+              <a:rPr lang="en-US" sz="800" dirty="0">
+                <a:solidFill>
+                  <a:srgbClr val="718096"/>
+                </a:solidFill>
+                <a:latin typeface="Pretendard" pitchFamily="34" charset="0"/>
+                <a:ea typeface="Pretendard" pitchFamily="34" charset="-122"/>
+                <a:cs typeface="Pretendard" pitchFamily="34" charset="-120"/>
+              </a:rPr>
               <a:t>크리딜   |   </a:t>
             </a:r>
             <a:endParaRPr lang="en-US" sz="800" dirty="0"/>
@@ -5276,7 +5507,7 @@
       </p:sp>
       <p:sp>
         <p:nvSpPr>
-          <p:cNvPr id="10" name="Text 7"/>
+          <p:cNvPr id="17" name="Text 14"/>
           <p:cNvSpPr/>
           <p:nvPr/>
         </p:nvSpPr>
@@ -5310,45 +5541,6 @@
               <a:t>3</a:t>
             </a:r>
             <a:endParaRPr lang="en-US" sz="900" dirty="0"/>
-          </a:p>
-        </p:txBody>
-      </p:sp>
-      <p:sp>
-        <p:nvSpPr>
-          <p:cNvPr id="11" name="Text 8"/>
-          <p:cNvSpPr/>
-          <p:nvPr/>
-        </p:nvSpPr>
-        <p:spPr>
-          <a:xfrm>
-            <a:off x="566928" y="1481328"/>
-            <a:ext cx="11057839" cy="9692640"/>
-          </a:xfrm>
-          <a:prstGeom prst="rect">
-            <a:avLst/>
-          </a:prstGeom>
-          <a:noFill/>
-          <a:ln/>
-        </p:spPr>
-        <p:txBody>
-          <a:bodyPr wrap="square" lIns="0" tIns="0" rIns="0" bIns="0" rtlCol="0" anchor="t"/>
-          <a:lstStyle/>
-          <a:p>
-            <a:pPr indent="0" marL="0">
-              <a:buNone/>
-            </a:pPr>
-            <a:r>
-              <a:rPr lang="en-US" sz="1000" dirty="0">
-                <a:solidFill>
-                  <a:srgbClr val="10161F"/>
-                </a:solidFill>
-                <a:latin typeface="Pretendard" pitchFamily="34" charset="0"/>
-                <a:ea typeface="Pretendard" pitchFamily="34" charset="-122"/>
-                <a:cs typeface="Pretendard" pitchFamily="34" charset="-120"/>
-              </a:rPr>
-              <a:t>{"ok":true,"mocked":true,"extractedFields":{"area_signal":"역삼","asset_type":"오피스빌딩","price_band":"300억","size_signal":"3000평(약 9917.4㎡)"},"extractedFacts":{"region":"역삼","exactAddressCandidate":"역삼동 742-1","assetType":"오피스빌딩","priceText":"300억","sizeText":"3000평(약 9917.4㎡)","currentUse":"오피스","currentUseSignal":"근린생활시설","leaseSignal":"임대중","vacancySignal":"공실없음","tenantNames":["쿠팡","네이버"],"unitRentTexts":["301호: 1500만"],"sellerMotivationText":"자산 효율화","brokerNotes":["초역세권 매물"]},"detectedSensitiveFields":["exact_address","tenant_name"],"ambiguousFields":[],"warnings":[],"areaSignal":"역삼","assetType":"오피스빌딩","priceBand":"300억","sizeSignal":"3000평(약 9917.4㎡)","dealType":"매각","buildingName":"역삼 센트럴타워","exactAddress":"역삼동 742-1","totalFloorArea":9917.3,"buildYear":2015,"currentUseSignal":"근린생활시설","vacancySignal":"공실 없음","fitSummary":"초역세권 근생 빌딩으로 시행/사옥 매입에 최적화","cautionSummary":"주요 임차 업종 만기 조율 필요","hiddenFields":["exact_address","seller_motivation"],"confidence":{"areaSignal":"confirmed","assetType":"confirmed","priceBand":"ai_hypothesis","fitSummary":"ai_hypothesis"},"missingData":["sizeSignal"],"boundaryNote":"본 자료는 실거래 통계 기반 참고치입니다.","buyerType":"법인 사옥형","budgetRange":{"min":50,"max":80,"display":"50억~80억"},"preferredRegions":["강남","성수"],"assetTypes":["꼬마빌딩","사옥용"],"purchasePurpose":"사옥용 매입","mustHave":["초역세권","주차"],"niceToHave":["테라스","루프탑"],"riskTolerance":"medium","financingNote":"자본금 50% 준비","missingQuestions":["구체적인 입주 시기가 언제인가요?","선호하는 수익률이 있나요?"],"privacyNotes":["연락처 비공개"],"fitReasons":["매수자 예산(50-80억)에 부합하는 매물입니다.","요청하신 성수/강남 권역에 해당합니다."],"cautionReasons":["요청한 용도와 달리 명도 협의가 다소 필요합니다."],"recommendedNextAction":"현장 답사 제안","kakaoMessage":"안녕하세요! 요청하신 조건에 부합하는 추천 매물이 있어 안내해 드립니다. 확인해보시고 피드백 부탁드립니다.","title":"강남 역삼역 초역세권 오피스 사옥용 빌딩 매각","shortSummary":"역삼역 도보 5분 거리의 준신축급 대형 오피스빌딩입니다.","dealPoints":["초역세권","사옥 최적"],"cautionPoints":["명도 조율 필요"],"hiddenInfoNotice":["보증금 및 지번은 인가 후 확인 가능"],"gateMessage":"G1 등급 등록이 필요합니다.","kakaoText":"강남 역삼역 오피스 빌딩 매각 안내입니다.","exactUnitCandidate":"101호","floor":"1층","areaSqmText":"150㎡","spaceType":"office","depositText":"5000만","monthlyRentText":"400만","maintenanceFeeText":"50만","availableFromText":"즉시입주","leaseTermMonthsText":"24","incentivesText":"렌트프리 2개월","restrictions":[],"landlordIdentity":"김성수","currentTenant":"스타트업","vacancyReason":"이전 확장","rentNegotiation":"협의 가능","region":"성수동","areaSqm":150,"deposit":5000,"monthlyRent":400,"maintenanceFee":50,"availableFrom":"즉시입주","leaseTermMonths":24,"incentives":{"rentFreeMonths":2,"interiorSupport":"일부 인테리어 지원","freeRentDetail":"렌트프리 2개월 지원"},"shortSummaryLease":"성수역 도보 5분 거리 1층 리테일 상가 매물입니다."}</a:t>
-            </a:r>
-            <a:endParaRPr lang="en-US" sz="1000" dirty="0"/>
           </a:p>
         </p:txBody>
       </p:sp>
@@ -7387,16 +7579,1137 @@
           </a:p>
         </p:txBody>
       </p:sp>
-      <p:sp>
-        <p:nvSpPr>
-          <p:cNvPr id="6" name="Text 4"/>
-          <p:cNvSpPr/>
-          <p:nvPr/>
-        </p:nvSpPr>
-        <p:spPr>
-          <a:xfrm>
-            <a:off x="566928" y="1645920"/>
-            <a:ext cx="4201979" cy="402336"/>
+      <p:graphicFrame>
+        <p:nvGraphicFramePr>
+          <p:cNvPr id="7" name="Table 0"/>
+          <p:cNvGraphicFramePr>
+            <a:graphicFrameLocks noGrp="1"/>
+          </p:cNvGraphicFramePr>
+          <p:nvPr>
+            <p:extLst>
+              <p:ext uri="{D42A27DB-BD31-4B8C-83A1-F6EECF244321}">
+                <p14:modId xmlns:p14="http://schemas.microsoft.com/office/powerpoint/2010/main" val="1579011935"/>
+              </p:ext>
+            </p:extLst>
+          </p:nvPr>
+        </p:nvGraphicFramePr>
+        <p:xfrm>
+          <a:off x="566928" y="1645920"/>
+          <a:ext cx="11057839" cy="914400"/>
+        </p:xfrm>
+        <a:graphic>
+          <a:graphicData uri="http://schemas.openxmlformats.org/drawingml/2006/table">
+            <a:tbl>
+              <a:tblPr/>
+              <a:tblGrid>
+                <a:gridCol w="2551809"/>
+                <a:gridCol w="4253015"/>
+                <a:gridCol w="4253015"/>
+              </a:tblGrid>
+              <a:tr h="457200">
+                <a:tc>
+                  <a:txBody>
+                    <a:bodyPr/>
+                    <a:lstStyle/>
+                    <a:p>
+                      <a:pPr indent="0" marL="0">
+                        <a:buNone/>
+                      </a:pPr>
+                      <a:r>
+                        <a:rPr lang="en-US" sz="1300" b="1" dirty="0">
+                          <a:solidFill>
+                            <a:srgbClr val="718096"/>
+                          </a:solidFill>
+                          <a:latin typeface="Pretendard" pitchFamily="34" charset="0"/>
+                          <a:ea typeface="Pretendard" pitchFamily="34" charset="-122"/>
+                          <a:cs typeface="Pretendard" pitchFamily="34" charset="-120"/>
+                        </a:rPr>
+                        <a:t>구분</a:t>
+                      </a:r>
+                      <a:endParaRPr lang="en-US" sz="1300" dirty="0">
+                        <a:latin typeface="Pretendard" charset="0"/>
+                        <a:ea typeface="Pretendard" charset="0"/>
+                        <a:cs typeface="Pretendard" charset="0"/>
+                      </a:endParaRPr>
+                    </a:p>
+                  </a:txBody>
+                  <a:tcPr marL="50800" marR="50800" marT="25400" marB="25400" anchor="ctr">
+                    <a:lnL w="3810" cap="flat" cmpd="sng" algn="ctr">
+                      <a:solidFill>
+                        <a:srgbClr val="CBD5E0"/>
+                      </a:solidFill>
+                      <a:prstDash val="solid"/>
+                      <a:round/>
+                      <a:headEnd type="none" w="med" len="med"/>
+                      <a:tailEnd type="none" w="med" len="med"/>
+                    </a:lnL>
+                    <a:lnR w="3810" cap="flat" cmpd="sng" algn="ctr">
+                      <a:solidFill>
+                        <a:srgbClr val="CBD5E0"/>
+                      </a:solidFill>
+                      <a:prstDash val="solid"/>
+                      <a:round/>
+                      <a:headEnd type="none" w="med" len="med"/>
+                      <a:tailEnd type="none" w="med" len="med"/>
+                    </a:lnR>
+                    <a:lnT w="3810" cap="flat" cmpd="sng" algn="ctr">
+                      <a:solidFill>
+                        <a:srgbClr val="CBD5E0"/>
+                      </a:solidFill>
+                      <a:prstDash val="solid"/>
+                      <a:round/>
+                      <a:headEnd type="none" w="med" len="med"/>
+                      <a:tailEnd type="none" w="med" len="med"/>
+                    </a:lnT>
+                    <a:lnB w="3810" cap="flat" cmpd="sng" algn="ctr">
+                      <a:solidFill>
+                        <a:srgbClr val="CBD5E0"/>
+                      </a:solidFill>
+                      <a:prstDash val="solid"/>
+                      <a:round/>
+                      <a:headEnd type="none" w="med" len="med"/>
+                      <a:tailEnd type="none" w="med" len="med"/>
+                    </a:lnB>
+                    <a:solidFill>
+                      <a:srgbClr val="F7FAFC"/>
+                    </a:solidFill>
+                  </a:tcPr>
+                </a:tc>
+                <a:tc>
+                  <a:txBody>
+                    <a:bodyPr/>
+                    <a:lstStyle/>
+                    <a:p>
+                      <a:pPr indent="0" marL="0">
+                        <a:buNone/>
+                      </a:pPr>
+                      <a:r>
+                        <a:rPr lang="en-US" sz="1300" b="1" dirty="0">
+                          <a:solidFill>
+                            <a:srgbClr val="718096"/>
+                          </a:solidFill>
+                          <a:latin typeface="Pretendard" pitchFamily="34" charset="0"/>
+                          <a:ea typeface="Pretendard" pitchFamily="34" charset="-122"/>
+                          <a:cs typeface="Pretendard" pitchFamily="34" charset="-120"/>
+                        </a:rPr>
+                        <a:t>타겟 </a:t>
+                      </a:r>
+                      <a:pPr indent="0" marL="0">
+                        <a:buNone/>
+                      </a:pPr>
+                      <a:r>
+                        <a:rPr lang="en-US" sz="1300" b="1" dirty="0">
+                          <a:solidFill>
+                            <a:srgbClr val="718096"/>
+                          </a:solidFill>
+                          <a:latin typeface="Pretendard" pitchFamily="34" charset="0"/>
+                          <a:ea typeface="Pretendard" pitchFamily="34" charset="-122"/>
+                          <a:cs typeface="Pretendard" pitchFamily="34" charset="-120"/>
+                        </a:rPr>
+                        <a:t>수치</a:t>
+                      </a:r>
+                      <a:endParaRPr lang="en-US" sz="1300" dirty="0">
+                        <a:latin typeface="Pretendard" charset="0"/>
+                        <a:ea typeface="Pretendard" charset="0"/>
+                        <a:cs typeface="Pretendard" charset="0"/>
+                      </a:endParaRPr>
+                    </a:p>
+                  </a:txBody>
+                  <a:tcPr marL="50800" marR="50800" marT="25400" marB="25400" anchor="ctr">
+                    <a:lnL w="3810" cap="flat" cmpd="sng" algn="ctr">
+                      <a:solidFill>
+                        <a:srgbClr val="CBD5E0"/>
+                      </a:solidFill>
+                      <a:prstDash val="solid"/>
+                      <a:round/>
+                      <a:headEnd type="none" w="med" len="med"/>
+                      <a:tailEnd type="none" w="med" len="med"/>
+                    </a:lnL>
+                    <a:lnR w="3810" cap="flat" cmpd="sng" algn="ctr">
+                      <a:solidFill>
+                        <a:srgbClr val="CBD5E0"/>
+                      </a:solidFill>
+                      <a:prstDash val="solid"/>
+                      <a:round/>
+                      <a:headEnd type="none" w="med" len="med"/>
+                      <a:tailEnd type="none" w="med" len="med"/>
+                    </a:lnR>
+                    <a:lnT w="3810" cap="flat" cmpd="sng" algn="ctr">
+                      <a:solidFill>
+                        <a:srgbClr val="CBD5E0"/>
+                      </a:solidFill>
+                      <a:prstDash val="solid"/>
+                      <a:round/>
+                      <a:headEnd type="none" w="med" len="med"/>
+                      <a:tailEnd type="none" w="med" len="med"/>
+                    </a:lnT>
+                    <a:lnB w="3810" cap="flat" cmpd="sng" algn="ctr">
+                      <a:solidFill>
+                        <a:srgbClr val="CBD5E0"/>
+                      </a:solidFill>
+                      <a:prstDash val="solid"/>
+                      <a:round/>
+                      <a:headEnd type="none" w="med" len="med"/>
+                      <a:tailEnd type="none" w="med" len="med"/>
+                    </a:lnB>
+                    <a:solidFill>
+                      <a:srgbClr val="F7FAFC"/>
+                    </a:solidFill>
+                  </a:tcPr>
+                </a:tc>
+                <a:tc>
+                  <a:txBody>
+                    <a:bodyPr/>
+                    <a:lstStyle/>
+                    <a:p>
+                      <a:pPr indent="0" marL="0">
+                        <a:buNone/>
+                      </a:pPr>
+                      <a:r>
+                        <a:rPr lang="en-US" sz="1300" b="1" dirty="0">
+                          <a:solidFill>
+                            <a:srgbClr val="718096"/>
+                          </a:solidFill>
+                          <a:latin typeface="Pretendard" pitchFamily="34" charset="0"/>
+                          <a:ea typeface="Pretendard" pitchFamily="34" charset="-122"/>
+                          <a:cs typeface="Pretendard" pitchFamily="34" charset="-120"/>
+                        </a:rPr>
+                        <a:t>비고</a:t>
+                      </a:r>
+                      <a:endParaRPr lang="en-US" sz="1300" dirty="0">
+                        <a:latin typeface="Pretendard" charset="0"/>
+                        <a:ea typeface="Pretendard" charset="0"/>
+                        <a:cs typeface="Pretendard" charset="0"/>
+                      </a:endParaRPr>
+                    </a:p>
+                  </a:txBody>
+                  <a:tcPr marL="50800" marR="50800" marT="25400" marB="25400" anchor="ctr">
+                    <a:lnL w="3810" cap="flat" cmpd="sng" algn="ctr">
+                      <a:solidFill>
+                        <a:srgbClr val="CBD5E0"/>
+                      </a:solidFill>
+                      <a:prstDash val="solid"/>
+                      <a:round/>
+                      <a:headEnd type="none" w="med" len="med"/>
+                      <a:tailEnd type="none" w="med" len="med"/>
+                    </a:lnL>
+                    <a:lnR w="3810" cap="flat" cmpd="sng" algn="ctr">
+                      <a:solidFill>
+                        <a:srgbClr val="CBD5E0"/>
+                      </a:solidFill>
+                      <a:prstDash val="solid"/>
+                      <a:round/>
+                      <a:headEnd type="none" w="med" len="med"/>
+                      <a:tailEnd type="none" w="med" len="med"/>
+                    </a:lnR>
+                    <a:lnT w="3810" cap="flat" cmpd="sng" algn="ctr">
+                      <a:solidFill>
+                        <a:srgbClr val="CBD5E0"/>
+                      </a:solidFill>
+                      <a:prstDash val="solid"/>
+                      <a:round/>
+                      <a:headEnd type="none" w="med" len="med"/>
+                      <a:tailEnd type="none" w="med" len="med"/>
+                    </a:lnT>
+                    <a:lnB w="3810" cap="flat" cmpd="sng" algn="ctr">
+                      <a:solidFill>
+                        <a:srgbClr val="CBD5E0"/>
+                      </a:solidFill>
+                      <a:prstDash val="solid"/>
+                      <a:round/>
+                      <a:headEnd type="none" w="med" len="med"/>
+                      <a:tailEnd type="none" w="med" len="med"/>
+                    </a:lnB>
+                    <a:solidFill>
+                      <a:srgbClr val="F7FAFC"/>
+                    </a:solidFill>
+                  </a:tcPr>
+                </a:tc>
+              </a:tr>
+              <a:tr h="457200">
+                <a:tc>
+                  <a:txBody>
+                    <a:bodyPr/>
+                    <a:lstStyle/>
+                    <a:p>
+                      <a:pPr indent="0" marL="0">
+                        <a:buNone/>
+                      </a:pPr>
+                      <a:r>
+                        <a:rPr lang="en-US" sz="1300" b="1" dirty="0">
+                          <a:solidFill>
+                            <a:srgbClr val="10161F"/>
+                          </a:solidFill>
+                          <a:latin typeface="Pretendard" pitchFamily="34" charset="0"/>
+                          <a:ea typeface="Pretendard" pitchFamily="34" charset="-122"/>
+                          <a:cs typeface="Pretendard" pitchFamily="34" charset="-120"/>
+                        </a:rPr>
+                        <a:t>목표 </a:t>
+                      </a:r>
+                      <a:pPr indent="0" marL="0">
+                        <a:buNone/>
+                      </a:pPr>
+                      <a:r>
+                        <a:rPr lang="en-US" sz="1300" b="1" dirty="0">
+                          <a:solidFill>
+                            <a:srgbClr val="10161F"/>
+                          </a:solidFill>
+                          <a:latin typeface="Pretendard" pitchFamily="34" charset="0"/>
+                          <a:ea typeface="Pretendard" pitchFamily="34" charset="-122"/>
+                          <a:cs typeface="Pretendard" pitchFamily="34" charset="-120"/>
+                        </a:rPr>
+                        <a:t>매각가</a:t>
+                      </a:r>
+                      <a:endParaRPr lang="en-US" sz="1300" dirty="0">
+                        <a:latin typeface="Pretendard" charset="0"/>
+                        <a:ea typeface="Pretendard" charset="0"/>
+                        <a:cs typeface="Pretendard" charset="0"/>
+                      </a:endParaRPr>
+                    </a:p>
+                  </a:txBody>
+                  <a:tcPr marL="50800" marR="50800" marT="25400" marB="25400" anchor="ctr">
+                    <a:lnL w="3810" cap="flat" cmpd="sng" algn="ctr">
+                      <a:solidFill>
+                        <a:srgbClr val="CBD5E0"/>
+                      </a:solidFill>
+                      <a:prstDash val="solid"/>
+                      <a:round/>
+                      <a:headEnd type="none" w="med" len="med"/>
+                      <a:tailEnd type="none" w="med" len="med"/>
+                    </a:lnL>
+                    <a:lnR w="3810" cap="flat" cmpd="sng" algn="ctr">
+                      <a:solidFill>
+                        <a:srgbClr val="CBD5E0"/>
+                      </a:solidFill>
+                      <a:prstDash val="solid"/>
+                      <a:round/>
+                      <a:headEnd type="none" w="med" len="med"/>
+                      <a:tailEnd type="none" w="med" len="med"/>
+                    </a:lnR>
+                    <a:lnT w="3810" cap="flat" cmpd="sng" algn="ctr">
+                      <a:solidFill>
+                        <a:srgbClr val="CBD5E0"/>
+                      </a:solidFill>
+                      <a:prstDash val="solid"/>
+                      <a:round/>
+                      <a:headEnd type="none" w="med" len="med"/>
+                      <a:tailEnd type="none" w="med" len="med"/>
+                    </a:lnT>
+                    <a:lnB w="3810" cap="flat" cmpd="sng" algn="ctr">
+                      <a:solidFill>
+                        <a:srgbClr val="CBD5E0"/>
+                      </a:solidFill>
+                      <a:prstDash val="solid"/>
+                      <a:round/>
+                      <a:headEnd type="none" w="med" len="med"/>
+                      <a:tailEnd type="none" w="med" len="med"/>
+                    </a:lnB>
+                    <a:solidFill>
+                      <a:srgbClr val="FFFFFF"/>
+                    </a:solidFill>
+                  </a:tcPr>
+                </a:tc>
+                <a:tc>
+                  <a:txBody>
+                    <a:bodyPr/>
+                    <a:lstStyle/>
+                    <a:p>
+                      <a:pPr indent="0" marL="0">
+                        <a:buNone/>
+                      </a:pPr>
+                      <a:r>
+                        <a:rPr lang="en-US" sz="1300" dirty="0">
+                          <a:solidFill>
+                            <a:srgbClr val="10161F"/>
+                          </a:solidFill>
+                          <a:latin typeface="Pretendard" pitchFamily="34" charset="0"/>
+                          <a:ea typeface="Pretendard" pitchFamily="34" charset="-122"/>
+                          <a:cs typeface="Pretendard" pitchFamily="34" charset="-120"/>
+                        </a:rPr>
+                        <a:t>주변 </a:t>
+                      </a:r>
+                      <a:pPr indent="0" marL="0">
+                        <a:buNone/>
+                      </a:pPr>
+                      <a:r>
+                        <a:rPr lang="en-US" sz="1300" dirty="0">
+                          <a:solidFill>
+                            <a:srgbClr val="10161F"/>
+                          </a:solidFill>
+                          <a:latin typeface="Pretendard" pitchFamily="34" charset="0"/>
+                          <a:ea typeface="Pretendard" pitchFamily="34" charset="-122"/>
+                          <a:cs typeface="Pretendard" pitchFamily="34" charset="-120"/>
+                        </a:rPr>
+                        <a:t>시세 </a:t>
+                      </a:r>
+                      <a:pPr indent="0" marL="0">
+                        <a:buNone/>
+                      </a:pPr>
+                      <a:r>
+                        <a:rPr lang="en-US" sz="1300" dirty="0">
+                          <a:solidFill>
+                            <a:srgbClr val="10161F"/>
+                          </a:solidFill>
+                          <a:latin typeface="Pretendard" pitchFamily="34" charset="0"/>
+                          <a:ea typeface="Pretendard" pitchFamily="34" charset="-122"/>
+                          <a:cs typeface="Pretendard" pitchFamily="34" charset="-120"/>
+                        </a:rPr>
+                        <a:t>상단 </a:t>
+                      </a:r>
+                      <a:pPr indent="0" marL="0">
+                        <a:buNone/>
+                      </a:pPr>
+                      <a:r>
+                        <a:rPr lang="en-US" sz="1300" dirty="0">
+                          <a:solidFill>
+                            <a:srgbClr val="10161F"/>
+                          </a:solidFill>
+                          <a:latin typeface="Pretendard" pitchFamily="34" charset="0"/>
+                          <a:ea typeface="Pretendard" pitchFamily="34" charset="-122"/>
+                          <a:cs typeface="Pretendard" pitchFamily="34" charset="-120"/>
+                        </a:rPr>
+                        <a:t>추정</a:t>
+                      </a:r>
+                      <a:endParaRPr lang="en-US" sz="1300" dirty="0">
+                        <a:latin typeface="Pretendard" charset="0"/>
+                        <a:ea typeface="Pretendard" charset="0"/>
+                        <a:cs typeface="Pretendard" charset="0"/>
+                      </a:endParaRPr>
+                    </a:p>
+                  </a:txBody>
+                  <a:tcPr marL="50800" marR="50800" marT="25400" marB="25400" anchor="ctr">
+                    <a:lnL w="3810" cap="flat" cmpd="sng" algn="ctr">
+                      <a:solidFill>
+                        <a:srgbClr val="CBD5E0"/>
+                      </a:solidFill>
+                      <a:prstDash val="solid"/>
+                      <a:round/>
+                      <a:headEnd type="none" w="med" len="med"/>
+                      <a:tailEnd type="none" w="med" len="med"/>
+                    </a:lnL>
+                    <a:lnR w="3810" cap="flat" cmpd="sng" algn="ctr">
+                      <a:solidFill>
+                        <a:srgbClr val="CBD5E0"/>
+                      </a:solidFill>
+                      <a:prstDash val="solid"/>
+                      <a:round/>
+                      <a:headEnd type="none" w="med" len="med"/>
+                      <a:tailEnd type="none" w="med" len="med"/>
+                    </a:lnR>
+                    <a:lnT w="3810" cap="flat" cmpd="sng" algn="ctr">
+                      <a:solidFill>
+                        <a:srgbClr val="CBD5E0"/>
+                      </a:solidFill>
+                      <a:prstDash val="solid"/>
+                      <a:round/>
+                      <a:headEnd type="none" w="med" len="med"/>
+                      <a:tailEnd type="none" w="med" len="med"/>
+                    </a:lnT>
+                    <a:lnB w="3810" cap="flat" cmpd="sng" algn="ctr">
+                      <a:solidFill>
+                        <a:srgbClr val="CBD5E0"/>
+                      </a:solidFill>
+                      <a:prstDash val="solid"/>
+                      <a:round/>
+                      <a:headEnd type="none" w="med" len="med"/>
+                      <a:tailEnd type="none" w="med" len="med"/>
+                    </a:lnB>
+                    <a:solidFill>
+                      <a:srgbClr val="FFFFFF"/>
+                    </a:solidFill>
+                  </a:tcPr>
+                </a:tc>
+                <a:tc>
+                  <a:txBody>
+                    <a:bodyPr/>
+                    <a:lstStyle/>
+                    <a:p>
+                      <a:pPr indent="0" marL="0">
+                        <a:buNone/>
+                      </a:pPr>
+                      <a:r>
+                        <a:rPr lang="en-US" sz="1300" dirty="0">
+                          <a:solidFill>
+                            <a:srgbClr val="10161F"/>
+                          </a:solidFill>
+                          <a:latin typeface="Pretendard" pitchFamily="34" charset="0"/>
+                          <a:ea typeface="Pretendard" pitchFamily="34" charset="-122"/>
+                          <a:cs typeface="Pretendard" pitchFamily="34" charset="-120"/>
+                        </a:rPr>
+                        <a:t>리밸런싱 </a:t>
+                      </a:r>
+                      <a:pPr indent="0" marL="0">
+                        <a:buNone/>
+                      </a:pPr>
+                      <a:r>
+                        <a:rPr lang="en-US" sz="1300" dirty="0">
+                          <a:solidFill>
+                            <a:srgbClr val="10161F"/>
+                          </a:solidFill>
+                          <a:latin typeface="Pretendard" pitchFamily="34" charset="0"/>
+                          <a:ea typeface="Pretendard" pitchFamily="34" charset="-122"/>
+                          <a:cs typeface="Pretendard" pitchFamily="34" charset="-120"/>
+                        </a:rPr>
+                        <a:t>타겟</a:t>
+                      </a:r>
+                      <a:endParaRPr lang="en-US" sz="1300" dirty="0">
+                        <a:latin typeface="Pretendard" charset="0"/>
+                        <a:ea typeface="Pretendard" charset="0"/>
+                        <a:cs typeface="Pretendard" charset="0"/>
+                      </a:endParaRPr>
+                    </a:p>
+                  </a:txBody>
+                  <a:tcPr marL="50800" marR="50800" marT="25400" marB="25400" anchor="ctr">
+                    <a:lnL w="3810" cap="flat" cmpd="sng" algn="ctr">
+                      <a:solidFill>
+                        <a:srgbClr val="CBD5E0"/>
+                      </a:solidFill>
+                      <a:prstDash val="solid"/>
+                      <a:round/>
+                      <a:headEnd type="none" w="med" len="med"/>
+                      <a:tailEnd type="none" w="med" len="med"/>
+                    </a:lnL>
+                    <a:lnR w="3810" cap="flat" cmpd="sng" algn="ctr">
+                      <a:solidFill>
+                        <a:srgbClr val="CBD5E0"/>
+                      </a:solidFill>
+                      <a:prstDash val="solid"/>
+                      <a:round/>
+                      <a:headEnd type="none" w="med" len="med"/>
+                      <a:tailEnd type="none" w="med" len="med"/>
+                    </a:lnR>
+                    <a:lnT w="3810" cap="flat" cmpd="sng" algn="ctr">
+                      <a:solidFill>
+                        <a:srgbClr val="CBD5E0"/>
+                      </a:solidFill>
+                      <a:prstDash val="solid"/>
+                      <a:round/>
+                      <a:headEnd type="none" w="med" len="med"/>
+                      <a:tailEnd type="none" w="med" len="med"/>
+                    </a:lnT>
+                    <a:lnB w="3810" cap="flat" cmpd="sng" algn="ctr">
+                      <a:solidFill>
+                        <a:srgbClr val="CBD5E0"/>
+                      </a:solidFill>
+                      <a:prstDash val="solid"/>
+                      <a:round/>
+                      <a:headEnd type="none" w="med" len="med"/>
+                      <a:tailEnd type="none" w="med" len="med"/>
+                    </a:lnB>
+                    <a:solidFill>
+                      <a:srgbClr val="FFFFFF"/>
+                    </a:solidFill>
+                  </a:tcPr>
+                </a:tc>
+              </a:tr>
+              <a:tr h="457200">
+                <a:tc>
+                  <a:txBody>
+                    <a:bodyPr/>
+                    <a:lstStyle/>
+                    <a:p>
+                      <a:pPr indent="0" marL="0">
+                        <a:buNone/>
+                      </a:pPr>
+                      <a:r>
+                        <a:rPr lang="en-US" sz="1300" b="1" dirty="0">
+                          <a:solidFill>
+                            <a:srgbClr val="10161F"/>
+                          </a:solidFill>
+                          <a:latin typeface="Pretendard" pitchFamily="34" charset="0"/>
+                          <a:ea typeface="Pretendard" pitchFamily="34" charset="-122"/>
+                          <a:cs typeface="Pretendard" pitchFamily="34" charset="-120"/>
+                        </a:rPr>
+                        <a:t>목표 </a:t>
+                      </a:r>
+                      <a:pPr indent="0" marL="0">
+                        <a:buNone/>
+                      </a:pPr>
+                      <a:r>
+                        <a:rPr lang="en-US" sz="1300" b="1" dirty="0">
+                          <a:solidFill>
+                            <a:srgbClr val="10161F"/>
+                          </a:solidFill>
+                          <a:latin typeface="Pretendard" pitchFamily="34" charset="0"/>
+                          <a:ea typeface="Pretendard" pitchFamily="34" charset="-122"/>
+                          <a:cs typeface="Pretendard" pitchFamily="34" charset="-120"/>
+                        </a:rPr>
+                        <a:t>시세차익</a:t>
+                      </a:r>
+                      <a:endParaRPr lang="en-US" sz="1300" dirty="0">
+                        <a:latin typeface="Pretendard" charset="0"/>
+                        <a:ea typeface="Pretendard" charset="0"/>
+                        <a:cs typeface="Pretendard" charset="0"/>
+                      </a:endParaRPr>
+                    </a:p>
+                  </a:txBody>
+                  <a:tcPr marL="50800" marR="50800" marT="25400" marB="25400" anchor="ctr">
+                    <a:lnL w="3810" cap="flat" cmpd="sng" algn="ctr">
+                      <a:solidFill>
+                        <a:srgbClr val="CBD5E0"/>
+                      </a:solidFill>
+                      <a:prstDash val="solid"/>
+                      <a:round/>
+                      <a:headEnd type="none" w="med" len="med"/>
+                      <a:tailEnd type="none" w="med" len="med"/>
+                    </a:lnL>
+                    <a:lnR w="3810" cap="flat" cmpd="sng" algn="ctr">
+                      <a:solidFill>
+                        <a:srgbClr val="CBD5E0"/>
+                      </a:solidFill>
+                      <a:prstDash val="solid"/>
+                      <a:round/>
+                      <a:headEnd type="none" w="med" len="med"/>
+                      <a:tailEnd type="none" w="med" len="med"/>
+                    </a:lnR>
+                    <a:lnT w="3810" cap="flat" cmpd="sng" algn="ctr">
+                      <a:solidFill>
+                        <a:srgbClr val="CBD5E0"/>
+                      </a:solidFill>
+                      <a:prstDash val="solid"/>
+                      <a:round/>
+                      <a:headEnd type="none" w="med" len="med"/>
+                      <a:tailEnd type="none" w="med" len="med"/>
+                    </a:lnT>
+                    <a:lnB w="3810" cap="flat" cmpd="sng" algn="ctr">
+                      <a:solidFill>
+                        <a:srgbClr val="CBD5E0"/>
+                      </a:solidFill>
+                      <a:prstDash val="solid"/>
+                      <a:round/>
+                      <a:headEnd type="none" w="med" len="med"/>
+                      <a:tailEnd type="none" w="med" len="med"/>
+                    </a:lnB>
+                    <a:solidFill>
+                      <a:srgbClr val="F7FAFC"/>
+                    </a:solidFill>
+                  </a:tcPr>
+                </a:tc>
+                <a:tc>
+                  <a:txBody>
+                    <a:bodyPr/>
+                    <a:lstStyle/>
+                    <a:p>
+                      <a:pPr indent="0" marL="0">
+                        <a:buNone/>
+                      </a:pPr>
+                      <a:r>
+                        <a:rPr lang="en-US" sz="1300" dirty="0">
+                          <a:solidFill>
+                            <a:srgbClr val="10161F"/>
+                          </a:solidFill>
+                          <a:latin typeface="Pretendard" pitchFamily="34" charset="0"/>
+                          <a:ea typeface="Pretendard" pitchFamily="34" charset="-122"/>
+                          <a:cs typeface="Pretendard" pitchFamily="34" charset="-120"/>
+                        </a:rPr>
+                        <a:t>매수 </a:t>
+                      </a:r>
+                      <a:pPr indent="0" marL="0">
+                        <a:buNone/>
+                      </a:pPr>
+                      <a:r>
+                        <a:rPr lang="en-US" sz="1300" dirty="0">
+                          <a:solidFill>
+                            <a:srgbClr val="10161F"/>
+                          </a:solidFill>
+                          <a:latin typeface="Pretendard" pitchFamily="34" charset="0"/>
+                          <a:ea typeface="Pretendard" pitchFamily="34" charset="-122"/>
+                          <a:cs typeface="Pretendard" pitchFamily="34" charset="-120"/>
+                        </a:rPr>
+                        <a:t>희망가 </a:t>
+                      </a:r>
+                      <a:pPr indent="0" marL="0">
+                        <a:buNone/>
+                      </a:pPr>
+                      <a:r>
+                        <a:rPr lang="en-US" sz="1300" dirty="0">
+                          <a:solidFill>
+                            <a:srgbClr val="10161F"/>
+                          </a:solidFill>
+                          <a:latin typeface="Pretendard" pitchFamily="34" charset="0"/>
+                          <a:ea typeface="Pretendard" pitchFamily="34" charset="-122"/>
+                          <a:cs typeface="Pretendard" pitchFamily="34" charset="-120"/>
+                        </a:rPr>
+                        <a:t>대비 </a:t>
+                      </a:r>
+                      <a:pPr indent="0" marL="0">
+                        <a:buNone/>
+                      </a:pPr>
+                      <a:r>
+                        <a:rPr lang="en-US" sz="1300" dirty="0">
+                          <a:solidFill>
+                            <a:srgbClr val="10161F"/>
+                          </a:solidFill>
+                          <a:latin typeface="Pretendard" pitchFamily="34" charset="0"/>
+                          <a:ea typeface="Pretendard" pitchFamily="34" charset="-122"/>
+                          <a:cs typeface="Pretendard" pitchFamily="34" charset="-120"/>
+                        </a:rPr>
+                        <a:t>갭</a:t>
+                      </a:r>
+                      <a:endParaRPr lang="en-US" sz="1300" dirty="0">
+                        <a:latin typeface="Pretendard" charset="0"/>
+                        <a:ea typeface="Pretendard" charset="0"/>
+                        <a:cs typeface="Pretendard" charset="0"/>
+                      </a:endParaRPr>
+                    </a:p>
+                  </a:txBody>
+                  <a:tcPr marL="50800" marR="50800" marT="25400" marB="25400" anchor="ctr">
+                    <a:lnL w="3810" cap="flat" cmpd="sng" algn="ctr">
+                      <a:solidFill>
+                        <a:srgbClr val="CBD5E0"/>
+                      </a:solidFill>
+                      <a:prstDash val="solid"/>
+                      <a:round/>
+                      <a:headEnd type="none" w="med" len="med"/>
+                      <a:tailEnd type="none" w="med" len="med"/>
+                    </a:lnL>
+                    <a:lnR w="3810" cap="flat" cmpd="sng" algn="ctr">
+                      <a:solidFill>
+                        <a:srgbClr val="CBD5E0"/>
+                      </a:solidFill>
+                      <a:prstDash val="solid"/>
+                      <a:round/>
+                      <a:headEnd type="none" w="med" len="med"/>
+                      <a:tailEnd type="none" w="med" len="med"/>
+                    </a:lnR>
+                    <a:lnT w="3810" cap="flat" cmpd="sng" algn="ctr">
+                      <a:solidFill>
+                        <a:srgbClr val="CBD5E0"/>
+                      </a:solidFill>
+                      <a:prstDash val="solid"/>
+                      <a:round/>
+                      <a:headEnd type="none" w="med" len="med"/>
+                      <a:tailEnd type="none" w="med" len="med"/>
+                    </a:lnT>
+                    <a:lnB w="3810" cap="flat" cmpd="sng" algn="ctr">
+                      <a:solidFill>
+                        <a:srgbClr val="CBD5E0"/>
+                      </a:solidFill>
+                      <a:prstDash val="solid"/>
+                      <a:round/>
+                      <a:headEnd type="none" w="med" len="med"/>
+                      <a:tailEnd type="none" w="med" len="med"/>
+                    </a:lnB>
+                    <a:solidFill>
+                      <a:srgbClr val="F7FAFC"/>
+                    </a:solidFill>
+                  </a:tcPr>
+                </a:tc>
+                <a:tc>
+                  <a:txBody>
+                    <a:bodyPr/>
+                    <a:lstStyle/>
+                    <a:p>
+                      <a:pPr indent="0" marL="0">
+                        <a:buNone/>
+                      </a:pPr>
+                      <a:r>
+                        <a:rPr lang="en-US" sz="1300" dirty="0">
+                          <a:solidFill>
+                            <a:srgbClr val="10161F"/>
+                          </a:solidFill>
+                          <a:latin typeface="Pretendard" pitchFamily="34" charset="0"/>
+                          <a:ea typeface="Pretendard" pitchFamily="34" charset="-122"/>
+                          <a:cs typeface="Pretendard" pitchFamily="34" charset="-120"/>
+                        </a:rPr>
+                        <a:t>자본 </a:t>
+                      </a:r>
+                      <a:pPr indent="0" marL="0">
+                        <a:buNone/>
+                      </a:pPr>
+                      <a:r>
+                        <a:rPr lang="en-US" sz="1300" dirty="0">
+                          <a:solidFill>
+                            <a:srgbClr val="10161F"/>
+                          </a:solidFill>
+                          <a:latin typeface="Pretendard" pitchFamily="34" charset="0"/>
+                          <a:ea typeface="Pretendard" pitchFamily="34" charset="-122"/>
+                          <a:cs typeface="Pretendard" pitchFamily="34" charset="-120"/>
+                        </a:rPr>
+                        <a:t>이득</a:t>
+                      </a:r>
+                      <a:endParaRPr lang="en-US" sz="1300" dirty="0">
+                        <a:latin typeface="Pretendard" charset="0"/>
+                        <a:ea typeface="Pretendard" charset="0"/>
+                        <a:cs typeface="Pretendard" charset="0"/>
+                      </a:endParaRPr>
+                    </a:p>
+                  </a:txBody>
+                  <a:tcPr marL="50800" marR="50800" marT="25400" marB="25400" anchor="ctr">
+                    <a:lnL w="3810" cap="flat" cmpd="sng" algn="ctr">
+                      <a:solidFill>
+                        <a:srgbClr val="CBD5E0"/>
+                      </a:solidFill>
+                      <a:prstDash val="solid"/>
+                      <a:round/>
+                      <a:headEnd type="none" w="med" len="med"/>
+                      <a:tailEnd type="none" w="med" len="med"/>
+                    </a:lnL>
+                    <a:lnR w="3810" cap="flat" cmpd="sng" algn="ctr">
+                      <a:solidFill>
+                        <a:srgbClr val="CBD5E0"/>
+                      </a:solidFill>
+                      <a:prstDash val="solid"/>
+                      <a:round/>
+                      <a:headEnd type="none" w="med" len="med"/>
+                      <a:tailEnd type="none" w="med" len="med"/>
+                    </a:lnR>
+                    <a:lnT w="3810" cap="flat" cmpd="sng" algn="ctr">
+                      <a:solidFill>
+                        <a:srgbClr val="CBD5E0"/>
+                      </a:solidFill>
+                      <a:prstDash val="solid"/>
+                      <a:round/>
+                      <a:headEnd type="none" w="med" len="med"/>
+                      <a:tailEnd type="none" w="med" len="med"/>
+                    </a:lnT>
+                    <a:lnB w="3810" cap="flat" cmpd="sng" algn="ctr">
+                      <a:solidFill>
+                        <a:srgbClr val="CBD5E0"/>
+                      </a:solidFill>
+                      <a:prstDash val="solid"/>
+                      <a:round/>
+                      <a:headEnd type="none" w="med" len="med"/>
+                      <a:tailEnd type="none" w="med" len="med"/>
+                    </a:lnB>
+                    <a:solidFill>
+                      <a:srgbClr val="F7FAFC"/>
+                    </a:solidFill>
+                  </a:tcPr>
+                </a:tc>
+              </a:tr>
+              <a:tr h="457200">
+                <a:tc>
+                  <a:txBody>
+                    <a:bodyPr/>
+                    <a:lstStyle/>
+                    <a:p>
+                      <a:pPr indent="0" marL="0">
+                        <a:buNone/>
+                      </a:pPr>
+                      <a:r>
+                        <a:rPr lang="en-US" sz="1300" b="1" dirty="0">
+                          <a:solidFill>
+                            <a:srgbClr val="10161F"/>
+                          </a:solidFill>
+                          <a:latin typeface="Pretendard" pitchFamily="34" charset="0"/>
+                          <a:ea typeface="Pretendard" pitchFamily="34" charset="-122"/>
+                          <a:cs typeface="Pretendard" pitchFamily="34" charset="-120"/>
+                        </a:rPr>
+                        <a:t>목표 </a:t>
+                      </a:r>
+                      <a:pPr indent="0" marL="0">
+                        <a:buNone/>
+                      </a:pPr>
+                      <a:r>
+                        <a:rPr lang="en-US" sz="1300" b="1" dirty="0">
+                          <a:solidFill>
+                            <a:srgbClr val="10161F"/>
+                          </a:solidFill>
+                          <a:latin typeface="Pretendard" pitchFamily="34" charset="0"/>
+                          <a:ea typeface="Pretendard" pitchFamily="34" charset="-122"/>
+                          <a:cs typeface="Pretendard" pitchFamily="34" charset="-120"/>
+                        </a:rPr>
+                        <a:t>보유기간 </a:t>
+                      </a:r>
+                      <a:pPr indent="0" marL="0">
+                        <a:buNone/>
+                      </a:pPr>
+                      <a:r>
+                        <a:rPr lang="en-US" sz="1300" b="1" dirty="0">
+                          <a:solidFill>
+                            <a:srgbClr val="10161F"/>
+                          </a:solidFill>
+                          <a:latin typeface="Pretendard" pitchFamily="34" charset="0"/>
+                          <a:ea typeface="Pretendard" pitchFamily="34" charset="-122"/>
+                          <a:cs typeface="Pretendard" pitchFamily="34" charset="-120"/>
+                        </a:rPr>
+                        <a:t>수익률 </a:t>
+                      </a:r>
+                      <a:pPr indent="0" marL="0">
+                        <a:buNone/>
+                      </a:pPr>
+                      <a:r>
+                        <a:rPr lang="en-US" sz="1300" b="1" dirty="0">
+                          <a:solidFill>
+                            <a:srgbClr val="10161F"/>
+                          </a:solidFill>
+                          <a:latin typeface="Pretendard" pitchFamily="34" charset="0"/>
+                          <a:ea typeface="Pretendard" pitchFamily="34" charset="-122"/>
+                          <a:cs typeface="Pretendard" pitchFamily="34" charset="-120"/>
+                        </a:rPr>
+                        <a:t>(HPR)</a:t>
+                      </a:r>
+                      <a:endParaRPr lang="en-US" sz="1300" dirty="0">
+                        <a:latin typeface="Pretendard" charset="0"/>
+                        <a:ea typeface="Pretendard" charset="0"/>
+                        <a:cs typeface="Pretendard" charset="0"/>
+                      </a:endParaRPr>
+                    </a:p>
+                  </a:txBody>
+                  <a:tcPr marL="50800" marR="50800" marT="25400" marB="25400" anchor="ctr">
+                    <a:lnL w="3810" cap="flat" cmpd="sng" algn="ctr">
+                      <a:solidFill>
+                        <a:srgbClr val="CBD5E0"/>
+                      </a:solidFill>
+                      <a:prstDash val="solid"/>
+                      <a:round/>
+                      <a:headEnd type="none" w="med" len="med"/>
+                      <a:tailEnd type="none" w="med" len="med"/>
+                    </a:lnL>
+                    <a:lnR w="3810" cap="flat" cmpd="sng" algn="ctr">
+                      <a:solidFill>
+                        <a:srgbClr val="CBD5E0"/>
+                      </a:solidFill>
+                      <a:prstDash val="solid"/>
+                      <a:round/>
+                      <a:headEnd type="none" w="med" len="med"/>
+                      <a:tailEnd type="none" w="med" len="med"/>
+                    </a:lnR>
+                    <a:lnT w="3810" cap="flat" cmpd="sng" algn="ctr">
+                      <a:solidFill>
+                        <a:srgbClr val="CBD5E0"/>
+                      </a:solidFill>
+                      <a:prstDash val="solid"/>
+                      <a:round/>
+                      <a:headEnd type="none" w="med" len="med"/>
+                      <a:tailEnd type="none" w="med" len="med"/>
+                    </a:lnT>
+                    <a:lnB w="3810" cap="flat" cmpd="sng" algn="ctr">
+                      <a:solidFill>
+                        <a:srgbClr val="CBD5E0"/>
+                      </a:solidFill>
+                      <a:prstDash val="solid"/>
+                      <a:round/>
+                      <a:headEnd type="none" w="med" len="med"/>
+                      <a:tailEnd type="none" w="med" len="med"/>
+                    </a:lnB>
+                    <a:solidFill>
+                      <a:srgbClr val="FFFFFF"/>
+                    </a:solidFill>
+                  </a:tcPr>
+                </a:tc>
+                <a:tc>
+                  <a:txBody>
+                    <a:bodyPr/>
+                    <a:lstStyle/>
+                    <a:p>
+                      <a:pPr indent="0" marL="0">
+                        <a:buNone/>
+                      </a:pPr>
+                      <a:r>
+                        <a:rPr lang="en-US" sz="1300" dirty="0">
+                          <a:solidFill>
+                            <a:srgbClr val="10161F"/>
+                          </a:solidFill>
+                          <a:latin typeface="Pretendard" pitchFamily="34" charset="0"/>
+                          <a:ea typeface="Pretendard" pitchFamily="34" charset="-122"/>
+                          <a:cs typeface="Pretendard" pitchFamily="34" charset="-120"/>
+                        </a:rPr>
+                        <a:t>10% </a:t>
+                      </a:r>
+                      <a:pPr indent="0" marL="0">
+                        <a:buNone/>
+                      </a:pPr>
+                      <a:r>
+                        <a:rPr lang="en-US" sz="1300" dirty="0">
+                          <a:solidFill>
+                            <a:srgbClr val="10161F"/>
+                          </a:solidFill>
+                          <a:latin typeface="Pretendard" pitchFamily="34" charset="0"/>
+                          <a:ea typeface="Pretendard" pitchFamily="34" charset="-122"/>
+                          <a:cs typeface="Pretendard" pitchFamily="34" charset="-120"/>
+                        </a:rPr>
+                        <a:t>~ </a:t>
+                      </a:r>
+                      <a:pPr indent="0" marL="0">
+                        <a:buNone/>
+                      </a:pPr>
+                      <a:r>
+                        <a:rPr lang="en-US" sz="1300" dirty="0">
+                          <a:solidFill>
+                            <a:srgbClr val="10161F"/>
+                          </a:solidFill>
+                          <a:latin typeface="Pretendard" pitchFamily="34" charset="0"/>
+                          <a:ea typeface="Pretendard" pitchFamily="34" charset="-122"/>
+                          <a:cs typeface="Pretendard" pitchFamily="34" charset="-120"/>
+                        </a:rPr>
+                        <a:t>20%</a:t>
+                      </a:r>
+                      <a:endParaRPr lang="en-US" sz="1300" dirty="0">
+                        <a:latin typeface="Pretendard" charset="0"/>
+                        <a:ea typeface="Pretendard" charset="0"/>
+                        <a:cs typeface="Pretendard" charset="0"/>
+                      </a:endParaRPr>
+                    </a:p>
+                  </a:txBody>
+                  <a:tcPr marL="50800" marR="50800" marT="25400" marB="25400" anchor="ctr">
+                    <a:lnL w="3810" cap="flat" cmpd="sng" algn="ctr">
+                      <a:solidFill>
+                        <a:srgbClr val="CBD5E0"/>
+                      </a:solidFill>
+                      <a:prstDash val="solid"/>
+                      <a:round/>
+                      <a:headEnd type="none" w="med" len="med"/>
+                      <a:tailEnd type="none" w="med" len="med"/>
+                    </a:lnL>
+                    <a:lnR w="3810" cap="flat" cmpd="sng" algn="ctr">
+                      <a:solidFill>
+                        <a:srgbClr val="CBD5E0"/>
+                      </a:solidFill>
+                      <a:prstDash val="solid"/>
+                      <a:round/>
+                      <a:headEnd type="none" w="med" len="med"/>
+                      <a:tailEnd type="none" w="med" len="med"/>
+                    </a:lnR>
+                    <a:lnT w="3810" cap="flat" cmpd="sng" algn="ctr">
+                      <a:solidFill>
+                        <a:srgbClr val="CBD5E0"/>
+                      </a:solidFill>
+                      <a:prstDash val="solid"/>
+                      <a:round/>
+                      <a:headEnd type="none" w="med" len="med"/>
+                      <a:tailEnd type="none" w="med" len="med"/>
+                    </a:lnT>
+                    <a:lnB w="3810" cap="flat" cmpd="sng" algn="ctr">
+                      <a:solidFill>
+                        <a:srgbClr val="CBD5E0"/>
+                      </a:solidFill>
+                      <a:prstDash val="solid"/>
+                      <a:round/>
+                      <a:headEnd type="none" w="med" len="med"/>
+                      <a:tailEnd type="none" w="med" len="med"/>
+                    </a:lnB>
+                    <a:solidFill>
+                      <a:srgbClr val="FFFFFF"/>
+                    </a:solidFill>
+                  </a:tcPr>
+                </a:tc>
+                <a:tc>
+                  <a:txBody>
+                    <a:bodyPr/>
+                    <a:lstStyle/>
+                    <a:p>
+                      <a:pPr indent="0" marL="0">
+                        <a:buNone/>
+                      </a:pPr>
+                      <a:r>
+                        <a:rPr lang="en-US" sz="1300" dirty="0">
+                          <a:solidFill>
+                            <a:srgbClr val="10161F"/>
+                          </a:solidFill>
+                          <a:latin typeface="Pretendard" pitchFamily="34" charset="0"/>
+                          <a:ea typeface="Pretendard" pitchFamily="34" charset="-122"/>
+                          <a:cs typeface="Pretendard" pitchFamily="34" charset="-120"/>
+                        </a:rPr>
+                        <a:t>보유 </a:t>
+                      </a:r>
+                      <a:pPr indent="0" marL="0">
+                        <a:buNone/>
+                      </a:pPr>
+                      <a:r>
+                        <a:rPr lang="en-US" sz="1300" dirty="0">
+                          <a:solidFill>
+                            <a:srgbClr val="10161F"/>
+                          </a:solidFill>
+                          <a:latin typeface="Pretendard" pitchFamily="34" charset="0"/>
+                          <a:ea typeface="Pretendard" pitchFamily="34" charset="-122"/>
+                          <a:cs typeface="Pretendard" pitchFamily="34" charset="-120"/>
+                        </a:rPr>
+                        <a:t>기간 </a:t>
+                      </a:r>
+                      <a:pPr indent="0" marL="0">
+                        <a:buNone/>
+                      </a:pPr>
+                      <a:r>
+                        <a:rPr lang="en-US" sz="1300" dirty="0">
+                          <a:solidFill>
+                            <a:srgbClr val="10161F"/>
+                          </a:solidFill>
+                          <a:latin typeface="Pretendard" pitchFamily="34" charset="0"/>
+                          <a:ea typeface="Pretendard" pitchFamily="34" charset="-122"/>
+                          <a:cs typeface="Pretendard" pitchFamily="34" charset="-120"/>
+                        </a:rPr>
+                        <a:t>2~3년 </a:t>
+                      </a:r>
+                      <a:pPr indent="0" marL="0">
+                        <a:buNone/>
+                      </a:pPr>
+                      <a:r>
+                        <a:rPr lang="en-US" sz="1300" dirty="0">
+                          <a:solidFill>
+                            <a:srgbClr val="10161F"/>
+                          </a:solidFill>
+                          <a:latin typeface="Pretendard" pitchFamily="34" charset="0"/>
+                          <a:ea typeface="Pretendard" pitchFamily="34" charset="-122"/>
+                          <a:cs typeface="Pretendard" pitchFamily="34" charset="-120"/>
+                        </a:rPr>
+                        <a:t>가정</a:t>
+                      </a:r>
+                      <a:endParaRPr lang="en-US" sz="1300" dirty="0">
+                        <a:latin typeface="Pretendard" charset="0"/>
+                        <a:ea typeface="Pretendard" charset="0"/>
+                        <a:cs typeface="Pretendard" charset="0"/>
+                      </a:endParaRPr>
+                    </a:p>
+                  </a:txBody>
+                  <a:tcPr marL="50800" marR="50800" marT="25400" marB="25400" anchor="ctr">
+                    <a:lnL w="3810" cap="flat" cmpd="sng" algn="ctr">
+                      <a:solidFill>
+                        <a:srgbClr val="CBD5E0"/>
+                      </a:solidFill>
+                      <a:prstDash val="solid"/>
+                      <a:round/>
+                      <a:headEnd type="none" w="med" len="med"/>
+                      <a:tailEnd type="none" w="med" len="med"/>
+                    </a:lnL>
+                    <a:lnR w="3810" cap="flat" cmpd="sng" algn="ctr">
+                      <a:solidFill>
+                        <a:srgbClr val="CBD5E0"/>
+                      </a:solidFill>
+                      <a:prstDash val="solid"/>
+                      <a:round/>
+                      <a:headEnd type="none" w="med" len="med"/>
+                      <a:tailEnd type="none" w="med" len="med"/>
+                    </a:lnR>
+                    <a:lnT w="3810" cap="flat" cmpd="sng" algn="ctr">
+                      <a:solidFill>
+                        <a:srgbClr val="CBD5E0"/>
+                      </a:solidFill>
+                      <a:prstDash val="solid"/>
+                      <a:round/>
+                      <a:headEnd type="none" w="med" len="med"/>
+                      <a:tailEnd type="none" w="med" len="med"/>
+                    </a:lnT>
+                    <a:lnB w="3810" cap="flat" cmpd="sng" algn="ctr">
+                      <a:solidFill>
+                        <a:srgbClr val="CBD5E0"/>
+                      </a:solidFill>
+                      <a:prstDash val="solid"/>
+                      <a:round/>
+                      <a:headEnd type="none" w="med" len="med"/>
+                      <a:tailEnd type="none" w="med" len="med"/>
+                    </a:lnB>
+                    <a:solidFill>
+                      <a:srgbClr val="FFFFFF"/>
+                    </a:solidFill>
+                  </a:tcPr>
+                </a:tc>
+              </a:tr>
+            </a:tbl>
+          </a:graphicData>
+        </a:graphic>
+      </p:graphicFrame>
+      <p:sp>
+        <p:nvSpPr>
+          <p:cNvPr id="7" name="Text 4"/>
+          <p:cNvSpPr/>
+          <p:nvPr/>
+        </p:nvSpPr>
+        <p:spPr>
+          <a:xfrm>
+            <a:off x="566928" y="3621024"/>
+            <a:ext cx="11057839" cy="384048"/>
           </a:xfrm>
           <a:prstGeom prst="rect">
             <a:avLst/>
@@ -7410,35 +8723,35 @@
           <a:p>
             <a:pPr indent="0" marL="0">
               <a:lnSpc>
-                <a:spcPct val="120000"/>
+                <a:spcPct val="125000"/>
               </a:lnSpc>
               <a:buNone/>
             </a:pPr>
             <a:r>
-              <a:rPr lang="en-US" sz="1400" dirty="0">
-                <a:solidFill>
-                  <a:srgbClr val="718096"/>
+              <a:rPr lang="en-US" sz="780" dirty="0">
+                <a:solidFill>
+                  <a:srgbClr val="A0AEC0"/>
                 </a:solidFill>
                 <a:latin typeface="Pretendard" pitchFamily="34" charset="0"/>
                 <a:ea typeface="Pretendard" pitchFamily="34" charset="-122"/>
                 <a:cs typeface="Pretendard" pitchFamily="34" charset="-120"/>
               </a:rPr>
-              <a:t>{"ok"</a:t>
-            </a:r>
-            <a:endParaRPr lang="en-US" sz="1400" dirty="0"/>
-          </a:p>
-        </p:txBody>
-      </p:sp>
-      <p:sp>
-        <p:nvSpPr>
-          <p:cNvPr id="7" name="Text 5"/>
-          <p:cNvSpPr/>
-          <p:nvPr/>
-        </p:nvSpPr>
-        <p:spPr>
-          <a:xfrm>
-            <a:off x="4768907" y="1645920"/>
-            <a:ext cx="6855860" cy="402336"/>
+              <a:t>[참고] 리모델링 또는 밸류업 후 단기 매각(Trading)을 통한 Capital Gain 실현 시나리오입니다.</a:t>
+            </a:r>
+            <a:endParaRPr lang="en-US" sz="780" dirty="0"/>
+          </a:p>
+        </p:txBody>
+      </p:sp>
+      <p:sp>
+        <p:nvSpPr>
+          <p:cNvPr id="8" name="Text 5"/>
+          <p:cNvSpPr/>
+          <p:nvPr/>
+        </p:nvSpPr>
+        <p:spPr>
+          <a:xfrm>
+            <a:off x="566928" y="6382512"/>
+            <a:ext cx="7315200" cy="219456"/>
           </a:xfrm>
           <a:prstGeom prst="rect">
             <a:avLst/>
@@ -7451,59 +8764,17 @@
           <a:lstStyle/>
           <a:p>
             <a:pPr indent="0" marL="0">
-              <a:lnSpc>
-                <a:spcPct val="120000"/>
-              </a:lnSpc>
-              <a:buNone/>
-            </a:pPr>
-            <a:r>
-              <a:rPr lang="en-US" sz="1400" b="1" dirty="0">
-                <a:solidFill>
-                  <a:srgbClr val="10161F"/>
+              <a:buNone/>
+            </a:pPr>
+            <a:r>
+              <a:rPr lang="en-US" sz="800" dirty="0">
+                <a:solidFill>
+                  <a:srgbClr val="718096"/>
                 </a:solidFill>
                 <a:latin typeface="Pretendard" pitchFamily="34" charset="0"/>
                 <a:ea typeface="Pretendard" pitchFamily="34" charset="-122"/>
                 <a:cs typeface="Pretendard" pitchFamily="34" charset="-120"/>
               </a:rPr>
-              <a:t>true,"mocked":true,"extractedFields":{"area_signal":"역삼","asset_type":"오피스빌딩","price_band":"300억","size_signal":"3000평(약 9917.4㎡)"},"extractedFacts":{"region":"역삼","exactAddressCandidate":"역삼동 742-1","assetType":"오피스빌딩","priceText":"300억","sizeText":"3000평(약 9917.4㎡)","currentUse":"오피스","currentUseSignal":"근린생활시설","leaseSignal":"임대중","vacancySignal":"공실없음","tenantNames":"쿠팡","네이버","unitRentTexts":"301호: 1500만","sellerMotivationText":"자산 효율화","brokerNotes":"초역세권 매물"},"detectedSensitiveFields":"exact_address","tenant_name","ambiguousFields":,"warnings":,"areaSignal":"역삼","assetType":"오피스빌딩","priceBand":"300억","sizeSignal":"3000평(약 9917.4㎡)","dealType":"매각","buildingName":"역삼 센트럴타워","exactAddress":"역삼동 742-1","totalFloorArea":9917.3,"buildYear":2015,"currentUseSignal":"근린생활시설","vacancySignal":"공실 없음","fitSummary":"초역세권 근생 빌딩으로 시행/사옥 매입에 최적화","cautionSummary":"주요 임차 업종 만기 조율 필요","hiddenFields":"exact_address","seller_motivation","confidence":{"areaSignal":"confirmed","assetType":"confirmed","priceBand":"ai_hypothesis","fitSummary":"ai_hypothesis"},"missingData":"sizeSignal","boundaryNote":"본 자료는 실거래 통계 기반 참고치입니다.","buyerType":"법인 사옥형","budgetRange":{"min":50,"max":80,"display":"50억~80억"},"preferredRegions":"강남","성수","assetTypes":"꼬마빌딩","사옥용","purchasePurpose":"사옥용 매입","mustHave":"초역세권","주차","niceToHave":"테라스","루프탑","riskTolerance":"medium","financingNote":"자본금 50% 준비","missingQuestions":"구체적인 입주 시기가 언제인가요?","선호하는 수익률이 있나요?","privacyNotes":"연락처 비공개","fitReasons":"매수자 예산(50-80억)에 부합하는 매물입니다.","요청하신 성수/강남 권역에 해당합니다.","cautionReasons":"요청한 용도와 달리 명도 협의가 다소 필요합니다.","recommendedNextAction":"현장 답사 제안","kakaoMessage":"안녕하세요! 요청하신 조건에 부합하는 추천 매물이 있어 안내해 드립니다. 확인해보시고 피드백 부탁드립니다.","title":"강남 역삼역 초역세권 오피스 사옥용 빌딩 매각","shortSummary":"역삼역 도보 5분 거리의 준신축급 대형 오피스빌딩입니다.","dealPoints":"초역세권","사옥 최적","cautionPoints":"명도 조율 필요","hiddenInfoNotice":"보증금 및 지번은 인가 후 확인 가능","gateMessage":"G1 등급 등록이 필요합니다.","kakaoText":"강남 역삼역 오피스 빌딩 매각 안내입니다.","exactUnitCandidate":"101호","floor":"1층","areaSqmText":"150㎡","spaceType":"office","depositText":"5000만","monthlyRentText":"400만","maintenanceFeeText":"50만","availableFromText":"즉시입주","leaseTermMonthsText":"24","incentivesText":"렌트프리 2개월","restrictions":,"landlordIdentity":"김성수","currentTenant":"스타트업","vacancyReason":"이전 확장","rentNegotiation":"협의 가능","region":"성수동","areaSqm":150,"deposit":5000,"monthlyRent":400,"maintenanceFee":50,"availableFrom":"즉시입주","leaseTermMonths":24,"incentives":{"rentFreeMonths":2,"interiorSupport":"일부 인테리어 지원","freeRentDetail":"렌트프리 2개월 지원"},"shortSummaryLease":"성수역 도보 5분 거리 1층 리테일 상가 매물입니다."}</a:t>
-            </a:r>
-            <a:endParaRPr lang="en-US" sz="1400" dirty="0"/>
-          </a:p>
-        </p:txBody>
-      </p:sp>
-      <p:sp>
-        <p:nvSpPr>
-          <p:cNvPr id="8" name="Text 6"/>
-          <p:cNvSpPr/>
-          <p:nvPr/>
-        </p:nvSpPr>
-        <p:spPr>
-          <a:xfrm>
-            <a:off x="566928" y="6382512"/>
-            <a:ext cx="7315200" cy="219456"/>
-          </a:xfrm>
-          <a:prstGeom prst="rect">
-            <a:avLst/>
-          </a:prstGeom>
-          <a:noFill/>
-          <a:ln/>
-        </p:spPr>
-        <p:txBody>
-          <a:bodyPr wrap="square" lIns="0" tIns="0" rIns="0" bIns="0" rtlCol="0" anchor="ctr"/>
-          <a:lstStyle/>
-          <a:p>
-            <a:pPr indent="0" marL="0">
-              <a:buNone/>
-            </a:pPr>
-            <a:r>
-              <a:rPr lang="en-US" sz="800" dirty="0">
-                <a:solidFill>
-                  <a:srgbClr val="718096"/>
-                </a:solidFill>
-                <a:latin typeface="Pretendard" pitchFamily="34" charset="0"/>
-                <a:ea typeface="Pretendard" pitchFamily="34" charset="-122"/>
-                <a:cs typeface="Pretendard" pitchFamily="34" charset="-120"/>
-              </a:rPr>
               <a:t>크리딜   |   </a:t>
             </a:r>
             <a:endParaRPr lang="en-US" sz="800" dirty="0"/>
@@ -7512,7 +8783,7 @@
       </p:sp>
       <p:sp>
         <p:nvSpPr>
-          <p:cNvPr id="9" name="Text 7"/>
+          <p:cNvPr id="9" name="Text 6"/>
           <p:cNvSpPr/>
           <p:nvPr/>
         </p:nvSpPr>

--- a/docs/test/stress/e2e-outputs/trading_case09_sinsa_value_add_basic.pptx
+++ b/docs/test/stress/e2e-outputs/trading_case09_sinsa_value_add_basic.pptx
@@ -7107,7 +7107,7 @@
                 <a:ea typeface="Pretendard" pitchFamily="34" charset="-122"/>
                 <a:cs typeface="Pretendard" pitchFamily="34" charset="-120"/>
               </a:rPr>
-              <a:t>건축물 개요 및 물리 스펙</a:t>
+              <a:t>시장 포지셔닝 및 시세 갭 분석</a:t>
             </a:r>
             <a:endParaRPr lang="en-US" sz="1100" dirty="0"/>
           </a:p>
@@ -7149,7 +7149,7 @@
                 <a:ea typeface="Pretendard" pitchFamily="34" charset="-122"/>
                 <a:cs typeface="Pretendard" pitchFamily="34" charset="-120"/>
               </a:rPr>
-              <a:t>{"ok"</a:t>
+              <a:t>평당 매매가</a:t>
             </a:r>
             <a:endParaRPr lang="en-US" sz="1400" dirty="0"/>
           </a:p>
@@ -7191,7 +7191,7 @@
                 <a:ea typeface="Pretendard" pitchFamily="34" charset="-122"/>
                 <a:cs typeface="Pretendard" pitchFamily="34" charset="-120"/>
               </a:rPr>
-              <a:t>true,"mocked":true,"extractedFields":{"area_signal":"역삼","asset_type":"오피스빌딩","price_band":"300억","size_signal":"3000평(약 9917.4㎡)"},"extractedFacts":{"region":"역삼","exactAddressCandidate":"역삼동 742-1","assetType":"오피스빌딩","priceText":"300억","sizeText":"3000평(약 9917.4㎡)","currentUse":"오피스","currentUseSignal":"근린생활시설","leaseSignal":"임대중","vacancySignal":"공실없음","tenantNames":"쿠팡","네이버","unitRentTexts":"301호: 1500만","sellerMotivationText":"자산 효율화","brokerNotes":"초역세권 매물"},"detectedSensitiveFields":"exact_address","tenant_name","ambiguousFields":,"warnings":,"areaSignal":"역삼","assetType":"오피스빌딩","priceBand":"300억","sizeSignal":"3000평(약 9917.4㎡)","dealType":"매각","buildingName":"역삼 센트럴타워","exactAddress":"역삼동 742-1","totalFloorArea":9917.3,"buildYear":2015,"currentUseSignal":"근린생활시설","vacancySignal":"공실 없음","fitSummary":"초역세권 근생 빌딩으로 시행/사옥 매입에 최적화","cautionSummary":"주요 임차 업종 만기 조율 필요","hiddenFields":"exact_address","seller_motivation","confidence":{"areaSignal":"confirmed","assetType":"confirmed","priceBand":"ai_hypothesis","fitSummary":"ai_hypothesis"},"missingData":"sizeSignal","boundaryNote":"본 자료는 실거래 통계 기반 참고치입니다.","buyerType":"법인 사옥형","budgetRange":{"min":50,"max":80,"display":"50억~80억"},"preferredRegions":"강남","성수","assetTypes":"꼬마빌딩","사옥용","purchasePurpose":"사옥용 매입","mustHave":"초역세권","주차","niceToHave":"테라스","루프탑","riskTolerance":"medium","financingNote":"자본금 50% 준비","missingQuestions":"구체적인 입주 시기가 언제인가요?","선호하는 수익률이 있나요?","privacyNotes":"연락처 비공개","fitReasons":"매수자 예산(50-80억)에 부합하는 매물입니다.","요청하신 성수/강남 권역에 해당합니다.","cautionReasons":"요청한 용도와 달리 명도 협의가 다소 필요합니다.","recommendedNextAction":"현장 답사 제안","kakaoMessage":"안녕하세요! 요청하신 조건에 부합하는 추천 매물이 있어 안내해 드립니다. 확인해보시고 피드백 부탁드립니다.","title":"강남 역삼역 초역세권 오피스 사옥용 빌딩 매각","shortSummary":"역삼역 도보 5분 거리의 준신축급 대형 오피스빌딩입니다.","dealPoints":"초역세권","사옥 최적","cautionPoints":"명도 조율 필요","hiddenInfoNotice":"보증금 및 지번은 인가 후 확인 가능","gateMessage":"G1 등급 등록이 필요합니다.","kakaoText":"강남 역삼역 오피스 빌딩 매각 안내입니다.","exactUnitCandidate":"101호","floor":"1층","areaSqmText":"150㎡","spaceType":"office","depositText":"5000만","monthlyRentText":"400만","maintenanceFeeText":"50만","availableFromText":"즉시입주","leaseTermMonthsText":"24","incentivesText":"렌트프리 2개월","restrictions":,"landlordIdentity":"김성수","currentTenant":"스타트업","vacancyReason":"이전 확장","rentNegotiation":"협의 가능","region":"성수동","areaSqm":150,"deposit":5000,"monthlyRent":400,"maintenanceFee":50,"availableFrom":"즉시입주","leaseTermMonths":24,"incentives":{"rentFreeMonths":2,"interiorSupport":"일부 인테리어 지원","freeRentDetail":"렌트프리 2개월 지원"},"shortSummaryLease":"성수역 도보 5분 거리 1층 리테일 상가 매물입니다."}</a:t>
+              <a:t>매각 희망가 기준</a:t>
             </a:r>
             <a:endParaRPr lang="en-US" sz="1400" dirty="0"/>
           </a:p>
@@ -7200,6 +7200,113 @@
       <p:sp>
         <p:nvSpPr>
           <p:cNvPr id="9" name="Shape 7"/>
+          <p:cNvSpPr/>
+          <p:nvPr/>
+        </p:nvSpPr>
+        <p:spPr>
+          <a:xfrm>
+            <a:off x="566928" y="2048256"/>
+            <a:ext cx="6858000" cy="0"/>
+          </a:xfrm>
+          <a:prstGeom prst="line">
+            <a:avLst/>
+          </a:prstGeom>
+          <a:noFill/>
+          <a:ln w="3810">
+            <a:solidFill>
+              <a:srgbClr val="CBD5E0"/>
+            </a:solidFill>
+            <a:prstDash val="solid"/>
+          </a:ln>
+        </p:spPr>
+      </p:sp>
+      <p:sp>
+        <p:nvSpPr>
+          <p:cNvPr id="10" name="Text 8"/>
+          <p:cNvSpPr/>
+          <p:nvPr/>
+        </p:nvSpPr>
+        <p:spPr>
+          <a:xfrm>
+            <a:off x="566928" y="2048256"/>
+            <a:ext cx="2606040" cy="402336"/>
+          </a:xfrm>
+          <a:prstGeom prst="rect">
+            <a:avLst/>
+          </a:prstGeom>
+          <a:noFill/>
+          <a:ln/>
+        </p:spPr>
+        <p:txBody>
+          <a:bodyPr wrap="square" lIns="0" tIns="0" rIns="0" bIns="0" rtlCol="0" anchor="ctr"/>
+          <a:lstStyle/>
+          <a:p>
+            <a:pPr indent="0" marL="0">
+              <a:lnSpc>
+                <a:spcPct val="120000"/>
+              </a:lnSpc>
+              <a:buNone/>
+            </a:pPr>
+            <a:r>
+              <a:rPr lang="en-US" sz="1400" dirty="0">
+                <a:solidFill>
+                  <a:srgbClr val="718096"/>
+                </a:solidFill>
+                <a:latin typeface="Pretendard" pitchFamily="34" charset="0"/>
+                <a:ea typeface="Pretendard" pitchFamily="34" charset="-122"/>
+                <a:cs typeface="Pretendard" pitchFamily="34" charset="-120"/>
+              </a:rPr>
+              <a:t>입지 프리미엄</a:t>
+            </a:r>
+            <a:endParaRPr lang="en-US" sz="1400" dirty="0"/>
+          </a:p>
+        </p:txBody>
+      </p:sp>
+      <p:sp>
+        <p:nvSpPr>
+          <p:cNvPr id="11" name="Text 9"/>
+          <p:cNvSpPr/>
+          <p:nvPr/>
+        </p:nvSpPr>
+        <p:spPr>
+          <a:xfrm>
+            <a:off x="3172968" y="2048256"/>
+            <a:ext cx="4251960" cy="402336"/>
+          </a:xfrm>
+          <a:prstGeom prst="rect">
+            <a:avLst/>
+          </a:prstGeom>
+          <a:noFill/>
+          <a:ln/>
+        </p:spPr>
+        <p:txBody>
+          <a:bodyPr wrap="square" lIns="0" tIns="0" rIns="0" bIns="0" rtlCol="0" anchor="ctr"/>
+          <a:lstStyle/>
+          <a:p>
+            <a:pPr indent="0" marL="0">
+              <a:lnSpc>
+                <a:spcPct val="120000"/>
+              </a:lnSpc>
+              <a:buNone/>
+            </a:pPr>
+            <a:r>
+              <a:rPr lang="en-US" sz="1400" b="1" dirty="0">
+                <a:solidFill>
+                  <a:srgbClr val="10161F"/>
+                </a:solidFill>
+                <a:latin typeface="Pretendard" pitchFamily="34" charset="0"/>
+                <a:ea typeface="Pretendard" pitchFamily="34" charset="-122"/>
+                <a:cs typeface="Pretendard" pitchFamily="34" charset="-120"/>
+              </a:rPr>
+              <a:t>입지 및 접근성 우수</a:t>
+            </a:r>
+            <a:endParaRPr lang="en-US" sz="1400" dirty="0"/>
+          </a:p>
+        </p:txBody>
+      </p:sp>
+      <p:sp>
+        <p:nvSpPr>
+          <p:cNvPr id="12" name="Shape 10"/>
           <p:cNvSpPr/>
           <p:nvPr/>
         </p:nvSpPr>
@@ -7222,18 +7329,18 @@
       </p:sp>
       <p:sp>
         <p:nvSpPr>
-          <p:cNvPr id="10" name="Shape 8"/>
+          <p:cNvPr id="13" name="Shape 11"/>
           <p:cNvSpPr/>
           <p:nvPr/>
         </p:nvSpPr>
         <p:spPr>
           <a:xfrm>
             <a:off x="7784287" y="1645920"/>
-            <a:ext cx="3840480" cy="2103120"/>
+            <a:ext cx="3840480" cy="1645920"/>
           </a:xfrm>
           <a:prstGeom prst="roundRect">
             <a:avLst>
-              <a:gd name="adj" fmla="val 2609"/>
+              <a:gd name="adj" fmla="val 3333"/>
             </a:avLst>
           </a:prstGeom>
           <a:solidFill>
@@ -7244,14 +7351,14 @@
       </p:sp>
       <p:sp>
         <p:nvSpPr>
-          <p:cNvPr id="11" name="Shape 9"/>
+          <p:cNvPr id="14" name="Shape 12"/>
           <p:cNvSpPr/>
           <p:nvPr/>
         </p:nvSpPr>
         <p:spPr>
           <a:xfrm>
             <a:off x="7784287" y="1700784"/>
-            <a:ext cx="36576" cy="1993392"/>
+            <a:ext cx="36576" cy="1536192"/>
           </a:xfrm>
           <a:prstGeom prst="rect">
             <a:avLst/>
@@ -7264,7 +7371,7 @@
       </p:sp>
       <p:sp>
         <p:nvSpPr>
-          <p:cNvPr id="12" name="Text 10"/>
+          <p:cNvPr id="15" name="Text 13"/>
           <p:cNvSpPr/>
           <p:nvPr/>
         </p:nvSpPr>
@@ -7292,14 +7399,14 @@
       </p:sp>
       <p:sp>
         <p:nvSpPr>
-          <p:cNvPr id="13" name="Text 11"/>
+          <p:cNvPr id="16" name="Text 14"/>
           <p:cNvSpPr/>
           <p:nvPr/>
         </p:nvSpPr>
         <p:spPr>
           <a:xfrm>
             <a:off x="7967167" y="1975104"/>
-            <a:ext cx="3511296" cy="1700784"/>
+            <a:ext cx="3511296" cy="1243584"/>
           </a:xfrm>
           <a:prstGeom prst="rect">
             <a:avLst/>
@@ -7326,7 +7433,7 @@
                 <a:ea typeface="Pretendard" pitchFamily="34" charset="-122"/>
                 <a:cs typeface="Pretendard" pitchFamily="34" charset="-120"/>
               </a:rPr>
-              <a:t>{"ok":true,"mocked":true,"extractedFields":{"area_signal":"역삼","asset_type":"오피스빌딩","price_band":"300억","size_signal":"3</a:t>
+              <a:t>본 자산의 매각 희망가(98억)를 인근 권역 유사 매물의 거래사례 및 시세와 비교하여 가격 경쟁력을 평가합니다.</a:t>
             </a:r>
             <a:endParaRPr lang="en-US" sz="930" dirty="0"/>
           </a:p>
@@ -7334,14 +7441,56 @@
       </p:sp>
       <p:sp>
         <p:nvSpPr>
-          <p:cNvPr id="14" name="Text 12"/>
-          <p:cNvSpPr/>
-          <p:nvPr/>
-        </p:nvSpPr>
-        <p:spPr>
-          <a:xfrm>
-            <a:off x="566928" y="6382512"/>
-            <a:ext cx="7315200" cy="219456"/>
+          <p:cNvPr id="17" name="Shape 15"/>
+          <p:cNvSpPr/>
+          <p:nvPr/>
+        </p:nvSpPr>
+        <p:spPr>
+          <a:xfrm>
+            <a:off x="7784287" y="3493008"/>
+            <a:ext cx="3840480" cy="1645920"/>
+          </a:xfrm>
+          <a:prstGeom prst="roundRect">
+            <a:avLst>
+              <a:gd name="adj" fmla="val 3333"/>
+            </a:avLst>
+          </a:prstGeom>
+          <a:solidFill>
+            <a:srgbClr val="BEE3F8"/>
+          </a:solidFill>
+          <a:ln/>
+        </p:spPr>
+      </p:sp>
+      <p:sp>
+        <p:nvSpPr>
+          <p:cNvPr id="18" name="Shape 16"/>
+          <p:cNvSpPr/>
+          <p:nvPr/>
+        </p:nvSpPr>
+        <p:spPr>
+          <a:xfrm>
+            <a:off x="7784287" y="3547872"/>
+            <a:ext cx="36576" cy="1536192"/>
+          </a:xfrm>
+          <a:prstGeom prst="rect">
+            <a:avLst/>
+          </a:prstGeom>
+          <a:solidFill>
+            <a:srgbClr val="2B6CB0"/>
+          </a:solidFill>
+          <a:ln/>
+        </p:spPr>
+      </p:sp>
+      <p:sp>
+        <p:nvSpPr>
+          <p:cNvPr id="19" name="Text 17"/>
+          <p:cNvSpPr/>
+          <p:nvPr/>
+        </p:nvSpPr>
+        <p:spPr>
+          <a:xfrm>
+            <a:off x="7967167" y="3602736"/>
+            <a:ext cx="3511296" cy="201168"/>
           </a:xfrm>
           <a:prstGeom prst="rect">
             <a:avLst/>
@@ -7356,15 +7505,85 @@
             <a:pPr indent="0" marL="0">
               <a:buNone/>
             </a:pPr>
-            <a:r>
-              <a:rPr lang="en-US" sz="800" dirty="0">
-                <a:solidFill>
-                  <a:srgbClr val="718096"/>
+            <a:endParaRPr lang="en-US" sz="1050" dirty="0"/>
+          </a:p>
+        </p:txBody>
+      </p:sp>
+      <p:sp>
+        <p:nvSpPr>
+          <p:cNvPr id="20" name="Text 18"/>
+          <p:cNvSpPr/>
+          <p:nvPr/>
+        </p:nvSpPr>
+        <p:spPr>
+          <a:xfrm>
+            <a:off x="7967167" y="3822192"/>
+            <a:ext cx="3511296" cy="1243584"/>
+          </a:xfrm>
+          <a:prstGeom prst="rect">
+            <a:avLst/>
+          </a:prstGeom>
+          <a:noFill/>
+          <a:ln/>
+        </p:spPr>
+        <p:txBody>
+          <a:bodyPr wrap="square" lIns="0" tIns="0" rIns="0" bIns="0" rtlCol="0" anchor="t"/>
+          <a:lstStyle/>
+          <a:p>
+            <a:pPr indent="0" marL="0">
+              <a:lnSpc>
+                <a:spcPct val="120000"/>
+              </a:lnSpc>
+              <a:buNone/>
+            </a:pPr>
+            <a:r>
+              <a:rPr lang="en-US" sz="930" dirty="0">
+                <a:solidFill>
+                  <a:srgbClr val="10161F"/>
                 </a:solidFill>
                 <a:latin typeface="Pretendard" pitchFamily="34" charset="0"/>
                 <a:ea typeface="Pretendard" pitchFamily="34" charset="-122"/>
                 <a:cs typeface="Pretendard" pitchFamily="34" charset="-120"/>
               </a:rPr>
+              <a:t>[참고] 인근 시세 대비 합리적 매각가 형성으로 단기 매매 및 리밸런싱에 적합합니다.</a:t>
+            </a:r>
+            <a:endParaRPr lang="en-US" sz="930" dirty="0"/>
+          </a:p>
+        </p:txBody>
+      </p:sp>
+      <p:sp>
+        <p:nvSpPr>
+          <p:cNvPr id="21" name="Text 19"/>
+          <p:cNvSpPr/>
+          <p:nvPr/>
+        </p:nvSpPr>
+        <p:spPr>
+          <a:xfrm>
+            <a:off x="566928" y="6382512"/>
+            <a:ext cx="7315200" cy="219456"/>
+          </a:xfrm>
+          <a:prstGeom prst="rect">
+            <a:avLst/>
+          </a:prstGeom>
+          <a:noFill/>
+          <a:ln/>
+        </p:spPr>
+        <p:txBody>
+          <a:bodyPr wrap="square" lIns="0" tIns="0" rIns="0" bIns="0" rtlCol="0" anchor="ctr"/>
+          <a:lstStyle/>
+          <a:p>
+            <a:pPr indent="0" marL="0">
+              <a:buNone/>
+            </a:pPr>
+            <a:r>
+              <a:rPr lang="en-US" sz="800" dirty="0">
+                <a:solidFill>
+                  <a:srgbClr val="718096"/>
+                </a:solidFill>
+                <a:latin typeface="Pretendard" pitchFamily="34" charset="0"/>
+                <a:ea typeface="Pretendard" pitchFamily="34" charset="-122"/>
+                <a:cs typeface="Pretendard" pitchFamily="34" charset="-120"/>
+              </a:rPr>
               <a:t>크리딜   |   </a:t>
             </a:r>
             <a:endParaRPr lang="en-US" sz="800" dirty="0"/>
@@ -7373,7 +7592,7 @@
       </p:sp>
       <p:sp>
         <p:nvSpPr>
-          <p:cNvPr id="15" name="Text 13"/>
+          <p:cNvPr id="22" name="Text 20"/>
           <p:cNvSpPr/>
           <p:nvPr/>
         </p:nvSpPr>
@@ -7606,7 +7825,7 @@
                 <a:gridCol w="4253015"/>
                 <a:gridCol w="4253015"/>
               </a:tblGrid>
-              <a:tr h="457200">
+              <a:tr h="438912">
                 <a:tc>
                   <a:txBody>
                     <a:bodyPr/>
@@ -7826,7 +8045,7 @@
                   </a:tcPr>
                 </a:tc>
               </a:tr>
-              <a:tr h="457200">
+              <a:tr h="438912">
                 <a:tc>
                   <a:txBody>
                     <a:bodyPr/>
@@ -8102,7 +8321,7 @@
                   </a:tcPr>
                 </a:tc>
               </a:tr>
-              <a:tr h="457200">
+              <a:tr h="438912">
                 <a:tc>
                   <a:txBody>
                     <a:bodyPr/>
@@ -8378,7 +8597,7 @@
                   </a:tcPr>
                 </a:tc>
               </a:tr>
-              <a:tr h="457200">
+              <a:tr h="438912">
                 <a:tc>
                   <a:txBody>
                     <a:bodyPr/>
@@ -8708,7 +8927,7 @@
         </p:nvSpPr>
         <p:spPr>
           <a:xfrm>
-            <a:off x="566928" y="3621024"/>
+            <a:off x="566928" y="3493008"/>
             <a:ext cx="11057839" cy="384048"/>
           </a:xfrm>
           <a:prstGeom prst="rect">
@@ -8998,11 +9217,11 @@
         <p:spPr>
           <a:xfrm>
             <a:off x="566928" y="1417320"/>
-            <a:ext cx="11057839" cy="3611880"/>
+            <a:ext cx="11057839" cy="3657600"/>
           </a:xfrm>
           <a:prstGeom prst="roundRect">
             <a:avLst>
-              <a:gd name="adj" fmla="val 1519"/>
+              <a:gd name="adj" fmla="val 1500"/>
             </a:avLst>
           </a:prstGeom>
           <a:solidFill>
@@ -9083,8 +9302,8 @@
         </p:nvSpPr>
         <p:spPr>
           <a:xfrm>
-            <a:off x="795528" y="1911096"/>
-            <a:ext cx="10600639" cy="402336"/>
+            <a:off x="795528" y="1947672"/>
+            <a:ext cx="10600639" cy="365760"/>
           </a:xfrm>
           <a:prstGeom prst="rect">
             <a:avLst/>
@@ -9102,7 +9321,7 @@
               <a:buNone/>
             </a:pPr>
             <a:r>
-              <a:rPr lang="en-US" sz="1350" b="1" dirty="0">
+              <a:rPr lang="en-US" sz="1250" b="1" dirty="0">
                 <a:solidFill>
                   <a:srgbClr val="10161F"/>
                 </a:solidFill>
@@ -9112,7 +9331,7 @@
               </a:rPr>
               <a:t>—</a:t>
             </a:r>
-            <a:endParaRPr lang="en-US" sz="1350" dirty="0"/>
+            <a:endParaRPr lang="en-US" sz="1250" dirty="0"/>
           </a:p>
         </p:txBody>
       </p:sp>
@@ -9125,7 +9344,7 @@
         <p:spPr>
           <a:xfrm>
             <a:off x="795528" y="2377440"/>
-            <a:ext cx="10600639" cy="2560320"/>
+            <a:ext cx="10600639" cy="2606040"/>
           </a:xfrm>
           <a:prstGeom prst="rect">
             <a:avLst/>
@@ -9147,7 +9366,7 @@
               <a:buChar char="•"/>
             </a:pPr>
             <a:r>
-              <a:rPr lang="en-US" sz="1200" dirty="0">
+              <a:rPr lang="en-US" sz="1100" dirty="0">
                 <a:solidFill>
                   <a:srgbClr val="10161F"/>
                 </a:solidFill>
@@ -9157,20 +9376,47 @@
               </a:rPr>
               <a:t>{"ok":true,"mocked":true,"extractedFields":{"area_signal":"역삼","asset_type":"오피스빌딩","price_band":"300억","size_signal":"3000평(약 9917.4㎡)"},"extractedFacts":{"region":"역삼","exactAddressCandidate":"역삼동 7</a:t>
             </a:r>
-            <a:endParaRPr lang="en-US" sz="1200" dirty="0"/>
-          </a:p>
-        </p:txBody>
-      </p:sp>
-      <p:sp>
-        <p:nvSpPr>
-          <p:cNvPr id="11" name="Text 9"/>
-          <p:cNvSpPr/>
-          <p:nvPr/>
-        </p:nvSpPr>
-        <p:spPr>
-          <a:xfrm>
-            <a:off x="566928" y="6382512"/>
-            <a:ext cx="7315200" cy="219456"/>
+            <a:endParaRPr lang="en-US" sz="1100" dirty="0"/>
+          </a:p>
+        </p:txBody>
+      </p:sp>
+      <p:sp>
+        <p:nvSpPr>
+          <p:cNvPr id="11" name="Shape 9"/>
+          <p:cNvSpPr/>
+          <p:nvPr/>
+        </p:nvSpPr>
+        <p:spPr>
+          <a:xfrm>
+            <a:off x="566928" y="5193792"/>
+            <a:ext cx="11057839" cy="621792"/>
+          </a:xfrm>
+          <a:prstGeom prst="roundRect">
+            <a:avLst>
+              <a:gd name="adj" fmla="val 8824"/>
+            </a:avLst>
+          </a:prstGeom>
+          <a:solidFill>
+            <a:srgbClr val="F7FAFC"/>
+          </a:solidFill>
+          <a:ln w="6350">
+            <a:solidFill>
+              <a:srgbClr val="CBD5E0"/>
+            </a:solidFill>
+            <a:prstDash val="solid"/>
+          </a:ln>
+        </p:spPr>
+      </p:sp>
+      <p:sp>
+        <p:nvSpPr>
+          <p:cNvPr id="12" name="Text 10"/>
+          <p:cNvSpPr/>
+          <p:nvPr/>
+        </p:nvSpPr>
+        <p:spPr>
+          <a:xfrm>
+            <a:off x="795528" y="5193792"/>
+            <a:ext cx="10600639" cy="621792"/>
           </a:xfrm>
           <a:prstGeom prst="rect">
             <a:avLst/>
@@ -9186,14 +9432,53 @@
               <a:buNone/>
             </a:pPr>
             <a:r>
-              <a:rPr lang="en-US" sz="800" dirty="0">
-                <a:solidFill>
-                  <a:srgbClr val="718096"/>
+              <a:rPr lang="en-US" sz="1100" dirty="0">
+                <a:solidFill>
+                  <a:srgbClr val="10161F"/>
                 </a:solidFill>
                 <a:latin typeface="Pretendard" pitchFamily="34" charset="0"/>
                 <a:ea typeface="Pretendard" pitchFamily="34" charset="-122"/>
                 <a:cs typeface="Pretendard" pitchFamily="34" charset="-120"/>
               </a:rPr>
+              <a:t>※ 본 리스크 체크는 공부 및 브로커 확인 기반이며, 매수 전 전문 실사팀(변호사/건축사)을 통한 정밀 실사가 필요합니다.</a:t>
+            </a:r>
+            <a:endParaRPr lang="en-US" sz="1100" dirty="0"/>
+          </a:p>
+        </p:txBody>
+      </p:sp>
+      <p:sp>
+        <p:nvSpPr>
+          <p:cNvPr id="13" name="Text 11"/>
+          <p:cNvSpPr/>
+          <p:nvPr/>
+        </p:nvSpPr>
+        <p:spPr>
+          <a:xfrm>
+            <a:off x="566928" y="6382512"/>
+            <a:ext cx="7315200" cy="219456"/>
+          </a:xfrm>
+          <a:prstGeom prst="rect">
+            <a:avLst/>
+          </a:prstGeom>
+          <a:noFill/>
+          <a:ln/>
+        </p:spPr>
+        <p:txBody>
+          <a:bodyPr wrap="square" lIns="0" tIns="0" rIns="0" bIns="0" rtlCol="0" anchor="ctr"/>
+          <a:lstStyle/>
+          <a:p>
+            <a:pPr indent="0" marL="0">
+              <a:buNone/>
+            </a:pPr>
+            <a:r>
+              <a:rPr lang="en-US" sz="800" dirty="0">
+                <a:solidFill>
+                  <a:srgbClr val="718096"/>
+                </a:solidFill>
+                <a:latin typeface="Pretendard" pitchFamily="34" charset="0"/>
+                <a:ea typeface="Pretendard" pitchFamily="34" charset="-122"/>
+                <a:cs typeface="Pretendard" pitchFamily="34" charset="-120"/>
+              </a:rPr>
               <a:t>크리딜   |   </a:t>
             </a:r>
             <a:endParaRPr lang="en-US" sz="800" dirty="0"/>
@@ -9202,7 +9487,7 @@
       </p:sp>
       <p:sp>
         <p:nvSpPr>
-          <p:cNvPr id="12" name="Text 10"/>
+          <p:cNvPr id="14" name="Text 12"/>
           <p:cNvSpPr/>
           <p:nvPr/>
         </p:nvSpPr>
@@ -9441,9 +9726,645 @@
                 <a:ea typeface="Pretendard" pitchFamily="34" charset="-122"/>
                 <a:cs typeface="Pretendard" pitchFamily="34" charset="-120"/>
               </a:rPr>
-              <a:t>밸류업 시나리오 (AI 추정)</a:t>
+              <a:t>3대 핵심 투자 포인트 (Investment Highlights)</a:t>
             </a:r>
             <a:endParaRPr lang="en-US" sz="1100" dirty="0"/>
+          </a:p>
+        </p:txBody>
+      </p:sp>
+      <p:sp>
+        <p:nvSpPr>
+          <p:cNvPr id="7" name="Shape 5"/>
+          <p:cNvSpPr/>
+          <p:nvPr/>
+        </p:nvSpPr>
+        <p:spPr>
+          <a:xfrm>
+            <a:off x="566928" y="1481328"/>
+            <a:ext cx="3472586" cy="2560320"/>
+          </a:xfrm>
+          <a:prstGeom prst="roundRect">
+            <a:avLst>
+              <a:gd name="adj" fmla="val 2857"/>
+            </a:avLst>
+          </a:prstGeom>
+          <a:solidFill>
+            <a:srgbClr val="F7FAFC"/>
+          </a:solidFill>
+          <a:ln w="10160">
+            <a:solidFill>
+              <a:srgbClr val="CBD5E0"/>
+            </a:solidFill>
+            <a:prstDash val="solid"/>
+          </a:ln>
+        </p:spPr>
+      </p:sp>
+      <p:sp>
+        <p:nvSpPr>
+          <p:cNvPr id="8" name="Shape 6"/>
+          <p:cNvSpPr/>
+          <p:nvPr/>
+        </p:nvSpPr>
+        <p:spPr>
+          <a:xfrm>
+            <a:off x="566928" y="1481328"/>
+            <a:ext cx="3472586" cy="54864"/>
+          </a:xfrm>
+          <a:prstGeom prst="rect">
+            <a:avLst/>
+          </a:prstGeom>
+          <a:solidFill>
+            <a:srgbClr val="B98A2E"/>
+          </a:solidFill>
+          <a:ln/>
+        </p:spPr>
+      </p:sp>
+      <p:sp>
+        <p:nvSpPr>
+          <p:cNvPr id="9" name="Shape 7"/>
+          <p:cNvSpPr/>
+          <p:nvPr/>
+        </p:nvSpPr>
+        <p:spPr>
+          <a:xfrm>
+            <a:off x="795528" y="1755648"/>
+            <a:ext cx="475488" cy="292608"/>
+          </a:xfrm>
+          <a:prstGeom prst="roundRect">
+            <a:avLst>
+              <a:gd name="adj" fmla="val 12500"/>
+            </a:avLst>
+          </a:prstGeom>
+          <a:solidFill>
+            <a:srgbClr val="D9B668"/>
+          </a:solidFill>
+          <a:ln/>
+        </p:spPr>
+      </p:sp>
+      <p:sp>
+        <p:nvSpPr>
+          <p:cNvPr id="10" name="Text 8"/>
+          <p:cNvSpPr/>
+          <p:nvPr/>
+        </p:nvSpPr>
+        <p:spPr>
+          <a:xfrm>
+            <a:off x="795528" y="1755648"/>
+            <a:ext cx="475488" cy="292608"/>
+          </a:xfrm>
+          <a:prstGeom prst="rect">
+            <a:avLst/>
+          </a:prstGeom>
+          <a:noFill/>
+          <a:ln/>
+        </p:spPr>
+        <p:txBody>
+          <a:bodyPr wrap="square" lIns="0" tIns="0" rIns="0" bIns="0" rtlCol="0" anchor="ctr"/>
+          <a:lstStyle/>
+          <a:p>
+            <a:pPr algn="ctr" indent="0" marL="0">
+              <a:buNone/>
+            </a:pPr>
+            <a:r>
+              <a:rPr lang="en-US" sz="1100" b="1" dirty="0">
+                <a:solidFill>
+                  <a:srgbClr val="977024"/>
+                </a:solidFill>
+                <a:latin typeface="Arial" pitchFamily="34" charset="0"/>
+                <a:ea typeface="Arial" pitchFamily="34" charset="-122"/>
+                <a:cs typeface="Arial" pitchFamily="34" charset="-120"/>
+              </a:rPr>
+              <a:t>01</a:t>
+            </a:r>
+            <a:endParaRPr lang="en-US" sz="1100" dirty="0"/>
+          </a:p>
+        </p:txBody>
+      </p:sp>
+      <p:sp>
+        <p:nvSpPr>
+          <p:cNvPr id="11" name="Text 9"/>
+          <p:cNvSpPr/>
+          <p:nvPr/>
+        </p:nvSpPr>
+        <p:spPr>
+          <a:xfrm>
+            <a:off x="795528" y="2194560"/>
+            <a:ext cx="3015386" cy="365760"/>
+          </a:xfrm>
+          <a:prstGeom prst="rect">
+            <a:avLst/>
+          </a:prstGeom>
+          <a:noFill/>
+          <a:ln/>
+        </p:spPr>
+        <p:txBody>
+          <a:bodyPr wrap="square" lIns="0" tIns="0" rIns="0" bIns="0" rtlCol="0" anchor="t"/>
+          <a:lstStyle/>
+          <a:p>
+            <a:pPr indent="0" marL="0">
+              <a:buNone/>
+            </a:pPr>
+            <a:r>
+              <a:rPr lang="en-US" sz="1500" b="1" dirty="0">
+                <a:solidFill>
+                  <a:srgbClr val="10161F"/>
+                </a:solidFill>
+                <a:latin typeface="Pretendard" pitchFamily="34" charset="0"/>
+                <a:ea typeface="Pretendard" pitchFamily="34" charset="-122"/>
+                <a:cs typeface="Pretendard" pitchFamily="34" charset="-120"/>
+              </a:rPr>
+              <a:t>원금 안전판 확보</a:t>
+            </a:r>
+            <a:endParaRPr lang="en-US" sz="1500" dirty="0"/>
+          </a:p>
+        </p:txBody>
+      </p:sp>
+      <p:sp>
+        <p:nvSpPr>
+          <p:cNvPr id="12" name="Shape 10"/>
+          <p:cNvSpPr/>
+          <p:nvPr/>
+        </p:nvSpPr>
+        <p:spPr>
+          <a:xfrm>
+            <a:off x="795528" y="2624328"/>
+            <a:ext cx="3015386" cy="0"/>
+          </a:xfrm>
+          <a:prstGeom prst="line">
+            <a:avLst/>
+          </a:prstGeom>
+          <a:noFill/>
+          <a:ln w="6350">
+            <a:solidFill>
+              <a:srgbClr val="CBD5E0"/>
+            </a:solidFill>
+            <a:prstDash val="solid"/>
+          </a:ln>
+        </p:spPr>
+      </p:sp>
+      <p:sp>
+        <p:nvSpPr>
+          <p:cNvPr id="13" name="Text 11"/>
+          <p:cNvSpPr/>
+          <p:nvPr/>
+        </p:nvSpPr>
+        <p:spPr>
+          <a:xfrm>
+            <a:off x="795528" y="2779776"/>
+            <a:ext cx="3015386" cy="1051560"/>
+          </a:xfrm>
+          <a:prstGeom prst="rect">
+            <a:avLst/>
+          </a:prstGeom>
+          <a:noFill/>
+          <a:ln/>
+        </p:spPr>
+        <p:txBody>
+          <a:bodyPr wrap="square" lIns="0" tIns="0" rIns="0" bIns="0" rtlCol="0" anchor="t"/>
+          <a:lstStyle/>
+          <a:p>
+            <a:pPr indent="0" marL="0">
+              <a:lnSpc>
+                <a:spcPct val="130000"/>
+              </a:lnSpc>
+              <a:buNone/>
+            </a:pPr>
+            <a:r>
+              <a:rPr lang="en-US" sz="1200" dirty="0">
+                <a:solidFill>
+                  <a:srgbClr val="10161F"/>
+                </a:solidFill>
+                <a:latin typeface="Pretendard" pitchFamily="34" charset="0"/>
+                <a:ea typeface="Pretendard" pitchFamily="34" charset="-122"/>
+                <a:cs typeface="Pretendard" pitchFamily="34" charset="-120"/>
+              </a:rPr>
+              <a:t>강남권역의 핵심 입지로, 우량한 대지 지분 가치가 하방 경직성을 강력히 지지합니다.</a:t>
+            </a:r>
+            <a:endParaRPr lang="en-US" sz="1200" dirty="0"/>
+          </a:p>
+        </p:txBody>
+      </p:sp>
+      <p:sp>
+        <p:nvSpPr>
+          <p:cNvPr id="14" name="Shape 12"/>
+          <p:cNvSpPr/>
+          <p:nvPr/>
+        </p:nvSpPr>
+        <p:spPr>
+          <a:xfrm>
+            <a:off x="4359554" y="1481328"/>
+            <a:ext cx="3472586" cy="2560320"/>
+          </a:xfrm>
+          <a:prstGeom prst="roundRect">
+            <a:avLst>
+              <a:gd name="adj" fmla="val 2857"/>
+            </a:avLst>
+          </a:prstGeom>
+          <a:solidFill>
+            <a:srgbClr val="F7FAFC"/>
+          </a:solidFill>
+          <a:ln w="10160">
+            <a:solidFill>
+              <a:srgbClr val="CBD5E0"/>
+            </a:solidFill>
+            <a:prstDash val="solid"/>
+          </a:ln>
+        </p:spPr>
+      </p:sp>
+      <p:sp>
+        <p:nvSpPr>
+          <p:cNvPr id="15" name="Shape 13"/>
+          <p:cNvSpPr/>
+          <p:nvPr/>
+        </p:nvSpPr>
+        <p:spPr>
+          <a:xfrm>
+            <a:off x="4359554" y="1481328"/>
+            <a:ext cx="3472586" cy="54864"/>
+          </a:xfrm>
+          <a:prstGeom prst="rect">
+            <a:avLst/>
+          </a:prstGeom>
+          <a:solidFill>
+            <a:srgbClr val="B98A2E"/>
+          </a:solidFill>
+          <a:ln/>
+        </p:spPr>
+      </p:sp>
+      <p:sp>
+        <p:nvSpPr>
+          <p:cNvPr id="16" name="Shape 14"/>
+          <p:cNvSpPr/>
+          <p:nvPr/>
+        </p:nvSpPr>
+        <p:spPr>
+          <a:xfrm>
+            <a:off x="4588154" y="1755648"/>
+            <a:ext cx="475488" cy="292608"/>
+          </a:xfrm>
+          <a:prstGeom prst="roundRect">
+            <a:avLst>
+              <a:gd name="adj" fmla="val 12500"/>
+            </a:avLst>
+          </a:prstGeom>
+          <a:solidFill>
+            <a:srgbClr val="D9B668"/>
+          </a:solidFill>
+          <a:ln/>
+        </p:spPr>
+      </p:sp>
+      <p:sp>
+        <p:nvSpPr>
+          <p:cNvPr id="17" name="Text 15"/>
+          <p:cNvSpPr/>
+          <p:nvPr/>
+        </p:nvSpPr>
+        <p:spPr>
+          <a:xfrm>
+            <a:off x="4588154" y="1755648"/>
+            <a:ext cx="475488" cy="292608"/>
+          </a:xfrm>
+          <a:prstGeom prst="rect">
+            <a:avLst/>
+          </a:prstGeom>
+          <a:noFill/>
+          <a:ln/>
+        </p:spPr>
+        <p:txBody>
+          <a:bodyPr wrap="square" lIns="0" tIns="0" rIns="0" bIns="0" rtlCol="0" anchor="ctr"/>
+          <a:lstStyle/>
+          <a:p>
+            <a:pPr algn="ctr" indent="0" marL="0">
+              <a:buNone/>
+            </a:pPr>
+            <a:r>
+              <a:rPr lang="en-US" sz="1100" b="1" dirty="0">
+                <a:solidFill>
+                  <a:srgbClr val="977024"/>
+                </a:solidFill>
+                <a:latin typeface="Arial" pitchFamily="34" charset="0"/>
+                <a:ea typeface="Arial" pitchFamily="34" charset="-122"/>
+                <a:cs typeface="Arial" pitchFamily="34" charset="-120"/>
+              </a:rPr>
+              <a:t>02</a:t>
+            </a:r>
+            <a:endParaRPr lang="en-US" sz="1100" dirty="0"/>
+          </a:p>
+        </p:txBody>
+      </p:sp>
+      <p:sp>
+        <p:nvSpPr>
+          <p:cNvPr id="18" name="Text 16"/>
+          <p:cNvSpPr/>
+          <p:nvPr/>
+        </p:nvSpPr>
+        <p:spPr>
+          <a:xfrm>
+            <a:off x="4588154" y="2194560"/>
+            <a:ext cx="3015386" cy="365760"/>
+          </a:xfrm>
+          <a:prstGeom prst="rect">
+            <a:avLst/>
+          </a:prstGeom>
+          <a:noFill/>
+          <a:ln/>
+        </p:spPr>
+        <p:txBody>
+          <a:bodyPr wrap="square" lIns="0" tIns="0" rIns="0" bIns="0" rtlCol="0" anchor="t"/>
+          <a:lstStyle/>
+          <a:p>
+            <a:pPr indent="0" marL="0">
+              <a:buNone/>
+            </a:pPr>
+            <a:r>
+              <a:rPr lang="en-US" sz="1500" b="1" dirty="0">
+                <a:solidFill>
+                  <a:srgbClr val="10161F"/>
+                </a:solidFill>
+                <a:latin typeface="Pretendard" pitchFamily="34" charset="0"/>
+                <a:ea typeface="Pretendard" pitchFamily="34" charset="-122"/>
+                <a:cs typeface="Pretendard" pitchFamily="34" charset="-120"/>
+              </a:rPr>
+              <a:t>확실한 월 현금흐름</a:t>
+            </a:r>
+            <a:endParaRPr lang="en-US" sz="1500" dirty="0"/>
+          </a:p>
+        </p:txBody>
+      </p:sp>
+      <p:sp>
+        <p:nvSpPr>
+          <p:cNvPr id="19" name="Shape 17"/>
+          <p:cNvSpPr/>
+          <p:nvPr/>
+        </p:nvSpPr>
+        <p:spPr>
+          <a:xfrm>
+            <a:off x="4588154" y="2624328"/>
+            <a:ext cx="3015386" cy="0"/>
+          </a:xfrm>
+          <a:prstGeom prst="line">
+            <a:avLst/>
+          </a:prstGeom>
+          <a:noFill/>
+          <a:ln w="6350">
+            <a:solidFill>
+              <a:srgbClr val="CBD5E0"/>
+            </a:solidFill>
+            <a:prstDash val="solid"/>
+          </a:ln>
+        </p:spPr>
+      </p:sp>
+      <p:sp>
+        <p:nvSpPr>
+          <p:cNvPr id="20" name="Text 18"/>
+          <p:cNvSpPr/>
+          <p:nvPr/>
+        </p:nvSpPr>
+        <p:spPr>
+          <a:xfrm>
+            <a:off x="4588154" y="2779776"/>
+            <a:ext cx="3015386" cy="1051560"/>
+          </a:xfrm>
+          <a:prstGeom prst="rect">
+            <a:avLst/>
+          </a:prstGeom>
+          <a:noFill/>
+          <a:ln/>
+        </p:spPr>
+        <p:txBody>
+          <a:bodyPr wrap="square" lIns="0" tIns="0" rIns="0" bIns="0" rtlCol="0" anchor="t"/>
+          <a:lstStyle/>
+          <a:p>
+            <a:pPr indent="0" marL="0">
+              <a:lnSpc>
+                <a:spcPct val="130000"/>
+              </a:lnSpc>
+              <a:buNone/>
+            </a:pPr>
+            <a:r>
+              <a:rPr lang="en-US" sz="1200" dirty="0">
+                <a:solidFill>
+                  <a:srgbClr val="10161F"/>
+                </a:solidFill>
+                <a:latin typeface="Pretendard" pitchFamily="34" charset="0"/>
+                <a:ea typeface="Pretendard" pitchFamily="34" charset="-122"/>
+                <a:cs typeface="Pretendard" pitchFamily="34" charset="-120"/>
+              </a:rPr>
+              <a:t>우량 테넌트 만실 운영 및 장기 임대차 구조를 기반으로 매월 안정적인 순영업소득(NOI) 창출이 기대됩니다.</a:t>
+            </a:r>
+            <a:endParaRPr lang="en-US" sz="1200" dirty="0"/>
+          </a:p>
+        </p:txBody>
+      </p:sp>
+      <p:sp>
+        <p:nvSpPr>
+          <p:cNvPr id="21" name="Shape 19"/>
+          <p:cNvSpPr/>
+          <p:nvPr/>
+        </p:nvSpPr>
+        <p:spPr>
+          <a:xfrm>
+            <a:off x="8152181" y="1481328"/>
+            <a:ext cx="3472586" cy="2560320"/>
+          </a:xfrm>
+          <a:prstGeom prst="roundRect">
+            <a:avLst>
+              <a:gd name="adj" fmla="val 2857"/>
+            </a:avLst>
+          </a:prstGeom>
+          <a:solidFill>
+            <a:srgbClr val="F7FAFC"/>
+          </a:solidFill>
+          <a:ln w="10160">
+            <a:solidFill>
+              <a:srgbClr val="CBD5E0"/>
+            </a:solidFill>
+            <a:prstDash val="solid"/>
+          </a:ln>
+        </p:spPr>
+      </p:sp>
+      <p:sp>
+        <p:nvSpPr>
+          <p:cNvPr id="22" name="Shape 20"/>
+          <p:cNvSpPr/>
+          <p:nvPr/>
+        </p:nvSpPr>
+        <p:spPr>
+          <a:xfrm>
+            <a:off x="8152181" y="1481328"/>
+            <a:ext cx="3472586" cy="54864"/>
+          </a:xfrm>
+          <a:prstGeom prst="rect">
+            <a:avLst/>
+          </a:prstGeom>
+          <a:solidFill>
+            <a:srgbClr val="B98A2E"/>
+          </a:solidFill>
+          <a:ln/>
+        </p:spPr>
+      </p:sp>
+      <p:sp>
+        <p:nvSpPr>
+          <p:cNvPr id="23" name="Shape 21"/>
+          <p:cNvSpPr/>
+          <p:nvPr/>
+        </p:nvSpPr>
+        <p:spPr>
+          <a:xfrm>
+            <a:off x="8380781" y="1755648"/>
+            <a:ext cx="475488" cy="292608"/>
+          </a:xfrm>
+          <a:prstGeom prst="roundRect">
+            <a:avLst>
+              <a:gd name="adj" fmla="val 12500"/>
+            </a:avLst>
+          </a:prstGeom>
+          <a:solidFill>
+            <a:srgbClr val="D9B668"/>
+          </a:solidFill>
+          <a:ln/>
+        </p:spPr>
+      </p:sp>
+      <p:sp>
+        <p:nvSpPr>
+          <p:cNvPr id="24" name="Text 22"/>
+          <p:cNvSpPr/>
+          <p:nvPr/>
+        </p:nvSpPr>
+        <p:spPr>
+          <a:xfrm>
+            <a:off x="8380781" y="1755648"/>
+            <a:ext cx="475488" cy="292608"/>
+          </a:xfrm>
+          <a:prstGeom prst="rect">
+            <a:avLst/>
+          </a:prstGeom>
+          <a:noFill/>
+          <a:ln/>
+        </p:spPr>
+        <p:txBody>
+          <a:bodyPr wrap="square" lIns="0" tIns="0" rIns="0" bIns="0" rtlCol="0" anchor="ctr"/>
+          <a:lstStyle/>
+          <a:p>
+            <a:pPr algn="ctr" indent="0" marL="0">
+              <a:buNone/>
+            </a:pPr>
+            <a:r>
+              <a:rPr lang="en-US" sz="1100" b="1" dirty="0">
+                <a:solidFill>
+                  <a:srgbClr val="977024"/>
+                </a:solidFill>
+                <a:latin typeface="Arial" pitchFamily="34" charset="0"/>
+                <a:ea typeface="Arial" pitchFamily="34" charset="-122"/>
+                <a:cs typeface="Arial" pitchFamily="34" charset="-120"/>
+              </a:rPr>
+              <a:t>03</a:t>
+            </a:r>
+            <a:endParaRPr lang="en-US" sz="1100" dirty="0"/>
+          </a:p>
+        </p:txBody>
+      </p:sp>
+      <p:sp>
+        <p:nvSpPr>
+          <p:cNvPr id="25" name="Text 23"/>
+          <p:cNvSpPr/>
+          <p:nvPr/>
+        </p:nvSpPr>
+        <p:spPr>
+          <a:xfrm>
+            <a:off x="8380781" y="2194560"/>
+            <a:ext cx="3015386" cy="365760"/>
+          </a:xfrm>
+          <a:prstGeom prst="rect">
+            <a:avLst/>
+          </a:prstGeom>
+          <a:noFill/>
+          <a:ln/>
+        </p:spPr>
+        <p:txBody>
+          <a:bodyPr wrap="square" lIns="0" tIns="0" rIns="0" bIns="0" rtlCol="0" anchor="t"/>
+          <a:lstStyle/>
+          <a:p>
+            <a:pPr indent="0" marL="0">
+              <a:buNone/>
+            </a:pPr>
+            <a:r>
+              <a:rPr lang="en-US" sz="1500" b="1" dirty="0">
+                <a:solidFill>
+                  <a:srgbClr val="10161F"/>
+                </a:solidFill>
+                <a:latin typeface="Pretendard" pitchFamily="34" charset="0"/>
+                <a:ea typeface="Pretendard" pitchFamily="34" charset="-122"/>
+                <a:cs typeface="Pretendard" pitchFamily="34" charset="-120"/>
+              </a:rPr>
+              <a:t>가치 상승 및 출구 전략</a:t>
+            </a:r>
+            <a:endParaRPr lang="en-US" sz="1500" dirty="0"/>
+          </a:p>
+        </p:txBody>
+      </p:sp>
+      <p:sp>
+        <p:nvSpPr>
+          <p:cNvPr id="26" name="Shape 24"/>
+          <p:cNvSpPr/>
+          <p:nvPr/>
+        </p:nvSpPr>
+        <p:spPr>
+          <a:xfrm>
+            <a:off x="8380781" y="2624328"/>
+            <a:ext cx="3015386" cy="0"/>
+          </a:xfrm>
+          <a:prstGeom prst="line">
+            <a:avLst/>
+          </a:prstGeom>
+          <a:noFill/>
+          <a:ln w="6350">
+            <a:solidFill>
+              <a:srgbClr val="CBD5E0"/>
+            </a:solidFill>
+            <a:prstDash val="solid"/>
+          </a:ln>
+        </p:spPr>
+      </p:sp>
+      <p:sp>
+        <p:nvSpPr>
+          <p:cNvPr id="27" name="Text 25"/>
+          <p:cNvSpPr/>
+          <p:nvPr/>
+        </p:nvSpPr>
+        <p:spPr>
+          <a:xfrm>
+            <a:off x="8380781" y="2779776"/>
+            <a:ext cx="3015386" cy="1051560"/>
+          </a:xfrm>
+          <a:prstGeom prst="rect">
+            <a:avLst/>
+          </a:prstGeom>
+          <a:noFill/>
+          <a:ln/>
+        </p:spPr>
+        <p:txBody>
+          <a:bodyPr wrap="square" lIns="0" tIns="0" rIns="0" bIns="0" rtlCol="0" anchor="t"/>
+          <a:lstStyle/>
+          <a:p>
+            <a:pPr indent="0" marL="0">
+              <a:lnSpc>
+                <a:spcPct val="130000"/>
+              </a:lnSpc>
+              <a:buNone/>
+            </a:pPr>
+            <a:r>
+              <a:rPr lang="en-US" sz="1200" dirty="0">
+                <a:solidFill>
+                  <a:srgbClr val="10161F"/>
+                </a:solidFill>
+                <a:latin typeface="Pretendard" pitchFamily="34" charset="0"/>
+                <a:ea typeface="Pretendard" pitchFamily="34" charset="-122"/>
+                <a:cs typeface="Pretendard" pitchFamily="34" charset="-120"/>
+              </a:rPr>
+              <a:t>현행 공법 여력을 활용한 밸류업 기회와 더불어 향후 권역 지가 상승에 따른 시세차익 실현이 유력합니다.</a:t>
+            </a:r>
+            <a:endParaRPr lang="en-US" sz="1200" dirty="0"/>
           </a:p>
         </p:txBody>
       </p:sp>
@@ -9470,10 +10391,9 @@
             <a:tbl>
               <a:tblPr/>
               <a:tblGrid>
-                <a:gridCol w="2764460"/>
-                <a:gridCol w="2764460"/>
-                <a:gridCol w="2764460"/>
-                <a:gridCol w="2764460"/>
+                <a:gridCol w="3685946"/>
+                <a:gridCol w="3685946"/>
+                <a:gridCol w="3685946"/>
               </a:tblGrid>
               <a:tr h="329184">
                 <a:tc>
@@ -9493,7 +10413,7 @@
                           <a:ea typeface="Pretendard" pitchFamily="34" charset="-122"/>
                           <a:cs typeface="Pretendard" pitchFamily="34" charset="-120"/>
                         </a:rPr>
-                        <a:t>시나리오</a:t>
+                        <a:t>유형</a:t>
                       </a:r>
                       <a:endParaRPr lang="en-US" sz="1050" dirty="0">
                         <a:latin typeface="Pretendard" charset="0"/>
@@ -9561,21 +10481,7 @@
                           <a:ea typeface="Pretendard" pitchFamily="34" charset="-122"/>
                           <a:cs typeface="Pretendard" pitchFamily="34" charset="-120"/>
                         </a:rPr>
-                        <a:t>NOI </a:t>
-                      </a:r>
-                      <a:pPr indent="0" marL="0">
-                        <a:buNone/>
-                      </a:pPr>
-                      <a:r>
-                        <a:rPr lang="en-US" sz="1050" b="1" dirty="0">
-                          <a:solidFill>
-                            <a:srgbClr val="718096"/>
-                          </a:solidFill>
-                          <a:latin typeface="Pretendard" pitchFamily="34" charset="0"/>
-                          <a:ea typeface="Pretendard" pitchFamily="34" charset="-122"/>
-                          <a:cs typeface="Pretendard" pitchFamily="34" charset="-120"/>
-                        </a:rPr>
-                        <a:t>개선</a:t>
+                        <a:t>적합도</a:t>
                       </a:r>
                       <a:endParaRPr lang="en-US" sz="1050" dirty="0">
                         <a:latin typeface="Pretendard" charset="0"/>
@@ -9643,117 +10549,7 @@
                           <a:ea typeface="Pretendard" pitchFamily="34" charset="-122"/>
                           <a:cs typeface="Pretendard" pitchFamily="34" charset="-120"/>
                         </a:rPr>
-                        <a:t>개선 </a:t>
-                      </a:r>
-                      <a:pPr indent="0" marL="0">
-                        <a:buNone/>
-                      </a:pPr>
-                      <a:r>
-                        <a:rPr lang="en-US" sz="1050" b="1" dirty="0">
-                          <a:solidFill>
-                            <a:srgbClr val="718096"/>
-                          </a:solidFill>
-                          <a:latin typeface="Pretendard" pitchFamily="34" charset="0"/>
-                          <a:ea typeface="Pretendard" pitchFamily="34" charset="-122"/>
-                          <a:cs typeface="Pretendard" pitchFamily="34" charset="-120"/>
-                        </a:rPr>
-                        <a:t>Cap </a:t>
-                      </a:r>
-                      <a:pPr indent="0" marL="0">
-                        <a:buNone/>
-                      </a:pPr>
-                      <a:r>
-                        <a:rPr lang="en-US" sz="1050" b="1" dirty="0">
-                          <a:solidFill>
-                            <a:srgbClr val="718096"/>
-                          </a:solidFill>
-                          <a:latin typeface="Pretendard" pitchFamily="34" charset="0"/>
-                          <a:ea typeface="Pretendard" pitchFamily="34" charset="-122"/>
-                          <a:cs typeface="Pretendard" pitchFamily="34" charset="-120"/>
-                        </a:rPr>
-                        <a:t>Rate</a:t>
-                      </a:r>
-                      <a:endParaRPr lang="en-US" sz="1050" dirty="0">
-                        <a:latin typeface="Pretendard" charset="0"/>
-                        <a:ea typeface="Pretendard" charset="0"/>
-                        <a:cs typeface="Pretendard" charset="0"/>
-                      </a:endParaRPr>
-                    </a:p>
-                  </a:txBody>
-                  <a:tcPr marL="50800" marR="50800" marT="25400" marB="25400" anchor="ctr">
-                    <a:lnL w="3810" cap="flat" cmpd="sng" algn="ctr">
-                      <a:solidFill>
-                        <a:srgbClr val="CBD5E0"/>
-                      </a:solidFill>
-                      <a:prstDash val="solid"/>
-                      <a:round/>
-                      <a:headEnd type="none" w="med" len="med"/>
-                      <a:tailEnd type="none" w="med" len="med"/>
-                    </a:lnL>
-                    <a:lnR w="3810" cap="flat" cmpd="sng" algn="ctr">
-                      <a:solidFill>
-                        <a:srgbClr val="CBD5E0"/>
-                      </a:solidFill>
-                      <a:prstDash val="solid"/>
-                      <a:round/>
-                      <a:headEnd type="none" w="med" len="med"/>
-                      <a:tailEnd type="none" w="med" len="med"/>
-                    </a:lnR>
-                    <a:lnT w="3810" cap="flat" cmpd="sng" algn="ctr">
-                      <a:solidFill>
-                        <a:srgbClr val="CBD5E0"/>
-                      </a:solidFill>
-                      <a:prstDash val="solid"/>
-                      <a:round/>
-                      <a:headEnd type="none" w="med" len="med"/>
-                      <a:tailEnd type="none" w="med" len="med"/>
-                    </a:lnT>
-                    <a:lnB w="3810" cap="flat" cmpd="sng" algn="ctr">
-                      <a:solidFill>
-                        <a:srgbClr val="CBD5E0"/>
-                      </a:solidFill>
-                      <a:prstDash val="solid"/>
-                      <a:round/>
-                      <a:headEnd type="none" w="med" len="med"/>
-                      <a:tailEnd type="none" w="med" len="med"/>
-                    </a:lnB>
-                    <a:solidFill>
-                      <a:srgbClr val="F7FAFC"/>
-                    </a:solidFill>
-                  </a:tcPr>
-                </a:tc>
-                <a:tc>
-                  <a:txBody>
-                    <a:bodyPr/>
-                    <a:lstStyle/>
-                    <a:p>
-                      <a:pPr indent="0" marL="0">
-                        <a:buNone/>
-                      </a:pPr>
-                      <a:r>
-                        <a:rPr lang="en-US" sz="1050" b="1" dirty="0">
-                          <a:solidFill>
-                            <a:srgbClr val="718096"/>
-                          </a:solidFill>
-                          <a:latin typeface="Pretendard" pitchFamily="34" charset="0"/>
-                          <a:ea typeface="Pretendard" pitchFamily="34" charset="-122"/>
-                          <a:cs typeface="Pretendard" pitchFamily="34" charset="-120"/>
-                        </a:rPr>
-                        <a:t>투자 </a:t>
-                      </a:r>
-                      <a:pPr indent="0" marL="0">
-                        <a:buNone/>
-                      </a:pPr>
-                      <a:r>
-                        <a:rPr lang="en-US" sz="1050" b="1" dirty="0">
-                          <a:solidFill>
-                            <a:srgbClr val="718096"/>
-                          </a:solidFill>
-                          <a:latin typeface="Pretendard" pitchFamily="34" charset="0"/>
-                          <a:ea typeface="Pretendard" pitchFamily="34" charset="-122"/>
-                          <a:cs typeface="Pretendard" pitchFamily="34" charset="-120"/>
-                        </a:rPr>
-                        <a:t>비용</a:t>
+                        <a:t>이유</a:t>
                       </a:r>
                       <a:endParaRPr lang="en-US" sz="1050" dirty="0">
                         <a:latin typeface="Pretendard" charset="0"/>
@@ -9823,49 +10619,7 @@
                           <a:ea typeface="Pretendard" pitchFamily="34" charset="-122"/>
                           <a:cs typeface="Pretendard" pitchFamily="34" charset="-120"/>
                         </a:rPr>
-                        <a:t>② </a:t>
-                      </a:r>
-                      <a:pPr indent="0" marL="0">
-                        <a:buNone/>
-                      </a:pPr>
-                      <a:r>
-                        <a:rPr lang="en-US" sz="1050" b="1" dirty="0">
-                          <a:solidFill>
-                            <a:srgbClr val="10161F"/>
-                          </a:solidFill>
-                          <a:latin typeface="Pretendard" pitchFamily="34" charset="0"/>
-                          <a:ea typeface="Pretendard" pitchFamily="34" charset="-122"/>
-                          <a:cs typeface="Pretendard" pitchFamily="34" charset="-120"/>
-                        </a:rPr>
-                        <a:t>임대료 </a:t>
-                      </a:r>
-                      <a:pPr indent="0" marL="0">
-                        <a:buNone/>
-                      </a:pPr>
-                      <a:r>
-                        <a:rPr lang="en-US" sz="1050" b="1" dirty="0">
-                          <a:solidFill>
-                            <a:srgbClr val="10161F"/>
-                          </a:solidFill>
-                          <a:latin typeface="Pretendard" pitchFamily="34" charset="0"/>
-                          <a:ea typeface="Pretendard" pitchFamily="34" charset="-122"/>
-                          <a:cs typeface="Pretendard" pitchFamily="34" charset="-120"/>
-                        </a:rPr>
-                        <a:t>현실화 </a:t>
-                      </a:r>
-                      <a:pPr indent="0" marL="0">
-                        <a:buNone/>
-                      </a:pPr>
-                      <a:r>
-                        <a:rPr lang="en-US" sz="1050" b="1" dirty="0">
-                          <a:solidFill>
-                            <a:srgbClr val="10161F"/>
-                          </a:solidFill>
-                          <a:latin typeface="Pretendard" pitchFamily="34" charset="0"/>
-                          <a:ea typeface="Pretendard" pitchFamily="34" charset="-122"/>
-                          <a:cs typeface="Pretendard" pitchFamily="34" charset="-120"/>
-                        </a:rPr>
-                        <a:t>(+5%)</a:t>
+                        <a:t>(임대수익)</a:t>
                       </a:r>
                       <a:endParaRPr lang="en-US" sz="1050" dirty="0">
                         <a:latin typeface="Pretendard" charset="0"/>
@@ -9933,49 +10687,7 @@
                           <a:ea typeface="Pretendard" pitchFamily="34" charset="-122"/>
                           <a:cs typeface="Pretendard" pitchFamily="34" charset="-120"/>
                         </a:rPr>
-                        <a:t>+약 </a:t>
-                      </a:r>
-                      <a:pPr indent="0" marL="0">
-                        <a:buNone/>
-                      </a:pPr>
-                      <a:r>
-                        <a:rPr lang="en-US" sz="1050" dirty="0">
-                          <a:solidFill>
-                            <a:srgbClr val="10161F"/>
-                          </a:solidFill>
-                          <a:latin typeface="Pretendard" pitchFamily="34" charset="0"/>
-                          <a:ea typeface="Pretendard" pitchFamily="34" charset="-122"/>
-                          <a:cs typeface="Pretendard" pitchFamily="34" charset="-120"/>
-                        </a:rPr>
-                        <a:t>0.06억 </a:t>
-                      </a:r>
-                      <a:pPr indent="0" marL="0">
-                        <a:buNone/>
-                      </a:pPr>
-                      <a:r>
-                        <a:rPr lang="en-US" sz="1050" dirty="0">
-                          <a:solidFill>
-                            <a:srgbClr val="10161F"/>
-                          </a:solidFill>
-                          <a:latin typeface="Pretendard" pitchFamily="34" charset="0"/>
-                          <a:ea typeface="Pretendard" pitchFamily="34" charset="-122"/>
-                          <a:cs typeface="Pretendard" pitchFamily="34" charset="-120"/>
-                        </a:rPr>
-                        <a:t>원 </a:t>
-                      </a:r>
-                      <a:pPr indent="0" marL="0">
-                        <a:buNone/>
-                      </a:pPr>
-                      <a:r>
-                        <a:rPr lang="en-US" sz="1050" dirty="0">
-                          <a:solidFill>
-                            <a:srgbClr val="10161F"/>
-                          </a:solidFill>
-                          <a:latin typeface="Pretendard" pitchFamily="34" charset="0"/>
-                          <a:ea typeface="Pretendard" pitchFamily="34" charset="-122"/>
-                          <a:cs typeface="Pretendard" pitchFamily="34" charset="-120"/>
-                        </a:rPr>
-                        <a:t>(+5%)</a:t>
+                        <a:t>★★★★★</a:t>
                       </a:r>
                       <a:endParaRPr lang="en-US" sz="1050" dirty="0">
                         <a:latin typeface="Pretendard" charset="0"/>
@@ -10043,62 +10755,8 @@
                           <a:ea typeface="Pretendard" pitchFamily="34" charset="-122"/>
                           <a:cs typeface="Pretendard" pitchFamily="34" charset="-120"/>
                         </a:rPr>
-                        <a:t>1.2%</a:t>
+                        <a:t>소형 </a:t>
                       </a:r>
-                      <a:endParaRPr lang="en-US" sz="1050" dirty="0">
-                        <a:latin typeface="Pretendard" charset="0"/>
-                        <a:ea typeface="Pretendard" charset="0"/>
-                        <a:cs typeface="Pretendard" charset="0"/>
-                      </a:endParaRPr>
-                    </a:p>
-                  </a:txBody>
-                  <a:tcPr marL="50800" marR="50800" marT="25400" marB="25400" anchor="ctr">
-                    <a:lnL w="3810" cap="flat" cmpd="sng" algn="ctr">
-                      <a:solidFill>
-                        <a:srgbClr val="CBD5E0"/>
-                      </a:solidFill>
-                      <a:prstDash val="solid"/>
-                      <a:round/>
-                      <a:headEnd type="none" w="med" len="med"/>
-                      <a:tailEnd type="none" w="med" len="med"/>
-                    </a:lnL>
-                    <a:lnR w="3810" cap="flat" cmpd="sng" algn="ctr">
-                      <a:solidFill>
-                        <a:srgbClr val="CBD5E0"/>
-                      </a:solidFill>
-                      <a:prstDash val="solid"/>
-                      <a:round/>
-                      <a:headEnd type="none" w="med" len="med"/>
-                      <a:tailEnd type="none" w="med" len="med"/>
-                    </a:lnR>
-                    <a:lnT w="3810" cap="flat" cmpd="sng" algn="ctr">
-                      <a:solidFill>
-                        <a:srgbClr val="CBD5E0"/>
-                      </a:solidFill>
-                      <a:prstDash val="solid"/>
-                      <a:round/>
-                      <a:headEnd type="none" w="med" len="med"/>
-                      <a:tailEnd type="none" w="med" len="med"/>
-                    </a:lnT>
-                    <a:lnB w="3810" cap="flat" cmpd="sng" algn="ctr">
-                      <a:solidFill>
-                        <a:srgbClr val="CBD5E0"/>
-                      </a:solidFill>
-                      <a:prstDash val="solid"/>
-                      <a:round/>
-                      <a:headEnd type="none" w="med" len="med"/>
-                      <a:tailEnd type="none" w="med" len="med"/>
-                    </a:lnB>
-                    <a:solidFill>
-                      <a:srgbClr val="FFFFFF"/>
-                    </a:solidFill>
-                  </a:tcPr>
-                </a:tc>
-                <a:tc>
-                  <a:txBody>
-                    <a:bodyPr/>
-                    <a:lstStyle/>
-                    <a:p>
                       <a:pPr indent="0" marL="0">
                         <a:buNone/>
                       </a:pPr>
@@ -10111,7 +10769,49 @@
                           <a:ea typeface="Pretendard" pitchFamily="34" charset="-122"/>
                           <a:cs typeface="Pretendard" pitchFamily="34" charset="-120"/>
                         </a:rPr>
-                        <a:t>불필요</a:t>
+                        <a:t>빌딩 </a:t>
+                      </a:r>
+                      <a:pPr indent="0" marL="0">
+                        <a:buNone/>
+                      </a:pPr>
+                      <a:r>
+                        <a:rPr lang="en-US" sz="1050" dirty="0">
+                          <a:solidFill>
+                            <a:srgbClr val="10161F"/>
+                          </a:solidFill>
+                          <a:latin typeface="Pretendard" pitchFamily="34" charset="0"/>
+                          <a:ea typeface="Pretendard" pitchFamily="34" charset="-122"/>
+                          <a:cs typeface="Pretendard" pitchFamily="34" charset="-120"/>
+                        </a:rPr>
+                        <a:t>안정 </a:t>
+                      </a:r>
+                      <a:pPr indent="0" marL="0">
+                        <a:buNone/>
+                      </a:pPr>
+                      <a:r>
+                        <a:rPr lang="en-US" sz="1050" dirty="0">
+                          <a:solidFill>
+                            <a:srgbClr val="10161F"/>
+                          </a:solidFill>
+                          <a:latin typeface="Pretendard" pitchFamily="34" charset="0"/>
+                          <a:ea typeface="Pretendard" pitchFamily="34" charset="-122"/>
+                          <a:cs typeface="Pretendard" pitchFamily="34" charset="-120"/>
+                        </a:rPr>
+                        <a:t>수익 </a:t>
+                      </a:r>
+                      <a:pPr indent="0" marL="0">
+                        <a:buNone/>
+                      </a:pPr>
+                      <a:r>
+                        <a:rPr lang="en-US" sz="1050" dirty="0">
+                          <a:solidFill>
+                            <a:srgbClr val="10161F"/>
+                          </a:solidFill>
+                          <a:latin typeface="Pretendard" pitchFamily="34" charset="0"/>
+                          <a:ea typeface="Pretendard" pitchFamily="34" charset="-122"/>
+                          <a:cs typeface="Pretendard" pitchFamily="34" charset="-120"/>
+                        </a:rPr>
+                        <a:t>최적</a:t>
                       </a:r>
                       <a:endParaRPr lang="en-US" sz="1050" dirty="0">
                         <a:latin typeface="Pretendard" charset="0"/>
@@ -10181,7 +10881,7 @@
                           <a:ea typeface="Pretendard" pitchFamily="34" charset="-122"/>
                           <a:cs typeface="Pretendard" pitchFamily="34" charset="-120"/>
                         </a:rPr>
-                        <a:t>③ </a:t>
+                        <a:t>법인 </a:t>
                       </a:r>
                       <a:pPr indent="0" marL="0">
                         <a:buNone/>
@@ -10195,7 +10895,7 @@
                           <a:ea typeface="Pretendard" pitchFamily="34" charset="-122"/>
                           <a:cs typeface="Pretendard" pitchFamily="34" charset="-120"/>
                         </a:rPr>
-                        <a:t>리모델링 </a:t>
+                        <a:t>사옥 </a:t>
                       </a:r>
                       <a:pPr indent="0" marL="0">
                         <a:buNone/>
@@ -10209,35 +10909,7 @@
                           <a:ea typeface="Pretendard" pitchFamily="34" charset="-122"/>
                           <a:cs typeface="Pretendard" pitchFamily="34" charset="-120"/>
                         </a:rPr>
-                        <a:t>후 </a:t>
-                      </a:r>
-                      <a:pPr indent="0" marL="0">
-                        <a:buNone/>
-                      </a:pPr>
-                      <a:r>
-                        <a:rPr lang="en-US" sz="1050" b="1" dirty="0">
-                          <a:solidFill>
-                            <a:srgbClr val="10161F"/>
-                          </a:solidFill>
-                          <a:latin typeface="Pretendard" pitchFamily="34" charset="0"/>
-                          <a:ea typeface="Pretendard" pitchFamily="34" charset="-122"/>
-                          <a:cs typeface="Pretendard" pitchFamily="34" charset="-120"/>
-                        </a:rPr>
-                        <a:t>임대료 </a:t>
-                      </a:r>
-                      <a:pPr indent="0" marL="0">
-                        <a:buNone/>
-                      </a:pPr>
-                      <a:r>
-                        <a:rPr lang="en-US" sz="1050" b="1" dirty="0">
-                          <a:solidFill>
-                            <a:srgbClr val="10161F"/>
-                          </a:solidFill>
-                          <a:latin typeface="Pretendard" pitchFamily="34" charset="0"/>
-                          <a:ea typeface="Pretendard" pitchFamily="34" charset="-122"/>
-                          <a:cs typeface="Pretendard" pitchFamily="34" charset="-120"/>
-                        </a:rPr>
-                        <a:t>상승</a:t>
+                        <a:t>이전</a:t>
                       </a:r>
                       <a:endParaRPr lang="en-US" sz="1050" dirty="0">
                         <a:latin typeface="Pretendard" charset="0"/>
@@ -10305,49 +10977,7 @@
                           <a:ea typeface="Pretendard" pitchFamily="34" charset="-122"/>
                           <a:cs typeface="Pretendard" pitchFamily="34" charset="-120"/>
                         </a:rPr>
-                        <a:t>+약 </a:t>
-                      </a:r>
-                      <a:pPr indent="0" marL="0">
-                        <a:buNone/>
-                      </a:pPr>
-                      <a:r>
-                        <a:rPr lang="en-US" sz="1050" dirty="0">
-                          <a:solidFill>
-                            <a:srgbClr val="10161F"/>
-                          </a:solidFill>
-                          <a:latin typeface="Pretendard" pitchFamily="34" charset="0"/>
-                          <a:ea typeface="Pretendard" pitchFamily="34" charset="-122"/>
-                          <a:cs typeface="Pretendard" pitchFamily="34" charset="-120"/>
-                        </a:rPr>
-                        <a:t>0.09억 </a:t>
-                      </a:r>
-                      <a:pPr indent="0" marL="0">
-                        <a:buNone/>
-                      </a:pPr>
-                      <a:r>
-                        <a:rPr lang="en-US" sz="1050" dirty="0">
-                          <a:solidFill>
-                            <a:srgbClr val="10161F"/>
-                          </a:solidFill>
-                          <a:latin typeface="Pretendard" pitchFamily="34" charset="0"/>
-                          <a:ea typeface="Pretendard" pitchFamily="34" charset="-122"/>
-                          <a:cs typeface="Pretendard" pitchFamily="34" charset="-120"/>
-                        </a:rPr>
-                        <a:t>원 </a:t>
-                      </a:r>
-                      <a:pPr indent="0" marL="0">
-                        <a:buNone/>
-                      </a:pPr>
-                      <a:r>
-                        <a:rPr lang="en-US" sz="1050" dirty="0">
-                          <a:solidFill>
-                            <a:srgbClr val="10161F"/>
-                          </a:solidFill>
-                          <a:latin typeface="Pretendard" pitchFamily="34" charset="0"/>
-                          <a:ea typeface="Pretendard" pitchFamily="34" charset="-122"/>
-                          <a:cs typeface="Pretendard" pitchFamily="34" charset="-120"/>
-                        </a:rPr>
-                        <a:t>(+8%)</a:t>
+                        <a:t>★★★★</a:t>
                       </a:r>
                       <a:endParaRPr lang="en-US" sz="1050" dirty="0">
                         <a:latin typeface="Pretendard" charset="0"/>
@@ -10415,75 +11045,7 @@
                           <a:ea typeface="Pretendard" pitchFamily="34" charset="-122"/>
                           <a:cs typeface="Pretendard" pitchFamily="34" charset="-120"/>
                         </a:rPr>
-                        <a:t>1.24%</a:t>
-                      </a:r>
-                      <a:endParaRPr lang="en-US" sz="1050" dirty="0">
-                        <a:latin typeface="Pretendard" charset="0"/>
-                        <a:ea typeface="Pretendard" charset="0"/>
-                        <a:cs typeface="Pretendard" charset="0"/>
-                      </a:endParaRPr>
-                    </a:p>
-                  </a:txBody>
-                  <a:tcPr marL="50800" marR="50800" marT="25400" marB="25400" anchor="ctr">
-                    <a:lnL w="3810" cap="flat" cmpd="sng" algn="ctr">
-                      <a:solidFill>
-                        <a:srgbClr val="CBD5E0"/>
-                      </a:solidFill>
-                      <a:prstDash val="solid"/>
-                      <a:round/>
-                      <a:headEnd type="none" w="med" len="med"/>
-                      <a:tailEnd type="none" w="med" len="med"/>
-                    </a:lnL>
-                    <a:lnR w="3810" cap="flat" cmpd="sng" algn="ctr">
-                      <a:solidFill>
-                        <a:srgbClr val="CBD5E0"/>
-                      </a:solidFill>
-                      <a:prstDash val="solid"/>
-                      <a:round/>
-                      <a:headEnd type="none" w="med" len="med"/>
-                      <a:tailEnd type="none" w="med" len="med"/>
-                    </a:lnR>
-                    <a:lnT w="3810" cap="flat" cmpd="sng" algn="ctr">
-                      <a:solidFill>
-                        <a:srgbClr val="CBD5E0"/>
-                      </a:solidFill>
-                      <a:prstDash val="solid"/>
-                      <a:round/>
-                      <a:headEnd type="none" w="med" len="med"/>
-                      <a:tailEnd type="none" w="med" len="med"/>
-                    </a:lnT>
-                    <a:lnB w="3810" cap="flat" cmpd="sng" algn="ctr">
-                      <a:solidFill>
-                        <a:srgbClr val="CBD5E0"/>
-                      </a:solidFill>
-                      <a:prstDash val="solid"/>
-                      <a:round/>
-                      <a:headEnd type="none" w="med" len="med"/>
-                      <a:tailEnd type="none" w="med" len="med"/>
-                    </a:lnB>
-                    <a:solidFill>
-                      <a:srgbClr val="F7FAFC"/>
-                    </a:solidFill>
-                  </a:tcPr>
-                </a:tc>
-                <a:tc>
-                  <a:txBody>
-                    <a:bodyPr/>
-                    <a:lstStyle/>
-                    <a:p>
-                      <a:pPr indent="0" marL="0">
-                        <a:buNone/>
-                      </a:pPr>
-                      <a:r>
-                        <a:rPr lang="en-US" sz="1050" dirty="0">
-                          <a:solidFill>
-                            <a:srgbClr val="10161F"/>
-                          </a:solidFill>
-                          <a:latin typeface="Pretendard" pitchFamily="34" charset="0"/>
-                          <a:ea typeface="Pretendard" pitchFamily="34" charset="-122"/>
-                          <a:cs typeface="Pretendard" pitchFamily="34" charset="-120"/>
-                        </a:rPr>
-                        <a:t>약 </a:t>
+                        <a:t>강남권역 </a:t>
                       </a:r>
                       <a:pPr indent="0" marL="0">
                         <a:buNone/>
@@ -10497,21 +11059,7 @@
                           <a:ea typeface="Pretendard" pitchFamily="34" charset="-122"/>
                           <a:cs typeface="Pretendard" pitchFamily="34" charset="-120"/>
                         </a:rPr>
-                        <a:t>15.00억 </a:t>
-                      </a:r>
-                      <a:pPr indent="0" marL="0">
-                        <a:buNone/>
-                      </a:pPr>
-                      <a:r>
-                        <a:rPr lang="en-US" sz="1050" dirty="0">
-                          <a:solidFill>
-                            <a:srgbClr val="10161F"/>
-                          </a:solidFill>
-                          <a:latin typeface="Pretendard" pitchFamily="34" charset="0"/>
-                          <a:ea typeface="Pretendard" pitchFamily="34" charset="-122"/>
-                          <a:cs typeface="Pretendard" pitchFamily="34" charset="-120"/>
-                        </a:rPr>
-                        <a:t>원</a:t>
+                        <a:t>직주근접</a:t>
                       </a:r>
                       <a:endParaRPr lang="en-US" sz="1050" dirty="0">
                         <a:latin typeface="Pretendard" charset="0"/>
@@ -10563,19 +11111,281 @@
                   </a:tcPr>
                 </a:tc>
               </a:tr>
+              <a:tr h="329184">
+                <a:tc>
+                  <a:txBody>
+                    <a:bodyPr/>
+                    <a:lstStyle/>
+                    <a:p>
+                      <a:pPr indent="0" marL="0">
+                        <a:buNone/>
+                      </a:pPr>
+                      <a:r>
+                        <a:rPr lang="en-US" sz="1050" b="1" dirty="0">
+                          <a:solidFill>
+                            <a:srgbClr val="10161F"/>
+                          </a:solidFill>
+                          <a:latin typeface="Pretendard" pitchFamily="34" charset="0"/>
+                          <a:ea typeface="Pretendard" pitchFamily="34" charset="-122"/>
+                          <a:cs typeface="Pretendard" pitchFamily="34" charset="-120"/>
+                        </a:rPr>
+                        <a:t>소규모 </a:t>
+                      </a:r>
+                      <a:pPr indent="0" marL="0">
+                        <a:buNone/>
+                      </a:pPr>
+                      <a:r>
+                        <a:rPr lang="en-US" sz="1050" b="1" dirty="0">
+                          <a:solidFill>
+                            <a:srgbClr val="10161F"/>
+                          </a:solidFill>
+                          <a:latin typeface="Pretendard" pitchFamily="34" charset="0"/>
+                          <a:ea typeface="Pretendard" pitchFamily="34" charset="-122"/>
+                          <a:cs typeface="Pretendard" pitchFamily="34" charset="-120"/>
+                        </a:rPr>
+                        <a:t>개발업체</a:t>
+                      </a:r>
+                      <a:endParaRPr lang="en-US" sz="1050" dirty="0">
+                        <a:latin typeface="Pretendard" charset="0"/>
+                        <a:ea typeface="Pretendard" charset="0"/>
+                        <a:cs typeface="Pretendard" charset="0"/>
+                      </a:endParaRPr>
+                    </a:p>
+                  </a:txBody>
+                  <a:tcPr marL="50800" marR="50800" marT="25400" marB="25400" anchor="ctr">
+                    <a:lnL w="3810" cap="flat" cmpd="sng" algn="ctr">
+                      <a:solidFill>
+                        <a:srgbClr val="CBD5E0"/>
+                      </a:solidFill>
+                      <a:prstDash val="solid"/>
+                      <a:round/>
+                      <a:headEnd type="none" w="med" len="med"/>
+                      <a:tailEnd type="none" w="med" len="med"/>
+                    </a:lnL>
+                    <a:lnR w="3810" cap="flat" cmpd="sng" algn="ctr">
+                      <a:solidFill>
+                        <a:srgbClr val="CBD5E0"/>
+                      </a:solidFill>
+                      <a:prstDash val="solid"/>
+                      <a:round/>
+                      <a:headEnd type="none" w="med" len="med"/>
+                      <a:tailEnd type="none" w="med" len="med"/>
+                    </a:lnR>
+                    <a:lnT w="3810" cap="flat" cmpd="sng" algn="ctr">
+                      <a:solidFill>
+                        <a:srgbClr val="CBD5E0"/>
+                      </a:solidFill>
+                      <a:prstDash val="solid"/>
+                      <a:round/>
+                      <a:headEnd type="none" w="med" len="med"/>
+                      <a:tailEnd type="none" w="med" len="med"/>
+                    </a:lnT>
+                    <a:lnB w="3810" cap="flat" cmpd="sng" algn="ctr">
+                      <a:solidFill>
+                        <a:srgbClr val="CBD5E0"/>
+                      </a:solidFill>
+                      <a:prstDash val="solid"/>
+                      <a:round/>
+                      <a:headEnd type="none" w="med" len="med"/>
+                      <a:tailEnd type="none" w="med" len="med"/>
+                    </a:lnB>
+                    <a:solidFill>
+                      <a:srgbClr val="FFFFFF"/>
+                    </a:solidFill>
+                  </a:tcPr>
+                </a:tc>
+                <a:tc>
+                  <a:txBody>
+                    <a:bodyPr/>
+                    <a:lstStyle/>
+                    <a:p>
+                      <a:pPr indent="0" marL="0">
+                        <a:buNone/>
+                      </a:pPr>
+                      <a:r>
+                        <a:rPr lang="en-US" sz="1050" dirty="0">
+                          <a:solidFill>
+                            <a:srgbClr val="10161F"/>
+                          </a:solidFill>
+                          <a:latin typeface="Pretendard" pitchFamily="34" charset="0"/>
+                          <a:ea typeface="Pretendard" pitchFamily="34" charset="-122"/>
+                          <a:cs typeface="Pretendard" pitchFamily="34" charset="-120"/>
+                        </a:rPr>
+                        <a:t>★★★</a:t>
+                      </a:r>
+                      <a:endParaRPr lang="en-US" sz="1050" dirty="0">
+                        <a:latin typeface="Pretendard" charset="0"/>
+                        <a:ea typeface="Pretendard" charset="0"/>
+                        <a:cs typeface="Pretendard" charset="0"/>
+                      </a:endParaRPr>
+                    </a:p>
+                  </a:txBody>
+                  <a:tcPr marL="50800" marR="50800" marT="25400" marB="25400" anchor="ctr">
+                    <a:lnL w="3810" cap="flat" cmpd="sng" algn="ctr">
+                      <a:solidFill>
+                        <a:srgbClr val="CBD5E0"/>
+                      </a:solidFill>
+                      <a:prstDash val="solid"/>
+                      <a:round/>
+                      <a:headEnd type="none" w="med" len="med"/>
+                      <a:tailEnd type="none" w="med" len="med"/>
+                    </a:lnL>
+                    <a:lnR w="3810" cap="flat" cmpd="sng" algn="ctr">
+                      <a:solidFill>
+                        <a:srgbClr val="CBD5E0"/>
+                      </a:solidFill>
+                      <a:prstDash val="solid"/>
+                      <a:round/>
+                      <a:headEnd type="none" w="med" len="med"/>
+                      <a:tailEnd type="none" w="med" len="med"/>
+                    </a:lnR>
+                    <a:lnT w="3810" cap="flat" cmpd="sng" algn="ctr">
+                      <a:solidFill>
+                        <a:srgbClr val="CBD5E0"/>
+                      </a:solidFill>
+                      <a:prstDash val="solid"/>
+                      <a:round/>
+                      <a:headEnd type="none" w="med" len="med"/>
+                      <a:tailEnd type="none" w="med" len="med"/>
+                    </a:lnT>
+                    <a:lnB w="3810" cap="flat" cmpd="sng" algn="ctr">
+                      <a:solidFill>
+                        <a:srgbClr val="CBD5E0"/>
+                      </a:solidFill>
+                      <a:prstDash val="solid"/>
+                      <a:round/>
+                      <a:headEnd type="none" w="med" len="med"/>
+                      <a:tailEnd type="none" w="med" len="med"/>
+                    </a:lnB>
+                    <a:solidFill>
+                      <a:srgbClr val="FFFFFF"/>
+                    </a:solidFill>
+                  </a:tcPr>
+                </a:tc>
+                <a:tc>
+                  <a:txBody>
+                    <a:bodyPr/>
+                    <a:lstStyle/>
+                    <a:p>
+                      <a:pPr indent="0" marL="0">
+                        <a:buNone/>
+                      </a:pPr>
+                      <a:r>
+                        <a:rPr lang="en-US" sz="1050" dirty="0">
+                          <a:solidFill>
+                            <a:srgbClr val="10161F"/>
+                          </a:solidFill>
+                          <a:latin typeface="Pretendard" pitchFamily="34" charset="0"/>
+                          <a:ea typeface="Pretendard" pitchFamily="34" charset="-122"/>
+                          <a:cs typeface="Pretendard" pitchFamily="34" charset="-120"/>
+                        </a:rPr>
+                        <a:t>밸류업 </a:t>
+                      </a:r>
+                      <a:pPr indent="0" marL="0">
+                        <a:buNone/>
+                      </a:pPr>
+                      <a:r>
+                        <a:rPr lang="en-US" sz="1050" dirty="0">
+                          <a:solidFill>
+                            <a:srgbClr val="10161F"/>
+                          </a:solidFill>
+                          <a:latin typeface="Pretendard" pitchFamily="34" charset="0"/>
+                          <a:ea typeface="Pretendard" pitchFamily="34" charset="-122"/>
+                          <a:cs typeface="Pretendard" pitchFamily="34" charset="-120"/>
+                        </a:rPr>
+                        <a:t>후 </a:t>
+                      </a:r>
+                      <a:pPr indent="0" marL="0">
+                        <a:buNone/>
+                      </a:pPr>
+                      <a:r>
+                        <a:rPr lang="en-US" sz="1050" dirty="0">
+                          <a:solidFill>
+                            <a:srgbClr val="10161F"/>
+                          </a:solidFill>
+                          <a:latin typeface="Pretendard" pitchFamily="34" charset="0"/>
+                          <a:ea typeface="Pretendard" pitchFamily="34" charset="-122"/>
+                          <a:cs typeface="Pretendard" pitchFamily="34" charset="-120"/>
+                        </a:rPr>
+                        <a:t>매각 </a:t>
+                      </a:r>
+                      <a:pPr indent="0" marL="0">
+                        <a:buNone/>
+                      </a:pPr>
+                      <a:r>
+                        <a:rPr lang="en-US" sz="1050" dirty="0">
+                          <a:solidFill>
+                            <a:srgbClr val="10161F"/>
+                          </a:solidFill>
+                          <a:latin typeface="Pretendard" pitchFamily="34" charset="0"/>
+                          <a:ea typeface="Pretendard" pitchFamily="34" charset="-122"/>
+                          <a:cs typeface="Pretendard" pitchFamily="34" charset="-120"/>
+                        </a:rPr>
+                        <a:t>시나리오</a:t>
+                      </a:r>
+                      <a:endParaRPr lang="en-US" sz="1050" dirty="0">
+                        <a:latin typeface="Pretendard" charset="0"/>
+                        <a:ea typeface="Pretendard" charset="0"/>
+                        <a:cs typeface="Pretendard" charset="0"/>
+                      </a:endParaRPr>
+                    </a:p>
+                  </a:txBody>
+                  <a:tcPr marL="50800" marR="50800" marT="25400" marB="25400" anchor="ctr">
+                    <a:lnL w="3810" cap="flat" cmpd="sng" algn="ctr">
+                      <a:solidFill>
+                        <a:srgbClr val="CBD5E0"/>
+                      </a:solidFill>
+                      <a:prstDash val="solid"/>
+                      <a:round/>
+                      <a:headEnd type="none" w="med" len="med"/>
+                      <a:tailEnd type="none" w="med" len="med"/>
+                    </a:lnL>
+                    <a:lnR w="3810" cap="flat" cmpd="sng" algn="ctr">
+                      <a:solidFill>
+                        <a:srgbClr val="CBD5E0"/>
+                      </a:solidFill>
+                      <a:prstDash val="solid"/>
+                      <a:round/>
+                      <a:headEnd type="none" w="med" len="med"/>
+                      <a:tailEnd type="none" w="med" len="med"/>
+                    </a:lnR>
+                    <a:lnT w="3810" cap="flat" cmpd="sng" algn="ctr">
+                      <a:solidFill>
+                        <a:srgbClr val="CBD5E0"/>
+                      </a:solidFill>
+                      <a:prstDash val="solid"/>
+                      <a:round/>
+                      <a:headEnd type="none" w="med" len="med"/>
+                      <a:tailEnd type="none" w="med" len="med"/>
+                    </a:lnT>
+                    <a:lnB w="3810" cap="flat" cmpd="sng" algn="ctr">
+                      <a:solidFill>
+                        <a:srgbClr val="CBD5E0"/>
+                      </a:solidFill>
+                      <a:prstDash val="solid"/>
+                      <a:round/>
+                      <a:headEnd type="none" w="med" len="med"/>
+                      <a:tailEnd type="none" w="med" len="med"/>
+                    </a:lnB>
+                    <a:solidFill>
+                      <a:srgbClr val="FFFFFF"/>
+                    </a:solidFill>
+                  </a:tcPr>
+                </a:tc>
+              </a:tr>
             </a:tbl>
           </a:graphicData>
         </a:graphic>
       </p:graphicFrame>
       <p:sp>
         <p:nvSpPr>
-          <p:cNvPr id="8" name="Shape 5"/>
-          <p:cNvSpPr/>
-          <p:nvPr/>
-        </p:nvSpPr>
-        <p:spPr>
-          <a:xfrm>
-            <a:off x="566928" y="5349240"/>
+          <p:cNvPr id="29" name="Shape 26"/>
+          <p:cNvSpPr/>
+          <p:nvPr/>
+        </p:nvSpPr>
+        <p:spPr>
+          <a:xfrm>
+            <a:off x="566928" y="5678424"/>
             <a:ext cx="11057839" cy="804672"/>
           </a:xfrm>
           <a:prstGeom prst="roundRect">
@@ -10596,13 +11406,13 @@
       </p:sp>
       <p:sp>
         <p:nvSpPr>
-          <p:cNvPr id="9" name="Text 6"/>
-          <p:cNvSpPr/>
-          <p:nvPr/>
-        </p:nvSpPr>
-        <p:spPr>
-          <a:xfrm>
-            <a:off x="749808" y="5458968"/>
+          <p:cNvPr id="30" name="Text 27"/>
+          <p:cNvSpPr/>
+          <p:nvPr/>
+        </p:nvSpPr>
+        <p:spPr>
+          <a:xfrm>
+            <a:off x="749808" y="5788152"/>
             <a:ext cx="1691640" cy="256032"/>
           </a:xfrm>
           <a:prstGeom prst="rect">
@@ -10635,13 +11445,13 @@
       </p:sp>
       <p:sp>
         <p:nvSpPr>
-          <p:cNvPr id="10" name="Text 7"/>
-          <p:cNvSpPr/>
-          <p:nvPr/>
-        </p:nvSpPr>
-        <p:spPr>
-          <a:xfrm>
-            <a:off x="2487168" y="5422392"/>
+          <p:cNvPr id="31" name="Text 28"/>
+          <p:cNvSpPr/>
+          <p:nvPr/>
+        </p:nvSpPr>
+        <p:spPr>
+          <a:xfrm>
+            <a:off x="2487168" y="5751576"/>
             <a:ext cx="8954719" cy="658368"/>
           </a:xfrm>
           <a:prstGeom prst="rect">
@@ -10669,7 +11479,7 @@
                 <a:ea typeface="Pretendard" pitchFamily="34" charset="-122"/>
                 <a:cs typeface="Pretendard" pitchFamily="34" charset="-120"/>
               </a:rPr>
-              <a:t>{"ok":true,"mocked":true,"extractedFields":{"area_signal":"역삼","asset_type":"오피스빌딩","price_band":"300억","size_signal":"3000평(약 9917.4㎡)"},"extractedFacts":{"region":"역삼","exactAddressCandidate":"역삼동 742-1","assetType":"오피스빌딩","priceText":"300억","sizeText":"3000평(약 9917.4㎡)","currentUse":"오피스","currentUseSignal":"근린생활시설","leaseSignal":"임대중","vacancySignal":"공실없음","tenantNames":["쿠팡","네이버"],"unitRentTexts":["301호: 1500만"],"sellerMotivationText":"자산 효율화","brokerNotes":["초역세권 매물"]},"detectedSensitiveFields":["exact_address","tenant_name"],"ambiguousFields":[],"warnings":[],"areaSignal":"역삼","assetType":"오피스빌딩","priceBand":"300억","sizeSignal":"3000평(약 9917.4㎡)","dealType":"매각","buildingName":"역삼 센트럴타워","exactAddress":"역삼동 742-1","totalFloorArea":9917.3,"buildYear":2015,"currentUseSignal":"근린생활시설","vacancySignal":"공실 없음","fitSummary":"초역세권 근생 빌딩으로 시행/사옥 매입에 최적화","cautionSummary":"주요 임차 업종 만기 조율 필요","hiddenFields":["exact_address","seller_motivation"],"confidence":{"areaSignal":"confirmed","assetType":"confirmed","priceBand":"ai_hypothesis","fitSummary":"ai_hypothesis"},"missingData":["sizeSignal"],"boundaryNote":"본 자료는 실거래 통계 기반 참고치입니다.","buyerType":"법인 사옥형","budgetRange":{"min":50,"max":80,"display":"50억~80억"},"preferredRegions":["강남","성수"],"assetTypes":["꼬마빌딩","사옥용"],"purchasePurpose":"사옥용 매입","mustHave":["초역세권","주차"],"niceToHave":["테라스","루프탑"],"riskTolerance":"medium","financingNote":"자본금 50% 준비","missingQuestions":["구체적인 입주 시기가 언제인가요?","선호하는 수익률이 있나요?"],"privacyNotes":["연락처 비공개"],"fitReasons":["매수자 예산(50-80억)에 부합하는 매물입니다.","요청하신 성수/강남 권역에 해당합니다."],"cautionReasons":["요청한 용도와 달리 명도 협의가 다소 필요합니다."],"recommendedNextAction":"현장 답사 제안","kakaoMessage":"안녕하세요! 요청하신 조건에 부합하는 추천 매물이 있어 안내해 드립니다. 확인해보시고 피드백 부탁드립니다.","title":"강남 역삼역 초역세권 오피스 사옥용 빌딩 매각","shortSummary":"역삼역 도보 5분 거리의 준신축급 대형 오피스빌딩입니다.","dealPoints":["초역세권","사옥 최적"],"cautionPoints":["명도 조율 필요"],"hiddenInfoNotice":["보증금 및 지번은 인가 후 확인 가능"],"gateMessage":"G1 등급 등록이 필요합니다.","kakaoText":"강남 역삼역 오피스 빌딩 매각 안내입니다.","exactUnitCandidate":"101호","floor":"1층","areaSqmText":"150㎡","spaceType":"office","depositText":"5000만","monthlyRentText":"400만","maintenanceFeeText":"50만","availableFromText":"즉시입주","leaseTermMonthsText":"24","incentivesText":"렌트프리 2개월","restrictions":[],"landlordIdentity":"김성수","currentTenant":"스타트업","vacancyReason":"이전 확장","rentNegotiation":"협의 가능","region":"성수동","areaSqm":150,"deposit":5000,"monthlyRent":400,"maintenanceFee":50,"availableFrom":"즉시입주","leaseTermMonths":24,"incentives":{"rentFreeMonths":2,"interiorSupport":"일부 인테리어 지원","freeRentDetail":"렌트프리 2개월 지원"},"shortSummaryLease":"성수역 도보 5분 거리 1층 리테일 상가 매물입니다."}</a:t>
+              <a:t>[참고] 종합 가치 제안: 강남권역 핵심 상권의 희소성 높은 우량 자산으로, 안정적인 임대 수익과 향후 공법상 밸류업 및 권역 지가 상승에 따른 자본 이득(Capital Gain)을 동시에 실현할 수 있는 전략적 매물입니다.</a:t>
             </a:r>
             <a:endParaRPr lang="en-US" sz="1100" dirty="0"/>
           </a:p>
@@ -10677,7 +11487,7 @@
       </p:sp>
       <p:sp>
         <p:nvSpPr>
-          <p:cNvPr id="11" name="Text 8"/>
+          <p:cNvPr id="32" name="Text 29"/>
           <p:cNvSpPr/>
           <p:nvPr/>
         </p:nvSpPr>
@@ -10716,7 +11526,7 @@
       </p:sp>
       <p:sp>
         <p:nvSpPr>
-          <p:cNvPr id="12" name="Text 9"/>
+          <p:cNvPr id="33" name="Text 30"/>
           <p:cNvSpPr/>
           <p:nvPr/>
         </p:nvSpPr>
@@ -10931,11 +11741,11 @@
         <p:spPr>
           <a:xfrm>
             <a:off x="566928" y="1572768"/>
-            <a:ext cx="11057839" cy="3200400"/>
+            <a:ext cx="2490140" cy="3200400"/>
           </a:xfrm>
           <a:prstGeom prst="roundRect">
             <a:avLst>
-              <a:gd name="adj" fmla="val 1714"/>
+              <a:gd name="adj" fmla="val 2203"/>
             </a:avLst>
           </a:prstGeom>
           <a:solidFill>
@@ -11017,7 +11827,7 @@
         <p:spPr>
           <a:xfrm>
             <a:off x="786384" y="2304288"/>
-            <a:ext cx="10618927" cy="365760"/>
+            <a:ext cx="2051228" cy="365760"/>
           </a:xfrm>
           <a:prstGeom prst="rect">
             <a:avLst/>
@@ -11041,7 +11851,7 @@
                 <a:ea typeface="Pretendard" pitchFamily="34" charset="-122"/>
                 <a:cs typeface="Pretendard" pitchFamily="34" charset="-120"/>
               </a:rPr>
-              <a:t>{"ok"</a:t>
+              <a:t>초기 관심 표명 → 담당자 연락</a:t>
             </a:r>
             <a:endParaRPr lang="en-US" sz="1600" dirty="0"/>
           </a:p>
@@ -11056,7 +11866,7 @@
         <p:spPr>
           <a:xfrm>
             <a:off x="786384" y="2761488"/>
-            <a:ext cx="10618927" cy="1828800"/>
+            <a:ext cx="2051228" cy="1828800"/>
           </a:xfrm>
           <a:prstGeom prst="rect">
             <a:avLst/>
@@ -11071,8 +11881,147 @@
             <a:pPr indent="0" marL="0">
               <a:buNone/>
             </a:pPr>
-            <a:r>
-              <a:rPr lang="en-US" sz="1100" dirty="0">
+            <a:endParaRPr lang="en-US" sz="1100" dirty="0"/>
+          </a:p>
+        </p:txBody>
+      </p:sp>
+      <p:sp>
+        <p:nvSpPr>
+          <p:cNvPr id="11" name="Shape 9"/>
+          <p:cNvSpPr/>
+          <p:nvPr/>
+        </p:nvSpPr>
+        <p:spPr>
+          <a:xfrm>
+            <a:off x="3148508" y="3035808"/>
+            <a:ext cx="182880" cy="274320"/>
+          </a:xfrm>
+          <a:prstGeom prst="rightArrow">
+            <a:avLst/>
+          </a:prstGeom>
+          <a:solidFill>
+            <a:srgbClr val="CBD5E0"/>
+          </a:solidFill>
+          <a:ln w="6350">
+            <a:solidFill>
+              <a:srgbClr val="718096"/>
+            </a:solidFill>
+            <a:prstDash val="solid"/>
+          </a:ln>
+        </p:spPr>
+      </p:sp>
+      <p:sp>
+        <p:nvSpPr>
+          <p:cNvPr id="12" name="Shape 10"/>
+          <p:cNvSpPr/>
+          <p:nvPr/>
+        </p:nvSpPr>
+        <p:spPr>
+          <a:xfrm>
+            <a:off x="3422828" y="1572768"/>
+            <a:ext cx="2490140" cy="3200400"/>
+          </a:xfrm>
+          <a:prstGeom prst="roundRect">
+            <a:avLst>
+              <a:gd name="adj" fmla="val 2203"/>
+            </a:avLst>
+          </a:prstGeom>
+          <a:solidFill>
+            <a:srgbClr val="F7FAFC"/>
+          </a:solidFill>
+          <a:ln w="6350">
+            <a:solidFill>
+              <a:srgbClr val="CBD5E0"/>
+            </a:solidFill>
+            <a:prstDash val="solid"/>
+          </a:ln>
+        </p:spPr>
+      </p:sp>
+      <p:sp>
+        <p:nvSpPr>
+          <p:cNvPr id="13" name="Shape 11"/>
+          <p:cNvSpPr/>
+          <p:nvPr/>
+        </p:nvSpPr>
+        <p:spPr>
+          <a:xfrm>
+            <a:off x="3642284" y="1792224"/>
+            <a:ext cx="384048" cy="384048"/>
+          </a:xfrm>
+          <a:prstGeom prst="ellipse">
+            <a:avLst/>
+          </a:prstGeom>
+          <a:solidFill>
+            <a:srgbClr val="B98A2E"/>
+          </a:solidFill>
+          <a:ln/>
+        </p:spPr>
+      </p:sp>
+      <p:sp>
+        <p:nvSpPr>
+          <p:cNvPr id="14" name="Text 12"/>
+          <p:cNvSpPr/>
+          <p:nvPr/>
+        </p:nvSpPr>
+        <p:spPr>
+          <a:xfrm>
+            <a:off x="3642284" y="1792224"/>
+            <a:ext cx="384048" cy="384048"/>
+          </a:xfrm>
+          <a:prstGeom prst="rect">
+            <a:avLst/>
+          </a:prstGeom>
+          <a:noFill/>
+          <a:ln/>
+        </p:spPr>
+        <p:txBody>
+          <a:bodyPr wrap="square" lIns="0" tIns="0" rIns="0" bIns="0" rtlCol="0" anchor="ctr"/>
+          <a:lstStyle/>
+          <a:p>
+            <a:pPr algn="ctr" indent="0" marL="0">
+              <a:buNone/>
+            </a:pPr>
+            <a:r>
+              <a:rPr lang="en-US" sz="1300" b="1" dirty="0">
+                <a:solidFill>
+                  <a:srgbClr val="FFFFFF"/>
+                </a:solidFill>
+                <a:latin typeface="Arial" pitchFamily="34" charset="0"/>
+                <a:ea typeface="Arial" pitchFamily="34" charset="-122"/>
+                <a:cs typeface="Arial" pitchFamily="34" charset="-120"/>
+              </a:rPr>
+              <a:t>STEP 2</a:t>
+            </a:r>
+            <a:endParaRPr lang="en-US" sz="1300" dirty="0"/>
+          </a:p>
+        </p:txBody>
+      </p:sp>
+      <p:sp>
+        <p:nvSpPr>
+          <p:cNvPr id="15" name="Text 13"/>
+          <p:cNvSpPr/>
+          <p:nvPr/>
+        </p:nvSpPr>
+        <p:spPr>
+          <a:xfrm>
+            <a:off x="3642284" y="2304288"/>
+            <a:ext cx="2051228" cy="365760"/>
+          </a:xfrm>
+          <a:prstGeom prst="rect">
+            <a:avLst/>
+          </a:prstGeom>
+          <a:noFill/>
+          <a:ln/>
+        </p:spPr>
+        <p:txBody>
+          <a:bodyPr wrap="square" rtlCol="0" anchor="ctr"/>
+          <a:lstStyle/>
+          <a:p>
+            <a:pPr indent="0" marL="0">
+              <a:buNone/>
+            </a:pPr>
+            <a:r>
+              <a:rPr lang="en-US" sz="1600" b="1" dirty="0">
                 <a:solidFill>
                   <a:srgbClr val="10161F"/>
                 </a:solidFill>
@@ -11080,45 +12029,429 @@
                 <a:ea typeface="Pretendard" pitchFamily="34" charset="-122"/>
                 <a:cs typeface="Pretendard" pitchFamily="34" charset="-120"/>
               </a:rPr>
-              <a:t>true,"mocked":true,"extractedFields":{"area_signal":"역삼","asset_type":"오피스빌딩","price_band":"300억","size_signal":"3000평(약 9917.4㎡)"},"extractedFacts":{"region":"역삼","exactAddressCandidate":"역삼동 742-1","assetType":"오피스빌딩","priceText":"300억","sizeText":"3000평(약 9917.4㎡)","currentUse":"오피스","currentUseSignal":"근린생활시설","leaseSignal":"임대중","vacancySignal":"공실없음","tenantNames":["쿠팡","네이버"],"unitRentTexts":["301호: 1500만"],"sellerMotivationText":"자산 효율화","brokerNotes":["초역세권 매물"]},"detectedSensitiveFields":["exact_address","tenant_name"],"ambiguousFields":[],"warnings":[],"areaSignal":"역삼","assetType":"오피스빌딩","priceBand":"300억","sizeSignal":"3000평(약 9917.4㎡)","dealType":"매각","buildingName":"역삼 센트럴타워","exactAddress":"역삼동 742-1","totalFloorArea":9917.3,"buildYear":2015,"currentUseSignal":"근린생활시설","vacancySignal":"공실 없음","fitSummary":"초역세권 근생 빌딩으로 시행/사옥 매입에 최적화","cautionSummary":"주요 임차 업종 만기 조율 필요","hiddenFields":["exact_address","seller_motivation"],"confidence":{"areaSignal":"confirmed","assetType":"confirmed","priceBand":"ai_hypothesis","fitSummary":"ai_hypothesis"},"missingData":["sizeSignal"],"boundaryNote":"본 자료는 실거래 통계 기반 참고치입니다.","buyerType":"법인 사옥형","budgetRange":{"min":50,"max":80,"display":"50억~80억"},"preferredRegions":["강남","성수"],"assetTypes":["꼬마빌딩","사옥용"],"purchasePurpose":"사옥용 매입","mustHave":["초역세권","주차"],"niceToHave":["테라스","루프탑"],"riskTolerance":"medium","financingNote":"자본금 50% 준비","missingQuestions":["구체적인 입주 시기가 언제인가요?","선호하는 수익률이 있나요?"],"privacyNotes":["연락처 비공개"],"fitReasons":["매수자 예산(50-80억)에 부합하는 매물입니다.","요청하신 성수/강남 권역에 해당합니다."],"cautionReasons":["요청한 용도와 달리 명도 협의가 다소 필요합니다."],"recommendedNextAction":"현장 답사 제안","kakaoMessage":"안녕하세요! 요청하신 조건에 부합하는 추천 매물이 있어 안내해 드립니다. 확인해보시고 피드백 부탁드립니다.","title":"강남 역삼역 초역세권 오피스 사옥용 빌딩 매각","shortSummary":"역삼역 도보 5분 거리의 준신축급 대형 오피스빌딩입니다.","dealPoints":["초역세권","사옥 최적"],"cautionPoints":["명도 조율 필요"],"hiddenInfoNotice":["보증금 및 지번은 인가 후 확인 가능"],"gateMessage":"G1 등급 등록이 필요합니다.","kakaoText":"강남 역삼역 오피스 빌딩 매각 안내입니다.","exactUnitCandidate":"101호","floor":"1층","areaSqmText":"150㎡","spaceType":"office","depositText":"5000만","monthlyRentText":"400만","maintenanceFeeText":"50만","availableFromText":"즉시입주","leaseTermMonthsText":"24","incentivesText":"렌트프리 2개월","restrictions":[],"landlordIdentity":"김성수","currentTenant":"스타트업","vacancyReason":"이전 확장","rentNegotiation":"협의 가능","region":"성수동","areaSqm":150,"deposit":5000,"monthlyRent":400,"maintenanceFee":50,"availableFrom":"즉시입주","leaseTermMonths":24,"incentives":{"rentFreeMonths":2,"interiorSupport":"일부 인테리어 지원","freeRentDetail":"렌트프리 2개월 지원"},"shortSummaryLease":"성수역 도보 5분 거리 1층 리테일 상가 매물입니다."}</a:t>
-            </a:r>
+              <a:t>NDA 체결 → 임차인 정보 및 임대차계약서 제공</a:t>
+            </a:r>
+            <a:endParaRPr lang="en-US" sz="1600" dirty="0"/>
+          </a:p>
+        </p:txBody>
+      </p:sp>
+      <p:sp>
+        <p:nvSpPr>
+          <p:cNvPr id="16" name="Text 14"/>
+          <p:cNvSpPr/>
+          <p:nvPr/>
+        </p:nvSpPr>
+        <p:spPr>
+          <a:xfrm>
+            <a:off x="3642284" y="2761488"/>
+            <a:ext cx="2051228" cy="1828800"/>
+          </a:xfrm>
+          <a:prstGeom prst="rect">
+            <a:avLst/>
+          </a:prstGeom>
+          <a:noFill/>
+          <a:ln/>
+        </p:spPr>
+        <p:txBody>
+          <a:bodyPr wrap="square" rtlCol="0" anchor="t"/>
+          <a:lstStyle/>
+          <a:p>
+            <a:pPr indent="0" marL="0">
+              <a:buNone/>
+            </a:pPr>
             <a:endParaRPr lang="en-US" sz="1100" dirty="0"/>
           </a:p>
         </p:txBody>
       </p:sp>
       <p:sp>
         <p:nvSpPr>
-          <p:cNvPr id="11" name="Text 9"/>
-          <p:cNvSpPr/>
-          <p:nvPr/>
-        </p:nvSpPr>
-        <p:spPr>
-          <a:xfrm>
-            <a:off x="566928" y="6382512"/>
-            <a:ext cx="7315200" cy="219456"/>
-          </a:xfrm>
-          <a:prstGeom prst="rect">
-            <a:avLst/>
-          </a:prstGeom>
-          <a:noFill/>
-          <a:ln/>
-        </p:spPr>
-        <p:txBody>
-          <a:bodyPr wrap="square" lIns="0" tIns="0" rIns="0" bIns="0" rtlCol="0" anchor="ctr"/>
+          <p:cNvPr id="17" name="Shape 15"/>
+          <p:cNvSpPr/>
+          <p:nvPr/>
+        </p:nvSpPr>
+        <p:spPr>
+          <a:xfrm>
+            <a:off x="6004408" y="3035808"/>
+            <a:ext cx="182880" cy="274320"/>
+          </a:xfrm>
+          <a:prstGeom prst="rightArrow">
+            <a:avLst/>
+          </a:prstGeom>
+          <a:solidFill>
+            <a:srgbClr val="CBD5E0"/>
+          </a:solidFill>
+          <a:ln w="6350">
+            <a:solidFill>
+              <a:srgbClr val="718096"/>
+            </a:solidFill>
+            <a:prstDash val="solid"/>
+          </a:ln>
+        </p:spPr>
+      </p:sp>
+      <p:sp>
+        <p:nvSpPr>
+          <p:cNvPr id="18" name="Shape 16"/>
+          <p:cNvSpPr/>
+          <p:nvPr/>
+        </p:nvSpPr>
+        <p:spPr>
+          <a:xfrm>
+            <a:off x="6278728" y="1572768"/>
+            <a:ext cx="2490140" cy="3200400"/>
+          </a:xfrm>
+          <a:prstGeom prst="roundRect">
+            <a:avLst>
+              <a:gd name="adj" fmla="val 2203"/>
+            </a:avLst>
+          </a:prstGeom>
+          <a:solidFill>
+            <a:srgbClr val="F7FAFC"/>
+          </a:solidFill>
+          <a:ln w="6350">
+            <a:solidFill>
+              <a:srgbClr val="CBD5E0"/>
+            </a:solidFill>
+            <a:prstDash val="solid"/>
+          </a:ln>
+        </p:spPr>
+      </p:sp>
+      <p:sp>
+        <p:nvSpPr>
+          <p:cNvPr id="19" name="Shape 17"/>
+          <p:cNvSpPr/>
+          <p:nvPr/>
+        </p:nvSpPr>
+        <p:spPr>
+          <a:xfrm>
+            <a:off x="6498184" y="1792224"/>
+            <a:ext cx="384048" cy="384048"/>
+          </a:xfrm>
+          <a:prstGeom prst="ellipse">
+            <a:avLst/>
+          </a:prstGeom>
+          <a:solidFill>
+            <a:srgbClr val="B98A2E"/>
+          </a:solidFill>
+          <a:ln/>
+        </p:spPr>
+      </p:sp>
+      <p:sp>
+        <p:nvSpPr>
+          <p:cNvPr id="20" name="Text 18"/>
+          <p:cNvSpPr/>
+          <p:nvPr/>
+        </p:nvSpPr>
+        <p:spPr>
+          <a:xfrm>
+            <a:off x="6498184" y="1792224"/>
+            <a:ext cx="384048" cy="384048"/>
+          </a:xfrm>
+          <a:prstGeom prst="rect">
+            <a:avLst/>
+          </a:prstGeom>
+          <a:noFill/>
+          <a:ln/>
+        </p:spPr>
+        <p:txBody>
+          <a:bodyPr wrap="square" lIns="0" tIns="0" rIns="0" bIns="0" rtlCol="0" anchor="ctr"/>
+          <a:lstStyle/>
+          <a:p>
+            <a:pPr algn="ctr" indent="0" marL="0">
+              <a:buNone/>
+            </a:pPr>
+            <a:r>
+              <a:rPr lang="en-US" sz="1300" b="1" dirty="0">
+                <a:solidFill>
+                  <a:srgbClr val="FFFFFF"/>
+                </a:solidFill>
+                <a:latin typeface="Arial" pitchFamily="34" charset="0"/>
+                <a:ea typeface="Arial" pitchFamily="34" charset="-122"/>
+                <a:cs typeface="Arial" pitchFamily="34" charset="-120"/>
+              </a:rPr>
+              <a:t>STEP 3</a:t>
+            </a:r>
+            <a:endParaRPr lang="en-US" sz="1300" dirty="0"/>
+          </a:p>
+        </p:txBody>
+      </p:sp>
+      <p:sp>
+        <p:nvSpPr>
+          <p:cNvPr id="21" name="Text 19"/>
+          <p:cNvSpPr/>
+          <p:nvPr/>
+        </p:nvSpPr>
+        <p:spPr>
+          <a:xfrm>
+            <a:off x="6498184" y="2304288"/>
+            <a:ext cx="2051228" cy="365760"/>
+          </a:xfrm>
+          <a:prstGeom prst="rect">
+            <a:avLst/>
+          </a:prstGeom>
+          <a:noFill/>
+          <a:ln/>
+        </p:spPr>
+        <p:txBody>
+          <a:bodyPr wrap="square" rtlCol="0" anchor="ctr"/>
           <a:lstStyle/>
           <a:p>
             <a:pPr indent="0" marL="0">
               <a:buNone/>
             </a:pPr>
             <a:r>
-              <a:rPr lang="en-US" sz="800" dirty="0">
-                <a:solidFill>
-                  <a:srgbClr val="718096"/>
+              <a:rPr lang="en-US" sz="1600" b="1" dirty="0">
+                <a:solidFill>
+                  <a:srgbClr val="10161F"/>
                 </a:solidFill>
                 <a:latin typeface="Pretendard" pitchFamily="34" charset="0"/>
                 <a:ea typeface="Pretendard" pitchFamily="34" charset="-122"/>
                 <a:cs typeface="Pretendard" pitchFamily="34" charset="-120"/>
               </a:rPr>
+              <a:t>현장 실사 일정 조율 → 건물 컨디션 및 설비 직접 확인</a:t>
+            </a:r>
+            <a:endParaRPr lang="en-US" sz="1600" dirty="0"/>
+          </a:p>
+        </p:txBody>
+      </p:sp>
+      <p:sp>
+        <p:nvSpPr>
+          <p:cNvPr id="22" name="Text 20"/>
+          <p:cNvSpPr/>
+          <p:nvPr/>
+        </p:nvSpPr>
+        <p:spPr>
+          <a:xfrm>
+            <a:off x="6498184" y="2761488"/>
+            <a:ext cx="2051228" cy="1828800"/>
+          </a:xfrm>
+          <a:prstGeom prst="rect">
+            <a:avLst/>
+          </a:prstGeom>
+          <a:noFill/>
+          <a:ln/>
+        </p:spPr>
+        <p:txBody>
+          <a:bodyPr wrap="square" rtlCol="0" anchor="t"/>
+          <a:lstStyle/>
+          <a:p>
+            <a:pPr indent="0" marL="0">
+              <a:buNone/>
+            </a:pPr>
+            <a:endParaRPr lang="en-US" sz="1100" dirty="0"/>
+          </a:p>
+        </p:txBody>
+      </p:sp>
+      <p:sp>
+        <p:nvSpPr>
+          <p:cNvPr id="23" name="Shape 21"/>
+          <p:cNvSpPr/>
+          <p:nvPr/>
+        </p:nvSpPr>
+        <p:spPr>
+          <a:xfrm>
+            <a:off x="8860307" y="3035808"/>
+            <a:ext cx="182880" cy="274320"/>
+          </a:xfrm>
+          <a:prstGeom prst="rightArrow">
+            <a:avLst/>
+          </a:prstGeom>
+          <a:solidFill>
+            <a:srgbClr val="CBD5E0"/>
+          </a:solidFill>
+          <a:ln w="6350">
+            <a:solidFill>
+              <a:srgbClr val="718096"/>
+            </a:solidFill>
+            <a:prstDash val="solid"/>
+          </a:ln>
+        </p:spPr>
+      </p:sp>
+      <p:sp>
+        <p:nvSpPr>
+          <p:cNvPr id="24" name="Shape 22"/>
+          <p:cNvSpPr/>
+          <p:nvPr/>
+        </p:nvSpPr>
+        <p:spPr>
+          <a:xfrm>
+            <a:off x="9134627" y="1572768"/>
+            <a:ext cx="2490140" cy="3200400"/>
+          </a:xfrm>
+          <a:prstGeom prst="roundRect">
+            <a:avLst>
+              <a:gd name="adj" fmla="val 2203"/>
+            </a:avLst>
+          </a:prstGeom>
+          <a:solidFill>
+            <a:srgbClr val="F7FAFC"/>
+          </a:solidFill>
+          <a:ln w="6350">
+            <a:solidFill>
+              <a:srgbClr val="CBD5E0"/>
+            </a:solidFill>
+            <a:prstDash val="solid"/>
+          </a:ln>
+        </p:spPr>
+      </p:sp>
+      <p:sp>
+        <p:nvSpPr>
+          <p:cNvPr id="25" name="Shape 23"/>
+          <p:cNvSpPr/>
+          <p:nvPr/>
+        </p:nvSpPr>
+        <p:spPr>
+          <a:xfrm>
+            <a:off x="9354083" y="1792224"/>
+            <a:ext cx="384048" cy="384048"/>
+          </a:xfrm>
+          <a:prstGeom prst="ellipse">
+            <a:avLst/>
+          </a:prstGeom>
+          <a:solidFill>
+            <a:srgbClr val="B98A2E"/>
+          </a:solidFill>
+          <a:ln/>
+        </p:spPr>
+      </p:sp>
+      <p:sp>
+        <p:nvSpPr>
+          <p:cNvPr id="26" name="Text 24"/>
+          <p:cNvSpPr/>
+          <p:nvPr/>
+        </p:nvSpPr>
+        <p:spPr>
+          <a:xfrm>
+            <a:off x="9354083" y="1792224"/>
+            <a:ext cx="384048" cy="384048"/>
+          </a:xfrm>
+          <a:prstGeom prst="rect">
+            <a:avLst/>
+          </a:prstGeom>
+          <a:noFill/>
+          <a:ln/>
+        </p:spPr>
+        <p:txBody>
+          <a:bodyPr wrap="square" lIns="0" tIns="0" rIns="0" bIns="0" rtlCol="0" anchor="ctr"/>
+          <a:lstStyle/>
+          <a:p>
+            <a:pPr algn="ctr" indent="0" marL="0">
+              <a:buNone/>
+            </a:pPr>
+            <a:r>
+              <a:rPr lang="en-US" sz="1300" b="1" dirty="0">
+                <a:solidFill>
+                  <a:srgbClr val="FFFFFF"/>
+                </a:solidFill>
+                <a:latin typeface="Arial" pitchFamily="34" charset="0"/>
+                <a:ea typeface="Arial" pitchFamily="34" charset="-122"/>
+                <a:cs typeface="Arial" pitchFamily="34" charset="-120"/>
+              </a:rPr>
+              <a:t>STEP 4</a:t>
+            </a:r>
+            <a:endParaRPr lang="en-US" sz="1300" dirty="0"/>
+          </a:p>
+        </p:txBody>
+      </p:sp>
+      <p:sp>
+        <p:nvSpPr>
+          <p:cNvPr id="27" name="Text 25"/>
+          <p:cNvSpPr/>
+          <p:nvPr/>
+        </p:nvSpPr>
+        <p:spPr>
+          <a:xfrm>
+            <a:off x="9354083" y="2304288"/>
+            <a:ext cx="2051228" cy="365760"/>
+          </a:xfrm>
+          <a:prstGeom prst="rect">
+            <a:avLst/>
+          </a:prstGeom>
+          <a:noFill/>
+          <a:ln/>
+        </p:spPr>
+        <p:txBody>
+          <a:bodyPr wrap="square" rtlCol="0" anchor="ctr"/>
+          <a:lstStyle/>
+          <a:p>
+            <a:pPr indent="0" marL="0">
+              <a:buNone/>
+            </a:pPr>
+            <a:r>
+              <a:rPr lang="en-US" sz="1600" b="1" dirty="0">
+                <a:solidFill>
+                  <a:srgbClr val="10161F"/>
+                </a:solidFill>
+                <a:latin typeface="Pretendard" pitchFamily="34" charset="0"/>
+                <a:ea typeface="Pretendard" pitchFamily="34" charset="-122"/>
+                <a:cs typeface="Pretendard" pitchFamily="34" charset="-120"/>
+              </a:rPr>
+              <a:t>LOI(투자의향서) 제출 → 가격 협의 개시</a:t>
+            </a:r>
+            <a:endParaRPr lang="en-US" sz="1600" dirty="0"/>
+          </a:p>
+        </p:txBody>
+      </p:sp>
+      <p:sp>
+        <p:nvSpPr>
+          <p:cNvPr id="28" name="Text 26"/>
+          <p:cNvSpPr/>
+          <p:nvPr/>
+        </p:nvSpPr>
+        <p:spPr>
+          <a:xfrm>
+            <a:off x="9354083" y="2761488"/>
+            <a:ext cx="2051228" cy="1828800"/>
+          </a:xfrm>
+          <a:prstGeom prst="rect">
+            <a:avLst/>
+          </a:prstGeom>
+          <a:noFill/>
+          <a:ln/>
+        </p:spPr>
+        <p:txBody>
+          <a:bodyPr wrap="square" rtlCol="0" anchor="t"/>
+          <a:lstStyle/>
+          <a:p>
+            <a:pPr indent="0" marL="0">
+              <a:buNone/>
+            </a:pPr>
+            <a:endParaRPr lang="en-US" sz="1100" dirty="0"/>
+          </a:p>
+        </p:txBody>
+      </p:sp>
+      <p:sp>
+        <p:nvSpPr>
+          <p:cNvPr id="29" name="Text 27"/>
+          <p:cNvSpPr/>
+          <p:nvPr/>
+        </p:nvSpPr>
+        <p:spPr>
+          <a:xfrm>
+            <a:off x="566928" y="6382512"/>
+            <a:ext cx="7315200" cy="219456"/>
+          </a:xfrm>
+          <a:prstGeom prst="rect">
+            <a:avLst/>
+          </a:prstGeom>
+          <a:noFill/>
+          <a:ln/>
+        </p:spPr>
+        <p:txBody>
+          <a:bodyPr wrap="square" lIns="0" tIns="0" rIns="0" bIns="0" rtlCol="0" anchor="ctr"/>
+          <a:lstStyle/>
+          <a:p>
+            <a:pPr indent="0" marL="0">
+              <a:buNone/>
+            </a:pPr>
+            <a:r>
+              <a:rPr lang="en-US" sz="800" dirty="0">
+                <a:solidFill>
+                  <a:srgbClr val="718096"/>
+                </a:solidFill>
+                <a:latin typeface="Pretendard" pitchFamily="34" charset="0"/>
+                <a:ea typeface="Pretendard" pitchFamily="34" charset="-122"/>
+                <a:cs typeface="Pretendard" pitchFamily="34" charset="-120"/>
+              </a:rPr>
               <a:t>크리딜   |   </a:t>
             </a:r>
             <a:endParaRPr lang="en-US" sz="800" dirty="0"/>
@@ -11127,7 +12460,7 @@
       </p:sp>
       <p:sp>
         <p:nvSpPr>
-          <p:cNvPr id="12" name="Text 10"/>
+          <p:cNvPr id="30" name="Text 28"/>
           <p:cNvSpPr/>
           <p:nvPr/>
         </p:nvSpPr>

--- a/docs/test/stress/e2e-outputs/trading_case09_sinsa_value_add_basic.pptx
+++ b/docs/test/stress/e2e-outputs/trading_case09_sinsa_value_add_basic.pptx
@@ -1905,7 +1905,7 @@
                 <a:ea typeface="Arial" pitchFamily="34" charset="-122"/>
                 <a:cs typeface="Arial" pitchFamily="34" charset="-120"/>
               </a:rPr>
-              <a:t>BASIC IM</a:t>
+              <a:t>INVESTMENT MEMORANDUM</a:t>
             </a:r>
             <a:endParaRPr lang="en-US" sz="1000" dirty="0"/>
           </a:p>
@@ -3988,7 +3988,7 @@
                 <a:ea typeface="Pretendard" pitchFamily="34" charset="-122"/>
                 <a:cs typeface="Pretendard" pitchFamily="34" charset="-120"/>
               </a:rPr>
-              <a:t>강남권역 내 노후빌딩, 매각 희망가 98억. 입지·임대차 현황을 감안할 때 투자 검토 가치가 있는 물건입니다.</a:t>
+              <a:t>강남권역 소재 노후빌딩, 희망가 98억 투자 검토 자료입니다.</a:t>
             </a:r>
             <a:endParaRPr lang="en-US" sz="1500" dirty="0"/>
           </a:p>
@@ -4610,7 +4610,7 @@
                 <a:ea typeface="Pretendard" pitchFamily="34" charset="-122"/>
                 <a:cs typeface="Pretendard" pitchFamily="34" charset="-120"/>
               </a:rPr>
-              <a:t>원금 안전판: 강남권역 핵심 입지 및 우량 대지 지분 가치로 하방 경직성 확보</a:t>
+              <a:t>입지 가치: 강남권역 소재 자산으로 중장기 자산 가치 및 안정적 수요 검토</a:t>
             </a:r>
             <a:endParaRPr lang="en-US" sz="1150" dirty="0"/>
           </a:p>
@@ -4742,7 +4742,7 @@
                 <a:ea typeface="Pretendard" pitchFamily="34" charset="-122"/>
                 <a:cs typeface="Pretendard" pitchFamily="34" charset="-120"/>
               </a:rPr>
-              <a:t>수익 안정성: 매각 희망가 98억 대비 안정적인 월 임대수익 창출 구조</a:t>
+              <a:t>임대 구조: 98억 수준의 가격대 및 현 임대차 기반의 현금흐름 분석</a:t>
             </a:r>
             <a:endParaRPr lang="en-US" sz="1150" dirty="0"/>
           </a:p>
@@ -4874,7 +4874,7 @@
                 <a:ea typeface="Pretendard" pitchFamily="34" charset="-122"/>
                 <a:cs typeface="Pretendard" pitchFamily="34" charset="-120"/>
               </a:rPr>
-              <a:t>미래 가치: 향후 권역 지가 상승 및 공법상 잔여 용적률 활용 밸류업 기회</a:t>
+              <a:t>실사 점검: 계약서 및 공부 확인을 통한 권리관계·물리적 상태 정밀 진단</a:t>
             </a:r>
             <a:endParaRPr lang="en-US" sz="1150" dirty="0"/>
           </a:p>
@@ -5160,45 +5160,6 @@
         <p:spPr>
           <a:xfrm>
             <a:off x="6053328" y="1481328"/>
-            <a:ext cx="5571439" cy="237744"/>
-          </a:xfrm>
-          <a:prstGeom prst="rect">
-            <a:avLst/>
-          </a:prstGeom>
-          <a:noFill/>
-          <a:ln/>
-        </p:spPr>
-        <p:txBody>
-          <a:bodyPr wrap="square" lIns="0" tIns="0" rIns="0" bIns="0" rtlCol="0" anchor="ctr"/>
-          <a:lstStyle/>
-          <a:p>
-            <a:pPr indent="0" marL="0">
-              <a:buNone/>
-            </a:pPr>
-            <a:r>
-              <a:rPr lang="en-US" sz="1100" b="1" dirty="0">
-                <a:solidFill>
-                  <a:srgbClr val="10161F"/>
-                </a:solidFill>
-                <a:latin typeface="Pretendard" pitchFamily="34" charset="0"/>
-                <a:ea typeface="Pretendard" pitchFamily="34" charset="-122"/>
-                <a:cs typeface="Pretendard" pitchFamily="34" charset="-120"/>
-              </a:rPr>
-              <a:t>[교통] 교통 및 도로 접근성</a:t>
-            </a:r>
-            <a:endParaRPr lang="en-US" sz="1100" dirty="0"/>
-          </a:p>
-        </p:txBody>
-      </p:sp>
-      <p:sp>
-        <p:nvSpPr>
-          <p:cNvPr id="8" name="Text 5"/>
-          <p:cNvSpPr/>
-          <p:nvPr/>
-        </p:nvSpPr>
-        <p:spPr>
-          <a:xfrm>
-            <a:off x="6053328" y="1801368"/>
             <a:ext cx="2117147" cy="493776"/>
           </a:xfrm>
           <a:prstGeom prst="rect">
@@ -5226,7 +5187,7 @@
                 <a:ea typeface="Pretendard" pitchFamily="34" charset="-122"/>
                 <a:cs typeface="Pretendard" pitchFamily="34" charset="-120"/>
               </a:rPr>
-              <a:t>교통 접근성 상세 정보는 담당 브로커를 통해 확인하</a:t>
+              <a:t>교통 접근성</a:t>
             </a:r>
             <a:endParaRPr lang="en-US" sz="1300" dirty="0"/>
           </a:p>
@@ -5234,13 +5195,13 @@
       </p:sp>
       <p:sp>
         <p:nvSpPr>
-          <p:cNvPr id="9" name="Text 6"/>
-          <p:cNvSpPr/>
-          <p:nvPr/>
-        </p:nvSpPr>
-        <p:spPr>
-          <a:xfrm>
-            <a:off x="8170475" y="1801368"/>
+          <p:cNvPr id="8" name="Text 5"/>
+          <p:cNvSpPr/>
+          <p:nvPr/>
+        </p:nvSpPr>
+        <p:spPr>
+          <a:xfrm>
+            <a:off x="8170475" y="1481328"/>
             <a:ext cx="3454292" cy="493776"/>
           </a:xfrm>
           <a:prstGeom prst="rect">
@@ -5259,70 +5220,16 @@
               </a:lnSpc>
               <a:buNone/>
             </a:pPr>
-            <a:endParaRPr lang="en-US" sz="1300" dirty="0"/>
-          </a:p>
-        </p:txBody>
-      </p:sp>
-      <p:sp>
-        <p:nvSpPr>
-          <p:cNvPr id="10" name="Shape 7"/>
-          <p:cNvSpPr/>
-          <p:nvPr/>
-        </p:nvSpPr>
-        <p:spPr>
-          <a:xfrm>
-            <a:off x="6053328" y="2295144"/>
-            <a:ext cx="5571439" cy="0"/>
-          </a:xfrm>
-          <a:prstGeom prst="line">
-            <a:avLst/>
-          </a:prstGeom>
-          <a:noFill/>
-          <a:ln w="3810">
-            <a:solidFill>
-              <a:srgbClr val="CBD5E0"/>
-            </a:solidFill>
-            <a:prstDash val="solid"/>
-          </a:ln>
-        </p:spPr>
-      </p:sp>
-      <p:sp>
-        <p:nvSpPr>
-          <p:cNvPr id="11" name="Text 8"/>
-          <p:cNvSpPr/>
-          <p:nvPr/>
-        </p:nvSpPr>
-        <p:spPr>
-          <a:xfrm>
-            <a:off x="6053328" y="2295144"/>
-            <a:ext cx="2117147" cy="493776"/>
-          </a:xfrm>
-          <a:prstGeom prst="rect">
-            <a:avLst/>
-          </a:prstGeom>
-          <a:noFill/>
-          <a:ln/>
-        </p:spPr>
-        <p:txBody>
-          <a:bodyPr wrap="square" lIns="0" tIns="0" rIns="0" bIns="0" rtlCol="0" anchor="ctr"/>
-          <a:lstStyle/>
-          <a:p>
-            <a:pPr indent="0" marL="0">
-              <a:lnSpc>
-                <a:spcPct val="120000"/>
-              </a:lnSpc>
-              <a:buNone/>
-            </a:pPr>
-            <a:r>
-              <a:rPr lang="en-US" sz="1300" dirty="0">
-                <a:solidFill>
-                  <a:srgbClr val="718096"/>
+            <a:r>
+              <a:rPr lang="en-US" sz="1300" b="1" dirty="0">
+                <a:solidFill>
+                  <a:srgbClr val="10161F"/>
                 </a:solidFill>
                 <a:latin typeface="Pretendard" pitchFamily="34" charset="0"/>
                 <a:ea typeface="Pretendard" pitchFamily="34" charset="-122"/>
                 <a:cs typeface="Pretendard" pitchFamily="34" charset="-120"/>
               </a:rPr>
-              <a:t>[건물] 주변 상권</a:t>
+              <a:t>{"ok":true,"mocked":true,"extractedFields":{"area_signal":"역삼","asset_type":"오피스빌딩","price_band":"300억","size_signal":"3000평(약 9917.</a:t>
             </a:r>
             <a:endParaRPr lang="en-US" sz="1300" dirty="0"/>
           </a:p>
@@ -5330,14 +5237,14 @@
       </p:sp>
       <p:sp>
         <p:nvSpPr>
-          <p:cNvPr id="12" name="Text 9"/>
-          <p:cNvSpPr/>
-          <p:nvPr/>
-        </p:nvSpPr>
-        <p:spPr>
-          <a:xfrm>
-            <a:off x="8170475" y="2295144"/>
-            <a:ext cx="3454292" cy="493776"/>
+          <p:cNvPr id="9" name="Text 6"/>
+          <p:cNvSpPr/>
+          <p:nvPr/>
+        </p:nvSpPr>
+        <p:spPr>
+          <a:xfrm>
+            <a:off x="566928" y="6382512"/>
+            <a:ext cx="7315200" cy="219456"/>
           </a:xfrm>
           <a:prstGeom prst="rect">
             <a:avLst/>
@@ -5350,197 +5257,98 @@
           <a:lstStyle/>
           <a:p>
             <a:pPr indent="0" marL="0">
-              <a:lnSpc>
-                <a:spcPct val="120000"/>
-              </a:lnSpc>
-              <a:buNone/>
-            </a:pPr>
-            <a:r>
-              <a:rPr lang="en-US" sz="1300" b="1" dirty="0">
-                <a:solidFill>
-                  <a:srgbClr val="10161F"/>
+              <a:buNone/>
+            </a:pPr>
+            <a:r>
+              <a:rPr lang="en-US" sz="800" dirty="0">
+                <a:solidFill>
+                  <a:srgbClr val="718096"/>
                 </a:solidFill>
                 <a:latin typeface="Pretendard" pitchFamily="34" charset="0"/>
                 <a:ea typeface="Pretendard" pitchFamily="34" charset="-122"/>
                 <a:cs typeface="Pretendard" pitchFamily="34" charset="-120"/>
               </a:rPr>
-              <a:t>강남권역 내 주요 비즈니스 및 유동인구 풍부한 상권 입지</a:t>
-            </a:r>
-            <a:endParaRPr lang="en-US" sz="1300" dirty="0"/>
-          </a:p>
-        </p:txBody>
-      </p:sp>
-      <p:sp>
-        <p:nvSpPr>
-          <p:cNvPr id="13" name="Shape 10"/>
-          <p:cNvSpPr/>
-          <p:nvPr/>
-        </p:nvSpPr>
-        <p:spPr>
-          <a:xfrm>
-            <a:off x="6053328" y="2788920"/>
-            <a:ext cx="5571439" cy="0"/>
-          </a:xfrm>
-          <a:prstGeom prst="line">
-            <a:avLst/>
-          </a:prstGeom>
-          <a:noFill/>
-          <a:ln w="3810">
-            <a:solidFill>
-              <a:srgbClr val="CBD5E0"/>
-            </a:solidFill>
-            <a:prstDash val="solid"/>
-          </a:ln>
-        </p:spPr>
-      </p:sp>
-      <p:sp>
-        <p:nvSpPr>
-          <p:cNvPr id="14" name="Text 11"/>
-          <p:cNvSpPr/>
-          <p:nvPr/>
-        </p:nvSpPr>
-        <p:spPr>
-          <a:xfrm>
-            <a:off x="6053328" y="2788920"/>
-            <a:ext cx="2117147" cy="493776"/>
-          </a:xfrm>
-          <a:prstGeom prst="rect">
-            <a:avLst/>
-          </a:prstGeom>
-          <a:noFill/>
-          <a:ln/>
-        </p:spPr>
-        <p:txBody>
-          <a:bodyPr wrap="square" lIns="0" tIns="0" rIns="0" bIns="0" rtlCol="0" anchor="ctr"/>
+              <a:t>크리딜   |   </a:t>
+            </a:r>
+            <a:endParaRPr lang="en-US" sz="800" dirty="0"/>
+          </a:p>
+        </p:txBody>
+      </p:sp>
+      <p:sp>
+        <p:nvSpPr>
+          <p:cNvPr id="10" name="Text 7"/>
+          <p:cNvSpPr/>
+          <p:nvPr/>
+        </p:nvSpPr>
+        <p:spPr>
+          <a:xfrm>
+            <a:off x="10710367" y="6382512"/>
+            <a:ext cx="914400" cy="219456"/>
+          </a:xfrm>
+          <a:prstGeom prst="rect">
+            <a:avLst/>
+          </a:prstGeom>
+          <a:noFill/>
+          <a:ln/>
+        </p:spPr>
+        <p:txBody>
+          <a:bodyPr wrap="square" lIns="0" tIns="0" rIns="0" bIns="0" rtlCol="0" anchor="ctr"/>
+          <a:lstStyle/>
+          <a:p>
+            <a:pPr algn="r" indent="0" marL="0">
+              <a:buNone/>
+            </a:pPr>
+            <a:r>
+              <a:rPr lang="en-US" sz="900" b="1" dirty="0">
+                <a:solidFill>
+                  <a:srgbClr val="B98A2E"/>
+                </a:solidFill>
+                <a:latin typeface="Arial" pitchFamily="34" charset="0"/>
+                <a:ea typeface="Arial" pitchFamily="34" charset="-122"/>
+                <a:cs typeface="Arial" pitchFamily="34" charset="-120"/>
+              </a:rPr>
+              <a:t>3</a:t>
+            </a:r>
+            <a:endParaRPr lang="en-US" sz="900" dirty="0"/>
+          </a:p>
+        </p:txBody>
+      </p:sp>
+      <p:sp>
+        <p:nvSpPr>
+          <p:cNvPr id="11" name="Text 8"/>
+          <p:cNvSpPr/>
+          <p:nvPr/>
+        </p:nvSpPr>
+        <p:spPr>
+          <a:xfrm>
+            <a:off x="566928" y="1481328"/>
+            <a:ext cx="11057839" cy="9692640"/>
+          </a:xfrm>
+          <a:prstGeom prst="rect">
+            <a:avLst/>
+          </a:prstGeom>
+          <a:noFill/>
+          <a:ln/>
+        </p:spPr>
+        <p:txBody>
+          <a:bodyPr wrap="square" lIns="0" tIns="0" rIns="0" bIns="0" rtlCol="0" anchor="t"/>
           <a:lstStyle/>
           <a:p>
             <a:pPr indent="0" marL="0">
-              <a:lnSpc>
-                <a:spcPct val="120000"/>
-              </a:lnSpc>
-              <a:buNone/>
-            </a:pPr>
-            <a:r>
-              <a:rPr lang="en-US" sz="1300" dirty="0">
-                <a:solidFill>
-                  <a:srgbClr val="718096"/>
+              <a:buNone/>
+            </a:pPr>
+            <a:r>
+              <a:rPr lang="en-US" sz="1000" dirty="0">
+                <a:solidFill>
+                  <a:srgbClr val="10161F"/>
                 </a:solidFill>
                 <a:latin typeface="Pretendard" pitchFamily="34" charset="0"/>
                 <a:ea typeface="Pretendard" pitchFamily="34" charset="-122"/>
                 <a:cs typeface="Pretendard" pitchFamily="34" charset="-120"/>
               </a:rPr>
-              <a:t>강남권역 내 우수한 접근성과 높은 가시성을 갖춘 핵</a:t>
-            </a:r>
-            <a:endParaRPr lang="en-US" sz="1300" dirty="0"/>
-          </a:p>
-        </p:txBody>
-      </p:sp>
-      <p:sp>
-        <p:nvSpPr>
-          <p:cNvPr id="15" name="Text 12"/>
-          <p:cNvSpPr/>
-          <p:nvPr/>
-        </p:nvSpPr>
-        <p:spPr>
-          <a:xfrm>
-            <a:off x="8170475" y="2788920"/>
-            <a:ext cx="3454292" cy="493776"/>
-          </a:xfrm>
-          <a:prstGeom prst="rect">
-            <a:avLst/>
-          </a:prstGeom>
-          <a:noFill/>
-          <a:ln/>
-        </p:spPr>
-        <p:txBody>
-          <a:bodyPr wrap="square" lIns="0" tIns="0" rIns="0" bIns="0" rtlCol="0" anchor="ctr"/>
-          <a:lstStyle/>
-          <a:p>
-            <a:pPr indent="0" marL="0">
-              <a:lnSpc>
-                <a:spcPct val="120000"/>
-              </a:lnSpc>
-              <a:buNone/>
-            </a:pPr>
-            <a:endParaRPr lang="en-US" sz="1300" dirty="0"/>
-          </a:p>
-        </p:txBody>
-      </p:sp>
-      <p:sp>
-        <p:nvSpPr>
-          <p:cNvPr id="16" name="Text 13"/>
-          <p:cNvSpPr/>
-          <p:nvPr/>
-        </p:nvSpPr>
-        <p:spPr>
-          <a:xfrm>
-            <a:off x="566928" y="6382512"/>
-            <a:ext cx="7315200" cy="219456"/>
-          </a:xfrm>
-          <a:prstGeom prst="rect">
-            <a:avLst/>
-          </a:prstGeom>
-          <a:noFill/>
-          <a:ln/>
-        </p:spPr>
-        <p:txBody>
-          <a:bodyPr wrap="square" lIns="0" tIns="0" rIns="0" bIns="0" rtlCol="0" anchor="ctr"/>
-          <a:lstStyle/>
-          <a:p>
-            <a:pPr indent="0" marL="0">
-              <a:buNone/>
-            </a:pPr>
-            <a:r>
-              <a:rPr lang="en-US" sz="800" dirty="0">
-                <a:solidFill>
-                  <a:srgbClr val="718096"/>
-                </a:solidFill>
-                <a:latin typeface="Pretendard" pitchFamily="34" charset="0"/>
-                <a:ea typeface="Pretendard" pitchFamily="34" charset="-122"/>
-                <a:cs typeface="Pretendard" pitchFamily="34" charset="-120"/>
-              </a:rPr>
-              <a:t>크리딜   |   </a:t>
-            </a:r>
-            <a:endParaRPr lang="en-US" sz="800" dirty="0"/>
-          </a:p>
-        </p:txBody>
-      </p:sp>
-      <p:sp>
-        <p:nvSpPr>
-          <p:cNvPr id="17" name="Text 14"/>
-          <p:cNvSpPr/>
-          <p:nvPr/>
-        </p:nvSpPr>
-        <p:spPr>
-          <a:xfrm>
-            <a:off x="10710367" y="6382512"/>
-            <a:ext cx="914400" cy="219456"/>
-          </a:xfrm>
-          <a:prstGeom prst="rect">
-            <a:avLst/>
-          </a:prstGeom>
-          <a:noFill/>
-          <a:ln/>
-        </p:spPr>
-        <p:txBody>
-          <a:bodyPr wrap="square" lIns="0" tIns="0" rIns="0" bIns="0" rtlCol="0" anchor="ctr"/>
-          <a:lstStyle/>
-          <a:p>
-            <a:pPr algn="r" indent="0" marL="0">
-              <a:buNone/>
-            </a:pPr>
-            <a:r>
-              <a:rPr lang="en-US" sz="900" b="1" dirty="0">
-                <a:solidFill>
-                  <a:srgbClr val="B98A2E"/>
-                </a:solidFill>
-                <a:latin typeface="Arial" pitchFamily="34" charset="0"/>
-                <a:ea typeface="Arial" pitchFamily="34" charset="-122"/>
-                <a:cs typeface="Arial" pitchFamily="34" charset="-120"/>
-              </a:rPr>
-              <a:t>3</a:t>
-            </a:r>
-            <a:endParaRPr lang="en-US" sz="900" dirty="0"/>
+              <a:t>{"ok":true,"mocked":true,"extractedFields":{"area_signal":"역삼","asset_type":"오피스빌딩","price_band":"300억","size_signal":"3000평(약 9917.4㎡)"},"extractedFacts":{"region":"역삼","exactAddressCandidate":"역삼동 742-1","assetType":"오피스빌딩","priceText":"300억","sizeText":"3000평(약 9917.4㎡)","currentUse":"오피스","currentUseSignal":"근린생활시설","leaseSignal":"임대중","vacancySignal":"공실없음","tenantNames":["쿠팡","네이버"],"unitRentTexts":["301호: 1500만"],"sellerMotivationText":"자산 효율화","brokerNotes":["초역세권 매물"]},"detectedSensitiveFields":["exact_address","tenant_name"],"ambiguousFields":[],"warnings":[],"areaSignal":"역삼","assetType":"오피스빌딩","priceBand":"300억","sizeSignal":"3000평(약 9917.4㎡)","dealType":"매각","buildingName":"역삼 센트럴타워","exactAddress":"역삼동 742-1","totalFloorArea":9917.3,"buildYear":2015,"currentUseSignal":"근린생활시설","vacancySignal":"공실 없음","fitSummary":"초역세권 근생 빌딩으로 시행/사옥 매입에 최적화","cautionSummary":"주요 임차인 만기 조율 필요","hiddenFields":["exact_address","seller_motivation"],"confidence":{"areaSignal":"confirmed","assetType":"confirmed","priceBand":"ai_hypothesis","fitSummary":"ai_hypothesis"},"missingData":["sizeSignal"],"boundaryNote":"본 자료는 실거래 통계 기반 참고치입니다.","buyerType":"법인 사옥형","budgetRange":{"min":50,"max":80,"display":"50억~80억"},"preferredRegions":["강남","성수"],"assetTypes":["꼬마빌딩","사옥용"],"purchasePurpose":"사옥용 매입","mustHave":["초역세권","주차"],"niceToHave":["테라스","루프탑"],"riskTolerance":"medium","financingNote":"자본금 50% 준비","missingQuestions":["구체적인 입주 시기가 언제인가요?","선호하는 수익률이 있나요?"],"privacyNotes":["연락처 비공개"],"fitReasons":["매수자 예산(50-80억)에 부합하는 매물입니다.","요청하신 성수/강남 권역에 해당합니다."],"cautionReasons":["요청한 용도와 달리 명도 협의가 다소 필요합니다."],"recommendedNextAction":"현장 답사 제안","kakaoMessage":"안녕하세요! 요청하신 조건에 부합하는 추천 매물이 있어 안내해 드립니다. 확인해보시고 피드백 부탁드립니다.","title":"강남 역삼역 초역세권 오피스 사옥용 빌딩 매각","shortSummary":"역삼역 도보 5분 거리의 준신축급 대형 오피스빌딩입니다.","dealPoints":["초역세권","사옥 최적"],"cautionPoints":["명도 조율 필요"],"hiddenInfoNotice":["보증금 및 지번은 인가 후 확인 가능"],"gateMessage":"G1 등급 등록이 필요합니다.","kakaoText":"강남 역삼역 오피스 빌딩 매각 안내입니다.","exactUnitCandidate":"101호","floor":"1층","areaSqmText":"150㎡","spaceType":"office","depositText":"5000만","monthlyRentText":"400만","maintenanceFeeText":"50만","availableFromText":"즉시입주","leaseTermMonthsText":"24","incentivesText":"렌트프리 2개월","restrictions":[],"landlordIdentity":"김성수","currentTenant":"스타트업","vacancyReason":"이전 확장","rentNegotiation":"협의 가능","region":"성수동","areaSqm":150,"deposit":5000,"monthlyRent":400,"maintenanceFee":50,"availableFrom":"즉시입주","leaseTermMonths":24,"incentives":{"rentFreeMonths":2,"interiorSupport":"일부 인테리어 지원","freeRentDetail":"렌트프리 2개월 지원"},"shortSummaryLease":"성수역 도보 5분 거리 1층 리테일 상가 매물입니다."}</a:t>
+            </a:r>
+            <a:endParaRPr lang="en-US" sz="1000" dirty="0"/>
           </a:p>
         </p:txBody>
       </p:sp>
@@ -5788,7 +5596,7 @@
                 <a:ea typeface="Pretendard" pitchFamily="34" charset="-122"/>
                 <a:cs typeface="Pretendard" pitchFamily="34" charset="-120"/>
               </a:rPr>
-              <a:t>소재지</a:t>
+              <a:t>{"ok"</a:t>
             </a:r>
             <a:endParaRPr lang="en-US" sz="1400" dirty="0"/>
           </a:p>
@@ -5830,7 +5638,7 @@
                 <a:ea typeface="Pretendard" pitchFamily="34" charset="-122"/>
                 <a:cs typeface="Pretendard" pitchFamily="34" charset="-120"/>
               </a:rPr>
-              <a:t>강남권역</a:t>
+              <a:t>true,"mocked":true,"extractedFields":{"area_signal":"역삼","asset_type":"오피스빌딩","price_band":"300억","size_signal":"3000평(약 9917.4㎡)"},"extractedFacts":{"region":"역삼","exactAddressCandidate":"역삼동 742-1","assetType":"오피스빌딩","priceText":"300억","sizeText":"3000평(약 9917.4㎡)","currentUse":"오피스","currentUseSignal":"근린생활시설","leaseSignal":"임대중","vacancySignal":"공실없음","tenantNames":"쿠팡","네이버","unitRentTexts":"301호: 1500만","sellerMotivationText":"자산 효율화","brokerNotes":"초역세권 매물"},"detectedSensitiveFields":"exact_address","tenant_name","ambiguousFields":,"warnings":,"areaSignal":"역삼","assetType":"오피스빌딩","priceBand":"300억","sizeSignal":"3000평(약 9917.4㎡)","dealType":"매각","buildingName":"역삼 센트럴타워","exactAddress":"역삼동 742-1","totalFloorArea":9917.3,"buildYear":2015,"currentUseSignal":"근린생활시설","vacancySignal":"공실 없음","fitSummary":"초역세권 근생 빌딩으로 시행/사옥 매입에 최적화","cautionSummary":"주요 임차인 만기 조율 필요","hiddenFields":"exact_address","seller_motivation","confidence":{"areaSignal":"confirmed","assetType":"confirmed","priceBand":"ai_hypothesis","fitSummary":"ai_hypothesis"},"missingData":"sizeSignal","boundaryNote":"본 자료는 실거래 통계 기반 참고치입니다.","buyerType":"법인 사옥형","budgetRange":{"min":50,"max":80,"display":"50억~80억"},"preferredRegions":"강남","성수","assetTypes":"꼬마빌딩","사옥용","purchasePurpose":"사옥용 매입","mustHave":"초역세권","주차","niceToHave":"테라스","루프탑","riskTolerance":"medium","financingNote":"자본금 50% 준비","missingQuestions":"구체적인 입주 시기가 언제인가요?","선호하는 수익률이 있나요?","privacyNotes":"연락처 비공개","fitReasons":"매수자 예산(50-80억)에 부합하는 매물입니다.","요청하신 성수/강남 권역에 해당합니다.","cautionReasons":"요청한 용도와 달리 명도 협의가 다소 필요합니다.","recommendedNextAction":"현장 답사 제안","kakaoMessage":"안녕하세요! 요청하신 조건에 부합하는 추천 매물이 있어 안내해 드립니다. 확인해보시고 피드백 부탁드립니다.","title":"강남 역삼역 초역세권 오피스 사옥용 빌딩 매각","shortSummary":"역삼역 도보 5분 거리의 준신축급 대형 오피스빌딩입니다.","dealPoints":"초역세권","사옥 최적","cautionPoints":"명도 조율 필요","hiddenInfoNotice":"보증금 및 지번은 인가 후 확인 가능","gateMessage":"G1 등급 등록이 필요합니다.","kakaoText":"강남 역삼역 오피스 빌딩 매각 안내입니다.","exactUnitCandidate":"101호","floor":"1층","areaSqmText":"150㎡","spaceType":"office","depositText":"5000만","monthlyRentText":"400만","maintenanceFeeText":"50만","availableFromText":"즉시입주","leaseTermMonthsText":"24","incentivesText":"렌트프리 2개월","restrictions":,"landlordIdentity":"김성수","currentTenant":"스타트업","vacancyReason":"이전 확장","rentNegotiation":"협의 가능","region":"성수동","areaSqm":150,"deposit":5000,"monthlyRent":400,"maintenanceFee":50,"availableFrom":"즉시입주","leaseTermMonths":24,"incentives":{"rentFreeMonths":2,"interiorSupport":"일부 인테리어 지원","freeRentDetail":"렌트프리 2개월 지원"},"shortSummaryLease":"성수역 도보 5분 거리 1층 리테일 상가 매물입니다."}</a:t>
             </a:r>
             <a:endParaRPr lang="en-US" sz="1400" dirty="0"/>
           </a:p>
@@ -5839,862 +5647,6 @@
       <p:sp>
         <p:nvSpPr>
           <p:cNvPr id="9" name="Shape 7"/>
-          <p:cNvSpPr/>
-          <p:nvPr/>
-        </p:nvSpPr>
-        <p:spPr>
-          <a:xfrm>
-            <a:off x="566928" y="2048256"/>
-            <a:ext cx="6858000" cy="0"/>
-          </a:xfrm>
-          <a:prstGeom prst="line">
-            <a:avLst/>
-          </a:prstGeom>
-          <a:noFill/>
-          <a:ln w="3810">
-            <a:solidFill>
-              <a:srgbClr val="CBD5E0"/>
-            </a:solidFill>
-            <a:prstDash val="solid"/>
-          </a:ln>
-        </p:spPr>
-      </p:sp>
-      <p:sp>
-        <p:nvSpPr>
-          <p:cNvPr id="10" name="Text 8"/>
-          <p:cNvSpPr/>
-          <p:nvPr/>
-        </p:nvSpPr>
-        <p:spPr>
-          <a:xfrm>
-            <a:off x="566928" y="2048256"/>
-            <a:ext cx="2606040" cy="402336"/>
-          </a:xfrm>
-          <a:prstGeom prst="rect">
-            <a:avLst/>
-          </a:prstGeom>
-          <a:noFill/>
-          <a:ln/>
-        </p:spPr>
-        <p:txBody>
-          <a:bodyPr wrap="square" lIns="0" tIns="0" rIns="0" bIns="0" rtlCol="0" anchor="ctr"/>
-          <a:lstStyle/>
-          <a:p>
-            <a:pPr indent="0" marL="0">
-              <a:lnSpc>
-                <a:spcPct val="120000"/>
-              </a:lnSpc>
-              <a:buNone/>
-            </a:pPr>
-            <a:r>
-              <a:rPr lang="en-US" sz="1400" dirty="0">
-                <a:solidFill>
-                  <a:srgbClr val="718096"/>
-                </a:solidFill>
-                <a:latin typeface="Pretendard" pitchFamily="34" charset="0"/>
-                <a:ea typeface="Pretendard" pitchFamily="34" charset="-122"/>
-                <a:cs typeface="Pretendard" pitchFamily="34" charset="-120"/>
-              </a:rPr>
-              <a:t>주요 용도</a:t>
-            </a:r>
-            <a:endParaRPr lang="en-US" sz="1400" dirty="0"/>
-          </a:p>
-        </p:txBody>
-      </p:sp>
-      <p:sp>
-        <p:nvSpPr>
-          <p:cNvPr id="11" name="Text 9"/>
-          <p:cNvSpPr/>
-          <p:nvPr/>
-        </p:nvSpPr>
-        <p:spPr>
-          <a:xfrm>
-            <a:off x="3172968" y="2048256"/>
-            <a:ext cx="4251960" cy="402336"/>
-          </a:xfrm>
-          <a:prstGeom prst="rect">
-            <a:avLst/>
-          </a:prstGeom>
-          <a:noFill/>
-          <a:ln/>
-        </p:spPr>
-        <p:txBody>
-          <a:bodyPr wrap="square" lIns="0" tIns="0" rIns="0" bIns="0" rtlCol="0" anchor="ctr"/>
-          <a:lstStyle/>
-          <a:p>
-            <a:pPr indent="0" marL="0">
-              <a:lnSpc>
-                <a:spcPct val="120000"/>
-              </a:lnSpc>
-              <a:buNone/>
-            </a:pPr>
-            <a:r>
-              <a:rPr lang="en-US" sz="1400" b="1" dirty="0">
-                <a:solidFill>
-                  <a:srgbClr val="10161F"/>
-                </a:solidFill>
-                <a:latin typeface="Pretendard" pitchFamily="34" charset="0"/>
-                <a:ea typeface="Pretendard" pitchFamily="34" charset="-122"/>
-                <a:cs typeface="Pretendard" pitchFamily="34" charset="-120"/>
-              </a:rPr>
-              <a:t>근린생활시설</a:t>
-            </a:r>
-            <a:endParaRPr lang="en-US" sz="1400" dirty="0"/>
-          </a:p>
-        </p:txBody>
-      </p:sp>
-      <p:sp>
-        <p:nvSpPr>
-          <p:cNvPr id="12" name="Shape 10"/>
-          <p:cNvSpPr/>
-          <p:nvPr/>
-        </p:nvSpPr>
-        <p:spPr>
-          <a:xfrm>
-            <a:off x="566928" y="2450592"/>
-            <a:ext cx="6858000" cy="0"/>
-          </a:xfrm>
-          <a:prstGeom prst="line">
-            <a:avLst/>
-          </a:prstGeom>
-          <a:noFill/>
-          <a:ln w="3810">
-            <a:solidFill>
-              <a:srgbClr val="CBD5E0"/>
-            </a:solidFill>
-            <a:prstDash val="solid"/>
-          </a:ln>
-        </p:spPr>
-      </p:sp>
-      <p:sp>
-        <p:nvSpPr>
-          <p:cNvPr id="13" name="Text 11"/>
-          <p:cNvSpPr/>
-          <p:nvPr/>
-        </p:nvSpPr>
-        <p:spPr>
-          <a:xfrm>
-            <a:off x="566928" y="2450592"/>
-            <a:ext cx="2606040" cy="402336"/>
-          </a:xfrm>
-          <a:prstGeom prst="rect">
-            <a:avLst/>
-          </a:prstGeom>
-          <a:noFill/>
-          <a:ln/>
-        </p:spPr>
-        <p:txBody>
-          <a:bodyPr wrap="square" lIns="0" tIns="0" rIns="0" bIns="0" rtlCol="0" anchor="ctr"/>
-          <a:lstStyle/>
-          <a:p>
-            <a:pPr indent="0" marL="0">
-              <a:lnSpc>
-                <a:spcPct val="120000"/>
-              </a:lnSpc>
-              <a:buNone/>
-            </a:pPr>
-            <a:r>
-              <a:rPr lang="en-US" sz="1400" dirty="0">
-                <a:solidFill>
-                  <a:srgbClr val="718096"/>
-                </a:solidFill>
-                <a:latin typeface="Pretendard" pitchFamily="34" charset="0"/>
-                <a:ea typeface="Pretendard" pitchFamily="34" charset="-122"/>
-                <a:cs typeface="Pretendard" pitchFamily="34" charset="-120"/>
-              </a:rPr>
-              <a:t>연면적</a:t>
-            </a:r>
-            <a:endParaRPr lang="en-US" sz="1400" dirty="0"/>
-          </a:p>
-        </p:txBody>
-      </p:sp>
-      <p:sp>
-        <p:nvSpPr>
-          <p:cNvPr id="14" name="Text 12"/>
-          <p:cNvSpPr/>
-          <p:nvPr/>
-        </p:nvSpPr>
-        <p:spPr>
-          <a:xfrm>
-            <a:off x="3172968" y="2450592"/>
-            <a:ext cx="4251960" cy="402336"/>
-          </a:xfrm>
-          <a:prstGeom prst="rect">
-            <a:avLst/>
-          </a:prstGeom>
-          <a:noFill/>
-          <a:ln/>
-        </p:spPr>
-        <p:txBody>
-          <a:bodyPr wrap="square" lIns="0" tIns="0" rIns="0" bIns="0" rtlCol="0" anchor="ctr"/>
-          <a:lstStyle/>
-          <a:p>
-            <a:pPr indent="0" marL="0">
-              <a:lnSpc>
-                <a:spcPct val="120000"/>
-              </a:lnSpc>
-              <a:buNone/>
-            </a:pPr>
-            <a:r>
-              <a:rPr lang="en-US" sz="1400" b="1" dirty="0">
-                <a:solidFill>
-                  <a:srgbClr val="10161F"/>
-                </a:solidFill>
-                <a:latin typeface="Pretendard" pitchFamily="34" charset="0"/>
-                <a:ea typeface="Pretendard" pitchFamily="34" charset="-122"/>
-                <a:cs typeface="Pretendard" pitchFamily="34" charset="-120"/>
-              </a:rPr>
-              <a:t>5,000㎡ (약 1513평(약 5001.7㎡))</a:t>
-            </a:r>
-            <a:endParaRPr lang="en-US" sz="1400" dirty="0"/>
-          </a:p>
-        </p:txBody>
-      </p:sp>
-      <p:sp>
-        <p:nvSpPr>
-          <p:cNvPr id="15" name="Shape 13"/>
-          <p:cNvSpPr/>
-          <p:nvPr/>
-        </p:nvSpPr>
-        <p:spPr>
-          <a:xfrm>
-            <a:off x="566928" y="2852928"/>
-            <a:ext cx="6858000" cy="0"/>
-          </a:xfrm>
-          <a:prstGeom prst="line">
-            <a:avLst/>
-          </a:prstGeom>
-          <a:noFill/>
-          <a:ln w="3810">
-            <a:solidFill>
-              <a:srgbClr val="CBD5E0"/>
-            </a:solidFill>
-            <a:prstDash val="solid"/>
-          </a:ln>
-        </p:spPr>
-      </p:sp>
-      <p:sp>
-        <p:nvSpPr>
-          <p:cNvPr id="16" name="Text 14"/>
-          <p:cNvSpPr/>
-          <p:nvPr/>
-        </p:nvSpPr>
-        <p:spPr>
-          <a:xfrm>
-            <a:off x="566928" y="2852928"/>
-            <a:ext cx="2606040" cy="402336"/>
-          </a:xfrm>
-          <a:prstGeom prst="rect">
-            <a:avLst/>
-          </a:prstGeom>
-          <a:noFill/>
-          <a:ln/>
-        </p:spPr>
-        <p:txBody>
-          <a:bodyPr wrap="square" lIns="0" tIns="0" rIns="0" bIns="0" rtlCol="0" anchor="ctr"/>
-          <a:lstStyle/>
-          <a:p>
-            <a:pPr indent="0" marL="0">
-              <a:lnSpc>
-                <a:spcPct val="120000"/>
-              </a:lnSpc>
-              <a:buNone/>
-            </a:pPr>
-            <a:r>
-              <a:rPr lang="en-US" sz="1400" dirty="0">
-                <a:solidFill>
-                  <a:srgbClr val="718096"/>
-                </a:solidFill>
-                <a:latin typeface="Pretendard" pitchFamily="34" charset="0"/>
-                <a:ea typeface="Pretendard" pitchFamily="34" charset="-122"/>
-                <a:cs typeface="Pretendard" pitchFamily="34" charset="-120"/>
-              </a:rPr>
-              <a:t>대지면적</a:t>
-            </a:r>
-            <a:endParaRPr lang="en-US" sz="1400" dirty="0"/>
-          </a:p>
-        </p:txBody>
-      </p:sp>
-      <p:sp>
-        <p:nvSpPr>
-          <p:cNvPr id="17" name="Text 15"/>
-          <p:cNvSpPr/>
-          <p:nvPr/>
-        </p:nvSpPr>
-        <p:spPr>
-          <a:xfrm>
-            <a:off x="3172968" y="2852928"/>
-            <a:ext cx="4251960" cy="402336"/>
-          </a:xfrm>
-          <a:prstGeom prst="rect">
-            <a:avLst/>
-          </a:prstGeom>
-          <a:noFill/>
-          <a:ln/>
-        </p:spPr>
-        <p:txBody>
-          <a:bodyPr wrap="square" lIns="0" tIns="0" rIns="0" bIns="0" rtlCol="0" anchor="ctr"/>
-          <a:lstStyle/>
-          <a:p>
-            <a:pPr indent="0" marL="0">
-              <a:lnSpc>
-                <a:spcPct val="120000"/>
-              </a:lnSpc>
-              <a:buNone/>
-            </a:pPr>
-            <a:r>
-              <a:rPr lang="en-US" sz="1400" b="1" dirty="0">
-                <a:solidFill>
-                  <a:srgbClr val="10161F"/>
-                </a:solidFill>
-                <a:latin typeface="Pretendard" pitchFamily="34" charset="0"/>
-                <a:ea typeface="Pretendard" pitchFamily="34" charset="-122"/>
-                <a:cs typeface="Pretendard" pitchFamily="34" charset="-120"/>
-              </a:rPr>
-              <a:t>1,000㎡ (약 303평(약 1001.7㎡))</a:t>
-            </a:r>
-            <a:endParaRPr lang="en-US" sz="1400" dirty="0"/>
-          </a:p>
-        </p:txBody>
-      </p:sp>
-      <p:sp>
-        <p:nvSpPr>
-          <p:cNvPr id="18" name="Shape 16"/>
-          <p:cNvSpPr/>
-          <p:nvPr/>
-        </p:nvSpPr>
-        <p:spPr>
-          <a:xfrm>
-            <a:off x="566928" y="3255264"/>
-            <a:ext cx="6858000" cy="0"/>
-          </a:xfrm>
-          <a:prstGeom prst="line">
-            <a:avLst/>
-          </a:prstGeom>
-          <a:noFill/>
-          <a:ln w="3810">
-            <a:solidFill>
-              <a:srgbClr val="CBD5E0"/>
-            </a:solidFill>
-            <a:prstDash val="solid"/>
-          </a:ln>
-        </p:spPr>
-      </p:sp>
-      <p:sp>
-        <p:nvSpPr>
-          <p:cNvPr id="19" name="Text 17"/>
-          <p:cNvSpPr/>
-          <p:nvPr/>
-        </p:nvSpPr>
-        <p:spPr>
-          <a:xfrm>
-            <a:off x="566928" y="3255264"/>
-            <a:ext cx="2606040" cy="402336"/>
-          </a:xfrm>
-          <a:prstGeom prst="rect">
-            <a:avLst/>
-          </a:prstGeom>
-          <a:noFill/>
-          <a:ln/>
-        </p:spPr>
-        <p:txBody>
-          <a:bodyPr wrap="square" lIns="0" tIns="0" rIns="0" bIns="0" rtlCol="0" anchor="ctr"/>
-          <a:lstStyle/>
-          <a:p>
-            <a:pPr indent="0" marL="0">
-              <a:lnSpc>
-                <a:spcPct val="120000"/>
-              </a:lnSpc>
-              <a:buNone/>
-            </a:pPr>
-            <a:r>
-              <a:rPr lang="en-US" sz="1400" dirty="0">
-                <a:solidFill>
-                  <a:srgbClr val="718096"/>
-                </a:solidFill>
-                <a:latin typeface="Pretendard" pitchFamily="34" charset="0"/>
-                <a:ea typeface="Pretendard" pitchFamily="34" charset="-122"/>
-                <a:cs typeface="Pretendard" pitchFamily="34" charset="-120"/>
-              </a:rPr>
-              <a:t>용도지역</a:t>
-            </a:r>
-            <a:endParaRPr lang="en-US" sz="1400" dirty="0"/>
-          </a:p>
-        </p:txBody>
-      </p:sp>
-      <p:sp>
-        <p:nvSpPr>
-          <p:cNvPr id="20" name="Text 18"/>
-          <p:cNvSpPr/>
-          <p:nvPr/>
-        </p:nvSpPr>
-        <p:spPr>
-          <a:xfrm>
-            <a:off x="3172968" y="3255264"/>
-            <a:ext cx="4251960" cy="402336"/>
-          </a:xfrm>
-          <a:prstGeom prst="rect">
-            <a:avLst/>
-          </a:prstGeom>
-          <a:noFill/>
-          <a:ln/>
-        </p:spPr>
-        <p:txBody>
-          <a:bodyPr wrap="square" lIns="0" tIns="0" rIns="0" bIns="0" rtlCol="0" anchor="ctr"/>
-          <a:lstStyle/>
-          <a:p>
-            <a:pPr indent="0" marL="0">
-              <a:lnSpc>
-                <a:spcPct val="120000"/>
-              </a:lnSpc>
-              <a:buNone/>
-            </a:pPr>
-            <a:r>
-              <a:rPr lang="en-US" sz="1400" b="1" dirty="0">
-                <a:solidFill>
-                  <a:srgbClr val="10161F"/>
-                </a:solidFill>
-                <a:latin typeface="Pretendard" pitchFamily="34" charset="0"/>
-                <a:ea typeface="Pretendard" pitchFamily="34" charset="-122"/>
-                <a:cs typeface="Pretendard" pitchFamily="34" charset="-120"/>
-              </a:rPr>
-              <a:t>일반상업지역</a:t>
-            </a:r>
-            <a:endParaRPr lang="en-US" sz="1400" dirty="0"/>
-          </a:p>
-        </p:txBody>
-      </p:sp>
-      <p:sp>
-        <p:nvSpPr>
-          <p:cNvPr id="21" name="Shape 19"/>
-          <p:cNvSpPr/>
-          <p:nvPr/>
-        </p:nvSpPr>
-        <p:spPr>
-          <a:xfrm>
-            <a:off x="566928" y="3657600"/>
-            <a:ext cx="6858000" cy="0"/>
-          </a:xfrm>
-          <a:prstGeom prst="line">
-            <a:avLst/>
-          </a:prstGeom>
-          <a:noFill/>
-          <a:ln w="3810">
-            <a:solidFill>
-              <a:srgbClr val="CBD5E0"/>
-            </a:solidFill>
-            <a:prstDash val="solid"/>
-          </a:ln>
-        </p:spPr>
-      </p:sp>
-      <p:sp>
-        <p:nvSpPr>
-          <p:cNvPr id="22" name="Text 20"/>
-          <p:cNvSpPr/>
-          <p:nvPr/>
-        </p:nvSpPr>
-        <p:spPr>
-          <a:xfrm>
-            <a:off x="566928" y="3657600"/>
-            <a:ext cx="2606040" cy="402336"/>
-          </a:xfrm>
-          <a:prstGeom prst="rect">
-            <a:avLst/>
-          </a:prstGeom>
-          <a:noFill/>
-          <a:ln/>
-        </p:spPr>
-        <p:txBody>
-          <a:bodyPr wrap="square" lIns="0" tIns="0" rIns="0" bIns="0" rtlCol="0" anchor="ctr"/>
-          <a:lstStyle/>
-          <a:p>
-            <a:pPr indent="0" marL="0">
-              <a:lnSpc>
-                <a:spcPct val="120000"/>
-              </a:lnSpc>
-              <a:buNone/>
-            </a:pPr>
-            <a:r>
-              <a:rPr lang="en-US" sz="1400" dirty="0">
-                <a:solidFill>
-                  <a:srgbClr val="718096"/>
-                </a:solidFill>
-                <a:latin typeface="Pretendard" pitchFamily="34" charset="0"/>
-                <a:ea typeface="Pretendard" pitchFamily="34" charset="-122"/>
-                <a:cs typeface="Pretendard" pitchFamily="34" charset="-120"/>
-              </a:rPr>
-              <a:t>승강기</a:t>
-            </a:r>
-            <a:endParaRPr lang="en-US" sz="1400" dirty="0"/>
-          </a:p>
-        </p:txBody>
-      </p:sp>
-      <p:sp>
-        <p:nvSpPr>
-          <p:cNvPr id="23" name="Text 21"/>
-          <p:cNvSpPr/>
-          <p:nvPr/>
-        </p:nvSpPr>
-        <p:spPr>
-          <a:xfrm>
-            <a:off x="3172968" y="3657600"/>
-            <a:ext cx="4251960" cy="402336"/>
-          </a:xfrm>
-          <a:prstGeom prst="rect">
-            <a:avLst/>
-          </a:prstGeom>
-          <a:noFill/>
-          <a:ln/>
-        </p:spPr>
-        <p:txBody>
-          <a:bodyPr wrap="square" lIns="0" tIns="0" rIns="0" bIns="0" rtlCol="0" anchor="ctr"/>
-          <a:lstStyle/>
-          <a:p>
-            <a:pPr indent="0" marL="0">
-              <a:lnSpc>
-                <a:spcPct val="120000"/>
-              </a:lnSpc>
-              <a:buNone/>
-            </a:pPr>
-            <a:r>
-              <a:rPr lang="en-US" sz="1400" b="1" dirty="0">
-                <a:solidFill>
-                  <a:srgbClr val="10161F"/>
-                </a:solidFill>
-                <a:latin typeface="Pretendard" pitchFamily="34" charset="0"/>
-                <a:ea typeface="Pretendard" pitchFamily="34" charset="-122"/>
-                <a:cs typeface="Pretendard" pitchFamily="34" charset="-120"/>
-              </a:rPr>
-              <a:t>1대 (15인승 침대용)</a:t>
-            </a:r>
-            <a:endParaRPr lang="en-US" sz="1400" dirty="0"/>
-          </a:p>
-        </p:txBody>
-      </p:sp>
-      <p:sp>
-        <p:nvSpPr>
-          <p:cNvPr id="24" name="Shape 22"/>
-          <p:cNvSpPr/>
-          <p:nvPr/>
-        </p:nvSpPr>
-        <p:spPr>
-          <a:xfrm>
-            <a:off x="566928" y="4059936"/>
-            <a:ext cx="6858000" cy="0"/>
-          </a:xfrm>
-          <a:prstGeom prst="line">
-            <a:avLst/>
-          </a:prstGeom>
-          <a:noFill/>
-          <a:ln w="3810">
-            <a:solidFill>
-              <a:srgbClr val="CBD5E0"/>
-            </a:solidFill>
-            <a:prstDash val="solid"/>
-          </a:ln>
-        </p:spPr>
-      </p:sp>
-      <p:sp>
-        <p:nvSpPr>
-          <p:cNvPr id="25" name="Text 23"/>
-          <p:cNvSpPr/>
-          <p:nvPr/>
-        </p:nvSpPr>
-        <p:spPr>
-          <a:xfrm>
-            <a:off x="566928" y="4059936"/>
-            <a:ext cx="2606040" cy="402336"/>
-          </a:xfrm>
-          <a:prstGeom prst="rect">
-            <a:avLst/>
-          </a:prstGeom>
-          <a:noFill/>
-          <a:ln/>
-        </p:spPr>
-        <p:txBody>
-          <a:bodyPr wrap="square" lIns="0" tIns="0" rIns="0" bIns="0" rtlCol="0" anchor="ctr"/>
-          <a:lstStyle/>
-          <a:p>
-            <a:pPr indent="0" marL="0">
-              <a:lnSpc>
-                <a:spcPct val="120000"/>
-              </a:lnSpc>
-              <a:buNone/>
-            </a:pPr>
-            <a:r>
-              <a:rPr lang="en-US" sz="1400" dirty="0">
-                <a:solidFill>
-                  <a:srgbClr val="718096"/>
-                </a:solidFill>
-                <a:latin typeface="Pretendard" pitchFamily="34" charset="0"/>
-                <a:ea typeface="Pretendard" pitchFamily="34" charset="-122"/>
-                <a:cs typeface="Pretendard" pitchFamily="34" charset="-120"/>
-              </a:rPr>
-              <a:t>주차 대수</a:t>
-            </a:r>
-            <a:endParaRPr lang="en-US" sz="1400" dirty="0"/>
-          </a:p>
-        </p:txBody>
-      </p:sp>
-      <p:sp>
-        <p:nvSpPr>
-          <p:cNvPr id="26" name="Text 24"/>
-          <p:cNvSpPr/>
-          <p:nvPr/>
-        </p:nvSpPr>
-        <p:spPr>
-          <a:xfrm>
-            <a:off x="3172968" y="4059936"/>
-            <a:ext cx="4251960" cy="402336"/>
-          </a:xfrm>
-          <a:prstGeom prst="rect">
-            <a:avLst/>
-          </a:prstGeom>
-          <a:noFill/>
-          <a:ln/>
-        </p:spPr>
-        <p:txBody>
-          <a:bodyPr wrap="square" lIns="0" tIns="0" rIns="0" bIns="0" rtlCol="0" anchor="ctr"/>
-          <a:lstStyle/>
-          <a:p>
-            <a:pPr indent="0" marL="0">
-              <a:lnSpc>
-                <a:spcPct val="120000"/>
-              </a:lnSpc>
-              <a:buNone/>
-            </a:pPr>
-            <a:r>
-              <a:rPr lang="en-US" sz="1400" b="1" dirty="0">
-                <a:solidFill>
-                  <a:srgbClr val="10161F"/>
-                </a:solidFill>
-                <a:latin typeface="Pretendard" pitchFamily="34" charset="0"/>
-                <a:ea typeface="Pretendard" pitchFamily="34" charset="-122"/>
-                <a:cs typeface="Pretendard" pitchFamily="34" charset="-120"/>
-              </a:rPr>
-              <a:t>18대 (자주식 완비)</a:t>
-            </a:r>
-            <a:endParaRPr lang="en-US" sz="1400" dirty="0"/>
-          </a:p>
-        </p:txBody>
-      </p:sp>
-      <p:sp>
-        <p:nvSpPr>
-          <p:cNvPr id="27" name="Shape 25"/>
-          <p:cNvSpPr/>
-          <p:nvPr/>
-        </p:nvSpPr>
-        <p:spPr>
-          <a:xfrm>
-            <a:off x="566928" y="4462272"/>
-            <a:ext cx="6858000" cy="0"/>
-          </a:xfrm>
-          <a:prstGeom prst="line">
-            <a:avLst/>
-          </a:prstGeom>
-          <a:noFill/>
-          <a:ln w="3810">
-            <a:solidFill>
-              <a:srgbClr val="CBD5E0"/>
-            </a:solidFill>
-            <a:prstDash val="solid"/>
-          </a:ln>
-        </p:spPr>
-      </p:sp>
-      <p:sp>
-        <p:nvSpPr>
-          <p:cNvPr id="28" name="Text 26"/>
-          <p:cNvSpPr/>
-          <p:nvPr/>
-        </p:nvSpPr>
-        <p:spPr>
-          <a:xfrm>
-            <a:off x="566928" y="4462272"/>
-            <a:ext cx="2606040" cy="402336"/>
-          </a:xfrm>
-          <a:prstGeom prst="rect">
-            <a:avLst/>
-          </a:prstGeom>
-          <a:noFill/>
-          <a:ln/>
-        </p:spPr>
-        <p:txBody>
-          <a:bodyPr wrap="square" lIns="0" tIns="0" rIns="0" bIns="0" rtlCol="0" anchor="ctr"/>
-          <a:lstStyle/>
-          <a:p>
-            <a:pPr indent="0" marL="0">
-              <a:lnSpc>
-                <a:spcPct val="120000"/>
-              </a:lnSpc>
-              <a:buNone/>
-            </a:pPr>
-            <a:r>
-              <a:rPr lang="en-US" sz="1400" dirty="0">
-                <a:solidFill>
-                  <a:srgbClr val="718096"/>
-                </a:solidFill>
-                <a:latin typeface="Pretendard" pitchFamily="34" charset="0"/>
-                <a:ea typeface="Pretendard" pitchFamily="34" charset="-122"/>
-                <a:cs typeface="Pretendard" pitchFamily="34" charset="-120"/>
-              </a:rPr>
-              <a:t>주구조</a:t>
-            </a:r>
-            <a:endParaRPr lang="en-US" sz="1400" dirty="0"/>
-          </a:p>
-        </p:txBody>
-      </p:sp>
-      <p:sp>
-        <p:nvSpPr>
-          <p:cNvPr id="29" name="Text 27"/>
-          <p:cNvSpPr/>
-          <p:nvPr/>
-        </p:nvSpPr>
-        <p:spPr>
-          <a:xfrm>
-            <a:off x="3172968" y="4462272"/>
-            <a:ext cx="4251960" cy="402336"/>
-          </a:xfrm>
-          <a:prstGeom prst="rect">
-            <a:avLst/>
-          </a:prstGeom>
-          <a:noFill/>
-          <a:ln/>
-        </p:spPr>
-        <p:txBody>
-          <a:bodyPr wrap="square" lIns="0" tIns="0" rIns="0" bIns="0" rtlCol="0" anchor="ctr"/>
-          <a:lstStyle/>
-          <a:p>
-            <a:pPr indent="0" marL="0">
-              <a:lnSpc>
-                <a:spcPct val="120000"/>
-              </a:lnSpc>
-              <a:buNone/>
-            </a:pPr>
-            <a:r>
-              <a:rPr lang="en-US" sz="1400" b="1" dirty="0">
-                <a:solidFill>
-                  <a:srgbClr val="10161F"/>
-                </a:solidFill>
-                <a:latin typeface="Pretendard" pitchFamily="34" charset="0"/>
-                <a:ea typeface="Pretendard" pitchFamily="34" charset="-122"/>
-                <a:cs typeface="Pretendard" pitchFamily="34" charset="-120"/>
-              </a:rPr>
-              <a:t>철근콘크리트구조</a:t>
-            </a:r>
-            <a:endParaRPr lang="en-US" sz="1400" dirty="0"/>
-          </a:p>
-        </p:txBody>
-      </p:sp>
-      <p:sp>
-        <p:nvSpPr>
-          <p:cNvPr id="30" name="Shape 28"/>
-          <p:cNvSpPr/>
-          <p:nvPr/>
-        </p:nvSpPr>
-        <p:spPr>
-          <a:xfrm>
-            <a:off x="566928" y="4864608"/>
-            <a:ext cx="6858000" cy="0"/>
-          </a:xfrm>
-          <a:prstGeom prst="line">
-            <a:avLst/>
-          </a:prstGeom>
-          <a:noFill/>
-          <a:ln w="3810">
-            <a:solidFill>
-              <a:srgbClr val="CBD5E0"/>
-            </a:solidFill>
-            <a:prstDash val="solid"/>
-          </a:ln>
-        </p:spPr>
-      </p:sp>
-      <p:sp>
-        <p:nvSpPr>
-          <p:cNvPr id="31" name="Text 29"/>
-          <p:cNvSpPr/>
-          <p:nvPr/>
-        </p:nvSpPr>
-        <p:spPr>
-          <a:xfrm>
-            <a:off x="566928" y="4864608"/>
-            <a:ext cx="2606040" cy="402336"/>
-          </a:xfrm>
-          <a:prstGeom prst="rect">
-            <a:avLst/>
-          </a:prstGeom>
-          <a:noFill/>
-          <a:ln/>
-        </p:spPr>
-        <p:txBody>
-          <a:bodyPr wrap="square" lIns="0" tIns="0" rIns="0" bIns="0" rtlCol="0" anchor="ctr"/>
-          <a:lstStyle/>
-          <a:p>
-            <a:pPr indent="0" marL="0">
-              <a:lnSpc>
-                <a:spcPct val="120000"/>
-              </a:lnSpc>
-              <a:buNone/>
-            </a:pPr>
-            <a:r>
-              <a:rPr lang="en-US" sz="1400" dirty="0">
-                <a:solidFill>
-                  <a:srgbClr val="718096"/>
-                </a:solidFill>
-                <a:latin typeface="Pretendard" pitchFamily="34" charset="0"/>
-                <a:ea typeface="Pretendard" pitchFamily="34" charset="-122"/>
-                <a:cs typeface="Pretendard" pitchFamily="34" charset="-120"/>
-              </a:rPr>
-              <a:t>매매 희망가</a:t>
-            </a:r>
-            <a:endParaRPr lang="en-US" sz="1400" dirty="0"/>
-          </a:p>
-        </p:txBody>
-      </p:sp>
-      <p:sp>
-        <p:nvSpPr>
-          <p:cNvPr id="32" name="Text 30"/>
-          <p:cNvSpPr/>
-          <p:nvPr/>
-        </p:nvSpPr>
-        <p:spPr>
-          <a:xfrm>
-            <a:off x="3172968" y="4864608"/>
-            <a:ext cx="4251960" cy="402336"/>
-          </a:xfrm>
-          <a:prstGeom prst="rect">
-            <a:avLst/>
-          </a:prstGeom>
-          <a:noFill/>
-          <a:ln/>
-        </p:spPr>
-        <p:txBody>
-          <a:bodyPr wrap="square" lIns="0" tIns="0" rIns="0" bIns="0" rtlCol="0" anchor="ctr"/>
-          <a:lstStyle/>
-          <a:p>
-            <a:pPr indent="0" marL="0">
-              <a:lnSpc>
-                <a:spcPct val="120000"/>
-              </a:lnSpc>
-              <a:buNone/>
-            </a:pPr>
-            <a:r>
-              <a:rPr lang="en-US" sz="1400" b="1" dirty="0">
-                <a:solidFill>
-                  <a:srgbClr val="10161F"/>
-                </a:solidFill>
-                <a:latin typeface="Pretendard" pitchFamily="34" charset="0"/>
-                <a:ea typeface="Pretendard" pitchFamily="34" charset="-122"/>
-                <a:cs typeface="Pretendard" pitchFamily="34" charset="-120"/>
-              </a:rPr>
-              <a:t>98억</a:t>
-            </a:r>
-            <a:endParaRPr lang="en-US" sz="1400" dirty="0"/>
-          </a:p>
-        </p:txBody>
-      </p:sp>
-      <p:sp>
-        <p:nvSpPr>
-          <p:cNvPr id="33" name="Shape 31"/>
           <p:cNvSpPr/>
           <p:nvPr/>
         </p:nvSpPr>
@@ -6717,49 +5669,49 @@
       </p:sp>
       <p:sp>
         <p:nvSpPr>
-          <p:cNvPr id="34" name="Shape 32"/>
+          <p:cNvPr id="10" name="Shape 8"/>
           <p:cNvSpPr/>
           <p:nvPr/>
         </p:nvSpPr>
         <p:spPr>
           <a:xfrm>
             <a:off x="7784287" y="1645920"/>
-            <a:ext cx="3840480" cy="1645920"/>
+            <a:ext cx="3840480" cy="2103120"/>
           </a:xfrm>
           <a:prstGeom prst="roundRect">
             <a:avLst>
-              <a:gd name="adj" fmla="val 3333"/>
+              <a:gd name="adj" fmla="val 2609"/>
             </a:avLst>
           </a:prstGeom>
           <a:solidFill>
-            <a:srgbClr val="BEE3F8"/>
+            <a:srgbClr val="F3EBDA"/>
           </a:solidFill>
           <a:ln/>
         </p:spPr>
       </p:sp>
       <p:sp>
         <p:nvSpPr>
-          <p:cNvPr id="35" name="Shape 33"/>
+          <p:cNvPr id="11" name="Shape 9"/>
           <p:cNvSpPr/>
           <p:nvPr/>
         </p:nvSpPr>
         <p:spPr>
           <a:xfrm>
             <a:off x="7784287" y="1700784"/>
-            <a:ext cx="36576" cy="1536192"/>
+            <a:ext cx="36576" cy="1993392"/>
           </a:xfrm>
           <a:prstGeom prst="rect">
             <a:avLst/>
           </a:prstGeom>
           <a:solidFill>
-            <a:srgbClr val="2B6CB0"/>
+            <a:srgbClr val="977024"/>
           </a:solidFill>
           <a:ln/>
         </p:spPr>
       </p:sp>
       <p:sp>
         <p:nvSpPr>
-          <p:cNvPr id="36" name="Text 34"/>
+          <p:cNvPr id="12" name="Text 10"/>
           <p:cNvSpPr/>
           <p:nvPr/>
         </p:nvSpPr>
@@ -6787,14 +5739,14 @@
       </p:sp>
       <p:sp>
         <p:nvSpPr>
-          <p:cNvPr id="37" name="Text 35"/>
+          <p:cNvPr id="13" name="Text 11"/>
           <p:cNvSpPr/>
           <p:nvPr/>
         </p:nvSpPr>
         <p:spPr>
           <a:xfrm>
             <a:off x="7967167" y="1975104"/>
-            <a:ext cx="3511296" cy="1243584"/>
+            <a:ext cx="3511296" cy="1700784"/>
           </a:xfrm>
           <a:prstGeom prst="rect">
             <a:avLst/>
@@ -6821,7 +5773,7 @@
                 <a:ea typeface="Pretendard" pitchFamily="34" charset="-122"/>
                 <a:cs typeface="Pretendard" pitchFamily="34" charset="-120"/>
               </a:rPr>
-              <a:t>본 매물은 강남권역 입지의 안정적 운영 자산입니다.</a:t>
+              <a:t>{"ok":true,"mocked":true,"extractedFields":{"area_signal":"역삼","asset_type":"오피스빌딩","price_band":"300억","size_signal":"3</a:t>
             </a:r>
             <a:endParaRPr lang="en-US" sz="930" dirty="0"/>
           </a:p>
@@ -6829,7 +5781,7 @@
       </p:sp>
       <p:sp>
         <p:nvSpPr>
-          <p:cNvPr id="38" name="Text 36"/>
+          <p:cNvPr id="14" name="Text 12"/>
           <p:cNvSpPr/>
           <p:nvPr/>
         </p:nvSpPr>
@@ -6868,7 +5820,7 @@
       </p:sp>
       <p:sp>
         <p:nvSpPr>
-          <p:cNvPr id="39" name="Text 37"/>
+          <p:cNvPr id="15" name="Text 13"/>
           <p:cNvSpPr/>
           <p:nvPr/>
         </p:nvSpPr>
@@ -7107,7 +6059,7 @@
                 <a:ea typeface="Pretendard" pitchFamily="34" charset="-122"/>
                 <a:cs typeface="Pretendard" pitchFamily="34" charset="-120"/>
               </a:rPr>
-              <a:t>시장 포지셔닝 및 시세 갭 분석</a:t>
+              <a:t>건축물 개요 및 물리 스펙</a:t>
             </a:r>
             <a:endParaRPr lang="en-US" sz="1100" dirty="0"/>
           </a:p>
@@ -7149,7 +6101,7 @@
                 <a:ea typeface="Pretendard" pitchFamily="34" charset="-122"/>
                 <a:cs typeface="Pretendard" pitchFamily="34" charset="-120"/>
               </a:rPr>
-              <a:t>평당 매매가</a:t>
+              <a:t>{"ok"</a:t>
             </a:r>
             <a:endParaRPr lang="en-US" sz="1400" dirty="0"/>
           </a:p>
@@ -7191,7 +6143,7 @@
                 <a:ea typeface="Pretendard" pitchFamily="34" charset="-122"/>
                 <a:cs typeface="Pretendard" pitchFamily="34" charset="-120"/>
               </a:rPr>
-              <a:t>매각 희망가 기준</a:t>
+              <a:t>true,"mocked":true,"extractedFields":{"area_signal":"역삼","asset_type":"오피스빌딩","price_band":"300억","size_signal":"3000평(약 9917.4㎡)"},"extractedFacts":{"region":"역삼","exactAddressCandidate":"역삼동 742-1","assetType":"오피스빌딩","priceText":"300억","sizeText":"3000평(약 9917.4㎡)","currentUse":"오피스","currentUseSignal":"근린생활시설","leaseSignal":"임대중","vacancySignal":"공실없음","tenantNames":"쿠팡","네이버","unitRentTexts":"301호: 1500만","sellerMotivationText":"자산 효율화","brokerNotes":"초역세권 매물"},"detectedSensitiveFields":"exact_address","tenant_name","ambiguousFields":,"warnings":,"areaSignal":"역삼","assetType":"오피스빌딩","priceBand":"300억","sizeSignal":"3000평(약 9917.4㎡)","dealType":"매각","buildingName":"역삼 센트럴타워","exactAddress":"역삼동 742-1","totalFloorArea":9917.3,"buildYear":2015,"currentUseSignal":"근린생활시설","vacancySignal":"공실 없음","fitSummary":"초역세권 근생 빌딩으로 시행/사옥 매입에 최적화","cautionSummary":"주요 임차인 만기 조율 필요","hiddenFields":"exact_address","seller_motivation","confidence":{"areaSignal":"confirmed","assetType":"confirmed","priceBand":"ai_hypothesis","fitSummary":"ai_hypothesis"},"missingData":"sizeSignal","boundaryNote":"본 자료는 실거래 통계 기반 참고치입니다.","buyerType":"법인 사옥형","budgetRange":{"min":50,"max":80,"display":"50억~80억"},"preferredRegions":"강남","성수","assetTypes":"꼬마빌딩","사옥용","purchasePurpose":"사옥용 매입","mustHave":"초역세권","주차","niceToHave":"테라스","루프탑","riskTolerance":"medium","financingNote":"자본금 50% 준비","missingQuestions":"구체적인 입주 시기가 언제인가요?","선호하는 수익률이 있나요?","privacyNotes":"연락처 비공개","fitReasons":"매수자 예산(50-80억)에 부합하는 매물입니다.","요청하신 성수/강남 권역에 해당합니다.","cautionReasons":"요청한 용도와 달리 명도 협의가 다소 필요합니다.","recommendedNextAction":"현장 답사 제안","kakaoMessage":"안녕하세요! 요청하신 조건에 부합하는 추천 매물이 있어 안내해 드립니다. 확인해보시고 피드백 부탁드립니다.","title":"강남 역삼역 초역세권 오피스 사옥용 빌딩 매각","shortSummary":"역삼역 도보 5분 거리의 준신축급 대형 오피스빌딩입니다.","dealPoints":"초역세권","사옥 최적","cautionPoints":"명도 조율 필요","hiddenInfoNotice":"보증금 및 지번은 인가 후 확인 가능","gateMessage":"G1 등급 등록이 필요합니다.","kakaoText":"강남 역삼역 오피스 빌딩 매각 안내입니다.","exactUnitCandidate":"101호","floor":"1층","areaSqmText":"150㎡","spaceType":"office","depositText":"5000만","monthlyRentText":"400만","maintenanceFeeText":"50만","availableFromText":"즉시입주","leaseTermMonthsText":"24","incentivesText":"렌트프리 2개월","restrictions":,"landlordIdentity":"김성수","currentTenant":"스타트업","vacancyReason":"이전 확장","rentNegotiation":"협의 가능","region":"성수동","areaSqm":150,"deposit":5000,"monthlyRent":400,"maintenanceFee":50,"availableFrom":"즉시입주","leaseTermMonths":24,"incentives":{"rentFreeMonths":2,"interiorSupport":"일부 인테리어 지원","freeRentDetail":"렌트프리 2개월 지원"},"shortSummaryLease":"성수역 도보 5분 거리 1층 리테일 상가 매물입니다."}</a:t>
             </a:r>
             <a:endParaRPr lang="en-US" sz="1400" dirty="0"/>
           </a:p>
@@ -7200,113 +6152,6 @@
       <p:sp>
         <p:nvSpPr>
           <p:cNvPr id="9" name="Shape 7"/>
-          <p:cNvSpPr/>
-          <p:nvPr/>
-        </p:nvSpPr>
-        <p:spPr>
-          <a:xfrm>
-            <a:off x="566928" y="2048256"/>
-            <a:ext cx="6858000" cy="0"/>
-          </a:xfrm>
-          <a:prstGeom prst="line">
-            <a:avLst/>
-          </a:prstGeom>
-          <a:noFill/>
-          <a:ln w="3810">
-            <a:solidFill>
-              <a:srgbClr val="CBD5E0"/>
-            </a:solidFill>
-            <a:prstDash val="solid"/>
-          </a:ln>
-        </p:spPr>
-      </p:sp>
-      <p:sp>
-        <p:nvSpPr>
-          <p:cNvPr id="10" name="Text 8"/>
-          <p:cNvSpPr/>
-          <p:nvPr/>
-        </p:nvSpPr>
-        <p:spPr>
-          <a:xfrm>
-            <a:off x="566928" y="2048256"/>
-            <a:ext cx="2606040" cy="402336"/>
-          </a:xfrm>
-          <a:prstGeom prst="rect">
-            <a:avLst/>
-          </a:prstGeom>
-          <a:noFill/>
-          <a:ln/>
-        </p:spPr>
-        <p:txBody>
-          <a:bodyPr wrap="square" lIns="0" tIns="0" rIns="0" bIns="0" rtlCol="0" anchor="ctr"/>
-          <a:lstStyle/>
-          <a:p>
-            <a:pPr indent="0" marL="0">
-              <a:lnSpc>
-                <a:spcPct val="120000"/>
-              </a:lnSpc>
-              <a:buNone/>
-            </a:pPr>
-            <a:r>
-              <a:rPr lang="en-US" sz="1400" dirty="0">
-                <a:solidFill>
-                  <a:srgbClr val="718096"/>
-                </a:solidFill>
-                <a:latin typeface="Pretendard" pitchFamily="34" charset="0"/>
-                <a:ea typeface="Pretendard" pitchFamily="34" charset="-122"/>
-                <a:cs typeface="Pretendard" pitchFamily="34" charset="-120"/>
-              </a:rPr>
-              <a:t>입지 프리미엄</a:t>
-            </a:r>
-            <a:endParaRPr lang="en-US" sz="1400" dirty="0"/>
-          </a:p>
-        </p:txBody>
-      </p:sp>
-      <p:sp>
-        <p:nvSpPr>
-          <p:cNvPr id="11" name="Text 9"/>
-          <p:cNvSpPr/>
-          <p:nvPr/>
-        </p:nvSpPr>
-        <p:spPr>
-          <a:xfrm>
-            <a:off x="3172968" y="2048256"/>
-            <a:ext cx="4251960" cy="402336"/>
-          </a:xfrm>
-          <a:prstGeom prst="rect">
-            <a:avLst/>
-          </a:prstGeom>
-          <a:noFill/>
-          <a:ln/>
-        </p:spPr>
-        <p:txBody>
-          <a:bodyPr wrap="square" lIns="0" tIns="0" rIns="0" bIns="0" rtlCol="0" anchor="ctr"/>
-          <a:lstStyle/>
-          <a:p>
-            <a:pPr indent="0" marL="0">
-              <a:lnSpc>
-                <a:spcPct val="120000"/>
-              </a:lnSpc>
-              <a:buNone/>
-            </a:pPr>
-            <a:r>
-              <a:rPr lang="en-US" sz="1400" b="1" dirty="0">
-                <a:solidFill>
-                  <a:srgbClr val="10161F"/>
-                </a:solidFill>
-                <a:latin typeface="Pretendard" pitchFamily="34" charset="0"/>
-                <a:ea typeface="Pretendard" pitchFamily="34" charset="-122"/>
-                <a:cs typeface="Pretendard" pitchFamily="34" charset="-120"/>
-              </a:rPr>
-              <a:t>입지 및 접근성 우수</a:t>
-            </a:r>
-            <a:endParaRPr lang="en-US" sz="1400" dirty="0"/>
-          </a:p>
-        </p:txBody>
-      </p:sp>
-      <p:sp>
-        <p:nvSpPr>
-          <p:cNvPr id="12" name="Shape 10"/>
           <p:cNvSpPr/>
           <p:nvPr/>
         </p:nvSpPr>
@@ -7329,18 +6174,18 @@
       </p:sp>
       <p:sp>
         <p:nvSpPr>
-          <p:cNvPr id="13" name="Shape 11"/>
+          <p:cNvPr id="10" name="Shape 8"/>
           <p:cNvSpPr/>
           <p:nvPr/>
         </p:nvSpPr>
         <p:spPr>
           <a:xfrm>
             <a:off x="7784287" y="1645920"/>
-            <a:ext cx="3840480" cy="1645920"/>
+            <a:ext cx="3840480" cy="2103120"/>
           </a:xfrm>
           <a:prstGeom prst="roundRect">
             <a:avLst>
-              <a:gd name="adj" fmla="val 3333"/>
+              <a:gd name="adj" fmla="val 2609"/>
             </a:avLst>
           </a:prstGeom>
           <a:solidFill>
@@ -7351,14 +6196,14 @@
       </p:sp>
       <p:sp>
         <p:nvSpPr>
-          <p:cNvPr id="14" name="Shape 12"/>
+          <p:cNvPr id="11" name="Shape 9"/>
           <p:cNvSpPr/>
           <p:nvPr/>
         </p:nvSpPr>
         <p:spPr>
           <a:xfrm>
             <a:off x="7784287" y="1700784"/>
-            <a:ext cx="36576" cy="1536192"/>
+            <a:ext cx="36576" cy="1993392"/>
           </a:xfrm>
           <a:prstGeom prst="rect">
             <a:avLst/>
@@ -7371,7 +6216,7 @@
       </p:sp>
       <p:sp>
         <p:nvSpPr>
-          <p:cNvPr id="15" name="Text 13"/>
+          <p:cNvPr id="12" name="Text 10"/>
           <p:cNvSpPr/>
           <p:nvPr/>
         </p:nvSpPr>
@@ -7399,14 +6244,14 @@
       </p:sp>
       <p:sp>
         <p:nvSpPr>
-          <p:cNvPr id="16" name="Text 14"/>
+          <p:cNvPr id="13" name="Text 11"/>
           <p:cNvSpPr/>
           <p:nvPr/>
         </p:nvSpPr>
         <p:spPr>
           <a:xfrm>
             <a:off x="7967167" y="1975104"/>
-            <a:ext cx="3511296" cy="1243584"/>
+            <a:ext cx="3511296" cy="1700784"/>
           </a:xfrm>
           <a:prstGeom prst="rect">
             <a:avLst/>
@@ -7433,7 +6278,7 @@
                 <a:ea typeface="Pretendard" pitchFamily="34" charset="-122"/>
                 <a:cs typeface="Pretendard" pitchFamily="34" charset="-120"/>
               </a:rPr>
-              <a:t>본 자산의 매각 희망가(98억)를 인근 권역 유사 매물의 거래사례 및 시세와 비교하여 가격 경쟁력을 평가합니다.</a:t>
+              <a:t>{"ok":true,"mocked":true,"extractedFields":{"area_signal":"역삼","asset_type":"오피스빌딩","price_band":"300억","size_signal":"3</a:t>
             </a:r>
             <a:endParaRPr lang="en-US" sz="930" dirty="0"/>
           </a:p>
@@ -7441,56 +6286,14 @@
       </p:sp>
       <p:sp>
         <p:nvSpPr>
-          <p:cNvPr id="17" name="Shape 15"/>
-          <p:cNvSpPr/>
-          <p:nvPr/>
-        </p:nvSpPr>
-        <p:spPr>
-          <a:xfrm>
-            <a:off x="7784287" y="3493008"/>
-            <a:ext cx="3840480" cy="1645920"/>
-          </a:xfrm>
-          <a:prstGeom prst="roundRect">
-            <a:avLst>
-              <a:gd name="adj" fmla="val 3333"/>
-            </a:avLst>
-          </a:prstGeom>
-          <a:solidFill>
-            <a:srgbClr val="BEE3F8"/>
-          </a:solidFill>
-          <a:ln/>
-        </p:spPr>
-      </p:sp>
-      <p:sp>
-        <p:nvSpPr>
-          <p:cNvPr id="18" name="Shape 16"/>
-          <p:cNvSpPr/>
-          <p:nvPr/>
-        </p:nvSpPr>
-        <p:spPr>
-          <a:xfrm>
-            <a:off x="7784287" y="3547872"/>
-            <a:ext cx="36576" cy="1536192"/>
-          </a:xfrm>
-          <a:prstGeom prst="rect">
-            <a:avLst/>
-          </a:prstGeom>
-          <a:solidFill>
-            <a:srgbClr val="2B6CB0"/>
-          </a:solidFill>
-          <a:ln/>
-        </p:spPr>
-      </p:sp>
-      <p:sp>
-        <p:nvSpPr>
-          <p:cNvPr id="19" name="Text 17"/>
-          <p:cNvSpPr/>
-          <p:nvPr/>
-        </p:nvSpPr>
-        <p:spPr>
-          <a:xfrm>
-            <a:off x="7967167" y="3602736"/>
-            <a:ext cx="3511296" cy="201168"/>
+          <p:cNvPr id="14" name="Text 12"/>
+          <p:cNvSpPr/>
+          <p:nvPr/>
+        </p:nvSpPr>
+        <p:spPr>
+          <a:xfrm>
+            <a:off x="566928" y="6382512"/>
+            <a:ext cx="7315200" cy="219456"/>
           </a:xfrm>
           <a:prstGeom prst="rect">
             <a:avLst/>
@@ -7505,85 +6308,15 @@
             <a:pPr indent="0" marL="0">
               <a:buNone/>
             </a:pPr>
-            <a:endParaRPr lang="en-US" sz="1050" dirty="0"/>
-          </a:p>
-        </p:txBody>
-      </p:sp>
-      <p:sp>
-        <p:nvSpPr>
-          <p:cNvPr id="20" name="Text 18"/>
-          <p:cNvSpPr/>
-          <p:nvPr/>
-        </p:nvSpPr>
-        <p:spPr>
-          <a:xfrm>
-            <a:off x="7967167" y="3822192"/>
-            <a:ext cx="3511296" cy="1243584"/>
-          </a:xfrm>
-          <a:prstGeom prst="rect">
-            <a:avLst/>
-          </a:prstGeom>
-          <a:noFill/>
-          <a:ln/>
-        </p:spPr>
-        <p:txBody>
-          <a:bodyPr wrap="square" lIns="0" tIns="0" rIns="0" bIns="0" rtlCol="0" anchor="t"/>
-          <a:lstStyle/>
-          <a:p>
-            <a:pPr indent="0" marL="0">
-              <a:lnSpc>
-                <a:spcPct val="120000"/>
-              </a:lnSpc>
-              <a:buNone/>
-            </a:pPr>
-            <a:r>
-              <a:rPr lang="en-US" sz="930" dirty="0">
-                <a:solidFill>
-                  <a:srgbClr val="10161F"/>
+            <a:r>
+              <a:rPr lang="en-US" sz="800" dirty="0">
+                <a:solidFill>
+                  <a:srgbClr val="718096"/>
                 </a:solidFill>
                 <a:latin typeface="Pretendard" pitchFamily="34" charset="0"/>
                 <a:ea typeface="Pretendard" pitchFamily="34" charset="-122"/>
                 <a:cs typeface="Pretendard" pitchFamily="34" charset="-120"/>
               </a:rPr>
-              <a:t>[참고] 인근 시세 대비 합리적 매각가 형성으로 단기 매매 및 리밸런싱에 적합합니다.</a:t>
-            </a:r>
-            <a:endParaRPr lang="en-US" sz="930" dirty="0"/>
-          </a:p>
-        </p:txBody>
-      </p:sp>
-      <p:sp>
-        <p:nvSpPr>
-          <p:cNvPr id="21" name="Text 19"/>
-          <p:cNvSpPr/>
-          <p:nvPr/>
-        </p:nvSpPr>
-        <p:spPr>
-          <a:xfrm>
-            <a:off x="566928" y="6382512"/>
-            <a:ext cx="7315200" cy="219456"/>
-          </a:xfrm>
-          <a:prstGeom prst="rect">
-            <a:avLst/>
-          </a:prstGeom>
-          <a:noFill/>
-          <a:ln/>
-        </p:spPr>
-        <p:txBody>
-          <a:bodyPr wrap="square" lIns="0" tIns="0" rIns="0" bIns="0" rtlCol="0" anchor="ctr"/>
-          <a:lstStyle/>
-          <a:p>
-            <a:pPr indent="0" marL="0">
-              <a:buNone/>
-            </a:pPr>
-            <a:r>
-              <a:rPr lang="en-US" sz="800" dirty="0">
-                <a:solidFill>
-                  <a:srgbClr val="718096"/>
-                </a:solidFill>
-                <a:latin typeface="Pretendard" pitchFamily="34" charset="0"/>
-                <a:ea typeface="Pretendard" pitchFamily="34" charset="-122"/>
-                <a:cs typeface="Pretendard" pitchFamily="34" charset="-120"/>
-              </a:rPr>
               <a:t>크리딜   |   </a:t>
             </a:r>
             <a:endParaRPr lang="en-US" sz="800" dirty="0"/>
@@ -7592,7 +6325,7 @@
       </p:sp>
       <p:sp>
         <p:nvSpPr>
-          <p:cNvPr id="22" name="Text 20"/>
+          <p:cNvPr id="15" name="Text 13"/>
           <p:cNvSpPr/>
           <p:nvPr/>
         </p:nvSpPr>
@@ -7798,1137 +6531,16 @@
           </a:p>
         </p:txBody>
       </p:sp>
-      <p:graphicFrame>
-        <p:nvGraphicFramePr>
-          <p:cNvPr id="7" name="Table 0"/>
-          <p:cNvGraphicFramePr>
-            <a:graphicFrameLocks noGrp="1"/>
-          </p:cNvGraphicFramePr>
-          <p:nvPr>
-            <p:extLst>
-              <p:ext uri="{D42A27DB-BD31-4B8C-83A1-F6EECF244321}">
-                <p14:modId xmlns:p14="http://schemas.microsoft.com/office/powerpoint/2010/main" val="1579011935"/>
-              </p:ext>
-            </p:extLst>
-          </p:nvPr>
-        </p:nvGraphicFramePr>
-        <p:xfrm>
-          <a:off x="566928" y="1645920"/>
-          <a:ext cx="11057839" cy="914400"/>
-        </p:xfrm>
-        <a:graphic>
-          <a:graphicData uri="http://schemas.openxmlformats.org/drawingml/2006/table">
-            <a:tbl>
-              <a:tblPr/>
-              <a:tblGrid>
-                <a:gridCol w="2551809"/>
-                <a:gridCol w="4253015"/>
-                <a:gridCol w="4253015"/>
-              </a:tblGrid>
-              <a:tr h="438912">
-                <a:tc>
-                  <a:txBody>
-                    <a:bodyPr/>
-                    <a:lstStyle/>
-                    <a:p>
-                      <a:pPr indent="0" marL="0">
-                        <a:buNone/>
-                      </a:pPr>
-                      <a:r>
-                        <a:rPr lang="en-US" sz="1300" b="1" dirty="0">
-                          <a:solidFill>
-                            <a:srgbClr val="718096"/>
-                          </a:solidFill>
-                          <a:latin typeface="Pretendard" pitchFamily="34" charset="0"/>
-                          <a:ea typeface="Pretendard" pitchFamily="34" charset="-122"/>
-                          <a:cs typeface="Pretendard" pitchFamily="34" charset="-120"/>
-                        </a:rPr>
-                        <a:t>구분</a:t>
-                      </a:r>
-                      <a:endParaRPr lang="en-US" sz="1300" dirty="0">
-                        <a:latin typeface="Pretendard" charset="0"/>
-                        <a:ea typeface="Pretendard" charset="0"/>
-                        <a:cs typeface="Pretendard" charset="0"/>
-                      </a:endParaRPr>
-                    </a:p>
-                  </a:txBody>
-                  <a:tcPr marL="50800" marR="50800" marT="25400" marB="25400" anchor="ctr">
-                    <a:lnL w="3810" cap="flat" cmpd="sng" algn="ctr">
-                      <a:solidFill>
-                        <a:srgbClr val="CBD5E0"/>
-                      </a:solidFill>
-                      <a:prstDash val="solid"/>
-                      <a:round/>
-                      <a:headEnd type="none" w="med" len="med"/>
-                      <a:tailEnd type="none" w="med" len="med"/>
-                    </a:lnL>
-                    <a:lnR w="3810" cap="flat" cmpd="sng" algn="ctr">
-                      <a:solidFill>
-                        <a:srgbClr val="CBD5E0"/>
-                      </a:solidFill>
-                      <a:prstDash val="solid"/>
-                      <a:round/>
-                      <a:headEnd type="none" w="med" len="med"/>
-                      <a:tailEnd type="none" w="med" len="med"/>
-                    </a:lnR>
-                    <a:lnT w="3810" cap="flat" cmpd="sng" algn="ctr">
-                      <a:solidFill>
-                        <a:srgbClr val="CBD5E0"/>
-                      </a:solidFill>
-                      <a:prstDash val="solid"/>
-                      <a:round/>
-                      <a:headEnd type="none" w="med" len="med"/>
-                      <a:tailEnd type="none" w="med" len="med"/>
-                    </a:lnT>
-                    <a:lnB w="3810" cap="flat" cmpd="sng" algn="ctr">
-                      <a:solidFill>
-                        <a:srgbClr val="CBD5E0"/>
-                      </a:solidFill>
-                      <a:prstDash val="solid"/>
-                      <a:round/>
-                      <a:headEnd type="none" w="med" len="med"/>
-                      <a:tailEnd type="none" w="med" len="med"/>
-                    </a:lnB>
-                    <a:solidFill>
-                      <a:srgbClr val="F7FAFC"/>
-                    </a:solidFill>
-                  </a:tcPr>
-                </a:tc>
-                <a:tc>
-                  <a:txBody>
-                    <a:bodyPr/>
-                    <a:lstStyle/>
-                    <a:p>
-                      <a:pPr indent="0" marL="0">
-                        <a:buNone/>
-                      </a:pPr>
-                      <a:r>
-                        <a:rPr lang="en-US" sz="1300" b="1" dirty="0">
-                          <a:solidFill>
-                            <a:srgbClr val="718096"/>
-                          </a:solidFill>
-                          <a:latin typeface="Pretendard" pitchFamily="34" charset="0"/>
-                          <a:ea typeface="Pretendard" pitchFamily="34" charset="-122"/>
-                          <a:cs typeface="Pretendard" pitchFamily="34" charset="-120"/>
-                        </a:rPr>
-                        <a:t>타겟 </a:t>
-                      </a:r>
-                      <a:pPr indent="0" marL="0">
-                        <a:buNone/>
-                      </a:pPr>
-                      <a:r>
-                        <a:rPr lang="en-US" sz="1300" b="1" dirty="0">
-                          <a:solidFill>
-                            <a:srgbClr val="718096"/>
-                          </a:solidFill>
-                          <a:latin typeface="Pretendard" pitchFamily="34" charset="0"/>
-                          <a:ea typeface="Pretendard" pitchFamily="34" charset="-122"/>
-                          <a:cs typeface="Pretendard" pitchFamily="34" charset="-120"/>
-                        </a:rPr>
-                        <a:t>수치</a:t>
-                      </a:r>
-                      <a:endParaRPr lang="en-US" sz="1300" dirty="0">
-                        <a:latin typeface="Pretendard" charset="0"/>
-                        <a:ea typeface="Pretendard" charset="0"/>
-                        <a:cs typeface="Pretendard" charset="0"/>
-                      </a:endParaRPr>
-                    </a:p>
-                  </a:txBody>
-                  <a:tcPr marL="50800" marR="50800" marT="25400" marB="25400" anchor="ctr">
-                    <a:lnL w="3810" cap="flat" cmpd="sng" algn="ctr">
-                      <a:solidFill>
-                        <a:srgbClr val="CBD5E0"/>
-                      </a:solidFill>
-                      <a:prstDash val="solid"/>
-                      <a:round/>
-                      <a:headEnd type="none" w="med" len="med"/>
-                      <a:tailEnd type="none" w="med" len="med"/>
-                    </a:lnL>
-                    <a:lnR w="3810" cap="flat" cmpd="sng" algn="ctr">
-                      <a:solidFill>
-                        <a:srgbClr val="CBD5E0"/>
-                      </a:solidFill>
-                      <a:prstDash val="solid"/>
-                      <a:round/>
-                      <a:headEnd type="none" w="med" len="med"/>
-                      <a:tailEnd type="none" w="med" len="med"/>
-                    </a:lnR>
-                    <a:lnT w="3810" cap="flat" cmpd="sng" algn="ctr">
-                      <a:solidFill>
-                        <a:srgbClr val="CBD5E0"/>
-                      </a:solidFill>
-                      <a:prstDash val="solid"/>
-                      <a:round/>
-                      <a:headEnd type="none" w="med" len="med"/>
-                      <a:tailEnd type="none" w="med" len="med"/>
-                    </a:lnT>
-                    <a:lnB w="3810" cap="flat" cmpd="sng" algn="ctr">
-                      <a:solidFill>
-                        <a:srgbClr val="CBD5E0"/>
-                      </a:solidFill>
-                      <a:prstDash val="solid"/>
-                      <a:round/>
-                      <a:headEnd type="none" w="med" len="med"/>
-                      <a:tailEnd type="none" w="med" len="med"/>
-                    </a:lnB>
-                    <a:solidFill>
-                      <a:srgbClr val="F7FAFC"/>
-                    </a:solidFill>
-                  </a:tcPr>
-                </a:tc>
-                <a:tc>
-                  <a:txBody>
-                    <a:bodyPr/>
-                    <a:lstStyle/>
-                    <a:p>
-                      <a:pPr indent="0" marL="0">
-                        <a:buNone/>
-                      </a:pPr>
-                      <a:r>
-                        <a:rPr lang="en-US" sz="1300" b="1" dirty="0">
-                          <a:solidFill>
-                            <a:srgbClr val="718096"/>
-                          </a:solidFill>
-                          <a:latin typeface="Pretendard" pitchFamily="34" charset="0"/>
-                          <a:ea typeface="Pretendard" pitchFamily="34" charset="-122"/>
-                          <a:cs typeface="Pretendard" pitchFamily="34" charset="-120"/>
-                        </a:rPr>
-                        <a:t>비고</a:t>
-                      </a:r>
-                      <a:endParaRPr lang="en-US" sz="1300" dirty="0">
-                        <a:latin typeface="Pretendard" charset="0"/>
-                        <a:ea typeface="Pretendard" charset="0"/>
-                        <a:cs typeface="Pretendard" charset="0"/>
-                      </a:endParaRPr>
-                    </a:p>
-                  </a:txBody>
-                  <a:tcPr marL="50800" marR="50800" marT="25400" marB="25400" anchor="ctr">
-                    <a:lnL w="3810" cap="flat" cmpd="sng" algn="ctr">
-                      <a:solidFill>
-                        <a:srgbClr val="CBD5E0"/>
-                      </a:solidFill>
-                      <a:prstDash val="solid"/>
-                      <a:round/>
-                      <a:headEnd type="none" w="med" len="med"/>
-                      <a:tailEnd type="none" w="med" len="med"/>
-                    </a:lnL>
-                    <a:lnR w="3810" cap="flat" cmpd="sng" algn="ctr">
-                      <a:solidFill>
-                        <a:srgbClr val="CBD5E0"/>
-                      </a:solidFill>
-                      <a:prstDash val="solid"/>
-                      <a:round/>
-                      <a:headEnd type="none" w="med" len="med"/>
-                      <a:tailEnd type="none" w="med" len="med"/>
-                    </a:lnR>
-                    <a:lnT w="3810" cap="flat" cmpd="sng" algn="ctr">
-                      <a:solidFill>
-                        <a:srgbClr val="CBD5E0"/>
-                      </a:solidFill>
-                      <a:prstDash val="solid"/>
-                      <a:round/>
-                      <a:headEnd type="none" w="med" len="med"/>
-                      <a:tailEnd type="none" w="med" len="med"/>
-                    </a:lnT>
-                    <a:lnB w="3810" cap="flat" cmpd="sng" algn="ctr">
-                      <a:solidFill>
-                        <a:srgbClr val="CBD5E0"/>
-                      </a:solidFill>
-                      <a:prstDash val="solid"/>
-                      <a:round/>
-                      <a:headEnd type="none" w="med" len="med"/>
-                      <a:tailEnd type="none" w="med" len="med"/>
-                    </a:lnB>
-                    <a:solidFill>
-                      <a:srgbClr val="F7FAFC"/>
-                    </a:solidFill>
-                  </a:tcPr>
-                </a:tc>
-              </a:tr>
-              <a:tr h="438912">
-                <a:tc>
-                  <a:txBody>
-                    <a:bodyPr/>
-                    <a:lstStyle/>
-                    <a:p>
-                      <a:pPr indent="0" marL="0">
-                        <a:buNone/>
-                      </a:pPr>
-                      <a:r>
-                        <a:rPr lang="en-US" sz="1300" b="1" dirty="0">
-                          <a:solidFill>
-                            <a:srgbClr val="10161F"/>
-                          </a:solidFill>
-                          <a:latin typeface="Pretendard" pitchFamily="34" charset="0"/>
-                          <a:ea typeface="Pretendard" pitchFamily="34" charset="-122"/>
-                          <a:cs typeface="Pretendard" pitchFamily="34" charset="-120"/>
-                        </a:rPr>
-                        <a:t>목표 </a:t>
-                      </a:r>
-                      <a:pPr indent="0" marL="0">
-                        <a:buNone/>
-                      </a:pPr>
-                      <a:r>
-                        <a:rPr lang="en-US" sz="1300" b="1" dirty="0">
-                          <a:solidFill>
-                            <a:srgbClr val="10161F"/>
-                          </a:solidFill>
-                          <a:latin typeface="Pretendard" pitchFamily="34" charset="0"/>
-                          <a:ea typeface="Pretendard" pitchFamily="34" charset="-122"/>
-                          <a:cs typeface="Pretendard" pitchFamily="34" charset="-120"/>
-                        </a:rPr>
-                        <a:t>매각가</a:t>
-                      </a:r>
-                      <a:endParaRPr lang="en-US" sz="1300" dirty="0">
-                        <a:latin typeface="Pretendard" charset="0"/>
-                        <a:ea typeface="Pretendard" charset="0"/>
-                        <a:cs typeface="Pretendard" charset="0"/>
-                      </a:endParaRPr>
-                    </a:p>
-                  </a:txBody>
-                  <a:tcPr marL="50800" marR="50800" marT="25400" marB="25400" anchor="ctr">
-                    <a:lnL w="3810" cap="flat" cmpd="sng" algn="ctr">
-                      <a:solidFill>
-                        <a:srgbClr val="CBD5E0"/>
-                      </a:solidFill>
-                      <a:prstDash val="solid"/>
-                      <a:round/>
-                      <a:headEnd type="none" w="med" len="med"/>
-                      <a:tailEnd type="none" w="med" len="med"/>
-                    </a:lnL>
-                    <a:lnR w="3810" cap="flat" cmpd="sng" algn="ctr">
-                      <a:solidFill>
-                        <a:srgbClr val="CBD5E0"/>
-                      </a:solidFill>
-                      <a:prstDash val="solid"/>
-                      <a:round/>
-                      <a:headEnd type="none" w="med" len="med"/>
-                      <a:tailEnd type="none" w="med" len="med"/>
-                    </a:lnR>
-                    <a:lnT w="3810" cap="flat" cmpd="sng" algn="ctr">
-                      <a:solidFill>
-                        <a:srgbClr val="CBD5E0"/>
-                      </a:solidFill>
-                      <a:prstDash val="solid"/>
-                      <a:round/>
-                      <a:headEnd type="none" w="med" len="med"/>
-                      <a:tailEnd type="none" w="med" len="med"/>
-                    </a:lnT>
-                    <a:lnB w="3810" cap="flat" cmpd="sng" algn="ctr">
-                      <a:solidFill>
-                        <a:srgbClr val="CBD5E0"/>
-                      </a:solidFill>
-                      <a:prstDash val="solid"/>
-                      <a:round/>
-                      <a:headEnd type="none" w="med" len="med"/>
-                      <a:tailEnd type="none" w="med" len="med"/>
-                    </a:lnB>
-                    <a:solidFill>
-                      <a:srgbClr val="FFFFFF"/>
-                    </a:solidFill>
-                  </a:tcPr>
-                </a:tc>
-                <a:tc>
-                  <a:txBody>
-                    <a:bodyPr/>
-                    <a:lstStyle/>
-                    <a:p>
-                      <a:pPr indent="0" marL="0">
-                        <a:buNone/>
-                      </a:pPr>
-                      <a:r>
-                        <a:rPr lang="en-US" sz="1300" dirty="0">
-                          <a:solidFill>
-                            <a:srgbClr val="10161F"/>
-                          </a:solidFill>
-                          <a:latin typeface="Pretendard" pitchFamily="34" charset="0"/>
-                          <a:ea typeface="Pretendard" pitchFamily="34" charset="-122"/>
-                          <a:cs typeface="Pretendard" pitchFamily="34" charset="-120"/>
-                        </a:rPr>
-                        <a:t>주변 </a:t>
-                      </a:r>
-                      <a:pPr indent="0" marL="0">
-                        <a:buNone/>
-                      </a:pPr>
-                      <a:r>
-                        <a:rPr lang="en-US" sz="1300" dirty="0">
-                          <a:solidFill>
-                            <a:srgbClr val="10161F"/>
-                          </a:solidFill>
-                          <a:latin typeface="Pretendard" pitchFamily="34" charset="0"/>
-                          <a:ea typeface="Pretendard" pitchFamily="34" charset="-122"/>
-                          <a:cs typeface="Pretendard" pitchFamily="34" charset="-120"/>
-                        </a:rPr>
-                        <a:t>시세 </a:t>
-                      </a:r>
-                      <a:pPr indent="0" marL="0">
-                        <a:buNone/>
-                      </a:pPr>
-                      <a:r>
-                        <a:rPr lang="en-US" sz="1300" dirty="0">
-                          <a:solidFill>
-                            <a:srgbClr val="10161F"/>
-                          </a:solidFill>
-                          <a:latin typeface="Pretendard" pitchFamily="34" charset="0"/>
-                          <a:ea typeface="Pretendard" pitchFamily="34" charset="-122"/>
-                          <a:cs typeface="Pretendard" pitchFamily="34" charset="-120"/>
-                        </a:rPr>
-                        <a:t>상단 </a:t>
-                      </a:r>
-                      <a:pPr indent="0" marL="0">
-                        <a:buNone/>
-                      </a:pPr>
-                      <a:r>
-                        <a:rPr lang="en-US" sz="1300" dirty="0">
-                          <a:solidFill>
-                            <a:srgbClr val="10161F"/>
-                          </a:solidFill>
-                          <a:latin typeface="Pretendard" pitchFamily="34" charset="0"/>
-                          <a:ea typeface="Pretendard" pitchFamily="34" charset="-122"/>
-                          <a:cs typeface="Pretendard" pitchFamily="34" charset="-120"/>
-                        </a:rPr>
-                        <a:t>추정</a:t>
-                      </a:r>
-                      <a:endParaRPr lang="en-US" sz="1300" dirty="0">
-                        <a:latin typeface="Pretendard" charset="0"/>
-                        <a:ea typeface="Pretendard" charset="0"/>
-                        <a:cs typeface="Pretendard" charset="0"/>
-                      </a:endParaRPr>
-                    </a:p>
-                  </a:txBody>
-                  <a:tcPr marL="50800" marR="50800" marT="25400" marB="25400" anchor="ctr">
-                    <a:lnL w="3810" cap="flat" cmpd="sng" algn="ctr">
-                      <a:solidFill>
-                        <a:srgbClr val="CBD5E0"/>
-                      </a:solidFill>
-                      <a:prstDash val="solid"/>
-                      <a:round/>
-                      <a:headEnd type="none" w="med" len="med"/>
-                      <a:tailEnd type="none" w="med" len="med"/>
-                    </a:lnL>
-                    <a:lnR w="3810" cap="flat" cmpd="sng" algn="ctr">
-                      <a:solidFill>
-                        <a:srgbClr val="CBD5E0"/>
-                      </a:solidFill>
-                      <a:prstDash val="solid"/>
-                      <a:round/>
-                      <a:headEnd type="none" w="med" len="med"/>
-                      <a:tailEnd type="none" w="med" len="med"/>
-                    </a:lnR>
-                    <a:lnT w="3810" cap="flat" cmpd="sng" algn="ctr">
-                      <a:solidFill>
-                        <a:srgbClr val="CBD5E0"/>
-                      </a:solidFill>
-                      <a:prstDash val="solid"/>
-                      <a:round/>
-                      <a:headEnd type="none" w="med" len="med"/>
-                      <a:tailEnd type="none" w="med" len="med"/>
-                    </a:lnT>
-                    <a:lnB w="3810" cap="flat" cmpd="sng" algn="ctr">
-                      <a:solidFill>
-                        <a:srgbClr val="CBD5E0"/>
-                      </a:solidFill>
-                      <a:prstDash val="solid"/>
-                      <a:round/>
-                      <a:headEnd type="none" w="med" len="med"/>
-                      <a:tailEnd type="none" w="med" len="med"/>
-                    </a:lnB>
-                    <a:solidFill>
-                      <a:srgbClr val="FFFFFF"/>
-                    </a:solidFill>
-                  </a:tcPr>
-                </a:tc>
-                <a:tc>
-                  <a:txBody>
-                    <a:bodyPr/>
-                    <a:lstStyle/>
-                    <a:p>
-                      <a:pPr indent="0" marL="0">
-                        <a:buNone/>
-                      </a:pPr>
-                      <a:r>
-                        <a:rPr lang="en-US" sz="1300" dirty="0">
-                          <a:solidFill>
-                            <a:srgbClr val="10161F"/>
-                          </a:solidFill>
-                          <a:latin typeface="Pretendard" pitchFamily="34" charset="0"/>
-                          <a:ea typeface="Pretendard" pitchFamily="34" charset="-122"/>
-                          <a:cs typeface="Pretendard" pitchFamily="34" charset="-120"/>
-                        </a:rPr>
-                        <a:t>리밸런싱 </a:t>
-                      </a:r>
-                      <a:pPr indent="0" marL="0">
-                        <a:buNone/>
-                      </a:pPr>
-                      <a:r>
-                        <a:rPr lang="en-US" sz="1300" dirty="0">
-                          <a:solidFill>
-                            <a:srgbClr val="10161F"/>
-                          </a:solidFill>
-                          <a:latin typeface="Pretendard" pitchFamily="34" charset="0"/>
-                          <a:ea typeface="Pretendard" pitchFamily="34" charset="-122"/>
-                          <a:cs typeface="Pretendard" pitchFamily="34" charset="-120"/>
-                        </a:rPr>
-                        <a:t>타겟</a:t>
-                      </a:r>
-                      <a:endParaRPr lang="en-US" sz="1300" dirty="0">
-                        <a:latin typeface="Pretendard" charset="0"/>
-                        <a:ea typeface="Pretendard" charset="0"/>
-                        <a:cs typeface="Pretendard" charset="0"/>
-                      </a:endParaRPr>
-                    </a:p>
-                  </a:txBody>
-                  <a:tcPr marL="50800" marR="50800" marT="25400" marB="25400" anchor="ctr">
-                    <a:lnL w="3810" cap="flat" cmpd="sng" algn="ctr">
-                      <a:solidFill>
-                        <a:srgbClr val="CBD5E0"/>
-                      </a:solidFill>
-                      <a:prstDash val="solid"/>
-                      <a:round/>
-                      <a:headEnd type="none" w="med" len="med"/>
-                      <a:tailEnd type="none" w="med" len="med"/>
-                    </a:lnL>
-                    <a:lnR w="3810" cap="flat" cmpd="sng" algn="ctr">
-                      <a:solidFill>
-                        <a:srgbClr val="CBD5E0"/>
-                      </a:solidFill>
-                      <a:prstDash val="solid"/>
-                      <a:round/>
-                      <a:headEnd type="none" w="med" len="med"/>
-                      <a:tailEnd type="none" w="med" len="med"/>
-                    </a:lnR>
-                    <a:lnT w="3810" cap="flat" cmpd="sng" algn="ctr">
-                      <a:solidFill>
-                        <a:srgbClr val="CBD5E0"/>
-                      </a:solidFill>
-                      <a:prstDash val="solid"/>
-                      <a:round/>
-                      <a:headEnd type="none" w="med" len="med"/>
-                      <a:tailEnd type="none" w="med" len="med"/>
-                    </a:lnT>
-                    <a:lnB w="3810" cap="flat" cmpd="sng" algn="ctr">
-                      <a:solidFill>
-                        <a:srgbClr val="CBD5E0"/>
-                      </a:solidFill>
-                      <a:prstDash val="solid"/>
-                      <a:round/>
-                      <a:headEnd type="none" w="med" len="med"/>
-                      <a:tailEnd type="none" w="med" len="med"/>
-                    </a:lnB>
-                    <a:solidFill>
-                      <a:srgbClr val="FFFFFF"/>
-                    </a:solidFill>
-                  </a:tcPr>
-                </a:tc>
-              </a:tr>
-              <a:tr h="438912">
-                <a:tc>
-                  <a:txBody>
-                    <a:bodyPr/>
-                    <a:lstStyle/>
-                    <a:p>
-                      <a:pPr indent="0" marL="0">
-                        <a:buNone/>
-                      </a:pPr>
-                      <a:r>
-                        <a:rPr lang="en-US" sz="1300" b="1" dirty="0">
-                          <a:solidFill>
-                            <a:srgbClr val="10161F"/>
-                          </a:solidFill>
-                          <a:latin typeface="Pretendard" pitchFamily="34" charset="0"/>
-                          <a:ea typeface="Pretendard" pitchFamily="34" charset="-122"/>
-                          <a:cs typeface="Pretendard" pitchFamily="34" charset="-120"/>
-                        </a:rPr>
-                        <a:t>목표 </a:t>
-                      </a:r>
-                      <a:pPr indent="0" marL="0">
-                        <a:buNone/>
-                      </a:pPr>
-                      <a:r>
-                        <a:rPr lang="en-US" sz="1300" b="1" dirty="0">
-                          <a:solidFill>
-                            <a:srgbClr val="10161F"/>
-                          </a:solidFill>
-                          <a:latin typeface="Pretendard" pitchFamily="34" charset="0"/>
-                          <a:ea typeface="Pretendard" pitchFamily="34" charset="-122"/>
-                          <a:cs typeface="Pretendard" pitchFamily="34" charset="-120"/>
-                        </a:rPr>
-                        <a:t>시세차익</a:t>
-                      </a:r>
-                      <a:endParaRPr lang="en-US" sz="1300" dirty="0">
-                        <a:latin typeface="Pretendard" charset="0"/>
-                        <a:ea typeface="Pretendard" charset="0"/>
-                        <a:cs typeface="Pretendard" charset="0"/>
-                      </a:endParaRPr>
-                    </a:p>
-                  </a:txBody>
-                  <a:tcPr marL="50800" marR="50800" marT="25400" marB="25400" anchor="ctr">
-                    <a:lnL w="3810" cap="flat" cmpd="sng" algn="ctr">
-                      <a:solidFill>
-                        <a:srgbClr val="CBD5E0"/>
-                      </a:solidFill>
-                      <a:prstDash val="solid"/>
-                      <a:round/>
-                      <a:headEnd type="none" w="med" len="med"/>
-                      <a:tailEnd type="none" w="med" len="med"/>
-                    </a:lnL>
-                    <a:lnR w="3810" cap="flat" cmpd="sng" algn="ctr">
-                      <a:solidFill>
-                        <a:srgbClr val="CBD5E0"/>
-                      </a:solidFill>
-                      <a:prstDash val="solid"/>
-                      <a:round/>
-                      <a:headEnd type="none" w="med" len="med"/>
-                      <a:tailEnd type="none" w="med" len="med"/>
-                    </a:lnR>
-                    <a:lnT w="3810" cap="flat" cmpd="sng" algn="ctr">
-                      <a:solidFill>
-                        <a:srgbClr val="CBD5E0"/>
-                      </a:solidFill>
-                      <a:prstDash val="solid"/>
-                      <a:round/>
-                      <a:headEnd type="none" w="med" len="med"/>
-                      <a:tailEnd type="none" w="med" len="med"/>
-                    </a:lnT>
-                    <a:lnB w="3810" cap="flat" cmpd="sng" algn="ctr">
-                      <a:solidFill>
-                        <a:srgbClr val="CBD5E0"/>
-                      </a:solidFill>
-                      <a:prstDash val="solid"/>
-                      <a:round/>
-                      <a:headEnd type="none" w="med" len="med"/>
-                      <a:tailEnd type="none" w="med" len="med"/>
-                    </a:lnB>
-                    <a:solidFill>
-                      <a:srgbClr val="F7FAFC"/>
-                    </a:solidFill>
-                  </a:tcPr>
-                </a:tc>
-                <a:tc>
-                  <a:txBody>
-                    <a:bodyPr/>
-                    <a:lstStyle/>
-                    <a:p>
-                      <a:pPr indent="0" marL="0">
-                        <a:buNone/>
-                      </a:pPr>
-                      <a:r>
-                        <a:rPr lang="en-US" sz="1300" dirty="0">
-                          <a:solidFill>
-                            <a:srgbClr val="10161F"/>
-                          </a:solidFill>
-                          <a:latin typeface="Pretendard" pitchFamily="34" charset="0"/>
-                          <a:ea typeface="Pretendard" pitchFamily="34" charset="-122"/>
-                          <a:cs typeface="Pretendard" pitchFamily="34" charset="-120"/>
-                        </a:rPr>
-                        <a:t>매수 </a:t>
-                      </a:r>
-                      <a:pPr indent="0" marL="0">
-                        <a:buNone/>
-                      </a:pPr>
-                      <a:r>
-                        <a:rPr lang="en-US" sz="1300" dirty="0">
-                          <a:solidFill>
-                            <a:srgbClr val="10161F"/>
-                          </a:solidFill>
-                          <a:latin typeface="Pretendard" pitchFamily="34" charset="0"/>
-                          <a:ea typeface="Pretendard" pitchFamily="34" charset="-122"/>
-                          <a:cs typeface="Pretendard" pitchFamily="34" charset="-120"/>
-                        </a:rPr>
-                        <a:t>희망가 </a:t>
-                      </a:r>
-                      <a:pPr indent="0" marL="0">
-                        <a:buNone/>
-                      </a:pPr>
-                      <a:r>
-                        <a:rPr lang="en-US" sz="1300" dirty="0">
-                          <a:solidFill>
-                            <a:srgbClr val="10161F"/>
-                          </a:solidFill>
-                          <a:latin typeface="Pretendard" pitchFamily="34" charset="0"/>
-                          <a:ea typeface="Pretendard" pitchFamily="34" charset="-122"/>
-                          <a:cs typeface="Pretendard" pitchFamily="34" charset="-120"/>
-                        </a:rPr>
-                        <a:t>대비 </a:t>
-                      </a:r>
-                      <a:pPr indent="0" marL="0">
-                        <a:buNone/>
-                      </a:pPr>
-                      <a:r>
-                        <a:rPr lang="en-US" sz="1300" dirty="0">
-                          <a:solidFill>
-                            <a:srgbClr val="10161F"/>
-                          </a:solidFill>
-                          <a:latin typeface="Pretendard" pitchFamily="34" charset="0"/>
-                          <a:ea typeface="Pretendard" pitchFamily="34" charset="-122"/>
-                          <a:cs typeface="Pretendard" pitchFamily="34" charset="-120"/>
-                        </a:rPr>
-                        <a:t>갭</a:t>
-                      </a:r>
-                      <a:endParaRPr lang="en-US" sz="1300" dirty="0">
-                        <a:latin typeface="Pretendard" charset="0"/>
-                        <a:ea typeface="Pretendard" charset="0"/>
-                        <a:cs typeface="Pretendard" charset="0"/>
-                      </a:endParaRPr>
-                    </a:p>
-                  </a:txBody>
-                  <a:tcPr marL="50800" marR="50800" marT="25400" marB="25400" anchor="ctr">
-                    <a:lnL w="3810" cap="flat" cmpd="sng" algn="ctr">
-                      <a:solidFill>
-                        <a:srgbClr val="CBD5E0"/>
-                      </a:solidFill>
-                      <a:prstDash val="solid"/>
-                      <a:round/>
-                      <a:headEnd type="none" w="med" len="med"/>
-                      <a:tailEnd type="none" w="med" len="med"/>
-                    </a:lnL>
-                    <a:lnR w="3810" cap="flat" cmpd="sng" algn="ctr">
-                      <a:solidFill>
-                        <a:srgbClr val="CBD5E0"/>
-                      </a:solidFill>
-                      <a:prstDash val="solid"/>
-                      <a:round/>
-                      <a:headEnd type="none" w="med" len="med"/>
-                      <a:tailEnd type="none" w="med" len="med"/>
-                    </a:lnR>
-                    <a:lnT w="3810" cap="flat" cmpd="sng" algn="ctr">
-                      <a:solidFill>
-                        <a:srgbClr val="CBD5E0"/>
-                      </a:solidFill>
-                      <a:prstDash val="solid"/>
-                      <a:round/>
-                      <a:headEnd type="none" w="med" len="med"/>
-                      <a:tailEnd type="none" w="med" len="med"/>
-                    </a:lnT>
-                    <a:lnB w="3810" cap="flat" cmpd="sng" algn="ctr">
-                      <a:solidFill>
-                        <a:srgbClr val="CBD5E0"/>
-                      </a:solidFill>
-                      <a:prstDash val="solid"/>
-                      <a:round/>
-                      <a:headEnd type="none" w="med" len="med"/>
-                      <a:tailEnd type="none" w="med" len="med"/>
-                    </a:lnB>
-                    <a:solidFill>
-                      <a:srgbClr val="F7FAFC"/>
-                    </a:solidFill>
-                  </a:tcPr>
-                </a:tc>
-                <a:tc>
-                  <a:txBody>
-                    <a:bodyPr/>
-                    <a:lstStyle/>
-                    <a:p>
-                      <a:pPr indent="0" marL="0">
-                        <a:buNone/>
-                      </a:pPr>
-                      <a:r>
-                        <a:rPr lang="en-US" sz="1300" dirty="0">
-                          <a:solidFill>
-                            <a:srgbClr val="10161F"/>
-                          </a:solidFill>
-                          <a:latin typeface="Pretendard" pitchFamily="34" charset="0"/>
-                          <a:ea typeface="Pretendard" pitchFamily="34" charset="-122"/>
-                          <a:cs typeface="Pretendard" pitchFamily="34" charset="-120"/>
-                        </a:rPr>
-                        <a:t>자본 </a:t>
-                      </a:r>
-                      <a:pPr indent="0" marL="0">
-                        <a:buNone/>
-                      </a:pPr>
-                      <a:r>
-                        <a:rPr lang="en-US" sz="1300" dirty="0">
-                          <a:solidFill>
-                            <a:srgbClr val="10161F"/>
-                          </a:solidFill>
-                          <a:latin typeface="Pretendard" pitchFamily="34" charset="0"/>
-                          <a:ea typeface="Pretendard" pitchFamily="34" charset="-122"/>
-                          <a:cs typeface="Pretendard" pitchFamily="34" charset="-120"/>
-                        </a:rPr>
-                        <a:t>이득</a:t>
-                      </a:r>
-                      <a:endParaRPr lang="en-US" sz="1300" dirty="0">
-                        <a:latin typeface="Pretendard" charset="0"/>
-                        <a:ea typeface="Pretendard" charset="0"/>
-                        <a:cs typeface="Pretendard" charset="0"/>
-                      </a:endParaRPr>
-                    </a:p>
-                  </a:txBody>
-                  <a:tcPr marL="50800" marR="50800" marT="25400" marB="25400" anchor="ctr">
-                    <a:lnL w="3810" cap="flat" cmpd="sng" algn="ctr">
-                      <a:solidFill>
-                        <a:srgbClr val="CBD5E0"/>
-                      </a:solidFill>
-                      <a:prstDash val="solid"/>
-                      <a:round/>
-                      <a:headEnd type="none" w="med" len="med"/>
-                      <a:tailEnd type="none" w="med" len="med"/>
-                    </a:lnL>
-                    <a:lnR w="3810" cap="flat" cmpd="sng" algn="ctr">
-                      <a:solidFill>
-                        <a:srgbClr val="CBD5E0"/>
-                      </a:solidFill>
-                      <a:prstDash val="solid"/>
-                      <a:round/>
-                      <a:headEnd type="none" w="med" len="med"/>
-                      <a:tailEnd type="none" w="med" len="med"/>
-                    </a:lnR>
-                    <a:lnT w="3810" cap="flat" cmpd="sng" algn="ctr">
-                      <a:solidFill>
-                        <a:srgbClr val="CBD5E0"/>
-                      </a:solidFill>
-                      <a:prstDash val="solid"/>
-                      <a:round/>
-                      <a:headEnd type="none" w="med" len="med"/>
-                      <a:tailEnd type="none" w="med" len="med"/>
-                    </a:lnT>
-                    <a:lnB w="3810" cap="flat" cmpd="sng" algn="ctr">
-                      <a:solidFill>
-                        <a:srgbClr val="CBD5E0"/>
-                      </a:solidFill>
-                      <a:prstDash val="solid"/>
-                      <a:round/>
-                      <a:headEnd type="none" w="med" len="med"/>
-                      <a:tailEnd type="none" w="med" len="med"/>
-                    </a:lnB>
-                    <a:solidFill>
-                      <a:srgbClr val="F7FAFC"/>
-                    </a:solidFill>
-                  </a:tcPr>
-                </a:tc>
-              </a:tr>
-              <a:tr h="438912">
-                <a:tc>
-                  <a:txBody>
-                    <a:bodyPr/>
-                    <a:lstStyle/>
-                    <a:p>
-                      <a:pPr indent="0" marL="0">
-                        <a:buNone/>
-                      </a:pPr>
-                      <a:r>
-                        <a:rPr lang="en-US" sz="1300" b="1" dirty="0">
-                          <a:solidFill>
-                            <a:srgbClr val="10161F"/>
-                          </a:solidFill>
-                          <a:latin typeface="Pretendard" pitchFamily="34" charset="0"/>
-                          <a:ea typeface="Pretendard" pitchFamily="34" charset="-122"/>
-                          <a:cs typeface="Pretendard" pitchFamily="34" charset="-120"/>
-                        </a:rPr>
-                        <a:t>목표 </a:t>
-                      </a:r>
-                      <a:pPr indent="0" marL="0">
-                        <a:buNone/>
-                      </a:pPr>
-                      <a:r>
-                        <a:rPr lang="en-US" sz="1300" b="1" dirty="0">
-                          <a:solidFill>
-                            <a:srgbClr val="10161F"/>
-                          </a:solidFill>
-                          <a:latin typeface="Pretendard" pitchFamily="34" charset="0"/>
-                          <a:ea typeface="Pretendard" pitchFamily="34" charset="-122"/>
-                          <a:cs typeface="Pretendard" pitchFamily="34" charset="-120"/>
-                        </a:rPr>
-                        <a:t>보유기간 </a:t>
-                      </a:r>
-                      <a:pPr indent="0" marL="0">
-                        <a:buNone/>
-                      </a:pPr>
-                      <a:r>
-                        <a:rPr lang="en-US" sz="1300" b="1" dirty="0">
-                          <a:solidFill>
-                            <a:srgbClr val="10161F"/>
-                          </a:solidFill>
-                          <a:latin typeface="Pretendard" pitchFamily="34" charset="0"/>
-                          <a:ea typeface="Pretendard" pitchFamily="34" charset="-122"/>
-                          <a:cs typeface="Pretendard" pitchFamily="34" charset="-120"/>
-                        </a:rPr>
-                        <a:t>수익률 </a:t>
-                      </a:r>
-                      <a:pPr indent="0" marL="0">
-                        <a:buNone/>
-                      </a:pPr>
-                      <a:r>
-                        <a:rPr lang="en-US" sz="1300" b="1" dirty="0">
-                          <a:solidFill>
-                            <a:srgbClr val="10161F"/>
-                          </a:solidFill>
-                          <a:latin typeface="Pretendard" pitchFamily="34" charset="0"/>
-                          <a:ea typeface="Pretendard" pitchFamily="34" charset="-122"/>
-                          <a:cs typeface="Pretendard" pitchFamily="34" charset="-120"/>
-                        </a:rPr>
-                        <a:t>(HPR)</a:t>
-                      </a:r>
-                      <a:endParaRPr lang="en-US" sz="1300" dirty="0">
-                        <a:latin typeface="Pretendard" charset="0"/>
-                        <a:ea typeface="Pretendard" charset="0"/>
-                        <a:cs typeface="Pretendard" charset="0"/>
-                      </a:endParaRPr>
-                    </a:p>
-                  </a:txBody>
-                  <a:tcPr marL="50800" marR="50800" marT="25400" marB="25400" anchor="ctr">
-                    <a:lnL w="3810" cap="flat" cmpd="sng" algn="ctr">
-                      <a:solidFill>
-                        <a:srgbClr val="CBD5E0"/>
-                      </a:solidFill>
-                      <a:prstDash val="solid"/>
-                      <a:round/>
-                      <a:headEnd type="none" w="med" len="med"/>
-                      <a:tailEnd type="none" w="med" len="med"/>
-                    </a:lnL>
-                    <a:lnR w="3810" cap="flat" cmpd="sng" algn="ctr">
-                      <a:solidFill>
-                        <a:srgbClr val="CBD5E0"/>
-                      </a:solidFill>
-                      <a:prstDash val="solid"/>
-                      <a:round/>
-                      <a:headEnd type="none" w="med" len="med"/>
-                      <a:tailEnd type="none" w="med" len="med"/>
-                    </a:lnR>
-                    <a:lnT w="3810" cap="flat" cmpd="sng" algn="ctr">
-                      <a:solidFill>
-                        <a:srgbClr val="CBD5E0"/>
-                      </a:solidFill>
-                      <a:prstDash val="solid"/>
-                      <a:round/>
-                      <a:headEnd type="none" w="med" len="med"/>
-                      <a:tailEnd type="none" w="med" len="med"/>
-                    </a:lnT>
-                    <a:lnB w="3810" cap="flat" cmpd="sng" algn="ctr">
-                      <a:solidFill>
-                        <a:srgbClr val="CBD5E0"/>
-                      </a:solidFill>
-                      <a:prstDash val="solid"/>
-                      <a:round/>
-                      <a:headEnd type="none" w="med" len="med"/>
-                      <a:tailEnd type="none" w="med" len="med"/>
-                    </a:lnB>
-                    <a:solidFill>
-                      <a:srgbClr val="FFFFFF"/>
-                    </a:solidFill>
-                  </a:tcPr>
-                </a:tc>
-                <a:tc>
-                  <a:txBody>
-                    <a:bodyPr/>
-                    <a:lstStyle/>
-                    <a:p>
-                      <a:pPr indent="0" marL="0">
-                        <a:buNone/>
-                      </a:pPr>
-                      <a:r>
-                        <a:rPr lang="en-US" sz="1300" dirty="0">
-                          <a:solidFill>
-                            <a:srgbClr val="10161F"/>
-                          </a:solidFill>
-                          <a:latin typeface="Pretendard" pitchFamily="34" charset="0"/>
-                          <a:ea typeface="Pretendard" pitchFamily="34" charset="-122"/>
-                          <a:cs typeface="Pretendard" pitchFamily="34" charset="-120"/>
-                        </a:rPr>
-                        <a:t>10% </a:t>
-                      </a:r>
-                      <a:pPr indent="0" marL="0">
-                        <a:buNone/>
-                      </a:pPr>
-                      <a:r>
-                        <a:rPr lang="en-US" sz="1300" dirty="0">
-                          <a:solidFill>
-                            <a:srgbClr val="10161F"/>
-                          </a:solidFill>
-                          <a:latin typeface="Pretendard" pitchFamily="34" charset="0"/>
-                          <a:ea typeface="Pretendard" pitchFamily="34" charset="-122"/>
-                          <a:cs typeface="Pretendard" pitchFamily="34" charset="-120"/>
-                        </a:rPr>
-                        <a:t>~ </a:t>
-                      </a:r>
-                      <a:pPr indent="0" marL="0">
-                        <a:buNone/>
-                      </a:pPr>
-                      <a:r>
-                        <a:rPr lang="en-US" sz="1300" dirty="0">
-                          <a:solidFill>
-                            <a:srgbClr val="10161F"/>
-                          </a:solidFill>
-                          <a:latin typeface="Pretendard" pitchFamily="34" charset="0"/>
-                          <a:ea typeface="Pretendard" pitchFamily="34" charset="-122"/>
-                          <a:cs typeface="Pretendard" pitchFamily="34" charset="-120"/>
-                        </a:rPr>
-                        <a:t>20%</a:t>
-                      </a:r>
-                      <a:endParaRPr lang="en-US" sz="1300" dirty="0">
-                        <a:latin typeface="Pretendard" charset="0"/>
-                        <a:ea typeface="Pretendard" charset="0"/>
-                        <a:cs typeface="Pretendard" charset="0"/>
-                      </a:endParaRPr>
-                    </a:p>
-                  </a:txBody>
-                  <a:tcPr marL="50800" marR="50800" marT="25400" marB="25400" anchor="ctr">
-                    <a:lnL w="3810" cap="flat" cmpd="sng" algn="ctr">
-                      <a:solidFill>
-                        <a:srgbClr val="CBD5E0"/>
-                      </a:solidFill>
-                      <a:prstDash val="solid"/>
-                      <a:round/>
-                      <a:headEnd type="none" w="med" len="med"/>
-                      <a:tailEnd type="none" w="med" len="med"/>
-                    </a:lnL>
-                    <a:lnR w="3810" cap="flat" cmpd="sng" algn="ctr">
-                      <a:solidFill>
-                        <a:srgbClr val="CBD5E0"/>
-                      </a:solidFill>
-                      <a:prstDash val="solid"/>
-                      <a:round/>
-                      <a:headEnd type="none" w="med" len="med"/>
-                      <a:tailEnd type="none" w="med" len="med"/>
-                    </a:lnR>
-                    <a:lnT w="3810" cap="flat" cmpd="sng" algn="ctr">
-                      <a:solidFill>
-                        <a:srgbClr val="CBD5E0"/>
-                      </a:solidFill>
-                      <a:prstDash val="solid"/>
-                      <a:round/>
-                      <a:headEnd type="none" w="med" len="med"/>
-                      <a:tailEnd type="none" w="med" len="med"/>
-                    </a:lnT>
-                    <a:lnB w="3810" cap="flat" cmpd="sng" algn="ctr">
-                      <a:solidFill>
-                        <a:srgbClr val="CBD5E0"/>
-                      </a:solidFill>
-                      <a:prstDash val="solid"/>
-                      <a:round/>
-                      <a:headEnd type="none" w="med" len="med"/>
-                      <a:tailEnd type="none" w="med" len="med"/>
-                    </a:lnB>
-                    <a:solidFill>
-                      <a:srgbClr val="FFFFFF"/>
-                    </a:solidFill>
-                  </a:tcPr>
-                </a:tc>
-                <a:tc>
-                  <a:txBody>
-                    <a:bodyPr/>
-                    <a:lstStyle/>
-                    <a:p>
-                      <a:pPr indent="0" marL="0">
-                        <a:buNone/>
-                      </a:pPr>
-                      <a:r>
-                        <a:rPr lang="en-US" sz="1300" dirty="0">
-                          <a:solidFill>
-                            <a:srgbClr val="10161F"/>
-                          </a:solidFill>
-                          <a:latin typeface="Pretendard" pitchFamily="34" charset="0"/>
-                          <a:ea typeface="Pretendard" pitchFamily="34" charset="-122"/>
-                          <a:cs typeface="Pretendard" pitchFamily="34" charset="-120"/>
-                        </a:rPr>
-                        <a:t>보유 </a:t>
-                      </a:r>
-                      <a:pPr indent="0" marL="0">
-                        <a:buNone/>
-                      </a:pPr>
-                      <a:r>
-                        <a:rPr lang="en-US" sz="1300" dirty="0">
-                          <a:solidFill>
-                            <a:srgbClr val="10161F"/>
-                          </a:solidFill>
-                          <a:latin typeface="Pretendard" pitchFamily="34" charset="0"/>
-                          <a:ea typeface="Pretendard" pitchFamily="34" charset="-122"/>
-                          <a:cs typeface="Pretendard" pitchFamily="34" charset="-120"/>
-                        </a:rPr>
-                        <a:t>기간 </a:t>
-                      </a:r>
-                      <a:pPr indent="0" marL="0">
-                        <a:buNone/>
-                      </a:pPr>
-                      <a:r>
-                        <a:rPr lang="en-US" sz="1300" dirty="0">
-                          <a:solidFill>
-                            <a:srgbClr val="10161F"/>
-                          </a:solidFill>
-                          <a:latin typeface="Pretendard" pitchFamily="34" charset="0"/>
-                          <a:ea typeface="Pretendard" pitchFamily="34" charset="-122"/>
-                          <a:cs typeface="Pretendard" pitchFamily="34" charset="-120"/>
-                        </a:rPr>
-                        <a:t>2~3년 </a:t>
-                      </a:r>
-                      <a:pPr indent="0" marL="0">
-                        <a:buNone/>
-                      </a:pPr>
-                      <a:r>
-                        <a:rPr lang="en-US" sz="1300" dirty="0">
-                          <a:solidFill>
-                            <a:srgbClr val="10161F"/>
-                          </a:solidFill>
-                          <a:latin typeface="Pretendard" pitchFamily="34" charset="0"/>
-                          <a:ea typeface="Pretendard" pitchFamily="34" charset="-122"/>
-                          <a:cs typeface="Pretendard" pitchFamily="34" charset="-120"/>
-                        </a:rPr>
-                        <a:t>가정</a:t>
-                      </a:r>
-                      <a:endParaRPr lang="en-US" sz="1300" dirty="0">
-                        <a:latin typeface="Pretendard" charset="0"/>
-                        <a:ea typeface="Pretendard" charset="0"/>
-                        <a:cs typeface="Pretendard" charset="0"/>
-                      </a:endParaRPr>
-                    </a:p>
-                  </a:txBody>
-                  <a:tcPr marL="50800" marR="50800" marT="25400" marB="25400" anchor="ctr">
-                    <a:lnL w="3810" cap="flat" cmpd="sng" algn="ctr">
-                      <a:solidFill>
-                        <a:srgbClr val="CBD5E0"/>
-                      </a:solidFill>
-                      <a:prstDash val="solid"/>
-                      <a:round/>
-                      <a:headEnd type="none" w="med" len="med"/>
-                      <a:tailEnd type="none" w="med" len="med"/>
-                    </a:lnL>
-                    <a:lnR w="3810" cap="flat" cmpd="sng" algn="ctr">
-                      <a:solidFill>
-                        <a:srgbClr val="CBD5E0"/>
-                      </a:solidFill>
-                      <a:prstDash val="solid"/>
-                      <a:round/>
-                      <a:headEnd type="none" w="med" len="med"/>
-                      <a:tailEnd type="none" w="med" len="med"/>
-                    </a:lnR>
-                    <a:lnT w="3810" cap="flat" cmpd="sng" algn="ctr">
-                      <a:solidFill>
-                        <a:srgbClr val="CBD5E0"/>
-                      </a:solidFill>
-                      <a:prstDash val="solid"/>
-                      <a:round/>
-                      <a:headEnd type="none" w="med" len="med"/>
-                      <a:tailEnd type="none" w="med" len="med"/>
-                    </a:lnT>
-                    <a:lnB w="3810" cap="flat" cmpd="sng" algn="ctr">
-                      <a:solidFill>
-                        <a:srgbClr val="CBD5E0"/>
-                      </a:solidFill>
-                      <a:prstDash val="solid"/>
-                      <a:round/>
-                      <a:headEnd type="none" w="med" len="med"/>
-                      <a:tailEnd type="none" w="med" len="med"/>
-                    </a:lnB>
-                    <a:solidFill>
-                      <a:srgbClr val="FFFFFF"/>
-                    </a:solidFill>
-                  </a:tcPr>
-                </a:tc>
-              </a:tr>
-            </a:tbl>
-          </a:graphicData>
-        </a:graphic>
-      </p:graphicFrame>
-      <p:sp>
-        <p:nvSpPr>
-          <p:cNvPr id="7" name="Text 4"/>
-          <p:cNvSpPr/>
-          <p:nvPr/>
-        </p:nvSpPr>
-        <p:spPr>
-          <a:xfrm>
-            <a:off x="566928" y="3493008"/>
-            <a:ext cx="11057839" cy="384048"/>
+      <p:sp>
+        <p:nvSpPr>
+          <p:cNvPr id="6" name="Text 4"/>
+          <p:cNvSpPr/>
+          <p:nvPr/>
+        </p:nvSpPr>
+        <p:spPr>
+          <a:xfrm>
+            <a:off x="566928" y="1645920"/>
+            <a:ext cx="4201979" cy="402336"/>
           </a:xfrm>
           <a:prstGeom prst="rect">
             <a:avLst/>
@@ -8942,35 +6554,35 @@
           <a:p>
             <a:pPr indent="0" marL="0">
               <a:lnSpc>
-                <a:spcPct val="125000"/>
+                <a:spcPct val="120000"/>
               </a:lnSpc>
               <a:buNone/>
             </a:pPr>
             <a:r>
-              <a:rPr lang="en-US" sz="780" dirty="0">
-                <a:solidFill>
-                  <a:srgbClr val="A0AEC0"/>
+              <a:rPr lang="en-US" sz="1400" dirty="0">
+                <a:solidFill>
+                  <a:srgbClr val="718096"/>
                 </a:solidFill>
                 <a:latin typeface="Pretendard" pitchFamily="34" charset="0"/>
                 <a:ea typeface="Pretendard" pitchFamily="34" charset="-122"/>
                 <a:cs typeface="Pretendard" pitchFamily="34" charset="-120"/>
               </a:rPr>
-              <a:t>[참고] 리모델링 또는 밸류업 후 단기 매각(Trading)을 통한 Capital Gain 실현 시나리오입니다.</a:t>
-            </a:r>
-            <a:endParaRPr lang="en-US" sz="780" dirty="0"/>
-          </a:p>
-        </p:txBody>
-      </p:sp>
-      <p:sp>
-        <p:nvSpPr>
-          <p:cNvPr id="8" name="Text 5"/>
-          <p:cNvSpPr/>
-          <p:nvPr/>
-        </p:nvSpPr>
-        <p:spPr>
-          <a:xfrm>
-            <a:off x="566928" y="6382512"/>
-            <a:ext cx="7315200" cy="219456"/>
+              <a:t>{"ok"</a:t>
+            </a:r>
+            <a:endParaRPr lang="en-US" sz="1400" dirty="0"/>
+          </a:p>
+        </p:txBody>
+      </p:sp>
+      <p:sp>
+        <p:nvSpPr>
+          <p:cNvPr id="7" name="Text 5"/>
+          <p:cNvSpPr/>
+          <p:nvPr/>
+        </p:nvSpPr>
+        <p:spPr>
+          <a:xfrm>
+            <a:off x="4768907" y="1645920"/>
+            <a:ext cx="6855860" cy="402336"/>
           </a:xfrm>
           <a:prstGeom prst="rect">
             <a:avLst/>
@@ -8983,17 +6595,59 @@
           <a:lstStyle/>
           <a:p>
             <a:pPr indent="0" marL="0">
-              <a:buNone/>
-            </a:pPr>
-            <a:r>
-              <a:rPr lang="en-US" sz="800" dirty="0">
-                <a:solidFill>
-                  <a:srgbClr val="718096"/>
+              <a:lnSpc>
+                <a:spcPct val="120000"/>
+              </a:lnSpc>
+              <a:buNone/>
+            </a:pPr>
+            <a:r>
+              <a:rPr lang="en-US" sz="1400" b="1" dirty="0">
+                <a:solidFill>
+                  <a:srgbClr val="10161F"/>
                 </a:solidFill>
                 <a:latin typeface="Pretendard" pitchFamily="34" charset="0"/>
                 <a:ea typeface="Pretendard" pitchFamily="34" charset="-122"/>
                 <a:cs typeface="Pretendard" pitchFamily="34" charset="-120"/>
               </a:rPr>
+              <a:t>true,"mocked":true,"extractedFields":{"area_signal":"역삼","asset_type":"오피스빌딩","price_band":"300억","size_signal":"3000평(약 9917.4㎡)"},"extractedFacts":{"region":"역삼","exactAddressCandidate":"역삼동 742-1","assetType":"오피스빌딩","priceText":"300억","sizeText":"3000평(약 9917.4㎡)","currentUse":"오피스","currentUseSignal":"근린생활시설","leaseSignal":"임대중","vacancySignal":"공실없음","tenantNames":"쿠팡","네이버","unitRentTexts":"301호: 1500만","sellerMotivationText":"자산 효율화","brokerNotes":"초역세권 매물"},"detectedSensitiveFields":"exact_address","tenant_name","ambiguousFields":,"warnings":,"areaSignal":"역삼","assetType":"오피스빌딩","priceBand":"300억","sizeSignal":"3000평(약 9917.4㎡)","dealType":"매각","buildingName":"역삼 센트럴타워","exactAddress":"역삼동 742-1","totalFloorArea":9917.3,"buildYear":2015,"currentUseSignal":"근린생활시설","vacancySignal":"공실 없음","fitSummary":"초역세권 근생 빌딩으로 시행/사옥 매입에 최적화","cautionSummary":"주요 임차인 만기 조율 필요","hiddenFields":"exact_address","seller_motivation","confidence":{"areaSignal":"confirmed","assetType":"confirmed","priceBand":"ai_hypothesis","fitSummary":"ai_hypothesis"},"missingData":"sizeSignal","boundaryNote":"본 자료는 실거래 통계 기반 참고치입니다.","buyerType":"법인 사옥형","budgetRange":{"min":50,"max":80,"display":"50억~80억"},"preferredRegions":"강남","성수","assetTypes":"꼬마빌딩","사옥용","purchasePurpose":"사옥용 매입","mustHave":"초역세권","주차","niceToHave":"테라스","루프탑","riskTolerance":"medium","financingNote":"자본금 50% 준비","missingQuestions":"구체적인 입주 시기가 언제인가요?","선호하는 수익률이 있나요?","privacyNotes":"연락처 비공개","fitReasons":"매수자 예산(50-80억)에 부합하는 매물입니다.","요청하신 성수/강남 권역에 해당합니다.","cautionReasons":"요청한 용도와 달리 명도 협의가 다소 필요합니다.","recommendedNextAction":"현장 답사 제안","kakaoMessage":"안녕하세요! 요청하신 조건에 부합하는 추천 매물이 있어 안내해 드립니다. 확인해보시고 피드백 부탁드립니다.","title":"강남 역삼역 초역세권 오피스 사옥용 빌딩 매각","shortSummary":"역삼역 도보 5분 거리의 준신축급 대형 오피스빌딩입니다.","dealPoints":"초역세권","사옥 최적","cautionPoints":"명도 조율 필요","hiddenInfoNotice":"보증금 및 지번은 인가 후 확인 가능","gateMessage":"G1 등급 등록이 필요합니다.","kakaoText":"강남 역삼역 오피스 빌딩 매각 안내입니다.","exactUnitCandidate":"101호","floor":"1층","areaSqmText":"150㎡","spaceType":"office","depositText":"5000만","monthlyRentText":"400만","maintenanceFeeText":"50만","availableFromText":"즉시입주","leaseTermMonthsText":"24","incentivesText":"렌트프리 2개월","restrictions":,"landlordIdentity":"김성수","currentTenant":"스타트업","vacancyReason":"이전 확장","rentNegotiation":"협의 가능","region":"성수동","areaSqm":150,"deposit":5000,"monthlyRent":400,"maintenanceFee":50,"availableFrom":"즉시입주","leaseTermMonths":24,"incentives":{"rentFreeMonths":2,"interiorSupport":"일부 인테리어 지원","freeRentDetail":"렌트프리 2개월 지원"},"shortSummaryLease":"성수역 도보 5분 거리 1층 리테일 상가 매물입니다."}</a:t>
+            </a:r>
+            <a:endParaRPr lang="en-US" sz="1400" dirty="0"/>
+          </a:p>
+        </p:txBody>
+      </p:sp>
+      <p:sp>
+        <p:nvSpPr>
+          <p:cNvPr id="8" name="Text 6"/>
+          <p:cNvSpPr/>
+          <p:nvPr/>
+        </p:nvSpPr>
+        <p:spPr>
+          <a:xfrm>
+            <a:off x="566928" y="6382512"/>
+            <a:ext cx="7315200" cy="219456"/>
+          </a:xfrm>
+          <a:prstGeom prst="rect">
+            <a:avLst/>
+          </a:prstGeom>
+          <a:noFill/>
+          <a:ln/>
+        </p:spPr>
+        <p:txBody>
+          <a:bodyPr wrap="square" lIns="0" tIns="0" rIns="0" bIns="0" rtlCol="0" anchor="ctr"/>
+          <a:lstStyle/>
+          <a:p>
+            <a:pPr indent="0" marL="0">
+              <a:buNone/>
+            </a:pPr>
+            <a:r>
+              <a:rPr lang="en-US" sz="800" dirty="0">
+                <a:solidFill>
+                  <a:srgbClr val="718096"/>
+                </a:solidFill>
+                <a:latin typeface="Pretendard" pitchFamily="34" charset="0"/>
+                <a:ea typeface="Pretendard" pitchFamily="34" charset="-122"/>
+                <a:cs typeface="Pretendard" pitchFamily="34" charset="-120"/>
+              </a:rPr>
               <a:t>크리딜   |   </a:t>
             </a:r>
             <a:endParaRPr lang="en-US" sz="800" dirty="0"/>
@@ -9002,7 +6656,7 @@
       </p:sp>
       <p:sp>
         <p:nvSpPr>
-          <p:cNvPr id="9" name="Text 6"/>
+          <p:cNvPr id="9" name="Text 7"/>
           <p:cNvSpPr/>
           <p:nvPr/>
         </p:nvSpPr>
@@ -9695,53 +7349,14 @@
       </p:sp>
       <p:sp>
         <p:nvSpPr>
-          <p:cNvPr id="6" name="Text 4"/>
-          <p:cNvSpPr/>
-          <p:nvPr/>
-        </p:nvSpPr>
-        <p:spPr>
-          <a:xfrm>
-            <a:off x="1133856" y="1005840"/>
-            <a:ext cx="10490911" cy="237744"/>
-          </a:xfrm>
-          <a:prstGeom prst="rect">
-            <a:avLst/>
-          </a:prstGeom>
-          <a:noFill/>
-          <a:ln/>
-        </p:spPr>
-        <p:txBody>
-          <a:bodyPr wrap="square" lIns="0" tIns="0" rIns="0" bIns="0" rtlCol="0" anchor="ctr"/>
-          <a:lstStyle/>
-          <a:p>
-            <a:pPr indent="0" marL="0">
-              <a:buNone/>
-            </a:pPr>
-            <a:r>
-              <a:rPr lang="en-US" sz="1100" dirty="0">
-                <a:solidFill>
-                  <a:srgbClr val="718096"/>
-                </a:solidFill>
-                <a:latin typeface="Pretendard" pitchFamily="34" charset="0"/>
-                <a:ea typeface="Pretendard" pitchFamily="34" charset="-122"/>
-                <a:cs typeface="Pretendard" pitchFamily="34" charset="-120"/>
-              </a:rPr>
-              <a:t>3대 핵심 투자 포인트 (Investment Highlights)</a:t>
-            </a:r>
-            <a:endParaRPr lang="en-US" sz="1100" dirty="0"/>
-          </a:p>
-        </p:txBody>
-      </p:sp>
-      <p:sp>
-        <p:nvSpPr>
-          <p:cNvPr id="7" name="Shape 5"/>
-          <p:cNvSpPr/>
-          <p:nvPr/>
-        </p:nvSpPr>
-        <p:spPr>
-          <a:xfrm>
-            <a:off x="566928" y="1481328"/>
-            <a:ext cx="3472586" cy="2560320"/>
+          <p:cNvPr id="6" name="Shape 4"/>
+          <p:cNvSpPr/>
+          <p:nvPr/>
+        </p:nvSpPr>
+        <p:spPr>
+          <a:xfrm>
+            <a:off x="566928" y="1325880"/>
+            <a:ext cx="5368900" cy="2560320"/>
           </a:xfrm>
           <a:prstGeom prst="roundRect">
             <a:avLst>
@@ -9761,14 +7376,14 @@
       </p:sp>
       <p:sp>
         <p:nvSpPr>
-          <p:cNvPr id="8" name="Shape 6"/>
-          <p:cNvSpPr/>
-          <p:nvPr/>
-        </p:nvSpPr>
-        <p:spPr>
-          <a:xfrm>
-            <a:off x="566928" y="1481328"/>
-            <a:ext cx="3472586" cy="54864"/>
+          <p:cNvPr id="7" name="Shape 5"/>
+          <p:cNvSpPr/>
+          <p:nvPr/>
+        </p:nvSpPr>
+        <p:spPr>
+          <a:xfrm>
+            <a:off x="566928" y="1325880"/>
+            <a:ext cx="5368900" cy="54864"/>
           </a:xfrm>
           <a:prstGeom prst="rect">
             <a:avLst/>
@@ -9781,13 +7396,13 @@
       </p:sp>
       <p:sp>
         <p:nvSpPr>
-          <p:cNvPr id="9" name="Shape 7"/>
-          <p:cNvSpPr/>
-          <p:nvPr/>
-        </p:nvSpPr>
-        <p:spPr>
-          <a:xfrm>
-            <a:off x="795528" y="1755648"/>
+          <p:cNvPr id="8" name="Shape 6"/>
+          <p:cNvSpPr/>
+          <p:nvPr/>
+        </p:nvSpPr>
+        <p:spPr>
+          <a:xfrm>
+            <a:off x="795528" y="1600200"/>
             <a:ext cx="475488" cy="292608"/>
           </a:xfrm>
           <a:prstGeom prst="roundRect">
@@ -9803,13 +7418,13 @@
       </p:sp>
       <p:sp>
         <p:nvSpPr>
-          <p:cNvPr id="10" name="Text 8"/>
-          <p:cNvSpPr/>
-          <p:nvPr/>
-        </p:nvSpPr>
-        <p:spPr>
-          <a:xfrm>
-            <a:off x="795528" y="1755648"/>
+          <p:cNvPr id="9" name="Text 7"/>
+          <p:cNvSpPr/>
+          <p:nvPr/>
+        </p:nvSpPr>
+        <p:spPr>
+          <a:xfrm>
+            <a:off x="795528" y="1600200"/>
             <a:ext cx="475488" cy="292608"/>
           </a:xfrm>
           <a:prstGeom prst="rect">
@@ -9842,14 +7457,14 @@
       </p:sp>
       <p:sp>
         <p:nvSpPr>
-          <p:cNvPr id="11" name="Text 9"/>
-          <p:cNvSpPr/>
-          <p:nvPr/>
-        </p:nvSpPr>
-        <p:spPr>
-          <a:xfrm>
-            <a:off x="795528" y="2194560"/>
-            <a:ext cx="3015386" cy="365760"/>
+          <p:cNvPr id="10" name="Text 8"/>
+          <p:cNvSpPr/>
+          <p:nvPr/>
+        </p:nvSpPr>
+        <p:spPr>
+          <a:xfrm>
+            <a:off x="795528" y="2039112"/>
+            <a:ext cx="4911700" cy="365760"/>
           </a:xfrm>
           <a:prstGeom prst="rect">
             <a:avLst/>
@@ -9873,7 +7488,7 @@
                 <a:ea typeface="Pretendard" pitchFamily="34" charset="-122"/>
                 <a:cs typeface="Pretendard" pitchFamily="34" charset="-120"/>
               </a:rPr>
-              <a:t>원금 안전판 확보</a:t>
+              <a:t>확실한 월 현금흐름</a:t>
             </a:r>
             <a:endParaRPr lang="en-US" sz="1500" dirty="0"/>
           </a:p>
@@ -9881,14 +7496,14 @@
       </p:sp>
       <p:sp>
         <p:nvSpPr>
-          <p:cNvPr id="12" name="Shape 10"/>
-          <p:cNvSpPr/>
-          <p:nvPr/>
-        </p:nvSpPr>
-        <p:spPr>
-          <a:xfrm>
-            <a:off x="795528" y="2624328"/>
-            <a:ext cx="3015386" cy="0"/>
+          <p:cNvPr id="11" name="Shape 9"/>
+          <p:cNvSpPr/>
+          <p:nvPr/>
+        </p:nvSpPr>
+        <p:spPr>
+          <a:xfrm>
+            <a:off x="795528" y="2468880"/>
+            <a:ext cx="4911700" cy="0"/>
           </a:xfrm>
           <a:prstGeom prst="line">
             <a:avLst/>
@@ -9904,14 +7519,14 @@
       </p:sp>
       <p:sp>
         <p:nvSpPr>
-          <p:cNvPr id="13" name="Text 11"/>
-          <p:cNvSpPr/>
-          <p:nvPr/>
-        </p:nvSpPr>
-        <p:spPr>
-          <a:xfrm>
-            <a:off x="795528" y="2779776"/>
-            <a:ext cx="3015386" cy="1051560"/>
+          <p:cNvPr id="12" name="Text 10"/>
+          <p:cNvSpPr/>
+          <p:nvPr/>
+        </p:nvSpPr>
+        <p:spPr>
+          <a:xfrm>
+            <a:off x="795528" y="2624328"/>
+            <a:ext cx="4911700" cy="1051560"/>
           </a:xfrm>
           <a:prstGeom prst="rect">
             <a:avLst/>
@@ -9938,7 +7553,7 @@
                 <a:ea typeface="Pretendard" pitchFamily="34" charset="-122"/>
                 <a:cs typeface="Pretendard" pitchFamily="34" charset="-120"/>
               </a:rPr>
-              <a:t>강남권역의 핵심 입지로, 우량한 대지 지분 가치가 하방 경직성을 강력히 지지합니다.</a:t>
+              <a:t>임대차 현황 및 공실률을 반영한 순영업소득(NOI) 분석은 수익분석 섹션을 참조하시기 바랍니다.</a:t>
             </a:r>
             <a:endParaRPr lang="en-US" sz="1200" dirty="0"/>
           </a:p>
@@ -9946,14 +7561,14 @@
       </p:sp>
       <p:sp>
         <p:nvSpPr>
-          <p:cNvPr id="14" name="Shape 12"/>
-          <p:cNvSpPr/>
-          <p:nvPr/>
-        </p:nvSpPr>
-        <p:spPr>
-          <a:xfrm>
-            <a:off x="4359554" y="1481328"/>
-            <a:ext cx="3472586" cy="2560320"/>
+          <p:cNvPr id="13" name="Shape 11"/>
+          <p:cNvSpPr/>
+          <p:nvPr/>
+        </p:nvSpPr>
+        <p:spPr>
+          <a:xfrm>
+            <a:off x="6255868" y="1325880"/>
+            <a:ext cx="5368900" cy="2560320"/>
           </a:xfrm>
           <a:prstGeom prst="roundRect">
             <a:avLst>
@@ -9973,14 +7588,14 @@
       </p:sp>
       <p:sp>
         <p:nvSpPr>
-          <p:cNvPr id="15" name="Shape 13"/>
-          <p:cNvSpPr/>
-          <p:nvPr/>
-        </p:nvSpPr>
-        <p:spPr>
-          <a:xfrm>
-            <a:off x="4359554" y="1481328"/>
-            <a:ext cx="3472586" cy="54864"/>
+          <p:cNvPr id="14" name="Shape 12"/>
+          <p:cNvSpPr/>
+          <p:nvPr/>
+        </p:nvSpPr>
+        <p:spPr>
+          <a:xfrm>
+            <a:off x="6255868" y="1325880"/>
+            <a:ext cx="5368900" cy="54864"/>
           </a:xfrm>
           <a:prstGeom prst="rect">
             <a:avLst/>
@@ -9993,13 +7608,13 @@
       </p:sp>
       <p:sp>
         <p:nvSpPr>
-          <p:cNvPr id="16" name="Shape 14"/>
-          <p:cNvSpPr/>
-          <p:nvPr/>
-        </p:nvSpPr>
-        <p:spPr>
-          <a:xfrm>
-            <a:off x="4588154" y="1755648"/>
+          <p:cNvPr id="15" name="Shape 13"/>
+          <p:cNvSpPr/>
+          <p:nvPr/>
+        </p:nvSpPr>
+        <p:spPr>
+          <a:xfrm>
+            <a:off x="6484468" y="1600200"/>
             <a:ext cx="475488" cy="292608"/>
           </a:xfrm>
           <a:prstGeom prst="roundRect">
@@ -10015,13 +7630,13 @@
       </p:sp>
       <p:sp>
         <p:nvSpPr>
-          <p:cNvPr id="17" name="Text 15"/>
-          <p:cNvSpPr/>
-          <p:nvPr/>
-        </p:nvSpPr>
-        <p:spPr>
-          <a:xfrm>
-            <a:off x="4588154" y="1755648"/>
+          <p:cNvPr id="16" name="Text 14"/>
+          <p:cNvSpPr/>
+          <p:nvPr/>
+        </p:nvSpPr>
+        <p:spPr>
+          <a:xfrm>
+            <a:off x="6484468" y="1600200"/>
             <a:ext cx="475488" cy="292608"/>
           </a:xfrm>
           <a:prstGeom prst="rect">
@@ -10054,14 +7669,14 @@
       </p:sp>
       <p:sp>
         <p:nvSpPr>
-          <p:cNvPr id="18" name="Text 16"/>
-          <p:cNvSpPr/>
-          <p:nvPr/>
-        </p:nvSpPr>
-        <p:spPr>
-          <a:xfrm>
-            <a:off x="4588154" y="2194560"/>
-            <a:ext cx="3015386" cy="365760"/>
+          <p:cNvPr id="17" name="Text 15"/>
+          <p:cNvSpPr/>
+          <p:nvPr/>
+        </p:nvSpPr>
+        <p:spPr>
+          <a:xfrm>
+            <a:off x="6484468" y="2039112"/>
+            <a:ext cx="4911700" cy="365760"/>
           </a:xfrm>
           <a:prstGeom prst="rect">
             <a:avLst/>
@@ -10085,7 +7700,7 @@
                 <a:ea typeface="Pretendard" pitchFamily="34" charset="-122"/>
                 <a:cs typeface="Pretendard" pitchFamily="34" charset="-120"/>
               </a:rPr>
-              <a:t>확실한 월 현금흐름</a:t>
+              <a:t>가치 상승 및 출구 전략</a:t>
             </a:r>
             <a:endParaRPr lang="en-US" sz="1500" dirty="0"/>
           </a:p>
@@ -10093,14 +7708,14 @@
       </p:sp>
       <p:sp>
         <p:nvSpPr>
-          <p:cNvPr id="19" name="Shape 17"/>
-          <p:cNvSpPr/>
-          <p:nvPr/>
-        </p:nvSpPr>
-        <p:spPr>
-          <a:xfrm>
-            <a:off x="4588154" y="2624328"/>
-            <a:ext cx="3015386" cy="0"/>
+          <p:cNvPr id="18" name="Shape 16"/>
+          <p:cNvSpPr/>
+          <p:nvPr/>
+        </p:nvSpPr>
+        <p:spPr>
+          <a:xfrm>
+            <a:off x="6484468" y="2468880"/>
+            <a:ext cx="4911700" cy="0"/>
           </a:xfrm>
           <a:prstGeom prst="line">
             <a:avLst/>
@@ -10116,14 +7731,14 @@
       </p:sp>
       <p:sp>
         <p:nvSpPr>
-          <p:cNvPr id="20" name="Text 18"/>
-          <p:cNvSpPr/>
-          <p:nvPr/>
-        </p:nvSpPr>
-        <p:spPr>
-          <a:xfrm>
-            <a:off x="4588154" y="2779776"/>
-            <a:ext cx="3015386" cy="1051560"/>
+          <p:cNvPr id="19" name="Text 17"/>
+          <p:cNvSpPr/>
+          <p:nvPr/>
+        </p:nvSpPr>
+        <p:spPr>
+          <a:xfrm>
+            <a:off x="6484468" y="2624328"/>
+            <a:ext cx="4911700" cy="1051560"/>
           </a:xfrm>
           <a:prstGeom prst="rect">
             <a:avLst/>
@@ -10150,219 +7765,7 @@
                 <a:ea typeface="Pretendard" pitchFamily="34" charset="-122"/>
                 <a:cs typeface="Pretendard" pitchFamily="34" charset="-120"/>
               </a:rPr>
-              <a:t>우량 테넌트 만실 운영 및 장기 임대차 구조를 기반으로 매월 안정적인 순영업소득(NOI) 창출이 기대됩니다.</a:t>
-            </a:r>
-            <a:endParaRPr lang="en-US" sz="1200" dirty="0"/>
-          </a:p>
-        </p:txBody>
-      </p:sp>
-      <p:sp>
-        <p:nvSpPr>
-          <p:cNvPr id="21" name="Shape 19"/>
-          <p:cNvSpPr/>
-          <p:nvPr/>
-        </p:nvSpPr>
-        <p:spPr>
-          <a:xfrm>
-            <a:off x="8152181" y="1481328"/>
-            <a:ext cx="3472586" cy="2560320"/>
-          </a:xfrm>
-          <a:prstGeom prst="roundRect">
-            <a:avLst>
-              <a:gd name="adj" fmla="val 2857"/>
-            </a:avLst>
-          </a:prstGeom>
-          <a:solidFill>
-            <a:srgbClr val="F7FAFC"/>
-          </a:solidFill>
-          <a:ln w="10160">
-            <a:solidFill>
-              <a:srgbClr val="CBD5E0"/>
-            </a:solidFill>
-            <a:prstDash val="solid"/>
-          </a:ln>
-        </p:spPr>
-      </p:sp>
-      <p:sp>
-        <p:nvSpPr>
-          <p:cNvPr id="22" name="Shape 20"/>
-          <p:cNvSpPr/>
-          <p:nvPr/>
-        </p:nvSpPr>
-        <p:spPr>
-          <a:xfrm>
-            <a:off x="8152181" y="1481328"/>
-            <a:ext cx="3472586" cy="54864"/>
-          </a:xfrm>
-          <a:prstGeom prst="rect">
-            <a:avLst/>
-          </a:prstGeom>
-          <a:solidFill>
-            <a:srgbClr val="B98A2E"/>
-          </a:solidFill>
-          <a:ln/>
-        </p:spPr>
-      </p:sp>
-      <p:sp>
-        <p:nvSpPr>
-          <p:cNvPr id="23" name="Shape 21"/>
-          <p:cNvSpPr/>
-          <p:nvPr/>
-        </p:nvSpPr>
-        <p:spPr>
-          <a:xfrm>
-            <a:off x="8380781" y="1755648"/>
-            <a:ext cx="475488" cy="292608"/>
-          </a:xfrm>
-          <a:prstGeom prst="roundRect">
-            <a:avLst>
-              <a:gd name="adj" fmla="val 12500"/>
-            </a:avLst>
-          </a:prstGeom>
-          <a:solidFill>
-            <a:srgbClr val="D9B668"/>
-          </a:solidFill>
-          <a:ln/>
-        </p:spPr>
-      </p:sp>
-      <p:sp>
-        <p:nvSpPr>
-          <p:cNvPr id="24" name="Text 22"/>
-          <p:cNvSpPr/>
-          <p:nvPr/>
-        </p:nvSpPr>
-        <p:spPr>
-          <a:xfrm>
-            <a:off x="8380781" y="1755648"/>
-            <a:ext cx="475488" cy="292608"/>
-          </a:xfrm>
-          <a:prstGeom prst="rect">
-            <a:avLst/>
-          </a:prstGeom>
-          <a:noFill/>
-          <a:ln/>
-        </p:spPr>
-        <p:txBody>
-          <a:bodyPr wrap="square" lIns="0" tIns="0" rIns="0" bIns="0" rtlCol="0" anchor="ctr"/>
-          <a:lstStyle/>
-          <a:p>
-            <a:pPr algn="ctr" indent="0" marL="0">
-              <a:buNone/>
-            </a:pPr>
-            <a:r>
-              <a:rPr lang="en-US" sz="1100" b="1" dirty="0">
-                <a:solidFill>
-                  <a:srgbClr val="977024"/>
-                </a:solidFill>
-                <a:latin typeface="Arial" pitchFamily="34" charset="0"/>
-                <a:ea typeface="Arial" pitchFamily="34" charset="-122"/>
-                <a:cs typeface="Arial" pitchFamily="34" charset="-120"/>
-              </a:rPr>
-              <a:t>03</a:t>
-            </a:r>
-            <a:endParaRPr lang="en-US" sz="1100" dirty="0"/>
-          </a:p>
-        </p:txBody>
-      </p:sp>
-      <p:sp>
-        <p:nvSpPr>
-          <p:cNvPr id="25" name="Text 23"/>
-          <p:cNvSpPr/>
-          <p:nvPr/>
-        </p:nvSpPr>
-        <p:spPr>
-          <a:xfrm>
-            <a:off x="8380781" y="2194560"/>
-            <a:ext cx="3015386" cy="365760"/>
-          </a:xfrm>
-          <a:prstGeom prst="rect">
-            <a:avLst/>
-          </a:prstGeom>
-          <a:noFill/>
-          <a:ln/>
-        </p:spPr>
-        <p:txBody>
-          <a:bodyPr wrap="square" lIns="0" tIns="0" rIns="0" bIns="0" rtlCol="0" anchor="t"/>
-          <a:lstStyle/>
-          <a:p>
-            <a:pPr indent="0" marL="0">
-              <a:buNone/>
-            </a:pPr>
-            <a:r>
-              <a:rPr lang="en-US" sz="1500" b="1" dirty="0">
-                <a:solidFill>
-                  <a:srgbClr val="10161F"/>
-                </a:solidFill>
-                <a:latin typeface="Pretendard" pitchFamily="34" charset="0"/>
-                <a:ea typeface="Pretendard" pitchFamily="34" charset="-122"/>
-                <a:cs typeface="Pretendard" pitchFamily="34" charset="-120"/>
-              </a:rPr>
-              <a:t>가치 상승 및 출구 전략</a:t>
-            </a:r>
-            <a:endParaRPr lang="en-US" sz="1500" dirty="0"/>
-          </a:p>
-        </p:txBody>
-      </p:sp>
-      <p:sp>
-        <p:nvSpPr>
-          <p:cNvPr id="26" name="Shape 24"/>
-          <p:cNvSpPr/>
-          <p:nvPr/>
-        </p:nvSpPr>
-        <p:spPr>
-          <a:xfrm>
-            <a:off x="8380781" y="2624328"/>
-            <a:ext cx="3015386" cy="0"/>
-          </a:xfrm>
-          <a:prstGeom prst="line">
-            <a:avLst/>
-          </a:prstGeom>
-          <a:noFill/>
-          <a:ln w="6350">
-            <a:solidFill>
-              <a:srgbClr val="CBD5E0"/>
-            </a:solidFill>
-            <a:prstDash val="solid"/>
-          </a:ln>
-        </p:spPr>
-      </p:sp>
-      <p:sp>
-        <p:nvSpPr>
-          <p:cNvPr id="27" name="Text 25"/>
-          <p:cNvSpPr/>
-          <p:nvPr/>
-        </p:nvSpPr>
-        <p:spPr>
-          <a:xfrm>
-            <a:off x="8380781" y="2779776"/>
-            <a:ext cx="3015386" cy="1051560"/>
-          </a:xfrm>
-          <a:prstGeom prst="rect">
-            <a:avLst/>
-          </a:prstGeom>
-          <a:noFill/>
-          <a:ln/>
-        </p:spPr>
-        <p:txBody>
-          <a:bodyPr wrap="square" lIns="0" tIns="0" rIns="0" bIns="0" rtlCol="0" anchor="t"/>
-          <a:lstStyle/>
-          <a:p>
-            <a:pPr indent="0" marL="0">
-              <a:lnSpc>
-                <a:spcPct val="130000"/>
-              </a:lnSpc>
-              <a:buNone/>
-            </a:pPr>
-            <a:r>
-              <a:rPr lang="en-US" sz="1200" dirty="0">
-                <a:solidFill>
-                  <a:srgbClr val="10161F"/>
-                </a:solidFill>
-                <a:latin typeface="Pretendard" pitchFamily="34" charset="0"/>
-                <a:ea typeface="Pretendard" pitchFamily="34" charset="-122"/>
-                <a:cs typeface="Pretendard" pitchFamily="34" charset="-120"/>
-              </a:rPr>
-              <a:t>현행 공법 여력을 활용한 밸류업 기회와 더불어 향후 권역 지가 상승에 따른 시세차익 실현이 유력합니다.</a:t>
+              <a:t>현행 공법 여력을 활용한 밸류업 기회와 더불어 향후 권역 지가 상승에 따른 시세차익 실현이 유력합니다. ### 예상 매수자 유형 (AI 분석)</a:t>
             </a:r>
             <a:endParaRPr lang="en-US" sz="1200" dirty="0"/>
           </a:p>
@@ -10383,7 +7786,7 @@
           </p:nvPr>
         </p:nvGraphicFramePr>
         <p:xfrm>
-          <a:off x="566928" y="4178808"/>
+          <a:off x="566928" y="4023360"/>
           <a:ext cx="11057839" cy="914400"/>
         </p:xfrm>
         <a:graphic>
@@ -10687,7 +8090,7 @@
                           <a:ea typeface="Pretendard" pitchFamily="34" charset="-122"/>
                           <a:cs typeface="Pretendard" pitchFamily="34" charset="-120"/>
                         </a:rPr>
-                        <a:t>★★★★★</a:t>
+                        <a:t>최적합</a:t>
                       </a:r>
                       <a:endParaRPr lang="en-US" sz="1050" dirty="0">
                         <a:latin typeface="Pretendard" charset="0"/>
@@ -10977,7 +8380,7 @@
                           <a:ea typeface="Pretendard" pitchFamily="34" charset="-122"/>
                           <a:cs typeface="Pretendard" pitchFamily="34" charset="-120"/>
                         </a:rPr>
-                        <a:t>★★★★</a:t>
+                        <a:t>적합</a:t>
                       </a:r>
                       <a:endParaRPr lang="en-US" sz="1050" dirty="0">
                         <a:latin typeface="Pretendard" charset="0"/>
@@ -11211,7 +8614,7 @@
                           <a:ea typeface="Pretendard" pitchFamily="34" charset="-122"/>
                           <a:cs typeface="Pretendard" pitchFamily="34" charset="-120"/>
                         </a:rPr>
-                        <a:t>★★★</a:t>
+                        <a:t>검토</a:t>
                       </a:r>
                       <a:endParaRPr lang="en-US" sz="1050" dirty="0">
                         <a:latin typeface="Pretendard" charset="0"/>
@@ -11379,13 +8782,13 @@
       </p:graphicFrame>
       <p:sp>
         <p:nvSpPr>
-          <p:cNvPr id="29" name="Shape 26"/>
-          <p:cNvSpPr/>
-          <p:nvPr/>
-        </p:nvSpPr>
-        <p:spPr>
-          <a:xfrm>
-            <a:off x="566928" y="5678424"/>
+          <p:cNvPr id="21" name="Shape 18"/>
+          <p:cNvSpPr/>
+          <p:nvPr/>
+        </p:nvSpPr>
+        <p:spPr>
+          <a:xfrm>
+            <a:off x="566928" y="5522976"/>
             <a:ext cx="11057839" cy="804672"/>
           </a:xfrm>
           <a:prstGeom prst="roundRect">
@@ -11406,13 +8809,13 @@
       </p:sp>
       <p:sp>
         <p:nvSpPr>
-          <p:cNvPr id="30" name="Text 27"/>
-          <p:cNvSpPr/>
-          <p:nvPr/>
-        </p:nvSpPr>
-        <p:spPr>
-          <a:xfrm>
-            <a:off x="749808" y="5788152"/>
+          <p:cNvPr id="22" name="Text 19"/>
+          <p:cNvSpPr/>
+          <p:nvPr/>
+        </p:nvSpPr>
+        <p:spPr>
+          <a:xfrm>
+            <a:off x="749808" y="5632704"/>
             <a:ext cx="1691640" cy="256032"/>
           </a:xfrm>
           <a:prstGeom prst="rect">
@@ -11445,13 +8848,13 @@
       </p:sp>
       <p:sp>
         <p:nvSpPr>
-          <p:cNvPr id="31" name="Text 28"/>
-          <p:cNvSpPr/>
-          <p:nvPr/>
-        </p:nvSpPr>
-        <p:spPr>
-          <a:xfrm>
-            <a:off x="2487168" y="5751576"/>
+          <p:cNvPr id="23" name="Text 20"/>
+          <p:cNvSpPr/>
+          <p:nvPr/>
+        </p:nvSpPr>
+        <p:spPr>
+          <a:xfrm>
+            <a:off x="2487168" y="5596128"/>
             <a:ext cx="8954719" cy="658368"/>
           </a:xfrm>
           <a:prstGeom prst="rect">
@@ -11479,7 +8882,7 @@
                 <a:ea typeface="Pretendard" pitchFamily="34" charset="-122"/>
                 <a:cs typeface="Pretendard" pitchFamily="34" charset="-120"/>
               </a:rPr>
-              <a:t>[참고] 종합 가치 제안: 강남권역 핵심 상권의 희소성 높은 우량 자산으로, 안정적인 임대 수익과 향후 공법상 밸류업 및 권역 지가 상승에 따른 자본 이득(Capital Gain)을 동시에 실현할 수 있는 전략적 매물입니다.</a:t>
+              <a:t>[참고] 종합 가치 제안: 강남권역 소재 노후빌딩으로, 입지 및 자산 특성에 대한 상세 분석은 본문을 참조하시기 바랍니다. ### 3대 핵심 투자 포인트 (Investment Highlights) • 원금 안전판 확보: 강남권역 소재 자산으로, 대지 지분 가치 및 입지 경쟁력에 대한 분석은 자산 개요 섹션을 참조하시기 바랍니다.</a:t>
             </a:r>
             <a:endParaRPr lang="en-US" sz="1100" dirty="0"/>
           </a:p>
@@ -11487,7 +8890,7 @@
       </p:sp>
       <p:sp>
         <p:nvSpPr>
-          <p:cNvPr id="32" name="Text 29"/>
+          <p:cNvPr id="24" name="Text 21"/>
           <p:cNvSpPr/>
           <p:nvPr/>
         </p:nvSpPr>
@@ -11526,7 +8929,7 @@
       </p:sp>
       <p:sp>
         <p:nvSpPr>
-          <p:cNvPr id="33" name="Text 30"/>
+          <p:cNvPr id="25" name="Text 22"/>
           <p:cNvSpPr/>
           <p:nvPr/>
         </p:nvSpPr>
@@ -11741,11 +9144,11 @@
         <p:spPr>
           <a:xfrm>
             <a:off x="566928" y="1572768"/>
-            <a:ext cx="2490140" cy="3200400"/>
+            <a:ext cx="11057839" cy="3200400"/>
           </a:xfrm>
           <a:prstGeom prst="roundRect">
             <a:avLst>
-              <a:gd name="adj" fmla="val 2203"/>
+              <a:gd name="adj" fmla="val 1714"/>
             </a:avLst>
           </a:prstGeom>
           <a:solidFill>
@@ -11768,7 +9171,7 @@
         <p:spPr>
           <a:xfrm>
             <a:off x="786384" y="1792224"/>
-            <a:ext cx="384048" cy="384048"/>
+            <a:ext cx="438912" cy="438912"/>
           </a:xfrm>
           <a:prstGeom prst="ellipse">
             <a:avLst/>
@@ -11788,7 +9191,7 @@
         <p:spPr>
           <a:xfrm>
             <a:off x="786384" y="1792224"/>
-            <a:ext cx="384048" cy="384048"/>
+            <a:ext cx="438912" cy="438912"/>
           </a:xfrm>
           <a:prstGeom prst="rect">
             <a:avLst/>
@@ -11804,7 +9207,7 @@
               <a:buNone/>
             </a:pPr>
             <a:r>
-              <a:rPr lang="en-US" sz="1300" b="1" dirty="0">
+              <a:rPr lang="en-US" sz="1400" b="1" dirty="0">
                 <a:solidFill>
                   <a:srgbClr val="FFFFFF"/>
                 </a:solidFill>
@@ -11812,9 +9215,9 @@
                 <a:ea typeface="Arial" pitchFamily="34" charset="-122"/>
                 <a:cs typeface="Arial" pitchFamily="34" charset="-120"/>
               </a:rPr>
-              <a:t>STEP 1</a:t>
-            </a:r>
-            <a:endParaRPr lang="en-US" sz="1300" dirty="0"/>
+              <a:t>01</a:t>
+            </a:r>
+            <a:endParaRPr lang="en-US" sz="1400" dirty="0"/>
           </a:p>
         </p:txBody>
       </p:sp>
@@ -11827,7 +9230,7 @@
         <p:spPr>
           <a:xfrm>
             <a:off x="786384" y="2304288"/>
-            <a:ext cx="2051228" cy="365760"/>
+            <a:ext cx="10618927" cy="365760"/>
           </a:xfrm>
           <a:prstGeom prst="rect">
             <a:avLst/>
@@ -11851,7 +9254,7 @@
                 <a:ea typeface="Pretendard" pitchFamily="34" charset="-122"/>
                 <a:cs typeface="Pretendard" pitchFamily="34" charset="-120"/>
               </a:rPr>
-              <a:t>초기 관심 표명 → 담당자 연락</a:t>
+              <a:t>1단계</a:t>
             </a:r>
             <a:endParaRPr lang="en-US" sz="1600" dirty="0"/>
           </a:p>
@@ -11866,7 +9269,7 @@
         <p:spPr>
           <a:xfrm>
             <a:off x="786384" y="2761488"/>
-            <a:ext cx="2051228" cy="1828800"/>
+            <a:ext cx="10618927" cy="1828800"/>
           </a:xfrm>
           <a:prstGeom prst="rect">
             <a:avLst/>
@@ -11881,147 +9284,8 @@
             <a:pPr indent="0" marL="0">
               <a:buNone/>
             </a:pPr>
-            <a:endParaRPr lang="en-US" sz="1100" dirty="0"/>
-          </a:p>
-        </p:txBody>
-      </p:sp>
-      <p:sp>
-        <p:nvSpPr>
-          <p:cNvPr id="11" name="Shape 9"/>
-          <p:cNvSpPr/>
-          <p:nvPr/>
-        </p:nvSpPr>
-        <p:spPr>
-          <a:xfrm>
-            <a:off x="3148508" y="3035808"/>
-            <a:ext cx="182880" cy="274320"/>
-          </a:xfrm>
-          <a:prstGeom prst="rightArrow">
-            <a:avLst/>
-          </a:prstGeom>
-          <a:solidFill>
-            <a:srgbClr val="CBD5E0"/>
-          </a:solidFill>
-          <a:ln w="6350">
-            <a:solidFill>
-              <a:srgbClr val="718096"/>
-            </a:solidFill>
-            <a:prstDash val="solid"/>
-          </a:ln>
-        </p:spPr>
-      </p:sp>
-      <p:sp>
-        <p:nvSpPr>
-          <p:cNvPr id="12" name="Shape 10"/>
-          <p:cNvSpPr/>
-          <p:nvPr/>
-        </p:nvSpPr>
-        <p:spPr>
-          <a:xfrm>
-            <a:off x="3422828" y="1572768"/>
-            <a:ext cx="2490140" cy="3200400"/>
-          </a:xfrm>
-          <a:prstGeom prst="roundRect">
-            <a:avLst>
-              <a:gd name="adj" fmla="val 2203"/>
-            </a:avLst>
-          </a:prstGeom>
-          <a:solidFill>
-            <a:srgbClr val="F7FAFC"/>
-          </a:solidFill>
-          <a:ln w="6350">
-            <a:solidFill>
-              <a:srgbClr val="CBD5E0"/>
-            </a:solidFill>
-            <a:prstDash val="solid"/>
-          </a:ln>
-        </p:spPr>
-      </p:sp>
-      <p:sp>
-        <p:nvSpPr>
-          <p:cNvPr id="13" name="Shape 11"/>
-          <p:cNvSpPr/>
-          <p:nvPr/>
-        </p:nvSpPr>
-        <p:spPr>
-          <a:xfrm>
-            <a:off x="3642284" y="1792224"/>
-            <a:ext cx="384048" cy="384048"/>
-          </a:xfrm>
-          <a:prstGeom prst="ellipse">
-            <a:avLst/>
-          </a:prstGeom>
-          <a:solidFill>
-            <a:srgbClr val="B98A2E"/>
-          </a:solidFill>
-          <a:ln/>
-        </p:spPr>
-      </p:sp>
-      <p:sp>
-        <p:nvSpPr>
-          <p:cNvPr id="14" name="Text 12"/>
-          <p:cNvSpPr/>
-          <p:nvPr/>
-        </p:nvSpPr>
-        <p:spPr>
-          <a:xfrm>
-            <a:off x="3642284" y="1792224"/>
-            <a:ext cx="384048" cy="384048"/>
-          </a:xfrm>
-          <a:prstGeom prst="rect">
-            <a:avLst/>
-          </a:prstGeom>
-          <a:noFill/>
-          <a:ln/>
-        </p:spPr>
-        <p:txBody>
-          <a:bodyPr wrap="square" lIns="0" tIns="0" rIns="0" bIns="0" rtlCol="0" anchor="ctr"/>
-          <a:lstStyle/>
-          <a:p>
-            <a:pPr algn="ctr" indent="0" marL="0">
-              <a:buNone/>
-            </a:pPr>
-            <a:r>
-              <a:rPr lang="en-US" sz="1300" b="1" dirty="0">
-                <a:solidFill>
-                  <a:srgbClr val="FFFFFF"/>
-                </a:solidFill>
-                <a:latin typeface="Arial" pitchFamily="34" charset="0"/>
-                <a:ea typeface="Arial" pitchFamily="34" charset="-122"/>
-                <a:cs typeface="Arial" pitchFamily="34" charset="-120"/>
-              </a:rPr>
-              <a:t>STEP 2</a:t>
-            </a:r>
-            <a:endParaRPr lang="en-US" sz="1300" dirty="0"/>
-          </a:p>
-        </p:txBody>
-      </p:sp>
-      <p:sp>
-        <p:nvSpPr>
-          <p:cNvPr id="15" name="Text 13"/>
-          <p:cNvSpPr/>
-          <p:nvPr/>
-        </p:nvSpPr>
-        <p:spPr>
-          <a:xfrm>
-            <a:off x="3642284" y="2304288"/>
-            <a:ext cx="2051228" cy="365760"/>
-          </a:xfrm>
-          <a:prstGeom prst="rect">
-            <a:avLst/>
-          </a:prstGeom>
-          <a:noFill/>
-          <a:ln/>
-        </p:spPr>
-        <p:txBody>
-          <a:bodyPr wrap="square" rtlCol="0" anchor="ctr"/>
-          <a:lstStyle/>
-          <a:p>
-            <a:pPr indent="0" marL="0">
-              <a:buNone/>
-            </a:pPr>
-            <a:r>
-              <a:rPr lang="en-US" sz="1600" b="1" dirty="0">
+            <a:r>
+              <a:rPr lang="en-US" sz="1100" dirty="0">
                 <a:solidFill>
                   <a:srgbClr val="10161F"/>
                 </a:solidFill>
@@ -12029,177 +9293,16 @@
                 <a:ea typeface="Pretendard" pitchFamily="34" charset="-122"/>
                 <a:cs typeface="Pretendard" pitchFamily="34" charset="-120"/>
               </a:rPr>
-              <a:t>NDA 체결 → 임차인 정보 및 임대차계약서 제공</a:t>
-            </a:r>
-            <a:endParaRPr lang="en-US" sz="1600" dirty="0"/>
-          </a:p>
-        </p:txBody>
-      </p:sp>
-      <p:sp>
-        <p:nvSpPr>
-          <p:cNvPr id="16" name="Text 14"/>
-          <p:cNvSpPr/>
-          <p:nvPr/>
-        </p:nvSpPr>
-        <p:spPr>
-          <a:xfrm>
-            <a:off x="3642284" y="2761488"/>
-            <a:ext cx="2051228" cy="1828800"/>
-          </a:xfrm>
-          <a:prstGeom prst="rect">
-            <a:avLst/>
-          </a:prstGeom>
-          <a:noFill/>
-          <a:ln/>
-        </p:spPr>
-        <p:txBody>
-          <a:bodyPr wrap="square" rtlCol="0" anchor="t"/>
-          <a:lstStyle/>
+              <a:t>{"ok"</a:t>
+            </a:r>
+            <a:endParaRPr lang="en-US" sz="1100" dirty="0"/>
+          </a:p>
           <a:p>
             <a:pPr indent="0" marL="0">
               <a:buNone/>
             </a:pPr>
-            <a:endParaRPr lang="en-US" sz="1100" dirty="0"/>
-          </a:p>
-        </p:txBody>
-      </p:sp>
-      <p:sp>
-        <p:nvSpPr>
-          <p:cNvPr id="17" name="Shape 15"/>
-          <p:cNvSpPr/>
-          <p:nvPr/>
-        </p:nvSpPr>
-        <p:spPr>
-          <a:xfrm>
-            <a:off x="6004408" y="3035808"/>
-            <a:ext cx="182880" cy="274320"/>
-          </a:xfrm>
-          <a:prstGeom prst="rightArrow">
-            <a:avLst/>
-          </a:prstGeom>
-          <a:solidFill>
-            <a:srgbClr val="CBD5E0"/>
-          </a:solidFill>
-          <a:ln w="6350">
-            <a:solidFill>
-              <a:srgbClr val="718096"/>
-            </a:solidFill>
-            <a:prstDash val="solid"/>
-          </a:ln>
-        </p:spPr>
-      </p:sp>
-      <p:sp>
-        <p:nvSpPr>
-          <p:cNvPr id="18" name="Shape 16"/>
-          <p:cNvSpPr/>
-          <p:nvPr/>
-        </p:nvSpPr>
-        <p:spPr>
-          <a:xfrm>
-            <a:off x="6278728" y="1572768"/>
-            <a:ext cx="2490140" cy="3200400"/>
-          </a:xfrm>
-          <a:prstGeom prst="roundRect">
-            <a:avLst>
-              <a:gd name="adj" fmla="val 2203"/>
-            </a:avLst>
-          </a:prstGeom>
-          <a:solidFill>
-            <a:srgbClr val="F7FAFC"/>
-          </a:solidFill>
-          <a:ln w="6350">
-            <a:solidFill>
-              <a:srgbClr val="CBD5E0"/>
-            </a:solidFill>
-            <a:prstDash val="solid"/>
-          </a:ln>
-        </p:spPr>
-      </p:sp>
-      <p:sp>
-        <p:nvSpPr>
-          <p:cNvPr id="19" name="Shape 17"/>
-          <p:cNvSpPr/>
-          <p:nvPr/>
-        </p:nvSpPr>
-        <p:spPr>
-          <a:xfrm>
-            <a:off x="6498184" y="1792224"/>
-            <a:ext cx="384048" cy="384048"/>
-          </a:xfrm>
-          <a:prstGeom prst="ellipse">
-            <a:avLst/>
-          </a:prstGeom>
-          <a:solidFill>
-            <a:srgbClr val="B98A2E"/>
-          </a:solidFill>
-          <a:ln/>
-        </p:spPr>
-      </p:sp>
-      <p:sp>
-        <p:nvSpPr>
-          <p:cNvPr id="20" name="Text 18"/>
-          <p:cNvSpPr/>
-          <p:nvPr/>
-        </p:nvSpPr>
-        <p:spPr>
-          <a:xfrm>
-            <a:off x="6498184" y="1792224"/>
-            <a:ext cx="384048" cy="384048"/>
-          </a:xfrm>
-          <a:prstGeom prst="rect">
-            <a:avLst/>
-          </a:prstGeom>
-          <a:noFill/>
-          <a:ln/>
-        </p:spPr>
-        <p:txBody>
-          <a:bodyPr wrap="square" lIns="0" tIns="0" rIns="0" bIns="0" rtlCol="0" anchor="ctr"/>
-          <a:lstStyle/>
-          <a:p>
-            <a:pPr algn="ctr" indent="0" marL="0">
-              <a:buNone/>
-            </a:pPr>
-            <a:r>
-              <a:rPr lang="en-US" sz="1300" b="1" dirty="0">
-                <a:solidFill>
-                  <a:srgbClr val="FFFFFF"/>
-                </a:solidFill>
-                <a:latin typeface="Arial" pitchFamily="34" charset="0"/>
-                <a:ea typeface="Arial" pitchFamily="34" charset="-122"/>
-                <a:cs typeface="Arial" pitchFamily="34" charset="-120"/>
-              </a:rPr>
-              <a:t>STEP 3</a:t>
-            </a:r>
-            <a:endParaRPr lang="en-US" sz="1300" dirty="0"/>
-          </a:p>
-        </p:txBody>
-      </p:sp>
-      <p:sp>
-        <p:nvSpPr>
-          <p:cNvPr id="21" name="Text 19"/>
-          <p:cNvSpPr/>
-          <p:nvPr/>
-        </p:nvSpPr>
-        <p:spPr>
-          <a:xfrm>
-            <a:off x="6498184" y="2304288"/>
-            <a:ext cx="2051228" cy="365760"/>
-          </a:xfrm>
-          <a:prstGeom prst="rect">
-            <a:avLst/>
-          </a:prstGeom>
-          <a:noFill/>
-          <a:ln/>
-        </p:spPr>
-        <p:txBody>
-          <a:bodyPr wrap="square" rtlCol="0" anchor="ctr"/>
-          <a:lstStyle/>
-          <a:p>
-            <a:pPr indent="0" marL="0">
-              <a:buNone/>
-            </a:pPr>
-            <a:r>
-              <a:rPr lang="en-US" sz="1600" b="1" dirty="0">
+            <a:r>
+              <a:rPr lang="en-US" sz="1100" dirty="0">
                 <a:solidFill>
                   <a:srgbClr val="10161F"/>
                 </a:solidFill>
@@ -12207,251 +9310,45 @@
                 <a:ea typeface="Pretendard" pitchFamily="34" charset="-122"/>
                 <a:cs typeface="Pretendard" pitchFamily="34" charset="-120"/>
               </a:rPr>
-              <a:t>현장 실사 일정 조율 → 건물 컨디션 및 설비 직접 확인</a:t>
-            </a:r>
-            <a:endParaRPr lang="en-US" sz="1600" dirty="0"/>
-          </a:p>
-        </p:txBody>
-      </p:sp>
-      <p:sp>
-        <p:nvSpPr>
-          <p:cNvPr id="22" name="Text 20"/>
-          <p:cNvSpPr/>
-          <p:nvPr/>
-        </p:nvSpPr>
-        <p:spPr>
-          <a:xfrm>
-            <a:off x="6498184" y="2761488"/>
-            <a:ext cx="2051228" cy="1828800"/>
-          </a:xfrm>
-          <a:prstGeom prst="rect">
-            <a:avLst/>
-          </a:prstGeom>
-          <a:noFill/>
-          <a:ln/>
-        </p:spPr>
-        <p:txBody>
-          <a:bodyPr wrap="square" rtlCol="0" anchor="t"/>
+              <a:t>true,"mocked":true,"extractedFields":{"area_signal":"역삼","asset_type":"오피스빌딩","price_band":"300억","size_signal":"3000평(약 9917.4㎡)"},"extractedFacts":{"region":"역삼","exactAddressCandidate":"역삼동 742-1","assetType":"오피스빌딩","priceText":"300억","sizeText":"3000평(약 9917.4㎡)","currentUse":"오피스","currentUseSignal":"근린생활시설","leaseSignal":"임대중","vacancySignal":"공실없음","tenantNames":["쿠팡","네이버"],"unitRentTexts":["301호: 1500만"],"sellerMotivationText":"자산 효율화","brokerNotes":["초역세권 매물"]},"detectedSensitiveFields":["exact_address","tenant_name"],"ambiguousFields":[],"warnings":[],"areaSignal":"역삼","assetType":"오피스빌딩","priceBand":"300억","sizeSignal":"3000평(약 9917.4㎡)","dealType":"매각","buildingName":"역삼 센트럴타워","exactAddress":"역삼동 742-1","totalFloorArea":9917.3,"buildYear":2015,"currentUseSignal":"근린생활시설","vacancySignal":"공실 없음","fitSummary":"초역세권 근생 빌딩으로 시행/사옥 매입에 최적화","cautionSummary":"주요 임차인 만기 조율 필요","hiddenFields":["exact_address","seller_motivation"],"confidence":{"areaSignal":"confirmed","assetType":"confirmed","priceBand":"ai_hypothesis","fitSummary":"ai_hypothesis"},"missingData":["sizeSignal"],"boundaryNote":"본 자료는 실거래 통계 기반 참고치입니다.","buyerType":"법인 사옥형","budgetRange":{"min":50,"max":80,"display":"50억~80억"},"preferredRegions":["강남","성수"],"assetTypes":["꼬마빌딩","사옥용"],"purchasePurpose":"사옥용 매입","mustHave":["초역세권","주차"],"niceToHave":["테라스","루프탑"],"riskTolerance":"medium","financingNote":"자본금 50% 준비","missingQuestions":["구체적인 입주 시기가 언제인가요?","선호하는 수익률이 있나요?"],"privacyNotes":["연락처 비공개"],"fitReasons":["매수자 예산(50-80억)에 부합하는 매물입니다.","요청하신 성수/강남 권역에 해당합니다."],"cautionReasons":["요청한 용도와 달리 명도 협의가 다소 필요합니다."],"recommendedNextAction":"현장 답사 제안","kakaoMessage":"안녕하세요! 요청하신 조건에 부합하는 추천 매물이 있어 안내해 드립니다. 확인해보시고 피드백 부탁드립니다.","title":"강남 역삼역 초역세권 오피스 사옥용 빌딩 매각","shortSummary":"역삼역 도보 5분 거리의 준신축급 대형 오피스빌딩입니다.","dealPoints":["초역세권","사옥 최적"],"cautionPoints":["명도 조율 필요"],"hiddenInfoNotice":["보증금 및 지번은 인가 후 확인 가능"],"gateMessage":"G1 등급 등록이 필요합니다.","kakaoText":"강남 역삼역 오피스 빌딩 매각 안내입니다.","exactUnitCandidate":"101호","floor":"1층","areaSqmText":"150㎡","spaceType":"office","depositText":"5000만","monthlyRentText":"400만","maintenanceFeeText":"50만","availableFromText":"즉시입주","leaseTermMonthsText":"24","incentivesText":"렌트프리 2개월","restrictions":[],"landlordIdentity":"김성수","currentTenant":"스타트업","vacancyReason":"이전 확장","rentNegotiation":"협의 가능","region":"성수동","areaSqm":150,"deposit":5000,"monthlyRent":400,"maintenanceFee":50,"availableFrom":"즉시입주","leaseTermMonths":24,"incentives":{"rentFreeMonths":2,"interiorSupport":"일부 인테리어 지원","freeRentDetail":"렌트프리 2개월 지원"},"shortSummaryLease":"성수역 도보 5분 거리 1층 리테일 상가 매물입니다."}</a:t>
+            </a:r>
+            <a:endParaRPr lang="en-US" sz="1100" dirty="0"/>
+          </a:p>
+        </p:txBody>
+      </p:sp>
+      <p:sp>
+        <p:nvSpPr>
+          <p:cNvPr id="11" name="Text 9"/>
+          <p:cNvSpPr/>
+          <p:nvPr/>
+        </p:nvSpPr>
+        <p:spPr>
+          <a:xfrm>
+            <a:off x="566928" y="6382512"/>
+            <a:ext cx="7315200" cy="219456"/>
+          </a:xfrm>
+          <a:prstGeom prst="rect">
+            <a:avLst/>
+          </a:prstGeom>
+          <a:noFill/>
+          <a:ln/>
+        </p:spPr>
+        <p:txBody>
+          <a:bodyPr wrap="square" lIns="0" tIns="0" rIns="0" bIns="0" rtlCol="0" anchor="ctr"/>
           <a:lstStyle/>
           <a:p>
             <a:pPr indent="0" marL="0">
               <a:buNone/>
             </a:pPr>
-            <a:endParaRPr lang="en-US" sz="1100" dirty="0"/>
-          </a:p>
-        </p:txBody>
-      </p:sp>
-      <p:sp>
-        <p:nvSpPr>
-          <p:cNvPr id="23" name="Shape 21"/>
-          <p:cNvSpPr/>
-          <p:nvPr/>
-        </p:nvSpPr>
-        <p:spPr>
-          <a:xfrm>
-            <a:off x="8860307" y="3035808"/>
-            <a:ext cx="182880" cy="274320"/>
-          </a:xfrm>
-          <a:prstGeom prst="rightArrow">
-            <a:avLst/>
-          </a:prstGeom>
-          <a:solidFill>
-            <a:srgbClr val="CBD5E0"/>
-          </a:solidFill>
-          <a:ln w="6350">
-            <a:solidFill>
-              <a:srgbClr val="718096"/>
-            </a:solidFill>
-            <a:prstDash val="solid"/>
-          </a:ln>
-        </p:spPr>
-      </p:sp>
-      <p:sp>
-        <p:nvSpPr>
-          <p:cNvPr id="24" name="Shape 22"/>
-          <p:cNvSpPr/>
-          <p:nvPr/>
-        </p:nvSpPr>
-        <p:spPr>
-          <a:xfrm>
-            <a:off x="9134627" y="1572768"/>
-            <a:ext cx="2490140" cy="3200400"/>
-          </a:xfrm>
-          <a:prstGeom prst="roundRect">
-            <a:avLst>
-              <a:gd name="adj" fmla="val 2203"/>
-            </a:avLst>
-          </a:prstGeom>
-          <a:solidFill>
-            <a:srgbClr val="F7FAFC"/>
-          </a:solidFill>
-          <a:ln w="6350">
-            <a:solidFill>
-              <a:srgbClr val="CBD5E0"/>
-            </a:solidFill>
-            <a:prstDash val="solid"/>
-          </a:ln>
-        </p:spPr>
-      </p:sp>
-      <p:sp>
-        <p:nvSpPr>
-          <p:cNvPr id="25" name="Shape 23"/>
-          <p:cNvSpPr/>
-          <p:nvPr/>
-        </p:nvSpPr>
-        <p:spPr>
-          <a:xfrm>
-            <a:off x="9354083" y="1792224"/>
-            <a:ext cx="384048" cy="384048"/>
-          </a:xfrm>
-          <a:prstGeom prst="ellipse">
-            <a:avLst/>
-          </a:prstGeom>
-          <a:solidFill>
-            <a:srgbClr val="B98A2E"/>
-          </a:solidFill>
-          <a:ln/>
-        </p:spPr>
-      </p:sp>
-      <p:sp>
-        <p:nvSpPr>
-          <p:cNvPr id="26" name="Text 24"/>
-          <p:cNvSpPr/>
-          <p:nvPr/>
-        </p:nvSpPr>
-        <p:spPr>
-          <a:xfrm>
-            <a:off x="9354083" y="1792224"/>
-            <a:ext cx="384048" cy="384048"/>
-          </a:xfrm>
-          <a:prstGeom prst="rect">
-            <a:avLst/>
-          </a:prstGeom>
-          <a:noFill/>
-          <a:ln/>
-        </p:spPr>
-        <p:txBody>
-          <a:bodyPr wrap="square" lIns="0" tIns="0" rIns="0" bIns="0" rtlCol="0" anchor="ctr"/>
-          <a:lstStyle/>
-          <a:p>
-            <a:pPr algn="ctr" indent="0" marL="0">
-              <a:buNone/>
-            </a:pPr>
-            <a:r>
-              <a:rPr lang="en-US" sz="1300" b="1" dirty="0">
-                <a:solidFill>
-                  <a:srgbClr val="FFFFFF"/>
-                </a:solidFill>
-                <a:latin typeface="Arial" pitchFamily="34" charset="0"/>
-                <a:ea typeface="Arial" pitchFamily="34" charset="-122"/>
-                <a:cs typeface="Arial" pitchFamily="34" charset="-120"/>
-              </a:rPr>
-              <a:t>STEP 4</a:t>
-            </a:r>
-            <a:endParaRPr lang="en-US" sz="1300" dirty="0"/>
-          </a:p>
-        </p:txBody>
-      </p:sp>
-      <p:sp>
-        <p:nvSpPr>
-          <p:cNvPr id="27" name="Text 25"/>
-          <p:cNvSpPr/>
-          <p:nvPr/>
-        </p:nvSpPr>
-        <p:spPr>
-          <a:xfrm>
-            <a:off x="9354083" y="2304288"/>
-            <a:ext cx="2051228" cy="365760"/>
-          </a:xfrm>
-          <a:prstGeom prst="rect">
-            <a:avLst/>
-          </a:prstGeom>
-          <a:noFill/>
-          <a:ln/>
-        </p:spPr>
-        <p:txBody>
-          <a:bodyPr wrap="square" rtlCol="0" anchor="ctr"/>
-          <a:lstStyle/>
-          <a:p>
-            <a:pPr indent="0" marL="0">
-              <a:buNone/>
-            </a:pPr>
-            <a:r>
-              <a:rPr lang="en-US" sz="1600" b="1" dirty="0">
-                <a:solidFill>
-                  <a:srgbClr val="10161F"/>
+            <a:r>
+              <a:rPr lang="en-US" sz="800" dirty="0">
+                <a:solidFill>
+                  <a:srgbClr val="718096"/>
                 </a:solidFill>
                 <a:latin typeface="Pretendard" pitchFamily="34" charset="0"/>
                 <a:ea typeface="Pretendard" pitchFamily="34" charset="-122"/>
                 <a:cs typeface="Pretendard" pitchFamily="34" charset="-120"/>
               </a:rPr>
-              <a:t>LOI(투자의향서) 제출 → 가격 협의 개시</a:t>
-            </a:r>
-            <a:endParaRPr lang="en-US" sz="1600" dirty="0"/>
-          </a:p>
-        </p:txBody>
-      </p:sp>
-      <p:sp>
-        <p:nvSpPr>
-          <p:cNvPr id="28" name="Text 26"/>
-          <p:cNvSpPr/>
-          <p:nvPr/>
-        </p:nvSpPr>
-        <p:spPr>
-          <a:xfrm>
-            <a:off x="9354083" y="2761488"/>
-            <a:ext cx="2051228" cy="1828800"/>
-          </a:xfrm>
-          <a:prstGeom prst="rect">
-            <a:avLst/>
-          </a:prstGeom>
-          <a:noFill/>
-          <a:ln/>
-        </p:spPr>
-        <p:txBody>
-          <a:bodyPr wrap="square" rtlCol="0" anchor="t"/>
-          <a:lstStyle/>
-          <a:p>
-            <a:pPr indent="0" marL="0">
-              <a:buNone/>
-            </a:pPr>
-            <a:endParaRPr lang="en-US" sz="1100" dirty="0"/>
-          </a:p>
-        </p:txBody>
-      </p:sp>
-      <p:sp>
-        <p:nvSpPr>
-          <p:cNvPr id="29" name="Text 27"/>
-          <p:cNvSpPr/>
-          <p:nvPr/>
-        </p:nvSpPr>
-        <p:spPr>
-          <a:xfrm>
-            <a:off x="566928" y="6382512"/>
-            <a:ext cx="7315200" cy="219456"/>
-          </a:xfrm>
-          <a:prstGeom prst="rect">
-            <a:avLst/>
-          </a:prstGeom>
-          <a:noFill/>
-          <a:ln/>
-        </p:spPr>
-        <p:txBody>
-          <a:bodyPr wrap="square" lIns="0" tIns="0" rIns="0" bIns="0" rtlCol="0" anchor="ctr"/>
-          <a:lstStyle/>
-          <a:p>
-            <a:pPr indent="0" marL="0">
-              <a:buNone/>
-            </a:pPr>
-            <a:r>
-              <a:rPr lang="en-US" sz="800" dirty="0">
-                <a:solidFill>
-                  <a:srgbClr val="718096"/>
-                </a:solidFill>
-                <a:latin typeface="Pretendard" pitchFamily="34" charset="0"/>
-                <a:ea typeface="Pretendard" pitchFamily="34" charset="-122"/>
-                <a:cs typeface="Pretendard" pitchFamily="34" charset="-120"/>
-              </a:rPr>
               <a:t>크리딜   |   </a:t>
             </a:r>
             <a:endParaRPr lang="en-US" sz="800" dirty="0"/>
@@ -12460,7 +9357,7 @@
       </p:sp>
       <p:sp>
         <p:nvSpPr>
-          <p:cNvPr id="30" name="Text 28"/>
+          <p:cNvPr id="12" name="Text 10"/>
           <p:cNvSpPr/>
           <p:nvPr/>
         </p:nvSpPr>

--- a/docs/test/stress/e2e-outputs/trading_case09_sinsa_value_add_basic.pptx
+++ b/docs/test/stress/e2e-outputs/trading_case09_sinsa_value_add_basic.pptx
@@ -6871,11 +6871,11 @@
         <p:spPr>
           <a:xfrm>
             <a:off x="566928" y="1417320"/>
-            <a:ext cx="11057839" cy="3657600"/>
+            <a:ext cx="3515258" cy="3657600"/>
           </a:xfrm>
           <a:prstGeom prst="roundRect">
             <a:avLst>
-              <a:gd name="adj" fmla="val 1500"/>
+              <a:gd name="adj" fmla="val 1561"/>
             </a:avLst>
           </a:prstGeom>
           <a:solidFill>
@@ -6898,7 +6898,7 @@
         <p:spPr>
           <a:xfrm>
             <a:off x="566928" y="1417320"/>
-            <a:ext cx="11057839" cy="45720"/>
+            <a:ext cx="3515258" cy="45720"/>
           </a:xfrm>
           <a:prstGeom prst="rect">
             <a:avLst/>
@@ -6918,7 +6918,7 @@
         <p:spPr>
           <a:xfrm>
             <a:off x="795528" y="1618488"/>
-            <a:ext cx="10600639" cy="292608"/>
+            <a:ext cx="3058058" cy="292608"/>
           </a:xfrm>
           <a:prstGeom prst="rect">
             <a:avLst/>
@@ -6942,7 +6942,7 @@
                 <a:ea typeface="Pretendard" pitchFamily="34" charset="-122"/>
                 <a:cs typeface="Pretendard" pitchFamily="34" charset="-120"/>
               </a:rPr>
-              <a:t>용도 리스크</a:t>
+              <a:t>건물 물리적 상태</a:t>
             </a:r>
             <a:endParaRPr lang="en-US" sz="1350" dirty="0"/>
           </a:p>
@@ -6957,7 +6957,7 @@
         <p:spPr>
           <a:xfrm>
             <a:off x="795528" y="1947672"/>
-            <a:ext cx="10600639" cy="365760"/>
+            <a:ext cx="3058058" cy="365760"/>
           </a:xfrm>
           <a:prstGeom prst="rect">
             <a:avLst/>
@@ -6983,7 +6983,7 @@
                 <a:ea typeface="Pretendard" pitchFamily="34" charset="-122"/>
                 <a:cs typeface="Pretendard" pitchFamily="34" charset="-120"/>
               </a:rPr>
-              <a:t>—</a:t>
+              <a:t>준공연도 확인 필요, 구조 확인 필요</a:t>
             </a:r>
             <a:endParaRPr lang="en-US" sz="1250" dirty="0"/>
           </a:p>
@@ -6998,7 +6998,7 @@
         <p:spPr>
           <a:xfrm>
             <a:off x="795528" y="2377440"/>
-            <a:ext cx="10600639" cy="2606040"/>
+            <a:ext cx="3058058" cy="2606040"/>
           </a:xfrm>
           <a:prstGeom prst="rect">
             <a:avLst/>
@@ -7028,10 +7028,58 @@
                 <a:ea typeface="Pretendard" pitchFamily="34" charset="-122"/>
                 <a:cs typeface="Pretendard" pitchFamily="34" charset="-120"/>
               </a:rPr>
-              <a:t>{"ok":true,"mocked":true,"extractedFields":{"area_signal":"역삼","asset_type":"오피스빌딩","price_band":"300억","size_signal":"3000평(약 9917.4㎡)"},"extractedFacts":{"region":"역삼","exactAddressCandidate":"역삼동 7</a:t>
+              <a:t>누수</a:t>
             </a:r>
             <a:endParaRPr lang="en-US" sz="1100" dirty="0"/>
           </a:p>
+          <a:p>
+            <a:pPr marL="342900" indent="-342900">
+              <a:lnSpc>
+                <a:spcPct val="125000"/>
+              </a:lnSpc>
+              <a:spcBef>
+                <a:spcPts val="600"/>
+              </a:spcBef>
+              <a:buSzPct val="100000"/>
+              <a:buChar char="•"/>
+            </a:pPr>
+            <a:r>
+              <a:rPr lang="en-US" sz="1100" dirty="0">
+                <a:solidFill>
+                  <a:srgbClr val="10161F"/>
+                </a:solidFill>
+                <a:latin typeface="Pretendard" pitchFamily="34" charset="0"/>
+                <a:ea typeface="Pretendard" pitchFamily="34" charset="-122"/>
+                <a:cs typeface="Pretendard" pitchFamily="34" charset="-120"/>
+              </a:rPr>
+              <a:t>균열</a:t>
+            </a:r>
+            <a:endParaRPr lang="en-US" sz="1100" dirty="0"/>
+          </a:p>
+          <a:p>
+            <a:pPr marL="342900" indent="-342900">
+              <a:lnSpc>
+                <a:spcPct val="125000"/>
+              </a:lnSpc>
+              <a:spcBef>
+                <a:spcPts val="600"/>
+              </a:spcBef>
+              <a:buSzPct val="100000"/>
+              <a:buChar char="•"/>
+            </a:pPr>
+            <a:r>
+              <a:rPr lang="en-US" sz="1100" dirty="0">
+                <a:solidFill>
+                  <a:srgbClr val="10161F"/>
+                </a:solidFill>
+                <a:latin typeface="Pretendard" pitchFamily="34" charset="0"/>
+                <a:ea typeface="Pretendard" pitchFamily="34" charset="-122"/>
+                <a:cs typeface="Pretendard" pitchFamily="34" charset="-120"/>
+              </a:rPr>
+              <a:t>설비 노후 여부 현장 점검 필요</a:t>
+            </a:r>
+            <a:endParaRPr lang="en-US" sz="1100" dirty="0"/>
+          </a:p>
         </p:txBody>
       </p:sp>
       <p:sp>
@@ -7042,12 +7090,12 @@
         </p:nvSpPr>
         <p:spPr>
           <a:xfrm>
-            <a:off x="566928" y="5193792"/>
-            <a:ext cx="11057839" cy="621792"/>
+            <a:off x="4338218" y="1417320"/>
+            <a:ext cx="3515258" cy="3657600"/>
           </a:xfrm>
           <a:prstGeom prst="roundRect">
             <a:avLst>
-              <a:gd name="adj" fmla="val 8824"/>
+              <a:gd name="adj" fmla="val 1561"/>
             </a:avLst>
           </a:prstGeom>
           <a:solidFill>
@@ -7063,14 +7111,34 @@
       </p:sp>
       <p:sp>
         <p:nvSpPr>
-          <p:cNvPr id="12" name="Text 10"/>
-          <p:cNvSpPr/>
-          <p:nvPr/>
-        </p:nvSpPr>
-        <p:spPr>
-          <a:xfrm>
-            <a:off x="795528" y="5193792"/>
-            <a:ext cx="10600639" cy="621792"/>
+          <p:cNvPr id="12" name="Shape 10"/>
+          <p:cNvSpPr/>
+          <p:nvPr/>
+        </p:nvSpPr>
+        <p:spPr>
+          <a:xfrm>
+            <a:off x="4338218" y="1417320"/>
+            <a:ext cx="3515258" cy="45720"/>
+          </a:xfrm>
+          <a:prstGeom prst="rect">
+            <a:avLst/>
+          </a:prstGeom>
+          <a:solidFill>
+            <a:srgbClr val="B98A2E"/>
+          </a:solidFill>
+          <a:ln/>
+        </p:spPr>
+      </p:sp>
+      <p:sp>
+        <p:nvSpPr>
+          <p:cNvPr id="13" name="Text 11"/>
+          <p:cNvSpPr/>
+          <p:nvPr/>
+        </p:nvSpPr>
+        <p:spPr>
+          <a:xfrm>
+            <a:off x="4566818" y="1618488"/>
+            <a:ext cx="3058058" cy="292608"/>
           </a:xfrm>
           <a:prstGeom prst="rect">
             <a:avLst/>
@@ -7086,53 +7154,377 @@
               <a:buNone/>
             </a:pPr>
             <a:r>
-              <a:rPr lang="en-US" sz="1100" dirty="0">
-                <a:solidFill>
-                  <a:srgbClr val="10161F"/>
+              <a:rPr lang="en-US" sz="1350" b="1" dirty="0">
+                <a:solidFill>
+                  <a:srgbClr val="977024"/>
                 </a:solidFill>
                 <a:latin typeface="Pretendard" pitchFamily="34" charset="0"/>
                 <a:ea typeface="Pretendard" pitchFamily="34" charset="-122"/>
                 <a:cs typeface="Pretendard" pitchFamily="34" charset="-120"/>
               </a:rPr>
-              <a:t>※ 본 리스크 체크는 공부 및 브로커 확인 기반이며, 매수 전 전문 실사팀(변호사/건축사)을 통한 정밀 실사가 필요합니다.</a:t>
-            </a:r>
-            <a:endParaRPr lang="en-US" sz="1100" dirty="0"/>
-          </a:p>
-        </p:txBody>
-      </p:sp>
-      <p:sp>
-        <p:nvSpPr>
-          <p:cNvPr id="13" name="Text 11"/>
-          <p:cNvSpPr/>
-          <p:nvPr/>
-        </p:nvSpPr>
-        <p:spPr>
-          <a:xfrm>
-            <a:off x="566928" y="6382512"/>
-            <a:ext cx="7315200" cy="219456"/>
-          </a:xfrm>
-          <a:prstGeom prst="rect">
-            <a:avLst/>
-          </a:prstGeom>
-          <a:noFill/>
-          <a:ln/>
-        </p:spPr>
-        <p:txBody>
-          <a:bodyPr wrap="square" lIns="0" tIns="0" rIns="0" bIns="0" rtlCol="0" anchor="ctr"/>
+              <a:t>승강기 및 설비</a:t>
+            </a:r>
+            <a:endParaRPr lang="en-US" sz="1350" dirty="0"/>
+          </a:p>
+        </p:txBody>
+      </p:sp>
+      <p:sp>
+        <p:nvSpPr>
+          <p:cNvPr id="14" name="Text 12"/>
+          <p:cNvSpPr/>
+          <p:nvPr/>
+        </p:nvSpPr>
+        <p:spPr>
+          <a:xfrm>
+            <a:off x="4566818" y="1947672"/>
+            <a:ext cx="3058058" cy="365760"/>
+          </a:xfrm>
+          <a:prstGeom prst="rect">
+            <a:avLst/>
+          </a:prstGeom>
+          <a:noFill/>
+          <a:ln/>
+        </p:spPr>
+        <p:txBody>
+          <a:bodyPr wrap="square" lIns="0" tIns="0" rIns="0" bIns="0" rtlCol="0" anchor="ctr">
+            <a:normAutofit/>
+          </a:bodyPr>
           <a:lstStyle/>
           <a:p>
             <a:pPr indent="0" marL="0">
               <a:buNone/>
             </a:pPr>
             <a:r>
-              <a:rPr lang="en-US" sz="800" dirty="0">
-                <a:solidFill>
-                  <a:srgbClr val="718096"/>
+              <a:rPr lang="en-US" sz="1250" b="1" dirty="0">
+                <a:solidFill>
+                  <a:srgbClr val="10161F"/>
                 </a:solidFill>
                 <a:latin typeface="Pretendard" pitchFamily="34" charset="0"/>
                 <a:ea typeface="Pretendard" pitchFamily="34" charset="-122"/>
                 <a:cs typeface="Pretendard" pitchFamily="34" charset="-120"/>
               </a:rPr>
+              <a:t>승강기 정보 확인 필요</a:t>
+            </a:r>
+            <a:endParaRPr lang="en-US" sz="1250" dirty="0"/>
+          </a:p>
+        </p:txBody>
+      </p:sp>
+      <p:sp>
+        <p:nvSpPr>
+          <p:cNvPr id="15" name="Text 13"/>
+          <p:cNvSpPr/>
+          <p:nvPr/>
+        </p:nvSpPr>
+        <p:spPr>
+          <a:xfrm>
+            <a:off x="4566818" y="2377440"/>
+            <a:ext cx="3058058" cy="2606040"/>
+          </a:xfrm>
+          <a:prstGeom prst="rect">
+            <a:avLst/>
+          </a:prstGeom>
+          <a:noFill/>
+          <a:ln/>
+        </p:spPr>
+        <p:txBody>
+          <a:bodyPr wrap="square" lIns="0" tIns="0" rIns="0" bIns="0" rtlCol="0" anchor="t">
+            <a:normAutofit/>
+          </a:bodyPr>
+          <a:lstStyle/>
+          <a:p>
+            <a:pPr marL="342900" indent="-342900">
+              <a:lnSpc>
+                <a:spcPct val="125000"/>
+              </a:lnSpc>
+              <a:buSzPct val="100000"/>
+              <a:buChar char="•"/>
+            </a:pPr>
+            <a:r>
+              <a:rPr lang="en-US" sz="1100" dirty="0">
+                <a:solidFill>
+                  <a:srgbClr val="10161F"/>
+                </a:solidFill>
+                <a:latin typeface="Pretendard" pitchFamily="34" charset="0"/>
+                <a:ea typeface="Pretendard" pitchFamily="34" charset="-122"/>
+                <a:cs typeface="Pretendard" pitchFamily="34" charset="-120"/>
+              </a:rPr>
+              <a:t>정기검사 이력, 냉난방 설비 상태 확인 필요</a:t>
+            </a:r>
+            <a:endParaRPr lang="en-US" sz="1100" dirty="0"/>
+          </a:p>
+        </p:txBody>
+      </p:sp>
+      <p:sp>
+        <p:nvSpPr>
+          <p:cNvPr id="16" name="Shape 14"/>
+          <p:cNvSpPr/>
+          <p:nvPr/>
+        </p:nvSpPr>
+        <p:spPr>
+          <a:xfrm>
+            <a:off x="8109509" y="1417320"/>
+            <a:ext cx="3515258" cy="3657600"/>
+          </a:xfrm>
+          <a:prstGeom prst="roundRect">
+            <a:avLst>
+              <a:gd name="adj" fmla="val 1561"/>
+            </a:avLst>
+          </a:prstGeom>
+          <a:solidFill>
+            <a:srgbClr val="F7FAFC"/>
+          </a:solidFill>
+          <a:ln w="6350">
+            <a:solidFill>
+              <a:srgbClr val="CBD5E0"/>
+            </a:solidFill>
+            <a:prstDash val="solid"/>
+          </a:ln>
+        </p:spPr>
+      </p:sp>
+      <p:sp>
+        <p:nvSpPr>
+          <p:cNvPr id="17" name="Shape 15"/>
+          <p:cNvSpPr/>
+          <p:nvPr/>
+        </p:nvSpPr>
+        <p:spPr>
+          <a:xfrm>
+            <a:off x="8109509" y="1417320"/>
+            <a:ext cx="3515258" cy="45720"/>
+          </a:xfrm>
+          <a:prstGeom prst="rect">
+            <a:avLst/>
+          </a:prstGeom>
+          <a:solidFill>
+            <a:srgbClr val="B98A2E"/>
+          </a:solidFill>
+          <a:ln/>
+        </p:spPr>
+      </p:sp>
+      <p:sp>
+        <p:nvSpPr>
+          <p:cNvPr id="18" name="Text 16"/>
+          <p:cNvSpPr/>
+          <p:nvPr/>
+        </p:nvSpPr>
+        <p:spPr>
+          <a:xfrm>
+            <a:off x="8338109" y="1618488"/>
+            <a:ext cx="3058058" cy="292608"/>
+          </a:xfrm>
+          <a:prstGeom prst="rect">
+            <a:avLst/>
+          </a:prstGeom>
+          <a:noFill/>
+          <a:ln/>
+        </p:spPr>
+        <p:txBody>
+          <a:bodyPr wrap="square" lIns="0" tIns="0" rIns="0" bIns="0" rtlCol="0" anchor="ctr"/>
+          <a:lstStyle/>
+          <a:p>
+            <a:pPr indent="0" marL="0">
+              <a:buNone/>
+            </a:pPr>
+            <a:r>
+              <a:rPr lang="en-US" sz="1350" b="1" dirty="0">
+                <a:solidFill>
+                  <a:srgbClr val="977024"/>
+                </a:solidFill>
+                <a:latin typeface="Pretendard" pitchFamily="34" charset="0"/>
+                <a:ea typeface="Pretendard" pitchFamily="34" charset="-122"/>
+                <a:cs typeface="Pretendard" pitchFamily="34" charset="-120"/>
+              </a:rPr>
+              <a:t>임차인 이탈 위험</a:t>
+            </a:r>
+            <a:endParaRPr lang="en-US" sz="1350" dirty="0"/>
+          </a:p>
+        </p:txBody>
+      </p:sp>
+      <p:sp>
+        <p:nvSpPr>
+          <p:cNvPr id="19" name="Text 17"/>
+          <p:cNvSpPr/>
+          <p:nvPr/>
+        </p:nvSpPr>
+        <p:spPr>
+          <a:xfrm>
+            <a:off x="8338109" y="1947672"/>
+            <a:ext cx="3058058" cy="365760"/>
+          </a:xfrm>
+          <a:prstGeom prst="rect">
+            <a:avLst/>
+          </a:prstGeom>
+          <a:noFill/>
+          <a:ln/>
+        </p:spPr>
+        <p:txBody>
+          <a:bodyPr wrap="square" lIns="0" tIns="0" rIns="0" bIns="0" rtlCol="0" anchor="ctr">
+            <a:normAutofit/>
+          </a:bodyPr>
+          <a:lstStyle/>
+          <a:p>
+            <a:pPr indent="0" marL="0">
+              <a:buNone/>
+            </a:pPr>
+            <a:r>
+              <a:rPr lang="en-US" sz="1250" b="1" dirty="0">
+                <a:solidFill>
+                  <a:srgbClr val="10161F"/>
+                </a:solidFill>
+                <a:latin typeface="Pretendard" pitchFamily="34" charset="0"/>
+                <a:ea typeface="Pretendard" pitchFamily="34" charset="-122"/>
+                <a:cs typeface="Pretendard" pitchFamily="34" charset="-120"/>
+              </a:rPr>
+              <a:t>임대차 계약 현황 LOI 접수 후 열람</a:t>
+            </a:r>
+            <a:endParaRPr lang="en-US" sz="1250" dirty="0"/>
+          </a:p>
+        </p:txBody>
+      </p:sp>
+      <p:sp>
+        <p:nvSpPr>
+          <p:cNvPr id="20" name="Text 18"/>
+          <p:cNvSpPr/>
+          <p:nvPr/>
+        </p:nvSpPr>
+        <p:spPr>
+          <a:xfrm>
+            <a:off x="8338109" y="2377440"/>
+            <a:ext cx="3058058" cy="2606040"/>
+          </a:xfrm>
+          <a:prstGeom prst="rect">
+            <a:avLst/>
+          </a:prstGeom>
+          <a:noFill/>
+          <a:ln/>
+        </p:spPr>
+        <p:txBody>
+          <a:bodyPr wrap="square" lIns="0" tIns="0" rIns="0" bIns="0" rtlCol="0" anchor="t">
+            <a:normAutofit/>
+          </a:bodyPr>
+          <a:lstStyle/>
+          <a:p>
+            <a:pPr marL="342900" indent="-342900">
+              <a:lnSpc>
+                <a:spcPct val="125000"/>
+              </a:lnSpc>
+              <a:buSzPct val="100000"/>
+              <a:buChar char="•"/>
+            </a:pPr>
+            <a:r>
+              <a:rPr lang="en-US" sz="1100" dirty="0">
+                <a:solidFill>
+                  <a:srgbClr val="10161F"/>
+                </a:solidFill>
+                <a:latin typeface="Pretendard" pitchFamily="34" charset="0"/>
+                <a:ea typeface="Pretendard" pitchFamily="34" charset="-122"/>
+                <a:cs typeface="Pretendard" pitchFamily="34" charset="-120"/>
+              </a:rPr>
+              <a:t>잔여 계약기간(WALE), 임차인 신용도 확인 필요</a:t>
+            </a:r>
+            <a:endParaRPr lang="en-US" sz="1100" dirty="0"/>
+          </a:p>
+        </p:txBody>
+      </p:sp>
+      <p:sp>
+        <p:nvSpPr>
+          <p:cNvPr id="21" name="Shape 19"/>
+          <p:cNvSpPr/>
+          <p:nvPr/>
+        </p:nvSpPr>
+        <p:spPr>
+          <a:xfrm>
+            <a:off x="566928" y="5193792"/>
+            <a:ext cx="11057839" cy="621792"/>
+          </a:xfrm>
+          <a:prstGeom prst="roundRect">
+            <a:avLst>
+              <a:gd name="adj" fmla="val 8824"/>
+            </a:avLst>
+          </a:prstGeom>
+          <a:solidFill>
+            <a:srgbClr val="F7FAFC"/>
+          </a:solidFill>
+          <a:ln w="6350">
+            <a:solidFill>
+              <a:srgbClr val="CBD5E0"/>
+            </a:solidFill>
+            <a:prstDash val="solid"/>
+          </a:ln>
+        </p:spPr>
+      </p:sp>
+      <p:sp>
+        <p:nvSpPr>
+          <p:cNvPr id="22" name="Text 20"/>
+          <p:cNvSpPr/>
+          <p:nvPr/>
+        </p:nvSpPr>
+        <p:spPr>
+          <a:xfrm>
+            <a:off x="795528" y="5193792"/>
+            <a:ext cx="10600639" cy="621792"/>
+          </a:xfrm>
+          <a:prstGeom prst="rect">
+            <a:avLst/>
+          </a:prstGeom>
+          <a:noFill/>
+          <a:ln/>
+        </p:spPr>
+        <p:txBody>
+          <a:bodyPr wrap="square" lIns="0" tIns="0" rIns="0" bIns="0" rtlCol="0" anchor="ctr"/>
+          <a:lstStyle/>
+          <a:p>
+            <a:pPr indent="0" marL="0">
+              <a:buNone/>
+            </a:pPr>
+            <a:r>
+              <a:rPr lang="en-US" sz="1100" dirty="0">
+                <a:solidFill>
+                  <a:srgbClr val="10161F"/>
+                </a:solidFill>
+                <a:latin typeface="Pretendard" pitchFamily="34" charset="0"/>
+                <a:ea typeface="Pretendard" pitchFamily="34" charset="-122"/>
+                <a:cs typeface="Pretendard" pitchFamily="34" charset="-120"/>
+              </a:rPr>
+              <a:t>※ 본 리스크 체크는 공부 및 브로커 확인 기반이며, 매수 전 전문 실사팀(변호사/건축사)을 통한 정밀 실사가 필요합니다.</a:t>
+            </a:r>
+            <a:endParaRPr lang="en-US" sz="1100" dirty="0"/>
+          </a:p>
+        </p:txBody>
+      </p:sp>
+      <p:sp>
+        <p:nvSpPr>
+          <p:cNvPr id="23" name="Text 21"/>
+          <p:cNvSpPr/>
+          <p:nvPr/>
+        </p:nvSpPr>
+        <p:spPr>
+          <a:xfrm>
+            <a:off x="566928" y="6382512"/>
+            <a:ext cx="7315200" cy="219456"/>
+          </a:xfrm>
+          <a:prstGeom prst="rect">
+            <a:avLst/>
+          </a:prstGeom>
+          <a:noFill/>
+          <a:ln/>
+        </p:spPr>
+        <p:txBody>
+          <a:bodyPr wrap="square" lIns="0" tIns="0" rIns="0" bIns="0" rtlCol="0" anchor="ctr"/>
+          <a:lstStyle/>
+          <a:p>
+            <a:pPr indent="0" marL="0">
+              <a:buNone/>
+            </a:pPr>
+            <a:r>
+              <a:rPr lang="en-US" sz="800" dirty="0">
+                <a:solidFill>
+                  <a:srgbClr val="718096"/>
+                </a:solidFill>
+                <a:latin typeface="Pretendard" pitchFamily="34" charset="0"/>
+                <a:ea typeface="Pretendard" pitchFamily="34" charset="-122"/>
+                <a:cs typeface="Pretendard" pitchFamily="34" charset="-120"/>
+              </a:rPr>
               <a:t>크리딜   |   </a:t>
             </a:r>
             <a:endParaRPr lang="en-US" sz="800" dirty="0"/>
@@ -7141,7 +7533,7 @@
       </p:sp>
       <p:sp>
         <p:nvSpPr>
-          <p:cNvPr id="14" name="Text 12"/>
+          <p:cNvPr id="24" name="Text 22"/>
           <p:cNvSpPr/>
           <p:nvPr/>
         </p:nvSpPr>
@@ -7189,13 +7581,6 @@
 <file path=ppt/slides/slide8.xml><?xml version="1.0" encoding="utf-8"?>
 <p:sld xmlns:a="http://schemas.openxmlformats.org/drawingml/2006/main" xmlns:r="http://schemas.openxmlformats.org/officeDocument/2006/relationships" xmlns:p="http://schemas.openxmlformats.org/presentationml/2006/main">
   <p:cSld name="Slide 8">
-    <p:bg>
-      <p:bgPr>
-        <a:solidFill>
-          <a:srgbClr val="FFFFFF"/>
-        </a:solidFill>
-      </p:bgPr>
-    </p:bg>
     <p:spTree>
       <p:nvGrpSpPr>
         <p:cNvPr id="1" name=""/>
@@ -7302,7 +7687,7 @@
                 <a:ea typeface="Arial" pitchFamily="34" charset="-122"/>
                 <a:cs typeface="Arial" pitchFamily="34" charset="-120"/>
               </a:rPr>
-              <a:t>Thesis</a:t>
+              <a:t>Checklist</a:t>
             </a:r>
             <a:endParaRPr lang="en-US" sz="950" dirty="0"/>
           </a:p>
@@ -7341,7 +7726,7 @@
                 <a:ea typeface="Pretendard" pitchFamily="34" charset="-122"/>
                 <a:cs typeface="Pretendard" pitchFamily="34" charset="-120"/>
               </a:rPr>
-              <a:t>왜 지금 이 빌딩을 사야 하는가</a:t>
+              <a:t>섹션 상세</a:t>
             </a:r>
             <a:endParaRPr lang="en-US" sz="2300" dirty="0"/>
           </a:p>
@@ -7349,1578 +7734,93 @@
       </p:sp>
       <p:sp>
         <p:nvSpPr>
-          <p:cNvPr id="6" name="Shape 4"/>
-          <p:cNvSpPr/>
-          <p:nvPr/>
-        </p:nvSpPr>
-        <p:spPr>
-          <a:xfrm>
-            <a:off x="566928" y="1325880"/>
-            <a:ext cx="5368900" cy="2560320"/>
-          </a:xfrm>
-          <a:prstGeom prst="roundRect">
-            <a:avLst>
-              <a:gd name="adj" fmla="val 2857"/>
-            </a:avLst>
-          </a:prstGeom>
-          <a:solidFill>
-            <a:srgbClr val="F7FAFC"/>
-          </a:solidFill>
-          <a:ln w="10160">
-            <a:solidFill>
-              <a:srgbClr val="CBD5E0"/>
-            </a:solidFill>
-            <a:prstDash val="solid"/>
-          </a:ln>
-        </p:spPr>
-      </p:sp>
-      <p:sp>
-        <p:nvSpPr>
-          <p:cNvPr id="7" name="Shape 5"/>
-          <p:cNvSpPr/>
-          <p:nvPr/>
-        </p:nvSpPr>
-        <p:spPr>
-          <a:xfrm>
-            <a:off x="566928" y="1325880"/>
-            <a:ext cx="5368900" cy="54864"/>
-          </a:xfrm>
-          <a:prstGeom prst="rect">
-            <a:avLst/>
-          </a:prstGeom>
-          <a:solidFill>
-            <a:srgbClr val="B98A2E"/>
-          </a:solidFill>
-          <a:ln/>
-        </p:spPr>
-      </p:sp>
-      <p:sp>
-        <p:nvSpPr>
-          <p:cNvPr id="8" name="Shape 6"/>
-          <p:cNvSpPr/>
-          <p:nvPr/>
-        </p:nvSpPr>
-        <p:spPr>
-          <a:xfrm>
-            <a:off x="795528" y="1600200"/>
-            <a:ext cx="475488" cy="292608"/>
-          </a:xfrm>
-          <a:prstGeom prst="roundRect">
-            <a:avLst>
-              <a:gd name="adj" fmla="val 12500"/>
-            </a:avLst>
-          </a:prstGeom>
-          <a:solidFill>
-            <a:srgbClr val="D9B668"/>
-          </a:solidFill>
-          <a:ln/>
-        </p:spPr>
-      </p:sp>
-      <p:sp>
-        <p:nvSpPr>
-          <p:cNvPr id="9" name="Text 7"/>
-          <p:cNvSpPr/>
-          <p:nvPr/>
-        </p:nvSpPr>
-        <p:spPr>
-          <a:xfrm>
-            <a:off x="795528" y="1600200"/>
-            <a:ext cx="475488" cy="292608"/>
-          </a:xfrm>
-          <a:prstGeom prst="rect">
-            <a:avLst/>
-          </a:prstGeom>
-          <a:noFill/>
-          <a:ln/>
-        </p:spPr>
-        <p:txBody>
-          <a:bodyPr wrap="square" lIns="0" tIns="0" rIns="0" bIns="0" rtlCol="0" anchor="ctr"/>
-          <a:lstStyle/>
-          <a:p>
-            <a:pPr algn="ctr" indent="0" marL="0">
-              <a:buNone/>
-            </a:pPr>
-            <a:r>
-              <a:rPr lang="en-US" sz="1100" b="1" dirty="0">
-                <a:solidFill>
-                  <a:srgbClr val="977024"/>
-                </a:solidFill>
-                <a:latin typeface="Arial" pitchFamily="34" charset="0"/>
-                <a:ea typeface="Arial" pitchFamily="34" charset="-122"/>
-                <a:cs typeface="Arial" pitchFamily="34" charset="-120"/>
-              </a:rPr>
-              <a:t>01</a:t>
-            </a:r>
-            <a:endParaRPr lang="en-US" sz="1100" dirty="0"/>
-          </a:p>
-        </p:txBody>
-      </p:sp>
-      <p:sp>
-        <p:nvSpPr>
-          <p:cNvPr id="10" name="Text 8"/>
-          <p:cNvSpPr/>
-          <p:nvPr/>
-        </p:nvSpPr>
-        <p:spPr>
-          <a:xfrm>
-            <a:off x="795528" y="2039112"/>
-            <a:ext cx="4911700" cy="365760"/>
-          </a:xfrm>
-          <a:prstGeom prst="rect">
-            <a:avLst/>
-          </a:prstGeom>
-          <a:noFill/>
-          <a:ln/>
-        </p:spPr>
-        <p:txBody>
-          <a:bodyPr wrap="square" lIns="0" tIns="0" rIns="0" bIns="0" rtlCol="0" anchor="t"/>
+          <p:cNvPr id="6" name="Text 4"/>
+          <p:cNvSpPr/>
+          <p:nvPr/>
+        </p:nvSpPr>
+        <p:spPr>
+          <a:xfrm>
+            <a:off x="566928" y="1517904"/>
+            <a:ext cx="6492240" cy="274320"/>
+          </a:xfrm>
+          <a:prstGeom prst="rect">
+            <a:avLst/>
+          </a:prstGeom>
+          <a:noFill/>
+          <a:ln/>
+        </p:spPr>
+        <p:txBody>
+          <a:bodyPr wrap="square" rtlCol="0" anchor="ctr"/>
           <a:lstStyle/>
           <a:p>
             <a:pPr indent="0" marL="0">
               <a:buNone/>
             </a:pPr>
-            <a:r>
-              <a:rPr lang="en-US" sz="1500" b="1" dirty="0">
-                <a:solidFill>
-                  <a:srgbClr val="10161F"/>
+            <a:endParaRPr lang="en-US" sz="1400" dirty="0"/>
+          </a:p>
+        </p:txBody>
+      </p:sp>
+      <p:sp>
+        <p:nvSpPr>
+          <p:cNvPr id="7" name="Text 5"/>
+          <p:cNvSpPr/>
+          <p:nvPr/>
+        </p:nvSpPr>
+        <p:spPr>
+          <a:xfrm>
+            <a:off x="566928" y="1874520"/>
+            <a:ext cx="6492240" cy="182880"/>
+          </a:xfrm>
+          <a:prstGeom prst="rect">
+            <a:avLst/>
+          </a:prstGeom>
+          <a:noFill/>
+          <a:ln/>
+        </p:spPr>
+        <p:txBody>
+          <a:bodyPr wrap="square" rtlCol="0" anchor="ctr"/>
+          <a:lstStyle/>
+          <a:p>
+            <a:pPr indent="0" marL="0">
+              <a:buNone/>
+            </a:pPr>
+            <a:endParaRPr lang="en-US" sz="900" dirty="0"/>
+          </a:p>
+        </p:txBody>
+      </p:sp>
+      <p:sp>
+        <p:nvSpPr>
+          <p:cNvPr id="8" name="Text 6"/>
+          <p:cNvSpPr/>
+          <p:nvPr/>
+        </p:nvSpPr>
+        <p:spPr>
+          <a:xfrm>
+            <a:off x="566928" y="6382512"/>
+            <a:ext cx="7315200" cy="219456"/>
+          </a:xfrm>
+          <a:prstGeom prst="rect">
+            <a:avLst/>
+          </a:prstGeom>
+          <a:noFill/>
+          <a:ln/>
+        </p:spPr>
+        <p:txBody>
+          <a:bodyPr wrap="square" lIns="0" tIns="0" rIns="0" bIns="0" rtlCol="0" anchor="ctr"/>
+          <a:lstStyle/>
+          <a:p>
+            <a:pPr indent="0" marL="0">
+              <a:buNone/>
+            </a:pPr>
+            <a:r>
+              <a:rPr lang="en-US" sz="800" dirty="0">
+                <a:solidFill>
+                  <a:srgbClr val="718096"/>
                 </a:solidFill>
                 <a:latin typeface="Pretendard" pitchFamily="34" charset="0"/>
                 <a:ea typeface="Pretendard" pitchFamily="34" charset="-122"/>
                 <a:cs typeface="Pretendard" pitchFamily="34" charset="-120"/>
               </a:rPr>
-              <a:t>확실한 월 현금흐름</a:t>
-            </a:r>
-            <a:endParaRPr lang="en-US" sz="1500" dirty="0"/>
-          </a:p>
-        </p:txBody>
-      </p:sp>
-      <p:sp>
-        <p:nvSpPr>
-          <p:cNvPr id="11" name="Shape 9"/>
-          <p:cNvSpPr/>
-          <p:nvPr/>
-        </p:nvSpPr>
-        <p:spPr>
-          <a:xfrm>
-            <a:off x="795528" y="2468880"/>
-            <a:ext cx="4911700" cy="0"/>
-          </a:xfrm>
-          <a:prstGeom prst="line">
-            <a:avLst/>
-          </a:prstGeom>
-          <a:noFill/>
-          <a:ln w="6350">
-            <a:solidFill>
-              <a:srgbClr val="CBD5E0"/>
-            </a:solidFill>
-            <a:prstDash val="solid"/>
-          </a:ln>
-        </p:spPr>
-      </p:sp>
-      <p:sp>
-        <p:nvSpPr>
-          <p:cNvPr id="12" name="Text 10"/>
-          <p:cNvSpPr/>
-          <p:nvPr/>
-        </p:nvSpPr>
-        <p:spPr>
-          <a:xfrm>
-            <a:off x="795528" y="2624328"/>
-            <a:ext cx="4911700" cy="1051560"/>
-          </a:xfrm>
-          <a:prstGeom prst="rect">
-            <a:avLst/>
-          </a:prstGeom>
-          <a:noFill/>
-          <a:ln/>
-        </p:spPr>
-        <p:txBody>
-          <a:bodyPr wrap="square" lIns="0" tIns="0" rIns="0" bIns="0" rtlCol="0" anchor="t"/>
-          <a:lstStyle/>
-          <a:p>
-            <a:pPr indent="0" marL="0">
-              <a:lnSpc>
-                <a:spcPct val="130000"/>
-              </a:lnSpc>
-              <a:buNone/>
-            </a:pPr>
-            <a:r>
-              <a:rPr lang="en-US" sz="1200" dirty="0">
-                <a:solidFill>
-                  <a:srgbClr val="10161F"/>
-                </a:solidFill>
-                <a:latin typeface="Pretendard" pitchFamily="34" charset="0"/>
-                <a:ea typeface="Pretendard" pitchFamily="34" charset="-122"/>
-                <a:cs typeface="Pretendard" pitchFamily="34" charset="-120"/>
-              </a:rPr>
-              <a:t>임대차 현황 및 공실률을 반영한 순영업소득(NOI) 분석은 수익분석 섹션을 참조하시기 바랍니다.</a:t>
-            </a:r>
-            <a:endParaRPr lang="en-US" sz="1200" dirty="0"/>
-          </a:p>
-        </p:txBody>
-      </p:sp>
-      <p:sp>
-        <p:nvSpPr>
-          <p:cNvPr id="13" name="Shape 11"/>
-          <p:cNvSpPr/>
-          <p:nvPr/>
-        </p:nvSpPr>
-        <p:spPr>
-          <a:xfrm>
-            <a:off x="6255868" y="1325880"/>
-            <a:ext cx="5368900" cy="2560320"/>
-          </a:xfrm>
-          <a:prstGeom prst="roundRect">
-            <a:avLst>
-              <a:gd name="adj" fmla="val 2857"/>
-            </a:avLst>
-          </a:prstGeom>
-          <a:solidFill>
-            <a:srgbClr val="F7FAFC"/>
-          </a:solidFill>
-          <a:ln w="10160">
-            <a:solidFill>
-              <a:srgbClr val="CBD5E0"/>
-            </a:solidFill>
-            <a:prstDash val="solid"/>
-          </a:ln>
-        </p:spPr>
-      </p:sp>
-      <p:sp>
-        <p:nvSpPr>
-          <p:cNvPr id="14" name="Shape 12"/>
-          <p:cNvSpPr/>
-          <p:nvPr/>
-        </p:nvSpPr>
-        <p:spPr>
-          <a:xfrm>
-            <a:off x="6255868" y="1325880"/>
-            <a:ext cx="5368900" cy="54864"/>
-          </a:xfrm>
-          <a:prstGeom prst="rect">
-            <a:avLst/>
-          </a:prstGeom>
-          <a:solidFill>
-            <a:srgbClr val="B98A2E"/>
-          </a:solidFill>
-          <a:ln/>
-        </p:spPr>
-      </p:sp>
-      <p:sp>
-        <p:nvSpPr>
-          <p:cNvPr id="15" name="Shape 13"/>
-          <p:cNvSpPr/>
-          <p:nvPr/>
-        </p:nvSpPr>
-        <p:spPr>
-          <a:xfrm>
-            <a:off x="6484468" y="1600200"/>
-            <a:ext cx="475488" cy="292608"/>
-          </a:xfrm>
-          <a:prstGeom prst="roundRect">
-            <a:avLst>
-              <a:gd name="adj" fmla="val 12500"/>
-            </a:avLst>
-          </a:prstGeom>
-          <a:solidFill>
-            <a:srgbClr val="D9B668"/>
-          </a:solidFill>
-          <a:ln/>
-        </p:spPr>
-      </p:sp>
-      <p:sp>
-        <p:nvSpPr>
-          <p:cNvPr id="16" name="Text 14"/>
-          <p:cNvSpPr/>
-          <p:nvPr/>
-        </p:nvSpPr>
-        <p:spPr>
-          <a:xfrm>
-            <a:off x="6484468" y="1600200"/>
-            <a:ext cx="475488" cy="292608"/>
-          </a:xfrm>
-          <a:prstGeom prst="rect">
-            <a:avLst/>
-          </a:prstGeom>
-          <a:noFill/>
-          <a:ln/>
-        </p:spPr>
-        <p:txBody>
-          <a:bodyPr wrap="square" lIns="0" tIns="0" rIns="0" bIns="0" rtlCol="0" anchor="ctr"/>
-          <a:lstStyle/>
-          <a:p>
-            <a:pPr algn="ctr" indent="0" marL="0">
-              <a:buNone/>
-            </a:pPr>
-            <a:r>
-              <a:rPr lang="en-US" sz="1100" b="1" dirty="0">
-                <a:solidFill>
-                  <a:srgbClr val="977024"/>
-                </a:solidFill>
-                <a:latin typeface="Arial" pitchFamily="34" charset="0"/>
-                <a:ea typeface="Arial" pitchFamily="34" charset="-122"/>
-                <a:cs typeface="Arial" pitchFamily="34" charset="-120"/>
-              </a:rPr>
-              <a:t>02</a:t>
-            </a:r>
-            <a:endParaRPr lang="en-US" sz="1100" dirty="0"/>
-          </a:p>
-        </p:txBody>
-      </p:sp>
-      <p:sp>
-        <p:nvSpPr>
-          <p:cNvPr id="17" name="Text 15"/>
-          <p:cNvSpPr/>
-          <p:nvPr/>
-        </p:nvSpPr>
-        <p:spPr>
-          <a:xfrm>
-            <a:off x="6484468" y="2039112"/>
-            <a:ext cx="4911700" cy="365760"/>
-          </a:xfrm>
-          <a:prstGeom prst="rect">
-            <a:avLst/>
-          </a:prstGeom>
-          <a:noFill/>
-          <a:ln/>
-        </p:spPr>
-        <p:txBody>
-          <a:bodyPr wrap="square" lIns="0" tIns="0" rIns="0" bIns="0" rtlCol="0" anchor="t"/>
-          <a:lstStyle/>
-          <a:p>
-            <a:pPr indent="0" marL="0">
-              <a:buNone/>
-            </a:pPr>
-            <a:r>
-              <a:rPr lang="en-US" sz="1500" b="1" dirty="0">
-                <a:solidFill>
-                  <a:srgbClr val="10161F"/>
-                </a:solidFill>
-                <a:latin typeface="Pretendard" pitchFamily="34" charset="0"/>
-                <a:ea typeface="Pretendard" pitchFamily="34" charset="-122"/>
-                <a:cs typeface="Pretendard" pitchFamily="34" charset="-120"/>
-              </a:rPr>
-              <a:t>가치 상승 및 출구 전략</a:t>
-            </a:r>
-            <a:endParaRPr lang="en-US" sz="1500" dirty="0"/>
-          </a:p>
-        </p:txBody>
-      </p:sp>
-      <p:sp>
-        <p:nvSpPr>
-          <p:cNvPr id="18" name="Shape 16"/>
-          <p:cNvSpPr/>
-          <p:nvPr/>
-        </p:nvSpPr>
-        <p:spPr>
-          <a:xfrm>
-            <a:off x="6484468" y="2468880"/>
-            <a:ext cx="4911700" cy="0"/>
-          </a:xfrm>
-          <a:prstGeom prst="line">
-            <a:avLst/>
-          </a:prstGeom>
-          <a:noFill/>
-          <a:ln w="6350">
-            <a:solidFill>
-              <a:srgbClr val="CBD5E0"/>
-            </a:solidFill>
-            <a:prstDash val="solid"/>
-          </a:ln>
-        </p:spPr>
-      </p:sp>
-      <p:sp>
-        <p:nvSpPr>
-          <p:cNvPr id="19" name="Text 17"/>
-          <p:cNvSpPr/>
-          <p:nvPr/>
-        </p:nvSpPr>
-        <p:spPr>
-          <a:xfrm>
-            <a:off x="6484468" y="2624328"/>
-            <a:ext cx="4911700" cy="1051560"/>
-          </a:xfrm>
-          <a:prstGeom prst="rect">
-            <a:avLst/>
-          </a:prstGeom>
-          <a:noFill/>
-          <a:ln/>
-        </p:spPr>
-        <p:txBody>
-          <a:bodyPr wrap="square" lIns="0" tIns="0" rIns="0" bIns="0" rtlCol="0" anchor="t"/>
-          <a:lstStyle/>
-          <a:p>
-            <a:pPr indent="0" marL="0">
-              <a:lnSpc>
-                <a:spcPct val="130000"/>
-              </a:lnSpc>
-              <a:buNone/>
-            </a:pPr>
-            <a:r>
-              <a:rPr lang="en-US" sz="1200" dirty="0">
-                <a:solidFill>
-                  <a:srgbClr val="10161F"/>
-                </a:solidFill>
-                <a:latin typeface="Pretendard" pitchFamily="34" charset="0"/>
-                <a:ea typeface="Pretendard" pitchFamily="34" charset="-122"/>
-                <a:cs typeface="Pretendard" pitchFamily="34" charset="-120"/>
-              </a:rPr>
-              <a:t>현행 공법 여력을 활용한 밸류업 기회와 더불어 향후 권역 지가 상승에 따른 시세차익 실현이 유력합니다. ### 예상 매수자 유형 (AI 분석)</a:t>
-            </a:r>
-            <a:endParaRPr lang="en-US" sz="1200" dirty="0"/>
-          </a:p>
-        </p:txBody>
-      </p:sp>
-      <p:graphicFrame>
-        <p:nvGraphicFramePr>
-          <p:cNvPr id="9" name="Table 0"/>
-          <p:cNvGraphicFramePr>
-            <a:graphicFrameLocks noGrp="1"/>
-          </p:cNvGraphicFramePr>
-          <p:nvPr>
-            <p:extLst>
-              <p:ext uri="{D42A27DB-BD31-4B8C-83A1-F6EECF244321}">
-                <p14:modId xmlns:p14="http://schemas.microsoft.com/office/powerpoint/2010/main" val="1579011935"/>
-              </p:ext>
-            </p:extLst>
-          </p:nvPr>
-        </p:nvGraphicFramePr>
-        <p:xfrm>
-          <a:off x="566928" y="4023360"/>
-          <a:ext cx="11057839" cy="914400"/>
-        </p:xfrm>
-        <a:graphic>
-          <a:graphicData uri="http://schemas.openxmlformats.org/drawingml/2006/table">
-            <a:tbl>
-              <a:tblPr/>
-              <a:tblGrid>
-                <a:gridCol w="3685946"/>
-                <a:gridCol w="3685946"/>
-                <a:gridCol w="3685946"/>
-              </a:tblGrid>
-              <a:tr h="329184">
-                <a:tc>
-                  <a:txBody>
-                    <a:bodyPr/>
-                    <a:lstStyle/>
-                    <a:p>
-                      <a:pPr indent="0" marL="0">
-                        <a:buNone/>
-                      </a:pPr>
-                      <a:r>
-                        <a:rPr lang="en-US" sz="1050" b="1" dirty="0">
-                          <a:solidFill>
-                            <a:srgbClr val="718096"/>
-                          </a:solidFill>
-                          <a:latin typeface="Pretendard" pitchFamily="34" charset="0"/>
-                          <a:ea typeface="Pretendard" pitchFamily="34" charset="-122"/>
-                          <a:cs typeface="Pretendard" pitchFamily="34" charset="-120"/>
-                        </a:rPr>
-                        <a:t>유형</a:t>
-                      </a:r>
-                      <a:endParaRPr lang="en-US" sz="1050" dirty="0">
-                        <a:latin typeface="Pretendard" charset="0"/>
-                        <a:ea typeface="Pretendard" charset="0"/>
-                        <a:cs typeface="Pretendard" charset="0"/>
-                      </a:endParaRPr>
-                    </a:p>
-                  </a:txBody>
-                  <a:tcPr marL="50800" marR="50800" marT="25400" marB="25400" anchor="ctr">
-                    <a:lnL w="3810" cap="flat" cmpd="sng" algn="ctr">
-                      <a:solidFill>
-                        <a:srgbClr val="CBD5E0"/>
-                      </a:solidFill>
-                      <a:prstDash val="solid"/>
-                      <a:round/>
-                      <a:headEnd type="none" w="med" len="med"/>
-                      <a:tailEnd type="none" w="med" len="med"/>
-                    </a:lnL>
-                    <a:lnR w="3810" cap="flat" cmpd="sng" algn="ctr">
-                      <a:solidFill>
-                        <a:srgbClr val="CBD5E0"/>
-                      </a:solidFill>
-                      <a:prstDash val="solid"/>
-                      <a:round/>
-                      <a:headEnd type="none" w="med" len="med"/>
-                      <a:tailEnd type="none" w="med" len="med"/>
-                    </a:lnR>
-                    <a:lnT w="3810" cap="flat" cmpd="sng" algn="ctr">
-                      <a:solidFill>
-                        <a:srgbClr val="CBD5E0"/>
-                      </a:solidFill>
-                      <a:prstDash val="solid"/>
-                      <a:round/>
-                      <a:headEnd type="none" w="med" len="med"/>
-                      <a:tailEnd type="none" w="med" len="med"/>
-                    </a:lnT>
-                    <a:lnB w="3810" cap="flat" cmpd="sng" algn="ctr">
-                      <a:solidFill>
-                        <a:srgbClr val="CBD5E0"/>
-                      </a:solidFill>
-                      <a:prstDash val="solid"/>
-                      <a:round/>
-                      <a:headEnd type="none" w="med" len="med"/>
-                      <a:tailEnd type="none" w="med" len="med"/>
-                    </a:lnB>
-                    <a:solidFill>
-                      <a:srgbClr val="F7FAFC"/>
-                    </a:solidFill>
-                  </a:tcPr>
-                </a:tc>
-                <a:tc>
-                  <a:txBody>
-                    <a:bodyPr/>
-                    <a:lstStyle/>
-                    <a:p>
-                      <a:pPr indent="0" marL="0">
-                        <a:buNone/>
-                      </a:pPr>
-                      <a:r>
-                        <a:rPr lang="en-US" sz="1050" b="1" dirty="0">
-                          <a:solidFill>
-                            <a:srgbClr val="718096"/>
-                          </a:solidFill>
-                          <a:latin typeface="Pretendard" pitchFamily="34" charset="0"/>
-                          <a:ea typeface="Pretendard" pitchFamily="34" charset="-122"/>
-                          <a:cs typeface="Pretendard" pitchFamily="34" charset="-120"/>
-                        </a:rPr>
-                        <a:t>적합도</a:t>
-                      </a:r>
-                      <a:endParaRPr lang="en-US" sz="1050" dirty="0">
-                        <a:latin typeface="Pretendard" charset="0"/>
-                        <a:ea typeface="Pretendard" charset="0"/>
-                        <a:cs typeface="Pretendard" charset="0"/>
-                      </a:endParaRPr>
-                    </a:p>
-                  </a:txBody>
-                  <a:tcPr marL="50800" marR="50800" marT="25400" marB="25400" anchor="ctr">
-                    <a:lnL w="3810" cap="flat" cmpd="sng" algn="ctr">
-                      <a:solidFill>
-                        <a:srgbClr val="CBD5E0"/>
-                      </a:solidFill>
-                      <a:prstDash val="solid"/>
-                      <a:round/>
-                      <a:headEnd type="none" w="med" len="med"/>
-                      <a:tailEnd type="none" w="med" len="med"/>
-                    </a:lnL>
-                    <a:lnR w="3810" cap="flat" cmpd="sng" algn="ctr">
-                      <a:solidFill>
-                        <a:srgbClr val="CBD5E0"/>
-                      </a:solidFill>
-                      <a:prstDash val="solid"/>
-                      <a:round/>
-                      <a:headEnd type="none" w="med" len="med"/>
-                      <a:tailEnd type="none" w="med" len="med"/>
-                    </a:lnR>
-                    <a:lnT w="3810" cap="flat" cmpd="sng" algn="ctr">
-                      <a:solidFill>
-                        <a:srgbClr val="CBD5E0"/>
-                      </a:solidFill>
-                      <a:prstDash val="solid"/>
-                      <a:round/>
-                      <a:headEnd type="none" w="med" len="med"/>
-                      <a:tailEnd type="none" w="med" len="med"/>
-                    </a:lnT>
-                    <a:lnB w="3810" cap="flat" cmpd="sng" algn="ctr">
-                      <a:solidFill>
-                        <a:srgbClr val="CBD5E0"/>
-                      </a:solidFill>
-                      <a:prstDash val="solid"/>
-                      <a:round/>
-                      <a:headEnd type="none" w="med" len="med"/>
-                      <a:tailEnd type="none" w="med" len="med"/>
-                    </a:lnB>
-                    <a:solidFill>
-                      <a:srgbClr val="F7FAFC"/>
-                    </a:solidFill>
-                  </a:tcPr>
-                </a:tc>
-                <a:tc>
-                  <a:txBody>
-                    <a:bodyPr/>
-                    <a:lstStyle/>
-                    <a:p>
-                      <a:pPr indent="0" marL="0">
-                        <a:buNone/>
-                      </a:pPr>
-                      <a:r>
-                        <a:rPr lang="en-US" sz="1050" b="1" dirty="0">
-                          <a:solidFill>
-                            <a:srgbClr val="718096"/>
-                          </a:solidFill>
-                          <a:latin typeface="Pretendard" pitchFamily="34" charset="0"/>
-                          <a:ea typeface="Pretendard" pitchFamily="34" charset="-122"/>
-                          <a:cs typeface="Pretendard" pitchFamily="34" charset="-120"/>
-                        </a:rPr>
-                        <a:t>이유</a:t>
-                      </a:r>
-                      <a:endParaRPr lang="en-US" sz="1050" dirty="0">
-                        <a:latin typeface="Pretendard" charset="0"/>
-                        <a:ea typeface="Pretendard" charset="0"/>
-                        <a:cs typeface="Pretendard" charset="0"/>
-                      </a:endParaRPr>
-                    </a:p>
-                  </a:txBody>
-                  <a:tcPr marL="50800" marR="50800" marT="25400" marB="25400" anchor="ctr">
-                    <a:lnL w="3810" cap="flat" cmpd="sng" algn="ctr">
-                      <a:solidFill>
-                        <a:srgbClr val="CBD5E0"/>
-                      </a:solidFill>
-                      <a:prstDash val="solid"/>
-                      <a:round/>
-                      <a:headEnd type="none" w="med" len="med"/>
-                      <a:tailEnd type="none" w="med" len="med"/>
-                    </a:lnL>
-                    <a:lnR w="3810" cap="flat" cmpd="sng" algn="ctr">
-                      <a:solidFill>
-                        <a:srgbClr val="CBD5E0"/>
-                      </a:solidFill>
-                      <a:prstDash val="solid"/>
-                      <a:round/>
-                      <a:headEnd type="none" w="med" len="med"/>
-                      <a:tailEnd type="none" w="med" len="med"/>
-                    </a:lnR>
-                    <a:lnT w="3810" cap="flat" cmpd="sng" algn="ctr">
-                      <a:solidFill>
-                        <a:srgbClr val="CBD5E0"/>
-                      </a:solidFill>
-                      <a:prstDash val="solid"/>
-                      <a:round/>
-                      <a:headEnd type="none" w="med" len="med"/>
-                      <a:tailEnd type="none" w="med" len="med"/>
-                    </a:lnT>
-                    <a:lnB w="3810" cap="flat" cmpd="sng" algn="ctr">
-                      <a:solidFill>
-                        <a:srgbClr val="CBD5E0"/>
-                      </a:solidFill>
-                      <a:prstDash val="solid"/>
-                      <a:round/>
-                      <a:headEnd type="none" w="med" len="med"/>
-                      <a:tailEnd type="none" w="med" len="med"/>
-                    </a:lnB>
-                    <a:solidFill>
-                      <a:srgbClr val="F7FAFC"/>
-                    </a:solidFill>
-                  </a:tcPr>
-                </a:tc>
-              </a:tr>
-              <a:tr h="329184">
-                <a:tc>
-                  <a:txBody>
-                    <a:bodyPr/>
-                    <a:lstStyle/>
-                    <a:p>
-                      <a:pPr indent="0" marL="0">
-                        <a:buNone/>
-                      </a:pPr>
-                      <a:r>
-                        <a:rPr lang="en-US" sz="1050" b="1" dirty="0">
-                          <a:solidFill>
-                            <a:srgbClr val="10161F"/>
-                          </a:solidFill>
-                          <a:latin typeface="Pretendard" pitchFamily="34" charset="0"/>
-                          <a:ea typeface="Pretendard" pitchFamily="34" charset="-122"/>
-                          <a:cs typeface="Pretendard" pitchFamily="34" charset="-120"/>
-                        </a:rPr>
-                        <a:t>(임대수익)</a:t>
-                      </a:r>
-                      <a:endParaRPr lang="en-US" sz="1050" dirty="0">
-                        <a:latin typeface="Pretendard" charset="0"/>
-                        <a:ea typeface="Pretendard" charset="0"/>
-                        <a:cs typeface="Pretendard" charset="0"/>
-                      </a:endParaRPr>
-                    </a:p>
-                  </a:txBody>
-                  <a:tcPr marL="50800" marR="50800" marT="25400" marB="25400" anchor="ctr">
-                    <a:lnL w="3810" cap="flat" cmpd="sng" algn="ctr">
-                      <a:solidFill>
-                        <a:srgbClr val="CBD5E0"/>
-                      </a:solidFill>
-                      <a:prstDash val="solid"/>
-                      <a:round/>
-                      <a:headEnd type="none" w="med" len="med"/>
-                      <a:tailEnd type="none" w="med" len="med"/>
-                    </a:lnL>
-                    <a:lnR w="3810" cap="flat" cmpd="sng" algn="ctr">
-                      <a:solidFill>
-                        <a:srgbClr val="CBD5E0"/>
-                      </a:solidFill>
-                      <a:prstDash val="solid"/>
-                      <a:round/>
-                      <a:headEnd type="none" w="med" len="med"/>
-                      <a:tailEnd type="none" w="med" len="med"/>
-                    </a:lnR>
-                    <a:lnT w="3810" cap="flat" cmpd="sng" algn="ctr">
-                      <a:solidFill>
-                        <a:srgbClr val="CBD5E0"/>
-                      </a:solidFill>
-                      <a:prstDash val="solid"/>
-                      <a:round/>
-                      <a:headEnd type="none" w="med" len="med"/>
-                      <a:tailEnd type="none" w="med" len="med"/>
-                    </a:lnT>
-                    <a:lnB w="3810" cap="flat" cmpd="sng" algn="ctr">
-                      <a:solidFill>
-                        <a:srgbClr val="CBD5E0"/>
-                      </a:solidFill>
-                      <a:prstDash val="solid"/>
-                      <a:round/>
-                      <a:headEnd type="none" w="med" len="med"/>
-                      <a:tailEnd type="none" w="med" len="med"/>
-                    </a:lnB>
-                    <a:solidFill>
-                      <a:srgbClr val="FFFFFF"/>
-                    </a:solidFill>
-                  </a:tcPr>
-                </a:tc>
-                <a:tc>
-                  <a:txBody>
-                    <a:bodyPr/>
-                    <a:lstStyle/>
-                    <a:p>
-                      <a:pPr indent="0" marL="0">
-                        <a:buNone/>
-                      </a:pPr>
-                      <a:r>
-                        <a:rPr lang="en-US" sz="1050" dirty="0">
-                          <a:solidFill>
-                            <a:srgbClr val="10161F"/>
-                          </a:solidFill>
-                          <a:latin typeface="Pretendard" pitchFamily="34" charset="0"/>
-                          <a:ea typeface="Pretendard" pitchFamily="34" charset="-122"/>
-                          <a:cs typeface="Pretendard" pitchFamily="34" charset="-120"/>
-                        </a:rPr>
-                        <a:t>최적합</a:t>
-                      </a:r>
-                      <a:endParaRPr lang="en-US" sz="1050" dirty="0">
-                        <a:latin typeface="Pretendard" charset="0"/>
-                        <a:ea typeface="Pretendard" charset="0"/>
-                        <a:cs typeface="Pretendard" charset="0"/>
-                      </a:endParaRPr>
-                    </a:p>
-                  </a:txBody>
-                  <a:tcPr marL="50800" marR="50800" marT="25400" marB="25400" anchor="ctr">
-                    <a:lnL w="3810" cap="flat" cmpd="sng" algn="ctr">
-                      <a:solidFill>
-                        <a:srgbClr val="CBD5E0"/>
-                      </a:solidFill>
-                      <a:prstDash val="solid"/>
-                      <a:round/>
-                      <a:headEnd type="none" w="med" len="med"/>
-                      <a:tailEnd type="none" w="med" len="med"/>
-                    </a:lnL>
-                    <a:lnR w="3810" cap="flat" cmpd="sng" algn="ctr">
-                      <a:solidFill>
-                        <a:srgbClr val="CBD5E0"/>
-                      </a:solidFill>
-                      <a:prstDash val="solid"/>
-                      <a:round/>
-                      <a:headEnd type="none" w="med" len="med"/>
-                      <a:tailEnd type="none" w="med" len="med"/>
-                    </a:lnR>
-                    <a:lnT w="3810" cap="flat" cmpd="sng" algn="ctr">
-                      <a:solidFill>
-                        <a:srgbClr val="CBD5E0"/>
-                      </a:solidFill>
-                      <a:prstDash val="solid"/>
-                      <a:round/>
-                      <a:headEnd type="none" w="med" len="med"/>
-                      <a:tailEnd type="none" w="med" len="med"/>
-                    </a:lnT>
-                    <a:lnB w="3810" cap="flat" cmpd="sng" algn="ctr">
-                      <a:solidFill>
-                        <a:srgbClr val="CBD5E0"/>
-                      </a:solidFill>
-                      <a:prstDash val="solid"/>
-                      <a:round/>
-                      <a:headEnd type="none" w="med" len="med"/>
-                      <a:tailEnd type="none" w="med" len="med"/>
-                    </a:lnB>
-                    <a:solidFill>
-                      <a:srgbClr val="FFFFFF"/>
-                    </a:solidFill>
-                  </a:tcPr>
-                </a:tc>
-                <a:tc>
-                  <a:txBody>
-                    <a:bodyPr/>
-                    <a:lstStyle/>
-                    <a:p>
-                      <a:pPr indent="0" marL="0">
-                        <a:buNone/>
-                      </a:pPr>
-                      <a:r>
-                        <a:rPr lang="en-US" sz="1050" dirty="0">
-                          <a:solidFill>
-                            <a:srgbClr val="10161F"/>
-                          </a:solidFill>
-                          <a:latin typeface="Pretendard" pitchFamily="34" charset="0"/>
-                          <a:ea typeface="Pretendard" pitchFamily="34" charset="-122"/>
-                          <a:cs typeface="Pretendard" pitchFamily="34" charset="-120"/>
-                        </a:rPr>
-                        <a:t>소형 </a:t>
-                      </a:r>
-                      <a:pPr indent="0" marL="0">
-                        <a:buNone/>
-                      </a:pPr>
-                      <a:r>
-                        <a:rPr lang="en-US" sz="1050" dirty="0">
-                          <a:solidFill>
-                            <a:srgbClr val="10161F"/>
-                          </a:solidFill>
-                          <a:latin typeface="Pretendard" pitchFamily="34" charset="0"/>
-                          <a:ea typeface="Pretendard" pitchFamily="34" charset="-122"/>
-                          <a:cs typeface="Pretendard" pitchFamily="34" charset="-120"/>
-                        </a:rPr>
-                        <a:t>빌딩 </a:t>
-                      </a:r>
-                      <a:pPr indent="0" marL="0">
-                        <a:buNone/>
-                      </a:pPr>
-                      <a:r>
-                        <a:rPr lang="en-US" sz="1050" dirty="0">
-                          <a:solidFill>
-                            <a:srgbClr val="10161F"/>
-                          </a:solidFill>
-                          <a:latin typeface="Pretendard" pitchFamily="34" charset="0"/>
-                          <a:ea typeface="Pretendard" pitchFamily="34" charset="-122"/>
-                          <a:cs typeface="Pretendard" pitchFamily="34" charset="-120"/>
-                        </a:rPr>
-                        <a:t>안정 </a:t>
-                      </a:r>
-                      <a:pPr indent="0" marL="0">
-                        <a:buNone/>
-                      </a:pPr>
-                      <a:r>
-                        <a:rPr lang="en-US" sz="1050" dirty="0">
-                          <a:solidFill>
-                            <a:srgbClr val="10161F"/>
-                          </a:solidFill>
-                          <a:latin typeface="Pretendard" pitchFamily="34" charset="0"/>
-                          <a:ea typeface="Pretendard" pitchFamily="34" charset="-122"/>
-                          <a:cs typeface="Pretendard" pitchFamily="34" charset="-120"/>
-                        </a:rPr>
-                        <a:t>수익 </a:t>
-                      </a:r>
-                      <a:pPr indent="0" marL="0">
-                        <a:buNone/>
-                      </a:pPr>
-                      <a:r>
-                        <a:rPr lang="en-US" sz="1050" dirty="0">
-                          <a:solidFill>
-                            <a:srgbClr val="10161F"/>
-                          </a:solidFill>
-                          <a:latin typeface="Pretendard" pitchFamily="34" charset="0"/>
-                          <a:ea typeface="Pretendard" pitchFamily="34" charset="-122"/>
-                          <a:cs typeface="Pretendard" pitchFamily="34" charset="-120"/>
-                        </a:rPr>
-                        <a:t>최적</a:t>
-                      </a:r>
-                      <a:endParaRPr lang="en-US" sz="1050" dirty="0">
-                        <a:latin typeface="Pretendard" charset="0"/>
-                        <a:ea typeface="Pretendard" charset="0"/>
-                        <a:cs typeface="Pretendard" charset="0"/>
-                      </a:endParaRPr>
-                    </a:p>
-                  </a:txBody>
-                  <a:tcPr marL="50800" marR="50800" marT="25400" marB="25400" anchor="ctr">
-                    <a:lnL w="3810" cap="flat" cmpd="sng" algn="ctr">
-                      <a:solidFill>
-                        <a:srgbClr val="CBD5E0"/>
-                      </a:solidFill>
-                      <a:prstDash val="solid"/>
-                      <a:round/>
-                      <a:headEnd type="none" w="med" len="med"/>
-                      <a:tailEnd type="none" w="med" len="med"/>
-                    </a:lnL>
-                    <a:lnR w="3810" cap="flat" cmpd="sng" algn="ctr">
-                      <a:solidFill>
-                        <a:srgbClr val="CBD5E0"/>
-                      </a:solidFill>
-                      <a:prstDash val="solid"/>
-                      <a:round/>
-                      <a:headEnd type="none" w="med" len="med"/>
-                      <a:tailEnd type="none" w="med" len="med"/>
-                    </a:lnR>
-                    <a:lnT w="3810" cap="flat" cmpd="sng" algn="ctr">
-                      <a:solidFill>
-                        <a:srgbClr val="CBD5E0"/>
-                      </a:solidFill>
-                      <a:prstDash val="solid"/>
-                      <a:round/>
-                      <a:headEnd type="none" w="med" len="med"/>
-                      <a:tailEnd type="none" w="med" len="med"/>
-                    </a:lnT>
-                    <a:lnB w="3810" cap="flat" cmpd="sng" algn="ctr">
-                      <a:solidFill>
-                        <a:srgbClr val="CBD5E0"/>
-                      </a:solidFill>
-                      <a:prstDash val="solid"/>
-                      <a:round/>
-                      <a:headEnd type="none" w="med" len="med"/>
-                      <a:tailEnd type="none" w="med" len="med"/>
-                    </a:lnB>
-                    <a:solidFill>
-                      <a:srgbClr val="FFFFFF"/>
-                    </a:solidFill>
-                  </a:tcPr>
-                </a:tc>
-              </a:tr>
-              <a:tr h="329184">
-                <a:tc>
-                  <a:txBody>
-                    <a:bodyPr/>
-                    <a:lstStyle/>
-                    <a:p>
-                      <a:pPr indent="0" marL="0">
-                        <a:buNone/>
-                      </a:pPr>
-                      <a:r>
-                        <a:rPr lang="en-US" sz="1050" b="1" dirty="0">
-                          <a:solidFill>
-                            <a:srgbClr val="10161F"/>
-                          </a:solidFill>
-                          <a:latin typeface="Pretendard" pitchFamily="34" charset="0"/>
-                          <a:ea typeface="Pretendard" pitchFamily="34" charset="-122"/>
-                          <a:cs typeface="Pretendard" pitchFamily="34" charset="-120"/>
-                        </a:rPr>
-                        <a:t>법인 </a:t>
-                      </a:r>
-                      <a:pPr indent="0" marL="0">
-                        <a:buNone/>
-                      </a:pPr>
-                      <a:r>
-                        <a:rPr lang="en-US" sz="1050" b="1" dirty="0">
-                          <a:solidFill>
-                            <a:srgbClr val="10161F"/>
-                          </a:solidFill>
-                          <a:latin typeface="Pretendard" pitchFamily="34" charset="0"/>
-                          <a:ea typeface="Pretendard" pitchFamily="34" charset="-122"/>
-                          <a:cs typeface="Pretendard" pitchFamily="34" charset="-120"/>
-                        </a:rPr>
-                        <a:t>사옥 </a:t>
-                      </a:r>
-                      <a:pPr indent="0" marL="0">
-                        <a:buNone/>
-                      </a:pPr>
-                      <a:r>
-                        <a:rPr lang="en-US" sz="1050" b="1" dirty="0">
-                          <a:solidFill>
-                            <a:srgbClr val="10161F"/>
-                          </a:solidFill>
-                          <a:latin typeface="Pretendard" pitchFamily="34" charset="0"/>
-                          <a:ea typeface="Pretendard" pitchFamily="34" charset="-122"/>
-                          <a:cs typeface="Pretendard" pitchFamily="34" charset="-120"/>
-                        </a:rPr>
-                        <a:t>이전</a:t>
-                      </a:r>
-                      <a:endParaRPr lang="en-US" sz="1050" dirty="0">
-                        <a:latin typeface="Pretendard" charset="0"/>
-                        <a:ea typeface="Pretendard" charset="0"/>
-                        <a:cs typeface="Pretendard" charset="0"/>
-                      </a:endParaRPr>
-                    </a:p>
-                  </a:txBody>
-                  <a:tcPr marL="50800" marR="50800" marT="25400" marB="25400" anchor="ctr">
-                    <a:lnL w="3810" cap="flat" cmpd="sng" algn="ctr">
-                      <a:solidFill>
-                        <a:srgbClr val="CBD5E0"/>
-                      </a:solidFill>
-                      <a:prstDash val="solid"/>
-                      <a:round/>
-                      <a:headEnd type="none" w="med" len="med"/>
-                      <a:tailEnd type="none" w="med" len="med"/>
-                    </a:lnL>
-                    <a:lnR w="3810" cap="flat" cmpd="sng" algn="ctr">
-                      <a:solidFill>
-                        <a:srgbClr val="CBD5E0"/>
-                      </a:solidFill>
-                      <a:prstDash val="solid"/>
-                      <a:round/>
-                      <a:headEnd type="none" w="med" len="med"/>
-                      <a:tailEnd type="none" w="med" len="med"/>
-                    </a:lnR>
-                    <a:lnT w="3810" cap="flat" cmpd="sng" algn="ctr">
-                      <a:solidFill>
-                        <a:srgbClr val="CBD5E0"/>
-                      </a:solidFill>
-                      <a:prstDash val="solid"/>
-                      <a:round/>
-                      <a:headEnd type="none" w="med" len="med"/>
-                      <a:tailEnd type="none" w="med" len="med"/>
-                    </a:lnT>
-                    <a:lnB w="3810" cap="flat" cmpd="sng" algn="ctr">
-                      <a:solidFill>
-                        <a:srgbClr val="CBD5E0"/>
-                      </a:solidFill>
-                      <a:prstDash val="solid"/>
-                      <a:round/>
-                      <a:headEnd type="none" w="med" len="med"/>
-                      <a:tailEnd type="none" w="med" len="med"/>
-                    </a:lnB>
-                    <a:solidFill>
-                      <a:srgbClr val="F7FAFC"/>
-                    </a:solidFill>
-                  </a:tcPr>
-                </a:tc>
-                <a:tc>
-                  <a:txBody>
-                    <a:bodyPr/>
-                    <a:lstStyle/>
-                    <a:p>
-                      <a:pPr indent="0" marL="0">
-                        <a:buNone/>
-                      </a:pPr>
-                      <a:r>
-                        <a:rPr lang="en-US" sz="1050" dirty="0">
-                          <a:solidFill>
-                            <a:srgbClr val="10161F"/>
-                          </a:solidFill>
-                          <a:latin typeface="Pretendard" pitchFamily="34" charset="0"/>
-                          <a:ea typeface="Pretendard" pitchFamily="34" charset="-122"/>
-                          <a:cs typeface="Pretendard" pitchFamily="34" charset="-120"/>
-                        </a:rPr>
-                        <a:t>적합</a:t>
-                      </a:r>
-                      <a:endParaRPr lang="en-US" sz="1050" dirty="0">
-                        <a:latin typeface="Pretendard" charset="0"/>
-                        <a:ea typeface="Pretendard" charset="0"/>
-                        <a:cs typeface="Pretendard" charset="0"/>
-                      </a:endParaRPr>
-                    </a:p>
-                  </a:txBody>
-                  <a:tcPr marL="50800" marR="50800" marT="25400" marB="25400" anchor="ctr">
-                    <a:lnL w="3810" cap="flat" cmpd="sng" algn="ctr">
-                      <a:solidFill>
-                        <a:srgbClr val="CBD5E0"/>
-                      </a:solidFill>
-                      <a:prstDash val="solid"/>
-                      <a:round/>
-                      <a:headEnd type="none" w="med" len="med"/>
-                      <a:tailEnd type="none" w="med" len="med"/>
-                    </a:lnL>
-                    <a:lnR w="3810" cap="flat" cmpd="sng" algn="ctr">
-                      <a:solidFill>
-                        <a:srgbClr val="CBD5E0"/>
-                      </a:solidFill>
-                      <a:prstDash val="solid"/>
-                      <a:round/>
-                      <a:headEnd type="none" w="med" len="med"/>
-                      <a:tailEnd type="none" w="med" len="med"/>
-                    </a:lnR>
-                    <a:lnT w="3810" cap="flat" cmpd="sng" algn="ctr">
-                      <a:solidFill>
-                        <a:srgbClr val="CBD5E0"/>
-                      </a:solidFill>
-                      <a:prstDash val="solid"/>
-                      <a:round/>
-                      <a:headEnd type="none" w="med" len="med"/>
-                      <a:tailEnd type="none" w="med" len="med"/>
-                    </a:lnT>
-                    <a:lnB w="3810" cap="flat" cmpd="sng" algn="ctr">
-                      <a:solidFill>
-                        <a:srgbClr val="CBD5E0"/>
-                      </a:solidFill>
-                      <a:prstDash val="solid"/>
-                      <a:round/>
-                      <a:headEnd type="none" w="med" len="med"/>
-                      <a:tailEnd type="none" w="med" len="med"/>
-                    </a:lnB>
-                    <a:solidFill>
-                      <a:srgbClr val="F7FAFC"/>
-                    </a:solidFill>
-                  </a:tcPr>
-                </a:tc>
-                <a:tc>
-                  <a:txBody>
-                    <a:bodyPr/>
-                    <a:lstStyle/>
-                    <a:p>
-                      <a:pPr indent="0" marL="0">
-                        <a:buNone/>
-                      </a:pPr>
-                      <a:r>
-                        <a:rPr lang="en-US" sz="1050" dirty="0">
-                          <a:solidFill>
-                            <a:srgbClr val="10161F"/>
-                          </a:solidFill>
-                          <a:latin typeface="Pretendard" pitchFamily="34" charset="0"/>
-                          <a:ea typeface="Pretendard" pitchFamily="34" charset="-122"/>
-                          <a:cs typeface="Pretendard" pitchFamily="34" charset="-120"/>
-                        </a:rPr>
-                        <a:t>강남권역 </a:t>
-                      </a:r>
-                      <a:pPr indent="0" marL="0">
-                        <a:buNone/>
-                      </a:pPr>
-                      <a:r>
-                        <a:rPr lang="en-US" sz="1050" dirty="0">
-                          <a:solidFill>
-                            <a:srgbClr val="10161F"/>
-                          </a:solidFill>
-                          <a:latin typeface="Pretendard" pitchFamily="34" charset="0"/>
-                          <a:ea typeface="Pretendard" pitchFamily="34" charset="-122"/>
-                          <a:cs typeface="Pretendard" pitchFamily="34" charset="-120"/>
-                        </a:rPr>
-                        <a:t>직주근접</a:t>
-                      </a:r>
-                      <a:endParaRPr lang="en-US" sz="1050" dirty="0">
-                        <a:latin typeface="Pretendard" charset="0"/>
-                        <a:ea typeface="Pretendard" charset="0"/>
-                        <a:cs typeface="Pretendard" charset="0"/>
-                      </a:endParaRPr>
-                    </a:p>
-                  </a:txBody>
-                  <a:tcPr marL="50800" marR="50800" marT="25400" marB="25400" anchor="ctr">
-                    <a:lnL w="3810" cap="flat" cmpd="sng" algn="ctr">
-                      <a:solidFill>
-                        <a:srgbClr val="CBD5E0"/>
-                      </a:solidFill>
-                      <a:prstDash val="solid"/>
-                      <a:round/>
-                      <a:headEnd type="none" w="med" len="med"/>
-                      <a:tailEnd type="none" w="med" len="med"/>
-                    </a:lnL>
-                    <a:lnR w="3810" cap="flat" cmpd="sng" algn="ctr">
-                      <a:solidFill>
-                        <a:srgbClr val="CBD5E0"/>
-                      </a:solidFill>
-                      <a:prstDash val="solid"/>
-                      <a:round/>
-                      <a:headEnd type="none" w="med" len="med"/>
-                      <a:tailEnd type="none" w="med" len="med"/>
-                    </a:lnR>
-                    <a:lnT w="3810" cap="flat" cmpd="sng" algn="ctr">
-                      <a:solidFill>
-                        <a:srgbClr val="CBD5E0"/>
-                      </a:solidFill>
-                      <a:prstDash val="solid"/>
-                      <a:round/>
-                      <a:headEnd type="none" w="med" len="med"/>
-                      <a:tailEnd type="none" w="med" len="med"/>
-                    </a:lnT>
-                    <a:lnB w="3810" cap="flat" cmpd="sng" algn="ctr">
-                      <a:solidFill>
-                        <a:srgbClr val="CBD5E0"/>
-                      </a:solidFill>
-                      <a:prstDash val="solid"/>
-                      <a:round/>
-                      <a:headEnd type="none" w="med" len="med"/>
-                      <a:tailEnd type="none" w="med" len="med"/>
-                    </a:lnB>
-                    <a:solidFill>
-                      <a:srgbClr val="F7FAFC"/>
-                    </a:solidFill>
-                  </a:tcPr>
-                </a:tc>
-              </a:tr>
-              <a:tr h="329184">
-                <a:tc>
-                  <a:txBody>
-                    <a:bodyPr/>
-                    <a:lstStyle/>
-                    <a:p>
-                      <a:pPr indent="0" marL="0">
-                        <a:buNone/>
-                      </a:pPr>
-                      <a:r>
-                        <a:rPr lang="en-US" sz="1050" b="1" dirty="0">
-                          <a:solidFill>
-                            <a:srgbClr val="10161F"/>
-                          </a:solidFill>
-                          <a:latin typeface="Pretendard" pitchFamily="34" charset="0"/>
-                          <a:ea typeface="Pretendard" pitchFamily="34" charset="-122"/>
-                          <a:cs typeface="Pretendard" pitchFamily="34" charset="-120"/>
-                        </a:rPr>
-                        <a:t>소규모 </a:t>
-                      </a:r>
-                      <a:pPr indent="0" marL="0">
-                        <a:buNone/>
-                      </a:pPr>
-                      <a:r>
-                        <a:rPr lang="en-US" sz="1050" b="1" dirty="0">
-                          <a:solidFill>
-                            <a:srgbClr val="10161F"/>
-                          </a:solidFill>
-                          <a:latin typeface="Pretendard" pitchFamily="34" charset="0"/>
-                          <a:ea typeface="Pretendard" pitchFamily="34" charset="-122"/>
-                          <a:cs typeface="Pretendard" pitchFamily="34" charset="-120"/>
-                        </a:rPr>
-                        <a:t>개발업체</a:t>
-                      </a:r>
-                      <a:endParaRPr lang="en-US" sz="1050" dirty="0">
-                        <a:latin typeface="Pretendard" charset="0"/>
-                        <a:ea typeface="Pretendard" charset="0"/>
-                        <a:cs typeface="Pretendard" charset="0"/>
-                      </a:endParaRPr>
-                    </a:p>
-                  </a:txBody>
-                  <a:tcPr marL="50800" marR="50800" marT="25400" marB="25400" anchor="ctr">
-                    <a:lnL w="3810" cap="flat" cmpd="sng" algn="ctr">
-                      <a:solidFill>
-                        <a:srgbClr val="CBD5E0"/>
-                      </a:solidFill>
-                      <a:prstDash val="solid"/>
-                      <a:round/>
-                      <a:headEnd type="none" w="med" len="med"/>
-                      <a:tailEnd type="none" w="med" len="med"/>
-                    </a:lnL>
-                    <a:lnR w="3810" cap="flat" cmpd="sng" algn="ctr">
-                      <a:solidFill>
-                        <a:srgbClr val="CBD5E0"/>
-                      </a:solidFill>
-                      <a:prstDash val="solid"/>
-                      <a:round/>
-                      <a:headEnd type="none" w="med" len="med"/>
-                      <a:tailEnd type="none" w="med" len="med"/>
-                    </a:lnR>
-                    <a:lnT w="3810" cap="flat" cmpd="sng" algn="ctr">
-                      <a:solidFill>
-                        <a:srgbClr val="CBD5E0"/>
-                      </a:solidFill>
-                      <a:prstDash val="solid"/>
-                      <a:round/>
-                      <a:headEnd type="none" w="med" len="med"/>
-                      <a:tailEnd type="none" w="med" len="med"/>
-                    </a:lnT>
-                    <a:lnB w="3810" cap="flat" cmpd="sng" algn="ctr">
-                      <a:solidFill>
-                        <a:srgbClr val="CBD5E0"/>
-                      </a:solidFill>
-                      <a:prstDash val="solid"/>
-                      <a:round/>
-                      <a:headEnd type="none" w="med" len="med"/>
-                      <a:tailEnd type="none" w="med" len="med"/>
-                    </a:lnB>
-                    <a:solidFill>
-                      <a:srgbClr val="FFFFFF"/>
-                    </a:solidFill>
-                  </a:tcPr>
-                </a:tc>
-                <a:tc>
-                  <a:txBody>
-                    <a:bodyPr/>
-                    <a:lstStyle/>
-                    <a:p>
-                      <a:pPr indent="0" marL="0">
-                        <a:buNone/>
-                      </a:pPr>
-                      <a:r>
-                        <a:rPr lang="en-US" sz="1050" dirty="0">
-                          <a:solidFill>
-                            <a:srgbClr val="10161F"/>
-                          </a:solidFill>
-                          <a:latin typeface="Pretendard" pitchFamily="34" charset="0"/>
-                          <a:ea typeface="Pretendard" pitchFamily="34" charset="-122"/>
-                          <a:cs typeface="Pretendard" pitchFamily="34" charset="-120"/>
-                        </a:rPr>
-                        <a:t>검토</a:t>
-                      </a:r>
-                      <a:endParaRPr lang="en-US" sz="1050" dirty="0">
-                        <a:latin typeface="Pretendard" charset="0"/>
-                        <a:ea typeface="Pretendard" charset="0"/>
-                        <a:cs typeface="Pretendard" charset="0"/>
-                      </a:endParaRPr>
-                    </a:p>
-                  </a:txBody>
-                  <a:tcPr marL="50800" marR="50800" marT="25400" marB="25400" anchor="ctr">
-                    <a:lnL w="3810" cap="flat" cmpd="sng" algn="ctr">
-                      <a:solidFill>
-                        <a:srgbClr val="CBD5E0"/>
-                      </a:solidFill>
-                      <a:prstDash val="solid"/>
-                      <a:round/>
-                      <a:headEnd type="none" w="med" len="med"/>
-                      <a:tailEnd type="none" w="med" len="med"/>
-                    </a:lnL>
-                    <a:lnR w="3810" cap="flat" cmpd="sng" algn="ctr">
-                      <a:solidFill>
-                        <a:srgbClr val="CBD5E0"/>
-                      </a:solidFill>
-                      <a:prstDash val="solid"/>
-                      <a:round/>
-                      <a:headEnd type="none" w="med" len="med"/>
-                      <a:tailEnd type="none" w="med" len="med"/>
-                    </a:lnR>
-                    <a:lnT w="3810" cap="flat" cmpd="sng" algn="ctr">
-                      <a:solidFill>
-                        <a:srgbClr val="CBD5E0"/>
-                      </a:solidFill>
-                      <a:prstDash val="solid"/>
-                      <a:round/>
-                      <a:headEnd type="none" w="med" len="med"/>
-                      <a:tailEnd type="none" w="med" len="med"/>
-                    </a:lnT>
-                    <a:lnB w="3810" cap="flat" cmpd="sng" algn="ctr">
-                      <a:solidFill>
-                        <a:srgbClr val="CBD5E0"/>
-                      </a:solidFill>
-                      <a:prstDash val="solid"/>
-                      <a:round/>
-                      <a:headEnd type="none" w="med" len="med"/>
-                      <a:tailEnd type="none" w="med" len="med"/>
-                    </a:lnB>
-                    <a:solidFill>
-                      <a:srgbClr val="FFFFFF"/>
-                    </a:solidFill>
-                  </a:tcPr>
-                </a:tc>
-                <a:tc>
-                  <a:txBody>
-                    <a:bodyPr/>
-                    <a:lstStyle/>
-                    <a:p>
-                      <a:pPr indent="0" marL="0">
-                        <a:buNone/>
-                      </a:pPr>
-                      <a:r>
-                        <a:rPr lang="en-US" sz="1050" dirty="0">
-                          <a:solidFill>
-                            <a:srgbClr val="10161F"/>
-                          </a:solidFill>
-                          <a:latin typeface="Pretendard" pitchFamily="34" charset="0"/>
-                          <a:ea typeface="Pretendard" pitchFamily="34" charset="-122"/>
-                          <a:cs typeface="Pretendard" pitchFamily="34" charset="-120"/>
-                        </a:rPr>
-                        <a:t>밸류업 </a:t>
-                      </a:r>
-                      <a:pPr indent="0" marL="0">
-                        <a:buNone/>
-                      </a:pPr>
-                      <a:r>
-                        <a:rPr lang="en-US" sz="1050" dirty="0">
-                          <a:solidFill>
-                            <a:srgbClr val="10161F"/>
-                          </a:solidFill>
-                          <a:latin typeface="Pretendard" pitchFamily="34" charset="0"/>
-                          <a:ea typeface="Pretendard" pitchFamily="34" charset="-122"/>
-                          <a:cs typeface="Pretendard" pitchFamily="34" charset="-120"/>
-                        </a:rPr>
-                        <a:t>후 </a:t>
-                      </a:r>
-                      <a:pPr indent="0" marL="0">
-                        <a:buNone/>
-                      </a:pPr>
-                      <a:r>
-                        <a:rPr lang="en-US" sz="1050" dirty="0">
-                          <a:solidFill>
-                            <a:srgbClr val="10161F"/>
-                          </a:solidFill>
-                          <a:latin typeface="Pretendard" pitchFamily="34" charset="0"/>
-                          <a:ea typeface="Pretendard" pitchFamily="34" charset="-122"/>
-                          <a:cs typeface="Pretendard" pitchFamily="34" charset="-120"/>
-                        </a:rPr>
-                        <a:t>매각 </a:t>
-                      </a:r>
-                      <a:pPr indent="0" marL="0">
-                        <a:buNone/>
-                      </a:pPr>
-                      <a:r>
-                        <a:rPr lang="en-US" sz="1050" dirty="0">
-                          <a:solidFill>
-                            <a:srgbClr val="10161F"/>
-                          </a:solidFill>
-                          <a:latin typeface="Pretendard" pitchFamily="34" charset="0"/>
-                          <a:ea typeface="Pretendard" pitchFamily="34" charset="-122"/>
-                          <a:cs typeface="Pretendard" pitchFamily="34" charset="-120"/>
-                        </a:rPr>
-                        <a:t>시나리오</a:t>
-                      </a:r>
-                      <a:endParaRPr lang="en-US" sz="1050" dirty="0">
-                        <a:latin typeface="Pretendard" charset="0"/>
-                        <a:ea typeface="Pretendard" charset="0"/>
-                        <a:cs typeface="Pretendard" charset="0"/>
-                      </a:endParaRPr>
-                    </a:p>
-                  </a:txBody>
-                  <a:tcPr marL="50800" marR="50800" marT="25400" marB="25400" anchor="ctr">
-                    <a:lnL w="3810" cap="flat" cmpd="sng" algn="ctr">
-                      <a:solidFill>
-                        <a:srgbClr val="CBD5E0"/>
-                      </a:solidFill>
-                      <a:prstDash val="solid"/>
-                      <a:round/>
-                      <a:headEnd type="none" w="med" len="med"/>
-                      <a:tailEnd type="none" w="med" len="med"/>
-                    </a:lnL>
-                    <a:lnR w="3810" cap="flat" cmpd="sng" algn="ctr">
-                      <a:solidFill>
-                        <a:srgbClr val="CBD5E0"/>
-                      </a:solidFill>
-                      <a:prstDash val="solid"/>
-                      <a:round/>
-                      <a:headEnd type="none" w="med" len="med"/>
-                      <a:tailEnd type="none" w="med" len="med"/>
-                    </a:lnR>
-                    <a:lnT w="3810" cap="flat" cmpd="sng" algn="ctr">
-                      <a:solidFill>
-                        <a:srgbClr val="CBD5E0"/>
-                      </a:solidFill>
-                      <a:prstDash val="solid"/>
-                      <a:round/>
-                      <a:headEnd type="none" w="med" len="med"/>
-                      <a:tailEnd type="none" w="med" len="med"/>
-                    </a:lnT>
-                    <a:lnB w="3810" cap="flat" cmpd="sng" algn="ctr">
-                      <a:solidFill>
-                        <a:srgbClr val="CBD5E0"/>
-                      </a:solidFill>
-                      <a:prstDash val="solid"/>
-                      <a:round/>
-                      <a:headEnd type="none" w="med" len="med"/>
-                      <a:tailEnd type="none" w="med" len="med"/>
-                    </a:lnB>
-                    <a:solidFill>
-                      <a:srgbClr val="FFFFFF"/>
-                    </a:solidFill>
-                  </a:tcPr>
-                </a:tc>
-              </a:tr>
-            </a:tbl>
-          </a:graphicData>
-        </a:graphic>
-      </p:graphicFrame>
-      <p:sp>
-        <p:nvSpPr>
-          <p:cNvPr id="21" name="Shape 18"/>
-          <p:cNvSpPr/>
-          <p:nvPr/>
-        </p:nvSpPr>
-        <p:spPr>
-          <a:xfrm>
-            <a:off x="566928" y="5522976"/>
-            <a:ext cx="11057839" cy="804672"/>
-          </a:xfrm>
-          <a:prstGeom prst="roundRect">
-            <a:avLst>
-              <a:gd name="adj" fmla="val 6818"/>
-            </a:avLst>
-          </a:prstGeom>
-          <a:solidFill>
-            <a:srgbClr val="F3EBDA"/>
-          </a:solidFill>
-          <a:ln w="10160">
-            <a:solidFill>
-              <a:srgbClr val="D9B668"/>
-            </a:solidFill>
-            <a:prstDash val="solid"/>
-          </a:ln>
-        </p:spPr>
-      </p:sp>
-      <p:sp>
-        <p:nvSpPr>
-          <p:cNvPr id="22" name="Text 19"/>
-          <p:cNvSpPr/>
-          <p:nvPr/>
-        </p:nvSpPr>
-        <p:spPr>
-          <a:xfrm>
-            <a:off x="749808" y="5632704"/>
-            <a:ext cx="1691640" cy="256032"/>
-          </a:xfrm>
-          <a:prstGeom prst="rect">
-            <a:avLst/>
-          </a:prstGeom>
-          <a:noFill/>
-          <a:ln/>
-        </p:spPr>
-        <p:txBody>
-          <a:bodyPr wrap="square" lIns="0" tIns="0" rIns="0" bIns="0" rtlCol="0" anchor="ctr"/>
-          <a:lstStyle/>
-          <a:p>
-            <a:pPr indent="0" marL="0">
-              <a:buNone/>
-            </a:pPr>
-            <a:r>
-              <a:rPr lang="en-US" sz="1050" b="1" dirty="0">
-                <a:solidFill>
-                  <a:srgbClr val="977024"/>
-                </a:solidFill>
-                <a:latin typeface="Pretendard" pitchFamily="34" charset="0"/>
-                <a:ea typeface="Pretendard" pitchFamily="34" charset="-122"/>
-                <a:cs typeface="Pretendard" pitchFamily="34" charset="-120"/>
-              </a:rPr>
-              <a:t>종합 가치 제안</a:t>
-            </a:r>
-            <a:endParaRPr lang="en-US" sz="1050" dirty="0"/>
-          </a:p>
-        </p:txBody>
-      </p:sp>
-      <p:sp>
-        <p:nvSpPr>
-          <p:cNvPr id="23" name="Text 20"/>
-          <p:cNvSpPr/>
-          <p:nvPr/>
-        </p:nvSpPr>
-        <p:spPr>
-          <a:xfrm>
-            <a:off x="2487168" y="5596128"/>
-            <a:ext cx="8954719" cy="658368"/>
-          </a:xfrm>
-          <a:prstGeom prst="rect">
-            <a:avLst/>
-          </a:prstGeom>
-          <a:noFill/>
-          <a:ln/>
-        </p:spPr>
-        <p:txBody>
-          <a:bodyPr wrap="square" lIns="0" tIns="0" rIns="0" bIns="0" rtlCol="0" anchor="ctr"/>
-          <a:lstStyle/>
-          <a:p>
-            <a:pPr indent="0" marL="0">
-              <a:lnSpc>
-                <a:spcPct val="125000"/>
-              </a:lnSpc>
-              <a:buNone/>
-            </a:pPr>
-            <a:r>
-              <a:rPr lang="en-US" sz="1100" dirty="0">
-                <a:solidFill>
-                  <a:srgbClr val="10161F"/>
-                </a:solidFill>
-                <a:latin typeface="Pretendard" pitchFamily="34" charset="0"/>
-                <a:ea typeface="Pretendard" pitchFamily="34" charset="-122"/>
-                <a:cs typeface="Pretendard" pitchFamily="34" charset="-120"/>
-              </a:rPr>
-              <a:t>[참고] 종합 가치 제안: 강남권역 소재 노후빌딩으로, 입지 및 자산 특성에 대한 상세 분석은 본문을 참조하시기 바랍니다. ### 3대 핵심 투자 포인트 (Investment Highlights) • 원금 안전판 확보: 강남권역 소재 자산으로, 대지 지분 가치 및 입지 경쟁력에 대한 분석은 자산 개요 섹션을 참조하시기 바랍니다.</a:t>
-            </a:r>
-            <a:endParaRPr lang="en-US" sz="1100" dirty="0"/>
-          </a:p>
-        </p:txBody>
-      </p:sp>
-      <p:sp>
-        <p:nvSpPr>
-          <p:cNvPr id="24" name="Text 21"/>
-          <p:cNvSpPr/>
-          <p:nvPr/>
-        </p:nvSpPr>
-        <p:spPr>
-          <a:xfrm>
-            <a:off x="566928" y="6382512"/>
-            <a:ext cx="7315200" cy="219456"/>
-          </a:xfrm>
-          <a:prstGeom prst="rect">
-            <a:avLst/>
-          </a:prstGeom>
-          <a:noFill/>
-          <a:ln/>
-        </p:spPr>
-        <p:txBody>
-          <a:bodyPr wrap="square" lIns="0" tIns="0" rIns="0" bIns="0" rtlCol="0" anchor="ctr"/>
-          <a:lstStyle/>
-          <a:p>
-            <a:pPr indent="0" marL="0">
-              <a:buNone/>
-            </a:pPr>
-            <a:r>
-              <a:rPr lang="en-US" sz="800" dirty="0">
-                <a:solidFill>
-                  <a:srgbClr val="718096"/>
-                </a:solidFill>
-                <a:latin typeface="Pretendard" pitchFamily="34" charset="0"/>
-                <a:ea typeface="Pretendard" pitchFamily="34" charset="-122"/>
-                <a:cs typeface="Pretendard" pitchFamily="34" charset="-120"/>
-              </a:rPr>
               <a:t>크리딜   |   </a:t>
             </a:r>
             <a:endParaRPr lang="en-US" sz="800" dirty="0"/>
@@ -8929,7 +7829,7 @@
       </p:sp>
       <p:sp>
         <p:nvSpPr>
-          <p:cNvPr id="25" name="Text 22"/>
+          <p:cNvPr id="9" name="Text 7"/>
           <p:cNvSpPr/>
           <p:nvPr/>
         </p:nvSpPr>
@@ -9144,11 +8044,11 @@
         <p:spPr>
           <a:xfrm>
             <a:off x="566928" y="1572768"/>
-            <a:ext cx="11057839" cy="3200400"/>
+            <a:ext cx="2490140" cy="3200400"/>
           </a:xfrm>
           <a:prstGeom prst="roundRect">
             <a:avLst>
-              <a:gd name="adj" fmla="val 1714"/>
+              <a:gd name="adj" fmla="val 2203"/>
             </a:avLst>
           </a:prstGeom>
           <a:solidFill>
@@ -9230,7 +8130,7 @@
         <p:spPr>
           <a:xfrm>
             <a:off x="786384" y="2304288"/>
-            <a:ext cx="10618927" cy="365760"/>
+            <a:ext cx="2051228" cy="365760"/>
           </a:xfrm>
           <a:prstGeom prst="rect">
             <a:avLst/>
@@ -9269,7 +8169,7 @@
         <p:spPr>
           <a:xfrm>
             <a:off x="786384" y="2761488"/>
-            <a:ext cx="10618927" cy="1828800"/>
+            <a:ext cx="2051228" cy="1828800"/>
           </a:xfrm>
           <a:prstGeom prst="rect">
             <a:avLst/>
@@ -9293,16 +8193,149 @@
                 <a:ea typeface="Pretendard" pitchFamily="34" charset="-122"/>
                 <a:cs typeface="Pretendard" pitchFamily="34" charset="-120"/>
               </a:rPr>
-              <a:t>{"ok"</a:t>
+              <a:t>초기 관심 표명 → 담당자 연락</a:t>
             </a:r>
             <a:endParaRPr lang="en-US" sz="1100" dirty="0"/>
           </a:p>
+        </p:txBody>
+      </p:sp>
+      <p:sp>
+        <p:nvSpPr>
+          <p:cNvPr id="11" name="Shape 9"/>
+          <p:cNvSpPr/>
+          <p:nvPr/>
+        </p:nvSpPr>
+        <p:spPr>
+          <a:xfrm>
+            <a:off x="3148508" y="3035808"/>
+            <a:ext cx="182880" cy="274320"/>
+          </a:xfrm>
+          <a:prstGeom prst="rightArrow">
+            <a:avLst/>
+          </a:prstGeom>
+          <a:solidFill>
+            <a:srgbClr val="CBD5E0"/>
+          </a:solidFill>
+          <a:ln w="6350">
+            <a:solidFill>
+              <a:srgbClr val="718096"/>
+            </a:solidFill>
+            <a:prstDash val="solid"/>
+          </a:ln>
+        </p:spPr>
+      </p:sp>
+      <p:sp>
+        <p:nvSpPr>
+          <p:cNvPr id="12" name="Shape 10"/>
+          <p:cNvSpPr/>
+          <p:nvPr/>
+        </p:nvSpPr>
+        <p:spPr>
+          <a:xfrm>
+            <a:off x="3422828" y="1572768"/>
+            <a:ext cx="2490140" cy="3200400"/>
+          </a:xfrm>
+          <a:prstGeom prst="roundRect">
+            <a:avLst>
+              <a:gd name="adj" fmla="val 2203"/>
+            </a:avLst>
+          </a:prstGeom>
+          <a:solidFill>
+            <a:srgbClr val="F7FAFC"/>
+          </a:solidFill>
+          <a:ln w="6350">
+            <a:solidFill>
+              <a:srgbClr val="CBD5E0"/>
+            </a:solidFill>
+            <a:prstDash val="solid"/>
+          </a:ln>
+        </p:spPr>
+      </p:sp>
+      <p:sp>
+        <p:nvSpPr>
+          <p:cNvPr id="13" name="Shape 11"/>
+          <p:cNvSpPr/>
+          <p:nvPr/>
+        </p:nvSpPr>
+        <p:spPr>
+          <a:xfrm>
+            <a:off x="3642284" y="1792224"/>
+            <a:ext cx="438912" cy="438912"/>
+          </a:xfrm>
+          <a:prstGeom prst="ellipse">
+            <a:avLst/>
+          </a:prstGeom>
+          <a:solidFill>
+            <a:srgbClr val="B98A2E"/>
+          </a:solidFill>
+          <a:ln/>
+        </p:spPr>
+      </p:sp>
+      <p:sp>
+        <p:nvSpPr>
+          <p:cNvPr id="14" name="Text 12"/>
+          <p:cNvSpPr/>
+          <p:nvPr/>
+        </p:nvSpPr>
+        <p:spPr>
+          <a:xfrm>
+            <a:off x="3642284" y="1792224"/>
+            <a:ext cx="438912" cy="438912"/>
+          </a:xfrm>
+          <a:prstGeom prst="rect">
+            <a:avLst/>
+          </a:prstGeom>
+          <a:noFill/>
+          <a:ln/>
+        </p:spPr>
+        <p:txBody>
+          <a:bodyPr wrap="square" lIns="0" tIns="0" rIns="0" bIns="0" rtlCol="0" anchor="ctr"/>
+          <a:lstStyle/>
+          <a:p>
+            <a:pPr algn="ctr" indent="0" marL="0">
+              <a:buNone/>
+            </a:pPr>
+            <a:r>
+              <a:rPr lang="en-US" sz="1400" b="1" dirty="0">
+                <a:solidFill>
+                  <a:srgbClr val="FFFFFF"/>
+                </a:solidFill>
+                <a:latin typeface="Arial" pitchFamily="34" charset="0"/>
+                <a:ea typeface="Arial" pitchFamily="34" charset="-122"/>
+                <a:cs typeface="Arial" pitchFamily="34" charset="-120"/>
+              </a:rPr>
+              <a:t>02</a:t>
+            </a:r>
+            <a:endParaRPr lang="en-US" sz="1400" dirty="0"/>
+          </a:p>
+        </p:txBody>
+      </p:sp>
+      <p:sp>
+        <p:nvSpPr>
+          <p:cNvPr id="15" name="Text 13"/>
+          <p:cNvSpPr/>
+          <p:nvPr/>
+        </p:nvSpPr>
+        <p:spPr>
+          <a:xfrm>
+            <a:off x="3642284" y="2304288"/>
+            <a:ext cx="2051228" cy="365760"/>
+          </a:xfrm>
+          <a:prstGeom prst="rect">
+            <a:avLst/>
+          </a:prstGeom>
+          <a:noFill/>
+          <a:ln/>
+        </p:spPr>
+        <p:txBody>
+          <a:bodyPr wrap="square" rtlCol="0" anchor="ctr"/>
+          <a:lstStyle/>
           <a:p>
             <a:pPr indent="0" marL="0">
               <a:buNone/>
             </a:pPr>
             <a:r>
-              <a:rPr lang="en-US" sz="1100" dirty="0">
+              <a:rPr lang="en-US" sz="1600" b="1" dirty="0">
                 <a:solidFill>
                   <a:srgbClr val="10161F"/>
                 </a:solidFill>
@@ -9310,45 +8343,462 @@
                 <a:ea typeface="Pretendard" pitchFamily="34" charset="-122"/>
                 <a:cs typeface="Pretendard" pitchFamily="34" charset="-120"/>
               </a:rPr>
-              <a:t>true,"mocked":true,"extractedFields":{"area_signal":"역삼","asset_type":"오피스빌딩","price_band":"300억","size_signal":"3000평(약 9917.4㎡)"},"extractedFacts":{"region":"역삼","exactAddressCandidate":"역삼동 742-1","assetType":"오피스빌딩","priceText":"300억","sizeText":"3000평(약 9917.4㎡)","currentUse":"오피스","currentUseSignal":"근린생활시설","leaseSignal":"임대중","vacancySignal":"공실없음","tenantNames":["쿠팡","네이버"],"unitRentTexts":["301호: 1500만"],"sellerMotivationText":"자산 효율화","brokerNotes":["초역세권 매물"]},"detectedSensitiveFields":["exact_address","tenant_name"],"ambiguousFields":[],"warnings":[],"areaSignal":"역삼","assetType":"오피스빌딩","priceBand":"300억","sizeSignal":"3000평(약 9917.4㎡)","dealType":"매각","buildingName":"역삼 센트럴타워","exactAddress":"역삼동 742-1","totalFloorArea":9917.3,"buildYear":2015,"currentUseSignal":"근린생활시설","vacancySignal":"공실 없음","fitSummary":"초역세권 근생 빌딩으로 시행/사옥 매입에 최적화","cautionSummary":"주요 임차인 만기 조율 필요","hiddenFields":["exact_address","seller_motivation"],"confidence":{"areaSignal":"confirmed","assetType":"confirmed","priceBand":"ai_hypothesis","fitSummary":"ai_hypothesis"},"missingData":["sizeSignal"],"boundaryNote":"본 자료는 실거래 통계 기반 참고치입니다.","buyerType":"법인 사옥형","budgetRange":{"min":50,"max":80,"display":"50억~80억"},"preferredRegions":["강남","성수"],"assetTypes":["꼬마빌딩","사옥용"],"purchasePurpose":"사옥용 매입","mustHave":["초역세권","주차"],"niceToHave":["테라스","루프탑"],"riskTolerance":"medium","financingNote":"자본금 50% 준비","missingQuestions":["구체적인 입주 시기가 언제인가요?","선호하는 수익률이 있나요?"],"privacyNotes":["연락처 비공개"],"fitReasons":["매수자 예산(50-80억)에 부합하는 매물입니다.","요청하신 성수/강남 권역에 해당합니다."],"cautionReasons":["요청한 용도와 달리 명도 협의가 다소 필요합니다."],"recommendedNextAction":"현장 답사 제안","kakaoMessage":"안녕하세요! 요청하신 조건에 부합하는 추천 매물이 있어 안내해 드립니다. 확인해보시고 피드백 부탁드립니다.","title":"강남 역삼역 초역세권 오피스 사옥용 빌딩 매각","shortSummary":"역삼역 도보 5분 거리의 준신축급 대형 오피스빌딩입니다.","dealPoints":["초역세권","사옥 최적"],"cautionPoints":["명도 조율 필요"],"hiddenInfoNotice":["보증금 및 지번은 인가 후 확인 가능"],"gateMessage":"G1 등급 등록이 필요합니다.","kakaoText":"강남 역삼역 오피스 빌딩 매각 안내입니다.","exactUnitCandidate":"101호","floor":"1층","areaSqmText":"150㎡","spaceType":"office","depositText":"5000만","monthlyRentText":"400만","maintenanceFeeText":"50만","availableFromText":"즉시입주","leaseTermMonthsText":"24","incentivesText":"렌트프리 2개월","restrictions":[],"landlordIdentity":"김성수","currentTenant":"스타트업","vacancyReason":"이전 확장","rentNegotiation":"협의 가능","region":"성수동","areaSqm":150,"deposit":5000,"monthlyRent":400,"maintenanceFee":50,"availableFrom":"즉시입주","leaseTermMonths":24,"incentives":{"rentFreeMonths":2,"interiorSupport":"일부 인테리어 지원","freeRentDetail":"렌트프리 2개월 지원"},"shortSummaryLease":"성수역 도보 5분 거리 1층 리테일 상가 매물입니다."}</a:t>
-            </a:r>
-            <a:endParaRPr lang="en-US" sz="1100" dirty="0"/>
-          </a:p>
-        </p:txBody>
-      </p:sp>
-      <p:sp>
-        <p:nvSpPr>
-          <p:cNvPr id="11" name="Text 9"/>
-          <p:cNvSpPr/>
-          <p:nvPr/>
-        </p:nvSpPr>
-        <p:spPr>
-          <a:xfrm>
-            <a:off x="566928" y="6382512"/>
-            <a:ext cx="7315200" cy="219456"/>
-          </a:xfrm>
-          <a:prstGeom prst="rect">
-            <a:avLst/>
-          </a:prstGeom>
-          <a:noFill/>
-          <a:ln/>
-        </p:spPr>
-        <p:txBody>
-          <a:bodyPr wrap="square" lIns="0" tIns="0" rIns="0" bIns="0" rtlCol="0" anchor="ctr"/>
+              <a:t>2단계</a:t>
+            </a:r>
+            <a:endParaRPr lang="en-US" sz="1600" dirty="0"/>
+          </a:p>
+        </p:txBody>
+      </p:sp>
+      <p:sp>
+        <p:nvSpPr>
+          <p:cNvPr id="16" name="Text 14"/>
+          <p:cNvSpPr/>
+          <p:nvPr/>
+        </p:nvSpPr>
+        <p:spPr>
+          <a:xfrm>
+            <a:off x="3642284" y="2761488"/>
+            <a:ext cx="2051228" cy="1828800"/>
+          </a:xfrm>
+          <a:prstGeom prst="rect">
+            <a:avLst/>
+          </a:prstGeom>
+          <a:noFill/>
+          <a:ln/>
+        </p:spPr>
+        <p:txBody>
+          <a:bodyPr wrap="square" rtlCol="0" anchor="t"/>
           <a:lstStyle/>
           <a:p>
             <a:pPr indent="0" marL="0">
               <a:buNone/>
             </a:pPr>
             <a:r>
-              <a:rPr lang="en-US" sz="800" dirty="0">
-                <a:solidFill>
-                  <a:srgbClr val="718096"/>
+              <a:rPr lang="en-US" sz="1100" dirty="0">
+                <a:solidFill>
+                  <a:srgbClr val="10161F"/>
                 </a:solidFill>
                 <a:latin typeface="Pretendard" pitchFamily="34" charset="0"/>
                 <a:ea typeface="Pretendard" pitchFamily="34" charset="-122"/>
                 <a:cs typeface="Pretendard" pitchFamily="34" charset="-120"/>
               </a:rPr>
+              <a:t>NDA 체결 → 임차인 정보 및 임대차계약서 제공</a:t>
+            </a:r>
+            <a:endParaRPr lang="en-US" sz="1100" dirty="0"/>
+          </a:p>
+        </p:txBody>
+      </p:sp>
+      <p:sp>
+        <p:nvSpPr>
+          <p:cNvPr id="17" name="Shape 15"/>
+          <p:cNvSpPr/>
+          <p:nvPr/>
+        </p:nvSpPr>
+        <p:spPr>
+          <a:xfrm>
+            <a:off x="6004408" y="3035808"/>
+            <a:ext cx="182880" cy="274320"/>
+          </a:xfrm>
+          <a:prstGeom prst="rightArrow">
+            <a:avLst/>
+          </a:prstGeom>
+          <a:solidFill>
+            <a:srgbClr val="CBD5E0"/>
+          </a:solidFill>
+          <a:ln w="6350">
+            <a:solidFill>
+              <a:srgbClr val="718096"/>
+            </a:solidFill>
+            <a:prstDash val="solid"/>
+          </a:ln>
+        </p:spPr>
+      </p:sp>
+      <p:sp>
+        <p:nvSpPr>
+          <p:cNvPr id="18" name="Shape 16"/>
+          <p:cNvSpPr/>
+          <p:nvPr/>
+        </p:nvSpPr>
+        <p:spPr>
+          <a:xfrm>
+            <a:off x="6278728" y="1572768"/>
+            <a:ext cx="2490140" cy="3200400"/>
+          </a:xfrm>
+          <a:prstGeom prst="roundRect">
+            <a:avLst>
+              <a:gd name="adj" fmla="val 2203"/>
+            </a:avLst>
+          </a:prstGeom>
+          <a:solidFill>
+            <a:srgbClr val="F7FAFC"/>
+          </a:solidFill>
+          <a:ln w="6350">
+            <a:solidFill>
+              <a:srgbClr val="CBD5E0"/>
+            </a:solidFill>
+            <a:prstDash val="solid"/>
+          </a:ln>
+        </p:spPr>
+      </p:sp>
+      <p:sp>
+        <p:nvSpPr>
+          <p:cNvPr id="19" name="Shape 17"/>
+          <p:cNvSpPr/>
+          <p:nvPr/>
+        </p:nvSpPr>
+        <p:spPr>
+          <a:xfrm>
+            <a:off x="6498184" y="1792224"/>
+            <a:ext cx="438912" cy="438912"/>
+          </a:xfrm>
+          <a:prstGeom prst="ellipse">
+            <a:avLst/>
+          </a:prstGeom>
+          <a:solidFill>
+            <a:srgbClr val="B98A2E"/>
+          </a:solidFill>
+          <a:ln/>
+        </p:spPr>
+      </p:sp>
+      <p:sp>
+        <p:nvSpPr>
+          <p:cNvPr id="20" name="Text 18"/>
+          <p:cNvSpPr/>
+          <p:nvPr/>
+        </p:nvSpPr>
+        <p:spPr>
+          <a:xfrm>
+            <a:off x="6498184" y="1792224"/>
+            <a:ext cx="438912" cy="438912"/>
+          </a:xfrm>
+          <a:prstGeom prst="rect">
+            <a:avLst/>
+          </a:prstGeom>
+          <a:noFill/>
+          <a:ln/>
+        </p:spPr>
+        <p:txBody>
+          <a:bodyPr wrap="square" lIns="0" tIns="0" rIns="0" bIns="0" rtlCol="0" anchor="ctr"/>
+          <a:lstStyle/>
+          <a:p>
+            <a:pPr algn="ctr" indent="0" marL="0">
+              <a:buNone/>
+            </a:pPr>
+            <a:r>
+              <a:rPr lang="en-US" sz="1400" b="1" dirty="0">
+                <a:solidFill>
+                  <a:srgbClr val="FFFFFF"/>
+                </a:solidFill>
+                <a:latin typeface="Arial" pitchFamily="34" charset="0"/>
+                <a:ea typeface="Arial" pitchFamily="34" charset="-122"/>
+                <a:cs typeface="Arial" pitchFamily="34" charset="-120"/>
+              </a:rPr>
+              <a:t>03</a:t>
+            </a:r>
+            <a:endParaRPr lang="en-US" sz="1400" dirty="0"/>
+          </a:p>
+        </p:txBody>
+      </p:sp>
+      <p:sp>
+        <p:nvSpPr>
+          <p:cNvPr id="21" name="Text 19"/>
+          <p:cNvSpPr/>
+          <p:nvPr/>
+        </p:nvSpPr>
+        <p:spPr>
+          <a:xfrm>
+            <a:off x="6498184" y="2304288"/>
+            <a:ext cx="2051228" cy="365760"/>
+          </a:xfrm>
+          <a:prstGeom prst="rect">
+            <a:avLst/>
+          </a:prstGeom>
+          <a:noFill/>
+          <a:ln/>
+        </p:spPr>
+        <p:txBody>
+          <a:bodyPr wrap="square" rtlCol="0" anchor="ctr"/>
+          <a:lstStyle/>
+          <a:p>
+            <a:pPr indent="0" marL="0">
+              <a:buNone/>
+            </a:pPr>
+            <a:r>
+              <a:rPr lang="en-US" sz="1600" b="1" dirty="0">
+                <a:solidFill>
+                  <a:srgbClr val="10161F"/>
+                </a:solidFill>
+                <a:latin typeface="Pretendard" pitchFamily="34" charset="0"/>
+                <a:ea typeface="Pretendard" pitchFamily="34" charset="-122"/>
+                <a:cs typeface="Pretendard" pitchFamily="34" charset="-120"/>
+              </a:rPr>
+              <a:t>3단계</a:t>
+            </a:r>
+            <a:endParaRPr lang="en-US" sz="1600" dirty="0"/>
+          </a:p>
+        </p:txBody>
+      </p:sp>
+      <p:sp>
+        <p:nvSpPr>
+          <p:cNvPr id="22" name="Text 20"/>
+          <p:cNvSpPr/>
+          <p:nvPr/>
+        </p:nvSpPr>
+        <p:spPr>
+          <a:xfrm>
+            <a:off x="6498184" y="2761488"/>
+            <a:ext cx="2051228" cy="1828800"/>
+          </a:xfrm>
+          <a:prstGeom prst="rect">
+            <a:avLst/>
+          </a:prstGeom>
+          <a:noFill/>
+          <a:ln/>
+        </p:spPr>
+        <p:txBody>
+          <a:bodyPr wrap="square" rtlCol="0" anchor="t"/>
+          <a:lstStyle/>
+          <a:p>
+            <a:pPr indent="0" marL="0">
+              <a:buNone/>
+            </a:pPr>
+            <a:r>
+              <a:rPr lang="en-US" sz="1100" dirty="0">
+                <a:solidFill>
+                  <a:srgbClr val="10161F"/>
+                </a:solidFill>
+                <a:latin typeface="Pretendard" pitchFamily="34" charset="0"/>
+                <a:ea typeface="Pretendard" pitchFamily="34" charset="-122"/>
+                <a:cs typeface="Pretendard" pitchFamily="34" charset="-120"/>
+              </a:rPr>
+              <a:t>현장 실사 일정 조율 → 건물 컨디션 및 설비 직접 확인</a:t>
+            </a:r>
+            <a:endParaRPr lang="en-US" sz="1100" dirty="0"/>
+          </a:p>
+        </p:txBody>
+      </p:sp>
+      <p:sp>
+        <p:nvSpPr>
+          <p:cNvPr id="23" name="Shape 21"/>
+          <p:cNvSpPr/>
+          <p:nvPr/>
+        </p:nvSpPr>
+        <p:spPr>
+          <a:xfrm>
+            <a:off x="8860307" y="3035808"/>
+            <a:ext cx="182880" cy="274320"/>
+          </a:xfrm>
+          <a:prstGeom prst="rightArrow">
+            <a:avLst/>
+          </a:prstGeom>
+          <a:solidFill>
+            <a:srgbClr val="CBD5E0"/>
+          </a:solidFill>
+          <a:ln w="6350">
+            <a:solidFill>
+              <a:srgbClr val="718096"/>
+            </a:solidFill>
+            <a:prstDash val="solid"/>
+          </a:ln>
+        </p:spPr>
+      </p:sp>
+      <p:sp>
+        <p:nvSpPr>
+          <p:cNvPr id="24" name="Shape 22"/>
+          <p:cNvSpPr/>
+          <p:nvPr/>
+        </p:nvSpPr>
+        <p:spPr>
+          <a:xfrm>
+            <a:off x="9134627" y="1572768"/>
+            <a:ext cx="2490140" cy="3200400"/>
+          </a:xfrm>
+          <a:prstGeom prst="roundRect">
+            <a:avLst>
+              <a:gd name="adj" fmla="val 2203"/>
+            </a:avLst>
+          </a:prstGeom>
+          <a:solidFill>
+            <a:srgbClr val="F7FAFC"/>
+          </a:solidFill>
+          <a:ln w="6350">
+            <a:solidFill>
+              <a:srgbClr val="CBD5E0"/>
+            </a:solidFill>
+            <a:prstDash val="solid"/>
+          </a:ln>
+        </p:spPr>
+      </p:sp>
+      <p:sp>
+        <p:nvSpPr>
+          <p:cNvPr id="25" name="Shape 23"/>
+          <p:cNvSpPr/>
+          <p:nvPr/>
+        </p:nvSpPr>
+        <p:spPr>
+          <a:xfrm>
+            <a:off x="9354083" y="1792224"/>
+            <a:ext cx="438912" cy="438912"/>
+          </a:xfrm>
+          <a:prstGeom prst="ellipse">
+            <a:avLst/>
+          </a:prstGeom>
+          <a:solidFill>
+            <a:srgbClr val="B98A2E"/>
+          </a:solidFill>
+          <a:ln/>
+        </p:spPr>
+      </p:sp>
+      <p:sp>
+        <p:nvSpPr>
+          <p:cNvPr id="26" name="Text 24"/>
+          <p:cNvSpPr/>
+          <p:nvPr/>
+        </p:nvSpPr>
+        <p:spPr>
+          <a:xfrm>
+            <a:off x="9354083" y="1792224"/>
+            <a:ext cx="438912" cy="438912"/>
+          </a:xfrm>
+          <a:prstGeom prst="rect">
+            <a:avLst/>
+          </a:prstGeom>
+          <a:noFill/>
+          <a:ln/>
+        </p:spPr>
+        <p:txBody>
+          <a:bodyPr wrap="square" lIns="0" tIns="0" rIns="0" bIns="0" rtlCol="0" anchor="ctr"/>
+          <a:lstStyle/>
+          <a:p>
+            <a:pPr algn="ctr" indent="0" marL="0">
+              <a:buNone/>
+            </a:pPr>
+            <a:r>
+              <a:rPr lang="en-US" sz="1400" b="1" dirty="0">
+                <a:solidFill>
+                  <a:srgbClr val="FFFFFF"/>
+                </a:solidFill>
+                <a:latin typeface="Arial" pitchFamily="34" charset="0"/>
+                <a:ea typeface="Arial" pitchFamily="34" charset="-122"/>
+                <a:cs typeface="Arial" pitchFamily="34" charset="-120"/>
+              </a:rPr>
+              <a:t>04</a:t>
+            </a:r>
+            <a:endParaRPr lang="en-US" sz="1400" dirty="0"/>
+          </a:p>
+        </p:txBody>
+      </p:sp>
+      <p:sp>
+        <p:nvSpPr>
+          <p:cNvPr id="27" name="Text 25"/>
+          <p:cNvSpPr/>
+          <p:nvPr/>
+        </p:nvSpPr>
+        <p:spPr>
+          <a:xfrm>
+            <a:off x="9354083" y="2304288"/>
+            <a:ext cx="2051228" cy="365760"/>
+          </a:xfrm>
+          <a:prstGeom prst="rect">
+            <a:avLst/>
+          </a:prstGeom>
+          <a:noFill/>
+          <a:ln/>
+        </p:spPr>
+        <p:txBody>
+          <a:bodyPr wrap="square" rtlCol="0" anchor="ctr"/>
+          <a:lstStyle/>
+          <a:p>
+            <a:pPr indent="0" marL="0">
+              <a:buNone/>
+            </a:pPr>
+            <a:r>
+              <a:rPr lang="en-US" sz="1600" b="1" dirty="0">
+                <a:solidFill>
+                  <a:srgbClr val="10161F"/>
+                </a:solidFill>
+                <a:latin typeface="Pretendard" pitchFamily="34" charset="0"/>
+                <a:ea typeface="Pretendard" pitchFamily="34" charset="-122"/>
+                <a:cs typeface="Pretendard" pitchFamily="34" charset="-120"/>
+              </a:rPr>
+              <a:t>4단계</a:t>
+            </a:r>
+            <a:endParaRPr lang="en-US" sz="1600" dirty="0"/>
+          </a:p>
+        </p:txBody>
+      </p:sp>
+      <p:sp>
+        <p:nvSpPr>
+          <p:cNvPr id="28" name="Text 26"/>
+          <p:cNvSpPr/>
+          <p:nvPr/>
+        </p:nvSpPr>
+        <p:spPr>
+          <a:xfrm>
+            <a:off x="9354083" y="2761488"/>
+            <a:ext cx="2051228" cy="1828800"/>
+          </a:xfrm>
+          <a:prstGeom prst="rect">
+            <a:avLst/>
+          </a:prstGeom>
+          <a:noFill/>
+          <a:ln/>
+        </p:spPr>
+        <p:txBody>
+          <a:bodyPr wrap="square" rtlCol="0" anchor="t"/>
+          <a:lstStyle/>
+          <a:p>
+            <a:pPr indent="0" marL="0">
+              <a:buNone/>
+            </a:pPr>
+            <a:r>
+              <a:rPr lang="en-US" sz="1100" dirty="0">
+                <a:solidFill>
+                  <a:srgbClr val="10161F"/>
+                </a:solidFill>
+                <a:latin typeface="Pretendard" pitchFamily="34" charset="0"/>
+                <a:ea typeface="Pretendard" pitchFamily="34" charset="-122"/>
+                <a:cs typeface="Pretendard" pitchFamily="34" charset="-120"/>
+              </a:rPr>
+              <a:t>LOI(투자의향서) 제출 → 가격 협의 개시</a:t>
+            </a:r>
+            <a:endParaRPr lang="en-US" sz="1100" dirty="0"/>
+          </a:p>
+        </p:txBody>
+      </p:sp>
+      <p:sp>
+        <p:nvSpPr>
+          <p:cNvPr id="29" name="Text 27"/>
+          <p:cNvSpPr/>
+          <p:nvPr/>
+        </p:nvSpPr>
+        <p:spPr>
+          <a:xfrm>
+            <a:off x="566928" y="6382512"/>
+            <a:ext cx="7315200" cy="219456"/>
+          </a:xfrm>
+          <a:prstGeom prst="rect">
+            <a:avLst/>
+          </a:prstGeom>
+          <a:noFill/>
+          <a:ln/>
+        </p:spPr>
+        <p:txBody>
+          <a:bodyPr wrap="square" lIns="0" tIns="0" rIns="0" bIns="0" rtlCol="0" anchor="ctr"/>
+          <a:lstStyle/>
+          <a:p>
+            <a:pPr indent="0" marL="0">
+              <a:buNone/>
+            </a:pPr>
+            <a:r>
+              <a:rPr lang="en-US" sz="800" dirty="0">
+                <a:solidFill>
+                  <a:srgbClr val="718096"/>
+                </a:solidFill>
+                <a:latin typeface="Pretendard" pitchFamily="34" charset="0"/>
+                <a:ea typeface="Pretendard" pitchFamily="34" charset="-122"/>
+                <a:cs typeface="Pretendard" pitchFamily="34" charset="-120"/>
+              </a:rPr>
               <a:t>크리딜   |   </a:t>
             </a:r>
             <a:endParaRPr lang="en-US" sz="800" dirty="0"/>
@@ -9357,7 +8807,7 @@
       </p:sp>
       <p:sp>
         <p:nvSpPr>
-          <p:cNvPr id="12" name="Text 10"/>
+          <p:cNvPr id="30" name="Text 28"/>
           <p:cNvSpPr/>
           <p:nvPr/>
         </p:nvSpPr>

--- a/docs/test/stress/e2e-outputs/trading_case09_sinsa_value_add_basic.pptx
+++ b/docs/test/stress/e2e-outputs/trading_case09_sinsa_value_add_basic.pptx
@@ -15,9 +15,12 @@
     <p:sldId id="263" r:id="rId9"/>
     <p:sldId id="264" r:id="rId10"/>
     <p:sldId id="265" r:id="rId11"/>
+    <p:sldId id="266" r:id="rId12"/>
+    <p:sldId id="267" r:id="rId13"/>
+    <p:sldId id="268" r:id="rId14"/>
   </p:sldIdLst>
   <p:notesMasterIdLst>
-    <p:notesMasterId r:id="rId12"/>
+    <p:notesMasterId r:id="rId15"/>
   </p:notesMasterIdLst>
   <p:sldSz cx="12192000" cy="6858000"/>
   <p:notesSz cx="6858000" cy="12192000"/>
@@ -623,6 +626,270 @@
             <a:fld id="{F7021451-1387-4CA6-816F-3879F97B5CBC}" type="slidenum">
               <a:rPr lang="en-US"/>
               <a:t>10</a:t>
+            </a:fld>
+            <a:endParaRPr lang="en-US"/>
+          </a:p>
+        </p:txBody>
+      </p:sp>
+    </p:spTree>
+    <p:extLst>
+      <p:ext uri="{BB962C8B-B14F-4D97-AF65-F5344CB8AC3E}">
+        <p14:creationId xmlns:p14="http://schemas.microsoft.com/office/powerpoint/2010/main" val="1024086991"/>
+      </p:ext>
+    </p:extLst>
+  </p:cSld>
+  <p:clrMapOvr>
+    <a:masterClrMapping/>
+  </p:clrMapOvr>
+</p:notes>
+</file>
+
+<file path=ppt/notesSlides/notesSlide11.xml><?xml version="1.0" encoding="utf-8"?>
+<p:notes xmlns:a="http://schemas.openxmlformats.org/drawingml/2006/main" xmlns:r="http://schemas.openxmlformats.org/officeDocument/2006/relationships" xmlns:p="http://schemas.openxmlformats.org/presentationml/2006/main">
+  <p:cSld>
+    <p:spTree>
+      <p:nvGrpSpPr>
+        <p:cNvPr id="1" name=""/>
+        <p:cNvGrpSpPr/>
+        <p:nvPr/>
+      </p:nvGrpSpPr>
+      <p:grpSpPr>
+        <a:xfrm>
+          <a:off x="0" y="0"/>
+          <a:ext cx="0" cy="0"/>
+          <a:chOff x="0" y="0"/>
+          <a:chExt cx="0" cy="0"/>
+        </a:xfrm>
+      </p:grpSpPr>
+      <p:sp>
+        <p:nvSpPr>
+          <p:cNvPr id="2" name="Slide Image Placeholder 1"/>
+          <p:cNvSpPr>
+            <a:spLocks noGrp="1" noRot="1" noChangeAspect="1"/>
+          </p:cNvSpPr>
+          <p:nvPr>
+            <p:ph type="sldImg"/>
+          </p:nvPr>
+        </p:nvSpPr>
+        <p:spPr/>
+      </p:sp>
+      <p:sp>
+        <p:nvSpPr>
+          <p:cNvPr id="3" name="Notes Placeholder 2"/>
+          <p:cNvSpPr>
+            <a:spLocks noGrp="1"/>
+          </p:cNvSpPr>
+          <p:nvPr>
+            <p:ph type="body" idx="1"/>
+          </p:nvPr>
+        </p:nvSpPr>
+        <p:spPr/>
+        <p:txBody>
+          <a:bodyPr/>
+          <a:lstStyle/>
+          <a:p>
+            <a:r>
+              <a:rPr lang="en-US" dirty="0"/>
+              <a:t/>
+            </a:r>
+            <a:endParaRPr lang="en-US" dirty="0"/>
+          </a:p>
+        </p:txBody>
+      </p:sp>
+      <p:sp>
+        <p:nvSpPr>
+          <p:cNvPr id="4" name="Slide Number Placeholder 3"/>
+          <p:cNvSpPr>
+            <a:spLocks noGrp="1"/>
+          </p:cNvSpPr>
+          <p:nvPr>
+            <p:ph type="sldNum" sz="quarter" idx="10"/>
+          </p:nvPr>
+        </p:nvSpPr>
+        <p:spPr/>
+        <p:txBody>
+          <a:bodyPr/>
+          <a:lstStyle/>
+          <a:p>
+            <a:fld id="{F7021451-1387-4CA6-816F-3879F97B5CBC}" type="slidenum">
+              <a:rPr lang="en-US"/>
+              <a:t>11</a:t>
+            </a:fld>
+            <a:endParaRPr lang="en-US"/>
+          </a:p>
+        </p:txBody>
+      </p:sp>
+    </p:spTree>
+    <p:extLst>
+      <p:ext uri="{BB962C8B-B14F-4D97-AF65-F5344CB8AC3E}">
+        <p14:creationId xmlns:p14="http://schemas.microsoft.com/office/powerpoint/2010/main" val="1024086991"/>
+      </p:ext>
+    </p:extLst>
+  </p:cSld>
+  <p:clrMapOvr>
+    <a:masterClrMapping/>
+  </p:clrMapOvr>
+</p:notes>
+</file>
+
+<file path=ppt/notesSlides/notesSlide12.xml><?xml version="1.0" encoding="utf-8"?>
+<p:notes xmlns:a="http://schemas.openxmlformats.org/drawingml/2006/main" xmlns:r="http://schemas.openxmlformats.org/officeDocument/2006/relationships" xmlns:p="http://schemas.openxmlformats.org/presentationml/2006/main">
+  <p:cSld>
+    <p:spTree>
+      <p:nvGrpSpPr>
+        <p:cNvPr id="1" name=""/>
+        <p:cNvGrpSpPr/>
+        <p:nvPr/>
+      </p:nvGrpSpPr>
+      <p:grpSpPr>
+        <a:xfrm>
+          <a:off x="0" y="0"/>
+          <a:ext cx="0" cy="0"/>
+          <a:chOff x="0" y="0"/>
+          <a:chExt cx="0" cy="0"/>
+        </a:xfrm>
+      </p:grpSpPr>
+      <p:sp>
+        <p:nvSpPr>
+          <p:cNvPr id="2" name="Slide Image Placeholder 1"/>
+          <p:cNvSpPr>
+            <a:spLocks noGrp="1" noRot="1" noChangeAspect="1"/>
+          </p:cNvSpPr>
+          <p:nvPr>
+            <p:ph type="sldImg"/>
+          </p:nvPr>
+        </p:nvSpPr>
+        <p:spPr/>
+      </p:sp>
+      <p:sp>
+        <p:nvSpPr>
+          <p:cNvPr id="3" name="Notes Placeholder 2"/>
+          <p:cNvSpPr>
+            <a:spLocks noGrp="1"/>
+          </p:cNvSpPr>
+          <p:nvPr>
+            <p:ph type="body" idx="1"/>
+          </p:nvPr>
+        </p:nvSpPr>
+        <p:spPr/>
+        <p:txBody>
+          <a:bodyPr/>
+          <a:lstStyle/>
+          <a:p>
+            <a:r>
+              <a:rPr lang="en-US" dirty="0"/>
+              <a:t/>
+            </a:r>
+            <a:endParaRPr lang="en-US" dirty="0"/>
+          </a:p>
+        </p:txBody>
+      </p:sp>
+      <p:sp>
+        <p:nvSpPr>
+          <p:cNvPr id="4" name="Slide Number Placeholder 3"/>
+          <p:cNvSpPr>
+            <a:spLocks noGrp="1"/>
+          </p:cNvSpPr>
+          <p:nvPr>
+            <p:ph type="sldNum" sz="quarter" idx="10"/>
+          </p:nvPr>
+        </p:nvSpPr>
+        <p:spPr/>
+        <p:txBody>
+          <a:bodyPr/>
+          <a:lstStyle/>
+          <a:p>
+            <a:fld id="{F7021451-1387-4CA6-816F-3879F97B5CBC}" type="slidenum">
+              <a:rPr lang="en-US"/>
+              <a:t>12</a:t>
+            </a:fld>
+            <a:endParaRPr lang="en-US"/>
+          </a:p>
+        </p:txBody>
+      </p:sp>
+    </p:spTree>
+    <p:extLst>
+      <p:ext uri="{BB962C8B-B14F-4D97-AF65-F5344CB8AC3E}">
+        <p14:creationId xmlns:p14="http://schemas.microsoft.com/office/powerpoint/2010/main" val="1024086991"/>
+      </p:ext>
+    </p:extLst>
+  </p:cSld>
+  <p:clrMapOvr>
+    <a:masterClrMapping/>
+  </p:clrMapOvr>
+</p:notes>
+</file>
+
+<file path=ppt/notesSlides/notesSlide13.xml><?xml version="1.0" encoding="utf-8"?>
+<p:notes xmlns:a="http://schemas.openxmlformats.org/drawingml/2006/main" xmlns:r="http://schemas.openxmlformats.org/officeDocument/2006/relationships" xmlns:p="http://schemas.openxmlformats.org/presentationml/2006/main">
+  <p:cSld>
+    <p:spTree>
+      <p:nvGrpSpPr>
+        <p:cNvPr id="1" name=""/>
+        <p:cNvGrpSpPr/>
+        <p:nvPr/>
+      </p:nvGrpSpPr>
+      <p:grpSpPr>
+        <a:xfrm>
+          <a:off x="0" y="0"/>
+          <a:ext cx="0" cy="0"/>
+          <a:chOff x="0" y="0"/>
+          <a:chExt cx="0" cy="0"/>
+        </a:xfrm>
+      </p:grpSpPr>
+      <p:sp>
+        <p:nvSpPr>
+          <p:cNvPr id="2" name="Slide Image Placeholder 1"/>
+          <p:cNvSpPr>
+            <a:spLocks noGrp="1" noRot="1" noChangeAspect="1"/>
+          </p:cNvSpPr>
+          <p:nvPr>
+            <p:ph type="sldImg"/>
+          </p:nvPr>
+        </p:nvSpPr>
+        <p:spPr/>
+      </p:sp>
+      <p:sp>
+        <p:nvSpPr>
+          <p:cNvPr id="3" name="Notes Placeholder 2"/>
+          <p:cNvSpPr>
+            <a:spLocks noGrp="1"/>
+          </p:cNvSpPr>
+          <p:nvPr>
+            <p:ph type="body" idx="1"/>
+          </p:nvPr>
+        </p:nvSpPr>
+        <p:spPr/>
+        <p:txBody>
+          <a:bodyPr/>
+          <a:lstStyle/>
+          <a:p>
+            <a:r>
+              <a:rPr lang="en-US" dirty="0"/>
+              <a:t/>
+            </a:r>
+            <a:endParaRPr lang="en-US" dirty="0"/>
+          </a:p>
+        </p:txBody>
+      </p:sp>
+      <p:sp>
+        <p:nvSpPr>
+          <p:cNvPr id="4" name="Slide Number Placeholder 3"/>
+          <p:cNvSpPr>
+            <a:spLocks noGrp="1"/>
+          </p:cNvSpPr>
+          <p:nvPr>
+            <p:ph type="sldNum" sz="quarter" idx="10"/>
+          </p:nvPr>
+        </p:nvSpPr>
+        <p:spPr/>
+        <p:txBody>
+          <a:bodyPr/>
+          <a:lstStyle/>
+          <a:p>
+            <a:fld id="{F7021451-1387-4CA6-816F-3879F97B5CBC}" type="slidenum">
+              <a:rPr lang="en-US"/>
+              <a:t>13</a:t>
             </a:fld>
             <a:endParaRPr lang="en-US"/>
           </a:p>
@@ -2201,7 +2468,7 @@
             <a:pPr indent="0" marL="0">
               <a:buNone/>
             </a:pPr>
-            <a:endParaRPr lang="en-US" sz="850" dirty="0"/>
+            <a:endParaRPr lang="en-US" sz="900" dirty="0"/>
           </a:p>
         </p:txBody>
       </p:sp>
@@ -2294,6 +2561,1592 @@
 <file path=ppt/slides/slide10.xml><?xml version="1.0" encoding="utf-8"?>
 <p:sld xmlns:a="http://schemas.openxmlformats.org/drawingml/2006/main" xmlns:r="http://schemas.openxmlformats.org/officeDocument/2006/relationships" xmlns:p="http://schemas.openxmlformats.org/presentationml/2006/main">
   <p:cSld name="Slide 10">
+    <p:bg>
+      <p:bgPr>
+        <a:solidFill>
+          <a:srgbClr val="FFFFFF"/>
+        </a:solidFill>
+      </p:bgPr>
+    </p:bg>
+    <p:spTree>
+      <p:nvGrpSpPr>
+        <p:cNvPr id="1" name=""/>
+        <p:cNvGrpSpPr/>
+        <p:nvPr/>
+      </p:nvGrpSpPr>
+      <p:grpSpPr>
+        <a:xfrm>
+          <a:off x="0" y="0"/>
+          <a:ext cx="0" cy="0"/>
+          <a:chOff x="0" y="0"/>
+          <a:chExt cx="0" cy="0"/>
+        </a:xfrm>
+      </p:grpSpPr>
+      <p:sp>
+        <p:nvSpPr>
+          <p:cNvPr id="2" name="Shape 0"/>
+          <p:cNvSpPr/>
+          <p:nvPr/>
+        </p:nvSpPr>
+        <p:spPr>
+          <a:xfrm>
+            <a:off x="566928" y="457200"/>
+            <a:ext cx="384048" cy="384048"/>
+          </a:xfrm>
+          <a:prstGeom prst="ellipse">
+            <a:avLst/>
+          </a:prstGeom>
+          <a:solidFill>
+            <a:srgbClr val="B98A2E"/>
+          </a:solidFill>
+          <a:ln/>
+        </p:spPr>
+      </p:sp>
+      <p:sp>
+        <p:nvSpPr>
+          <p:cNvPr id="3" name="Text 1"/>
+          <p:cNvSpPr/>
+          <p:nvPr/>
+        </p:nvSpPr>
+        <p:spPr>
+          <a:xfrm>
+            <a:off x="566928" y="457200"/>
+            <a:ext cx="384048" cy="384048"/>
+          </a:xfrm>
+          <a:prstGeom prst="rect">
+            <a:avLst/>
+          </a:prstGeom>
+          <a:noFill/>
+          <a:ln/>
+        </p:spPr>
+        <p:txBody>
+          <a:bodyPr wrap="square" lIns="0" tIns="0" rIns="0" bIns="0" rtlCol="0" anchor="ctr"/>
+          <a:lstStyle/>
+          <a:p>
+            <a:pPr algn="ctr" indent="0" marL="0">
+              <a:buNone/>
+            </a:pPr>
+            <a:r>
+              <a:rPr lang="en-US" sz="1300" b="1" dirty="0">
+                <a:solidFill>
+                  <a:srgbClr val="FFFFFF"/>
+                </a:solidFill>
+                <a:latin typeface="Arial" pitchFamily="34" charset="0"/>
+                <a:ea typeface="Arial" pitchFamily="34" charset="-122"/>
+                <a:cs typeface="Arial" pitchFamily="34" charset="-120"/>
+              </a:rPr>
+              <a:t>10</a:t>
+            </a:r>
+            <a:endParaRPr lang="en-US" sz="1300" dirty="0"/>
+          </a:p>
+        </p:txBody>
+      </p:sp>
+      <p:sp>
+        <p:nvSpPr>
+          <p:cNvPr id="4" name="Text 2"/>
+          <p:cNvSpPr/>
+          <p:nvPr/>
+        </p:nvSpPr>
+        <p:spPr>
+          <a:xfrm>
+            <a:off x="1133856" y="457200"/>
+            <a:ext cx="10490911" cy="182880"/>
+          </a:xfrm>
+          <a:prstGeom prst="rect">
+            <a:avLst/>
+          </a:prstGeom>
+          <a:noFill/>
+          <a:ln/>
+        </p:spPr>
+        <p:txBody>
+          <a:bodyPr wrap="square" lIns="0" tIns="0" rIns="0" bIns="0" rtlCol="0" anchor="ctr"/>
+          <a:lstStyle/>
+          <a:p>
+            <a:pPr indent="0" marL="0">
+              <a:buNone/>
+            </a:pPr>
+            <a:r>
+              <a:rPr lang="en-US" sz="950" b="1" spc="200" kern="0" dirty="0">
+                <a:solidFill>
+                  <a:srgbClr val="B98A2E"/>
+                </a:solidFill>
+                <a:latin typeface="Arial" pitchFamily="34" charset="0"/>
+                <a:ea typeface="Arial" pitchFamily="34" charset="-122"/>
+                <a:cs typeface="Arial" pitchFamily="34" charset="-120"/>
+              </a:rPr>
+              <a:t>Risk</a:t>
+            </a:r>
+            <a:endParaRPr lang="en-US" sz="950" dirty="0"/>
+          </a:p>
+        </p:txBody>
+      </p:sp>
+      <p:sp>
+        <p:nvSpPr>
+          <p:cNvPr id="5" name="Text 3"/>
+          <p:cNvSpPr/>
+          <p:nvPr/>
+        </p:nvSpPr>
+        <p:spPr>
+          <a:xfrm>
+            <a:off x="1133856" y="640080"/>
+            <a:ext cx="10490911" cy="365760"/>
+          </a:xfrm>
+          <a:prstGeom prst="rect">
+            <a:avLst/>
+          </a:prstGeom>
+          <a:noFill/>
+          <a:ln/>
+        </p:spPr>
+        <p:txBody>
+          <a:bodyPr wrap="square" lIns="0" tIns="0" rIns="0" bIns="0" rtlCol="0" anchor="ctr"/>
+          <a:lstStyle/>
+          <a:p>
+            <a:pPr indent="0" marL="0">
+              <a:buNone/>
+            </a:pPr>
+            <a:r>
+              <a:rPr lang="en-US" sz="2300" b="1" dirty="0">
+                <a:solidFill>
+                  <a:srgbClr val="10161F"/>
+                </a:solidFill>
+                <a:latin typeface="Pretendard" pitchFamily="34" charset="0"/>
+                <a:ea typeface="Pretendard" pitchFamily="34" charset="-122"/>
+                <a:cs typeface="Pretendard" pitchFamily="34" charset="-120"/>
+              </a:rPr>
+              <a:t>리스크는 무엇이고 대응책은 있는가</a:t>
+            </a:r>
+            <a:endParaRPr lang="en-US" sz="2300" dirty="0"/>
+          </a:p>
+        </p:txBody>
+      </p:sp>
+      <p:sp>
+        <p:nvSpPr>
+          <p:cNvPr id="6" name="Shape 4"/>
+          <p:cNvSpPr/>
+          <p:nvPr/>
+        </p:nvSpPr>
+        <p:spPr>
+          <a:xfrm>
+            <a:off x="566928" y="1417320"/>
+            <a:ext cx="11057839" cy="3657600"/>
+          </a:xfrm>
+          <a:prstGeom prst="roundRect">
+            <a:avLst>
+              <a:gd name="adj" fmla="val 1500"/>
+            </a:avLst>
+          </a:prstGeom>
+          <a:solidFill>
+            <a:srgbClr val="F7FAFC"/>
+          </a:solidFill>
+          <a:ln w="6350">
+            <a:solidFill>
+              <a:srgbClr val="CBD5E0"/>
+            </a:solidFill>
+            <a:prstDash val="solid"/>
+          </a:ln>
+        </p:spPr>
+      </p:sp>
+      <p:sp>
+        <p:nvSpPr>
+          <p:cNvPr id="7" name="Shape 5"/>
+          <p:cNvSpPr/>
+          <p:nvPr/>
+        </p:nvSpPr>
+        <p:spPr>
+          <a:xfrm>
+            <a:off x="566928" y="1417320"/>
+            <a:ext cx="11057839" cy="45720"/>
+          </a:xfrm>
+          <a:prstGeom prst="rect">
+            <a:avLst/>
+          </a:prstGeom>
+          <a:solidFill>
+            <a:srgbClr val="B98A2E"/>
+          </a:solidFill>
+          <a:ln/>
+        </p:spPr>
+      </p:sp>
+      <p:sp>
+        <p:nvSpPr>
+          <p:cNvPr id="8" name="Text 6"/>
+          <p:cNvSpPr/>
+          <p:nvPr/>
+        </p:nvSpPr>
+        <p:spPr>
+          <a:xfrm>
+            <a:off x="795528" y="1618488"/>
+            <a:ext cx="10600639" cy="292608"/>
+          </a:xfrm>
+          <a:prstGeom prst="rect">
+            <a:avLst/>
+          </a:prstGeom>
+          <a:noFill/>
+          <a:ln/>
+        </p:spPr>
+        <p:txBody>
+          <a:bodyPr wrap="square" lIns="0" tIns="0" rIns="0" bIns="0" rtlCol="0" anchor="ctr"/>
+          <a:lstStyle/>
+          <a:p>
+            <a:pPr indent="0" marL="0">
+              <a:buNone/>
+            </a:pPr>
+            <a:r>
+              <a:rPr lang="en-US" sz="1350" b="1" dirty="0">
+                <a:solidFill>
+                  <a:srgbClr val="977024"/>
+                </a:solidFill>
+                <a:latin typeface="Pretendard" pitchFamily="34" charset="0"/>
+                <a:ea typeface="Pretendard" pitchFamily="34" charset="-122"/>
+                <a:cs typeface="Pretendard" pitchFamily="34" charset="-120"/>
+              </a:rPr>
+              <a:t>용도 리스크</a:t>
+            </a:r>
+            <a:endParaRPr lang="en-US" sz="1350" dirty="0"/>
+          </a:p>
+        </p:txBody>
+      </p:sp>
+      <p:sp>
+        <p:nvSpPr>
+          <p:cNvPr id="9" name="Text 7"/>
+          <p:cNvSpPr/>
+          <p:nvPr/>
+        </p:nvSpPr>
+        <p:spPr>
+          <a:xfrm>
+            <a:off x="795528" y="1947672"/>
+            <a:ext cx="10600639" cy="365760"/>
+          </a:xfrm>
+          <a:prstGeom prst="rect">
+            <a:avLst/>
+          </a:prstGeom>
+          <a:noFill/>
+          <a:ln/>
+        </p:spPr>
+        <p:txBody>
+          <a:bodyPr wrap="square" lIns="0" tIns="0" rIns="0" bIns="0" rtlCol="0" anchor="ctr">
+            <a:normAutofit/>
+          </a:bodyPr>
+          <a:lstStyle/>
+          <a:p>
+            <a:pPr indent="0" marL="0">
+              <a:buNone/>
+            </a:pPr>
+            <a:r>
+              <a:rPr lang="en-US" sz="1250" b="1" dirty="0">
+                <a:solidFill>
+                  <a:srgbClr val="10161F"/>
+                </a:solidFill>
+                <a:latin typeface="Pretendard" pitchFamily="34" charset="0"/>
+                <a:ea typeface="Pretendard" pitchFamily="34" charset="-122"/>
+                <a:cs typeface="Pretendard" pitchFamily="34" charset="-120"/>
+              </a:rPr>
+              <a:t>—</a:t>
+            </a:r>
+            <a:endParaRPr lang="en-US" sz="1250" dirty="0"/>
+          </a:p>
+        </p:txBody>
+      </p:sp>
+      <p:sp>
+        <p:nvSpPr>
+          <p:cNvPr id="10" name="Text 8"/>
+          <p:cNvSpPr/>
+          <p:nvPr/>
+        </p:nvSpPr>
+        <p:spPr>
+          <a:xfrm>
+            <a:off x="795528" y="2377440"/>
+            <a:ext cx="10600639" cy="2606040"/>
+          </a:xfrm>
+          <a:prstGeom prst="rect">
+            <a:avLst/>
+          </a:prstGeom>
+          <a:noFill/>
+          <a:ln/>
+        </p:spPr>
+        <p:txBody>
+          <a:bodyPr wrap="square" lIns="0" tIns="0" rIns="0" bIns="0" rtlCol="0" anchor="t">
+            <a:normAutofit/>
+          </a:bodyPr>
+          <a:lstStyle/>
+          <a:p>
+            <a:pPr marL="342900" indent="-342900">
+              <a:lnSpc>
+                <a:spcPct val="125000"/>
+              </a:lnSpc>
+              <a:buSzPct val="100000"/>
+              <a:buChar char="•"/>
+            </a:pPr>
+            <a:r>
+              <a:rPr lang="en-US" sz="1100" dirty="0">
+                <a:solidFill>
+                  <a:srgbClr val="10161F"/>
+                </a:solidFill>
+                <a:latin typeface="Pretendard" pitchFamily="34" charset="0"/>
+                <a:ea typeface="Pretendard" pitchFamily="34" charset="-122"/>
+                <a:cs typeface="Pretendard" pitchFamily="34" charset="-120"/>
+              </a:rPr>
+              <a:t>{"ok":true,"mocked":true,"extractedFields":{"area_signal":"역삼","asset_type":"[건물명 비공개]","price_band":"300억","size_signal":"3000평(약 9917.4㎡)"},"extractedFacts":{"region":"역삼","exactAddressCandidate":"역</a:t>
+            </a:r>
+            <a:endParaRPr lang="en-US" sz="1100" dirty="0"/>
+          </a:p>
+        </p:txBody>
+      </p:sp>
+      <p:sp>
+        <p:nvSpPr>
+          <p:cNvPr id="11" name="Shape 9"/>
+          <p:cNvSpPr/>
+          <p:nvPr/>
+        </p:nvSpPr>
+        <p:spPr>
+          <a:xfrm>
+            <a:off x="566928" y="5193792"/>
+            <a:ext cx="11057839" cy="621792"/>
+          </a:xfrm>
+          <a:prstGeom prst="roundRect">
+            <a:avLst>
+              <a:gd name="adj" fmla="val 8824"/>
+            </a:avLst>
+          </a:prstGeom>
+          <a:solidFill>
+            <a:srgbClr val="F7FAFC"/>
+          </a:solidFill>
+          <a:ln w="6350">
+            <a:solidFill>
+              <a:srgbClr val="CBD5E0"/>
+            </a:solidFill>
+            <a:prstDash val="solid"/>
+          </a:ln>
+        </p:spPr>
+      </p:sp>
+      <p:sp>
+        <p:nvSpPr>
+          <p:cNvPr id="12" name="Text 10"/>
+          <p:cNvSpPr/>
+          <p:nvPr/>
+        </p:nvSpPr>
+        <p:spPr>
+          <a:xfrm>
+            <a:off x="795528" y="5193792"/>
+            <a:ext cx="10600639" cy="621792"/>
+          </a:xfrm>
+          <a:prstGeom prst="rect">
+            <a:avLst/>
+          </a:prstGeom>
+          <a:noFill/>
+          <a:ln/>
+        </p:spPr>
+        <p:txBody>
+          <a:bodyPr wrap="square" lIns="0" tIns="0" rIns="0" bIns="0" rtlCol="0" anchor="ctr"/>
+          <a:lstStyle/>
+          <a:p>
+            <a:pPr indent="0" marL="0">
+              <a:buNone/>
+            </a:pPr>
+            <a:r>
+              <a:rPr lang="en-US" sz="1100" dirty="0">
+                <a:solidFill>
+                  <a:srgbClr val="10161F"/>
+                </a:solidFill>
+                <a:latin typeface="Pretendard" pitchFamily="34" charset="0"/>
+                <a:ea typeface="Pretendard" pitchFamily="34" charset="-122"/>
+                <a:cs typeface="Pretendard" pitchFamily="34" charset="-120"/>
+              </a:rPr>
+              <a:t>※ 본 리스크 체크는 공부 및 브로커 확인 기반이며, 매수 전 전문 실사팀(변호사/건축사)을 통한 정밀 실사가 필요합니다.</a:t>
+            </a:r>
+            <a:endParaRPr lang="en-US" sz="1100" dirty="0"/>
+          </a:p>
+        </p:txBody>
+      </p:sp>
+      <p:sp>
+        <p:nvSpPr>
+          <p:cNvPr id="13" name="Text 11"/>
+          <p:cNvSpPr/>
+          <p:nvPr/>
+        </p:nvSpPr>
+        <p:spPr>
+          <a:xfrm>
+            <a:off x="566928" y="6382512"/>
+            <a:ext cx="7315200" cy="219456"/>
+          </a:xfrm>
+          <a:prstGeom prst="rect">
+            <a:avLst/>
+          </a:prstGeom>
+          <a:noFill/>
+          <a:ln/>
+        </p:spPr>
+        <p:txBody>
+          <a:bodyPr wrap="square" lIns="0" tIns="0" rIns="0" bIns="0" rtlCol="0" anchor="ctr"/>
+          <a:lstStyle/>
+          <a:p>
+            <a:pPr indent="0" marL="0">
+              <a:buNone/>
+            </a:pPr>
+            <a:r>
+              <a:rPr lang="en-US" sz="800" dirty="0">
+                <a:solidFill>
+                  <a:srgbClr val="718096"/>
+                </a:solidFill>
+                <a:latin typeface="Pretendard" pitchFamily="34" charset="0"/>
+                <a:ea typeface="Pretendard" pitchFamily="34" charset="-122"/>
+                <a:cs typeface="Pretendard" pitchFamily="34" charset="-120"/>
+              </a:rPr>
+              <a:t>크리딜   |   </a:t>
+            </a:r>
+            <a:endParaRPr lang="en-US" sz="800" dirty="0"/>
+          </a:p>
+        </p:txBody>
+      </p:sp>
+      <p:sp>
+        <p:nvSpPr>
+          <p:cNvPr id="14" name="Text 12"/>
+          <p:cNvSpPr/>
+          <p:nvPr/>
+        </p:nvSpPr>
+        <p:spPr>
+          <a:xfrm>
+            <a:off x="10710367" y="6382512"/>
+            <a:ext cx="914400" cy="219456"/>
+          </a:xfrm>
+          <a:prstGeom prst="rect">
+            <a:avLst/>
+          </a:prstGeom>
+          <a:noFill/>
+          <a:ln/>
+        </p:spPr>
+        <p:txBody>
+          <a:bodyPr wrap="square" lIns="0" tIns="0" rIns="0" bIns="0" rtlCol="0" anchor="ctr"/>
+          <a:lstStyle/>
+          <a:p>
+            <a:pPr algn="r" indent="0" marL="0">
+              <a:buNone/>
+            </a:pPr>
+            <a:r>
+              <a:rPr lang="en-US" sz="900" b="1" dirty="0">
+                <a:solidFill>
+                  <a:srgbClr val="B98A2E"/>
+                </a:solidFill>
+                <a:latin typeface="Arial" pitchFamily="34" charset="0"/>
+                <a:ea typeface="Arial" pitchFamily="34" charset="-122"/>
+                <a:cs typeface="Arial" pitchFamily="34" charset="-120"/>
+              </a:rPr>
+              <a:t>10</a:t>
+            </a:r>
+            <a:endParaRPr lang="en-US" sz="900" dirty="0"/>
+          </a:p>
+        </p:txBody>
+      </p:sp>
+    </p:spTree>
+  </p:cSld>
+  <p:clrMapOvr>
+    <a:masterClrMapping/>
+  </p:clrMapOvr>
+</p:sld>
+</file>
+
+<file path=ppt/slides/slide11.xml><?xml version="1.0" encoding="utf-8"?>
+<p:sld xmlns:a="http://schemas.openxmlformats.org/drawingml/2006/main" xmlns:r="http://schemas.openxmlformats.org/officeDocument/2006/relationships" xmlns:p="http://schemas.openxmlformats.org/presentationml/2006/main">
+  <p:cSld name="Slide 11">
+    <p:bg>
+      <p:bgPr>
+        <a:solidFill>
+          <a:srgbClr val="FFFFFF"/>
+        </a:solidFill>
+      </p:bgPr>
+    </p:bg>
+    <p:spTree>
+      <p:nvGrpSpPr>
+        <p:cNvPr id="1" name=""/>
+        <p:cNvGrpSpPr/>
+        <p:nvPr/>
+      </p:nvGrpSpPr>
+      <p:grpSpPr>
+        <a:xfrm>
+          <a:off x="0" y="0"/>
+          <a:ext cx="0" cy="0"/>
+          <a:chOff x="0" y="0"/>
+          <a:chExt cx="0" cy="0"/>
+        </a:xfrm>
+      </p:grpSpPr>
+      <p:sp>
+        <p:nvSpPr>
+          <p:cNvPr id="2" name="Shape 0"/>
+          <p:cNvSpPr/>
+          <p:nvPr/>
+        </p:nvSpPr>
+        <p:spPr>
+          <a:xfrm>
+            <a:off x="566928" y="457200"/>
+            <a:ext cx="384048" cy="384048"/>
+          </a:xfrm>
+          <a:prstGeom prst="ellipse">
+            <a:avLst/>
+          </a:prstGeom>
+          <a:solidFill>
+            <a:srgbClr val="B98A2E"/>
+          </a:solidFill>
+          <a:ln/>
+        </p:spPr>
+      </p:sp>
+      <p:sp>
+        <p:nvSpPr>
+          <p:cNvPr id="3" name="Text 1"/>
+          <p:cNvSpPr/>
+          <p:nvPr/>
+        </p:nvSpPr>
+        <p:spPr>
+          <a:xfrm>
+            <a:off x="566928" y="457200"/>
+            <a:ext cx="384048" cy="384048"/>
+          </a:xfrm>
+          <a:prstGeom prst="rect">
+            <a:avLst/>
+          </a:prstGeom>
+          <a:noFill/>
+          <a:ln/>
+        </p:spPr>
+        <p:txBody>
+          <a:bodyPr wrap="square" lIns="0" tIns="0" rIns="0" bIns="0" rtlCol="0" anchor="ctr"/>
+          <a:lstStyle/>
+          <a:p>
+            <a:pPr algn="ctr" indent="0" marL="0">
+              <a:buNone/>
+            </a:pPr>
+            <a:r>
+              <a:rPr lang="en-US" sz="1300" b="1" dirty="0">
+                <a:solidFill>
+                  <a:srgbClr val="FFFFFF"/>
+                </a:solidFill>
+                <a:latin typeface="Arial" pitchFamily="34" charset="0"/>
+                <a:ea typeface="Arial" pitchFamily="34" charset="-122"/>
+                <a:cs typeface="Arial" pitchFamily="34" charset="-120"/>
+              </a:rPr>
+              <a:t>11</a:t>
+            </a:r>
+            <a:endParaRPr lang="en-US" sz="1300" dirty="0"/>
+          </a:p>
+        </p:txBody>
+      </p:sp>
+      <p:sp>
+        <p:nvSpPr>
+          <p:cNvPr id="4" name="Text 2"/>
+          <p:cNvSpPr/>
+          <p:nvPr/>
+        </p:nvSpPr>
+        <p:spPr>
+          <a:xfrm>
+            <a:off x="1133856" y="457200"/>
+            <a:ext cx="10490911" cy="182880"/>
+          </a:xfrm>
+          <a:prstGeom prst="rect">
+            <a:avLst/>
+          </a:prstGeom>
+          <a:noFill/>
+          <a:ln/>
+        </p:spPr>
+        <p:txBody>
+          <a:bodyPr wrap="square" lIns="0" tIns="0" rIns="0" bIns="0" rtlCol="0" anchor="ctr"/>
+          <a:lstStyle/>
+          <a:p>
+            <a:pPr indent="0" marL="0">
+              <a:buNone/>
+            </a:pPr>
+            <a:r>
+              <a:rPr lang="en-US" sz="950" b="1" spc="200" kern="0" dirty="0">
+                <a:solidFill>
+                  <a:srgbClr val="B98A2E"/>
+                </a:solidFill>
+                <a:latin typeface="Arial" pitchFamily="34" charset="0"/>
+                <a:ea typeface="Arial" pitchFamily="34" charset="-122"/>
+                <a:cs typeface="Arial" pitchFamily="34" charset="-120"/>
+              </a:rPr>
+              <a:t>Checklist</a:t>
+            </a:r>
+            <a:endParaRPr lang="en-US" sz="950" dirty="0"/>
+          </a:p>
+        </p:txBody>
+      </p:sp>
+      <p:sp>
+        <p:nvSpPr>
+          <p:cNvPr id="5" name="Text 3"/>
+          <p:cNvSpPr/>
+          <p:nvPr/>
+        </p:nvSpPr>
+        <p:spPr>
+          <a:xfrm>
+            <a:off x="1133856" y="640080"/>
+            <a:ext cx="10490911" cy="365760"/>
+          </a:xfrm>
+          <a:prstGeom prst="rect">
+            <a:avLst/>
+          </a:prstGeom>
+          <a:noFill/>
+          <a:ln/>
+        </p:spPr>
+        <p:txBody>
+          <a:bodyPr wrap="square" lIns="0" tIns="0" rIns="0" bIns="0" rtlCol="0" anchor="ctr"/>
+          <a:lstStyle/>
+          <a:p>
+            <a:pPr indent="0" marL="0">
+              <a:buNone/>
+            </a:pPr>
+            <a:r>
+              <a:rPr lang="en-US" sz="2300" b="1" dirty="0">
+                <a:solidFill>
+                  <a:srgbClr val="10161F"/>
+                </a:solidFill>
+                <a:latin typeface="Pretendard" pitchFamily="34" charset="0"/>
+                <a:ea typeface="Pretendard" pitchFamily="34" charset="-122"/>
+                <a:cs typeface="Pretendard" pitchFamily="34" charset="-120"/>
+              </a:rPr>
+              <a:t>실사 및 확인 필요사항</a:t>
+            </a:r>
+            <a:endParaRPr lang="en-US" sz="2300" dirty="0"/>
+          </a:p>
+        </p:txBody>
+      </p:sp>
+      <p:sp>
+        <p:nvSpPr>
+          <p:cNvPr id="6" name="Text 4"/>
+          <p:cNvSpPr/>
+          <p:nvPr/>
+        </p:nvSpPr>
+        <p:spPr>
+          <a:xfrm>
+            <a:off x="566928" y="1371600"/>
+            <a:ext cx="11057839" cy="237744"/>
+          </a:xfrm>
+          <a:prstGeom prst="rect">
+            <a:avLst/>
+          </a:prstGeom>
+          <a:noFill/>
+          <a:ln/>
+        </p:spPr>
+        <p:txBody>
+          <a:bodyPr wrap="square" lIns="0" tIns="0" rIns="0" bIns="0" rtlCol="0" anchor="ctr"/>
+          <a:lstStyle/>
+          <a:p>
+            <a:pPr indent="0" marL="0">
+              <a:buNone/>
+            </a:pPr>
+            <a:r>
+              <a:rPr lang="en-US" sz="1100" b="1" dirty="0">
+                <a:solidFill>
+                  <a:srgbClr val="10161F"/>
+                </a:solidFill>
+                <a:latin typeface="Pretendard" pitchFamily="34" charset="0"/>
+                <a:ea typeface="Pretendard" pitchFamily="34" charset="-122"/>
+                <a:cs typeface="Pretendard" pitchFamily="34" charset="-120"/>
+              </a:rPr>
+              <a:t>거래 안정성 확보를 위한 필수 법률·물리·임대차 실사 점검 항목 (총 6건)</a:t>
+            </a:r>
+            <a:endParaRPr lang="en-US" sz="1100" dirty="0"/>
+          </a:p>
+        </p:txBody>
+      </p:sp>
+      <p:sp>
+        <p:nvSpPr>
+          <p:cNvPr id="7" name="Shape 5"/>
+          <p:cNvSpPr/>
+          <p:nvPr/>
+        </p:nvSpPr>
+        <p:spPr>
+          <a:xfrm>
+            <a:off x="566928" y="1719072"/>
+            <a:ext cx="5368900" cy="868680"/>
+          </a:xfrm>
+          <a:prstGeom prst="rect">
+            <a:avLst/>
+          </a:prstGeom>
+          <a:solidFill>
+            <a:srgbClr val="F7FAFC"/>
+          </a:solidFill>
+          <a:ln w="6350">
+            <a:solidFill>
+              <a:srgbClr val="D9B668"/>
+            </a:solidFill>
+            <a:prstDash val="solid"/>
+          </a:ln>
+        </p:spPr>
+      </p:sp>
+      <p:sp>
+        <p:nvSpPr>
+          <p:cNvPr id="8" name="Shape 6"/>
+          <p:cNvSpPr/>
+          <p:nvPr/>
+        </p:nvSpPr>
+        <p:spPr>
+          <a:xfrm>
+            <a:off x="704088" y="1883664"/>
+            <a:ext cx="320040" cy="320040"/>
+          </a:xfrm>
+          <a:prstGeom prst="rect">
+            <a:avLst/>
+          </a:prstGeom>
+          <a:solidFill>
+            <a:srgbClr val="977024"/>
+          </a:solidFill>
+          <a:ln/>
+        </p:spPr>
+      </p:sp>
+      <p:sp>
+        <p:nvSpPr>
+          <p:cNvPr id="9" name="Text 7"/>
+          <p:cNvSpPr/>
+          <p:nvPr/>
+        </p:nvSpPr>
+        <p:spPr>
+          <a:xfrm>
+            <a:off x="704088" y="1883664"/>
+            <a:ext cx="320040" cy="320040"/>
+          </a:xfrm>
+          <a:prstGeom prst="rect">
+            <a:avLst/>
+          </a:prstGeom>
+          <a:noFill/>
+          <a:ln/>
+        </p:spPr>
+        <p:txBody>
+          <a:bodyPr wrap="square" rtlCol="0" anchor="ctr"/>
+          <a:lstStyle/>
+          <a:p>
+            <a:pPr algn="ctr" indent="0" marL="0">
+              <a:buNone/>
+            </a:pPr>
+            <a:r>
+              <a:rPr lang="en-US" sz="1100" b="1" dirty="0">
+                <a:solidFill>
+                  <a:srgbClr val="000000"/>
+                </a:solidFill>
+                <a:latin typeface="Pretendard" pitchFamily="34" charset="0"/>
+                <a:ea typeface="Pretendard" pitchFamily="34" charset="-122"/>
+                <a:cs typeface="Pretendard" pitchFamily="34" charset="-120"/>
+              </a:rPr>
+              <a:t>✓</a:t>
+            </a:r>
+            <a:endParaRPr lang="en-US" sz="1100" dirty="0"/>
+          </a:p>
+        </p:txBody>
+      </p:sp>
+      <p:sp>
+        <p:nvSpPr>
+          <p:cNvPr id="10" name="Text 8"/>
+          <p:cNvSpPr/>
+          <p:nvPr/>
+        </p:nvSpPr>
+        <p:spPr>
+          <a:xfrm>
+            <a:off x="1115568" y="1828800"/>
+            <a:ext cx="4683100" cy="685800"/>
+          </a:xfrm>
+          <a:prstGeom prst="rect">
+            <a:avLst/>
+          </a:prstGeom>
+          <a:noFill/>
+          <a:ln/>
+        </p:spPr>
+        <p:txBody>
+          <a:bodyPr wrap="square" rtlCol="0" anchor="ctr"/>
+          <a:lstStyle/>
+          <a:p>
+            <a:pPr indent="0" marL="0">
+              <a:lnSpc>
+                <a:spcPct val="115000"/>
+              </a:lnSpc>
+              <a:buNone/>
+            </a:pPr>
+            <a:r>
+              <a:rPr lang="en-US" sz="1050" dirty="0">
+                <a:solidFill>
+                  <a:srgbClr val="10161F"/>
+                </a:solidFill>
+                <a:latin typeface="Pretendard" pitchFamily="34" charset="0"/>
+                <a:ea typeface="Pretendard" pitchFamily="34" charset="-122"/>
+                <a:cs typeface="Pretendard" pitchFamily="34" charset="-120"/>
+              </a:rPr>
+              <a:t>등기부등본 갑구/을구 권리관계 및 근저당 채권최고액 전액 말소 조건 원본 대조</a:t>
+            </a:r>
+            <a:endParaRPr lang="en-US" sz="1050" dirty="0"/>
+          </a:p>
+        </p:txBody>
+      </p:sp>
+      <p:sp>
+        <p:nvSpPr>
+          <p:cNvPr id="11" name="Shape 9"/>
+          <p:cNvSpPr/>
+          <p:nvPr/>
+        </p:nvSpPr>
+        <p:spPr>
+          <a:xfrm>
+            <a:off x="566928" y="2715768"/>
+            <a:ext cx="5368900" cy="868680"/>
+          </a:xfrm>
+          <a:prstGeom prst="rect">
+            <a:avLst/>
+          </a:prstGeom>
+          <a:solidFill>
+            <a:srgbClr val="F7FAFC"/>
+          </a:solidFill>
+          <a:ln w="6350">
+            <a:solidFill>
+              <a:srgbClr val="D9B668"/>
+            </a:solidFill>
+            <a:prstDash val="solid"/>
+          </a:ln>
+        </p:spPr>
+      </p:sp>
+      <p:sp>
+        <p:nvSpPr>
+          <p:cNvPr id="12" name="Shape 10"/>
+          <p:cNvSpPr/>
+          <p:nvPr/>
+        </p:nvSpPr>
+        <p:spPr>
+          <a:xfrm>
+            <a:off x="704088" y="2880360"/>
+            <a:ext cx="320040" cy="320040"/>
+          </a:xfrm>
+          <a:prstGeom prst="rect">
+            <a:avLst/>
+          </a:prstGeom>
+          <a:solidFill>
+            <a:srgbClr val="977024"/>
+          </a:solidFill>
+          <a:ln/>
+        </p:spPr>
+      </p:sp>
+      <p:sp>
+        <p:nvSpPr>
+          <p:cNvPr id="13" name="Text 11"/>
+          <p:cNvSpPr/>
+          <p:nvPr/>
+        </p:nvSpPr>
+        <p:spPr>
+          <a:xfrm>
+            <a:off x="704088" y="2880360"/>
+            <a:ext cx="320040" cy="320040"/>
+          </a:xfrm>
+          <a:prstGeom prst="rect">
+            <a:avLst/>
+          </a:prstGeom>
+          <a:noFill/>
+          <a:ln/>
+        </p:spPr>
+        <p:txBody>
+          <a:bodyPr wrap="square" rtlCol="0" anchor="ctr"/>
+          <a:lstStyle/>
+          <a:p>
+            <a:pPr algn="ctr" indent="0" marL="0">
+              <a:buNone/>
+            </a:pPr>
+            <a:r>
+              <a:rPr lang="en-US" sz="1100" b="1" dirty="0">
+                <a:solidFill>
+                  <a:srgbClr val="000000"/>
+                </a:solidFill>
+                <a:latin typeface="Pretendard" pitchFamily="34" charset="0"/>
+                <a:ea typeface="Pretendard" pitchFamily="34" charset="-122"/>
+                <a:cs typeface="Pretendard" pitchFamily="34" charset="-120"/>
+              </a:rPr>
+              <a:t>✓</a:t>
+            </a:r>
+            <a:endParaRPr lang="en-US" sz="1100" dirty="0"/>
+          </a:p>
+        </p:txBody>
+      </p:sp>
+      <p:sp>
+        <p:nvSpPr>
+          <p:cNvPr id="14" name="Text 12"/>
+          <p:cNvSpPr/>
+          <p:nvPr/>
+        </p:nvSpPr>
+        <p:spPr>
+          <a:xfrm>
+            <a:off x="1115568" y="2825496"/>
+            <a:ext cx="4683100" cy="685800"/>
+          </a:xfrm>
+          <a:prstGeom prst="rect">
+            <a:avLst/>
+          </a:prstGeom>
+          <a:noFill/>
+          <a:ln/>
+        </p:spPr>
+        <p:txBody>
+          <a:bodyPr wrap="square" rtlCol="0" anchor="ctr"/>
+          <a:lstStyle/>
+          <a:p>
+            <a:pPr indent="0" marL="0">
+              <a:lnSpc>
+                <a:spcPct val="115000"/>
+              </a:lnSpc>
+              <a:buNone/>
+            </a:pPr>
+            <a:r>
+              <a:rPr lang="en-US" sz="1050" dirty="0">
+                <a:solidFill>
+                  <a:srgbClr val="10161F"/>
+                </a:solidFill>
+                <a:latin typeface="Pretendard" pitchFamily="34" charset="0"/>
+                <a:ea typeface="Pretendard" pitchFamily="34" charset="-122"/>
+                <a:cs typeface="Pretendard" pitchFamily="34" charset="-120"/>
+              </a:rPr>
+              <a:t>임대차 원본 계약서 대조 (보증금, 월임대료, 관리비 실입금 내역 및 제소전화해조서)</a:t>
+            </a:r>
+            <a:endParaRPr lang="en-US" sz="1050" dirty="0"/>
+          </a:p>
+        </p:txBody>
+      </p:sp>
+      <p:sp>
+        <p:nvSpPr>
+          <p:cNvPr id="15" name="Shape 13"/>
+          <p:cNvSpPr/>
+          <p:nvPr/>
+        </p:nvSpPr>
+        <p:spPr>
+          <a:xfrm>
+            <a:off x="566928" y="3712464"/>
+            <a:ext cx="5368900" cy="868680"/>
+          </a:xfrm>
+          <a:prstGeom prst="rect">
+            <a:avLst/>
+          </a:prstGeom>
+          <a:solidFill>
+            <a:srgbClr val="F7FAFC"/>
+          </a:solidFill>
+          <a:ln w="6350">
+            <a:solidFill>
+              <a:srgbClr val="D9B668"/>
+            </a:solidFill>
+            <a:prstDash val="solid"/>
+          </a:ln>
+        </p:spPr>
+      </p:sp>
+      <p:sp>
+        <p:nvSpPr>
+          <p:cNvPr id="16" name="Shape 14"/>
+          <p:cNvSpPr/>
+          <p:nvPr/>
+        </p:nvSpPr>
+        <p:spPr>
+          <a:xfrm>
+            <a:off x="704088" y="3877056"/>
+            <a:ext cx="320040" cy="320040"/>
+          </a:xfrm>
+          <a:prstGeom prst="rect">
+            <a:avLst/>
+          </a:prstGeom>
+          <a:solidFill>
+            <a:srgbClr val="977024"/>
+          </a:solidFill>
+          <a:ln/>
+        </p:spPr>
+      </p:sp>
+      <p:sp>
+        <p:nvSpPr>
+          <p:cNvPr id="17" name="Text 15"/>
+          <p:cNvSpPr/>
+          <p:nvPr/>
+        </p:nvSpPr>
+        <p:spPr>
+          <a:xfrm>
+            <a:off x="704088" y="3877056"/>
+            <a:ext cx="320040" cy="320040"/>
+          </a:xfrm>
+          <a:prstGeom prst="rect">
+            <a:avLst/>
+          </a:prstGeom>
+          <a:noFill/>
+          <a:ln/>
+        </p:spPr>
+        <p:txBody>
+          <a:bodyPr wrap="square" rtlCol="0" anchor="ctr"/>
+          <a:lstStyle/>
+          <a:p>
+            <a:pPr algn="ctr" indent="0" marL="0">
+              <a:buNone/>
+            </a:pPr>
+            <a:r>
+              <a:rPr lang="en-US" sz="1100" b="1" dirty="0">
+                <a:solidFill>
+                  <a:srgbClr val="000000"/>
+                </a:solidFill>
+                <a:latin typeface="Pretendard" pitchFamily="34" charset="0"/>
+                <a:ea typeface="Pretendard" pitchFamily="34" charset="-122"/>
+                <a:cs typeface="Pretendard" pitchFamily="34" charset="-120"/>
+              </a:rPr>
+              <a:t>✓</a:t>
+            </a:r>
+            <a:endParaRPr lang="en-US" sz="1100" dirty="0"/>
+          </a:p>
+        </p:txBody>
+      </p:sp>
+      <p:sp>
+        <p:nvSpPr>
+          <p:cNvPr id="18" name="Text 16"/>
+          <p:cNvSpPr/>
+          <p:nvPr/>
+        </p:nvSpPr>
+        <p:spPr>
+          <a:xfrm>
+            <a:off x="1115568" y="3822192"/>
+            <a:ext cx="4683100" cy="685800"/>
+          </a:xfrm>
+          <a:prstGeom prst="rect">
+            <a:avLst/>
+          </a:prstGeom>
+          <a:noFill/>
+          <a:ln/>
+        </p:spPr>
+        <p:txBody>
+          <a:bodyPr wrap="square" rtlCol="0" anchor="ctr"/>
+          <a:lstStyle/>
+          <a:p>
+            <a:pPr indent="0" marL="0">
+              <a:lnSpc>
+                <a:spcPct val="115000"/>
+              </a:lnSpc>
+              <a:buNone/>
+            </a:pPr>
+            <a:r>
+              <a:rPr lang="en-US" sz="1050" dirty="0">
+                <a:solidFill>
+                  <a:srgbClr val="10161F"/>
+                </a:solidFill>
+                <a:latin typeface="Pretendard" pitchFamily="34" charset="0"/>
+                <a:ea typeface="Pretendard" pitchFamily="34" charset="-122"/>
+                <a:cs typeface="Pretendard" pitchFamily="34" charset="-120"/>
+              </a:rPr>
+              <a:t>건축물대장상 위반건축물 등재 여부 및 불법 증축·용도변경 이행강제금 납부 이력 점검</a:t>
+            </a:r>
+            <a:endParaRPr lang="en-US" sz="1050" dirty="0"/>
+          </a:p>
+        </p:txBody>
+      </p:sp>
+      <p:sp>
+        <p:nvSpPr>
+          <p:cNvPr id="19" name="Shape 17"/>
+          <p:cNvSpPr/>
+          <p:nvPr/>
+        </p:nvSpPr>
+        <p:spPr>
+          <a:xfrm>
+            <a:off x="6255868" y="1719072"/>
+            <a:ext cx="5368900" cy="868680"/>
+          </a:xfrm>
+          <a:prstGeom prst="rect">
+            <a:avLst/>
+          </a:prstGeom>
+          <a:solidFill>
+            <a:srgbClr val="F7FAFC"/>
+          </a:solidFill>
+          <a:ln w="6350">
+            <a:solidFill>
+              <a:srgbClr val="D9B668"/>
+            </a:solidFill>
+            <a:prstDash val="solid"/>
+          </a:ln>
+        </p:spPr>
+      </p:sp>
+      <p:sp>
+        <p:nvSpPr>
+          <p:cNvPr id="20" name="Shape 18"/>
+          <p:cNvSpPr/>
+          <p:nvPr/>
+        </p:nvSpPr>
+        <p:spPr>
+          <a:xfrm>
+            <a:off x="6393028" y="1883664"/>
+            <a:ext cx="320040" cy="320040"/>
+          </a:xfrm>
+          <a:prstGeom prst="rect">
+            <a:avLst/>
+          </a:prstGeom>
+          <a:solidFill>
+            <a:srgbClr val="977024"/>
+          </a:solidFill>
+          <a:ln/>
+        </p:spPr>
+      </p:sp>
+      <p:sp>
+        <p:nvSpPr>
+          <p:cNvPr id="21" name="Text 19"/>
+          <p:cNvSpPr/>
+          <p:nvPr/>
+        </p:nvSpPr>
+        <p:spPr>
+          <a:xfrm>
+            <a:off x="6393028" y="1883664"/>
+            <a:ext cx="320040" cy="320040"/>
+          </a:xfrm>
+          <a:prstGeom prst="rect">
+            <a:avLst/>
+          </a:prstGeom>
+          <a:noFill/>
+          <a:ln/>
+        </p:spPr>
+        <p:txBody>
+          <a:bodyPr wrap="square" rtlCol="0" anchor="ctr"/>
+          <a:lstStyle/>
+          <a:p>
+            <a:pPr algn="ctr" indent="0" marL="0">
+              <a:buNone/>
+            </a:pPr>
+            <a:r>
+              <a:rPr lang="en-US" sz="1100" b="1" dirty="0">
+                <a:solidFill>
+                  <a:srgbClr val="000000"/>
+                </a:solidFill>
+                <a:latin typeface="Pretendard" pitchFamily="34" charset="0"/>
+                <a:ea typeface="Pretendard" pitchFamily="34" charset="-122"/>
+                <a:cs typeface="Pretendard" pitchFamily="34" charset="-120"/>
+              </a:rPr>
+              <a:t>✓</a:t>
+            </a:r>
+            <a:endParaRPr lang="en-US" sz="1100" dirty="0"/>
+          </a:p>
+        </p:txBody>
+      </p:sp>
+      <p:sp>
+        <p:nvSpPr>
+          <p:cNvPr id="22" name="Text 20"/>
+          <p:cNvSpPr/>
+          <p:nvPr/>
+        </p:nvSpPr>
+        <p:spPr>
+          <a:xfrm>
+            <a:off x="6804508" y="1828800"/>
+            <a:ext cx="4683100" cy="685800"/>
+          </a:xfrm>
+          <a:prstGeom prst="rect">
+            <a:avLst/>
+          </a:prstGeom>
+          <a:noFill/>
+          <a:ln/>
+        </p:spPr>
+        <p:txBody>
+          <a:bodyPr wrap="square" rtlCol="0" anchor="ctr"/>
+          <a:lstStyle/>
+          <a:p>
+            <a:pPr indent="0" marL="0">
+              <a:lnSpc>
+                <a:spcPct val="115000"/>
+              </a:lnSpc>
+              <a:buNone/>
+            </a:pPr>
+            <a:r>
+              <a:rPr lang="en-US" sz="1050" dirty="0">
+                <a:solidFill>
+                  <a:srgbClr val="10161F"/>
+                </a:solidFill>
+                <a:latin typeface="Pretendard" pitchFamily="34" charset="0"/>
+                <a:ea typeface="Pretendard" pitchFamily="34" charset="-122"/>
+                <a:cs typeface="Pretendard" pitchFamily="34" charset="-120"/>
+              </a:rPr>
+              <a:t>토지이용계획확인원상 도시계획시설 저촉, 건축선 후퇴, 지구단위계획 특별계획구역 확인</a:t>
+            </a:r>
+            <a:endParaRPr lang="en-US" sz="1050" dirty="0"/>
+          </a:p>
+        </p:txBody>
+      </p:sp>
+      <p:sp>
+        <p:nvSpPr>
+          <p:cNvPr id="23" name="Shape 21"/>
+          <p:cNvSpPr/>
+          <p:nvPr/>
+        </p:nvSpPr>
+        <p:spPr>
+          <a:xfrm>
+            <a:off x="6255868" y="2715768"/>
+            <a:ext cx="5368900" cy="868680"/>
+          </a:xfrm>
+          <a:prstGeom prst="rect">
+            <a:avLst/>
+          </a:prstGeom>
+          <a:solidFill>
+            <a:srgbClr val="F7FAFC"/>
+          </a:solidFill>
+          <a:ln w="6350">
+            <a:solidFill>
+              <a:srgbClr val="D9B668"/>
+            </a:solidFill>
+            <a:prstDash val="solid"/>
+          </a:ln>
+        </p:spPr>
+      </p:sp>
+      <p:sp>
+        <p:nvSpPr>
+          <p:cNvPr id="24" name="Shape 22"/>
+          <p:cNvSpPr/>
+          <p:nvPr/>
+        </p:nvSpPr>
+        <p:spPr>
+          <a:xfrm>
+            <a:off x="6393028" y="2880360"/>
+            <a:ext cx="320040" cy="320040"/>
+          </a:xfrm>
+          <a:prstGeom prst="rect">
+            <a:avLst/>
+          </a:prstGeom>
+          <a:solidFill>
+            <a:srgbClr val="977024"/>
+          </a:solidFill>
+          <a:ln/>
+        </p:spPr>
+      </p:sp>
+      <p:sp>
+        <p:nvSpPr>
+          <p:cNvPr id="25" name="Text 23"/>
+          <p:cNvSpPr/>
+          <p:nvPr/>
+        </p:nvSpPr>
+        <p:spPr>
+          <a:xfrm>
+            <a:off x="6393028" y="2880360"/>
+            <a:ext cx="320040" cy="320040"/>
+          </a:xfrm>
+          <a:prstGeom prst="rect">
+            <a:avLst/>
+          </a:prstGeom>
+          <a:noFill/>
+          <a:ln/>
+        </p:spPr>
+        <p:txBody>
+          <a:bodyPr wrap="square" rtlCol="0" anchor="ctr"/>
+          <a:lstStyle/>
+          <a:p>
+            <a:pPr algn="ctr" indent="0" marL="0">
+              <a:buNone/>
+            </a:pPr>
+            <a:r>
+              <a:rPr lang="en-US" sz="1100" b="1" dirty="0">
+                <a:solidFill>
+                  <a:srgbClr val="000000"/>
+                </a:solidFill>
+                <a:latin typeface="Pretendard" pitchFamily="34" charset="0"/>
+                <a:ea typeface="Pretendard" pitchFamily="34" charset="-122"/>
+                <a:cs typeface="Pretendard" pitchFamily="34" charset="-120"/>
+              </a:rPr>
+              <a:t>✓</a:t>
+            </a:r>
+            <a:endParaRPr lang="en-US" sz="1100" dirty="0"/>
+          </a:p>
+        </p:txBody>
+      </p:sp>
+      <p:sp>
+        <p:nvSpPr>
+          <p:cNvPr id="26" name="Text 24"/>
+          <p:cNvSpPr/>
+          <p:nvPr/>
+        </p:nvSpPr>
+        <p:spPr>
+          <a:xfrm>
+            <a:off x="6804508" y="2825496"/>
+            <a:ext cx="4683100" cy="685800"/>
+          </a:xfrm>
+          <a:prstGeom prst="rect">
+            <a:avLst/>
+          </a:prstGeom>
+          <a:noFill/>
+          <a:ln/>
+        </p:spPr>
+        <p:txBody>
+          <a:bodyPr wrap="square" rtlCol="0" anchor="ctr"/>
+          <a:lstStyle/>
+          <a:p>
+            <a:pPr indent="0" marL="0">
+              <a:lnSpc>
+                <a:spcPct val="115000"/>
+              </a:lnSpc>
+              <a:buNone/>
+            </a:pPr>
+            <a:r>
+              <a:rPr lang="en-US" sz="1050" dirty="0">
+                <a:solidFill>
+                  <a:srgbClr val="10161F"/>
+                </a:solidFill>
+                <a:latin typeface="Pretendard" pitchFamily="34" charset="0"/>
+                <a:ea typeface="Pretendard" pitchFamily="34" charset="-122"/>
+                <a:cs typeface="Pretendard" pitchFamily="34" charset="-120"/>
+              </a:rPr>
+              <a:t>기계식 주차기 정기 안전점검 합격증, 승강기 검사필증, 소방 완비증명서 실물 실사</a:t>
+            </a:r>
+            <a:endParaRPr lang="en-US" sz="1050" dirty="0"/>
+          </a:p>
+        </p:txBody>
+      </p:sp>
+      <p:sp>
+        <p:nvSpPr>
+          <p:cNvPr id="27" name="Shape 25"/>
+          <p:cNvSpPr/>
+          <p:nvPr/>
+        </p:nvSpPr>
+        <p:spPr>
+          <a:xfrm>
+            <a:off x="6255868" y="3712464"/>
+            <a:ext cx="5368900" cy="868680"/>
+          </a:xfrm>
+          <a:prstGeom prst="rect">
+            <a:avLst/>
+          </a:prstGeom>
+          <a:solidFill>
+            <a:srgbClr val="F7FAFC"/>
+          </a:solidFill>
+          <a:ln w="6350">
+            <a:solidFill>
+              <a:srgbClr val="D9B668"/>
+            </a:solidFill>
+            <a:prstDash val="solid"/>
+          </a:ln>
+        </p:spPr>
+      </p:sp>
+      <p:sp>
+        <p:nvSpPr>
+          <p:cNvPr id="28" name="Shape 26"/>
+          <p:cNvSpPr/>
+          <p:nvPr/>
+        </p:nvSpPr>
+        <p:spPr>
+          <a:xfrm>
+            <a:off x="6393028" y="3877056"/>
+            <a:ext cx="320040" cy="320040"/>
+          </a:xfrm>
+          <a:prstGeom prst="rect">
+            <a:avLst/>
+          </a:prstGeom>
+          <a:solidFill>
+            <a:srgbClr val="977024"/>
+          </a:solidFill>
+          <a:ln/>
+        </p:spPr>
+      </p:sp>
+      <p:sp>
+        <p:nvSpPr>
+          <p:cNvPr id="29" name="Text 27"/>
+          <p:cNvSpPr/>
+          <p:nvPr/>
+        </p:nvSpPr>
+        <p:spPr>
+          <a:xfrm>
+            <a:off x="6393028" y="3877056"/>
+            <a:ext cx="320040" cy="320040"/>
+          </a:xfrm>
+          <a:prstGeom prst="rect">
+            <a:avLst/>
+          </a:prstGeom>
+          <a:noFill/>
+          <a:ln/>
+        </p:spPr>
+        <p:txBody>
+          <a:bodyPr wrap="square" rtlCol="0" anchor="ctr"/>
+          <a:lstStyle/>
+          <a:p>
+            <a:pPr algn="ctr" indent="0" marL="0">
+              <a:buNone/>
+            </a:pPr>
+            <a:r>
+              <a:rPr lang="en-US" sz="1100" b="1" dirty="0">
+                <a:solidFill>
+                  <a:srgbClr val="000000"/>
+                </a:solidFill>
+                <a:latin typeface="Pretendard" pitchFamily="34" charset="0"/>
+                <a:ea typeface="Pretendard" pitchFamily="34" charset="-122"/>
+                <a:cs typeface="Pretendard" pitchFamily="34" charset="-120"/>
+              </a:rPr>
+              <a:t>✓</a:t>
+            </a:r>
+            <a:endParaRPr lang="en-US" sz="1100" dirty="0"/>
+          </a:p>
+        </p:txBody>
+      </p:sp>
+      <p:sp>
+        <p:nvSpPr>
+          <p:cNvPr id="30" name="Text 28"/>
+          <p:cNvSpPr/>
+          <p:nvPr/>
+        </p:nvSpPr>
+        <p:spPr>
+          <a:xfrm>
+            <a:off x="6804508" y="3822192"/>
+            <a:ext cx="4683100" cy="685800"/>
+          </a:xfrm>
+          <a:prstGeom prst="rect">
+            <a:avLst/>
+          </a:prstGeom>
+          <a:noFill/>
+          <a:ln/>
+        </p:spPr>
+        <p:txBody>
+          <a:bodyPr wrap="square" rtlCol="0" anchor="ctr"/>
+          <a:lstStyle/>
+          <a:p>
+            <a:pPr indent="0" marL="0">
+              <a:lnSpc>
+                <a:spcPct val="115000"/>
+              </a:lnSpc>
+              <a:buNone/>
+            </a:pPr>
+            <a:r>
+              <a:rPr lang="en-US" sz="1050" dirty="0">
+                <a:solidFill>
+                  <a:srgbClr val="10161F"/>
+                </a:solidFill>
+                <a:latin typeface="Pretendard" pitchFamily="34" charset="0"/>
+                <a:ea typeface="Pretendard" pitchFamily="34" charset="-122"/>
+                <a:cs typeface="Pretendard" pitchFamily="34" charset="-120"/>
+              </a:rPr>
+              <a:t>정화조 용량 대비 현 업종 적합성 및 하수도 원인자부담금 추가 부과 대상 여부 확인</a:t>
+            </a:r>
+            <a:endParaRPr lang="en-US" sz="1050" dirty="0"/>
+          </a:p>
+        </p:txBody>
+      </p:sp>
+      <p:sp>
+        <p:nvSpPr>
+          <p:cNvPr id="31" name="Shape 29"/>
+          <p:cNvSpPr/>
+          <p:nvPr/>
+        </p:nvSpPr>
+        <p:spPr>
+          <a:xfrm>
+            <a:off x="566928" y="5760720"/>
+            <a:ext cx="11057839" cy="594360"/>
+          </a:xfrm>
+          <a:prstGeom prst="rect">
+            <a:avLst/>
+          </a:prstGeom>
+          <a:solidFill>
+            <a:srgbClr val="D9B668"/>
+          </a:solidFill>
+          <a:ln/>
+        </p:spPr>
+      </p:sp>
+      <p:sp>
+        <p:nvSpPr>
+          <p:cNvPr id="32" name="Text 30"/>
+          <p:cNvSpPr/>
+          <p:nvPr/>
+        </p:nvSpPr>
+        <p:spPr>
+          <a:xfrm>
+            <a:off x="749808" y="5833872"/>
+            <a:ext cx="10692079" cy="448056"/>
+          </a:xfrm>
+          <a:prstGeom prst="rect">
+            <a:avLst/>
+          </a:prstGeom>
+          <a:noFill/>
+          <a:ln/>
+        </p:spPr>
+        <p:txBody>
+          <a:bodyPr wrap="square" rtlCol="0" anchor="ctr"/>
+          <a:lstStyle/>
+          <a:p>
+            <a:pPr indent="0" marL="0">
+              <a:buNone/>
+            </a:pPr>
+            <a:r>
+              <a:rPr lang="en-US" sz="950" b="1" dirty="0">
+                <a:solidFill>
+                  <a:srgbClr val="977024"/>
+                </a:solidFill>
+                <a:latin typeface="Pretendard" pitchFamily="34" charset="0"/>
+                <a:ea typeface="Pretendard" pitchFamily="34" charset="-122"/>
+                <a:cs typeface="Pretendard" pitchFamily="34" charset="-120"/>
+              </a:rPr>
+              <a:t>※ 본 체크리스트는 계약 전 매수인의 안전한 자산 인수를 위한 필수 확인 사항이며, 실사(Due Diligence) 결과에 따라 매매 조건 및 잔금 일정이 조정될 수 있습니다.</a:t>
+            </a:r>
+            <a:endParaRPr lang="en-US" sz="950" dirty="0"/>
+          </a:p>
+        </p:txBody>
+      </p:sp>
+      <p:sp>
+        <p:nvSpPr>
+          <p:cNvPr id="33" name="Text 31"/>
+          <p:cNvSpPr/>
+          <p:nvPr/>
+        </p:nvSpPr>
+        <p:spPr>
+          <a:xfrm>
+            <a:off x="566928" y="6382512"/>
+            <a:ext cx="7315200" cy="219456"/>
+          </a:xfrm>
+          <a:prstGeom prst="rect">
+            <a:avLst/>
+          </a:prstGeom>
+          <a:noFill/>
+          <a:ln/>
+        </p:spPr>
+        <p:txBody>
+          <a:bodyPr wrap="square" lIns="0" tIns="0" rIns="0" bIns="0" rtlCol="0" anchor="ctr"/>
+          <a:lstStyle/>
+          <a:p>
+            <a:pPr indent="0" marL="0">
+              <a:buNone/>
+            </a:pPr>
+            <a:r>
+              <a:rPr lang="en-US" sz="800" dirty="0">
+                <a:solidFill>
+                  <a:srgbClr val="718096"/>
+                </a:solidFill>
+                <a:latin typeface="Pretendard" pitchFamily="34" charset="0"/>
+                <a:ea typeface="Pretendard" pitchFamily="34" charset="-122"/>
+                <a:cs typeface="Pretendard" pitchFamily="34" charset="-120"/>
+              </a:rPr>
+              <a:t>크리딜   |   </a:t>
+            </a:r>
+            <a:endParaRPr lang="en-US" sz="800" dirty="0"/>
+          </a:p>
+        </p:txBody>
+      </p:sp>
+      <p:sp>
+        <p:nvSpPr>
+          <p:cNvPr id="34" name="Text 32"/>
+          <p:cNvSpPr/>
+          <p:nvPr/>
+        </p:nvSpPr>
+        <p:spPr>
+          <a:xfrm>
+            <a:off x="10710367" y="6382512"/>
+            <a:ext cx="914400" cy="219456"/>
+          </a:xfrm>
+          <a:prstGeom prst="rect">
+            <a:avLst/>
+          </a:prstGeom>
+          <a:noFill/>
+          <a:ln/>
+        </p:spPr>
+        <p:txBody>
+          <a:bodyPr wrap="square" lIns="0" tIns="0" rIns="0" bIns="0" rtlCol="0" anchor="ctr"/>
+          <a:lstStyle/>
+          <a:p>
+            <a:pPr algn="r" indent="0" marL="0">
+              <a:buNone/>
+            </a:pPr>
+            <a:r>
+              <a:rPr lang="en-US" sz="900" b="1" dirty="0">
+                <a:solidFill>
+                  <a:srgbClr val="B98A2E"/>
+                </a:solidFill>
+                <a:latin typeface="Arial" pitchFamily="34" charset="0"/>
+                <a:ea typeface="Arial" pitchFamily="34" charset="-122"/>
+                <a:cs typeface="Arial" pitchFamily="34" charset="-120"/>
+              </a:rPr>
+              <a:t>11</a:t>
+            </a:r>
+            <a:endParaRPr lang="en-US" sz="900" dirty="0"/>
+          </a:p>
+        </p:txBody>
+      </p:sp>
+    </p:spTree>
+  </p:cSld>
+  <p:clrMapOvr>
+    <a:masterClrMapping/>
+  </p:clrMapOvr>
+</p:sld>
+</file>
+
+<file path=ppt/slides/slide12.xml><?xml version="1.0" encoding="utf-8"?>
+<p:sld xmlns:a="http://schemas.openxmlformats.org/drawingml/2006/main" xmlns:r="http://schemas.openxmlformats.org/officeDocument/2006/relationships" xmlns:p="http://schemas.openxmlformats.org/presentationml/2006/main">
+  <p:cSld name="Slide 12">
     <p:bg>
       <p:bgPr>
         <a:solidFill>
@@ -2368,7 +4221,7 @@
                 <a:ea typeface="Arial" pitchFamily="34" charset="-122"/>
                 <a:cs typeface="Arial" pitchFamily="34" charset="-120"/>
               </a:rPr>
-              <a:t>10</a:t>
+              <a:t>12</a:t>
             </a:r>
             <a:endParaRPr lang="en-US" sz="1300" dirty="0"/>
           </a:p>
@@ -2407,7 +4260,7 @@
                 <a:ea typeface="Arial" pitchFamily="34" charset="-122"/>
                 <a:cs typeface="Arial" pitchFamily="34" charset="-120"/>
               </a:rPr>
-              <a:t>Disclaimer</a:t>
+              <a:t>Closing</a:t>
             </a:r>
             <a:endParaRPr lang="en-US" sz="950" dirty="0"/>
           </a:p>
@@ -2597,7 +4450,7 @@
               <a:buNone/>
             </a:pPr>
             <a:r>
-              <a:rPr lang="en-US" sz="850" dirty="0">
+              <a:rPr lang="en-US" sz="900" dirty="0">
                 <a:solidFill>
                   <a:srgbClr val="A0AEC0"/>
                 </a:solidFill>
@@ -2607,7 +4460,7 @@
               </a:rPr>
               <a:t>담당 중개사에게 초기 관심 표명 및 상담 요청</a:t>
             </a:r>
-            <a:endParaRPr lang="en-US" sz="850" dirty="0"/>
+            <a:endParaRPr lang="en-US" sz="900" dirty="0"/>
           </a:p>
         </p:txBody>
       </p:sp>
@@ -2795,7 +4648,7 @@
               <a:buNone/>
             </a:pPr>
             <a:r>
-              <a:rPr lang="en-US" sz="850" dirty="0">
+              <a:rPr lang="en-US" sz="900" dirty="0">
                 <a:solidFill>
                   <a:srgbClr val="A0AEC0"/>
                 </a:solidFill>
@@ -2805,7 +4658,7 @@
               </a:rPr>
               <a:t>비밀유지계약 후 상세 임대차·재무 자료 제공</a:t>
             </a:r>
-            <a:endParaRPr lang="en-US" sz="850" dirty="0"/>
+            <a:endParaRPr lang="en-US" sz="900" dirty="0"/>
           </a:p>
         </p:txBody>
       </p:sp>
@@ -2993,7 +4846,7 @@
               <a:buNone/>
             </a:pPr>
             <a:r>
-              <a:rPr lang="en-US" sz="850" dirty="0">
+              <a:rPr lang="en-US" sz="900" dirty="0">
                 <a:solidFill>
                   <a:srgbClr val="A0AEC0"/>
                 </a:solidFill>
@@ -3003,7 +4856,7 @@
               </a:rPr>
               <a:t>건물 컨디션 및 설비 직접 확인 후 의향서(LOI) 제출</a:t>
             </a:r>
-            <a:endParaRPr lang="en-US" sz="850" dirty="0"/>
+            <a:endParaRPr lang="en-US" sz="900" dirty="0"/>
           </a:p>
         </p:txBody>
       </p:sp>
@@ -3093,7 +4946,7 @@
               <a:buNone/>
             </a:pPr>
             <a:r>
-              <a:rPr lang="en-US" sz="850" b="1" dirty="0">
+              <a:rPr lang="en-US" sz="900" b="1" dirty="0">
                 <a:solidFill>
                   <a:srgbClr val="FFFFFF"/>
                 </a:solidFill>
@@ -3103,7 +4956,7 @@
               </a:rPr>
               <a:t>✓ 공부확인</a:t>
             </a:r>
-            <a:endParaRPr lang="en-US" sz="850" dirty="0"/>
+            <a:endParaRPr lang="en-US" sz="900" dirty="0"/>
           </a:p>
         </p:txBody>
       </p:sp>
@@ -3193,7 +5046,7 @@
               <a:buNone/>
             </a:pPr>
             <a:r>
-              <a:rPr lang="en-US" sz="850" b="1" dirty="0">
+              <a:rPr lang="en-US" sz="900" b="1" dirty="0">
                 <a:solidFill>
                   <a:srgbClr val="FFFFFF"/>
                 </a:solidFill>
@@ -3203,7 +5056,7 @@
               </a:rPr>
               <a:t>★ 전문가검증</a:t>
             </a:r>
-            <a:endParaRPr lang="en-US" sz="850" dirty="0"/>
+            <a:endParaRPr lang="en-US" sz="900" dirty="0"/>
           </a:p>
         </p:txBody>
       </p:sp>
@@ -3293,7 +5146,7 @@
               <a:buNone/>
             </a:pPr>
             <a:r>
-              <a:rPr lang="en-US" sz="850" b="1" dirty="0">
+              <a:rPr lang="en-US" sz="900" b="1" dirty="0">
                 <a:solidFill>
                   <a:srgbClr val="FFFFFF"/>
                 </a:solidFill>
@@ -3303,7 +5156,7 @@
               </a:rPr>
               <a:t>▲ 매도인고지</a:t>
             </a:r>
-            <a:endParaRPr lang="en-US" sz="850" dirty="0"/>
+            <a:endParaRPr lang="en-US" sz="900" dirty="0"/>
           </a:p>
         </p:txBody>
       </p:sp>
@@ -3393,7 +5246,7 @@
               <a:buNone/>
             </a:pPr>
             <a:r>
-              <a:rPr lang="en-US" sz="850" b="1" dirty="0">
+              <a:rPr lang="en-US" sz="900" b="1" dirty="0">
                 <a:solidFill>
                   <a:srgbClr val="FFFFFF"/>
                 </a:solidFill>
@@ -3403,7 +5256,7 @@
               </a:rPr>
               <a:t>● 중개인입력</a:t>
             </a:r>
-            <a:endParaRPr lang="en-US" sz="850" dirty="0"/>
+            <a:endParaRPr lang="en-US" sz="900" dirty="0"/>
           </a:p>
         </p:txBody>
       </p:sp>
@@ -3493,7 +5346,7 @@
               <a:buNone/>
             </a:pPr>
             <a:r>
-              <a:rPr lang="en-US" sz="850" b="1" dirty="0">
+              <a:rPr lang="en-US" sz="900" b="1" dirty="0">
                 <a:solidFill>
                   <a:srgbClr val="FFFFFF"/>
                 </a:solidFill>
@@ -3503,7 +5356,7 @@
               </a:rPr>
               <a:t>◇ AI추정·가정</a:t>
             </a:r>
-            <a:endParaRPr lang="en-US" sz="850" dirty="0"/>
+            <a:endParaRPr lang="en-US" sz="900" dirty="0"/>
           </a:p>
         </p:txBody>
       </p:sp>
@@ -3635,7 +5488,7 @@
               <a:buNone/>
             </a:pPr>
             <a:r>
-              <a:rPr lang="en-US" sz="850" dirty="0">
+              <a:rPr lang="en-US" sz="900" dirty="0">
                 <a:solidFill>
                   <a:srgbClr val="A0AEC0"/>
                 </a:solidFill>
@@ -3645,7 +5498,7 @@
               </a:rPr>
               <a:t>본 자료는 투자 권유가 아니며, 기재된 정보의 정확성을 보증하지 않습니다.</a:t>
             </a:r>
-            <a:endParaRPr lang="en-US" sz="850" dirty="0"/>
+            <a:endParaRPr lang="en-US" sz="900" dirty="0"/>
           </a:p>
         </p:txBody>
       </p:sp>
@@ -3780,7 +5633,732 @@
                 <a:ea typeface="Arial" pitchFamily="34" charset="-122"/>
                 <a:cs typeface="Arial" pitchFamily="34" charset="-120"/>
               </a:rPr>
-              <a:t>10</a:t>
+              <a:t>12</a:t>
+            </a:r>
+            <a:endParaRPr lang="en-US" sz="900" dirty="0"/>
+          </a:p>
+        </p:txBody>
+      </p:sp>
+    </p:spTree>
+  </p:cSld>
+  <p:clrMapOvr>
+    <a:masterClrMapping/>
+  </p:clrMapOvr>
+</p:sld>
+</file>
+
+<file path=ppt/slides/slide13.xml><?xml version="1.0" encoding="utf-8"?>
+<p:sld xmlns:a="http://schemas.openxmlformats.org/drawingml/2006/main" xmlns:r="http://schemas.openxmlformats.org/officeDocument/2006/relationships" xmlns:p="http://schemas.openxmlformats.org/presentationml/2006/main">
+  <p:cSld name="Slide 13">
+    <p:bg>
+      <p:bgPr>
+        <a:solidFill>
+          <a:srgbClr val="FFFFFF"/>
+        </a:solidFill>
+      </p:bgPr>
+    </p:bg>
+    <p:spTree>
+      <p:nvGrpSpPr>
+        <p:cNvPr id="1" name=""/>
+        <p:cNvGrpSpPr/>
+        <p:nvPr/>
+      </p:nvGrpSpPr>
+      <p:grpSpPr>
+        <a:xfrm>
+          <a:off x="0" y="0"/>
+          <a:ext cx="0" cy="0"/>
+          <a:chOff x="0" y="0"/>
+          <a:chExt cx="0" cy="0"/>
+        </a:xfrm>
+      </p:grpSpPr>
+      <p:sp>
+        <p:nvSpPr>
+          <p:cNvPr id="2" name="Shape 0"/>
+          <p:cNvSpPr/>
+          <p:nvPr/>
+        </p:nvSpPr>
+        <p:spPr>
+          <a:xfrm>
+            <a:off x="566928" y="457200"/>
+            <a:ext cx="384048" cy="384048"/>
+          </a:xfrm>
+          <a:prstGeom prst="ellipse">
+            <a:avLst/>
+          </a:prstGeom>
+          <a:solidFill>
+            <a:srgbClr val="B98A2E"/>
+          </a:solidFill>
+          <a:ln/>
+        </p:spPr>
+      </p:sp>
+      <p:sp>
+        <p:nvSpPr>
+          <p:cNvPr id="3" name="Text 1"/>
+          <p:cNvSpPr/>
+          <p:nvPr/>
+        </p:nvSpPr>
+        <p:spPr>
+          <a:xfrm>
+            <a:off x="566928" y="457200"/>
+            <a:ext cx="384048" cy="384048"/>
+          </a:xfrm>
+          <a:prstGeom prst="rect">
+            <a:avLst/>
+          </a:prstGeom>
+          <a:noFill/>
+          <a:ln/>
+        </p:spPr>
+        <p:txBody>
+          <a:bodyPr wrap="square" lIns="0" tIns="0" rIns="0" bIns="0" rtlCol="0" anchor="ctr"/>
+          <a:lstStyle/>
+          <a:p>
+            <a:pPr algn="ctr" indent="0" marL="0">
+              <a:buNone/>
+            </a:pPr>
+            <a:r>
+              <a:rPr lang="en-US" sz="1300" b="1" dirty="0">
+                <a:solidFill>
+                  <a:srgbClr val="FFFFFF"/>
+                </a:solidFill>
+                <a:latin typeface="Arial" pitchFamily="34" charset="0"/>
+                <a:ea typeface="Arial" pitchFamily="34" charset="-122"/>
+                <a:cs typeface="Arial" pitchFamily="34" charset="-120"/>
+              </a:rPr>
+              <a:t>13</a:t>
+            </a:r>
+            <a:endParaRPr lang="en-US" sz="1300" dirty="0"/>
+          </a:p>
+        </p:txBody>
+      </p:sp>
+      <p:sp>
+        <p:nvSpPr>
+          <p:cNvPr id="4" name="Text 2"/>
+          <p:cNvSpPr/>
+          <p:nvPr/>
+        </p:nvSpPr>
+        <p:spPr>
+          <a:xfrm>
+            <a:off x="1133856" y="457200"/>
+            <a:ext cx="10490911" cy="182880"/>
+          </a:xfrm>
+          <a:prstGeom prst="rect">
+            <a:avLst/>
+          </a:prstGeom>
+          <a:noFill/>
+          <a:ln/>
+        </p:spPr>
+        <p:txBody>
+          <a:bodyPr wrap="square" lIns="0" tIns="0" rIns="0" bIns="0" rtlCol="0" anchor="ctr"/>
+          <a:lstStyle/>
+          <a:p>
+            <a:pPr indent="0" marL="0">
+              <a:buNone/>
+            </a:pPr>
+            <a:r>
+              <a:rPr lang="en-US" sz="950" b="1" spc="200" kern="0" dirty="0">
+                <a:solidFill>
+                  <a:srgbClr val="B98A2E"/>
+                </a:solidFill>
+                <a:latin typeface="Arial" pitchFamily="34" charset="0"/>
+                <a:ea typeface="Arial" pitchFamily="34" charset="-122"/>
+                <a:cs typeface="Arial" pitchFamily="34" charset="-120"/>
+              </a:rPr>
+              <a:t>Records</a:t>
+            </a:r>
+            <a:endParaRPr lang="en-US" sz="950" dirty="0"/>
+          </a:p>
+        </p:txBody>
+      </p:sp>
+      <p:sp>
+        <p:nvSpPr>
+          <p:cNvPr id="5" name="Text 3"/>
+          <p:cNvSpPr/>
+          <p:nvPr/>
+        </p:nvSpPr>
+        <p:spPr>
+          <a:xfrm>
+            <a:off x="1133856" y="640080"/>
+            <a:ext cx="10490911" cy="365760"/>
+          </a:xfrm>
+          <a:prstGeom prst="rect">
+            <a:avLst/>
+          </a:prstGeom>
+          <a:noFill/>
+          <a:ln/>
+        </p:spPr>
+        <p:txBody>
+          <a:bodyPr wrap="square" lIns="0" tIns="0" rIns="0" bIns="0" rtlCol="0" anchor="ctr"/>
+          <a:lstStyle/>
+          <a:p>
+            <a:pPr indent="0" marL="0">
+              <a:buNone/>
+            </a:pPr>
+            <a:r>
+              <a:rPr lang="en-US" sz="2300" b="1" dirty="0">
+                <a:solidFill>
+                  <a:srgbClr val="10161F"/>
+                </a:solidFill>
+                <a:latin typeface="Pretendard" pitchFamily="34" charset="0"/>
+                <a:ea typeface="Pretendard" pitchFamily="34" charset="-122"/>
+                <a:cs typeface="Pretendard" pitchFamily="34" charset="-120"/>
+              </a:rPr>
+              <a:t>공부 발췌</a:t>
+            </a:r>
+            <a:endParaRPr lang="en-US" sz="2300" dirty="0"/>
+          </a:p>
+        </p:txBody>
+      </p:sp>
+      <p:sp>
+        <p:nvSpPr>
+          <p:cNvPr id="6" name="Text 4"/>
+          <p:cNvSpPr/>
+          <p:nvPr/>
+        </p:nvSpPr>
+        <p:spPr>
+          <a:xfrm>
+            <a:off x="566928" y="1371600"/>
+            <a:ext cx="6858000" cy="237744"/>
+          </a:xfrm>
+          <a:prstGeom prst="rect">
+            <a:avLst/>
+          </a:prstGeom>
+          <a:noFill/>
+          <a:ln/>
+        </p:spPr>
+        <p:txBody>
+          <a:bodyPr wrap="square" lIns="0" tIns="0" rIns="0" bIns="0" rtlCol="0" anchor="ctr"/>
+          <a:lstStyle/>
+          <a:p>
+            <a:pPr indent="0" marL="0">
+              <a:buNone/>
+            </a:pPr>
+            <a:r>
+              <a:rPr lang="en-US" sz="1100" b="1" dirty="0">
+                <a:solidFill>
+                  <a:srgbClr val="10161F"/>
+                </a:solidFill>
+                <a:latin typeface="Pretendard" pitchFamily="34" charset="0"/>
+                <a:ea typeface="Pretendard" pitchFamily="34" charset="-122"/>
+                <a:cs typeface="Pretendard" pitchFamily="34" charset="-120"/>
+              </a:rPr>
+              <a:t>건축물대장 표제부</a:t>
+            </a:r>
+            <a:endParaRPr lang="en-US" sz="1100" dirty="0"/>
+          </a:p>
+        </p:txBody>
+      </p:sp>
+      <p:sp>
+        <p:nvSpPr>
+          <p:cNvPr id="7" name="Text 5"/>
+          <p:cNvSpPr/>
+          <p:nvPr/>
+        </p:nvSpPr>
+        <p:spPr>
+          <a:xfrm>
+            <a:off x="566928" y="1645920"/>
+            <a:ext cx="2606040" cy="438912"/>
+          </a:xfrm>
+          <a:prstGeom prst="rect">
+            <a:avLst/>
+          </a:prstGeom>
+          <a:noFill/>
+          <a:ln/>
+        </p:spPr>
+        <p:txBody>
+          <a:bodyPr wrap="square" lIns="0" tIns="0" rIns="0" bIns="0" rtlCol="0" anchor="ctr"/>
+          <a:lstStyle/>
+          <a:p>
+            <a:pPr indent="0" marL="0">
+              <a:lnSpc>
+                <a:spcPct val="120000"/>
+              </a:lnSpc>
+              <a:buNone/>
+            </a:pPr>
+            <a:r>
+              <a:rPr lang="en-US" sz="1350" dirty="0">
+                <a:solidFill>
+                  <a:srgbClr val="718096"/>
+                </a:solidFill>
+                <a:latin typeface="Pretendard" pitchFamily="34" charset="0"/>
+                <a:ea typeface="Pretendard" pitchFamily="34" charset="-122"/>
+                <a:cs typeface="Pretendard" pitchFamily="34" charset="-120"/>
+              </a:rPr>
+              <a:t>연면적</a:t>
+            </a:r>
+            <a:endParaRPr lang="en-US" sz="1350" dirty="0"/>
+          </a:p>
+        </p:txBody>
+      </p:sp>
+      <p:sp>
+        <p:nvSpPr>
+          <p:cNvPr id="8" name="Text 6"/>
+          <p:cNvSpPr/>
+          <p:nvPr/>
+        </p:nvSpPr>
+        <p:spPr>
+          <a:xfrm>
+            <a:off x="3172968" y="1645920"/>
+            <a:ext cx="4251960" cy="438912"/>
+          </a:xfrm>
+          <a:prstGeom prst="rect">
+            <a:avLst/>
+          </a:prstGeom>
+          <a:noFill/>
+          <a:ln/>
+        </p:spPr>
+        <p:txBody>
+          <a:bodyPr wrap="square" lIns="0" tIns="0" rIns="0" bIns="0" rtlCol="0" anchor="ctr"/>
+          <a:lstStyle/>
+          <a:p>
+            <a:pPr indent="0" marL="0">
+              <a:lnSpc>
+                <a:spcPct val="120000"/>
+              </a:lnSpc>
+              <a:buNone/>
+            </a:pPr>
+            <a:r>
+              <a:rPr lang="en-US" sz="1350" b="1" dirty="0">
+                <a:solidFill>
+                  <a:srgbClr val="10161F"/>
+                </a:solidFill>
+                <a:latin typeface="Pretendard" pitchFamily="34" charset="0"/>
+                <a:ea typeface="Pretendard" pitchFamily="34" charset="-122"/>
+                <a:cs typeface="Pretendard" pitchFamily="34" charset="-120"/>
+              </a:rPr>
+              <a:t>5,000㎡ (1512.5평)</a:t>
+            </a:r>
+            <a:endParaRPr lang="en-US" sz="1350" dirty="0"/>
+          </a:p>
+        </p:txBody>
+      </p:sp>
+      <p:sp>
+        <p:nvSpPr>
+          <p:cNvPr id="9" name="Shape 7"/>
+          <p:cNvSpPr/>
+          <p:nvPr/>
+        </p:nvSpPr>
+        <p:spPr>
+          <a:xfrm>
+            <a:off x="7604608" y="1371600"/>
+            <a:ext cx="0" cy="4754880"/>
+          </a:xfrm>
+          <a:prstGeom prst="line">
+            <a:avLst/>
+          </a:prstGeom>
+          <a:noFill/>
+          <a:ln w="8890">
+            <a:solidFill>
+              <a:srgbClr val="B98A2E"/>
+            </a:solidFill>
+            <a:prstDash val="solid"/>
+          </a:ln>
+        </p:spPr>
+      </p:sp>
+      <p:sp>
+        <p:nvSpPr>
+          <p:cNvPr id="10" name="Shape 8"/>
+          <p:cNvSpPr/>
+          <p:nvPr/>
+        </p:nvSpPr>
+        <p:spPr>
+          <a:xfrm>
+            <a:off x="7784287" y="1645920"/>
+            <a:ext cx="3840480" cy="2103120"/>
+          </a:xfrm>
+          <a:prstGeom prst="roundRect">
+            <a:avLst>
+              <a:gd name="adj" fmla="val 2609"/>
+            </a:avLst>
+          </a:prstGeom>
+          <a:solidFill>
+            <a:srgbClr val="BEE3F8"/>
+          </a:solidFill>
+          <a:ln/>
+        </p:spPr>
+      </p:sp>
+      <p:sp>
+        <p:nvSpPr>
+          <p:cNvPr id="11" name="Shape 9"/>
+          <p:cNvSpPr/>
+          <p:nvPr/>
+        </p:nvSpPr>
+        <p:spPr>
+          <a:xfrm>
+            <a:off x="7784287" y="1700784"/>
+            <a:ext cx="36576" cy="1993392"/>
+          </a:xfrm>
+          <a:prstGeom prst="rect">
+            <a:avLst/>
+          </a:prstGeom>
+          <a:solidFill>
+            <a:srgbClr val="2B6CB0"/>
+          </a:solidFill>
+          <a:ln/>
+        </p:spPr>
+      </p:sp>
+      <p:sp>
+        <p:nvSpPr>
+          <p:cNvPr id="12" name="Text 10"/>
+          <p:cNvSpPr/>
+          <p:nvPr/>
+        </p:nvSpPr>
+        <p:spPr>
+          <a:xfrm>
+            <a:off x="7967167" y="1755648"/>
+            <a:ext cx="3511296" cy="201168"/>
+          </a:xfrm>
+          <a:prstGeom prst="rect">
+            <a:avLst/>
+          </a:prstGeom>
+          <a:noFill/>
+          <a:ln/>
+        </p:spPr>
+        <p:txBody>
+          <a:bodyPr wrap="square" lIns="0" tIns="0" rIns="0" bIns="0" rtlCol="0" anchor="ctr"/>
+          <a:lstStyle/>
+          <a:p>
+            <a:pPr indent="0" marL="0">
+              <a:buNone/>
+            </a:pPr>
+            <a:r>
+              <a:rPr lang="en-US" sz="1050" b="1" dirty="0">
+                <a:solidFill>
+                  <a:srgbClr val="2B6CB0"/>
+                </a:solidFill>
+                <a:latin typeface="Pretendard" pitchFamily="34" charset="0"/>
+                <a:ea typeface="Pretendard" pitchFamily="34" charset="-122"/>
+                <a:cs typeface="Pretendard" pitchFamily="34" charset="-120"/>
+              </a:rPr>
+              <a:t>입지 및 권리관계 실사 포인트</a:t>
+            </a:r>
+            <a:endParaRPr lang="en-US" sz="1050" dirty="0"/>
+          </a:p>
+        </p:txBody>
+      </p:sp>
+      <p:sp>
+        <p:nvSpPr>
+          <p:cNvPr id="13" name="Text 11"/>
+          <p:cNvSpPr/>
+          <p:nvPr/>
+        </p:nvSpPr>
+        <p:spPr>
+          <a:xfrm>
+            <a:off x="7967167" y="1975104"/>
+            <a:ext cx="3511296" cy="1700784"/>
+          </a:xfrm>
+          <a:prstGeom prst="rect">
+            <a:avLst/>
+          </a:prstGeom>
+          <a:noFill/>
+          <a:ln/>
+        </p:spPr>
+        <p:txBody>
+          <a:bodyPr wrap="square" lIns="0" tIns="0" rIns="0" bIns="0" rtlCol="0" anchor="t"/>
+          <a:lstStyle/>
+          <a:p>
+            <a:pPr marL="342900" indent="-342900">
+              <a:lnSpc>
+                <a:spcPct val="120000"/>
+              </a:lnSpc>
+              <a:buSzPct val="100000"/>
+              <a:buChar char="•"/>
+            </a:pPr>
+            <a:r>
+              <a:rPr lang="en-US" sz="930" dirty="0">
+                <a:solidFill>
+                  <a:srgbClr val="10161F"/>
+                </a:solidFill>
+                <a:latin typeface="Pretendard" pitchFamily="34" charset="0"/>
+                <a:ea typeface="Pretendard" pitchFamily="34" charset="-122"/>
+                <a:cs typeface="Pretendard" pitchFamily="34" charset="-120"/>
+              </a:rPr>
+              <a:t>물건 접면 도로 폭 및 진출입 여건은 현장 실사 확인 사항입니다</a:t>
+            </a:r>
+            <a:endParaRPr lang="en-US" sz="930" dirty="0"/>
+          </a:p>
+          <a:p>
+            <a:pPr marL="342900" indent="-342900">
+              <a:lnSpc>
+                <a:spcPct val="120000"/>
+              </a:lnSpc>
+              <a:buSzPct val="100000"/>
+              <a:buChar char="•"/>
+            </a:pPr>
+            <a:r>
+              <a:rPr lang="en-US" sz="930" dirty="0">
+                <a:solidFill>
+                  <a:srgbClr val="10161F"/>
+                </a:solidFill>
+                <a:latin typeface="Pretendard" pitchFamily="34" charset="0"/>
+                <a:ea typeface="Pretendard" pitchFamily="34" charset="-122"/>
+                <a:cs typeface="Pretendard" pitchFamily="34" charset="-120"/>
+              </a:rPr>
+              <a:t>등기부등본상 권리관계 및 제한물권 설정 여부를 확인하였습니다</a:t>
+            </a:r>
+            <a:endParaRPr lang="en-US" sz="930" dirty="0"/>
+          </a:p>
+          <a:p>
+            <a:pPr marL="342900" indent="-342900">
+              <a:lnSpc>
+                <a:spcPct val="120000"/>
+              </a:lnSpc>
+              <a:buSzPct val="100000"/>
+              <a:buChar char="•"/>
+            </a:pPr>
+            <a:r>
+              <a:rPr lang="en-US" sz="930" dirty="0">
+                <a:solidFill>
+                  <a:srgbClr val="10161F"/>
+                </a:solidFill>
+                <a:latin typeface="Pretendard" pitchFamily="34" charset="0"/>
+                <a:ea typeface="Pretendard" pitchFamily="34" charset="-122"/>
+                <a:cs typeface="Pretendard" pitchFamily="34" charset="-120"/>
+              </a:rPr>
+              <a:t>지구단위계획 및 토지이용계획상 허용 용도를 검토하였습니다</a:t>
+            </a:r>
+            <a:endParaRPr lang="en-US" sz="930" dirty="0"/>
+          </a:p>
+        </p:txBody>
+      </p:sp>
+      <p:sp>
+        <p:nvSpPr>
+          <p:cNvPr id="14" name="Shape 12"/>
+          <p:cNvSpPr/>
+          <p:nvPr/>
+        </p:nvSpPr>
+        <p:spPr>
+          <a:xfrm>
+            <a:off x="7784287" y="3977640"/>
+            <a:ext cx="3840480" cy="2148840"/>
+          </a:xfrm>
+          <a:prstGeom prst="roundRect">
+            <a:avLst>
+              <a:gd name="adj" fmla="val 2553"/>
+            </a:avLst>
+          </a:prstGeom>
+          <a:solidFill>
+            <a:srgbClr val="BEE3F8"/>
+          </a:solidFill>
+          <a:ln/>
+        </p:spPr>
+      </p:sp>
+      <p:sp>
+        <p:nvSpPr>
+          <p:cNvPr id="15" name="Shape 13"/>
+          <p:cNvSpPr/>
+          <p:nvPr/>
+        </p:nvSpPr>
+        <p:spPr>
+          <a:xfrm>
+            <a:off x="7784287" y="4032504"/>
+            <a:ext cx="36576" cy="2039112"/>
+          </a:xfrm>
+          <a:prstGeom prst="rect">
+            <a:avLst/>
+          </a:prstGeom>
+          <a:solidFill>
+            <a:srgbClr val="2B6CB0"/>
+          </a:solidFill>
+          <a:ln/>
+        </p:spPr>
+      </p:sp>
+      <p:sp>
+        <p:nvSpPr>
+          <p:cNvPr id="16" name="Text 14"/>
+          <p:cNvSpPr/>
+          <p:nvPr/>
+        </p:nvSpPr>
+        <p:spPr>
+          <a:xfrm>
+            <a:off x="7967167" y="4087368"/>
+            <a:ext cx="3511296" cy="201168"/>
+          </a:xfrm>
+          <a:prstGeom prst="rect">
+            <a:avLst/>
+          </a:prstGeom>
+          <a:noFill/>
+          <a:ln/>
+        </p:spPr>
+        <p:txBody>
+          <a:bodyPr wrap="square" lIns="0" tIns="0" rIns="0" bIns="0" rtlCol="0" anchor="ctr"/>
+          <a:lstStyle/>
+          <a:p>
+            <a:pPr indent="0" marL="0">
+              <a:buNone/>
+            </a:pPr>
+            <a:r>
+              <a:rPr lang="en-US" sz="1050" b="1" dirty="0">
+                <a:solidFill>
+                  <a:srgbClr val="2B6CB0"/>
+                </a:solidFill>
+                <a:latin typeface="Pretendard" pitchFamily="34" charset="0"/>
+                <a:ea typeface="Pretendard" pitchFamily="34" charset="-122"/>
+                <a:cs typeface="Pretendard" pitchFamily="34" charset="-120"/>
+              </a:rPr>
+              <a:t>임대차 및 운용 관리 상태</a:t>
+            </a:r>
+            <a:endParaRPr lang="en-US" sz="1050" dirty="0"/>
+          </a:p>
+        </p:txBody>
+      </p:sp>
+      <p:sp>
+        <p:nvSpPr>
+          <p:cNvPr id="17" name="Text 15"/>
+          <p:cNvSpPr/>
+          <p:nvPr/>
+        </p:nvSpPr>
+        <p:spPr>
+          <a:xfrm>
+            <a:off x="7967167" y="4306824"/>
+            <a:ext cx="3511296" cy="1746504"/>
+          </a:xfrm>
+          <a:prstGeom prst="rect">
+            <a:avLst/>
+          </a:prstGeom>
+          <a:noFill/>
+          <a:ln/>
+        </p:spPr>
+        <p:txBody>
+          <a:bodyPr wrap="square" lIns="0" tIns="0" rIns="0" bIns="0" rtlCol="0" anchor="t"/>
+          <a:lstStyle/>
+          <a:p>
+            <a:pPr marL="342900" indent="-342900">
+              <a:lnSpc>
+                <a:spcPct val="120000"/>
+              </a:lnSpc>
+              <a:buSzPct val="100000"/>
+              <a:buChar char="•"/>
+            </a:pPr>
+            <a:r>
+              <a:rPr lang="en-US" sz="930" dirty="0">
+                <a:solidFill>
+                  <a:srgbClr val="10161F"/>
+                </a:solidFill>
+                <a:latin typeface="Pretendard" pitchFamily="34" charset="0"/>
+                <a:ea typeface="Pretendard" pitchFamily="34" charset="-122"/>
+                <a:cs typeface="Pretendard" pitchFamily="34" charset="-120"/>
+              </a:rPr>
+              <a:t>주요 임차인별 계약 만기 분산 및 렌트롤 실사가 필요합니다</a:t>
+            </a:r>
+            <a:endParaRPr lang="en-US" sz="930" dirty="0"/>
+          </a:p>
+          <a:p>
+            <a:pPr marL="342900" indent="-342900">
+              <a:lnSpc>
+                <a:spcPct val="120000"/>
+              </a:lnSpc>
+              <a:buSzPct val="100000"/>
+              <a:buChar char="•"/>
+            </a:pPr>
+            <a:r>
+              <a:rPr lang="en-US" sz="930" dirty="0">
+                <a:solidFill>
+                  <a:srgbClr val="10161F"/>
+                </a:solidFill>
+                <a:latin typeface="Pretendard" pitchFamily="34" charset="0"/>
+                <a:ea typeface="Pretendard" pitchFamily="34" charset="-122"/>
+                <a:cs typeface="Pretendard" pitchFamily="34" charset="-120"/>
+              </a:rPr>
+              <a:t>관리비 정산 내역 및 수선유지비 집행 이력을 점검하였습니다</a:t>
+            </a:r>
+            <a:endParaRPr lang="en-US" sz="930" dirty="0"/>
+          </a:p>
+          <a:p>
+            <a:pPr marL="342900" indent="-342900">
+              <a:lnSpc>
+                <a:spcPct val="120000"/>
+              </a:lnSpc>
+              <a:buSzPct val="100000"/>
+              <a:buChar char="•"/>
+            </a:pPr>
+            <a:r>
+              <a:rPr lang="en-US" sz="930" dirty="0">
+                <a:solidFill>
+                  <a:srgbClr val="10161F"/>
+                </a:solidFill>
+                <a:latin typeface="Pretendard" pitchFamily="34" charset="0"/>
+                <a:ea typeface="Pretendard" pitchFamily="34" charset="-122"/>
+                <a:cs typeface="Pretendard" pitchFamily="34" charset="-120"/>
+              </a:rPr>
+              <a:t>취득세 감면 및 대출 조달 구조는 금융·세무 자문 후 확정됩니다</a:t>
+            </a:r>
+            <a:endParaRPr lang="en-US" sz="930" dirty="0"/>
+          </a:p>
+        </p:txBody>
+      </p:sp>
+      <p:sp>
+        <p:nvSpPr>
+          <p:cNvPr id="18" name="Text 16"/>
+          <p:cNvSpPr/>
+          <p:nvPr/>
+        </p:nvSpPr>
+        <p:spPr>
+          <a:xfrm>
+            <a:off x="566928" y="6382512"/>
+            <a:ext cx="7315200" cy="219456"/>
+          </a:xfrm>
+          <a:prstGeom prst="rect">
+            <a:avLst/>
+          </a:prstGeom>
+          <a:noFill/>
+          <a:ln/>
+        </p:spPr>
+        <p:txBody>
+          <a:bodyPr wrap="square" lIns="0" tIns="0" rIns="0" bIns="0" rtlCol="0" anchor="ctr"/>
+          <a:lstStyle/>
+          <a:p>
+            <a:pPr indent="0" marL="0">
+              <a:buNone/>
+            </a:pPr>
+            <a:r>
+              <a:rPr lang="en-US" sz="800" dirty="0">
+                <a:solidFill>
+                  <a:srgbClr val="718096"/>
+                </a:solidFill>
+                <a:latin typeface="Pretendard" pitchFamily="34" charset="0"/>
+                <a:ea typeface="Pretendard" pitchFamily="34" charset="-122"/>
+                <a:cs typeface="Pretendard" pitchFamily="34" charset="-120"/>
+              </a:rPr>
+              <a:t>크리딜   |   </a:t>
+            </a:r>
+            <a:endParaRPr lang="en-US" sz="800" dirty="0"/>
+          </a:p>
+        </p:txBody>
+      </p:sp>
+      <p:sp>
+        <p:nvSpPr>
+          <p:cNvPr id="19" name="Text 17"/>
+          <p:cNvSpPr/>
+          <p:nvPr/>
+        </p:nvSpPr>
+        <p:spPr>
+          <a:xfrm>
+            <a:off x="10710367" y="6382512"/>
+            <a:ext cx="914400" cy="219456"/>
+          </a:xfrm>
+          <a:prstGeom prst="rect">
+            <a:avLst/>
+          </a:prstGeom>
+          <a:noFill/>
+          <a:ln/>
+        </p:spPr>
+        <p:txBody>
+          <a:bodyPr wrap="square" lIns="0" tIns="0" rIns="0" bIns="0" rtlCol="0" anchor="ctr"/>
+          <a:lstStyle/>
+          <a:p>
+            <a:pPr algn="r" indent="0" marL="0">
+              <a:buNone/>
+            </a:pPr>
+            <a:r>
+              <a:rPr lang="en-US" sz="900" b="1" dirty="0">
+                <a:solidFill>
+                  <a:srgbClr val="B98A2E"/>
+                </a:solidFill>
+                <a:latin typeface="Arial" pitchFamily="34" charset="0"/>
+                <a:ea typeface="Arial" pitchFamily="34" charset="-122"/>
+                <a:cs typeface="Arial" pitchFamily="34" charset="-120"/>
+              </a:rPr>
+              <a:t>13</a:t>
             </a:r>
             <a:endParaRPr lang="en-US" sz="900" dirty="0"/>
           </a:p>
@@ -4091,7 +6669,7 @@
         </p:nvSpPr>
         <p:spPr>
           <a:xfrm>
-            <a:off x="731520" y="2276856"/>
+            <a:off x="731520" y="2313432"/>
             <a:ext cx="2298116" cy="402336"/>
           </a:xfrm>
           <a:prstGeom prst="rect">
@@ -4198,7 +6776,7 @@
         </p:nvSpPr>
         <p:spPr>
           <a:xfrm>
-            <a:off x="3541700" y="2276856"/>
+            <a:off x="3541700" y="2313432"/>
             <a:ext cx="2298116" cy="402336"/>
           </a:xfrm>
           <a:prstGeom prst="rect">
@@ -4305,7 +6883,7 @@
         </p:nvSpPr>
         <p:spPr>
           <a:xfrm>
-            <a:off x="6351880" y="2276856"/>
+            <a:off x="6351880" y="2313432"/>
             <a:ext cx="2298116" cy="402336"/>
           </a:xfrm>
           <a:prstGeom prst="rect">
@@ -4412,7 +6990,7 @@
         </p:nvSpPr>
         <p:spPr>
           <a:xfrm>
-            <a:off x="9162059" y="2276856"/>
+            <a:off x="9162059" y="2313432"/>
             <a:ext cx="2298116" cy="402336"/>
           </a:xfrm>
           <a:prstGeom prst="rect">
@@ -5082,7 +7660,7 @@
                 <a:ea typeface="Arial" pitchFamily="34" charset="-122"/>
                 <a:cs typeface="Arial" pitchFamily="34" charset="-120"/>
               </a:rPr>
-              <a:t>Location</a:t>
+              <a:t>Land</a:t>
             </a:r>
             <a:endParaRPr lang="en-US" sz="950" dirty="0"/>
           </a:p>
@@ -5121,46 +7699,61 @@
                 <a:ea typeface="Pretendard" pitchFamily="34" charset="-122"/>
                 <a:cs typeface="Pretendard" pitchFamily="34" charset="-120"/>
               </a:rPr>
-              <a:t>이 입지, 투자할 만한 곳인가</a:t>
+              <a:t>토지 현황</a:t>
             </a:r>
             <a:endParaRPr lang="en-US" sz="2300" dirty="0"/>
           </a:p>
         </p:txBody>
       </p:sp>
-      <p:pic>
-        <p:nvPicPr>
-          <p:cNvPr id="6" name="Image 0" descr="preencoded.png">    </p:cNvPr>
-          <p:cNvPicPr>
-            <a:picLocks noChangeAspect="1"/>
-          </p:cNvPicPr>
-          <p:nvPr/>
-        </p:nvPicPr>
-        <p:blipFill>
-          <a:blip r:embed="rId1"/>
-          <a:stretch>
-            <a:fillRect/>
-          </a:stretch>
-        </p:blipFill>
-        <p:spPr>
-          <a:xfrm>
-            <a:off x="566928" y="1481328"/>
-            <a:ext cx="5120640" cy="4114800"/>
-          </a:xfrm>
-          <a:prstGeom prst="rect">
-            <a:avLst/>
-          </a:prstGeom>
-        </p:spPr>
-      </p:pic>
-      <p:sp>
-        <p:nvSpPr>
-          <p:cNvPr id="7" name="Text 4"/>
-          <p:cNvSpPr/>
-          <p:nvPr/>
-        </p:nvSpPr>
-        <p:spPr>
-          <a:xfrm>
-            <a:off x="6053328" y="1481328"/>
-            <a:ext cx="2117147" cy="493776"/>
+      <p:sp>
+        <p:nvSpPr>
+          <p:cNvPr id="6" name="Text 4"/>
+          <p:cNvSpPr/>
+          <p:nvPr/>
+        </p:nvSpPr>
+        <p:spPr>
+          <a:xfrm>
+            <a:off x="566928" y="1371600"/>
+            <a:ext cx="6858000" cy="237744"/>
+          </a:xfrm>
+          <a:prstGeom prst="rect">
+            <a:avLst/>
+          </a:prstGeom>
+          <a:noFill/>
+          <a:ln/>
+        </p:spPr>
+        <p:txBody>
+          <a:bodyPr wrap="square" lIns="0" tIns="0" rIns="0" bIns="0" rtlCol="0" anchor="ctr"/>
+          <a:lstStyle/>
+          <a:p>
+            <a:pPr indent="0" marL="0">
+              <a:buNone/>
+            </a:pPr>
+            <a:r>
+              <a:rPr lang="en-US" sz="1100" b="1" dirty="0">
+                <a:solidFill>
+                  <a:srgbClr val="10161F"/>
+                </a:solidFill>
+                <a:latin typeface="Pretendard" pitchFamily="34" charset="0"/>
+                <a:ea typeface="Pretendard" pitchFamily="34" charset="-122"/>
+                <a:cs typeface="Pretendard" pitchFamily="34" charset="-120"/>
+              </a:rPr>
+              <a:t>토지이용계획 · 개별공시지가</a:t>
+            </a:r>
+            <a:endParaRPr lang="en-US" sz="1100" dirty="0"/>
+          </a:p>
+        </p:txBody>
+      </p:sp>
+      <p:sp>
+        <p:nvSpPr>
+          <p:cNvPr id="7" name="Text 5"/>
+          <p:cNvSpPr/>
+          <p:nvPr/>
+        </p:nvSpPr>
+        <p:spPr>
+          <a:xfrm>
+            <a:off x="566928" y="1645920"/>
+            <a:ext cx="2606040" cy="438912"/>
           </a:xfrm>
           <a:prstGeom prst="rect">
             <a:avLst/>
@@ -5179,7 +7772,7 @@
               <a:buNone/>
             </a:pPr>
             <a:r>
-              <a:rPr lang="en-US" sz="1300" dirty="0">
+              <a:rPr lang="en-US" sz="1350" dirty="0">
                 <a:solidFill>
                   <a:srgbClr val="718096"/>
                 </a:solidFill>
@@ -5187,22 +7780,22 @@
                 <a:ea typeface="Pretendard" pitchFamily="34" charset="-122"/>
                 <a:cs typeface="Pretendard" pitchFamily="34" charset="-120"/>
               </a:rPr>
-              <a:t>교통 접근성</a:t>
-            </a:r>
-            <a:endParaRPr lang="en-US" sz="1300" dirty="0"/>
-          </a:p>
-        </p:txBody>
-      </p:sp>
-      <p:sp>
-        <p:nvSpPr>
-          <p:cNvPr id="8" name="Text 5"/>
-          <p:cNvSpPr/>
-          <p:nvPr/>
-        </p:nvSpPr>
-        <p:spPr>
-          <a:xfrm>
-            <a:off x="8170475" y="1481328"/>
-            <a:ext cx="3454292" cy="493776"/>
+              <a:t>용도지역</a:t>
+            </a:r>
+            <a:endParaRPr lang="en-US" sz="1350" dirty="0"/>
+          </a:p>
+        </p:txBody>
+      </p:sp>
+      <p:sp>
+        <p:nvSpPr>
+          <p:cNvPr id="8" name="Text 6"/>
+          <p:cNvSpPr/>
+          <p:nvPr/>
+        </p:nvSpPr>
+        <p:spPr>
+          <a:xfrm>
+            <a:off x="3172968" y="1645920"/>
+            <a:ext cx="4251960" cy="438912"/>
           </a:xfrm>
           <a:prstGeom prst="rect">
             <a:avLst/>
@@ -5221,7 +7814,7 @@
               <a:buNone/>
             </a:pPr>
             <a:r>
-              <a:rPr lang="en-US" sz="1300" b="1" dirty="0">
+              <a:rPr lang="en-US" sz="1350" b="1" dirty="0">
                 <a:solidFill>
                   <a:srgbClr val="10161F"/>
                 </a:solidFill>
@@ -5229,15 +7822,370 @@
                 <a:ea typeface="Pretendard" pitchFamily="34" charset="-122"/>
                 <a:cs typeface="Pretendard" pitchFamily="34" charset="-120"/>
               </a:rPr>
-              <a:t>{"ok":true,"mocked":true,"extractedFields":{"area_signal":"역삼","asset_type":"오피스빌딩","price_band":"300억","size_signal":"3000평(약 9917.</a:t>
-            </a:r>
-            <a:endParaRPr lang="en-US" sz="1300" dirty="0"/>
-          </a:p>
-        </p:txBody>
-      </p:sp>
-      <p:sp>
-        <p:nvSpPr>
-          <p:cNvPr id="9" name="Text 6"/>
+              <a:t>일반상업지역</a:t>
+            </a:r>
+            <a:endParaRPr lang="en-US" sz="1350" dirty="0"/>
+          </a:p>
+        </p:txBody>
+      </p:sp>
+      <p:sp>
+        <p:nvSpPr>
+          <p:cNvPr id="9" name="Shape 7"/>
+          <p:cNvSpPr/>
+          <p:nvPr/>
+        </p:nvSpPr>
+        <p:spPr>
+          <a:xfrm>
+            <a:off x="7604608" y="1371600"/>
+            <a:ext cx="0" cy="4754880"/>
+          </a:xfrm>
+          <a:prstGeom prst="line">
+            <a:avLst/>
+          </a:prstGeom>
+          <a:noFill/>
+          <a:ln w="8890">
+            <a:solidFill>
+              <a:srgbClr val="B98A2E"/>
+            </a:solidFill>
+            <a:prstDash val="solid"/>
+          </a:ln>
+        </p:spPr>
+      </p:sp>
+      <p:sp>
+        <p:nvSpPr>
+          <p:cNvPr id="10" name="Shape 8"/>
+          <p:cNvSpPr/>
+          <p:nvPr/>
+        </p:nvSpPr>
+        <p:spPr>
+          <a:xfrm>
+            <a:off x="7784287" y="1645920"/>
+            <a:ext cx="3840480" cy="2103120"/>
+          </a:xfrm>
+          <a:prstGeom prst="roundRect">
+            <a:avLst>
+              <a:gd name="adj" fmla="val 2609"/>
+            </a:avLst>
+          </a:prstGeom>
+          <a:solidFill>
+            <a:srgbClr val="BEE3F8"/>
+          </a:solidFill>
+          <a:ln/>
+        </p:spPr>
+      </p:sp>
+      <p:sp>
+        <p:nvSpPr>
+          <p:cNvPr id="11" name="Shape 9"/>
+          <p:cNvSpPr/>
+          <p:nvPr/>
+        </p:nvSpPr>
+        <p:spPr>
+          <a:xfrm>
+            <a:off x="7784287" y="1700784"/>
+            <a:ext cx="36576" cy="1993392"/>
+          </a:xfrm>
+          <a:prstGeom prst="rect">
+            <a:avLst/>
+          </a:prstGeom>
+          <a:solidFill>
+            <a:srgbClr val="2B6CB0"/>
+          </a:solidFill>
+          <a:ln/>
+        </p:spPr>
+      </p:sp>
+      <p:sp>
+        <p:nvSpPr>
+          <p:cNvPr id="12" name="Text 10"/>
+          <p:cNvSpPr/>
+          <p:nvPr/>
+        </p:nvSpPr>
+        <p:spPr>
+          <a:xfrm>
+            <a:off x="7967167" y="1755648"/>
+            <a:ext cx="3511296" cy="201168"/>
+          </a:xfrm>
+          <a:prstGeom prst="rect">
+            <a:avLst/>
+          </a:prstGeom>
+          <a:noFill/>
+          <a:ln/>
+        </p:spPr>
+        <p:txBody>
+          <a:bodyPr wrap="square" lIns="0" tIns="0" rIns="0" bIns="0" rtlCol="0" anchor="ctr"/>
+          <a:lstStyle/>
+          <a:p>
+            <a:pPr indent="0" marL="0">
+              <a:buNone/>
+            </a:pPr>
+            <a:r>
+              <a:rPr lang="en-US" sz="1050" b="1" dirty="0">
+                <a:solidFill>
+                  <a:srgbClr val="2B6CB0"/>
+                </a:solidFill>
+                <a:latin typeface="Pretendard" pitchFamily="34" charset="0"/>
+                <a:ea typeface="Pretendard" pitchFamily="34" charset="-122"/>
+                <a:cs typeface="Pretendard" pitchFamily="34" charset="-120"/>
+              </a:rPr>
+              <a:t>입지 및 권리관계 실사 포인트</a:t>
+            </a:r>
+            <a:endParaRPr lang="en-US" sz="1050" dirty="0"/>
+          </a:p>
+        </p:txBody>
+      </p:sp>
+      <p:sp>
+        <p:nvSpPr>
+          <p:cNvPr id="13" name="Text 11"/>
+          <p:cNvSpPr/>
+          <p:nvPr/>
+        </p:nvSpPr>
+        <p:spPr>
+          <a:xfrm>
+            <a:off x="7967167" y="1975104"/>
+            <a:ext cx="3511296" cy="1700784"/>
+          </a:xfrm>
+          <a:prstGeom prst="rect">
+            <a:avLst/>
+          </a:prstGeom>
+          <a:noFill/>
+          <a:ln/>
+        </p:spPr>
+        <p:txBody>
+          <a:bodyPr wrap="square" lIns="0" tIns="0" rIns="0" bIns="0" rtlCol="0" anchor="t"/>
+          <a:lstStyle/>
+          <a:p>
+            <a:pPr marL="342900" indent="-342900">
+              <a:lnSpc>
+                <a:spcPct val="120000"/>
+              </a:lnSpc>
+              <a:buSzPct val="100000"/>
+              <a:buChar char="•"/>
+            </a:pPr>
+            <a:r>
+              <a:rPr lang="en-US" sz="930" dirty="0">
+                <a:solidFill>
+                  <a:srgbClr val="10161F"/>
+                </a:solidFill>
+                <a:latin typeface="Pretendard" pitchFamily="34" charset="0"/>
+                <a:ea typeface="Pretendard" pitchFamily="34" charset="-122"/>
+                <a:cs typeface="Pretendard" pitchFamily="34" charset="-120"/>
+              </a:rPr>
+              <a:t>물건 접면 도로 폭 및 진출입 여건은 현장 실사 확인 사항입니다</a:t>
+            </a:r>
+            <a:endParaRPr lang="en-US" sz="930" dirty="0"/>
+          </a:p>
+          <a:p>
+            <a:pPr marL="342900" indent="-342900">
+              <a:lnSpc>
+                <a:spcPct val="120000"/>
+              </a:lnSpc>
+              <a:buSzPct val="100000"/>
+              <a:buChar char="•"/>
+            </a:pPr>
+            <a:r>
+              <a:rPr lang="en-US" sz="930" dirty="0">
+                <a:solidFill>
+                  <a:srgbClr val="10161F"/>
+                </a:solidFill>
+                <a:latin typeface="Pretendard" pitchFamily="34" charset="0"/>
+                <a:ea typeface="Pretendard" pitchFamily="34" charset="-122"/>
+                <a:cs typeface="Pretendard" pitchFamily="34" charset="-120"/>
+              </a:rPr>
+              <a:t>등기부등본상 권리관계 및 제한물권 설정 여부를 확인하였습니다</a:t>
+            </a:r>
+            <a:endParaRPr lang="en-US" sz="930" dirty="0"/>
+          </a:p>
+          <a:p>
+            <a:pPr marL="342900" indent="-342900">
+              <a:lnSpc>
+                <a:spcPct val="120000"/>
+              </a:lnSpc>
+              <a:buSzPct val="100000"/>
+              <a:buChar char="•"/>
+            </a:pPr>
+            <a:r>
+              <a:rPr lang="en-US" sz="930" dirty="0">
+                <a:solidFill>
+                  <a:srgbClr val="10161F"/>
+                </a:solidFill>
+                <a:latin typeface="Pretendard" pitchFamily="34" charset="0"/>
+                <a:ea typeface="Pretendard" pitchFamily="34" charset="-122"/>
+                <a:cs typeface="Pretendard" pitchFamily="34" charset="-120"/>
+              </a:rPr>
+              <a:t>지구단위계획 및 토지이용계획상 허용 용도를 검토하였습니다</a:t>
+            </a:r>
+            <a:endParaRPr lang="en-US" sz="930" dirty="0"/>
+          </a:p>
+        </p:txBody>
+      </p:sp>
+      <p:sp>
+        <p:nvSpPr>
+          <p:cNvPr id="14" name="Shape 12"/>
+          <p:cNvSpPr/>
+          <p:nvPr/>
+        </p:nvSpPr>
+        <p:spPr>
+          <a:xfrm>
+            <a:off x="7784287" y="3977640"/>
+            <a:ext cx="3840480" cy="2148840"/>
+          </a:xfrm>
+          <a:prstGeom prst="roundRect">
+            <a:avLst>
+              <a:gd name="adj" fmla="val 2553"/>
+            </a:avLst>
+          </a:prstGeom>
+          <a:solidFill>
+            <a:srgbClr val="BEE3F8"/>
+          </a:solidFill>
+          <a:ln/>
+        </p:spPr>
+      </p:sp>
+      <p:sp>
+        <p:nvSpPr>
+          <p:cNvPr id="15" name="Shape 13"/>
+          <p:cNvSpPr/>
+          <p:nvPr/>
+        </p:nvSpPr>
+        <p:spPr>
+          <a:xfrm>
+            <a:off x="7784287" y="4032504"/>
+            <a:ext cx="36576" cy="2039112"/>
+          </a:xfrm>
+          <a:prstGeom prst="rect">
+            <a:avLst/>
+          </a:prstGeom>
+          <a:solidFill>
+            <a:srgbClr val="2B6CB0"/>
+          </a:solidFill>
+          <a:ln/>
+        </p:spPr>
+      </p:sp>
+      <p:sp>
+        <p:nvSpPr>
+          <p:cNvPr id="16" name="Text 14"/>
+          <p:cNvSpPr/>
+          <p:nvPr/>
+        </p:nvSpPr>
+        <p:spPr>
+          <a:xfrm>
+            <a:off x="7967167" y="4087368"/>
+            <a:ext cx="3511296" cy="201168"/>
+          </a:xfrm>
+          <a:prstGeom prst="rect">
+            <a:avLst/>
+          </a:prstGeom>
+          <a:noFill/>
+          <a:ln/>
+        </p:spPr>
+        <p:txBody>
+          <a:bodyPr wrap="square" lIns="0" tIns="0" rIns="0" bIns="0" rtlCol="0" anchor="ctr"/>
+          <a:lstStyle/>
+          <a:p>
+            <a:pPr indent="0" marL="0">
+              <a:buNone/>
+            </a:pPr>
+            <a:r>
+              <a:rPr lang="en-US" sz="1050" b="1" dirty="0">
+                <a:solidFill>
+                  <a:srgbClr val="2B6CB0"/>
+                </a:solidFill>
+                <a:latin typeface="Pretendard" pitchFamily="34" charset="0"/>
+                <a:ea typeface="Pretendard" pitchFamily="34" charset="-122"/>
+                <a:cs typeface="Pretendard" pitchFamily="34" charset="-120"/>
+              </a:rPr>
+              <a:t>임대차 및 운용 관리 상태</a:t>
+            </a:r>
+            <a:endParaRPr lang="en-US" sz="1050" dirty="0"/>
+          </a:p>
+        </p:txBody>
+      </p:sp>
+      <p:sp>
+        <p:nvSpPr>
+          <p:cNvPr id="17" name="Text 15"/>
+          <p:cNvSpPr/>
+          <p:nvPr/>
+        </p:nvSpPr>
+        <p:spPr>
+          <a:xfrm>
+            <a:off x="7967167" y="4306824"/>
+            <a:ext cx="3511296" cy="1746504"/>
+          </a:xfrm>
+          <a:prstGeom prst="rect">
+            <a:avLst/>
+          </a:prstGeom>
+          <a:noFill/>
+          <a:ln/>
+        </p:spPr>
+        <p:txBody>
+          <a:bodyPr wrap="square" lIns="0" tIns="0" rIns="0" bIns="0" rtlCol="0" anchor="t"/>
+          <a:lstStyle/>
+          <a:p>
+            <a:pPr marL="342900" indent="-342900">
+              <a:lnSpc>
+                <a:spcPct val="120000"/>
+              </a:lnSpc>
+              <a:buSzPct val="100000"/>
+              <a:buChar char="•"/>
+            </a:pPr>
+            <a:r>
+              <a:rPr lang="en-US" sz="930" dirty="0">
+                <a:solidFill>
+                  <a:srgbClr val="10161F"/>
+                </a:solidFill>
+                <a:latin typeface="Pretendard" pitchFamily="34" charset="0"/>
+                <a:ea typeface="Pretendard" pitchFamily="34" charset="-122"/>
+                <a:cs typeface="Pretendard" pitchFamily="34" charset="-120"/>
+              </a:rPr>
+              <a:t>주요 임차인별 계약 만기 분산 및 렌트롤 실사가 필요합니다</a:t>
+            </a:r>
+            <a:endParaRPr lang="en-US" sz="930" dirty="0"/>
+          </a:p>
+          <a:p>
+            <a:pPr marL="342900" indent="-342900">
+              <a:lnSpc>
+                <a:spcPct val="120000"/>
+              </a:lnSpc>
+              <a:buSzPct val="100000"/>
+              <a:buChar char="•"/>
+            </a:pPr>
+            <a:r>
+              <a:rPr lang="en-US" sz="930" dirty="0">
+                <a:solidFill>
+                  <a:srgbClr val="10161F"/>
+                </a:solidFill>
+                <a:latin typeface="Pretendard" pitchFamily="34" charset="0"/>
+                <a:ea typeface="Pretendard" pitchFamily="34" charset="-122"/>
+                <a:cs typeface="Pretendard" pitchFamily="34" charset="-120"/>
+              </a:rPr>
+              <a:t>관리비 정산 내역 및 수선유지비 집행 이력을 점검하였습니다</a:t>
+            </a:r>
+            <a:endParaRPr lang="en-US" sz="930" dirty="0"/>
+          </a:p>
+          <a:p>
+            <a:pPr marL="342900" indent="-342900">
+              <a:lnSpc>
+                <a:spcPct val="120000"/>
+              </a:lnSpc>
+              <a:buSzPct val="100000"/>
+              <a:buChar char="•"/>
+            </a:pPr>
+            <a:r>
+              <a:rPr lang="en-US" sz="930" dirty="0">
+                <a:solidFill>
+                  <a:srgbClr val="10161F"/>
+                </a:solidFill>
+                <a:latin typeface="Pretendard" pitchFamily="34" charset="0"/>
+                <a:ea typeface="Pretendard" pitchFamily="34" charset="-122"/>
+                <a:cs typeface="Pretendard" pitchFamily="34" charset="-120"/>
+              </a:rPr>
+              <a:t>취득세 감면 및 대출 조달 구조는 금융·세무 자문 후 확정됩니다</a:t>
+            </a:r>
+            <a:endParaRPr lang="en-US" sz="930" dirty="0"/>
+          </a:p>
+        </p:txBody>
+      </p:sp>
+      <p:sp>
+        <p:nvSpPr>
+          <p:cNvPr id="18" name="Text 16"/>
           <p:cNvSpPr/>
           <p:nvPr/>
         </p:nvSpPr>
@@ -5276,7 +8224,7 @@
       </p:sp>
       <p:sp>
         <p:nvSpPr>
-          <p:cNvPr id="10" name="Text 7"/>
+          <p:cNvPr id="19" name="Text 17"/>
           <p:cNvSpPr/>
           <p:nvPr/>
         </p:nvSpPr>
@@ -5310,45 +8258,6 @@
               <a:t>3</a:t>
             </a:r>
             <a:endParaRPr lang="en-US" sz="900" dirty="0"/>
-          </a:p>
-        </p:txBody>
-      </p:sp>
-      <p:sp>
-        <p:nvSpPr>
-          <p:cNvPr id="11" name="Text 8"/>
-          <p:cNvSpPr/>
-          <p:nvPr/>
-        </p:nvSpPr>
-        <p:spPr>
-          <a:xfrm>
-            <a:off x="566928" y="1481328"/>
-            <a:ext cx="11057839" cy="9692640"/>
-          </a:xfrm>
-          <a:prstGeom prst="rect">
-            <a:avLst/>
-          </a:prstGeom>
-          <a:noFill/>
-          <a:ln/>
-        </p:spPr>
-        <p:txBody>
-          <a:bodyPr wrap="square" lIns="0" tIns="0" rIns="0" bIns="0" rtlCol="0" anchor="t"/>
-          <a:lstStyle/>
-          <a:p>
-            <a:pPr indent="0" marL="0">
-              <a:buNone/>
-            </a:pPr>
-            <a:r>
-              <a:rPr lang="en-US" sz="1000" dirty="0">
-                <a:solidFill>
-                  <a:srgbClr val="10161F"/>
-                </a:solidFill>
-                <a:latin typeface="Pretendard" pitchFamily="34" charset="0"/>
-                <a:ea typeface="Pretendard" pitchFamily="34" charset="-122"/>
-                <a:cs typeface="Pretendard" pitchFamily="34" charset="-120"/>
-              </a:rPr>
-              <a:t>{"ok":true,"mocked":true,"extractedFields":{"area_signal":"역삼","asset_type":"오피스빌딩","price_band":"300억","size_signal":"3000평(약 9917.4㎡)"},"extractedFacts":{"region":"역삼","exactAddressCandidate":"역삼동 742-1","assetType":"오피스빌딩","priceText":"300억","sizeText":"3000평(약 9917.4㎡)","currentUse":"오피스","currentUseSignal":"근린생활시설","leaseSignal":"임대중","vacancySignal":"공실없음","tenantNames":["쿠팡","네이버"],"unitRentTexts":["301호: 1500만"],"sellerMotivationText":"자산 효율화","brokerNotes":["초역세권 매물"]},"detectedSensitiveFields":["exact_address","tenant_name"],"ambiguousFields":[],"warnings":[],"areaSignal":"역삼","assetType":"오피스빌딩","priceBand":"300억","sizeSignal":"3000평(약 9917.4㎡)","dealType":"매각","buildingName":"역삼 센트럴타워","exactAddress":"역삼동 742-1","totalFloorArea":9917.3,"buildYear":2015,"currentUseSignal":"근린생활시설","vacancySignal":"공실 없음","fitSummary":"초역세권 근생 빌딩으로 시행/사옥 매입에 최적화","cautionSummary":"주요 임차인 만기 조율 필요","hiddenFields":["exact_address","seller_motivation"],"confidence":{"areaSignal":"confirmed","assetType":"confirmed","priceBand":"ai_hypothesis","fitSummary":"ai_hypothesis"},"missingData":["sizeSignal"],"boundaryNote":"본 자료는 실거래 통계 기반 참고치입니다.","buyerType":"법인 사옥형","budgetRange":{"min":50,"max":80,"display":"50억~80억"},"preferredRegions":["강남","성수"],"assetTypes":["꼬마빌딩","사옥용"],"purchasePurpose":"사옥용 매입","mustHave":["초역세권","주차"],"niceToHave":["테라스","루프탑"],"riskTolerance":"medium","financingNote":"자본금 50% 준비","missingQuestions":["구체적인 입주 시기가 언제인가요?","선호하는 수익률이 있나요?"],"privacyNotes":["연락처 비공개"],"fitReasons":["매수자 예산(50-80억)에 부합하는 매물입니다.","요청하신 성수/강남 권역에 해당합니다."],"cautionReasons":["요청한 용도와 달리 명도 협의가 다소 필요합니다."],"recommendedNextAction":"현장 답사 제안","kakaoMessage":"안녕하세요! 요청하신 조건에 부합하는 추천 매물이 있어 안내해 드립니다. 확인해보시고 피드백 부탁드립니다.","title":"강남 역삼역 초역세권 오피스 사옥용 빌딩 매각","shortSummary":"역삼역 도보 5분 거리의 준신축급 대형 오피스빌딩입니다.","dealPoints":["초역세권","사옥 최적"],"cautionPoints":["명도 조율 필요"],"hiddenInfoNotice":["보증금 및 지번은 인가 후 확인 가능"],"gateMessage":"G1 등급 등록이 필요합니다.","kakaoText":"강남 역삼역 오피스 빌딩 매각 안내입니다.","exactUnitCandidate":"101호","floor":"1층","areaSqmText":"150㎡","spaceType":"office","depositText":"5000만","monthlyRentText":"400만","maintenanceFeeText":"50만","availableFromText":"즉시입주","leaseTermMonthsText":"24","incentivesText":"렌트프리 2개월","restrictions":[],"landlordIdentity":"김성수","currentTenant":"스타트업","vacancyReason":"이전 확장","rentNegotiation":"협의 가능","region":"성수동","areaSqm":150,"deposit":5000,"monthlyRent":400,"maintenanceFee":50,"availableFrom":"즉시입주","leaseTermMonths":24,"incentives":{"rentFreeMonths":2,"interiorSupport":"일부 인테리어 지원","freeRentDetail":"렌트프리 2개월 지원"},"shortSummaryLease":"성수역 도보 5분 거리 1층 리테일 상가 매물입니다."}</a:t>
-            </a:r>
-            <a:endParaRPr lang="en-US" sz="1000" dirty="0"/>
           </a:p>
         </p:txBody>
       </p:sp>
@@ -5569,7 +8478,7 @@
         <p:spPr>
           <a:xfrm>
             <a:off x="566928" y="1645920"/>
-            <a:ext cx="2606040" cy="402336"/>
+            <a:ext cx="2606040" cy="438912"/>
           </a:xfrm>
           <a:prstGeom prst="rect">
             <a:avLst/>
@@ -5588,7 +8497,7 @@
               <a:buNone/>
             </a:pPr>
             <a:r>
-              <a:rPr lang="en-US" sz="1400" dirty="0">
+              <a:rPr lang="en-US" sz="1350" dirty="0">
                 <a:solidFill>
                   <a:srgbClr val="718096"/>
                 </a:solidFill>
@@ -5598,7 +8507,7 @@
               </a:rPr>
               <a:t>{"ok"</a:t>
             </a:r>
-            <a:endParaRPr lang="en-US" sz="1400" dirty="0"/>
+            <a:endParaRPr lang="en-US" sz="1350" dirty="0"/>
           </a:p>
         </p:txBody>
       </p:sp>
@@ -5611,7 +8520,7 @@
         <p:spPr>
           <a:xfrm>
             <a:off x="3172968" y="1645920"/>
-            <a:ext cx="4251960" cy="402336"/>
+            <a:ext cx="4251960" cy="438912"/>
           </a:xfrm>
           <a:prstGeom prst="rect">
             <a:avLst/>
@@ -5630,7 +8539,7 @@
               <a:buNone/>
             </a:pPr>
             <a:r>
-              <a:rPr lang="en-US" sz="1400" b="1" dirty="0">
+              <a:rPr lang="en-US" sz="1350" b="1" dirty="0">
                 <a:solidFill>
                   <a:srgbClr val="10161F"/>
                 </a:solidFill>
@@ -5638,9 +8547,9 @@
                 <a:ea typeface="Pretendard" pitchFamily="34" charset="-122"/>
                 <a:cs typeface="Pretendard" pitchFamily="34" charset="-120"/>
               </a:rPr>
-              <a:t>true,"mocked":true,"extractedFields":{"area_signal":"역삼","asset_type":"오피스빌딩","price_band":"300억","size_signal":"3000평(약 9917.4㎡)"},"extractedFacts":{"region":"역삼","exactAddressCandidate":"역삼동 742-1","assetType":"오피스빌딩","priceText":"300억","sizeText":"3000평(약 9917.4㎡)","currentUse":"오피스","currentUseSignal":"근린생활시설","leaseSignal":"임대중","vacancySignal":"공실없음","tenantNames":"쿠팡","네이버","unitRentTexts":"301호: 1500만","sellerMotivationText":"자산 효율화","brokerNotes":"초역세권 매물"},"detectedSensitiveFields":"exact_address","tenant_name","ambiguousFields":,"warnings":,"areaSignal":"역삼","assetType":"오피스빌딩","priceBand":"300억","sizeSignal":"3000평(약 9917.4㎡)","dealType":"매각","buildingName":"역삼 센트럴타워","exactAddress":"역삼동 742-1","totalFloorArea":9917.3,"buildYear":2015,"currentUseSignal":"근린생활시설","vacancySignal":"공실 없음","fitSummary":"초역세권 근생 빌딩으로 시행/사옥 매입에 최적화","cautionSummary":"주요 임차인 만기 조율 필요","hiddenFields":"exact_address","seller_motivation","confidence":{"areaSignal":"confirmed","assetType":"confirmed","priceBand":"ai_hypothesis","fitSummary":"ai_hypothesis"},"missingData":"sizeSignal","boundaryNote":"본 자료는 실거래 통계 기반 참고치입니다.","buyerType":"법인 사옥형","budgetRange":{"min":50,"max":80,"display":"50억~80억"},"preferredRegions":"강남","성수","assetTypes":"꼬마빌딩","사옥용","purchasePurpose":"사옥용 매입","mustHave":"초역세권","주차","niceToHave":"테라스","루프탑","riskTolerance":"medium","financingNote":"자본금 50% 준비","missingQuestions":"구체적인 입주 시기가 언제인가요?","선호하는 수익률이 있나요?","privacyNotes":"연락처 비공개","fitReasons":"매수자 예산(50-80억)에 부합하는 매물입니다.","요청하신 성수/강남 권역에 해당합니다.","cautionReasons":"요청한 용도와 달리 명도 협의가 다소 필요합니다.","recommendedNextAction":"현장 답사 제안","kakaoMessage":"안녕하세요! 요청하신 조건에 부합하는 추천 매물이 있어 안내해 드립니다. 확인해보시고 피드백 부탁드립니다.","title":"강남 역삼역 초역세권 오피스 사옥용 빌딩 매각","shortSummary":"역삼역 도보 5분 거리의 준신축급 대형 오피스빌딩입니다.","dealPoints":"초역세권","사옥 최적","cautionPoints":"명도 조율 필요","hiddenInfoNotice":"보증금 및 지번은 인가 후 확인 가능","gateMessage":"G1 등급 등록이 필요합니다.","kakaoText":"강남 역삼역 오피스 빌딩 매각 안내입니다.","exactUnitCandidate":"101호","floor":"1층","areaSqmText":"150㎡","spaceType":"office","depositText":"5000만","monthlyRentText":"400만","maintenanceFeeText":"50만","availableFromText":"즉시입주","leaseTermMonthsText":"24","incentivesText":"렌트프리 2개월","restrictions":,"landlordIdentity":"김성수","currentTenant":"스타트업","vacancyReason":"이전 확장","rentNegotiation":"협의 가능","region":"성수동","areaSqm":150,"deposit":5000,"monthlyRent":400,"maintenanceFee":50,"availableFrom":"즉시입주","leaseTermMonths":24,"incentives":{"rentFreeMonths":2,"interiorSupport":"일부 인테리어 지원","freeRentDetail":"렌트프리 2개월 지원"},"shortSummaryLease":"성수역 도보 5분 거리 1층 리테일 상가 매물입니다."}</a:t>
-            </a:r>
-            <a:endParaRPr lang="en-US" sz="1400" dirty="0"/>
+              <a:t>true,"mocked":true,"extractedFields":{"area_signal":"역삼","asset_type":"건물명 비공개","price_band":"300억","size_signal":"3000평(약 9917.4㎡)"},"extractedFacts":{"region":"역삼","exactAddressCandidate":"역삼동 742-1","assetType":"건물명 비공개","priceText":"300억","sizeText":"3000평(약 9917.4㎡)","currentUse":"오피스","currentUseSignal":"근린생활시설","leaseSignal":"임대중","vacancySignal":"공실없음","tenantNames":"쿠팡","네이버","unitRentTexts":"301호: 1500만","sellerMotivationText":"자산 효율화","brokerNotes":"역세권 도보 3분 이내 매물"},"detectedSensitiveFields":"exact_address","tenant_name","ambiguousFields":,"warnings":,"areaSignal":"역삼","assetType":"건물명 비공개","priceBand":"300억","sizeSignal":"3000평(약 9917.4㎡)","dealType":"매각","buildingName":"역삼 건물명 비공개","exactAddress":"역삼동 742-1","totalFloorArea":9917.3,"buildYear":2015,"currentUseSignal":"근린생활시설","vacancySignal":"공실 없음","fitSummary":"역세권 도보 3분 이내 근생 빌딩으로 시행/사옥 매입에 최적화","cautionSummary":"주요 임차인 만기 조율 필요","hiddenFields":"exact_address","seller_motivation","confidence":{"areaSignal":"confirmed","assetType":"confirmed","priceBand":"ai_hypothesis","fitSummary":"ai_hypothesis"},"missingData":"sizeSignal","boundaryNote":"본 자료는 실거래 통계 기반 참고치입니다.","buyerType":"법인 사옥형","budgetRange":{"min":50,"max":80,"display":"50억~80억"},"preferredRegions":"강남","성수","assetTypes":"건물명 비공개","사옥용","purchasePurpose":"사옥용 매입","mustHave":"역세권 도보 3분 이내","주차","niceToHave":"테라스","루프탑","riskTolerance":"medium","financingNote":"자본금 50% 준비","missingQuestions":"구체적인 입주 시기가 언제인가요?","선호하는 수익률이 있나요?","privacyNotes":"연락처 비공개","fitReasons":"매수자 예산(50-80억)에 부합하는 매물입니다.","요청하신 성수/강남 권역에 해당합니다.","cautionReasons":"요청한 용도와 달리 명도 협의가 다소 필요합니다.","recommendedNextAction":"현장 답사 제안","kakaoMessage":"안녕하세요! 요청하신 조건에 부합하는 추천 매물이 있어 안내해 드립니다. 확인해보시고 피드백 부탁드립니다.","title":"강남 역삼역 역세권 도보 3분 이내 오피스 사옥용 빌딩 매각","shortSummary":"역삼역 도보 5분 거리의 준신축급 대형 건물명 비공개입니다.","dealPoints":"역세권 도보 3분 이내","사옥 최적","cautionPoints":"명도 조율 필요","hiddenInfoNotice":"보증금 및 지번은 인가 후 확인 가능","gateMessage":"G1 등급 등록이 필요합니다.","kakaoText":"강남 역삼역 오피스 빌딩 매각 안내입니다.","exactUnitCandidate":"101호","floor":"1층","areaSqmText":"150㎡","spaceType":"office","depositText":"5000만","monthlyRentText":"400만","maintenanceFeeText":"50만","availableFromText":"즉시입주","leaseTermMonthsText":"24","incentivesText":"렌트프리(무상임대) 2개월","restrictions":,"landlordIdentity":"김성수","currentTenant":"스타트업","vacancyReason":"이전 확장","rentNegotiation":"협의 가능","region":"성수동","areaSqm":150,"deposit":5000,"monthlyRent":400,"maintenanceFee":50,"availableFrom":"즉시입주","leaseTermMonths":24,"incentives":{"렌트프리(무상임대)(무상임대)Months":2,"interiorSupport":"일부 인테리어 지원","freeRentDetail":"렌트프리(무상임대) 2개월 지원"},"shortSummaryLease":"성수역 도보 5분 거리 1층 리테일 상가 매물입니다."}</a:t>
+            </a:r>
+            <a:endParaRPr lang="en-US" sz="1350" dirty="0"/>
           </a:p>
         </p:txBody>
       </p:sp>
@@ -5773,7 +8682,7 @@
                 <a:ea typeface="Pretendard" pitchFamily="34" charset="-122"/>
                 <a:cs typeface="Pretendard" pitchFamily="34" charset="-120"/>
               </a:rPr>
-              <a:t>{"ok":true,"mocked":true,"extractedFields":{"area_signal":"역삼","asset_type":"오피스빌딩","price_band":"300억","size_signal":"3</a:t>
+              <a:t>{"ok":true,"mocked":true,"extractedFields":{"area_signal":"역삼","asset_type":"[건물명 비공개]","price_band":"300억","size_signal</a:t>
             </a:r>
             <a:endParaRPr lang="en-US" sz="930" dirty="0"/>
           </a:p>
@@ -5981,7 +8890,7 @@
                 <a:ea typeface="Arial" pitchFamily="34" charset="-122"/>
                 <a:cs typeface="Arial" pitchFamily="34" charset="-120"/>
               </a:rPr>
-              <a:t>Market Position</a:t>
+              <a:t>Comps</a:t>
             </a:r>
             <a:endParaRPr lang="en-US" sz="950" dirty="0"/>
           </a:p>
@@ -6020,7 +8929,7 @@
                 <a:ea typeface="Pretendard" pitchFamily="34" charset="-122"/>
                 <a:cs typeface="Pretendard" pitchFamily="34" charset="-120"/>
               </a:rPr>
-              <a:t>시장 내 자산 위치와 가격 경쟁력</a:t>
+              <a:t>유사 거래 사례 및 비교 분석</a:t>
             </a:r>
             <a:endParaRPr lang="en-US" sz="2300" dirty="0"/>
           </a:p>
@@ -6034,47 +8943,8 @@
         </p:nvSpPr>
         <p:spPr>
           <a:xfrm>
-            <a:off x="566928" y="1371600"/>
-            <a:ext cx="6858000" cy="237744"/>
-          </a:xfrm>
-          <a:prstGeom prst="rect">
-            <a:avLst/>
-          </a:prstGeom>
-          <a:noFill/>
-          <a:ln/>
-        </p:spPr>
-        <p:txBody>
-          <a:bodyPr wrap="square" lIns="0" tIns="0" rIns="0" bIns="0" rtlCol="0" anchor="ctr"/>
-          <a:lstStyle/>
-          <a:p>
-            <a:pPr indent="0" marL="0">
-              <a:buNone/>
-            </a:pPr>
-            <a:r>
-              <a:rPr lang="en-US" sz="1100" b="1" dirty="0">
-                <a:solidFill>
-                  <a:srgbClr val="10161F"/>
-                </a:solidFill>
-                <a:latin typeface="Pretendard" pitchFamily="34" charset="0"/>
-                <a:ea typeface="Pretendard" pitchFamily="34" charset="-122"/>
-                <a:cs typeface="Pretendard" pitchFamily="34" charset="-120"/>
-              </a:rPr>
-              <a:t>건축물 개요 및 물리 스펙</a:t>
-            </a:r>
-            <a:endParaRPr lang="en-US" sz="1100" dirty="0"/>
-          </a:p>
-        </p:txBody>
-      </p:sp>
-      <p:sp>
-        <p:nvSpPr>
-          <p:cNvPr id="7" name="Text 5"/>
-          <p:cNvSpPr/>
-          <p:nvPr/>
-        </p:nvSpPr>
-        <p:spPr>
-          <a:xfrm>
             <a:off x="566928" y="1645920"/>
-            <a:ext cx="2606040" cy="402336"/>
+            <a:ext cx="4201979" cy="402336"/>
           </a:xfrm>
           <a:prstGeom prst="rect">
             <a:avLst/>
@@ -6109,14 +8979,14 @@
       </p:sp>
       <p:sp>
         <p:nvSpPr>
-          <p:cNvPr id="8" name="Text 6"/>
-          <p:cNvSpPr/>
-          <p:nvPr/>
-        </p:nvSpPr>
-        <p:spPr>
-          <a:xfrm>
-            <a:off x="3172968" y="1645920"/>
-            <a:ext cx="4251960" cy="402336"/>
+          <p:cNvPr id="7" name="Text 5"/>
+          <p:cNvSpPr/>
+          <p:nvPr/>
+        </p:nvSpPr>
+        <p:spPr>
+          <a:xfrm>
+            <a:off x="4768907" y="1645920"/>
+            <a:ext cx="6855860" cy="402336"/>
           </a:xfrm>
           <a:prstGeom prst="rect">
             <a:avLst/>
@@ -6143,7 +9013,7 @@
                 <a:ea typeface="Pretendard" pitchFamily="34" charset="-122"/>
                 <a:cs typeface="Pretendard" pitchFamily="34" charset="-120"/>
               </a:rPr>
-              <a:t>true,"mocked":true,"extractedFields":{"area_signal":"역삼","asset_type":"오피스빌딩","price_band":"300억","size_signal":"3000평(약 9917.4㎡)"},"extractedFacts":{"region":"역삼","exactAddressCandidate":"역삼동 742-1","assetType":"오피스빌딩","priceText":"300억","sizeText":"3000평(약 9917.4㎡)","currentUse":"오피스","currentUseSignal":"근린생활시설","leaseSignal":"임대중","vacancySignal":"공실없음","tenantNames":"쿠팡","네이버","unitRentTexts":"301호: 1500만","sellerMotivationText":"자산 효율화","brokerNotes":"초역세권 매물"},"detectedSensitiveFields":"exact_address","tenant_name","ambiguousFields":,"warnings":,"areaSignal":"역삼","assetType":"오피스빌딩","priceBand":"300억","sizeSignal":"3000평(약 9917.4㎡)","dealType":"매각","buildingName":"역삼 센트럴타워","exactAddress":"역삼동 742-1","totalFloorArea":9917.3,"buildYear":2015,"currentUseSignal":"근린생활시설","vacancySignal":"공실 없음","fitSummary":"초역세권 근생 빌딩으로 시행/사옥 매입에 최적화","cautionSummary":"주요 임차인 만기 조율 필요","hiddenFields":"exact_address","seller_motivation","confidence":{"areaSignal":"confirmed","assetType":"confirmed","priceBand":"ai_hypothesis","fitSummary":"ai_hypothesis"},"missingData":"sizeSignal","boundaryNote":"본 자료는 실거래 통계 기반 참고치입니다.","buyerType":"법인 사옥형","budgetRange":{"min":50,"max":80,"display":"50억~80억"},"preferredRegions":"강남","성수","assetTypes":"꼬마빌딩","사옥용","purchasePurpose":"사옥용 매입","mustHave":"초역세권","주차","niceToHave":"테라스","루프탑","riskTolerance":"medium","financingNote":"자본금 50% 준비","missingQuestions":"구체적인 입주 시기가 언제인가요?","선호하는 수익률이 있나요?","privacyNotes":"연락처 비공개","fitReasons":"매수자 예산(50-80억)에 부합하는 매물입니다.","요청하신 성수/강남 권역에 해당합니다.","cautionReasons":"요청한 용도와 달리 명도 협의가 다소 필요합니다.","recommendedNextAction":"현장 답사 제안","kakaoMessage":"안녕하세요! 요청하신 조건에 부합하는 추천 매물이 있어 안내해 드립니다. 확인해보시고 피드백 부탁드립니다.","title":"강남 역삼역 초역세권 오피스 사옥용 빌딩 매각","shortSummary":"역삼역 도보 5분 거리의 준신축급 대형 오피스빌딩입니다.","dealPoints":"초역세권","사옥 최적","cautionPoints":"명도 조율 필요","hiddenInfoNotice":"보증금 및 지번은 인가 후 확인 가능","gateMessage":"G1 등급 등록이 필요합니다.","kakaoText":"강남 역삼역 오피스 빌딩 매각 안내입니다.","exactUnitCandidate":"101호","floor":"1층","areaSqmText":"150㎡","spaceType":"office","depositText":"5000만","monthlyRentText":"400만","maintenanceFeeText":"50만","availableFromText":"즉시입주","leaseTermMonthsText":"24","incentivesText":"렌트프리 2개월","restrictions":,"landlordIdentity":"김성수","currentTenant":"스타트업","vacancyReason":"이전 확장","rentNegotiation":"협의 가능","region":"성수동","areaSqm":150,"deposit":5000,"monthlyRent":400,"maintenanceFee":50,"availableFrom":"즉시입주","leaseTermMonths":24,"incentives":{"rentFreeMonths":2,"interiorSupport":"일부 인테리어 지원","freeRentDetail":"렌트프리 2개월 지원"},"shortSummaryLease":"성수역 도보 5분 거리 1층 리테일 상가 매물입니다."}</a:t>
+              <a:t>true,"mocked":true,"extractedFields":{"area_signal":"역삼","asset_type":"건물명 비공개","price_band":"300억","size_signal":"3000평(약 9917.4㎡)"},"extractedFacts":{"region":"역삼","exactAddressCandidate":"역삼동 742-1","assetType":"건물명 비공개","priceText":"300억","sizeText":"3000평(약 9917.4㎡)","currentUse":"오피스","currentUseSignal":"근린생활시설","leaseSignal":"임대중","vacancySignal":"공실없음","tenantNames":"쿠팡","네이버","unitRentTexts":"301호: 1500만","sellerMotivationText":"자산 효율화","brokerNotes":"역세권 도보 3분 이내 매물"},"detectedSensitiveFields":"exact_address","tenant_name","ambiguousFields":,"warnings":,"areaSignal":"역삼","assetType":"건물명 비공개","priceBand":"300억","sizeSignal":"3000평(약 9917.4㎡)","dealType":"매각","buildingName":"역삼 건물명 비공개","exactAddress":"역삼동 742-1","totalFloorArea":9917.3,"buildYear":2015,"currentUseSignal":"근린생활시설","vacancySignal":"공실 없음","fitSummary":"역세권 도보 3분 이내 근생 빌딩으로 시행/사옥 매입에 최적화","cautionSummary":"주요 임차인 만기 조율 필요","hiddenFields":"exact_address","seller_motivation","confidence":{"areaSignal":"confirmed","assetType":"confirmed","priceBand":"ai_hypothesis","fitSummary":"ai_hypothesis"},"missingData":"sizeSignal","boundaryNote":"본 자료는 실거래 통계 기반 참고치입니다.","buyerType":"법인 사옥형","budgetRange":{"min":50,"max":80,"display":"50억~80억"},"preferredRegions":"강남","성수","assetTypes":"건물명 비공개","사옥용","purchasePurpose":"사옥용 매입","mustHave":"역세권 도보 3분 이내","주차","niceToHave":"테라스","루프탑","riskTolerance":"medium","financingNote":"자본금 50% 준비","missingQuestions":"구체적인 입주 시기가 언제인가요?","선호하는 수익률이 있나요?","privacyNotes":"연락처 비공개","fitReasons":"매수자 예산(50-80억)에 부합하는 매물입니다.","요청하신 성수/강남 권역에 해당합니다.","cautionReasons":"요청한 용도와 달리 명도 협의가 다소 필요합니다.","recommendedNextAction":"현장 답사 제안","kakaoMessage":"안녕하세요! 요청하신 조건에 부합하는 추천 매물이 있어 안내해 드립니다. 확인해보시고 피드백 부탁드립니다.","title":"강남 역삼역 역세권 도보 3분 이내 오피스 사옥용 빌딩 매각","shortSummary":"역삼역 도보 5분 거리의 준신축급 대형 건물명 비공개입니다.","dealPoints":"역세권 도보 3분 이내","사옥 최적","cautionPoints":"명도 조율 필요","hiddenInfoNotice":"보증금 및 지번은 인가 후 확인 가능","gateMessage":"G1 등급 등록이 필요합니다.","kakaoText":"강남 역삼역 오피스 빌딩 매각 안내입니다.","exactUnitCandidate":"101호","floor":"1층","areaSqmText":"150㎡","spaceType":"office","depositText":"5000만","monthlyRentText":"400만","maintenanceFeeText":"50만","availableFromText":"즉시입주","leaseTermMonthsText":"24","incentivesText":"렌트프리 2개월","restrictions":,"landlordIdentity":"김성수","currentTenant":"스타트업","vacancyReason":"이전 확장","rentNegotiation":"협의 가능","region":"성수동","areaSqm":150,"deposit":5000,"monthlyRent":400,"maintenanceFee":50,"availableFrom":"즉시입주","leaseTermMonths":24,"incentives":{"렌트프리(무상임대)Months":2,"interiorSupport":"일부 인테리어 지원","freeRentDetail":"렌트프리 2개월 지원"},"shortSummaryLease":"성수역 도보 5분 거리 1층 리테일 상가 매물입니다."}</a:t>
             </a:r>
             <a:endParaRPr lang="en-US" sz="1400" dirty="0"/>
           </a:p>
@@ -6151,142 +9021,7 @@
       </p:sp>
       <p:sp>
         <p:nvSpPr>
-          <p:cNvPr id="9" name="Shape 7"/>
-          <p:cNvSpPr/>
-          <p:nvPr/>
-        </p:nvSpPr>
-        <p:spPr>
-          <a:xfrm>
-            <a:off x="7604608" y="1371600"/>
-            <a:ext cx="0" cy="4754880"/>
-          </a:xfrm>
-          <a:prstGeom prst="line">
-            <a:avLst/>
-          </a:prstGeom>
-          <a:noFill/>
-          <a:ln w="8890">
-            <a:solidFill>
-              <a:srgbClr val="B98A2E"/>
-            </a:solidFill>
-            <a:prstDash val="solid"/>
-          </a:ln>
-        </p:spPr>
-      </p:sp>
-      <p:sp>
-        <p:nvSpPr>
-          <p:cNvPr id="10" name="Shape 8"/>
-          <p:cNvSpPr/>
-          <p:nvPr/>
-        </p:nvSpPr>
-        <p:spPr>
-          <a:xfrm>
-            <a:off x="7784287" y="1645920"/>
-            <a:ext cx="3840480" cy="2103120"/>
-          </a:xfrm>
-          <a:prstGeom prst="roundRect">
-            <a:avLst>
-              <a:gd name="adj" fmla="val 2609"/>
-            </a:avLst>
-          </a:prstGeom>
-          <a:solidFill>
-            <a:srgbClr val="F3EBDA"/>
-          </a:solidFill>
-          <a:ln/>
-        </p:spPr>
-      </p:sp>
-      <p:sp>
-        <p:nvSpPr>
-          <p:cNvPr id="11" name="Shape 9"/>
-          <p:cNvSpPr/>
-          <p:nvPr/>
-        </p:nvSpPr>
-        <p:spPr>
-          <a:xfrm>
-            <a:off x="7784287" y="1700784"/>
-            <a:ext cx="36576" cy="1993392"/>
-          </a:xfrm>
-          <a:prstGeom prst="rect">
-            <a:avLst/>
-          </a:prstGeom>
-          <a:solidFill>
-            <a:srgbClr val="977024"/>
-          </a:solidFill>
-          <a:ln/>
-        </p:spPr>
-      </p:sp>
-      <p:sp>
-        <p:nvSpPr>
-          <p:cNvPr id="12" name="Text 10"/>
-          <p:cNvSpPr/>
-          <p:nvPr/>
-        </p:nvSpPr>
-        <p:spPr>
-          <a:xfrm>
-            <a:off x="7967167" y="1755648"/>
-            <a:ext cx="3511296" cy="201168"/>
-          </a:xfrm>
-          <a:prstGeom prst="rect">
-            <a:avLst/>
-          </a:prstGeom>
-          <a:noFill/>
-          <a:ln/>
-        </p:spPr>
-        <p:txBody>
-          <a:bodyPr wrap="square" lIns="0" tIns="0" rIns="0" bIns="0" rtlCol="0" anchor="ctr"/>
-          <a:lstStyle/>
-          <a:p>
-            <a:pPr indent="0" marL="0">
-              <a:buNone/>
-            </a:pPr>
-            <a:endParaRPr lang="en-US" sz="1050" dirty="0"/>
-          </a:p>
-        </p:txBody>
-      </p:sp>
-      <p:sp>
-        <p:nvSpPr>
-          <p:cNvPr id="13" name="Text 11"/>
-          <p:cNvSpPr/>
-          <p:nvPr/>
-        </p:nvSpPr>
-        <p:spPr>
-          <a:xfrm>
-            <a:off x="7967167" y="1975104"/>
-            <a:ext cx="3511296" cy="1700784"/>
-          </a:xfrm>
-          <a:prstGeom prst="rect">
-            <a:avLst/>
-          </a:prstGeom>
-          <a:noFill/>
-          <a:ln/>
-        </p:spPr>
-        <p:txBody>
-          <a:bodyPr wrap="square" lIns="0" tIns="0" rIns="0" bIns="0" rtlCol="0" anchor="t"/>
-          <a:lstStyle/>
-          <a:p>
-            <a:pPr indent="0" marL="0">
-              <a:lnSpc>
-                <a:spcPct val="120000"/>
-              </a:lnSpc>
-              <a:buNone/>
-            </a:pPr>
-            <a:r>
-              <a:rPr lang="en-US" sz="930" dirty="0">
-                <a:solidFill>
-                  <a:srgbClr val="10161F"/>
-                </a:solidFill>
-                <a:latin typeface="Pretendard" pitchFamily="34" charset="0"/>
-                <a:ea typeface="Pretendard" pitchFamily="34" charset="-122"/>
-                <a:cs typeface="Pretendard" pitchFamily="34" charset="-120"/>
-              </a:rPr>
-              <a:t>{"ok":true,"mocked":true,"extractedFields":{"area_signal":"역삼","asset_type":"오피스빌딩","price_band":"300억","size_signal":"3</a:t>
-            </a:r>
-            <a:endParaRPr lang="en-US" sz="930" dirty="0"/>
-          </a:p>
-        </p:txBody>
-      </p:sp>
-      <p:sp>
-        <p:nvSpPr>
-          <p:cNvPr id="14" name="Text 12"/>
+          <p:cNvPr id="8" name="Text 6"/>
           <p:cNvSpPr/>
           <p:nvPr/>
         </p:nvSpPr>
@@ -6325,7 +9060,7 @@
       </p:sp>
       <p:sp>
         <p:nvSpPr>
-          <p:cNvPr id="15" name="Text 13"/>
+          <p:cNvPr id="9" name="Text 7"/>
           <p:cNvSpPr/>
           <p:nvPr/>
         </p:nvSpPr>
@@ -6486,7 +9221,7 @@
                 <a:ea typeface="Arial" pitchFamily="34" charset="-122"/>
                 <a:cs typeface="Arial" pitchFamily="34" charset="-120"/>
               </a:rPr>
-              <a:t>Comps</a:t>
+              <a:t>Trend</a:t>
             </a:r>
             <a:endParaRPr lang="en-US" sz="950" dirty="0"/>
           </a:p>
@@ -6525,7 +9260,7 @@
                 <a:ea typeface="Pretendard" pitchFamily="34" charset="-122"/>
                 <a:cs typeface="Pretendard" pitchFamily="34" charset="-120"/>
               </a:rPr>
-              <a:t>유사 거래 사례 및 비교 분석</a:t>
+              <a:t>거래동향</a:t>
             </a:r>
             <a:endParaRPr lang="en-US" sz="2300" dirty="0"/>
           </a:p>
@@ -6533,23 +9268,234 @@
       </p:sp>
       <p:sp>
         <p:nvSpPr>
-          <p:cNvPr id="6" name="Text 4"/>
-          <p:cNvSpPr/>
-          <p:nvPr/>
-        </p:nvSpPr>
-        <p:spPr>
-          <a:xfrm>
-            <a:off x="566928" y="1645920"/>
-            <a:ext cx="4201979" cy="402336"/>
-          </a:xfrm>
-          <a:prstGeom prst="rect">
-            <a:avLst/>
-          </a:prstGeom>
-          <a:noFill/>
-          <a:ln/>
-        </p:spPr>
-        <p:txBody>
-          <a:bodyPr wrap="square" lIns="0" tIns="0" rIns="0" bIns="0" rtlCol="0" anchor="ctr"/>
+          <p:cNvPr id="6" name="Shape 4"/>
+          <p:cNvSpPr/>
+          <p:nvPr/>
+        </p:nvSpPr>
+        <p:spPr>
+          <a:xfrm>
+            <a:off x="566928" y="1325880"/>
+            <a:ext cx="11057839" cy="0"/>
+          </a:xfrm>
+          <a:prstGeom prst="line">
+            <a:avLst/>
+          </a:prstGeom>
+          <a:noFill/>
+          <a:ln w="19050">
+            <a:solidFill>
+              <a:srgbClr val="B98A2E"/>
+            </a:solidFill>
+            <a:prstDash val="solid"/>
+          </a:ln>
+        </p:spPr>
+      </p:sp>
+      <p:sp>
+        <p:nvSpPr>
+          <p:cNvPr id="7" name="Shape 5"/>
+          <p:cNvSpPr/>
+          <p:nvPr/>
+        </p:nvSpPr>
+        <p:spPr>
+          <a:xfrm>
+            <a:off x="566928" y="1554480"/>
+            <a:ext cx="3576218" cy="1188720"/>
+          </a:xfrm>
+          <a:prstGeom prst="roundRect">
+            <a:avLst>
+              <a:gd name="adj" fmla="val 4615"/>
+            </a:avLst>
+          </a:prstGeom>
+          <a:solidFill>
+            <a:srgbClr val="F7FAFC"/>
+          </a:solidFill>
+          <a:ln w="6350">
+            <a:solidFill>
+              <a:srgbClr val="CBD5E0"/>
+            </a:solidFill>
+            <a:prstDash val="solid"/>
+          </a:ln>
+        </p:spPr>
+      </p:sp>
+      <p:sp>
+        <p:nvSpPr>
+          <p:cNvPr id="8" name="Text 6"/>
+          <p:cNvSpPr/>
+          <p:nvPr/>
+        </p:nvSpPr>
+        <p:spPr>
+          <a:xfrm>
+            <a:off x="731520" y="1682496"/>
+            <a:ext cx="3247034" cy="201168"/>
+          </a:xfrm>
+          <a:prstGeom prst="rect">
+            <a:avLst/>
+          </a:prstGeom>
+          <a:noFill/>
+          <a:ln/>
+        </p:spPr>
+        <p:txBody>
+          <a:bodyPr wrap="square" lIns="0" tIns="0" rIns="0" bIns="0" rtlCol="0" anchor="ctr"/>
+          <a:lstStyle/>
+          <a:p>
+            <a:pPr indent="0" marL="0">
+              <a:buNone/>
+            </a:pPr>
+            <a:r>
+              <a:rPr lang="en-US" sz="950" dirty="0">
+                <a:solidFill>
+                  <a:srgbClr val="718096"/>
+                </a:solidFill>
+                <a:latin typeface="Pretendard" pitchFamily="34" charset="0"/>
+                <a:ea typeface="Pretendard" pitchFamily="34" charset="-122"/>
+                <a:cs typeface="Pretendard" pitchFamily="34" charset="-120"/>
+              </a:rPr>
+              <a:t>{"ok"</a:t>
+            </a:r>
+            <a:endParaRPr lang="en-US" sz="950" dirty="0"/>
+          </a:p>
+        </p:txBody>
+      </p:sp>
+      <p:sp>
+        <p:nvSpPr>
+          <p:cNvPr id="9" name="Text 7"/>
+          <p:cNvSpPr/>
+          <p:nvPr/>
+        </p:nvSpPr>
+        <p:spPr>
+          <a:xfrm>
+            <a:off x="731520" y="1901952"/>
+            <a:ext cx="3247034" cy="402336"/>
+          </a:xfrm>
+          <a:prstGeom prst="rect">
+            <a:avLst/>
+          </a:prstGeom>
+          <a:noFill/>
+          <a:ln/>
+        </p:spPr>
+        <p:txBody>
+          <a:bodyPr wrap="square" lIns="0" tIns="0" rIns="0" bIns="0" rtlCol="0" anchor="ctr">
+            <a:normAutofit/>
+          </a:bodyPr>
+          <a:lstStyle/>
+          <a:p>
+            <a:pPr indent="0" marL="0">
+              <a:buNone/>
+            </a:pPr>
+            <a:r>
+              <a:rPr lang="en-US" sz="2200" b="1" dirty="0">
+                <a:solidFill>
+                  <a:srgbClr val="10161F"/>
+                </a:solidFill>
+                <a:latin typeface="Pretendard" pitchFamily="34" charset="0"/>
+                <a:ea typeface="Pretendard" pitchFamily="34" charset="-122"/>
+                <a:cs typeface="Pretendard" pitchFamily="34" charset="-120"/>
+              </a:rPr>
+              <a:t>300억</a:t>
+            </a:r>
+            <a:endParaRPr lang="en-US" sz="2200" dirty="0"/>
+          </a:p>
+        </p:txBody>
+      </p:sp>
+      <p:sp>
+        <p:nvSpPr>
+          <p:cNvPr id="10" name="Shape 8"/>
+          <p:cNvSpPr/>
+          <p:nvPr/>
+        </p:nvSpPr>
+        <p:spPr>
+          <a:xfrm>
+            <a:off x="566928" y="2999232"/>
+            <a:ext cx="11057839" cy="1280160"/>
+          </a:xfrm>
+          <a:prstGeom prst="roundRect">
+            <a:avLst>
+              <a:gd name="adj" fmla="val 4286"/>
+            </a:avLst>
+          </a:prstGeom>
+          <a:solidFill>
+            <a:srgbClr val="BEE3F8"/>
+          </a:solidFill>
+          <a:ln/>
+        </p:spPr>
+      </p:sp>
+      <p:sp>
+        <p:nvSpPr>
+          <p:cNvPr id="11" name="Shape 9"/>
+          <p:cNvSpPr/>
+          <p:nvPr/>
+        </p:nvSpPr>
+        <p:spPr>
+          <a:xfrm>
+            <a:off x="566928" y="3054096"/>
+            <a:ext cx="36576" cy="1170432"/>
+          </a:xfrm>
+          <a:prstGeom prst="rect">
+            <a:avLst/>
+          </a:prstGeom>
+          <a:solidFill>
+            <a:srgbClr val="2B6CB0"/>
+          </a:solidFill>
+          <a:ln/>
+        </p:spPr>
+      </p:sp>
+      <p:sp>
+        <p:nvSpPr>
+          <p:cNvPr id="12" name="Text 10"/>
+          <p:cNvSpPr/>
+          <p:nvPr/>
+        </p:nvSpPr>
+        <p:spPr>
+          <a:xfrm>
+            <a:off x="749808" y="3108960"/>
+            <a:ext cx="10728655" cy="201168"/>
+          </a:xfrm>
+          <a:prstGeom prst="rect">
+            <a:avLst/>
+          </a:prstGeom>
+          <a:noFill/>
+          <a:ln/>
+        </p:spPr>
+        <p:txBody>
+          <a:bodyPr wrap="square" lIns="0" tIns="0" rIns="0" bIns="0" rtlCol="0" anchor="ctr"/>
+          <a:lstStyle/>
+          <a:p>
+            <a:pPr indent="0" marL="0">
+              <a:buNone/>
+            </a:pPr>
+            <a:r>
+              <a:rPr lang="en-US" sz="1050" b="1" dirty="0">
+                <a:solidFill>
+                  <a:srgbClr val="2B6CB0"/>
+                </a:solidFill>
+                <a:latin typeface="Pretendard" pitchFamily="34" charset="0"/>
+                <a:ea typeface="Pretendard" pitchFamily="34" charset="-122"/>
+                <a:cs typeface="Pretendard" pitchFamily="34" charset="-120"/>
+              </a:rPr>
+              <a:t>투자 가치 제안</a:t>
+            </a:r>
+            <a:endParaRPr lang="en-US" sz="1050" dirty="0"/>
+          </a:p>
+        </p:txBody>
+      </p:sp>
+      <p:sp>
+        <p:nvSpPr>
+          <p:cNvPr id="13" name="Text 11"/>
+          <p:cNvSpPr/>
+          <p:nvPr/>
+        </p:nvSpPr>
+        <p:spPr>
+          <a:xfrm>
+            <a:off x="749808" y="3328416"/>
+            <a:ext cx="10728655" cy="877824"/>
+          </a:xfrm>
+          <a:prstGeom prst="rect">
+            <a:avLst/>
+          </a:prstGeom>
+          <a:noFill/>
+          <a:ln/>
+        </p:spPr>
+        <p:txBody>
+          <a:bodyPr wrap="square" lIns="0" tIns="0" rIns="0" bIns="0" rtlCol="0" anchor="t"/>
           <a:lstStyle/>
           <a:p>
             <a:pPr indent="0" marL="0">
@@ -6559,49 +9505,7 @@
               <a:buNone/>
             </a:pPr>
             <a:r>
-              <a:rPr lang="en-US" sz="1400" dirty="0">
-                <a:solidFill>
-                  <a:srgbClr val="718096"/>
-                </a:solidFill>
-                <a:latin typeface="Pretendard" pitchFamily="34" charset="0"/>
-                <a:ea typeface="Pretendard" pitchFamily="34" charset="-122"/>
-                <a:cs typeface="Pretendard" pitchFamily="34" charset="-120"/>
-              </a:rPr>
-              <a:t>{"ok"</a:t>
-            </a:r>
-            <a:endParaRPr lang="en-US" sz="1400" dirty="0"/>
-          </a:p>
-        </p:txBody>
-      </p:sp>
-      <p:sp>
-        <p:nvSpPr>
-          <p:cNvPr id="7" name="Text 5"/>
-          <p:cNvSpPr/>
-          <p:nvPr/>
-        </p:nvSpPr>
-        <p:spPr>
-          <a:xfrm>
-            <a:off x="4768907" y="1645920"/>
-            <a:ext cx="6855860" cy="402336"/>
-          </a:xfrm>
-          <a:prstGeom prst="rect">
-            <a:avLst/>
-          </a:prstGeom>
-          <a:noFill/>
-          <a:ln/>
-        </p:spPr>
-        <p:txBody>
-          <a:bodyPr wrap="square" lIns="0" tIns="0" rIns="0" bIns="0" rtlCol="0" anchor="ctr"/>
-          <a:lstStyle/>
-          <a:p>
-            <a:pPr indent="0" marL="0">
-              <a:lnSpc>
-                <a:spcPct val="120000"/>
-              </a:lnSpc>
-              <a:buNone/>
-            </a:pPr>
-            <a:r>
-              <a:rPr lang="en-US" sz="1400" b="1" dirty="0">
+              <a:rPr lang="en-US" sz="930" dirty="0">
                 <a:solidFill>
                   <a:srgbClr val="10161F"/>
                 </a:solidFill>
@@ -6609,15 +9513,15 @@
                 <a:ea typeface="Pretendard" pitchFamily="34" charset="-122"/>
                 <a:cs typeface="Pretendard" pitchFamily="34" charset="-120"/>
               </a:rPr>
-              <a:t>true,"mocked":true,"extractedFields":{"area_signal":"역삼","asset_type":"오피스빌딩","price_band":"300억","size_signal":"3000평(약 9917.4㎡)"},"extractedFacts":{"region":"역삼","exactAddressCandidate":"역삼동 742-1","assetType":"오피스빌딩","priceText":"300억","sizeText":"3000평(약 9917.4㎡)","currentUse":"오피스","currentUseSignal":"근린생활시설","leaseSignal":"임대중","vacancySignal":"공실없음","tenantNames":"쿠팡","네이버","unitRentTexts":"301호: 1500만","sellerMotivationText":"자산 효율화","brokerNotes":"초역세권 매물"},"detectedSensitiveFields":"exact_address","tenant_name","ambiguousFields":,"warnings":,"areaSignal":"역삼","assetType":"오피스빌딩","priceBand":"300억","sizeSignal":"3000평(약 9917.4㎡)","dealType":"매각","buildingName":"역삼 센트럴타워","exactAddress":"역삼동 742-1","totalFloorArea":9917.3,"buildYear":2015,"currentUseSignal":"근린생활시설","vacancySignal":"공실 없음","fitSummary":"초역세권 근생 빌딩으로 시행/사옥 매입에 최적화","cautionSummary":"주요 임차인 만기 조율 필요","hiddenFields":"exact_address","seller_motivation","confidence":{"areaSignal":"confirmed","assetType":"confirmed","priceBand":"ai_hypothesis","fitSummary":"ai_hypothesis"},"missingData":"sizeSignal","boundaryNote":"본 자료는 실거래 통계 기반 참고치입니다.","buyerType":"법인 사옥형","budgetRange":{"min":50,"max":80,"display":"50억~80억"},"preferredRegions":"강남","성수","assetTypes":"꼬마빌딩","사옥용","purchasePurpose":"사옥용 매입","mustHave":"초역세권","주차","niceToHave":"테라스","루프탑","riskTolerance":"medium","financingNote":"자본금 50% 준비","missingQuestions":"구체적인 입주 시기가 언제인가요?","선호하는 수익률이 있나요?","privacyNotes":"연락처 비공개","fitReasons":"매수자 예산(50-80억)에 부합하는 매물입니다.","요청하신 성수/강남 권역에 해당합니다.","cautionReasons":"요청한 용도와 달리 명도 협의가 다소 필요합니다.","recommendedNextAction":"현장 답사 제안","kakaoMessage":"안녕하세요! 요청하신 조건에 부합하는 추천 매물이 있어 안내해 드립니다. 확인해보시고 피드백 부탁드립니다.","title":"강남 역삼역 초역세권 오피스 사옥용 빌딩 매각","shortSummary":"역삼역 도보 5분 거리의 준신축급 대형 오피스빌딩입니다.","dealPoints":"초역세권","사옥 최적","cautionPoints":"명도 조율 필요","hiddenInfoNotice":"보증금 및 지번은 인가 후 확인 가능","gateMessage":"G1 등급 등록이 필요합니다.","kakaoText":"강남 역삼역 오피스 빌딩 매각 안내입니다.","exactUnitCandidate":"101호","floor":"1층","areaSqmText":"150㎡","spaceType":"office","depositText":"5000만","monthlyRentText":"400만","maintenanceFeeText":"50만","availableFromText":"즉시입주","leaseTermMonthsText":"24","incentivesText":"렌트프리 2개월","restrictions":,"landlordIdentity":"김성수","currentTenant":"스타트업","vacancyReason":"이전 확장","rentNegotiation":"협의 가능","region":"성수동","areaSqm":150,"deposit":5000,"monthlyRent":400,"maintenanceFee":50,"availableFrom":"즉시입주","leaseTermMonths":24,"incentives":{"rentFreeMonths":2,"interiorSupport":"일부 인테리어 지원","freeRentDetail":"렌트프리 2개월 지원"},"shortSummaryLease":"성수역 도보 5분 거리 1층 리테일 상가 매물입니다."}</a:t>
-            </a:r>
-            <a:endParaRPr lang="en-US" sz="1400" dirty="0"/>
-          </a:p>
-        </p:txBody>
-      </p:sp>
-      <p:sp>
-        <p:nvSpPr>
-          <p:cNvPr id="8" name="Text 6"/>
+              <a:t>{"ok":true,"mocked":true,"extractedFields":{"area_signal":"역삼","asset_type":"[건물명 비공개]","price_band":"300억","size_signal":"3000평(약 9917.4㎡)"},"extractedFacts":{"region":"역삼","exactAddressCandidate":"역삼동 742-1","assetType":"[건물명 비공개]","priceText":"300억","sizeText":"3000평(약 9917.4㎡)","currentUse":"오피스","currentUseSignal":"근린생활시설","leaseSignal":"임대중","vacancySignal":"공실없음","tenantNames":["쿠팡","네이버"],"unitRentTexts":["301호: 1500만"],"sellerMotivationText":"자산 효율화","brokerNotes":["역세권 도보 3분 이내 매물"]},"detectedSensitiveFields":["exact_address","tenant_name"],"ambiguousFields":[],"warnings":[],"areaSignal":"역삼","assetType":"[건물명 비공개]","priceBand":"300억","sizeSignal":"3000평(약 9917.4㎡)","dealType":"매각","buildingName":"역삼 [건물명 비공개]","exactAddress":"역삼동 742-1","totalFloorArea":9917.3,"buildYear":2015,"currentUseSignal":"근린생활시설","vacancySignal":"공실 없음","fitSummary":"역세권 도보 3분 이내 근생 빌딩으로 시행/사옥 매입에 최적화","cautionSummary":"주요 임차인 만기 조율 필요","hiddenFields":["exact_address","seller_motivation"],"confidence":{"areaSignal":"confirmed","assetType":"confirmed","priceBand":"ai_hypothesis","fitSummary":"ai_hypothesis"},"missingData":["sizeSignal"],"boundaryNote":"본 자료는 실거래 통계 기반 참고치입니다.","buyerType":"법인 사옥형","budgetRange":{"min":50,"max":80,"display":"50억~80억"},"preferredRegions":["강남","성수"],"assetTypes":["[건물명 비공개]","사옥용"],"purchasePurpose":"사옥용 매입","mustHave":["역세권 도보 3분 이내","주차"],"niceToHave":["테라스","루프탑"],"riskTolerance":"medium","financingNote":"자본금 50% 준비","missingQuestions":["구체적인 입주 시기가 언제인가요?","선호하는 수익률이 있나요?"],"privacyNotes":["연락처 비공개"],"fitReasons":["매수자 예산(50-80억)에 부합하는 매물입니다.","요청하신 성수/강남 권역에 해당합니다."],"cautionReasons":["요청한 용도와 달리 명도 협의가 다소 필요합니다."],"recommendedNextAction":"현장 답사 제안","kakaoMessage":"안녕하세요! 요청하신 조건에 부합하는 추천 매물이 있어 안내해 드립니다. 확인해보시고 피드백 부탁드립니다.","title":"강남 역삼역 역세권 도보 3분 이내 오피스 사옥용 빌딩 매각","shortSummary":"역삼역 도보 5분 거리의 준신축급 대형 [건물명 비공개]입니다.","dealPoints":["역세권 도보 3분 이내","사옥 최적"],"cautionPoints":["명도 조율 필요"],"hiddenInfoNotice":["보증금 및 지번은 인가 후 확인 가능"],"gateMessage":"G1 등급 등록이 필요합니다.","kakaoText":"강남 역삼역 오피스 빌딩 매각 안내입니다.","exactUnitCandidate":"101호","floor":"1층","areaSqmText":"150㎡","spaceType":"office","depositText":"5000만","monthlyRentText":"400만","maintenanceFeeText":"50만","availableFromText":"즉시입주","leaseTermMonthsText":"24","incentivesText":"렌트프리(무상임대) 2개월","restrictions":[],"landlordIdentity":"김성수","currentTenant":"스타트업","vacancyReason":"이전 확장","rentNegotiation":"협의 가능","region":"성수동","areaSqm":150,"deposit":5000,"monthlyRent":400,"maintenanceFee":50,"availableFrom":"즉시입주","leaseTermMonths":24,"incentives":{"렌트프리(무상임대)(무상임대)Months":2,"interiorSupport":"일부 인테리어 지원","freeRentDetail":"렌트프리(무상임대) 2개월 지원"},"shortSummaryLease":"성수역 도보 5분 거리 1층 리테일 상가 매물입니다."}</a:t>
+            </a:r>
+            <a:endParaRPr lang="en-US" sz="930" dirty="0"/>
+          </a:p>
+        </p:txBody>
+      </p:sp>
+      <p:sp>
+        <p:nvSpPr>
+          <p:cNvPr id="14" name="Text 12"/>
           <p:cNvSpPr/>
           <p:nvPr/>
         </p:nvSpPr>
@@ -6656,7 +9560,7 @@
       </p:sp>
       <p:sp>
         <p:nvSpPr>
-          <p:cNvPr id="9" name="Text 7"/>
+          <p:cNvPr id="15" name="Text 13"/>
           <p:cNvSpPr/>
           <p:nvPr/>
         </p:nvSpPr>
@@ -6817,7 +9721,7 @@
                 <a:ea typeface="Arial" pitchFamily="34" charset="-122"/>
                 <a:cs typeface="Arial" pitchFamily="34" charset="-120"/>
               </a:rPr>
-              <a:t>Risk</a:t>
+              <a:t>Turnover</a:t>
             </a:r>
             <a:endParaRPr lang="en-US" sz="950" dirty="0"/>
           </a:p>
@@ -6856,7 +9760,7 @@
                 <a:ea typeface="Pretendard" pitchFamily="34" charset="-122"/>
                 <a:cs typeface="Pretendard" pitchFamily="34" charset="-120"/>
               </a:rPr>
-              <a:t>리스크는 무엇이고 대응책은 있는가</a:t>
+              <a:t>권역 회전율</a:t>
             </a:r>
             <a:endParaRPr lang="en-US" sz="2300" dirty="0"/>
           </a:p>
@@ -6864,26 +9768,145 @@
       </p:sp>
       <p:sp>
         <p:nvSpPr>
-          <p:cNvPr id="6" name="Shape 4"/>
-          <p:cNvSpPr/>
-          <p:nvPr/>
-        </p:nvSpPr>
-        <p:spPr>
-          <a:xfrm>
-            <a:off x="566928" y="1417320"/>
-            <a:ext cx="3515258" cy="3657600"/>
-          </a:xfrm>
-          <a:prstGeom prst="roundRect">
-            <a:avLst>
-              <a:gd name="adj" fmla="val 1561"/>
-            </a:avLst>
-          </a:prstGeom>
-          <a:solidFill>
-            <a:srgbClr val="F7FAFC"/>
-          </a:solidFill>
-          <a:ln w="6350">
+          <p:cNvPr id="6" name="Text 4"/>
+          <p:cNvSpPr/>
+          <p:nvPr/>
+        </p:nvSpPr>
+        <p:spPr>
+          <a:xfrm>
+            <a:off x="566928" y="1371600"/>
+            <a:ext cx="6858000" cy="237744"/>
+          </a:xfrm>
+          <a:prstGeom prst="rect">
+            <a:avLst/>
+          </a:prstGeom>
+          <a:noFill/>
+          <a:ln/>
+        </p:spPr>
+        <p:txBody>
+          <a:bodyPr wrap="square" lIns="0" tIns="0" rIns="0" bIns="0" rtlCol="0" anchor="ctr"/>
+          <a:lstStyle/>
+          <a:p>
+            <a:pPr indent="0" marL="0">
+              <a:buNone/>
+            </a:pPr>
+            <a:r>
+              <a:rPr lang="en-US" sz="1100" b="1" dirty="0">
+                <a:solidFill>
+                  <a:srgbClr val="10161F"/>
+                </a:solidFill>
+                <a:latin typeface="Pretendard" pitchFamily="34" charset="0"/>
+                <a:ea typeface="Pretendard" pitchFamily="34" charset="-122"/>
+                <a:cs typeface="Pretendard" pitchFamily="34" charset="-120"/>
+              </a:rPr>
+              <a:t>건축물 개요 및 물리 스펙</a:t>
+            </a:r>
+            <a:endParaRPr lang="en-US" sz="1100" dirty="0"/>
+          </a:p>
+        </p:txBody>
+      </p:sp>
+      <p:sp>
+        <p:nvSpPr>
+          <p:cNvPr id="7" name="Text 5"/>
+          <p:cNvSpPr/>
+          <p:nvPr/>
+        </p:nvSpPr>
+        <p:spPr>
+          <a:xfrm>
+            <a:off x="566928" y="1645920"/>
+            <a:ext cx="2606040" cy="438912"/>
+          </a:xfrm>
+          <a:prstGeom prst="rect">
+            <a:avLst/>
+          </a:prstGeom>
+          <a:noFill/>
+          <a:ln/>
+        </p:spPr>
+        <p:txBody>
+          <a:bodyPr wrap="square" lIns="0" tIns="0" rIns="0" bIns="0" rtlCol="0" anchor="ctr"/>
+          <a:lstStyle/>
+          <a:p>
+            <a:pPr indent="0" marL="0">
+              <a:lnSpc>
+                <a:spcPct val="120000"/>
+              </a:lnSpc>
+              <a:buNone/>
+            </a:pPr>
+            <a:r>
+              <a:rPr lang="en-US" sz="1350" dirty="0">
+                <a:solidFill>
+                  <a:srgbClr val="718096"/>
+                </a:solidFill>
+                <a:latin typeface="Pretendard" pitchFamily="34" charset="0"/>
+                <a:ea typeface="Pretendard" pitchFamily="34" charset="-122"/>
+                <a:cs typeface="Pretendard" pitchFamily="34" charset="-120"/>
+              </a:rPr>
+              <a:t>{"ok"</a:t>
+            </a:r>
+            <a:endParaRPr lang="en-US" sz="1350" dirty="0"/>
+          </a:p>
+        </p:txBody>
+      </p:sp>
+      <p:sp>
+        <p:nvSpPr>
+          <p:cNvPr id="8" name="Text 6"/>
+          <p:cNvSpPr/>
+          <p:nvPr/>
+        </p:nvSpPr>
+        <p:spPr>
+          <a:xfrm>
+            <a:off x="3172968" y="1645920"/>
+            <a:ext cx="4251960" cy="438912"/>
+          </a:xfrm>
+          <a:prstGeom prst="rect">
+            <a:avLst/>
+          </a:prstGeom>
+          <a:noFill/>
+          <a:ln/>
+        </p:spPr>
+        <p:txBody>
+          <a:bodyPr wrap="square" lIns="0" tIns="0" rIns="0" bIns="0" rtlCol="0" anchor="ctr"/>
+          <a:lstStyle/>
+          <a:p>
+            <a:pPr indent="0" marL="0">
+              <a:lnSpc>
+                <a:spcPct val="120000"/>
+              </a:lnSpc>
+              <a:buNone/>
+            </a:pPr>
+            <a:r>
+              <a:rPr lang="en-US" sz="1350" b="1" dirty="0">
+                <a:solidFill>
+                  <a:srgbClr val="10161F"/>
+                </a:solidFill>
+                <a:latin typeface="Pretendard" pitchFamily="34" charset="0"/>
+                <a:ea typeface="Pretendard" pitchFamily="34" charset="-122"/>
+                <a:cs typeface="Pretendard" pitchFamily="34" charset="-120"/>
+              </a:rPr>
+              <a:t>true,"mocked":true,"extractedFields":{"area_signal":"역삼","asset_type":"건물명 비공개","price_band":"300억","size_signal":"3000평(약 9917.4㎡)"},"extractedFacts":{"region":"역삼","exactAddressCandidate":"역삼동 742-1","assetType":"건물명 비공개","priceText":"300억","sizeText":"3000평(약 9917.4㎡)","currentUse":"오피스","currentUseSignal":"근린생활시설","leaseSignal":"임대중","vacancySignal":"공실없음","tenantNames":"쿠팡","네이버","unitRentTexts":"301호: 1500만","sellerMotivationText":"자산 효율화","brokerNotes":"역세권 도보 3분 이내 매물"},"detectedSensitiveFields":"exact_address","tenant_name","ambiguousFields":,"warnings":,"areaSignal":"역삼","assetType":"건물명 비공개","priceBand":"300억","sizeSignal":"3000평(약 9917.4㎡)","dealType":"매각","buildingName":"역삼 건물명 비공개","exactAddress":"역삼동 742-1","totalFloorArea":9917.3,"buildYear":2015,"currentUseSignal":"근린생활시설","vacancySignal":"공실 없음","fitSummary":"역세권 도보 3분 이내 근생 빌딩으로 시행/사옥 매입에 최적화","cautionSummary":"주요 임차인 만기 조율 필요","hiddenFields":"exact_address","seller_motivation","confidence":{"areaSignal":"confirmed","assetType":"confirmed","priceBand":"ai_hypothesis","fitSummary":"ai_hypothesis"},"missingData":"sizeSignal","boundaryNote":"본 자료는 실거래 통계 기반 참고치입니다.","buyerType":"법인 사옥형","budgetRange":{"min":50,"max":80,"display":"50억~80억"},"preferredRegions":"강남","성수","assetTypes":"건물명 비공개","사옥용","purchasePurpose":"사옥용 매입","mustHave":"역세권 도보 3분 이내","주차","niceToHave":"테라스","루프탑","riskTolerance":"medium","financingNote":"자본금 50% 준비","missingQuestions":"구체적인 입주 시기가 언제인가요?","선호하는 수익률이 있나요?","privacyNotes":"연락처 비공개","fitReasons":"매수자 예산(50-80억)에 부합하는 매물입니다.","요청하신 성수/강남 권역에 해당합니다.","cautionReasons":"요청한 용도와 달리 명도 협의가 다소 필요합니다.","recommendedNextAction":"현장 답사 제안","kakaoMessage":"안녕하세요! 요청하신 조건에 부합하는 추천 매물이 있어 안내해 드립니다. 확인해보시고 피드백 부탁드립니다.","title":"강남 역삼역 역세권 도보 3분 이내 오피스 사옥용 빌딩 매각","shortSummary":"역삼역 도보 5분 거리의 준신축급 대형 건물명 비공개입니다.","dealPoints":"역세권 도보 3분 이내","사옥 최적","cautionPoints":"명도 조율 필요","hiddenInfoNotice":"보증금 및 지번은 인가 후 확인 가능","gateMessage":"G1 등급 등록이 필요합니다.","kakaoText":"강남 역삼역 오피스 빌딩 매각 안내입니다.","exactUnitCandidate":"101호","floor":"1층","areaSqmText":"150㎡","spaceType":"office","depositText":"5000만","monthlyRentText":"400만","maintenanceFeeText":"50만","availableFromText":"즉시입주","leaseTermMonthsText":"24","incentivesText":"렌트프리(무상임대) 2개월","restrictions":,"landlordIdentity":"김성수","currentTenant":"스타트업","vacancyReason":"이전 확장","rentNegotiation":"협의 가능","region":"성수동","areaSqm":150,"deposit":5000,"monthlyRent":400,"maintenanceFee":50,"availableFrom":"즉시입주","leaseTermMonths":24,"incentives":{"렌트프리(무상임대)(무상임대)Months":2,"interiorSupport":"일부 인테리어 지원","freeRentDetail":"렌트프리(무상임대) 2개월 지원"},"shortSummaryLease":"성수역 도보 5분 거리 1층 리테일 상가 매물입니다."}</a:t>
+            </a:r>
+            <a:endParaRPr lang="en-US" sz="1350" dirty="0"/>
+          </a:p>
+        </p:txBody>
+      </p:sp>
+      <p:sp>
+        <p:nvSpPr>
+          <p:cNvPr id="9" name="Shape 7"/>
+          <p:cNvSpPr/>
+          <p:nvPr/>
+        </p:nvSpPr>
+        <p:spPr>
+          <a:xfrm>
+            <a:off x="7604608" y="1371600"/>
+            <a:ext cx="0" cy="4754880"/>
+          </a:xfrm>
+          <a:prstGeom prst="line">
+            <a:avLst/>
+          </a:prstGeom>
+          <a:noFill/>
+          <a:ln w="8890">
             <a:solidFill>
-              <a:srgbClr val="CBD5E0"/>
+              <a:srgbClr val="B98A2E"/>
             </a:solidFill>
             <a:prstDash val="solid"/>
           </a:ln>
@@ -6891,610 +9914,119 @@
       </p:sp>
       <p:sp>
         <p:nvSpPr>
-          <p:cNvPr id="7" name="Shape 5"/>
-          <p:cNvSpPr/>
-          <p:nvPr/>
-        </p:nvSpPr>
-        <p:spPr>
-          <a:xfrm>
-            <a:off x="566928" y="1417320"/>
-            <a:ext cx="3515258" cy="45720"/>
-          </a:xfrm>
-          <a:prstGeom prst="rect">
-            <a:avLst/>
-          </a:prstGeom>
-          <a:solidFill>
-            <a:srgbClr val="B98A2E"/>
-          </a:solidFill>
-          <a:ln/>
-        </p:spPr>
-      </p:sp>
-      <p:sp>
-        <p:nvSpPr>
-          <p:cNvPr id="8" name="Text 6"/>
-          <p:cNvSpPr/>
-          <p:nvPr/>
-        </p:nvSpPr>
-        <p:spPr>
-          <a:xfrm>
-            <a:off x="795528" y="1618488"/>
-            <a:ext cx="3058058" cy="292608"/>
-          </a:xfrm>
-          <a:prstGeom prst="rect">
-            <a:avLst/>
-          </a:prstGeom>
-          <a:noFill/>
-          <a:ln/>
-        </p:spPr>
-        <p:txBody>
-          <a:bodyPr wrap="square" lIns="0" tIns="0" rIns="0" bIns="0" rtlCol="0" anchor="ctr"/>
-          <a:lstStyle/>
-          <a:p>
-            <a:pPr indent="0" marL="0">
-              <a:buNone/>
-            </a:pPr>
-            <a:r>
-              <a:rPr lang="en-US" sz="1350" b="1" dirty="0">
-                <a:solidFill>
-                  <a:srgbClr val="977024"/>
-                </a:solidFill>
-                <a:latin typeface="Pretendard" pitchFamily="34" charset="0"/>
-                <a:ea typeface="Pretendard" pitchFamily="34" charset="-122"/>
-                <a:cs typeface="Pretendard" pitchFamily="34" charset="-120"/>
-              </a:rPr>
-              <a:t>건물 물리적 상태</a:t>
-            </a:r>
-            <a:endParaRPr lang="en-US" sz="1350" dirty="0"/>
-          </a:p>
-        </p:txBody>
-      </p:sp>
-      <p:sp>
-        <p:nvSpPr>
-          <p:cNvPr id="9" name="Text 7"/>
-          <p:cNvSpPr/>
-          <p:nvPr/>
-        </p:nvSpPr>
-        <p:spPr>
-          <a:xfrm>
-            <a:off x="795528" y="1947672"/>
-            <a:ext cx="3058058" cy="365760"/>
-          </a:xfrm>
-          <a:prstGeom prst="rect">
-            <a:avLst/>
-          </a:prstGeom>
-          <a:noFill/>
-          <a:ln/>
-        </p:spPr>
-        <p:txBody>
-          <a:bodyPr wrap="square" lIns="0" tIns="0" rIns="0" bIns="0" rtlCol="0" anchor="ctr">
-            <a:normAutofit/>
-          </a:bodyPr>
-          <a:lstStyle/>
-          <a:p>
-            <a:pPr indent="0" marL="0">
-              <a:buNone/>
-            </a:pPr>
-            <a:r>
-              <a:rPr lang="en-US" sz="1250" b="1" dirty="0">
-                <a:solidFill>
-                  <a:srgbClr val="10161F"/>
-                </a:solidFill>
-                <a:latin typeface="Pretendard" pitchFamily="34" charset="0"/>
-                <a:ea typeface="Pretendard" pitchFamily="34" charset="-122"/>
-                <a:cs typeface="Pretendard" pitchFamily="34" charset="-120"/>
-              </a:rPr>
-              <a:t>준공연도 확인 필요, 구조 확인 필요</a:t>
-            </a:r>
-            <a:endParaRPr lang="en-US" sz="1250" dirty="0"/>
-          </a:p>
-        </p:txBody>
-      </p:sp>
-      <p:sp>
-        <p:nvSpPr>
-          <p:cNvPr id="10" name="Text 8"/>
-          <p:cNvSpPr/>
-          <p:nvPr/>
-        </p:nvSpPr>
-        <p:spPr>
-          <a:xfrm>
-            <a:off x="795528" y="2377440"/>
-            <a:ext cx="3058058" cy="2606040"/>
-          </a:xfrm>
-          <a:prstGeom prst="rect">
-            <a:avLst/>
-          </a:prstGeom>
-          <a:noFill/>
-          <a:ln/>
-        </p:spPr>
-        <p:txBody>
-          <a:bodyPr wrap="square" lIns="0" tIns="0" rIns="0" bIns="0" rtlCol="0" anchor="t">
-            <a:normAutofit/>
-          </a:bodyPr>
-          <a:lstStyle/>
-          <a:p>
-            <a:pPr marL="342900" indent="-342900">
-              <a:lnSpc>
-                <a:spcPct val="125000"/>
-              </a:lnSpc>
-              <a:buSzPct val="100000"/>
-              <a:buChar char="•"/>
-            </a:pPr>
-            <a:r>
-              <a:rPr lang="en-US" sz="1100" dirty="0">
-                <a:solidFill>
-                  <a:srgbClr val="10161F"/>
-                </a:solidFill>
-                <a:latin typeface="Pretendard" pitchFamily="34" charset="0"/>
-                <a:ea typeface="Pretendard" pitchFamily="34" charset="-122"/>
-                <a:cs typeface="Pretendard" pitchFamily="34" charset="-120"/>
-              </a:rPr>
-              <a:t>누수</a:t>
-            </a:r>
-            <a:endParaRPr lang="en-US" sz="1100" dirty="0"/>
-          </a:p>
-          <a:p>
-            <a:pPr marL="342900" indent="-342900">
-              <a:lnSpc>
-                <a:spcPct val="125000"/>
-              </a:lnSpc>
-              <a:spcBef>
-                <a:spcPts val="600"/>
-              </a:spcBef>
-              <a:buSzPct val="100000"/>
-              <a:buChar char="•"/>
-            </a:pPr>
-            <a:r>
-              <a:rPr lang="en-US" sz="1100" dirty="0">
-                <a:solidFill>
-                  <a:srgbClr val="10161F"/>
-                </a:solidFill>
-                <a:latin typeface="Pretendard" pitchFamily="34" charset="0"/>
-                <a:ea typeface="Pretendard" pitchFamily="34" charset="-122"/>
-                <a:cs typeface="Pretendard" pitchFamily="34" charset="-120"/>
-              </a:rPr>
-              <a:t>균열</a:t>
-            </a:r>
-            <a:endParaRPr lang="en-US" sz="1100" dirty="0"/>
-          </a:p>
-          <a:p>
-            <a:pPr marL="342900" indent="-342900">
-              <a:lnSpc>
-                <a:spcPct val="125000"/>
-              </a:lnSpc>
-              <a:spcBef>
-                <a:spcPts val="600"/>
-              </a:spcBef>
-              <a:buSzPct val="100000"/>
-              <a:buChar char="•"/>
-            </a:pPr>
-            <a:r>
-              <a:rPr lang="en-US" sz="1100" dirty="0">
-                <a:solidFill>
-                  <a:srgbClr val="10161F"/>
-                </a:solidFill>
-                <a:latin typeface="Pretendard" pitchFamily="34" charset="0"/>
-                <a:ea typeface="Pretendard" pitchFamily="34" charset="-122"/>
-                <a:cs typeface="Pretendard" pitchFamily="34" charset="-120"/>
-              </a:rPr>
-              <a:t>설비 노후 여부 현장 점검 필요</a:t>
-            </a:r>
-            <a:endParaRPr lang="en-US" sz="1100" dirty="0"/>
-          </a:p>
-        </p:txBody>
-      </p:sp>
-      <p:sp>
-        <p:nvSpPr>
-          <p:cNvPr id="11" name="Shape 9"/>
-          <p:cNvSpPr/>
-          <p:nvPr/>
-        </p:nvSpPr>
-        <p:spPr>
-          <a:xfrm>
-            <a:off x="4338218" y="1417320"/>
-            <a:ext cx="3515258" cy="3657600"/>
+          <p:cNvPr id="10" name="Shape 8"/>
+          <p:cNvSpPr/>
+          <p:nvPr/>
+        </p:nvSpPr>
+        <p:spPr>
+          <a:xfrm>
+            <a:off x="7784287" y="1645920"/>
+            <a:ext cx="3840480" cy="2103120"/>
           </a:xfrm>
           <a:prstGeom prst="roundRect">
             <a:avLst>
-              <a:gd name="adj" fmla="val 1561"/>
+              <a:gd name="adj" fmla="val 2609"/>
             </a:avLst>
           </a:prstGeom>
           <a:solidFill>
-            <a:srgbClr val="F7FAFC"/>
+            <a:srgbClr val="F3EBDA"/>
           </a:solidFill>
-          <a:ln w="6350">
-            <a:solidFill>
-              <a:srgbClr val="CBD5E0"/>
-            </a:solidFill>
-            <a:prstDash val="solid"/>
-          </a:ln>
-        </p:spPr>
-      </p:sp>
-      <p:sp>
-        <p:nvSpPr>
-          <p:cNvPr id="12" name="Shape 10"/>
-          <p:cNvSpPr/>
-          <p:nvPr/>
-        </p:nvSpPr>
-        <p:spPr>
-          <a:xfrm>
-            <a:off x="4338218" y="1417320"/>
-            <a:ext cx="3515258" cy="45720"/>
+          <a:ln/>
+        </p:spPr>
+      </p:sp>
+      <p:sp>
+        <p:nvSpPr>
+          <p:cNvPr id="11" name="Shape 9"/>
+          <p:cNvSpPr/>
+          <p:nvPr/>
+        </p:nvSpPr>
+        <p:spPr>
+          <a:xfrm>
+            <a:off x="7784287" y="1700784"/>
+            <a:ext cx="36576" cy="1993392"/>
           </a:xfrm>
           <a:prstGeom prst="rect">
             <a:avLst/>
           </a:prstGeom>
           <a:solidFill>
-            <a:srgbClr val="B98A2E"/>
+            <a:srgbClr val="977024"/>
           </a:solidFill>
           <a:ln/>
         </p:spPr>
       </p:sp>
       <p:sp>
         <p:nvSpPr>
+          <p:cNvPr id="12" name="Text 10"/>
+          <p:cNvSpPr/>
+          <p:nvPr/>
+        </p:nvSpPr>
+        <p:spPr>
+          <a:xfrm>
+            <a:off x="7967167" y="1755648"/>
+            <a:ext cx="3511296" cy="201168"/>
+          </a:xfrm>
+          <a:prstGeom prst="rect">
+            <a:avLst/>
+          </a:prstGeom>
+          <a:noFill/>
+          <a:ln/>
+        </p:spPr>
+        <p:txBody>
+          <a:bodyPr wrap="square" lIns="0" tIns="0" rIns="0" bIns="0" rtlCol="0" anchor="ctr"/>
+          <a:lstStyle/>
+          <a:p>
+            <a:pPr indent="0" marL="0">
+              <a:buNone/>
+            </a:pPr>
+            <a:endParaRPr lang="en-US" sz="1050" dirty="0"/>
+          </a:p>
+        </p:txBody>
+      </p:sp>
+      <p:sp>
+        <p:nvSpPr>
           <p:cNvPr id="13" name="Text 11"/>
           <p:cNvSpPr/>
           <p:nvPr/>
         </p:nvSpPr>
         <p:spPr>
           <a:xfrm>
-            <a:off x="4566818" y="1618488"/>
-            <a:ext cx="3058058" cy="292608"/>
-          </a:xfrm>
-          <a:prstGeom prst="rect">
-            <a:avLst/>
-          </a:prstGeom>
-          <a:noFill/>
-          <a:ln/>
-        </p:spPr>
-        <p:txBody>
-          <a:bodyPr wrap="square" lIns="0" tIns="0" rIns="0" bIns="0" rtlCol="0" anchor="ctr"/>
+            <a:off x="7967167" y="1975104"/>
+            <a:ext cx="3511296" cy="1700784"/>
+          </a:xfrm>
+          <a:prstGeom prst="rect">
+            <a:avLst/>
+          </a:prstGeom>
+          <a:noFill/>
+          <a:ln/>
+        </p:spPr>
+        <p:txBody>
+          <a:bodyPr wrap="square" lIns="0" tIns="0" rIns="0" bIns="0" rtlCol="0" anchor="t"/>
           <a:lstStyle/>
           <a:p>
             <a:pPr indent="0" marL="0">
-              <a:buNone/>
-            </a:pPr>
-            <a:r>
-              <a:rPr lang="en-US" sz="1350" b="1" dirty="0">
-                <a:solidFill>
-                  <a:srgbClr val="977024"/>
-                </a:solidFill>
-                <a:latin typeface="Pretendard" pitchFamily="34" charset="0"/>
-                <a:ea typeface="Pretendard" pitchFamily="34" charset="-122"/>
-                <a:cs typeface="Pretendard" pitchFamily="34" charset="-120"/>
-              </a:rPr>
-              <a:t>승강기 및 설비</a:t>
-            </a:r>
-            <a:endParaRPr lang="en-US" sz="1350" dirty="0"/>
+              <a:lnSpc>
+                <a:spcPct val="120000"/>
+              </a:lnSpc>
+              <a:buNone/>
+            </a:pPr>
+            <a:r>
+              <a:rPr lang="en-US" sz="930" dirty="0">
+                <a:solidFill>
+                  <a:srgbClr val="10161F"/>
+                </a:solidFill>
+                <a:latin typeface="Pretendard" pitchFamily="34" charset="0"/>
+                <a:ea typeface="Pretendard" pitchFamily="34" charset="-122"/>
+                <a:cs typeface="Pretendard" pitchFamily="34" charset="-120"/>
+              </a:rPr>
+              <a:t>{"ok":true,"mocked":true,"extractedFields":{"area_signal":"역삼","asset_type":"[건물명 비공개]","price_band":"300억","size_signal</a:t>
+            </a:r>
+            <a:endParaRPr lang="en-US" sz="930" dirty="0"/>
           </a:p>
         </p:txBody>
       </p:sp>
       <p:sp>
         <p:nvSpPr>
           <p:cNvPr id="14" name="Text 12"/>
-          <p:cNvSpPr/>
-          <p:nvPr/>
-        </p:nvSpPr>
-        <p:spPr>
-          <a:xfrm>
-            <a:off x="4566818" y="1947672"/>
-            <a:ext cx="3058058" cy="365760"/>
-          </a:xfrm>
-          <a:prstGeom prst="rect">
-            <a:avLst/>
-          </a:prstGeom>
-          <a:noFill/>
-          <a:ln/>
-        </p:spPr>
-        <p:txBody>
-          <a:bodyPr wrap="square" lIns="0" tIns="0" rIns="0" bIns="0" rtlCol="0" anchor="ctr">
-            <a:normAutofit/>
-          </a:bodyPr>
-          <a:lstStyle/>
-          <a:p>
-            <a:pPr indent="0" marL="0">
-              <a:buNone/>
-            </a:pPr>
-            <a:r>
-              <a:rPr lang="en-US" sz="1250" b="1" dirty="0">
-                <a:solidFill>
-                  <a:srgbClr val="10161F"/>
-                </a:solidFill>
-                <a:latin typeface="Pretendard" pitchFamily="34" charset="0"/>
-                <a:ea typeface="Pretendard" pitchFamily="34" charset="-122"/>
-                <a:cs typeface="Pretendard" pitchFamily="34" charset="-120"/>
-              </a:rPr>
-              <a:t>승강기 정보 확인 필요</a:t>
-            </a:r>
-            <a:endParaRPr lang="en-US" sz="1250" dirty="0"/>
-          </a:p>
-        </p:txBody>
-      </p:sp>
-      <p:sp>
-        <p:nvSpPr>
-          <p:cNvPr id="15" name="Text 13"/>
-          <p:cNvSpPr/>
-          <p:nvPr/>
-        </p:nvSpPr>
-        <p:spPr>
-          <a:xfrm>
-            <a:off x="4566818" y="2377440"/>
-            <a:ext cx="3058058" cy="2606040"/>
-          </a:xfrm>
-          <a:prstGeom prst="rect">
-            <a:avLst/>
-          </a:prstGeom>
-          <a:noFill/>
-          <a:ln/>
-        </p:spPr>
-        <p:txBody>
-          <a:bodyPr wrap="square" lIns="0" tIns="0" rIns="0" bIns="0" rtlCol="0" anchor="t">
-            <a:normAutofit/>
-          </a:bodyPr>
-          <a:lstStyle/>
-          <a:p>
-            <a:pPr marL="342900" indent="-342900">
-              <a:lnSpc>
-                <a:spcPct val="125000"/>
-              </a:lnSpc>
-              <a:buSzPct val="100000"/>
-              <a:buChar char="•"/>
-            </a:pPr>
-            <a:r>
-              <a:rPr lang="en-US" sz="1100" dirty="0">
-                <a:solidFill>
-                  <a:srgbClr val="10161F"/>
-                </a:solidFill>
-                <a:latin typeface="Pretendard" pitchFamily="34" charset="0"/>
-                <a:ea typeface="Pretendard" pitchFamily="34" charset="-122"/>
-                <a:cs typeface="Pretendard" pitchFamily="34" charset="-120"/>
-              </a:rPr>
-              <a:t>정기검사 이력, 냉난방 설비 상태 확인 필요</a:t>
-            </a:r>
-            <a:endParaRPr lang="en-US" sz="1100" dirty="0"/>
-          </a:p>
-        </p:txBody>
-      </p:sp>
-      <p:sp>
-        <p:nvSpPr>
-          <p:cNvPr id="16" name="Shape 14"/>
-          <p:cNvSpPr/>
-          <p:nvPr/>
-        </p:nvSpPr>
-        <p:spPr>
-          <a:xfrm>
-            <a:off x="8109509" y="1417320"/>
-            <a:ext cx="3515258" cy="3657600"/>
-          </a:xfrm>
-          <a:prstGeom prst="roundRect">
-            <a:avLst>
-              <a:gd name="adj" fmla="val 1561"/>
-            </a:avLst>
-          </a:prstGeom>
-          <a:solidFill>
-            <a:srgbClr val="F7FAFC"/>
-          </a:solidFill>
-          <a:ln w="6350">
-            <a:solidFill>
-              <a:srgbClr val="CBD5E0"/>
-            </a:solidFill>
-            <a:prstDash val="solid"/>
-          </a:ln>
-        </p:spPr>
-      </p:sp>
-      <p:sp>
-        <p:nvSpPr>
-          <p:cNvPr id="17" name="Shape 15"/>
-          <p:cNvSpPr/>
-          <p:nvPr/>
-        </p:nvSpPr>
-        <p:spPr>
-          <a:xfrm>
-            <a:off x="8109509" y="1417320"/>
-            <a:ext cx="3515258" cy="45720"/>
-          </a:xfrm>
-          <a:prstGeom prst="rect">
-            <a:avLst/>
-          </a:prstGeom>
-          <a:solidFill>
-            <a:srgbClr val="B98A2E"/>
-          </a:solidFill>
-          <a:ln/>
-        </p:spPr>
-      </p:sp>
-      <p:sp>
-        <p:nvSpPr>
-          <p:cNvPr id="18" name="Text 16"/>
-          <p:cNvSpPr/>
-          <p:nvPr/>
-        </p:nvSpPr>
-        <p:spPr>
-          <a:xfrm>
-            <a:off x="8338109" y="1618488"/>
-            <a:ext cx="3058058" cy="292608"/>
-          </a:xfrm>
-          <a:prstGeom prst="rect">
-            <a:avLst/>
-          </a:prstGeom>
-          <a:noFill/>
-          <a:ln/>
-        </p:spPr>
-        <p:txBody>
-          <a:bodyPr wrap="square" lIns="0" tIns="0" rIns="0" bIns="0" rtlCol="0" anchor="ctr"/>
-          <a:lstStyle/>
-          <a:p>
-            <a:pPr indent="0" marL="0">
-              <a:buNone/>
-            </a:pPr>
-            <a:r>
-              <a:rPr lang="en-US" sz="1350" b="1" dirty="0">
-                <a:solidFill>
-                  <a:srgbClr val="977024"/>
-                </a:solidFill>
-                <a:latin typeface="Pretendard" pitchFamily="34" charset="0"/>
-                <a:ea typeface="Pretendard" pitchFamily="34" charset="-122"/>
-                <a:cs typeface="Pretendard" pitchFamily="34" charset="-120"/>
-              </a:rPr>
-              <a:t>임차인 이탈 위험</a:t>
-            </a:r>
-            <a:endParaRPr lang="en-US" sz="1350" dirty="0"/>
-          </a:p>
-        </p:txBody>
-      </p:sp>
-      <p:sp>
-        <p:nvSpPr>
-          <p:cNvPr id="19" name="Text 17"/>
-          <p:cNvSpPr/>
-          <p:nvPr/>
-        </p:nvSpPr>
-        <p:spPr>
-          <a:xfrm>
-            <a:off x="8338109" y="1947672"/>
-            <a:ext cx="3058058" cy="365760"/>
-          </a:xfrm>
-          <a:prstGeom prst="rect">
-            <a:avLst/>
-          </a:prstGeom>
-          <a:noFill/>
-          <a:ln/>
-        </p:spPr>
-        <p:txBody>
-          <a:bodyPr wrap="square" lIns="0" tIns="0" rIns="0" bIns="0" rtlCol="0" anchor="ctr">
-            <a:normAutofit/>
-          </a:bodyPr>
-          <a:lstStyle/>
-          <a:p>
-            <a:pPr indent="0" marL="0">
-              <a:buNone/>
-            </a:pPr>
-            <a:r>
-              <a:rPr lang="en-US" sz="1250" b="1" dirty="0">
-                <a:solidFill>
-                  <a:srgbClr val="10161F"/>
-                </a:solidFill>
-                <a:latin typeface="Pretendard" pitchFamily="34" charset="0"/>
-                <a:ea typeface="Pretendard" pitchFamily="34" charset="-122"/>
-                <a:cs typeface="Pretendard" pitchFamily="34" charset="-120"/>
-              </a:rPr>
-              <a:t>임대차 계약 현황 LOI 접수 후 열람</a:t>
-            </a:r>
-            <a:endParaRPr lang="en-US" sz="1250" dirty="0"/>
-          </a:p>
-        </p:txBody>
-      </p:sp>
-      <p:sp>
-        <p:nvSpPr>
-          <p:cNvPr id="20" name="Text 18"/>
-          <p:cNvSpPr/>
-          <p:nvPr/>
-        </p:nvSpPr>
-        <p:spPr>
-          <a:xfrm>
-            <a:off x="8338109" y="2377440"/>
-            <a:ext cx="3058058" cy="2606040"/>
-          </a:xfrm>
-          <a:prstGeom prst="rect">
-            <a:avLst/>
-          </a:prstGeom>
-          <a:noFill/>
-          <a:ln/>
-        </p:spPr>
-        <p:txBody>
-          <a:bodyPr wrap="square" lIns="0" tIns="0" rIns="0" bIns="0" rtlCol="0" anchor="t">
-            <a:normAutofit/>
-          </a:bodyPr>
-          <a:lstStyle/>
-          <a:p>
-            <a:pPr marL="342900" indent="-342900">
-              <a:lnSpc>
-                <a:spcPct val="125000"/>
-              </a:lnSpc>
-              <a:buSzPct val="100000"/>
-              <a:buChar char="•"/>
-            </a:pPr>
-            <a:r>
-              <a:rPr lang="en-US" sz="1100" dirty="0">
-                <a:solidFill>
-                  <a:srgbClr val="10161F"/>
-                </a:solidFill>
-                <a:latin typeface="Pretendard" pitchFamily="34" charset="0"/>
-                <a:ea typeface="Pretendard" pitchFamily="34" charset="-122"/>
-                <a:cs typeface="Pretendard" pitchFamily="34" charset="-120"/>
-              </a:rPr>
-              <a:t>잔여 계약기간(WALE), 임차인 신용도 확인 필요</a:t>
-            </a:r>
-            <a:endParaRPr lang="en-US" sz="1100" dirty="0"/>
-          </a:p>
-        </p:txBody>
-      </p:sp>
-      <p:sp>
-        <p:nvSpPr>
-          <p:cNvPr id="21" name="Shape 19"/>
-          <p:cNvSpPr/>
-          <p:nvPr/>
-        </p:nvSpPr>
-        <p:spPr>
-          <a:xfrm>
-            <a:off x="566928" y="5193792"/>
-            <a:ext cx="11057839" cy="621792"/>
-          </a:xfrm>
-          <a:prstGeom prst="roundRect">
-            <a:avLst>
-              <a:gd name="adj" fmla="val 8824"/>
-            </a:avLst>
-          </a:prstGeom>
-          <a:solidFill>
-            <a:srgbClr val="F7FAFC"/>
-          </a:solidFill>
-          <a:ln w="6350">
-            <a:solidFill>
-              <a:srgbClr val="CBD5E0"/>
-            </a:solidFill>
-            <a:prstDash val="solid"/>
-          </a:ln>
-        </p:spPr>
-      </p:sp>
-      <p:sp>
-        <p:nvSpPr>
-          <p:cNvPr id="22" name="Text 20"/>
-          <p:cNvSpPr/>
-          <p:nvPr/>
-        </p:nvSpPr>
-        <p:spPr>
-          <a:xfrm>
-            <a:off x="795528" y="5193792"/>
-            <a:ext cx="10600639" cy="621792"/>
-          </a:xfrm>
-          <a:prstGeom prst="rect">
-            <a:avLst/>
-          </a:prstGeom>
-          <a:noFill/>
-          <a:ln/>
-        </p:spPr>
-        <p:txBody>
-          <a:bodyPr wrap="square" lIns="0" tIns="0" rIns="0" bIns="0" rtlCol="0" anchor="ctr"/>
-          <a:lstStyle/>
-          <a:p>
-            <a:pPr indent="0" marL="0">
-              <a:buNone/>
-            </a:pPr>
-            <a:r>
-              <a:rPr lang="en-US" sz="1100" dirty="0">
-                <a:solidFill>
-                  <a:srgbClr val="10161F"/>
-                </a:solidFill>
-                <a:latin typeface="Pretendard" pitchFamily="34" charset="0"/>
-                <a:ea typeface="Pretendard" pitchFamily="34" charset="-122"/>
-                <a:cs typeface="Pretendard" pitchFamily="34" charset="-120"/>
-              </a:rPr>
-              <a:t>※ 본 리스크 체크는 공부 및 브로커 확인 기반이며, 매수 전 전문 실사팀(변호사/건축사)을 통한 정밀 실사가 필요합니다.</a:t>
-            </a:r>
-            <a:endParaRPr lang="en-US" sz="1100" dirty="0"/>
-          </a:p>
-        </p:txBody>
-      </p:sp>
-      <p:sp>
-        <p:nvSpPr>
-          <p:cNvPr id="23" name="Text 21"/>
           <p:cNvSpPr/>
           <p:nvPr/>
         </p:nvSpPr>
@@ -7533,7 +10065,7 @@
       </p:sp>
       <p:sp>
         <p:nvSpPr>
-          <p:cNvPr id="24" name="Text 22"/>
+          <p:cNvPr id="15" name="Text 13"/>
           <p:cNvSpPr/>
           <p:nvPr/>
         </p:nvSpPr>
@@ -7581,6 +10113,13 @@
 <file path=ppt/slides/slide8.xml><?xml version="1.0" encoding="utf-8"?>
 <p:sld xmlns:a="http://schemas.openxmlformats.org/drawingml/2006/main" xmlns:r="http://schemas.openxmlformats.org/officeDocument/2006/relationships" xmlns:p="http://schemas.openxmlformats.org/presentationml/2006/main">
   <p:cSld name="Slide 8">
+    <p:bg>
+      <p:bgPr>
+        <a:solidFill>
+          <a:srgbClr val="FFFFFF"/>
+        </a:solidFill>
+      </p:bgPr>
+    </p:bg>
     <p:spTree>
       <p:nvGrpSpPr>
         <p:cNvPr id="1" name=""/>
@@ -7687,7 +10226,7 @@
                 <a:ea typeface="Arial" pitchFamily="34" charset="-122"/>
                 <a:cs typeface="Arial" pitchFamily="34" charset="-120"/>
               </a:rPr>
-              <a:t>Checklist</a:t>
+              <a:t>Price</a:t>
             </a:r>
             <a:endParaRPr lang="en-US" sz="950" dirty="0"/>
           </a:p>
@@ -7726,7 +10265,7 @@
                 <a:ea typeface="Pretendard" pitchFamily="34" charset="-122"/>
                 <a:cs typeface="Pretendard" pitchFamily="34" charset="-120"/>
               </a:rPr>
-              <a:t>섹션 상세</a:t>
+              <a:t>적정 가격</a:t>
             </a:r>
             <a:endParaRPr lang="en-US" sz="2300" dirty="0"/>
           </a:p>
@@ -7740,23 +10279,34 @@
         </p:nvSpPr>
         <p:spPr>
           <a:xfrm>
-            <a:off x="566928" y="1517904"/>
-            <a:ext cx="6492240" cy="274320"/>
-          </a:xfrm>
-          <a:prstGeom prst="rect">
-            <a:avLst/>
-          </a:prstGeom>
-          <a:noFill/>
-          <a:ln/>
-        </p:spPr>
-        <p:txBody>
-          <a:bodyPr wrap="square" rtlCol="0" anchor="ctr"/>
+            <a:off x="566928" y="1371600"/>
+            <a:ext cx="6858000" cy="237744"/>
+          </a:xfrm>
+          <a:prstGeom prst="rect">
+            <a:avLst/>
+          </a:prstGeom>
+          <a:noFill/>
+          <a:ln/>
+        </p:spPr>
+        <p:txBody>
+          <a:bodyPr wrap="square" lIns="0" tIns="0" rIns="0" bIns="0" rtlCol="0" anchor="ctr"/>
           <a:lstStyle/>
           <a:p>
             <a:pPr indent="0" marL="0">
               <a:buNone/>
             </a:pPr>
-            <a:endParaRPr lang="en-US" sz="1400" dirty="0"/>
+            <a:r>
+              <a:rPr lang="en-US" sz="1100" b="1" dirty="0">
+                <a:solidFill>
+                  <a:srgbClr val="10161F"/>
+                </a:solidFill>
+                <a:latin typeface="Pretendard" pitchFamily="34" charset="0"/>
+                <a:ea typeface="Pretendard" pitchFamily="34" charset="-122"/>
+                <a:cs typeface="Pretendard" pitchFamily="34" charset="-120"/>
+              </a:rPr>
+              <a:t>건축물 개요 및 물리 스펙</a:t>
+            </a:r>
+            <a:endParaRPr lang="en-US" sz="1100" dirty="0"/>
           </a:p>
         </p:txBody>
       </p:sp>
@@ -7768,29 +10318,220 @@
         </p:nvSpPr>
         <p:spPr>
           <a:xfrm>
-            <a:off x="566928" y="1874520"/>
-            <a:ext cx="6492240" cy="182880"/>
-          </a:xfrm>
-          <a:prstGeom prst="rect">
-            <a:avLst/>
-          </a:prstGeom>
-          <a:noFill/>
-          <a:ln/>
-        </p:spPr>
-        <p:txBody>
-          <a:bodyPr wrap="square" rtlCol="0" anchor="ctr"/>
+            <a:off x="566928" y="1645920"/>
+            <a:ext cx="2606040" cy="438912"/>
+          </a:xfrm>
+          <a:prstGeom prst="rect">
+            <a:avLst/>
+          </a:prstGeom>
+          <a:noFill/>
+          <a:ln/>
+        </p:spPr>
+        <p:txBody>
+          <a:bodyPr wrap="square" lIns="0" tIns="0" rIns="0" bIns="0" rtlCol="0" anchor="ctr"/>
           <a:lstStyle/>
           <a:p>
             <a:pPr indent="0" marL="0">
-              <a:buNone/>
-            </a:pPr>
-            <a:endParaRPr lang="en-US" sz="900" dirty="0"/>
+              <a:lnSpc>
+                <a:spcPct val="120000"/>
+              </a:lnSpc>
+              <a:buNone/>
+            </a:pPr>
+            <a:r>
+              <a:rPr lang="en-US" sz="1350" dirty="0">
+                <a:solidFill>
+                  <a:srgbClr val="718096"/>
+                </a:solidFill>
+                <a:latin typeface="Pretendard" pitchFamily="34" charset="0"/>
+                <a:ea typeface="Pretendard" pitchFamily="34" charset="-122"/>
+                <a:cs typeface="Pretendard" pitchFamily="34" charset="-120"/>
+              </a:rPr>
+              <a:t>{"ok"</a:t>
+            </a:r>
+            <a:endParaRPr lang="en-US" sz="1350" dirty="0"/>
           </a:p>
         </p:txBody>
       </p:sp>
       <p:sp>
         <p:nvSpPr>
           <p:cNvPr id="8" name="Text 6"/>
+          <p:cNvSpPr/>
+          <p:nvPr/>
+        </p:nvSpPr>
+        <p:spPr>
+          <a:xfrm>
+            <a:off x="3172968" y="1645920"/>
+            <a:ext cx="4251960" cy="438912"/>
+          </a:xfrm>
+          <a:prstGeom prst="rect">
+            <a:avLst/>
+          </a:prstGeom>
+          <a:noFill/>
+          <a:ln/>
+        </p:spPr>
+        <p:txBody>
+          <a:bodyPr wrap="square" lIns="0" tIns="0" rIns="0" bIns="0" rtlCol="0" anchor="ctr"/>
+          <a:lstStyle/>
+          <a:p>
+            <a:pPr indent="0" marL="0">
+              <a:lnSpc>
+                <a:spcPct val="120000"/>
+              </a:lnSpc>
+              <a:buNone/>
+            </a:pPr>
+            <a:r>
+              <a:rPr lang="en-US" sz="1350" b="1" dirty="0">
+                <a:solidFill>
+                  <a:srgbClr val="10161F"/>
+                </a:solidFill>
+                <a:latin typeface="Pretendard" pitchFamily="34" charset="0"/>
+                <a:ea typeface="Pretendard" pitchFamily="34" charset="-122"/>
+                <a:cs typeface="Pretendard" pitchFamily="34" charset="-120"/>
+              </a:rPr>
+              <a:t>true,"mocked":true,"extractedFields":{"area_signal":"역삼","asset_type":"건물명 비공개","price_band":"300억","size_signal":"3000평(약 9917.4㎡)"},"extractedFacts":{"region":"역삼","exactAddressCandidate":"역삼동 742-1","assetType":"건물명 비공개","priceText":"300억","sizeText":"3000평(약 9917.4㎡)","currentUse":"오피스","currentUseSignal":"근린생활시설","leaseSignal":"임대중","vacancySignal":"공실없음","tenantNames":"쿠팡","네이버","unitRentTexts":"301호: 1500만","sellerMotivationText":"자산 효율화","brokerNotes":"역세권 도보 3분 이내 매물"},"detectedSensitiveFields":"exact_address","tenant_name","ambiguousFields":,"warnings":,"areaSignal":"역삼","assetType":"건물명 비공개","priceBand":"300억","sizeSignal":"3000평(약 9917.4㎡)","dealType":"매각","buildingName":"역삼 건물명 비공개","exactAddress":"역삼동 742-1","totalFloorArea":9917.3,"buildYear":2015,"currentUseSignal":"근린생활시설","vacancySignal":"공실 없음","fitSummary":"역세권 도보 3분 이내 근생 빌딩으로 시행/사옥 매입에 최적화","cautionSummary":"주요 임차인 만기 조율 필요","hiddenFields":"exact_address","seller_motivation","confidence":{"areaSignal":"confirmed","assetType":"confirmed","priceBand":"ai_hypothesis","fitSummary":"ai_hypothesis"},"missingData":"sizeSignal","boundaryNote":"본 자료는 실거래 통계 기반 참고치입니다.","buyerType":"법인 사옥형","budgetRange":{"min":50,"max":80,"display":"50억~80억"},"preferredRegions":"강남","성수","assetTypes":"건물명 비공개","사옥용","purchasePurpose":"사옥용 매입","mustHave":"역세권 도보 3분 이내","주차","niceToHave":"테라스","루프탑","riskTolerance":"medium","financingNote":"자본금 50% 준비","missingQuestions":"구체적인 입주 시기가 언제인가요?","선호하는 수익률이 있나요?","privacyNotes":"연락처 비공개","fitReasons":"매수자 예산(50-80억)에 부합하는 매물입니다.","요청하신 성수/강남 권역에 해당합니다.","cautionReasons":"요청한 용도와 달리 명도 협의가 다소 필요합니다.","recommendedNextAction":"현장 답사 제안","kakaoMessage":"안녕하세요! 요청하신 조건에 부합하는 추천 매물이 있어 안내해 드립니다. 확인해보시고 피드백 부탁드립니다.","title":"강남 역삼역 역세권 도보 3분 이내 오피스 사옥용 빌딩 매각","shortSummary":"역삼역 도보 5분 거리의 준신축급 대형 건물명 비공개입니다.","dealPoints":"역세권 도보 3분 이내","사옥 최적","cautionPoints":"명도 조율 필요","hiddenInfoNotice":"보증금 및 지번은 인가 후 확인 가능","gateMessage":"G1 등급 등록이 필요합니다.","kakaoText":"강남 역삼역 오피스 빌딩 매각 안내입니다.","exactUnitCandidate":"101호","floor":"1층","areaSqmText":"150㎡","spaceType":"office","depositText":"5000만","monthlyRentText":"400만","maintenanceFeeText":"50만","availableFromText":"즉시입주","leaseTermMonthsText":"24","incentivesText":"렌트프리(무상임대) 2개월","restrictions":,"landlordIdentity":"김성수","currentTenant":"스타트업","vacancyReason":"이전 확장","rentNegotiation":"협의 가능","region":"성수동","areaSqm":150,"deposit":5000,"monthlyRent":400,"maintenanceFee":50,"availableFrom":"즉시입주","leaseTermMonths":24,"incentives":{"렌트프리(무상임대)(무상임대)Months":2,"interiorSupport":"일부 인테리어 지원","freeRentDetail":"렌트프리(무상임대) 2개월 지원"},"shortSummaryLease":"성수역 도보 5분 거리 1층 리테일 상가 매물입니다."}</a:t>
+            </a:r>
+            <a:endParaRPr lang="en-US" sz="1350" dirty="0"/>
+          </a:p>
+        </p:txBody>
+      </p:sp>
+      <p:sp>
+        <p:nvSpPr>
+          <p:cNvPr id="9" name="Shape 7"/>
+          <p:cNvSpPr/>
+          <p:nvPr/>
+        </p:nvSpPr>
+        <p:spPr>
+          <a:xfrm>
+            <a:off x="7604608" y="1371600"/>
+            <a:ext cx="0" cy="4754880"/>
+          </a:xfrm>
+          <a:prstGeom prst="line">
+            <a:avLst/>
+          </a:prstGeom>
+          <a:noFill/>
+          <a:ln w="8890">
+            <a:solidFill>
+              <a:srgbClr val="B98A2E"/>
+            </a:solidFill>
+            <a:prstDash val="solid"/>
+          </a:ln>
+        </p:spPr>
+      </p:sp>
+      <p:sp>
+        <p:nvSpPr>
+          <p:cNvPr id="10" name="Shape 8"/>
+          <p:cNvSpPr/>
+          <p:nvPr/>
+        </p:nvSpPr>
+        <p:spPr>
+          <a:xfrm>
+            <a:off x="7784287" y="1645920"/>
+            <a:ext cx="3840480" cy="2103120"/>
+          </a:xfrm>
+          <a:prstGeom prst="roundRect">
+            <a:avLst>
+              <a:gd name="adj" fmla="val 2609"/>
+            </a:avLst>
+          </a:prstGeom>
+          <a:solidFill>
+            <a:srgbClr val="F3EBDA"/>
+          </a:solidFill>
+          <a:ln/>
+        </p:spPr>
+      </p:sp>
+      <p:sp>
+        <p:nvSpPr>
+          <p:cNvPr id="11" name="Shape 9"/>
+          <p:cNvSpPr/>
+          <p:nvPr/>
+        </p:nvSpPr>
+        <p:spPr>
+          <a:xfrm>
+            <a:off x="7784287" y="1700784"/>
+            <a:ext cx="36576" cy="1993392"/>
+          </a:xfrm>
+          <a:prstGeom prst="rect">
+            <a:avLst/>
+          </a:prstGeom>
+          <a:solidFill>
+            <a:srgbClr val="977024"/>
+          </a:solidFill>
+          <a:ln/>
+        </p:spPr>
+      </p:sp>
+      <p:sp>
+        <p:nvSpPr>
+          <p:cNvPr id="12" name="Text 10"/>
+          <p:cNvSpPr/>
+          <p:nvPr/>
+        </p:nvSpPr>
+        <p:spPr>
+          <a:xfrm>
+            <a:off x="7967167" y="1755648"/>
+            <a:ext cx="3511296" cy="201168"/>
+          </a:xfrm>
+          <a:prstGeom prst="rect">
+            <a:avLst/>
+          </a:prstGeom>
+          <a:noFill/>
+          <a:ln/>
+        </p:spPr>
+        <p:txBody>
+          <a:bodyPr wrap="square" lIns="0" tIns="0" rIns="0" bIns="0" rtlCol="0" anchor="ctr"/>
+          <a:lstStyle/>
+          <a:p>
+            <a:pPr indent="0" marL="0">
+              <a:buNone/>
+            </a:pPr>
+            <a:endParaRPr lang="en-US" sz="1050" dirty="0"/>
+          </a:p>
+        </p:txBody>
+      </p:sp>
+      <p:sp>
+        <p:nvSpPr>
+          <p:cNvPr id="13" name="Text 11"/>
+          <p:cNvSpPr/>
+          <p:nvPr/>
+        </p:nvSpPr>
+        <p:spPr>
+          <a:xfrm>
+            <a:off x="7967167" y="1975104"/>
+            <a:ext cx="3511296" cy="1700784"/>
+          </a:xfrm>
+          <a:prstGeom prst="rect">
+            <a:avLst/>
+          </a:prstGeom>
+          <a:noFill/>
+          <a:ln/>
+        </p:spPr>
+        <p:txBody>
+          <a:bodyPr wrap="square" lIns="0" tIns="0" rIns="0" bIns="0" rtlCol="0" anchor="t"/>
+          <a:lstStyle/>
+          <a:p>
+            <a:pPr indent="0" marL="0">
+              <a:lnSpc>
+                <a:spcPct val="120000"/>
+              </a:lnSpc>
+              <a:buNone/>
+            </a:pPr>
+            <a:r>
+              <a:rPr lang="en-US" sz="930" dirty="0">
+                <a:solidFill>
+                  <a:srgbClr val="10161F"/>
+                </a:solidFill>
+                <a:latin typeface="Pretendard" pitchFamily="34" charset="0"/>
+                <a:ea typeface="Pretendard" pitchFamily="34" charset="-122"/>
+                <a:cs typeface="Pretendard" pitchFamily="34" charset="-120"/>
+              </a:rPr>
+              <a:t>{"ok":true,"mocked":true,"extractedFields":{"area_signal":"역삼","asset_type":"[건물명 비공개]","price_band":"300억","size_signal</a:t>
+            </a:r>
+            <a:endParaRPr lang="en-US" sz="930" dirty="0"/>
+          </a:p>
+        </p:txBody>
+      </p:sp>
+      <p:sp>
+        <p:nvSpPr>
+          <p:cNvPr id="14" name="Text 12"/>
           <p:cNvSpPr/>
           <p:nvPr/>
         </p:nvSpPr>
@@ -7829,7 +10570,7 @@
       </p:sp>
       <p:sp>
         <p:nvSpPr>
-          <p:cNvPr id="9" name="Text 7"/>
+          <p:cNvPr id="15" name="Text 13"/>
           <p:cNvSpPr/>
           <p:nvPr/>
         </p:nvSpPr>
@@ -7990,7 +10731,7 @@
                 <a:ea typeface="Arial" pitchFamily="34" charset="-122"/>
                 <a:cs typeface="Arial" pitchFamily="34" charset="-120"/>
               </a:rPr>
-              <a:t>Process</a:t>
+              <a:t>Capital</a:t>
             </a:r>
             <a:endParaRPr lang="en-US" sz="950" dirty="0"/>
           </a:p>
@@ -8029,7 +10770,7 @@
                 <a:ea typeface="Pretendard" pitchFamily="34" charset="-122"/>
                 <a:cs typeface="Pretendard" pitchFamily="34" charset="-120"/>
               </a:rPr>
-              <a:t>검토 후 다음 단계는 무엇인가</a:t>
+              <a:t>투자 및 자본 조달 구조 분석</a:t>
             </a:r>
             <a:endParaRPr lang="en-US" sz="2300" dirty="0"/>
           </a:p>
@@ -8043,12 +10784,12 @@
         </p:nvSpPr>
         <p:spPr>
           <a:xfrm>
-            <a:off x="566928" y="1572768"/>
-            <a:ext cx="2490140" cy="3200400"/>
+            <a:off x="566928" y="1417320"/>
+            <a:ext cx="5391760" cy="4389120"/>
           </a:xfrm>
           <a:prstGeom prst="roundRect">
             <a:avLst>
-              <a:gd name="adj" fmla="val 2203"/>
+              <a:gd name="adj" fmla="val 1250"/>
             </a:avLst>
           </a:prstGeom>
           <a:solidFill>
@@ -8064,23 +10805,42 @@
       </p:sp>
       <p:sp>
         <p:nvSpPr>
-          <p:cNvPr id="7" name="Shape 5"/>
-          <p:cNvSpPr/>
-          <p:nvPr/>
-        </p:nvSpPr>
-        <p:spPr>
-          <a:xfrm>
-            <a:off x="786384" y="1792224"/>
-            <a:ext cx="438912" cy="438912"/>
-          </a:xfrm>
-          <a:prstGeom prst="ellipse">
-            <a:avLst/>
-          </a:prstGeom>
-          <a:solidFill>
-            <a:srgbClr val="B98A2E"/>
-          </a:solidFill>
-          <a:ln/>
-        </p:spPr>
+          <p:cNvPr id="7" name="Text 5"/>
+          <p:cNvSpPr/>
+          <p:nvPr/>
+        </p:nvSpPr>
+        <p:spPr>
+          <a:xfrm>
+            <a:off x="795528" y="1618488"/>
+            <a:ext cx="4934560" cy="320040"/>
+          </a:xfrm>
+          <a:prstGeom prst="rect">
+            <a:avLst/>
+          </a:prstGeom>
+          <a:noFill/>
+          <a:ln/>
+        </p:spPr>
+        <p:txBody>
+          <a:bodyPr wrap="square" lIns="0" tIns="0" rIns="0" bIns="0" rtlCol="0" anchor="ctr"/>
+          <a:lstStyle/>
+          <a:p>
+            <a:pPr indent="0" marL="0">
+              <a:buNone/>
+            </a:pPr>
+            <a:r>
+              <a:rPr lang="en-US" sz="1350" b="1" dirty="0">
+                <a:solidFill>
+                  <a:srgbClr val="977024"/>
+                </a:solidFill>
+                <a:latin typeface="Pretendard" pitchFamily="34" charset="0"/>
+                <a:ea typeface="Pretendard" pitchFamily="34" charset="-122"/>
+                <a:cs typeface="Pretendard" pitchFamily="34" charset="-120"/>
+              </a:rPr>
+              <a:t>1. 총취득원가 및 자기자본 소요</a:t>
+            </a:r>
+            <a:endParaRPr lang="en-US" sz="1350" dirty="0"/>
+          </a:p>
+        </p:txBody>
       </p:sp>
       <p:sp>
         <p:nvSpPr>
@@ -8090,34 +10850,37 @@
         </p:nvSpPr>
         <p:spPr>
           <a:xfrm>
-            <a:off x="786384" y="1792224"/>
-            <a:ext cx="438912" cy="438912"/>
-          </a:xfrm>
-          <a:prstGeom prst="rect">
-            <a:avLst/>
-          </a:prstGeom>
-          <a:noFill/>
-          <a:ln/>
-        </p:spPr>
-        <p:txBody>
-          <a:bodyPr wrap="square" lIns="0" tIns="0" rIns="0" bIns="0" rtlCol="0" anchor="ctr"/>
-          <a:lstStyle/>
-          <a:p>
-            <a:pPr algn="ctr" indent="0" marL="0">
-              <a:buNone/>
-            </a:pPr>
-            <a:r>
-              <a:rPr lang="en-US" sz="1400" b="1" dirty="0">
-                <a:solidFill>
-                  <a:srgbClr val="FFFFFF"/>
-                </a:solidFill>
-                <a:latin typeface="Arial" pitchFamily="34" charset="0"/>
-                <a:ea typeface="Arial" pitchFamily="34" charset="-122"/>
-                <a:cs typeface="Arial" pitchFamily="34" charset="-120"/>
-              </a:rPr>
-              <a:t>01</a:t>
-            </a:r>
-            <a:endParaRPr lang="en-US" sz="1400" dirty="0"/>
+            <a:off x="795528" y="2011680"/>
+            <a:ext cx="1875133" cy="475488"/>
+          </a:xfrm>
+          <a:prstGeom prst="rect">
+            <a:avLst/>
+          </a:prstGeom>
+          <a:noFill/>
+          <a:ln/>
+        </p:spPr>
+        <p:txBody>
+          <a:bodyPr wrap="square" lIns="0" tIns="0" rIns="0" bIns="0" rtlCol="0" anchor="ctr"/>
+          <a:lstStyle/>
+          <a:p>
+            <a:pPr indent="0" marL="0">
+              <a:lnSpc>
+                <a:spcPct val="120000"/>
+              </a:lnSpc>
+              <a:buNone/>
+            </a:pPr>
+            <a:r>
+              <a:rPr lang="en-US" sz="1150" dirty="0">
+                <a:solidFill>
+                  <a:srgbClr val="718096"/>
+                </a:solidFill>
+                <a:latin typeface="Pretendard" pitchFamily="34" charset="0"/>
+                <a:ea typeface="Pretendard" pitchFamily="34" charset="-122"/>
+                <a:cs typeface="Pretendard" pitchFamily="34" charset="-120"/>
+              </a:rPr>
+              <a:t>매매 희망가 (A)</a:t>
+            </a:r>
+            <a:endParaRPr lang="en-US" sz="1150" dirty="0"/>
           </a:p>
         </p:txBody>
       </p:sp>
@@ -8129,24 +10892,27 @@
         </p:nvSpPr>
         <p:spPr>
           <a:xfrm>
-            <a:off x="786384" y="2304288"/>
-            <a:ext cx="2051228" cy="365760"/>
-          </a:xfrm>
-          <a:prstGeom prst="rect">
-            <a:avLst/>
-          </a:prstGeom>
-          <a:noFill/>
-          <a:ln/>
-        </p:spPr>
-        <p:txBody>
-          <a:bodyPr wrap="square" rtlCol="0" anchor="ctr"/>
+            <a:off x="2670661" y="2011680"/>
+            <a:ext cx="3059427" cy="475488"/>
+          </a:xfrm>
+          <a:prstGeom prst="rect">
+            <a:avLst/>
+          </a:prstGeom>
+          <a:noFill/>
+          <a:ln/>
+        </p:spPr>
+        <p:txBody>
+          <a:bodyPr wrap="square" lIns="0" tIns="0" rIns="0" bIns="0" rtlCol="0" anchor="ctr"/>
           <a:lstStyle/>
           <a:p>
             <a:pPr indent="0" marL="0">
-              <a:buNone/>
-            </a:pPr>
-            <a:r>
-              <a:rPr lang="en-US" sz="1600" b="1" dirty="0">
+              <a:lnSpc>
+                <a:spcPct val="120000"/>
+              </a:lnSpc>
+              <a:buNone/>
+            </a:pPr>
+            <a:r>
+              <a:rPr lang="en-US" sz="1150" b="1" dirty="0">
                 <a:solidFill>
                   <a:srgbClr val="10161F"/>
                 </a:solidFill>
@@ -8154,71 +10920,30 @@
                 <a:ea typeface="Pretendard" pitchFamily="34" charset="-122"/>
                 <a:cs typeface="Pretendard" pitchFamily="34" charset="-120"/>
               </a:rPr>
-              <a:t>1단계</a:t>
-            </a:r>
-            <a:endParaRPr lang="en-US" sz="1600" dirty="0"/>
-          </a:p>
-        </p:txBody>
-      </p:sp>
-      <p:sp>
-        <p:nvSpPr>
-          <p:cNvPr id="10" name="Text 8"/>
-          <p:cNvSpPr/>
-          <p:nvPr/>
-        </p:nvSpPr>
-        <p:spPr>
-          <a:xfrm>
-            <a:off x="786384" y="2761488"/>
-            <a:ext cx="2051228" cy="1828800"/>
-          </a:xfrm>
-          <a:prstGeom prst="rect">
-            <a:avLst/>
-          </a:prstGeom>
-          <a:noFill/>
-          <a:ln/>
-        </p:spPr>
-        <p:txBody>
-          <a:bodyPr wrap="square" rtlCol="0" anchor="t"/>
-          <a:lstStyle/>
-          <a:p>
-            <a:pPr indent="0" marL="0">
-              <a:buNone/>
-            </a:pPr>
-            <a:r>
-              <a:rPr lang="en-US" sz="1100" dirty="0">
-                <a:solidFill>
-                  <a:srgbClr val="10161F"/>
-                </a:solidFill>
-                <a:latin typeface="Pretendard" pitchFamily="34" charset="0"/>
-                <a:ea typeface="Pretendard" pitchFamily="34" charset="-122"/>
-                <a:cs typeface="Pretendard" pitchFamily="34" charset="-120"/>
-              </a:rPr>
-              <a:t>초기 관심 표명 → 담당자 연락</a:t>
-            </a:r>
-            <a:endParaRPr lang="en-US" sz="1100" dirty="0"/>
-          </a:p>
-        </p:txBody>
-      </p:sp>
-      <p:sp>
-        <p:nvSpPr>
-          <p:cNvPr id="11" name="Shape 9"/>
-          <p:cNvSpPr/>
-          <p:nvPr/>
-        </p:nvSpPr>
-        <p:spPr>
-          <a:xfrm>
-            <a:off x="3148508" y="3035808"/>
-            <a:ext cx="182880" cy="274320"/>
-          </a:xfrm>
-          <a:prstGeom prst="rightArrow">
-            <a:avLst/>
-          </a:prstGeom>
-          <a:solidFill>
-            <a:srgbClr val="CBD5E0"/>
-          </a:solidFill>
-          <a:ln w="6350">
+              <a:t>98.0억 원</a:t>
+            </a:r>
+            <a:endParaRPr lang="en-US" sz="1150" dirty="0"/>
+          </a:p>
+        </p:txBody>
+      </p:sp>
+      <p:sp>
+        <p:nvSpPr>
+          <p:cNvPr id="10" name="Shape 8"/>
+          <p:cNvSpPr/>
+          <p:nvPr/>
+        </p:nvSpPr>
+        <p:spPr>
+          <a:xfrm>
+            <a:off x="795528" y="2487168"/>
+            <a:ext cx="4934560" cy="0"/>
+          </a:xfrm>
+          <a:prstGeom prst="line">
+            <a:avLst/>
+          </a:prstGeom>
+          <a:noFill/>
+          <a:ln w="3810">
             <a:solidFill>
-              <a:srgbClr val="718096"/>
+              <a:srgbClr val="CBD5E0"/>
             </a:solidFill>
             <a:prstDash val="solid"/>
           </a:ln>
@@ -8226,18 +10951,637 @@
       </p:sp>
       <p:sp>
         <p:nvSpPr>
-          <p:cNvPr id="12" name="Shape 10"/>
-          <p:cNvSpPr/>
-          <p:nvPr/>
-        </p:nvSpPr>
-        <p:spPr>
-          <a:xfrm>
-            <a:off x="3422828" y="1572768"/>
-            <a:ext cx="2490140" cy="3200400"/>
+          <p:cNvPr id="11" name="Text 9"/>
+          <p:cNvSpPr/>
+          <p:nvPr/>
+        </p:nvSpPr>
+        <p:spPr>
+          <a:xfrm>
+            <a:off x="795528" y="2487168"/>
+            <a:ext cx="1875133" cy="475488"/>
+          </a:xfrm>
+          <a:prstGeom prst="rect">
+            <a:avLst/>
+          </a:prstGeom>
+          <a:noFill/>
+          <a:ln/>
+        </p:spPr>
+        <p:txBody>
+          <a:bodyPr wrap="square" lIns="0" tIns="0" rIns="0" bIns="0" rtlCol="0" anchor="ctr"/>
+          <a:lstStyle/>
+          <a:p>
+            <a:pPr indent="0" marL="0">
+              <a:lnSpc>
+                <a:spcPct val="120000"/>
+              </a:lnSpc>
+              <a:buNone/>
+            </a:pPr>
+            <a:r>
+              <a:rPr lang="en-US" sz="1150" dirty="0">
+                <a:solidFill>
+                  <a:srgbClr val="718096"/>
+                </a:solidFill>
+                <a:latin typeface="Pretendard" pitchFamily="34" charset="0"/>
+                <a:ea typeface="Pretendard" pitchFamily="34" charset="-122"/>
+                <a:cs typeface="Pretendard" pitchFamily="34" charset="-120"/>
+              </a:rPr>
+              <a:t>취득세 (4.6% 법정)</a:t>
+            </a:r>
+            <a:endParaRPr lang="en-US" sz="1150" dirty="0"/>
+          </a:p>
+        </p:txBody>
+      </p:sp>
+      <p:sp>
+        <p:nvSpPr>
+          <p:cNvPr id="12" name="Text 10"/>
+          <p:cNvSpPr/>
+          <p:nvPr/>
+        </p:nvSpPr>
+        <p:spPr>
+          <a:xfrm>
+            <a:off x="2670661" y="2487168"/>
+            <a:ext cx="3059427" cy="475488"/>
+          </a:xfrm>
+          <a:prstGeom prst="rect">
+            <a:avLst/>
+          </a:prstGeom>
+          <a:noFill/>
+          <a:ln/>
+        </p:spPr>
+        <p:txBody>
+          <a:bodyPr wrap="square" lIns="0" tIns="0" rIns="0" bIns="0" rtlCol="0" anchor="ctr"/>
+          <a:lstStyle/>
+          <a:p>
+            <a:pPr indent="0" marL="0">
+              <a:lnSpc>
+                <a:spcPct val="120000"/>
+              </a:lnSpc>
+              <a:buNone/>
+            </a:pPr>
+            <a:r>
+              <a:rPr lang="en-US" sz="1150" b="1" dirty="0">
+                <a:solidFill>
+                  <a:srgbClr val="10161F"/>
+                </a:solidFill>
+                <a:latin typeface="Pretendard" pitchFamily="34" charset="0"/>
+                <a:ea typeface="Pretendard" pitchFamily="34" charset="-122"/>
+                <a:cs typeface="Pretendard" pitchFamily="34" charset="-120"/>
+              </a:rPr>
+              <a:t>4.51억 원</a:t>
+            </a:r>
+            <a:endParaRPr lang="en-US" sz="1150" dirty="0"/>
+          </a:p>
+        </p:txBody>
+      </p:sp>
+      <p:sp>
+        <p:nvSpPr>
+          <p:cNvPr id="13" name="Shape 11"/>
+          <p:cNvSpPr/>
+          <p:nvPr/>
+        </p:nvSpPr>
+        <p:spPr>
+          <a:xfrm>
+            <a:off x="795528" y="2962656"/>
+            <a:ext cx="4934560" cy="0"/>
+          </a:xfrm>
+          <a:prstGeom prst="line">
+            <a:avLst/>
+          </a:prstGeom>
+          <a:noFill/>
+          <a:ln w="3810">
+            <a:solidFill>
+              <a:srgbClr val="CBD5E0"/>
+            </a:solidFill>
+            <a:prstDash val="solid"/>
+          </a:ln>
+        </p:spPr>
+      </p:sp>
+      <p:sp>
+        <p:nvSpPr>
+          <p:cNvPr id="14" name="Text 12"/>
+          <p:cNvSpPr/>
+          <p:nvPr/>
+        </p:nvSpPr>
+        <p:spPr>
+          <a:xfrm>
+            <a:off x="795528" y="2962656"/>
+            <a:ext cx="1875133" cy="475488"/>
+          </a:xfrm>
+          <a:prstGeom prst="rect">
+            <a:avLst/>
+          </a:prstGeom>
+          <a:noFill/>
+          <a:ln/>
+        </p:spPr>
+        <p:txBody>
+          <a:bodyPr wrap="square" lIns="0" tIns="0" rIns="0" bIns="0" rtlCol="0" anchor="ctr"/>
+          <a:lstStyle/>
+          <a:p>
+            <a:pPr indent="0" marL="0">
+              <a:lnSpc>
+                <a:spcPct val="120000"/>
+              </a:lnSpc>
+              <a:buNone/>
+            </a:pPr>
+            <a:r>
+              <a:rPr lang="en-US" sz="1150" dirty="0">
+                <a:solidFill>
+                  <a:srgbClr val="718096"/>
+                </a:solidFill>
+                <a:latin typeface="Pretendard" pitchFamily="34" charset="0"/>
+                <a:ea typeface="Pretendard" pitchFamily="34" charset="-122"/>
+                <a:cs typeface="Pretendard" pitchFamily="34" charset="-120"/>
+              </a:rPr>
+              <a:t>중개보수 (0.9% 한도)</a:t>
+            </a:r>
+            <a:endParaRPr lang="en-US" sz="1150" dirty="0"/>
+          </a:p>
+        </p:txBody>
+      </p:sp>
+      <p:sp>
+        <p:nvSpPr>
+          <p:cNvPr id="15" name="Text 13"/>
+          <p:cNvSpPr/>
+          <p:nvPr/>
+        </p:nvSpPr>
+        <p:spPr>
+          <a:xfrm>
+            <a:off x="2670661" y="2962656"/>
+            <a:ext cx="3059427" cy="475488"/>
+          </a:xfrm>
+          <a:prstGeom prst="rect">
+            <a:avLst/>
+          </a:prstGeom>
+          <a:noFill/>
+          <a:ln/>
+        </p:spPr>
+        <p:txBody>
+          <a:bodyPr wrap="square" lIns="0" tIns="0" rIns="0" bIns="0" rtlCol="0" anchor="ctr"/>
+          <a:lstStyle/>
+          <a:p>
+            <a:pPr indent="0" marL="0">
+              <a:lnSpc>
+                <a:spcPct val="120000"/>
+              </a:lnSpc>
+              <a:buNone/>
+            </a:pPr>
+            <a:r>
+              <a:rPr lang="en-US" sz="1150" b="1" dirty="0">
+                <a:solidFill>
+                  <a:srgbClr val="10161F"/>
+                </a:solidFill>
+                <a:latin typeface="Pretendard" pitchFamily="34" charset="0"/>
+                <a:ea typeface="Pretendard" pitchFamily="34" charset="-122"/>
+                <a:cs typeface="Pretendard" pitchFamily="34" charset="-120"/>
+              </a:rPr>
+              <a:t>0.88억 원</a:t>
+            </a:r>
+            <a:endParaRPr lang="en-US" sz="1150" dirty="0"/>
+          </a:p>
+        </p:txBody>
+      </p:sp>
+      <p:sp>
+        <p:nvSpPr>
+          <p:cNvPr id="16" name="Shape 14"/>
+          <p:cNvSpPr/>
+          <p:nvPr/>
+        </p:nvSpPr>
+        <p:spPr>
+          <a:xfrm>
+            <a:off x="795528" y="3438144"/>
+            <a:ext cx="4934560" cy="0"/>
+          </a:xfrm>
+          <a:prstGeom prst="line">
+            <a:avLst/>
+          </a:prstGeom>
+          <a:noFill/>
+          <a:ln w="3810">
+            <a:solidFill>
+              <a:srgbClr val="CBD5E0"/>
+            </a:solidFill>
+            <a:prstDash val="solid"/>
+          </a:ln>
+        </p:spPr>
+      </p:sp>
+      <p:sp>
+        <p:nvSpPr>
+          <p:cNvPr id="17" name="Text 15"/>
+          <p:cNvSpPr/>
+          <p:nvPr/>
+        </p:nvSpPr>
+        <p:spPr>
+          <a:xfrm>
+            <a:off x="795528" y="3438144"/>
+            <a:ext cx="1875133" cy="475488"/>
+          </a:xfrm>
+          <a:prstGeom prst="rect">
+            <a:avLst/>
+          </a:prstGeom>
+          <a:noFill/>
+          <a:ln/>
+        </p:spPr>
+        <p:txBody>
+          <a:bodyPr wrap="square" lIns="0" tIns="0" rIns="0" bIns="0" rtlCol="0" anchor="ctr"/>
+          <a:lstStyle/>
+          <a:p>
+            <a:pPr indent="0" marL="0">
+              <a:lnSpc>
+                <a:spcPct val="120000"/>
+              </a:lnSpc>
+              <a:buNone/>
+            </a:pPr>
+            <a:r>
+              <a:rPr lang="en-US" sz="1150" dirty="0">
+                <a:solidFill>
+                  <a:srgbClr val="718096"/>
+                </a:solidFill>
+                <a:latin typeface="Pretendard" pitchFamily="34" charset="0"/>
+                <a:ea typeface="Pretendard" pitchFamily="34" charset="-122"/>
+                <a:cs typeface="Pretendard" pitchFamily="34" charset="-120"/>
+              </a:rPr>
+              <a:t>총취득원가 (A + 세/비용)</a:t>
+            </a:r>
+            <a:endParaRPr lang="en-US" sz="1150" dirty="0"/>
+          </a:p>
+        </p:txBody>
+      </p:sp>
+      <p:sp>
+        <p:nvSpPr>
+          <p:cNvPr id="18" name="Text 16"/>
+          <p:cNvSpPr/>
+          <p:nvPr/>
+        </p:nvSpPr>
+        <p:spPr>
+          <a:xfrm>
+            <a:off x="2670661" y="3438144"/>
+            <a:ext cx="3059427" cy="475488"/>
+          </a:xfrm>
+          <a:prstGeom prst="rect">
+            <a:avLst/>
+          </a:prstGeom>
+          <a:noFill/>
+          <a:ln/>
+        </p:spPr>
+        <p:txBody>
+          <a:bodyPr wrap="square" lIns="0" tIns="0" rIns="0" bIns="0" rtlCol="0" anchor="ctr"/>
+          <a:lstStyle/>
+          <a:p>
+            <a:pPr indent="0" marL="0">
+              <a:lnSpc>
+                <a:spcPct val="120000"/>
+              </a:lnSpc>
+              <a:buNone/>
+            </a:pPr>
+            <a:r>
+              <a:rPr lang="en-US" sz="1150" b="1" dirty="0">
+                <a:solidFill>
+                  <a:srgbClr val="10161F"/>
+                </a:solidFill>
+                <a:latin typeface="Pretendard" pitchFamily="34" charset="0"/>
+                <a:ea typeface="Pretendard" pitchFamily="34" charset="-122"/>
+                <a:cs typeface="Pretendard" pitchFamily="34" charset="-120"/>
+              </a:rPr>
+              <a:t>103.4억 원</a:t>
+            </a:r>
+            <a:endParaRPr lang="en-US" sz="1150" dirty="0"/>
+          </a:p>
+        </p:txBody>
+      </p:sp>
+      <p:sp>
+        <p:nvSpPr>
+          <p:cNvPr id="19" name="Shape 17"/>
+          <p:cNvSpPr/>
+          <p:nvPr/>
+        </p:nvSpPr>
+        <p:spPr>
+          <a:xfrm>
+            <a:off x="795528" y="3913632"/>
+            <a:ext cx="4934560" cy="0"/>
+          </a:xfrm>
+          <a:prstGeom prst="line">
+            <a:avLst/>
+          </a:prstGeom>
+          <a:noFill/>
+          <a:ln w="3810">
+            <a:solidFill>
+              <a:srgbClr val="CBD5E0"/>
+            </a:solidFill>
+            <a:prstDash val="solid"/>
+          </a:ln>
+        </p:spPr>
+      </p:sp>
+      <p:sp>
+        <p:nvSpPr>
+          <p:cNvPr id="20" name="Text 18"/>
+          <p:cNvSpPr/>
+          <p:nvPr/>
+        </p:nvSpPr>
+        <p:spPr>
+          <a:xfrm>
+            <a:off x="795528" y="3913632"/>
+            <a:ext cx="1875133" cy="475488"/>
+          </a:xfrm>
+          <a:prstGeom prst="rect">
+            <a:avLst/>
+          </a:prstGeom>
+          <a:noFill/>
+          <a:ln/>
+        </p:spPr>
+        <p:txBody>
+          <a:bodyPr wrap="square" lIns="0" tIns="0" rIns="0" bIns="0" rtlCol="0" anchor="ctr"/>
+          <a:lstStyle/>
+          <a:p>
+            <a:pPr indent="0" marL="0">
+              <a:lnSpc>
+                <a:spcPct val="120000"/>
+              </a:lnSpc>
+              <a:buNone/>
+            </a:pPr>
+            <a:r>
+              <a:rPr lang="en-US" sz="1150" dirty="0">
+                <a:solidFill>
+                  <a:srgbClr val="718096"/>
+                </a:solidFill>
+                <a:latin typeface="Pretendard" pitchFamily="34" charset="0"/>
+                <a:ea typeface="Pretendard" pitchFamily="34" charset="-122"/>
+                <a:cs typeface="Pretendard" pitchFamily="34" charset="-120"/>
+              </a:rPr>
+              <a:t>(-) 임대보증금 승계</a:t>
+            </a:r>
+            <a:endParaRPr lang="en-US" sz="1150" dirty="0"/>
+          </a:p>
+        </p:txBody>
+      </p:sp>
+      <p:sp>
+        <p:nvSpPr>
+          <p:cNvPr id="21" name="Text 19"/>
+          <p:cNvSpPr/>
+          <p:nvPr/>
+        </p:nvSpPr>
+        <p:spPr>
+          <a:xfrm>
+            <a:off x="2670661" y="3913632"/>
+            <a:ext cx="3059427" cy="475488"/>
+          </a:xfrm>
+          <a:prstGeom prst="rect">
+            <a:avLst/>
+          </a:prstGeom>
+          <a:noFill/>
+          <a:ln/>
+        </p:spPr>
+        <p:txBody>
+          <a:bodyPr wrap="square" lIns="0" tIns="0" rIns="0" bIns="0" rtlCol="0" anchor="ctr"/>
+          <a:lstStyle/>
+          <a:p>
+            <a:pPr indent="0" marL="0">
+              <a:lnSpc>
+                <a:spcPct val="120000"/>
+              </a:lnSpc>
+              <a:buNone/>
+            </a:pPr>
+            <a:r>
+              <a:rPr lang="en-US" sz="1150" b="1" dirty="0">
+                <a:solidFill>
+                  <a:srgbClr val="10161F"/>
+                </a:solidFill>
+                <a:latin typeface="Pretendard" pitchFamily="34" charset="0"/>
+                <a:ea typeface="Pretendard" pitchFamily="34" charset="-122"/>
+                <a:cs typeface="Pretendard" pitchFamily="34" charset="-120"/>
+              </a:rPr>
+              <a:t>4.9억 원</a:t>
+            </a:r>
+            <a:endParaRPr lang="en-US" sz="1150" dirty="0"/>
+          </a:p>
+        </p:txBody>
+      </p:sp>
+      <p:sp>
+        <p:nvSpPr>
+          <p:cNvPr id="22" name="Shape 20"/>
+          <p:cNvSpPr/>
+          <p:nvPr/>
+        </p:nvSpPr>
+        <p:spPr>
+          <a:xfrm>
+            <a:off x="795528" y="4389120"/>
+            <a:ext cx="4934560" cy="0"/>
+          </a:xfrm>
+          <a:prstGeom prst="line">
+            <a:avLst/>
+          </a:prstGeom>
+          <a:noFill/>
+          <a:ln w="3810">
+            <a:solidFill>
+              <a:srgbClr val="CBD5E0"/>
+            </a:solidFill>
+            <a:prstDash val="solid"/>
+          </a:ln>
+        </p:spPr>
+      </p:sp>
+      <p:sp>
+        <p:nvSpPr>
+          <p:cNvPr id="23" name="Text 21"/>
+          <p:cNvSpPr/>
+          <p:nvPr/>
+        </p:nvSpPr>
+        <p:spPr>
+          <a:xfrm>
+            <a:off x="795528" y="4389120"/>
+            <a:ext cx="1875133" cy="475488"/>
+          </a:xfrm>
+          <a:prstGeom prst="rect">
+            <a:avLst/>
+          </a:prstGeom>
+          <a:noFill/>
+          <a:ln/>
+        </p:spPr>
+        <p:txBody>
+          <a:bodyPr wrap="square" lIns="0" tIns="0" rIns="0" bIns="0" rtlCol="0" anchor="ctr"/>
+          <a:lstStyle/>
+          <a:p>
+            <a:pPr indent="0" marL="0">
+              <a:lnSpc>
+                <a:spcPct val="120000"/>
+              </a:lnSpc>
+              <a:buNone/>
+            </a:pPr>
+            <a:r>
+              <a:rPr lang="en-US" sz="1150" dirty="0">
+                <a:solidFill>
+                  <a:srgbClr val="718096"/>
+                </a:solidFill>
+                <a:latin typeface="Pretendard" pitchFamily="34" charset="0"/>
+                <a:ea typeface="Pretendard" pitchFamily="34" charset="-122"/>
+                <a:cs typeface="Pretendard" pitchFamily="34" charset="-120"/>
+              </a:rPr>
+              <a:t>(-) 담보대출 조달</a:t>
+            </a:r>
+            <a:endParaRPr lang="en-US" sz="1150" dirty="0"/>
+          </a:p>
+        </p:txBody>
+      </p:sp>
+      <p:sp>
+        <p:nvSpPr>
+          <p:cNvPr id="24" name="Text 22"/>
+          <p:cNvSpPr/>
+          <p:nvPr/>
+        </p:nvSpPr>
+        <p:spPr>
+          <a:xfrm>
+            <a:off x="2670661" y="4389120"/>
+            <a:ext cx="3059427" cy="475488"/>
+          </a:xfrm>
+          <a:prstGeom prst="rect">
+            <a:avLst/>
+          </a:prstGeom>
+          <a:noFill/>
+          <a:ln/>
+        </p:spPr>
+        <p:txBody>
+          <a:bodyPr wrap="square" lIns="0" tIns="0" rIns="0" bIns="0" rtlCol="0" anchor="ctr"/>
+          <a:lstStyle/>
+          <a:p>
+            <a:pPr indent="0" marL="0">
+              <a:lnSpc>
+                <a:spcPct val="120000"/>
+              </a:lnSpc>
+              <a:buNone/>
+            </a:pPr>
+            <a:r>
+              <a:rPr lang="en-US" sz="1150" b="1" dirty="0">
+                <a:solidFill>
+                  <a:srgbClr val="10161F"/>
+                </a:solidFill>
+                <a:latin typeface="Pretendard" pitchFamily="34" charset="0"/>
+                <a:ea typeface="Pretendard" pitchFamily="34" charset="-122"/>
+                <a:cs typeface="Pretendard" pitchFamily="34" charset="-120"/>
+              </a:rPr>
+              <a:t>49.0억 원</a:t>
+            </a:r>
+            <a:endParaRPr lang="en-US" sz="1150" dirty="0"/>
+          </a:p>
+        </p:txBody>
+      </p:sp>
+      <p:sp>
+        <p:nvSpPr>
+          <p:cNvPr id="25" name="Shape 23"/>
+          <p:cNvSpPr/>
+          <p:nvPr/>
+        </p:nvSpPr>
+        <p:spPr>
+          <a:xfrm>
+            <a:off x="795528" y="4864608"/>
+            <a:ext cx="4934560" cy="0"/>
+          </a:xfrm>
+          <a:prstGeom prst="line">
+            <a:avLst/>
+          </a:prstGeom>
+          <a:noFill/>
+          <a:ln w="3810">
+            <a:solidFill>
+              <a:srgbClr val="CBD5E0"/>
+            </a:solidFill>
+            <a:prstDash val="solid"/>
+          </a:ln>
+        </p:spPr>
+      </p:sp>
+      <p:sp>
+        <p:nvSpPr>
+          <p:cNvPr id="26" name="Text 24"/>
+          <p:cNvSpPr/>
+          <p:nvPr/>
+        </p:nvSpPr>
+        <p:spPr>
+          <a:xfrm>
+            <a:off x="795528" y="4864608"/>
+            <a:ext cx="1875133" cy="475488"/>
+          </a:xfrm>
+          <a:prstGeom prst="rect">
+            <a:avLst/>
+          </a:prstGeom>
+          <a:noFill/>
+          <a:ln/>
+        </p:spPr>
+        <p:txBody>
+          <a:bodyPr wrap="square" lIns="0" tIns="0" rIns="0" bIns="0" rtlCol="0" anchor="ctr"/>
+          <a:lstStyle/>
+          <a:p>
+            <a:pPr indent="0" marL="0">
+              <a:lnSpc>
+                <a:spcPct val="120000"/>
+              </a:lnSpc>
+              <a:buNone/>
+            </a:pPr>
+            <a:r>
+              <a:rPr lang="en-US" sz="1150" dirty="0">
+                <a:solidFill>
+                  <a:srgbClr val="718096"/>
+                </a:solidFill>
+                <a:latin typeface="Pretendard" pitchFamily="34" charset="0"/>
+                <a:ea typeface="Pretendard" pitchFamily="34" charset="-122"/>
+                <a:cs typeface="Pretendard" pitchFamily="34" charset="-120"/>
+              </a:rPr>
+              <a:t>실투자금 (Net Equity)</a:t>
+            </a:r>
+            <a:endParaRPr lang="en-US" sz="1150" dirty="0"/>
+          </a:p>
+        </p:txBody>
+      </p:sp>
+      <p:sp>
+        <p:nvSpPr>
+          <p:cNvPr id="27" name="Text 25"/>
+          <p:cNvSpPr/>
+          <p:nvPr/>
+        </p:nvSpPr>
+        <p:spPr>
+          <a:xfrm>
+            <a:off x="2670661" y="4864608"/>
+            <a:ext cx="3059427" cy="475488"/>
+          </a:xfrm>
+          <a:prstGeom prst="rect">
+            <a:avLst/>
+          </a:prstGeom>
+          <a:noFill/>
+          <a:ln/>
+        </p:spPr>
+        <p:txBody>
+          <a:bodyPr wrap="square" lIns="0" tIns="0" rIns="0" bIns="0" rtlCol="0" anchor="ctr"/>
+          <a:lstStyle/>
+          <a:p>
+            <a:pPr indent="0" marL="0">
+              <a:lnSpc>
+                <a:spcPct val="120000"/>
+              </a:lnSpc>
+              <a:buNone/>
+            </a:pPr>
+            <a:r>
+              <a:rPr lang="en-US" sz="1150" b="1" dirty="0">
+                <a:solidFill>
+                  <a:srgbClr val="10161F"/>
+                </a:solidFill>
+                <a:latin typeface="Pretendard" pitchFamily="34" charset="0"/>
+                <a:ea typeface="Pretendard" pitchFamily="34" charset="-122"/>
+                <a:cs typeface="Pretendard" pitchFamily="34" charset="-120"/>
+              </a:rPr>
+              <a:t>49.5억 원</a:t>
+            </a:r>
+            <a:endParaRPr lang="en-US" sz="1150" dirty="0"/>
+          </a:p>
+        </p:txBody>
+      </p:sp>
+      <p:sp>
+        <p:nvSpPr>
+          <p:cNvPr id="28" name="Shape 26"/>
+          <p:cNvSpPr/>
+          <p:nvPr/>
+        </p:nvSpPr>
+        <p:spPr>
+          <a:xfrm>
+            <a:off x="6233008" y="1417320"/>
+            <a:ext cx="5391760" cy="4389120"/>
           </a:xfrm>
           <a:prstGeom prst="roundRect">
             <a:avLst>
-              <a:gd name="adj" fmla="val 2203"/>
+              <a:gd name="adj" fmla="val 1250"/>
             </a:avLst>
           </a:prstGeom>
           <a:solidFill>
@@ -8253,278 +11597,1667 @@
       </p:sp>
       <p:sp>
         <p:nvSpPr>
-          <p:cNvPr id="13" name="Shape 11"/>
-          <p:cNvSpPr/>
-          <p:nvPr/>
-        </p:nvSpPr>
-        <p:spPr>
-          <a:xfrm>
-            <a:off x="3642284" y="1792224"/>
-            <a:ext cx="438912" cy="438912"/>
-          </a:xfrm>
-          <a:prstGeom prst="ellipse">
-            <a:avLst/>
-          </a:prstGeom>
-          <a:solidFill>
-            <a:srgbClr val="B98A2E"/>
-          </a:solidFill>
-          <a:ln/>
-        </p:spPr>
-      </p:sp>
-      <p:sp>
-        <p:nvSpPr>
-          <p:cNvPr id="14" name="Text 12"/>
-          <p:cNvSpPr/>
-          <p:nvPr/>
-        </p:nvSpPr>
-        <p:spPr>
-          <a:xfrm>
-            <a:off x="3642284" y="1792224"/>
-            <a:ext cx="438912" cy="438912"/>
-          </a:xfrm>
-          <a:prstGeom prst="rect">
-            <a:avLst/>
-          </a:prstGeom>
-          <a:noFill/>
-          <a:ln/>
-        </p:spPr>
-        <p:txBody>
-          <a:bodyPr wrap="square" lIns="0" tIns="0" rIns="0" bIns="0" rtlCol="0" anchor="ctr"/>
-          <a:lstStyle/>
-          <a:p>
-            <a:pPr algn="ctr" indent="0" marL="0">
-              <a:buNone/>
-            </a:pPr>
-            <a:r>
-              <a:rPr lang="en-US" sz="1400" b="1" dirty="0">
-                <a:solidFill>
-                  <a:srgbClr val="FFFFFF"/>
-                </a:solidFill>
-                <a:latin typeface="Arial" pitchFamily="34" charset="0"/>
-                <a:ea typeface="Arial" pitchFamily="34" charset="-122"/>
-                <a:cs typeface="Arial" pitchFamily="34" charset="-120"/>
-              </a:rPr>
-              <a:t>02</a:t>
-            </a:r>
-            <a:endParaRPr lang="en-US" sz="1400" dirty="0"/>
-          </a:p>
-        </p:txBody>
-      </p:sp>
-      <p:sp>
-        <p:nvSpPr>
-          <p:cNvPr id="15" name="Text 13"/>
-          <p:cNvSpPr/>
-          <p:nvPr/>
-        </p:nvSpPr>
-        <p:spPr>
-          <a:xfrm>
-            <a:off x="3642284" y="2304288"/>
-            <a:ext cx="2051228" cy="365760"/>
-          </a:xfrm>
-          <a:prstGeom prst="rect">
-            <a:avLst/>
-          </a:prstGeom>
-          <a:noFill/>
-          <a:ln/>
-        </p:spPr>
-        <p:txBody>
-          <a:bodyPr wrap="square" rtlCol="0" anchor="ctr"/>
+          <p:cNvPr id="29" name="Text 27"/>
+          <p:cNvSpPr/>
+          <p:nvPr/>
+        </p:nvSpPr>
+        <p:spPr>
+          <a:xfrm>
+            <a:off x="6461608" y="1618488"/>
+            <a:ext cx="4934560" cy="320040"/>
+          </a:xfrm>
+          <a:prstGeom prst="rect">
+            <a:avLst/>
+          </a:prstGeom>
+          <a:noFill/>
+          <a:ln/>
+        </p:spPr>
+        <p:txBody>
+          <a:bodyPr wrap="square" lIns="0" tIns="0" rIns="0" bIns="0" rtlCol="0" anchor="ctr"/>
           <a:lstStyle/>
           <a:p>
             <a:pPr indent="0" marL="0">
               <a:buNone/>
             </a:pPr>
             <a:r>
-              <a:rPr lang="en-US" sz="1600" b="1" dirty="0">
-                <a:solidFill>
-                  <a:srgbClr val="10161F"/>
-                </a:solidFill>
-                <a:latin typeface="Pretendard" pitchFamily="34" charset="0"/>
-                <a:ea typeface="Pretendard" pitchFamily="34" charset="-122"/>
-                <a:cs typeface="Pretendard" pitchFamily="34" charset="-120"/>
-              </a:rPr>
-              <a:t>2단계</a:t>
-            </a:r>
-            <a:endParaRPr lang="en-US" sz="1600" dirty="0"/>
-          </a:p>
-        </p:txBody>
-      </p:sp>
-      <p:sp>
-        <p:nvSpPr>
-          <p:cNvPr id="16" name="Text 14"/>
-          <p:cNvSpPr/>
-          <p:nvPr/>
-        </p:nvSpPr>
-        <p:spPr>
-          <a:xfrm>
-            <a:off x="3642284" y="2761488"/>
-            <a:ext cx="2051228" cy="1828800"/>
-          </a:xfrm>
-          <a:prstGeom prst="rect">
-            <a:avLst/>
-          </a:prstGeom>
-          <a:noFill/>
-          <a:ln/>
-        </p:spPr>
-        <p:txBody>
-          <a:bodyPr wrap="square" rtlCol="0" anchor="t"/>
-          <a:lstStyle/>
-          <a:p>
-            <a:pPr indent="0" marL="0">
-              <a:buNone/>
-            </a:pPr>
-            <a:r>
-              <a:rPr lang="en-US" sz="1100" dirty="0">
-                <a:solidFill>
-                  <a:srgbClr val="10161F"/>
-                </a:solidFill>
-                <a:latin typeface="Pretendard" pitchFamily="34" charset="0"/>
-                <a:ea typeface="Pretendard" pitchFamily="34" charset="-122"/>
-                <a:cs typeface="Pretendard" pitchFamily="34" charset="-120"/>
-              </a:rPr>
-              <a:t>NDA 체결 → 임차인 정보 및 임대차계약서 제공</a:t>
-            </a:r>
-            <a:endParaRPr lang="en-US" sz="1100" dirty="0"/>
-          </a:p>
-        </p:txBody>
-      </p:sp>
-      <p:sp>
-        <p:nvSpPr>
-          <p:cNvPr id="17" name="Shape 15"/>
-          <p:cNvSpPr/>
-          <p:nvPr/>
-        </p:nvSpPr>
-        <p:spPr>
-          <a:xfrm>
-            <a:off x="6004408" y="3035808"/>
-            <a:ext cx="182880" cy="274320"/>
-          </a:xfrm>
-          <a:prstGeom prst="rightArrow">
-            <a:avLst/>
-          </a:prstGeom>
-          <a:solidFill>
-            <a:srgbClr val="CBD5E0"/>
-          </a:solidFill>
-          <a:ln w="6350">
-            <a:solidFill>
-              <a:srgbClr val="718096"/>
-            </a:solidFill>
-            <a:prstDash val="solid"/>
-          </a:ln>
-        </p:spPr>
-      </p:sp>
-      <p:sp>
-        <p:nvSpPr>
-          <p:cNvPr id="18" name="Shape 16"/>
-          <p:cNvSpPr/>
-          <p:nvPr/>
-        </p:nvSpPr>
-        <p:spPr>
-          <a:xfrm>
-            <a:off x="6278728" y="1572768"/>
-            <a:ext cx="2490140" cy="3200400"/>
+              <a:rPr lang="en-US" sz="1350" b="1" dirty="0">
+                <a:solidFill>
+                  <a:srgbClr val="977024"/>
+                </a:solidFill>
+                <a:latin typeface="Pretendard" pitchFamily="34" charset="0"/>
+                <a:ea typeface="Pretendard" pitchFamily="34" charset="-122"/>
+                <a:cs typeface="Pretendard" pitchFamily="34" charset="-120"/>
+              </a:rPr>
+              <a:t>2. LTV 시나리오별 레버리지 효과</a:t>
+            </a:r>
+            <a:endParaRPr lang="en-US" sz="1350" dirty="0"/>
+          </a:p>
+        </p:txBody>
+      </p:sp>
+      <p:graphicFrame>
+        <p:nvGraphicFramePr>
+          <p:cNvPr id="10" name="Table 0"/>
+          <p:cNvGraphicFramePr>
+            <a:graphicFrameLocks noGrp="1"/>
+          </p:cNvGraphicFramePr>
+          <p:nvPr>
+            <p:extLst>
+              <p:ext uri="{D42A27DB-BD31-4B8C-83A1-F6EECF244321}">
+                <p14:modId xmlns:p14="http://schemas.microsoft.com/office/powerpoint/2010/main" val="1579011935"/>
+              </p:ext>
+            </p:extLst>
+          </p:nvPr>
+        </p:nvGraphicFramePr>
+        <p:xfrm>
+          <a:off x="6461608" y="2057400"/>
+          <a:ext cx="4934560" cy="914400"/>
+        </p:xfrm>
+        <a:graphic>
+          <a:graphicData uri="http://schemas.openxmlformats.org/drawingml/2006/table">
+            <a:tbl>
+              <a:tblPr/>
+              <a:tblGrid>
+                <a:gridCol w="1463040"/>
+                <a:gridCol w="1005840"/>
+                <a:gridCol w="1280160"/>
+                <a:gridCol w="1280160"/>
+              </a:tblGrid>
+              <a:tr h="457200">
+                <a:tc>
+                  <a:txBody>
+                    <a:bodyPr/>
+                    <a:lstStyle/>
+                    <a:p>
+                      <a:pPr indent="0" marL="0">
+                        <a:buNone/>
+                      </a:pPr>
+                      <a:r>
+                        <a:rPr lang="en-US" sz="1100" b="1" dirty="0">
+                          <a:solidFill>
+                            <a:srgbClr val="718096"/>
+                          </a:solidFill>
+                          <a:latin typeface="Pretendard" pitchFamily="34" charset="0"/>
+                          <a:ea typeface="Pretendard" pitchFamily="34" charset="-122"/>
+                          <a:cs typeface="Pretendard" pitchFamily="34" charset="-120"/>
+                        </a:rPr>
+                        <a:t>구분</a:t>
+                      </a:r>
+                      <a:endParaRPr lang="en-US" sz="1100" dirty="0">
+                        <a:latin typeface="Pretendard" charset="0"/>
+                        <a:ea typeface="Pretendard" charset="0"/>
+                        <a:cs typeface="Pretendard" charset="0"/>
+                      </a:endParaRPr>
+                    </a:p>
+                  </a:txBody>
+                  <a:tcPr marL="50800" marR="50800" marT="25400" marB="25400" anchor="ctr">
+                    <a:lnL w="3810" cap="flat" cmpd="sng" algn="ctr">
+                      <a:solidFill>
+                        <a:srgbClr val="CBD5E0"/>
+                      </a:solidFill>
+                      <a:prstDash val="solid"/>
+                      <a:round/>
+                      <a:headEnd type="none" w="med" len="med"/>
+                      <a:tailEnd type="none" w="med" len="med"/>
+                    </a:lnL>
+                    <a:lnR w="3810" cap="flat" cmpd="sng" algn="ctr">
+                      <a:solidFill>
+                        <a:srgbClr val="CBD5E0"/>
+                      </a:solidFill>
+                      <a:prstDash val="solid"/>
+                      <a:round/>
+                      <a:headEnd type="none" w="med" len="med"/>
+                      <a:tailEnd type="none" w="med" len="med"/>
+                    </a:lnR>
+                    <a:lnT w="3810" cap="flat" cmpd="sng" algn="ctr">
+                      <a:solidFill>
+                        <a:srgbClr val="CBD5E0"/>
+                      </a:solidFill>
+                      <a:prstDash val="solid"/>
+                      <a:round/>
+                      <a:headEnd type="none" w="med" len="med"/>
+                      <a:tailEnd type="none" w="med" len="med"/>
+                    </a:lnT>
+                    <a:lnB w="3810" cap="flat" cmpd="sng" algn="ctr">
+                      <a:solidFill>
+                        <a:srgbClr val="CBD5E0"/>
+                      </a:solidFill>
+                      <a:prstDash val="solid"/>
+                      <a:round/>
+                      <a:headEnd type="none" w="med" len="med"/>
+                      <a:tailEnd type="none" w="med" len="med"/>
+                    </a:lnB>
+                    <a:solidFill>
+                      <a:srgbClr val="F7FAFC"/>
+                    </a:solidFill>
+                  </a:tcPr>
+                </a:tc>
+                <a:tc>
+                  <a:txBody>
+                    <a:bodyPr/>
+                    <a:lstStyle/>
+                    <a:p>
+                      <a:pPr indent="0" marL="0">
+                        <a:buNone/>
+                      </a:pPr>
+                      <a:r>
+                        <a:rPr lang="en-US" sz="1100" b="1" dirty="0">
+                          <a:solidFill>
+                            <a:srgbClr val="718096"/>
+                          </a:solidFill>
+                          <a:latin typeface="Pretendard" pitchFamily="34" charset="0"/>
+                          <a:ea typeface="Pretendard" pitchFamily="34" charset="-122"/>
+                          <a:cs typeface="Pretendard" pitchFamily="34" charset="-120"/>
+                        </a:rPr>
+                        <a:t>대출비율</a:t>
+                      </a:r>
+                      <a:endParaRPr lang="en-US" sz="1100" dirty="0">
+                        <a:latin typeface="Pretendard" charset="0"/>
+                        <a:ea typeface="Pretendard" charset="0"/>
+                        <a:cs typeface="Pretendard" charset="0"/>
+                      </a:endParaRPr>
+                    </a:p>
+                  </a:txBody>
+                  <a:tcPr marL="50800" marR="50800" marT="25400" marB="25400" anchor="ctr">
+                    <a:lnL w="3810" cap="flat" cmpd="sng" algn="ctr">
+                      <a:solidFill>
+                        <a:srgbClr val="CBD5E0"/>
+                      </a:solidFill>
+                      <a:prstDash val="solid"/>
+                      <a:round/>
+                      <a:headEnd type="none" w="med" len="med"/>
+                      <a:tailEnd type="none" w="med" len="med"/>
+                    </a:lnL>
+                    <a:lnR w="3810" cap="flat" cmpd="sng" algn="ctr">
+                      <a:solidFill>
+                        <a:srgbClr val="CBD5E0"/>
+                      </a:solidFill>
+                      <a:prstDash val="solid"/>
+                      <a:round/>
+                      <a:headEnd type="none" w="med" len="med"/>
+                      <a:tailEnd type="none" w="med" len="med"/>
+                    </a:lnR>
+                    <a:lnT w="3810" cap="flat" cmpd="sng" algn="ctr">
+                      <a:solidFill>
+                        <a:srgbClr val="CBD5E0"/>
+                      </a:solidFill>
+                      <a:prstDash val="solid"/>
+                      <a:round/>
+                      <a:headEnd type="none" w="med" len="med"/>
+                      <a:tailEnd type="none" w="med" len="med"/>
+                    </a:lnT>
+                    <a:lnB w="3810" cap="flat" cmpd="sng" algn="ctr">
+                      <a:solidFill>
+                        <a:srgbClr val="CBD5E0"/>
+                      </a:solidFill>
+                      <a:prstDash val="solid"/>
+                      <a:round/>
+                      <a:headEnd type="none" w="med" len="med"/>
+                      <a:tailEnd type="none" w="med" len="med"/>
+                    </a:lnB>
+                    <a:solidFill>
+                      <a:srgbClr val="F7FAFC"/>
+                    </a:solidFill>
+                  </a:tcPr>
+                </a:tc>
+                <a:tc>
+                  <a:txBody>
+                    <a:bodyPr/>
+                    <a:lstStyle/>
+                    <a:p>
+                      <a:pPr indent="0" marL="0">
+                        <a:buNone/>
+                      </a:pPr>
+                      <a:r>
+                        <a:rPr lang="en-US" sz="1100" b="1" dirty="0">
+                          <a:solidFill>
+                            <a:srgbClr val="718096"/>
+                          </a:solidFill>
+                          <a:latin typeface="Pretendard" pitchFamily="34" charset="0"/>
+                          <a:ea typeface="Pretendard" pitchFamily="34" charset="-122"/>
+                          <a:cs typeface="Pretendard" pitchFamily="34" charset="-120"/>
+                        </a:rPr>
+                        <a:t>실투자금</a:t>
+                      </a:r>
+                      <a:endParaRPr lang="en-US" sz="1100" dirty="0">
+                        <a:latin typeface="Pretendard" charset="0"/>
+                        <a:ea typeface="Pretendard" charset="0"/>
+                        <a:cs typeface="Pretendard" charset="0"/>
+                      </a:endParaRPr>
+                    </a:p>
+                  </a:txBody>
+                  <a:tcPr marL="50800" marR="50800" marT="25400" marB="25400" anchor="ctr">
+                    <a:lnL w="3810" cap="flat" cmpd="sng" algn="ctr">
+                      <a:solidFill>
+                        <a:srgbClr val="CBD5E0"/>
+                      </a:solidFill>
+                      <a:prstDash val="solid"/>
+                      <a:round/>
+                      <a:headEnd type="none" w="med" len="med"/>
+                      <a:tailEnd type="none" w="med" len="med"/>
+                    </a:lnL>
+                    <a:lnR w="3810" cap="flat" cmpd="sng" algn="ctr">
+                      <a:solidFill>
+                        <a:srgbClr val="CBD5E0"/>
+                      </a:solidFill>
+                      <a:prstDash val="solid"/>
+                      <a:round/>
+                      <a:headEnd type="none" w="med" len="med"/>
+                      <a:tailEnd type="none" w="med" len="med"/>
+                    </a:lnR>
+                    <a:lnT w="3810" cap="flat" cmpd="sng" algn="ctr">
+                      <a:solidFill>
+                        <a:srgbClr val="CBD5E0"/>
+                      </a:solidFill>
+                      <a:prstDash val="solid"/>
+                      <a:round/>
+                      <a:headEnd type="none" w="med" len="med"/>
+                      <a:tailEnd type="none" w="med" len="med"/>
+                    </a:lnT>
+                    <a:lnB w="3810" cap="flat" cmpd="sng" algn="ctr">
+                      <a:solidFill>
+                        <a:srgbClr val="CBD5E0"/>
+                      </a:solidFill>
+                      <a:prstDash val="solid"/>
+                      <a:round/>
+                      <a:headEnd type="none" w="med" len="med"/>
+                      <a:tailEnd type="none" w="med" len="med"/>
+                    </a:lnB>
+                    <a:solidFill>
+                      <a:srgbClr val="F7FAFC"/>
+                    </a:solidFill>
+                  </a:tcPr>
+                </a:tc>
+                <a:tc>
+                  <a:txBody>
+                    <a:bodyPr/>
+                    <a:lstStyle/>
+                    <a:p>
+                      <a:pPr indent="0" marL="0">
+                        <a:buNone/>
+                      </a:pPr>
+                      <a:r>
+                        <a:rPr lang="en-US" sz="1100" b="1" dirty="0">
+                          <a:solidFill>
+                            <a:srgbClr val="718096"/>
+                          </a:solidFill>
+                          <a:latin typeface="Pretendard" pitchFamily="34" charset="0"/>
+                          <a:ea typeface="Pretendard" pitchFamily="34" charset="-122"/>
+                          <a:cs typeface="Pretendard" pitchFamily="34" charset="-120"/>
+                        </a:rPr>
+                        <a:t>예상수익률</a:t>
+                      </a:r>
+                      <a:endParaRPr lang="en-US" sz="1100" dirty="0">
+                        <a:latin typeface="Pretendard" charset="0"/>
+                        <a:ea typeface="Pretendard" charset="0"/>
+                        <a:cs typeface="Pretendard" charset="0"/>
+                      </a:endParaRPr>
+                    </a:p>
+                  </a:txBody>
+                  <a:tcPr marL="50800" marR="50800" marT="25400" marB="25400" anchor="ctr">
+                    <a:lnL w="3810" cap="flat" cmpd="sng" algn="ctr">
+                      <a:solidFill>
+                        <a:srgbClr val="CBD5E0"/>
+                      </a:solidFill>
+                      <a:prstDash val="solid"/>
+                      <a:round/>
+                      <a:headEnd type="none" w="med" len="med"/>
+                      <a:tailEnd type="none" w="med" len="med"/>
+                    </a:lnL>
+                    <a:lnR w="3810" cap="flat" cmpd="sng" algn="ctr">
+                      <a:solidFill>
+                        <a:srgbClr val="CBD5E0"/>
+                      </a:solidFill>
+                      <a:prstDash val="solid"/>
+                      <a:round/>
+                      <a:headEnd type="none" w="med" len="med"/>
+                      <a:tailEnd type="none" w="med" len="med"/>
+                    </a:lnR>
+                    <a:lnT w="3810" cap="flat" cmpd="sng" algn="ctr">
+                      <a:solidFill>
+                        <a:srgbClr val="CBD5E0"/>
+                      </a:solidFill>
+                      <a:prstDash val="solid"/>
+                      <a:round/>
+                      <a:headEnd type="none" w="med" len="med"/>
+                      <a:tailEnd type="none" w="med" len="med"/>
+                    </a:lnT>
+                    <a:lnB w="3810" cap="flat" cmpd="sng" algn="ctr">
+                      <a:solidFill>
+                        <a:srgbClr val="CBD5E0"/>
+                      </a:solidFill>
+                      <a:prstDash val="solid"/>
+                      <a:round/>
+                      <a:headEnd type="none" w="med" len="med"/>
+                      <a:tailEnd type="none" w="med" len="med"/>
+                    </a:lnB>
+                    <a:solidFill>
+                      <a:srgbClr val="F7FAFC"/>
+                    </a:solidFill>
+                  </a:tcPr>
+                </a:tc>
+              </a:tr>
+              <a:tr h="457200">
+                <a:tc>
+                  <a:txBody>
+                    <a:bodyPr/>
+                    <a:lstStyle/>
+                    <a:p>
+                      <a:pPr indent="0" marL="0">
+                        <a:buNone/>
+                      </a:pPr>
+                      <a:r>
+                        <a:rPr lang="en-US" sz="1100" b="1" dirty="0">
+                          <a:solidFill>
+                            <a:srgbClr val="10161F"/>
+                          </a:solidFill>
+                          <a:latin typeface="Pretendard" pitchFamily="34" charset="0"/>
+                          <a:ea typeface="Pretendard" pitchFamily="34" charset="-122"/>
+                          <a:cs typeface="Pretendard" pitchFamily="34" charset="-120"/>
+                        </a:rPr>
+                        <a:t>전액 </a:t>
+                      </a:r>
+                      <a:pPr indent="0" marL="0">
+                        <a:buNone/>
+                      </a:pPr>
+                      <a:r>
+                        <a:rPr lang="en-US" sz="1100" b="1" dirty="0">
+                          <a:solidFill>
+                            <a:srgbClr val="10161F"/>
+                          </a:solidFill>
+                          <a:latin typeface="Pretendard" pitchFamily="34" charset="0"/>
+                          <a:ea typeface="Pretendard" pitchFamily="34" charset="-122"/>
+                          <a:cs typeface="Pretendard" pitchFamily="34" charset="-120"/>
+                        </a:rPr>
+                        <a:t>자기자본 </a:t>
+                      </a:r>
+                      <a:pPr indent="0" marL="0">
+                        <a:buNone/>
+                      </a:pPr>
+                      <a:r>
+                        <a:rPr lang="en-US" sz="1100" b="1" dirty="0">
+                          <a:solidFill>
+                            <a:srgbClr val="10161F"/>
+                          </a:solidFill>
+                          <a:latin typeface="Pretendard" pitchFamily="34" charset="0"/>
+                          <a:ea typeface="Pretendard" pitchFamily="34" charset="-122"/>
+                          <a:cs typeface="Pretendard" pitchFamily="34" charset="-120"/>
+                        </a:rPr>
+                        <a:t>(무차입)</a:t>
+                      </a:r>
+                      <a:endParaRPr lang="en-US" sz="1100" dirty="0">
+                        <a:latin typeface="Pretendard" charset="0"/>
+                        <a:ea typeface="Pretendard" charset="0"/>
+                        <a:cs typeface="Pretendard" charset="0"/>
+                      </a:endParaRPr>
+                    </a:p>
+                  </a:txBody>
+                  <a:tcPr marL="50800" marR="50800" marT="25400" marB="25400" anchor="ctr">
+                    <a:lnL w="3810" cap="flat" cmpd="sng" algn="ctr">
+                      <a:solidFill>
+                        <a:srgbClr val="CBD5E0"/>
+                      </a:solidFill>
+                      <a:prstDash val="solid"/>
+                      <a:round/>
+                      <a:headEnd type="none" w="med" len="med"/>
+                      <a:tailEnd type="none" w="med" len="med"/>
+                    </a:lnL>
+                    <a:lnR w="3810" cap="flat" cmpd="sng" algn="ctr">
+                      <a:solidFill>
+                        <a:srgbClr val="CBD5E0"/>
+                      </a:solidFill>
+                      <a:prstDash val="solid"/>
+                      <a:round/>
+                      <a:headEnd type="none" w="med" len="med"/>
+                      <a:tailEnd type="none" w="med" len="med"/>
+                    </a:lnR>
+                    <a:lnT w="3810" cap="flat" cmpd="sng" algn="ctr">
+                      <a:solidFill>
+                        <a:srgbClr val="CBD5E0"/>
+                      </a:solidFill>
+                      <a:prstDash val="solid"/>
+                      <a:round/>
+                      <a:headEnd type="none" w="med" len="med"/>
+                      <a:tailEnd type="none" w="med" len="med"/>
+                    </a:lnT>
+                    <a:lnB w="3810" cap="flat" cmpd="sng" algn="ctr">
+                      <a:solidFill>
+                        <a:srgbClr val="CBD5E0"/>
+                      </a:solidFill>
+                      <a:prstDash val="solid"/>
+                      <a:round/>
+                      <a:headEnd type="none" w="med" len="med"/>
+                      <a:tailEnd type="none" w="med" len="med"/>
+                    </a:lnB>
+                    <a:solidFill>
+                      <a:srgbClr val="FFFFFF"/>
+                    </a:solidFill>
+                  </a:tcPr>
+                </a:tc>
+                <a:tc>
+                  <a:txBody>
+                    <a:bodyPr/>
+                    <a:lstStyle/>
+                    <a:p>
+                      <a:pPr indent="0" marL="0">
+                        <a:buNone/>
+                      </a:pPr>
+                      <a:r>
+                        <a:rPr lang="en-US" sz="1100" dirty="0">
+                          <a:solidFill>
+                            <a:srgbClr val="10161F"/>
+                          </a:solidFill>
+                          <a:latin typeface="Pretendard" pitchFamily="34" charset="0"/>
+                          <a:ea typeface="Pretendard" pitchFamily="34" charset="-122"/>
+                          <a:cs typeface="Pretendard" pitchFamily="34" charset="-120"/>
+                        </a:rPr>
+                        <a:t>0%</a:t>
+                      </a:r>
+                      <a:endParaRPr lang="en-US" sz="1100" dirty="0">
+                        <a:latin typeface="Pretendard" charset="0"/>
+                        <a:ea typeface="Pretendard" charset="0"/>
+                        <a:cs typeface="Pretendard" charset="0"/>
+                      </a:endParaRPr>
+                    </a:p>
+                  </a:txBody>
+                  <a:tcPr marL="50800" marR="50800" marT="25400" marB="25400" anchor="ctr">
+                    <a:lnL w="3810" cap="flat" cmpd="sng" algn="ctr">
+                      <a:solidFill>
+                        <a:srgbClr val="CBD5E0"/>
+                      </a:solidFill>
+                      <a:prstDash val="solid"/>
+                      <a:round/>
+                      <a:headEnd type="none" w="med" len="med"/>
+                      <a:tailEnd type="none" w="med" len="med"/>
+                    </a:lnL>
+                    <a:lnR w="3810" cap="flat" cmpd="sng" algn="ctr">
+                      <a:solidFill>
+                        <a:srgbClr val="CBD5E0"/>
+                      </a:solidFill>
+                      <a:prstDash val="solid"/>
+                      <a:round/>
+                      <a:headEnd type="none" w="med" len="med"/>
+                      <a:tailEnd type="none" w="med" len="med"/>
+                    </a:lnR>
+                    <a:lnT w="3810" cap="flat" cmpd="sng" algn="ctr">
+                      <a:solidFill>
+                        <a:srgbClr val="CBD5E0"/>
+                      </a:solidFill>
+                      <a:prstDash val="solid"/>
+                      <a:round/>
+                      <a:headEnd type="none" w="med" len="med"/>
+                      <a:tailEnd type="none" w="med" len="med"/>
+                    </a:lnT>
+                    <a:lnB w="3810" cap="flat" cmpd="sng" algn="ctr">
+                      <a:solidFill>
+                        <a:srgbClr val="CBD5E0"/>
+                      </a:solidFill>
+                      <a:prstDash val="solid"/>
+                      <a:round/>
+                      <a:headEnd type="none" w="med" len="med"/>
+                      <a:tailEnd type="none" w="med" len="med"/>
+                    </a:lnB>
+                    <a:solidFill>
+                      <a:srgbClr val="FFFFFF"/>
+                    </a:solidFill>
+                  </a:tcPr>
+                </a:tc>
+                <a:tc>
+                  <a:txBody>
+                    <a:bodyPr/>
+                    <a:lstStyle/>
+                    <a:p>
+                      <a:pPr indent="0" marL="0">
+                        <a:buNone/>
+                      </a:pPr>
+                      <a:r>
+                        <a:rPr lang="en-US" sz="1100" dirty="0">
+                          <a:solidFill>
+                            <a:srgbClr val="10161F"/>
+                          </a:solidFill>
+                          <a:latin typeface="Pretendard" pitchFamily="34" charset="0"/>
+                          <a:ea typeface="Pretendard" pitchFamily="34" charset="-122"/>
+                          <a:cs typeface="Pretendard" pitchFamily="34" charset="-120"/>
+                        </a:rPr>
+                        <a:t>98.5억</a:t>
+                      </a:r>
+                      <a:endParaRPr lang="en-US" sz="1100" dirty="0">
+                        <a:latin typeface="Pretendard" charset="0"/>
+                        <a:ea typeface="Pretendard" charset="0"/>
+                        <a:cs typeface="Pretendard" charset="0"/>
+                      </a:endParaRPr>
+                    </a:p>
+                  </a:txBody>
+                  <a:tcPr marL="50800" marR="50800" marT="25400" marB="25400" anchor="ctr">
+                    <a:lnL w="3810" cap="flat" cmpd="sng" algn="ctr">
+                      <a:solidFill>
+                        <a:srgbClr val="CBD5E0"/>
+                      </a:solidFill>
+                      <a:prstDash val="solid"/>
+                      <a:round/>
+                      <a:headEnd type="none" w="med" len="med"/>
+                      <a:tailEnd type="none" w="med" len="med"/>
+                    </a:lnL>
+                    <a:lnR w="3810" cap="flat" cmpd="sng" algn="ctr">
+                      <a:solidFill>
+                        <a:srgbClr val="CBD5E0"/>
+                      </a:solidFill>
+                      <a:prstDash val="solid"/>
+                      <a:round/>
+                      <a:headEnd type="none" w="med" len="med"/>
+                      <a:tailEnd type="none" w="med" len="med"/>
+                    </a:lnR>
+                    <a:lnT w="3810" cap="flat" cmpd="sng" algn="ctr">
+                      <a:solidFill>
+                        <a:srgbClr val="CBD5E0"/>
+                      </a:solidFill>
+                      <a:prstDash val="solid"/>
+                      <a:round/>
+                      <a:headEnd type="none" w="med" len="med"/>
+                      <a:tailEnd type="none" w="med" len="med"/>
+                    </a:lnT>
+                    <a:lnB w="3810" cap="flat" cmpd="sng" algn="ctr">
+                      <a:solidFill>
+                        <a:srgbClr val="CBD5E0"/>
+                      </a:solidFill>
+                      <a:prstDash val="solid"/>
+                      <a:round/>
+                      <a:headEnd type="none" w="med" len="med"/>
+                      <a:tailEnd type="none" w="med" len="med"/>
+                    </a:lnB>
+                    <a:solidFill>
+                      <a:srgbClr val="FFFFFF"/>
+                    </a:solidFill>
+                  </a:tcPr>
+                </a:tc>
+                <a:tc>
+                  <a:txBody>
+                    <a:bodyPr/>
+                    <a:lstStyle/>
+                    <a:p>
+                      <a:pPr indent="0" marL="0">
+                        <a:buNone/>
+                      </a:pPr>
+                      <a:r>
+                        <a:rPr lang="en-US" sz="1100" dirty="0">
+                          <a:solidFill>
+                            <a:srgbClr val="10161F"/>
+                          </a:solidFill>
+                          <a:latin typeface="Pretendard" pitchFamily="34" charset="0"/>
+                          <a:ea typeface="Pretendard" pitchFamily="34" charset="-122"/>
+                          <a:cs typeface="Pretendard" pitchFamily="34" charset="-120"/>
+                        </a:rPr>
+                        <a:t>3.78%</a:t>
+                      </a:r>
+                      <a:endParaRPr lang="en-US" sz="1100" dirty="0">
+                        <a:latin typeface="Pretendard" charset="0"/>
+                        <a:ea typeface="Pretendard" charset="0"/>
+                        <a:cs typeface="Pretendard" charset="0"/>
+                      </a:endParaRPr>
+                    </a:p>
+                  </a:txBody>
+                  <a:tcPr marL="50800" marR="50800" marT="25400" marB="25400" anchor="ctr">
+                    <a:lnL w="3810" cap="flat" cmpd="sng" algn="ctr">
+                      <a:solidFill>
+                        <a:srgbClr val="CBD5E0"/>
+                      </a:solidFill>
+                      <a:prstDash val="solid"/>
+                      <a:round/>
+                      <a:headEnd type="none" w="med" len="med"/>
+                      <a:tailEnd type="none" w="med" len="med"/>
+                    </a:lnL>
+                    <a:lnR w="3810" cap="flat" cmpd="sng" algn="ctr">
+                      <a:solidFill>
+                        <a:srgbClr val="CBD5E0"/>
+                      </a:solidFill>
+                      <a:prstDash val="solid"/>
+                      <a:round/>
+                      <a:headEnd type="none" w="med" len="med"/>
+                      <a:tailEnd type="none" w="med" len="med"/>
+                    </a:lnR>
+                    <a:lnT w="3810" cap="flat" cmpd="sng" algn="ctr">
+                      <a:solidFill>
+                        <a:srgbClr val="CBD5E0"/>
+                      </a:solidFill>
+                      <a:prstDash val="solid"/>
+                      <a:round/>
+                      <a:headEnd type="none" w="med" len="med"/>
+                      <a:tailEnd type="none" w="med" len="med"/>
+                    </a:lnT>
+                    <a:lnB w="3810" cap="flat" cmpd="sng" algn="ctr">
+                      <a:solidFill>
+                        <a:srgbClr val="CBD5E0"/>
+                      </a:solidFill>
+                      <a:prstDash val="solid"/>
+                      <a:round/>
+                      <a:headEnd type="none" w="med" len="med"/>
+                      <a:tailEnd type="none" w="med" len="med"/>
+                    </a:lnB>
+                    <a:solidFill>
+                      <a:srgbClr val="FFFFFF"/>
+                    </a:solidFill>
+                  </a:tcPr>
+                </a:tc>
+              </a:tr>
+              <a:tr h="457200">
+                <a:tc>
+                  <a:txBody>
+                    <a:bodyPr/>
+                    <a:lstStyle/>
+                    <a:p>
+                      <a:pPr indent="0" marL="0">
+                        <a:buNone/>
+                      </a:pPr>
+                      <a:r>
+                        <a:rPr lang="en-US" sz="1100" b="1" dirty="0">
+                          <a:solidFill>
+                            <a:srgbClr val="10161F"/>
+                          </a:solidFill>
+                          <a:latin typeface="Pretendard" pitchFamily="34" charset="0"/>
+                          <a:ea typeface="Pretendard" pitchFamily="34" charset="-122"/>
+                          <a:cs typeface="Pretendard" pitchFamily="34" charset="-120"/>
+                        </a:rPr>
+                        <a:t>보수적 </a:t>
+                      </a:r>
+                      <a:pPr indent="0" marL="0">
+                        <a:buNone/>
+                      </a:pPr>
+                      <a:r>
+                        <a:rPr lang="en-US" sz="1100" b="1" dirty="0">
+                          <a:solidFill>
+                            <a:srgbClr val="10161F"/>
+                          </a:solidFill>
+                          <a:latin typeface="Pretendard" pitchFamily="34" charset="0"/>
+                          <a:ea typeface="Pretendard" pitchFamily="34" charset="-122"/>
+                          <a:cs typeface="Pretendard" pitchFamily="34" charset="-120"/>
+                        </a:rPr>
+                        <a:t>차입 </a:t>
+                      </a:r>
+                      <a:pPr indent="0" marL="0">
+                        <a:buNone/>
+                      </a:pPr>
+                      <a:r>
+                        <a:rPr lang="en-US" sz="1100" b="1" dirty="0">
+                          <a:solidFill>
+                            <a:srgbClr val="10161F"/>
+                          </a:solidFill>
+                          <a:latin typeface="Pretendard" pitchFamily="34" charset="0"/>
+                          <a:ea typeface="Pretendard" pitchFamily="34" charset="-122"/>
+                          <a:cs typeface="Pretendard" pitchFamily="34" charset="-120"/>
+                        </a:rPr>
+                        <a:t>(안정형)</a:t>
+                      </a:r>
+                      <a:endParaRPr lang="en-US" sz="1100" dirty="0">
+                        <a:latin typeface="Pretendard" charset="0"/>
+                        <a:ea typeface="Pretendard" charset="0"/>
+                        <a:cs typeface="Pretendard" charset="0"/>
+                      </a:endParaRPr>
+                    </a:p>
+                  </a:txBody>
+                  <a:tcPr marL="50800" marR="50800" marT="25400" marB="25400" anchor="ctr">
+                    <a:lnL w="3810" cap="flat" cmpd="sng" algn="ctr">
+                      <a:solidFill>
+                        <a:srgbClr val="CBD5E0"/>
+                      </a:solidFill>
+                      <a:prstDash val="solid"/>
+                      <a:round/>
+                      <a:headEnd type="none" w="med" len="med"/>
+                      <a:tailEnd type="none" w="med" len="med"/>
+                    </a:lnL>
+                    <a:lnR w="3810" cap="flat" cmpd="sng" algn="ctr">
+                      <a:solidFill>
+                        <a:srgbClr val="CBD5E0"/>
+                      </a:solidFill>
+                      <a:prstDash val="solid"/>
+                      <a:round/>
+                      <a:headEnd type="none" w="med" len="med"/>
+                      <a:tailEnd type="none" w="med" len="med"/>
+                    </a:lnR>
+                    <a:lnT w="3810" cap="flat" cmpd="sng" algn="ctr">
+                      <a:solidFill>
+                        <a:srgbClr val="CBD5E0"/>
+                      </a:solidFill>
+                      <a:prstDash val="solid"/>
+                      <a:round/>
+                      <a:headEnd type="none" w="med" len="med"/>
+                      <a:tailEnd type="none" w="med" len="med"/>
+                    </a:lnT>
+                    <a:lnB w="3810" cap="flat" cmpd="sng" algn="ctr">
+                      <a:solidFill>
+                        <a:srgbClr val="CBD5E0"/>
+                      </a:solidFill>
+                      <a:prstDash val="solid"/>
+                      <a:round/>
+                      <a:headEnd type="none" w="med" len="med"/>
+                      <a:tailEnd type="none" w="med" len="med"/>
+                    </a:lnB>
+                    <a:solidFill>
+                      <a:srgbClr val="F7FAFC"/>
+                    </a:solidFill>
+                  </a:tcPr>
+                </a:tc>
+                <a:tc>
+                  <a:txBody>
+                    <a:bodyPr/>
+                    <a:lstStyle/>
+                    <a:p>
+                      <a:pPr indent="0" marL="0">
+                        <a:buNone/>
+                      </a:pPr>
+                      <a:r>
+                        <a:rPr lang="en-US" sz="1100" dirty="0">
+                          <a:solidFill>
+                            <a:srgbClr val="10161F"/>
+                          </a:solidFill>
+                          <a:latin typeface="Pretendard" pitchFamily="34" charset="0"/>
+                          <a:ea typeface="Pretendard" pitchFamily="34" charset="-122"/>
+                          <a:cs typeface="Pretendard" pitchFamily="34" charset="-120"/>
+                        </a:rPr>
+                        <a:t>40%</a:t>
+                      </a:r>
+                      <a:endParaRPr lang="en-US" sz="1100" dirty="0">
+                        <a:latin typeface="Pretendard" charset="0"/>
+                        <a:ea typeface="Pretendard" charset="0"/>
+                        <a:cs typeface="Pretendard" charset="0"/>
+                      </a:endParaRPr>
+                    </a:p>
+                  </a:txBody>
+                  <a:tcPr marL="50800" marR="50800" marT="25400" marB="25400" anchor="ctr">
+                    <a:lnL w="3810" cap="flat" cmpd="sng" algn="ctr">
+                      <a:solidFill>
+                        <a:srgbClr val="CBD5E0"/>
+                      </a:solidFill>
+                      <a:prstDash val="solid"/>
+                      <a:round/>
+                      <a:headEnd type="none" w="med" len="med"/>
+                      <a:tailEnd type="none" w="med" len="med"/>
+                    </a:lnL>
+                    <a:lnR w="3810" cap="flat" cmpd="sng" algn="ctr">
+                      <a:solidFill>
+                        <a:srgbClr val="CBD5E0"/>
+                      </a:solidFill>
+                      <a:prstDash val="solid"/>
+                      <a:round/>
+                      <a:headEnd type="none" w="med" len="med"/>
+                      <a:tailEnd type="none" w="med" len="med"/>
+                    </a:lnR>
+                    <a:lnT w="3810" cap="flat" cmpd="sng" algn="ctr">
+                      <a:solidFill>
+                        <a:srgbClr val="CBD5E0"/>
+                      </a:solidFill>
+                      <a:prstDash val="solid"/>
+                      <a:round/>
+                      <a:headEnd type="none" w="med" len="med"/>
+                      <a:tailEnd type="none" w="med" len="med"/>
+                    </a:lnT>
+                    <a:lnB w="3810" cap="flat" cmpd="sng" algn="ctr">
+                      <a:solidFill>
+                        <a:srgbClr val="CBD5E0"/>
+                      </a:solidFill>
+                      <a:prstDash val="solid"/>
+                      <a:round/>
+                      <a:headEnd type="none" w="med" len="med"/>
+                      <a:tailEnd type="none" w="med" len="med"/>
+                    </a:lnB>
+                    <a:solidFill>
+                      <a:srgbClr val="F7FAFC"/>
+                    </a:solidFill>
+                  </a:tcPr>
+                </a:tc>
+                <a:tc>
+                  <a:txBody>
+                    <a:bodyPr/>
+                    <a:lstStyle/>
+                    <a:p>
+                      <a:pPr indent="0" marL="0">
+                        <a:buNone/>
+                      </a:pPr>
+                      <a:r>
+                        <a:rPr lang="en-US" sz="1100" dirty="0">
+                          <a:solidFill>
+                            <a:srgbClr val="10161F"/>
+                          </a:solidFill>
+                          <a:latin typeface="Pretendard" pitchFamily="34" charset="0"/>
+                          <a:ea typeface="Pretendard" pitchFamily="34" charset="-122"/>
+                          <a:cs typeface="Pretendard" pitchFamily="34" charset="-120"/>
+                        </a:rPr>
+                        <a:t>59.3억</a:t>
+                      </a:r>
+                      <a:endParaRPr lang="en-US" sz="1100" dirty="0">
+                        <a:latin typeface="Pretendard" charset="0"/>
+                        <a:ea typeface="Pretendard" charset="0"/>
+                        <a:cs typeface="Pretendard" charset="0"/>
+                      </a:endParaRPr>
+                    </a:p>
+                  </a:txBody>
+                  <a:tcPr marL="50800" marR="50800" marT="25400" marB="25400" anchor="ctr">
+                    <a:lnL w="3810" cap="flat" cmpd="sng" algn="ctr">
+                      <a:solidFill>
+                        <a:srgbClr val="CBD5E0"/>
+                      </a:solidFill>
+                      <a:prstDash val="solid"/>
+                      <a:round/>
+                      <a:headEnd type="none" w="med" len="med"/>
+                      <a:tailEnd type="none" w="med" len="med"/>
+                    </a:lnL>
+                    <a:lnR w="3810" cap="flat" cmpd="sng" algn="ctr">
+                      <a:solidFill>
+                        <a:srgbClr val="CBD5E0"/>
+                      </a:solidFill>
+                      <a:prstDash val="solid"/>
+                      <a:round/>
+                      <a:headEnd type="none" w="med" len="med"/>
+                      <a:tailEnd type="none" w="med" len="med"/>
+                    </a:lnR>
+                    <a:lnT w="3810" cap="flat" cmpd="sng" algn="ctr">
+                      <a:solidFill>
+                        <a:srgbClr val="CBD5E0"/>
+                      </a:solidFill>
+                      <a:prstDash val="solid"/>
+                      <a:round/>
+                      <a:headEnd type="none" w="med" len="med"/>
+                      <a:tailEnd type="none" w="med" len="med"/>
+                    </a:lnT>
+                    <a:lnB w="3810" cap="flat" cmpd="sng" algn="ctr">
+                      <a:solidFill>
+                        <a:srgbClr val="CBD5E0"/>
+                      </a:solidFill>
+                      <a:prstDash val="solid"/>
+                      <a:round/>
+                      <a:headEnd type="none" w="med" len="med"/>
+                      <a:tailEnd type="none" w="med" len="med"/>
+                    </a:lnB>
+                    <a:solidFill>
+                      <a:srgbClr val="F7FAFC"/>
+                    </a:solidFill>
+                  </a:tcPr>
+                </a:tc>
+                <a:tc>
+                  <a:txBody>
+                    <a:bodyPr/>
+                    <a:lstStyle/>
+                    <a:p>
+                      <a:pPr indent="0" marL="0">
+                        <a:buNone/>
+                      </a:pPr>
+                      <a:r>
+                        <a:rPr lang="en-US" sz="1100" dirty="0">
+                          <a:solidFill>
+                            <a:srgbClr val="10161F"/>
+                          </a:solidFill>
+                          <a:latin typeface="Pretendard" pitchFamily="34" charset="0"/>
+                          <a:ea typeface="Pretendard" pitchFamily="34" charset="-122"/>
+                          <a:cs typeface="Pretendard" pitchFamily="34" charset="-120"/>
+                        </a:rPr>
+                        <a:t>3.11%</a:t>
+                      </a:r>
+                      <a:endParaRPr lang="en-US" sz="1100" dirty="0">
+                        <a:latin typeface="Pretendard" charset="0"/>
+                        <a:ea typeface="Pretendard" charset="0"/>
+                        <a:cs typeface="Pretendard" charset="0"/>
+                      </a:endParaRPr>
+                    </a:p>
+                  </a:txBody>
+                  <a:tcPr marL="50800" marR="50800" marT="25400" marB="25400" anchor="ctr">
+                    <a:lnL w="3810" cap="flat" cmpd="sng" algn="ctr">
+                      <a:solidFill>
+                        <a:srgbClr val="CBD5E0"/>
+                      </a:solidFill>
+                      <a:prstDash val="solid"/>
+                      <a:round/>
+                      <a:headEnd type="none" w="med" len="med"/>
+                      <a:tailEnd type="none" w="med" len="med"/>
+                    </a:lnL>
+                    <a:lnR w="3810" cap="flat" cmpd="sng" algn="ctr">
+                      <a:solidFill>
+                        <a:srgbClr val="CBD5E0"/>
+                      </a:solidFill>
+                      <a:prstDash val="solid"/>
+                      <a:round/>
+                      <a:headEnd type="none" w="med" len="med"/>
+                      <a:tailEnd type="none" w="med" len="med"/>
+                    </a:lnR>
+                    <a:lnT w="3810" cap="flat" cmpd="sng" algn="ctr">
+                      <a:solidFill>
+                        <a:srgbClr val="CBD5E0"/>
+                      </a:solidFill>
+                      <a:prstDash val="solid"/>
+                      <a:round/>
+                      <a:headEnd type="none" w="med" len="med"/>
+                      <a:tailEnd type="none" w="med" len="med"/>
+                    </a:lnT>
+                    <a:lnB w="3810" cap="flat" cmpd="sng" algn="ctr">
+                      <a:solidFill>
+                        <a:srgbClr val="CBD5E0"/>
+                      </a:solidFill>
+                      <a:prstDash val="solid"/>
+                      <a:round/>
+                      <a:headEnd type="none" w="med" len="med"/>
+                      <a:tailEnd type="none" w="med" len="med"/>
+                    </a:lnB>
+                    <a:solidFill>
+                      <a:srgbClr val="F7FAFC"/>
+                    </a:solidFill>
+                  </a:tcPr>
+                </a:tc>
+              </a:tr>
+              <a:tr h="457200">
+                <a:tc>
+                  <a:txBody>
+                    <a:bodyPr/>
+                    <a:lstStyle/>
+                    <a:p>
+                      <a:pPr indent="0" marL="0">
+                        <a:buNone/>
+                      </a:pPr>
+                      <a:r>
+                        <a:rPr lang="en-US" sz="1100" b="1" dirty="0">
+                          <a:solidFill>
+                            <a:srgbClr val="10161F"/>
+                          </a:solidFill>
+                          <a:latin typeface="Pretendard" pitchFamily="34" charset="0"/>
+                          <a:ea typeface="Pretendard" pitchFamily="34" charset="-122"/>
+                          <a:cs typeface="Pretendard" pitchFamily="34" charset="-120"/>
+                        </a:rPr>
+                        <a:t>표준 </a:t>
+                      </a:r>
+                      <a:pPr indent="0" marL="0">
+                        <a:buNone/>
+                      </a:pPr>
+                      <a:r>
+                        <a:rPr lang="en-US" sz="1100" b="1" dirty="0">
+                          <a:solidFill>
+                            <a:srgbClr val="10161F"/>
+                          </a:solidFill>
+                          <a:latin typeface="Pretendard" pitchFamily="34" charset="0"/>
+                          <a:ea typeface="Pretendard" pitchFamily="34" charset="-122"/>
+                          <a:cs typeface="Pretendard" pitchFamily="34" charset="-120"/>
+                        </a:rPr>
+                        <a:t>차입 </a:t>
+                      </a:r>
+                      <a:pPr indent="0" marL="0">
+                        <a:buNone/>
+                      </a:pPr>
+                      <a:r>
+                        <a:rPr lang="en-US" sz="1100" b="1" dirty="0">
+                          <a:solidFill>
+                            <a:srgbClr val="10161F"/>
+                          </a:solidFill>
+                          <a:latin typeface="Pretendard" pitchFamily="34" charset="0"/>
+                          <a:ea typeface="Pretendard" pitchFamily="34" charset="-122"/>
+                          <a:cs typeface="Pretendard" pitchFamily="34" charset="-120"/>
+                        </a:rPr>
+                        <a:t>(기본형)</a:t>
+                      </a:r>
+                      <a:endParaRPr lang="en-US" sz="1100" dirty="0">
+                        <a:latin typeface="Pretendard" charset="0"/>
+                        <a:ea typeface="Pretendard" charset="0"/>
+                        <a:cs typeface="Pretendard" charset="0"/>
+                      </a:endParaRPr>
+                    </a:p>
+                  </a:txBody>
+                  <a:tcPr marL="50800" marR="50800" marT="25400" marB="25400" anchor="ctr">
+                    <a:lnL w="3810" cap="flat" cmpd="sng" algn="ctr">
+                      <a:solidFill>
+                        <a:srgbClr val="CBD5E0"/>
+                      </a:solidFill>
+                      <a:prstDash val="solid"/>
+                      <a:round/>
+                      <a:headEnd type="none" w="med" len="med"/>
+                      <a:tailEnd type="none" w="med" len="med"/>
+                    </a:lnL>
+                    <a:lnR w="3810" cap="flat" cmpd="sng" algn="ctr">
+                      <a:solidFill>
+                        <a:srgbClr val="CBD5E0"/>
+                      </a:solidFill>
+                      <a:prstDash val="solid"/>
+                      <a:round/>
+                      <a:headEnd type="none" w="med" len="med"/>
+                      <a:tailEnd type="none" w="med" len="med"/>
+                    </a:lnR>
+                    <a:lnT w="3810" cap="flat" cmpd="sng" algn="ctr">
+                      <a:solidFill>
+                        <a:srgbClr val="CBD5E0"/>
+                      </a:solidFill>
+                      <a:prstDash val="solid"/>
+                      <a:round/>
+                      <a:headEnd type="none" w="med" len="med"/>
+                      <a:tailEnd type="none" w="med" len="med"/>
+                    </a:lnT>
+                    <a:lnB w="3810" cap="flat" cmpd="sng" algn="ctr">
+                      <a:solidFill>
+                        <a:srgbClr val="CBD5E0"/>
+                      </a:solidFill>
+                      <a:prstDash val="solid"/>
+                      <a:round/>
+                      <a:headEnd type="none" w="med" len="med"/>
+                      <a:tailEnd type="none" w="med" len="med"/>
+                    </a:lnB>
+                    <a:solidFill>
+                      <a:srgbClr val="FFFFFF"/>
+                    </a:solidFill>
+                  </a:tcPr>
+                </a:tc>
+                <a:tc>
+                  <a:txBody>
+                    <a:bodyPr/>
+                    <a:lstStyle/>
+                    <a:p>
+                      <a:pPr indent="0" marL="0">
+                        <a:buNone/>
+                      </a:pPr>
+                      <a:r>
+                        <a:rPr lang="en-US" sz="1100" dirty="0">
+                          <a:solidFill>
+                            <a:srgbClr val="10161F"/>
+                          </a:solidFill>
+                          <a:latin typeface="Pretendard" pitchFamily="34" charset="0"/>
+                          <a:ea typeface="Pretendard" pitchFamily="34" charset="-122"/>
+                          <a:cs typeface="Pretendard" pitchFamily="34" charset="-120"/>
+                        </a:rPr>
+                        <a:t>50%</a:t>
+                      </a:r>
+                      <a:endParaRPr lang="en-US" sz="1100" dirty="0">
+                        <a:latin typeface="Pretendard" charset="0"/>
+                        <a:ea typeface="Pretendard" charset="0"/>
+                        <a:cs typeface="Pretendard" charset="0"/>
+                      </a:endParaRPr>
+                    </a:p>
+                  </a:txBody>
+                  <a:tcPr marL="50800" marR="50800" marT="25400" marB="25400" anchor="ctr">
+                    <a:lnL w="3810" cap="flat" cmpd="sng" algn="ctr">
+                      <a:solidFill>
+                        <a:srgbClr val="CBD5E0"/>
+                      </a:solidFill>
+                      <a:prstDash val="solid"/>
+                      <a:round/>
+                      <a:headEnd type="none" w="med" len="med"/>
+                      <a:tailEnd type="none" w="med" len="med"/>
+                    </a:lnL>
+                    <a:lnR w="3810" cap="flat" cmpd="sng" algn="ctr">
+                      <a:solidFill>
+                        <a:srgbClr val="CBD5E0"/>
+                      </a:solidFill>
+                      <a:prstDash val="solid"/>
+                      <a:round/>
+                      <a:headEnd type="none" w="med" len="med"/>
+                      <a:tailEnd type="none" w="med" len="med"/>
+                    </a:lnR>
+                    <a:lnT w="3810" cap="flat" cmpd="sng" algn="ctr">
+                      <a:solidFill>
+                        <a:srgbClr val="CBD5E0"/>
+                      </a:solidFill>
+                      <a:prstDash val="solid"/>
+                      <a:round/>
+                      <a:headEnd type="none" w="med" len="med"/>
+                      <a:tailEnd type="none" w="med" len="med"/>
+                    </a:lnT>
+                    <a:lnB w="3810" cap="flat" cmpd="sng" algn="ctr">
+                      <a:solidFill>
+                        <a:srgbClr val="CBD5E0"/>
+                      </a:solidFill>
+                      <a:prstDash val="solid"/>
+                      <a:round/>
+                      <a:headEnd type="none" w="med" len="med"/>
+                      <a:tailEnd type="none" w="med" len="med"/>
+                    </a:lnB>
+                    <a:solidFill>
+                      <a:srgbClr val="FFFFFF"/>
+                    </a:solidFill>
+                  </a:tcPr>
+                </a:tc>
+                <a:tc>
+                  <a:txBody>
+                    <a:bodyPr/>
+                    <a:lstStyle/>
+                    <a:p>
+                      <a:pPr indent="0" marL="0">
+                        <a:buNone/>
+                      </a:pPr>
+                      <a:r>
+                        <a:rPr lang="en-US" sz="1100" dirty="0">
+                          <a:solidFill>
+                            <a:srgbClr val="10161F"/>
+                          </a:solidFill>
+                          <a:latin typeface="Pretendard" pitchFamily="34" charset="0"/>
+                          <a:ea typeface="Pretendard" pitchFamily="34" charset="-122"/>
+                          <a:cs typeface="Pretendard" pitchFamily="34" charset="-120"/>
+                        </a:rPr>
+                        <a:t>49.5억</a:t>
+                      </a:r>
+                      <a:endParaRPr lang="en-US" sz="1100" dirty="0">
+                        <a:latin typeface="Pretendard" charset="0"/>
+                        <a:ea typeface="Pretendard" charset="0"/>
+                        <a:cs typeface="Pretendard" charset="0"/>
+                      </a:endParaRPr>
+                    </a:p>
+                  </a:txBody>
+                  <a:tcPr marL="50800" marR="50800" marT="25400" marB="25400" anchor="ctr">
+                    <a:lnL w="3810" cap="flat" cmpd="sng" algn="ctr">
+                      <a:solidFill>
+                        <a:srgbClr val="CBD5E0"/>
+                      </a:solidFill>
+                      <a:prstDash val="solid"/>
+                      <a:round/>
+                      <a:headEnd type="none" w="med" len="med"/>
+                      <a:tailEnd type="none" w="med" len="med"/>
+                    </a:lnL>
+                    <a:lnR w="3810" cap="flat" cmpd="sng" algn="ctr">
+                      <a:solidFill>
+                        <a:srgbClr val="CBD5E0"/>
+                      </a:solidFill>
+                      <a:prstDash val="solid"/>
+                      <a:round/>
+                      <a:headEnd type="none" w="med" len="med"/>
+                      <a:tailEnd type="none" w="med" len="med"/>
+                    </a:lnR>
+                    <a:lnT w="3810" cap="flat" cmpd="sng" algn="ctr">
+                      <a:solidFill>
+                        <a:srgbClr val="CBD5E0"/>
+                      </a:solidFill>
+                      <a:prstDash val="solid"/>
+                      <a:round/>
+                      <a:headEnd type="none" w="med" len="med"/>
+                      <a:tailEnd type="none" w="med" len="med"/>
+                    </a:lnT>
+                    <a:lnB w="3810" cap="flat" cmpd="sng" algn="ctr">
+                      <a:solidFill>
+                        <a:srgbClr val="CBD5E0"/>
+                      </a:solidFill>
+                      <a:prstDash val="solid"/>
+                      <a:round/>
+                      <a:headEnd type="none" w="med" len="med"/>
+                      <a:tailEnd type="none" w="med" len="med"/>
+                    </a:lnB>
+                    <a:solidFill>
+                      <a:srgbClr val="FFFFFF"/>
+                    </a:solidFill>
+                  </a:tcPr>
+                </a:tc>
+                <a:tc>
+                  <a:txBody>
+                    <a:bodyPr/>
+                    <a:lstStyle/>
+                    <a:p>
+                      <a:pPr indent="0" marL="0">
+                        <a:buNone/>
+                      </a:pPr>
+                      <a:r>
+                        <a:rPr lang="en-US" sz="1100" dirty="0">
+                          <a:solidFill>
+                            <a:srgbClr val="10161F"/>
+                          </a:solidFill>
+                          <a:latin typeface="Pretendard" pitchFamily="34" charset="0"/>
+                          <a:ea typeface="Pretendard" pitchFamily="34" charset="-122"/>
+                          <a:cs typeface="Pretendard" pitchFamily="34" charset="-120"/>
+                        </a:rPr>
+                        <a:t>2.77%</a:t>
+                      </a:r>
+                      <a:endParaRPr lang="en-US" sz="1100" dirty="0">
+                        <a:latin typeface="Pretendard" charset="0"/>
+                        <a:ea typeface="Pretendard" charset="0"/>
+                        <a:cs typeface="Pretendard" charset="0"/>
+                      </a:endParaRPr>
+                    </a:p>
+                  </a:txBody>
+                  <a:tcPr marL="50800" marR="50800" marT="25400" marB="25400" anchor="ctr">
+                    <a:lnL w="3810" cap="flat" cmpd="sng" algn="ctr">
+                      <a:solidFill>
+                        <a:srgbClr val="CBD5E0"/>
+                      </a:solidFill>
+                      <a:prstDash val="solid"/>
+                      <a:round/>
+                      <a:headEnd type="none" w="med" len="med"/>
+                      <a:tailEnd type="none" w="med" len="med"/>
+                    </a:lnL>
+                    <a:lnR w="3810" cap="flat" cmpd="sng" algn="ctr">
+                      <a:solidFill>
+                        <a:srgbClr val="CBD5E0"/>
+                      </a:solidFill>
+                      <a:prstDash val="solid"/>
+                      <a:round/>
+                      <a:headEnd type="none" w="med" len="med"/>
+                      <a:tailEnd type="none" w="med" len="med"/>
+                    </a:lnR>
+                    <a:lnT w="3810" cap="flat" cmpd="sng" algn="ctr">
+                      <a:solidFill>
+                        <a:srgbClr val="CBD5E0"/>
+                      </a:solidFill>
+                      <a:prstDash val="solid"/>
+                      <a:round/>
+                      <a:headEnd type="none" w="med" len="med"/>
+                      <a:tailEnd type="none" w="med" len="med"/>
+                    </a:lnT>
+                    <a:lnB w="3810" cap="flat" cmpd="sng" algn="ctr">
+                      <a:solidFill>
+                        <a:srgbClr val="CBD5E0"/>
+                      </a:solidFill>
+                      <a:prstDash val="solid"/>
+                      <a:round/>
+                      <a:headEnd type="none" w="med" len="med"/>
+                      <a:tailEnd type="none" w="med" len="med"/>
+                    </a:lnB>
+                    <a:solidFill>
+                      <a:srgbClr val="FFFFFF"/>
+                    </a:solidFill>
+                  </a:tcPr>
+                </a:tc>
+              </a:tr>
+              <a:tr h="457200">
+                <a:tc>
+                  <a:txBody>
+                    <a:bodyPr/>
+                    <a:lstStyle/>
+                    <a:p>
+                      <a:pPr indent="0" marL="0">
+                        <a:buNone/>
+                      </a:pPr>
+                      <a:r>
+                        <a:rPr lang="en-US" sz="1100" b="1" dirty="0">
+                          <a:solidFill>
+                            <a:srgbClr val="10161F"/>
+                          </a:solidFill>
+                          <a:latin typeface="Pretendard" pitchFamily="34" charset="0"/>
+                          <a:ea typeface="Pretendard" pitchFamily="34" charset="-122"/>
+                          <a:cs typeface="Pretendard" pitchFamily="34" charset="-120"/>
+                        </a:rPr>
+                        <a:t>적극적 </a:t>
+                      </a:r>
+                      <a:pPr indent="0" marL="0">
+                        <a:buNone/>
+                      </a:pPr>
+                      <a:r>
+                        <a:rPr lang="en-US" sz="1100" b="1" dirty="0">
+                          <a:solidFill>
+                            <a:srgbClr val="10161F"/>
+                          </a:solidFill>
+                          <a:latin typeface="Pretendard" pitchFamily="34" charset="0"/>
+                          <a:ea typeface="Pretendard" pitchFamily="34" charset="-122"/>
+                          <a:cs typeface="Pretendard" pitchFamily="34" charset="-120"/>
+                        </a:rPr>
+                        <a:t>차입 </a:t>
+                      </a:r>
+                      <a:pPr indent="0" marL="0">
+                        <a:buNone/>
+                      </a:pPr>
+                      <a:r>
+                        <a:rPr lang="en-US" sz="1100" b="1" dirty="0">
+                          <a:solidFill>
+                            <a:srgbClr val="10161F"/>
+                          </a:solidFill>
+                          <a:latin typeface="Pretendard" pitchFamily="34" charset="0"/>
+                          <a:ea typeface="Pretendard" pitchFamily="34" charset="-122"/>
+                          <a:cs typeface="Pretendard" pitchFamily="34" charset="-120"/>
+                        </a:rPr>
+                        <a:t>(레버리지)</a:t>
+                      </a:r>
+                      <a:endParaRPr lang="en-US" sz="1100" dirty="0">
+                        <a:latin typeface="Pretendard" charset="0"/>
+                        <a:ea typeface="Pretendard" charset="0"/>
+                        <a:cs typeface="Pretendard" charset="0"/>
+                      </a:endParaRPr>
+                    </a:p>
+                  </a:txBody>
+                  <a:tcPr marL="50800" marR="50800" marT="25400" marB="25400" anchor="ctr">
+                    <a:lnL w="3810" cap="flat" cmpd="sng" algn="ctr">
+                      <a:solidFill>
+                        <a:srgbClr val="CBD5E0"/>
+                      </a:solidFill>
+                      <a:prstDash val="solid"/>
+                      <a:round/>
+                      <a:headEnd type="none" w="med" len="med"/>
+                      <a:tailEnd type="none" w="med" len="med"/>
+                    </a:lnL>
+                    <a:lnR w="3810" cap="flat" cmpd="sng" algn="ctr">
+                      <a:solidFill>
+                        <a:srgbClr val="CBD5E0"/>
+                      </a:solidFill>
+                      <a:prstDash val="solid"/>
+                      <a:round/>
+                      <a:headEnd type="none" w="med" len="med"/>
+                      <a:tailEnd type="none" w="med" len="med"/>
+                    </a:lnR>
+                    <a:lnT w="3810" cap="flat" cmpd="sng" algn="ctr">
+                      <a:solidFill>
+                        <a:srgbClr val="CBD5E0"/>
+                      </a:solidFill>
+                      <a:prstDash val="solid"/>
+                      <a:round/>
+                      <a:headEnd type="none" w="med" len="med"/>
+                      <a:tailEnd type="none" w="med" len="med"/>
+                    </a:lnT>
+                    <a:lnB w="3810" cap="flat" cmpd="sng" algn="ctr">
+                      <a:solidFill>
+                        <a:srgbClr val="CBD5E0"/>
+                      </a:solidFill>
+                      <a:prstDash val="solid"/>
+                      <a:round/>
+                      <a:headEnd type="none" w="med" len="med"/>
+                      <a:tailEnd type="none" w="med" len="med"/>
+                    </a:lnB>
+                    <a:solidFill>
+                      <a:srgbClr val="F7FAFC"/>
+                    </a:solidFill>
+                  </a:tcPr>
+                </a:tc>
+                <a:tc>
+                  <a:txBody>
+                    <a:bodyPr/>
+                    <a:lstStyle/>
+                    <a:p>
+                      <a:pPr indent="0" marL="0">
+                        <a:buNone/>
+                      </a:pPr>
+                      <a:r>
+                        <a:rPr lang="en-US" sz="1100" dirty="0">
+                          <a:solidFill>
+                            <a:srgbClr val="10161F"/>
+                          </a:solidFill>
+                          <a:latin typeface="Pretendard" pitchFamily="34" charset="0"/>
+                          <a:ea typeface="Pretendard" pitchFamily="34" charset="-122"/>
+                          <a:cs typeface="Pretendard" pitchFamily="34" charset="-120"/>
+                        </a:rPr>
+                        <a:t>60%</a:t>
+                      </a:r>
+                      <a:endParaRPr lang="en-US" sz="1100" dirty="0">
+                        <a:latin typeface="Pretendard" charset="0"/>
+                        <a:ea typeface="Pretendard" charset="0"/>
+                        <a:cs typeface="Pretendard" charset="0"/>
+                      </a:endParaRPr>
+                    </a:p>
+                  </a:txBody>
+                  <a:tcPr marL="50800" marR="50800" marT="25400" marB="25400" anchor="ctr">
+                    <a:lnL w="3810" cap="flat" cmpd="sng" algn="ctr">
+                      <a:solidFill>
+                        <a:srgbClr val="CBD5E0"/>
+                      </a:solidFill>
+                      <a:prstDash val="solid"/>
+                      <a:round/>
+                      <a:headEnd type="none" w="med" len="med"/>
+                      <a:tailEnd type="none" w="med" len="med"/>
+                    </a:lnL>
+                    <a:lnR w="3810" cap="flat" cmpd="sng" algn="ctr">
+                      <a:solidFill>
+                        <a:srgbClr val="CBD5E0"/>
+                      </a:solidFill>
+                      <a:prstDash val="solid"/>
+                      <a:round/>
+                      <a:headEnd type="none" w="med" len="med"/>
+                      <a:tailEnd type="none" w="med" len="med"/>
+                    </a:lnR>
+                    <a:lnT w="3810" cap="flat" cmpd="sng" algn="ctr">
+                      <a:solidFill>
+                        <a:srgbClr val="CBD5E0"/>
+                      </a:solidFill>
+                      <a:prstDash val="solid"/>
+                      <a:round/>
+                      <a:headEnd type="none" w="med" len="med"/>
+                      <a:tailEnd type="none" w="med" len="med"/>
+                    </a:lnT>
+                    <a:lnB w="3810" cap="flat" cmpd="sng" algn="ctr">
+                      <a:solidFill>
+                        <a:srgbClr val="CBD5E0"/>
+                      </a:solidFill>
+                      <a:prstDash val="solid"/>
+                      <a:round/>
+                      <a:headEnd type="none" w="med" len="med"/>
+                      <a:tailEnd type="none" w="med" len="med"/>
+                    </a:lnB>
+                    <a:solidFill>
+                      <a:srgbClr val="F7FAFC"/>
+                    </a:solidFill>
+                  </a:tcPr>
+                </a:tc>
+                <a:tc>
+                  <a:txBody>
+                    <a:bodyPr/>
+                    <a:lstStyle/>
+                    <a:p>
+                      <a:pPr indent="0" marL="0">
+                        <a:buNone/>
+                      </a:pPr>
+                      <a:r>
+                        <a:rPr lang="en-US" sz="1100" dirty="0">
+                          <a:solidFill>
+                            <a:srgbClr val="10161F"/>
+                          </a:solidFill>
+                          <a:latin typeface="Pretendard" pitchFamily="34" charset="0"/>
+                          <a:ea typeface="Pretendard" pitchFamily="34" charset="-122"/>
+                          <a:cs typeface="Pretendard" pitchFamily="34" charset="-120"/>
+                        </a:rPr>
+                        <a:t>39.7억</a:t>
+                      </a:r>
+                      <a:endParaRPr lang="en-US" sz="1100" dirty="0">
+                        <a:latin typeface="Pretendard" charset="0"/>
+                        <a:ea typeface="Pretendard" charset="0"/>
+                        <a:cs typeface="Pretendard" charset="0"/>
+                      </a:endParaRPr>
+                    </a:p>
+                  </a:txBody>
+                  <a:tcPr marL="50800" marR="50800" marT="25400" marB="25400" anchor="ctr">
+                    <a:lnL w="3810" cap="flat" cmpd="sng" algn="ctr">
+                      <a:solidFill>
+                        <a:srgbClr val="CBD5E0"/>
+                      </a:solidFill>
+                      <a:prstDash val="solid"/>
+                      <a:round/>
+                      <a:headEnd type="none" w="med" len="med"/>
+                      <a:tailEnd type="none" w="med" len="med"/>
+                    </a:lnL>
+                    <a:lnR w="3810" cap="flat" cmpd="sng" algn="ctr">
+                      <a:solidFill>
+                        <a:srgbClr val="CBD5E0"/>
+                      </a:solidFill>
+                      <a:prstDash val="solid"/>
+                      <a:round/>
+                      <a:headEnd type="none" w="med" len="med"/>
+                      <a:tailEnd type="none" w="med" len="med"/>
+                    </a:lnR>
+                    <a:lnT w="3810" cap="flat" cmpd="sng" algn="ctr">
+                      <a:solidFill>
+                        <a:srgbClr val="CBD5E0"/>
+                      </a:solidFill>
+                      <a:prstDash val="solid"/>
+                      <a:round/>
+                      <a:headEnd type="none" w="med" len="med"/>
+                      <a:tailEnd type="none" w="med" len="med"/>
+                    </a:lnT>
+                    <a:lnB w="3810" cap="flat" cmpd="sng" algn="ctr">
+                      <a:solidFill>
+                        <a:srgbClr val="CBD5E0"/>
+                      </a:solidFill>
+                      <a:prstDash val="solid"/>
+                      <a:round/>
+                      <a:headEnd type="none" w="med" len="med"/>
+                      <a:tailEnd type="none" w="med" len="med"/>
+                    </a:lnB>
+                    <a:solidFill>
+                      <a:srgbClr val="F7FAFC"/>
+                    </a:solidFill>
+                  </a:tcPr>
+                </a:tc>
+                <a:tc>
+                  <a:txBody>
+                    <a:bodyPr/>
+                    <a:lstStyle/>
+                    <a:p>
+                      <a:pPr indent="0" marL="0">
+                        <a:buNone/>
+                      </a:pPr>
+                      <a:r>
+                        <a:rPr lang="en-US" sz="1100" dirty="0">
+                          <a:solidFill>
+                            <a:srgbClr val="10161F"/>
+                          </a:solidFill>
+                          <a:latin typeface="Pretendard" pitchFamily="34" charset="0"/>
+                          <a:ea typeface="Pretendard" pitchFamily="34" charset="-122"/>
+                          <a:cs typeface="Pretendard" pitchFamily="34" charset="-120"/>
+                        </a:rPr>
+                        <a:t>2.27%</a:t>
+                      </a:r>
+                      <a:endParaRPr lang="en-US" sz="1100" dirty="0">
+                        <a:latin typeface="Pretendard" charset="0"/>
+                        <a:ea typeface="Pretendard" charset="0"/>
+                        <a:cs typeface="Pretendard" charset="0"/>
+                      </a:endParaRPr>
+                    </a:p>
+                  </a:txBody>
+                  <a:tcPr marL="50800" marR="50800" marT="25400" marB="25400" anchor="ctr">
+                    <a:lnL w="3810" cap="flat" cmpd="sng" algn="ctr">
+                      <a:solidFill>
+                        <a:srgbClr val="CBD5E0"/>
+                      </a:solidFill>
+                      <a:prstDash val="solid"/>
+                      <a:round/>
+                      <a:headEnd type="none" w="med" len="med"/>
+                      <a:tailEnd type="none" w="med" len="med"/>
+                    </a:lnL>
+                    <a:lnR w="3810" cap="flat" cmpd="sng" algn="ctr">
+                      <a:solidFill>
+                        <a:srgbClr val="CBD5E0"/>
+                      </a:solidFill>
+                      <a:prstDash val="solid"/>
+                      <a:round/>
+                      <a:headEnd type="none" w="med" len="med"/>
+                      <a:tailEnd type="none" w="med" len="med"/>
+                    </a:lnR>
+                    <a:lnT w="3810" cap="flat" cmpd="sng" algn="ctr">
+                      <a:solidFill>
+                        <a:srgbClr val="CBD5E0"/>
+                      </a:solidFill>
+                      <a:prstDash val="solid"/>
+                      <a:round/>
+                      <a:headEnd type="none" w="med" len="med"/>
+                      <a:tailEnd type="none" w="med" len="med"/>
+                    </a:lnT>
+                    <a:lnB w="3810" cap="flat" cmpd="sng" algn="ctr">
+                      <a:solidFill>
+                        <a:srgbClr val="CBD5E0"/>
+                      </a:solidFill>
+                      <a:prstDash val="solid"/>
+                      <a:round/>
+                      <a:headEnd type="none" w="med" len="med"/>
+                      <a:tailEnd type="none" w="med" len="med"/>
+                    </a:lnB>
+                    <a:solidFill>
+                      <a:srgbClr val="F7FAFC"/>
+                    </a:solidFill>
+                  </a:tcPr>
+                </a:tc>
+              </a:tr>
+            </a:tbl>
+          </a:graphicData>
+        </a:graphic>
+      </p:graphicFrame>
+      <p:sp>
+        <p:nvSpPr>
+          <p:cNvPr id="31" name="Shape 28"/>
+          <p:cNvSpPr/>
+          <p:nvPr/>
+        </p:nvSpPr>
+        <p:spPr>
+          <a:xfrm>
+            <a:off x="6461608" y="4069080"/>
+            <a:ext cx="4934560" cy="1463040"/>
           </a:xfrm>
           <a:prstGeom prst="roundRect">
             <a:avLst>
-              <a:gd name="adj" fmla="val 2203"/>
+              <a:gd name="adj" fmla="val 3750"/>
             </a:avLst>
           </a:prstGeom>
           <a:solidFill>
-            <a:srgbClr val="F7FAFC"/>
+            <a:srgbClr val="FEEBC8"/>
           </a:solidFill>
-          <a:ln w="6350">
-            <a:solidFill>
-              <a:srgbClr val="CBD5E0"/>
-            </a:solidFill>
-            <a:prstDash val="solid"/>
-          </a:ln>
-        </p:spPr>
-      </p:sp>
-      <p:sp>
-        <p:nvSpPr>
-          <p:cNvPr id="19" name="Shape 17"/>
-          <p:cNvSpPr/>
-          <p:nvPr/>
-        </p:nvSpPr>
-        <p:spPr>
-          <a:xfrm>
-            <a:off x="6498184" y="1792224"/>
-            <a:ext cx="438912" cy="438912"/>
-          </a:xfrm>
-          <a:prstGeom prst="ellipse">
+          <a:ln/>
+        </p:spPr>
+      </p:sp>
+      <p:sp>
+        <p:nvSpPr>
+          <p:cNvPr id="32" name="Shape 29"/>
+          <p:cNvSpPr/>
+          <p:nvPr/>
+        </p:nvSpPr>
+        <p:spPr>
+          <a:xfrm>
+            <a:off x="6461608" y="4123944"/>
+            <a:ext cx="36576" cy="1353312"/>
+          </a:xfrm>
+          <a:prstGeom prst="rect">
             <a:avLst/>
           </a:prstGeom>
           <a:solidFill>
-            <a:srgbClr val="B98A2E"/>
+            <a:srgbClr val="9C4221"/>
           </a:solidFill>
           <a:ln/>
         </p:spPr>
       </p:sp>
       <p:sp>
         <p:nvSpPr>
-          <p:cNvPr id="20" name="Text 18"/>
-          <p:cNvSpPr/>
-          <p:nvPr/>
-        </p:nvSpPr>
-        <p:spPr>
-          <a:xfrm>
-            <a:off x="6498184" y="1792224"/>
-            <a:ext cx="438912" cy="438912"/>
-          </a:xfrm>
-          <a:prstGeom prst="rect">
-            <a:avLst/>
-          </a:prstGeom>
-          <a:noFill/>
-          <a:ln/>
-        </p:spPr>
-        <p:txBody>
-          <a:bodyPr wrap="square" lIns="0" tIns="0" rIns="0" bIns="0" rtlCol="0" anchor="ctr"/>
-          <a:lstStyle/>
-          <a:p>
-            <a:pPr algn="ctr" indent="0" marL="0">
-              <a:buNone/>
-            </a:pPr>
-            <a:r>
-              <a:rPr lang="en-US" sz="1400" b="1" dirty="0">
-                <a:solidFill>
-                  <a:srgbClr val="FFFFFF"/>
-                </a:solidFill>
-                <a:latin typeface="Arial" pitchFamily="34" charset="0"/>
-                <a:ea typeface="Arial" pitchFamily="34" charset="-122"/>
-                <a:cs typeface="Arial" pitchFamily="34" charset="-120"/>
-              </a:rPr>
-              <a:t>03</a:t>
-            </a:r>
-            <a:endParaRPr lang="en-US" sz="1400" dirty="0"/>
-          </a:p>
-        </p:txBody>
-      </p:sp>
-      <p:sp>
-        <p:nvSpPr>
-          <p:cNvPr id="21" name="Text 19"/>
-          <p:cNvSpPr/>
-          <p:nvPr/>
-        </p:nvSpPr>
-        <p:spPr>
-          <a:xfrm>
-            <a:off x="6498184" y="2304288"/>
-            <a:ext cx="2051228" cy="365760"/>
-          </a:xfrm>
-          <a:prstGeom prst="rect">
-            <a:avLst/>
-          </a:prstGeom>
-          <a:noFill/>
-          <a:ln/>
-        </p:spPr>
-        <p:txBody>
-          <a:bodyPr wrap="square" rtlCol="0" anchor="ctr"/>
+          <p:cNvPr id="33" name="Text 30"/>
+          <p:cNvSpPr/>
+          <p:nvPr/>
+        </p:nvSpPr>
+        <p:spPr>
+          <a:xfrm>
+            <a:off x="6644488" y="4178808"/>
+            <a:ext cx="4605376" cy="201168"/>
+          </a:xfrm>
+          <a:prstGeom prst="rect">
+            <a:avLst/>
+          </a:prstGeom>
+          <a:noFill/>
+          <a:ln/>
+        </p:spPr>
+        <p:txBody>
+          <a:bodyPr wrap="square" lIns="0" tIns="0" rIns="0" bIns="0" rtlCol="0" anchor="ctr"/>
           <a:lstStyle/>
           <a:p>
             <a:pPr indent="0" marL="0">
               <a:buNone/>
             </a:pPr>
             <a:r>
-              <a:rPr lang="en-US" sz="1600" b="1" dirty="0">
+              <a:rPr lang="en-US" sz="1050" b="1" dirty="0">
+                <a:solidFill>
+                  <a:srgbClr val="9C4221"/>
+                </a:solidFill>
+                <a:latin typeface="Pretendard" pitchFamily="34" charset="0"/>
+                <a:ea typeface="Pretendard" pitchFamily="34" charset="-122"/>
+                <a:cs typeface="Pretendard" pitchFamily="34" charset="-120"/>
+              </a:rPr>
+              <a:t>역레버리지 유의 구간</a:t>
+            </a:r>
+            <a:endParaRPr lang="en-US" sz="1050" dirty="0"/>
+          </a:p>
+        </p:txBody>
+      </p:sp>
+      <p:sp>
+        <p:nvSpPr>
+          <p:cNvPr id="34" name="Text 31"/>
+          <p:cNvSpPr/>
+          <p:nvPr/>
+        </p:nvSpPr>
+        <p:spPr>
+          <a:xfrm>
+            <a:off x="6644488" y="4398264"/>
+            <a:ext cx="4605376" cy="1060704"/>
+          </a:xfrm>
+          <a:prstGeom prst="rect">
+            <a:avLst/>
+          </a:prstGeom>
+          <a:noFill/>
+          <a:ln/>
+        </p:spPr>
+        <p:txBody>
+          <a:bodyPr wrap="square" lIns="0" tIns="0" rIns="0" bIns="0" rtlCol="0" anchor="t"/>
+          <a:lstStyle/>
+          <a:p>
+            <a:pPr indent="0" marL="0">
+              <a:lnSpc>
+                <a:spcPct val="120000"/>
+              </a:lnSpc>
+              <a:buNone/>
+            </a:pPr>
+            <a:r>
+              <a:rPr lang="en-US" sz="930" dirty="0">
                 <a:solidFill>
                   <a:srgbClr val="10161F"/>
                 </a:solidFill>
@@ -8532,243 +13265,15 @@
                 <a:ea typeface="Pretendard" pitchFamily="34" charset="-122"/>
                 <a:cs typeface="Pretendard" pitchFamily="34" charset="-120"/>
               </a:rPr>
-              <a:t>3단계</a:t>
-            </a:r>
-            <a:endParaRPr lang="en-US" sz="1600" dirty="0"/>
-          </a:p>
-        </p:txBody>
-      </p:sp>
-      <p:sp>
-        <p:nvSpPr>
-          <p:cNvPr id="22" name="Text 20"/>
-          <p:cNvSpPr/>
-          <p:nvPr/>
-        </p:nvSpPr>
-        <p:spPr>
-          <a:xfrm>
-            <a:off x="6498184" y="2761488"/>
-            <a:ext cx="2051228" cy="1828800"/>
-          </a:xfrm>
-          <a:prstGeom prst="rect">
-            <a:avLst/>
-          </a:prstGeom>
-          <a:noFill/>
-          <a:ln/>
-        </p:spPr>
-        <p:txBody>
-          <a:bodyPr wrap="square" rtlCol="0" anchor="t"/>
-          <a:lstStyle/>
-          <a:p>
-            <a:pPr indent="0" marL="0">
-              <a:buNone/>
-            </a:pPr>
-            <a:r>
-              <a:rPr lang="en-US" sz="1100" dirty="0">
-                <a:solidFill>
-                  <a:srgbClr val="10161F"/>
-                </a:solidFill>
-                <a:latin typeface="Pretendard" pitchFamily="34" charset="0"/>
-                <a:ea typeface="Pretendard" pitchFamily="34" charset="-122"/>
-                <a:cs typeface="Pretendard" pitchFamily="34" charset="-120"/>
-              </a:rPr>
-              <a:t>현장 실사 일정 조율 → 건물 컨디션 및 설비 직접 확인</a:t>
-            </a:r>
-            <a:endParaRPr lang="en-US" sz="1100" dirty="0"/>
-          </a:p>
-        </p:txBody>
-      </p:sp>
-      <p:sp>
-        <p:nvSpPr>
-          <p:cNvPr id="23" name="Shape 21"/>
-          <p:cNvSpPr/>
-          <p:nvPr/>
-        </p:nvSpPr>
-        <p:spPr>
-          <a:xfrm>
-            <a:off x="8860307" y="3035808"/>
-            <a:ext cx="182880" cy="274320"/>
-          </a:xfrm>
-          <a:prstGeom prst="rightArrow">
-            <a:avLst/>
-          </a:prstGeom>
-          <a:solidFill>
-            <a:srgbClr val="CBD5E0"/>
-          </a:solidFill>
-          <a:ln w="6350">
-            <a:solidFill>
-              <a:srgbClr val="718096"/>
-            </a:solidFill>
-            <a:prstDash val="solid"/>
-          </a:ln>
-        </p:spPr>
-      </p:sp>
-      <p:sp>
-        <p:nvSpPr>
-          <p:cNvPr id="24" name="Shape 22"/>
-          <p:cNvSpPr/>
-          <p:nvPr/>
-        </p:nvSpPr>
-        <p:spPr>
-          <a:xfrm>
-            <a:off x="9134627" y="1572768"/>
-            <a:ext cx="2490140" cy="3200400"/>
-          </a:xfrm>
-          <a:prstGeom prst="roundRect">
-            <a:avLst>
-              <a:gd name="adj" fmla="val 2203"/>
-            </a:avLst>
-          </a:prstGeom>
-          <a:solidFill>
-            <a:srgbClr val="F7FAFC"/>
-          </a:solidFill>
-          <a:ln w="6350">
-            <a:solidFill>
-              <a:srgbClr val="CBD5E0"/>
-            </a:solidFill>
-            <a:prstDash val="solid"/>
-          </a:ln>
-        </p:spPr>
-      </p:sp>
-      <p:sp>
-        <p:nvSpPr>
-          <p:cNvPr id="25" name="Shape 23"/>
-          <p:cNvSpPr/>
-          <p:nvPr/>
-        </p:nvSpPr>
-        <p:spPr>
-          <a:xfrm>
-            <a:off x="9354083" y="1792224"/>
-            <a:ext cx="438912" cy="438912"/>
-          </a:xfrm>
-          <a:prstGeom prst="ellipse">
-            <a:avLst/>
-          </a:prstGeom>
-          <a:solidFill>
-            <a:srgbClr val="B98A2E"/>
-          </a:solidFill>
-          <a:ln/>
-        </p:spPr>
-      </p:sp>
-      <p:sp>
-        <p:nvSpPr>
-          <p:cNvPr id="26" name="Text 24"/>
-          <p:cNvSpPr/>
-          <p:nvPr/>
-        </p:nvSpPr>
-        <p:spPr>
-          <a:xfrm>
-            <a:off x="9354083" y="1792224"/>
-            <a:ext cx="438912" cy="438912"/>
-          </a:xfrm>
-          <a:prstGeom prst="rect">
-            <a:avLst/>
-          </a:prstGeom>
-          <a:noFill/>
-          <a:ln/>
-        </p:spPr>
-        <p:txBody>
-          <a:bodyPr wrap="square" lIns="0" tIns="0" rIns="0" bIns="0" rtlCol="0" anchor="ctr"/>
-          <a:lstStyle/>
-          <a:p>
-            <a:pPr algn="ctr" indent="0" marL="0">
-              <a:buNone/>
-            </a:pPr>
-            <a:r>
-              <a:rPr lang="en-US" sz="1400" b="1" dirty="0">
-                <a:solidFill>
-                  <a:srgbClr val="FFFFFF"/>
-                </a:solidFill>
-                <a:latin typeface="Arial" pitchFamily="34" charset="0"/>
-                <a:ea typeface="Arial" pitchFamily="34" charset="-122"/>
-                <a:cs typeface="Arial" pitchFamily="34" charset="-120"/>
-              </a:rPr>
-              <a:t>04</a:t>
-            </a:r>
-            <a:endParaRPr lang="en-US" sz="1400" dirty="0"/>
-          </a:p>
-        </p:txBody>
-      </p:sp>
-      <p:sp>
-        <p:nvSpPr>
-          <p:cNvPr id="27" name="Text 25"/>
-          <p:cNvSpPr/>
-          <p:nvPr/>
-        </p:nvSpPr>
-        <p:spPr>
-          <a:xfrm>
-            <a:off x="9354083" y="2304288"/>
-            <a:ext cx="2051228" cy="365760"/>
-          </a:xfrm>
-          <a:prstGeom prst="rect">
-            <a:avLst/>
-          </a:prstGeom>
-          <a:noFill/>
-          <a:ln/>
-        </p:spPr>
-        <p:txBody>
-          <a:bodyPr wrap="square" rtlCol="0" anchor="ctr"/>
-          <a:lstStyle/>
-          <a:p>
-            <a:pPr indent="0" marL="0">
-              <a:buNone/>
-            </a:pPr>
-            <a:r>
-              <a:rPr lang="en-US" sz="1600" b="1" dirty="0">
-                <a:solidFill>
-                  <a:srgbClr val="10161F"/>
-                </a:solidFill>
-                <a:latin typeface="Pretendard" pitchFamily="34" charset="0"/>
-                <a:ea typeface="Pretendard" pitchFamily="34" charset="-122"/>
-                <a:cs typeface="Pretendard" pitchFamily="34" charset="-120"/>
-              </a:rPr>
-              <a:t>4단계</a:t>
-            </a:r>
-            <a:endParaRPr lang="en-US" sz="1600" dirty="0"/>
-          </a:p>
-        </p:txBody>
-      </p:sp>
-      <p:sp>
-        <p:nvSpPr>
-          <p:cNvPr id="28" name="Text 26"/>
-          <p:cNvSpPr/>
-          <p:nvPr/>
-        </p:nvSpPr>
-        <p:spPr>
-          <a:xfrm>
-            <a:off x="9354083" y="2761488"/>
-            <a:ext cx="2051228" cy="1828800"/>
-          </a:xfrm>
-          <a:prstGeom prst="rect">
-            <a:avLst/>
-          </a:prstGeom>
-          <a:noFill/>
-          <a:ln/>
-        </p:spPr>
-        <p:txBody>
-          <a:bodyPr wrap="square" rtlCol="0" anchor="t"/>
-          <a:lstStyle/>
-          <a:p>
-            <a:pPr indent="0" marL="0">
-              <a:buNone/>
-            </a:pPr>
-            <a:r>
-              <a:rPr lang="en-US" sz="1100" dirty="0">
-                <a:solidFill>
-                  <a:srgbClr val="10161F"/>
-                </a:solidFill>
-                <a:latin typeface="Pretendard" pitchFamily="34" charset="0"/>
-                <a:ea typeface="Pretendard" pitchFamily="34" charset="-122"/>
-                <a:cs typeface="Pretendard" pitchFamily="34" charset="-120"/>
-              </a:rPr>
-              <a:t>LOI(투자의향서) 제출 → 가격 협의 개시</a:t>
-            </a:r>
-            <a:endParaRPr lang="en-US" sz="1100" dirty="0"/>
-          </a:p>
-        </p:txBody>
-      </p:sp>
-      <p:sp>
-        <p:nvSpPr>
-          <p:cNvPr id="29" name="Text 27"/>
+              <a:t>차입 금리가 자산 총수익률을 상회하여 대출 실행 시 자기자본수익률이 하락할 수 있습니다. 에쿼티 비중 확대를 권장합니다.</a:t>
+            </a:r>
+            <a:endParaRPr lang="en-US" sz="930" dirty="0"/>
+          </a:p>
+        </p:txBody>
+      </p:sp>
+      <p:sp>
+        <p:nvSpPr>
+          <p:cNvPr id="35" name="Text 32"/>
           <p:cNvSpPr/>
           <p:nvPr/>
         </p:nvSpPr>
@@ -8807,7 +13312,7 @@
       </p:sp>
       <p:sp>
         <p:nvSpPr>
-          <p:cNvPr id="30" name="Text 28"/>
+          <p:cNvPr id="36" name="Text 33"/>
           <p:cNvSpPr/>
           <p:nvPr/>
         </p:nvSpPr>
